--- a/a7/packages/A7 Unit 4 - Solving Problems with Rational Numbers/Lessons/4.01/A7 4.01 Adding and Subtracting in Scientific Notation - Slides.pptx
+++ b/a7/packages/A7 Unit 4 - Solving Problems with Rational Numbers/Lessons/4.01/A7 4.01 Adding and Subtracting in Scientific Notation - Slides.pptx
@@ -3129,7 +3129,7 @@
         </p:nvSpPr>
         <p:spPr>
           <a:xfrm>
-            <a:off x="777240" y="1691640"/>
+            <a:off x="777240" y="2148840"/>
             <a:ext cx="10607040" cy="347472"/>
           </a:xfrm>
           <a:prstGeom prst="rect">
@@ -3164,7 +3164,7 @@
         </p:nvSpPr>
         <p:spPr>
           <a:xfrm>
-            <a:off x="777240" y="2048256"/>
+            <a:off x="777240" y="2505456"/>
             <a:ext cx="10607040" cy="1005840"/>
           </a:xfrm>
           <a:prstGeom prst="rect">
@@ -3199,7 +3199,7 @@
         </p:nvCxnSpPr>
         <p:spPr>
           <a:xfrm>
-            <a:off x="3291840" y="3255264"/>
+            <a:off x="3291840" y="3712464"/>
             <a:ext cx="5577840" cy="0"/>
           </a:xfrm>
           <a:prstGeom prst="line">
@@ -3234,7 +3234,7 @@
         </p:nvCxnSpPr>
         <p:spPr>
           <a:xfrm>
-            <a:off x="3291840" y="3337560"/>
+            <a:off x="3291840" y="3794760"/>
             <a:ext cx="5577840" cy="0"/>
           </a:xfrm>
           <a:prstGeom prst="line">
@@ -3269,7 +3269,7 @@
         </p:nvSpPr>
         <p:spPr>
           <a:xfrm>
-            <a:off x="777240" y="3502152"/>
+            <a:off x="777240" y="3959352"/>
             <a:ext cx="10607040" cy="310896"/>
           </a:xfrm>
           <a:prstGeom prst="rect">
@@ -3304,7 +3304,7 @@
         </p:nvSpPr>
         <p:spPr>
           <a:xfrm>
-            <a:off x="777240" y="3840480"/>
+            <a:off x="777240" y="4297680"/>
             <a:ext cx="10607040" cy="731520"/>
           </a:xfrm>
           <a:prstGeom prst="rect">
@@ -3327,129 +3327,13 @@
                 <a:latin typeface="Century Schoolbook"/>
               </a:rPr>
               <a:t>I can add and subtract two numbers written in scientific notation, and write the answer in scientific notation.</a:t>
-            </a:r>
-          </a:p>
-        </p:txBody>
-      </p:sp>
-      <p:sp>
-        <p:nvSpPr>
-          <p:cNvPr id="8" name="Rectangle 7"/>
-          <p:cNvSpPr/>
-          <p:nvPr/>
-        </p:nvSpPr>
-        <p:spPr>
-          <a:xfrm>
-            <a:off x="2377440" y="4736592"/>
-            <a:ext cx="7406640" cy="1051560"/>
-          </a:xfrm>
-          <a:prstGeom prst="rect">
-            <a:avLst/>
-          </a:prstGeom>
-          <a:solidFill>
-            <a:srgbClr val="F2F2F0"/>
-          </a:solidFill>
-          <a:ln w="9525">
-            <a:solidFill>
-              <a:srgbClr val="BFBFBF"/>
-            </a:solidFill>
-          </a:ln>
-          <a:effectLst/>
-        </p:spPr>
-        <p:style>
-          <a:lnRef idx="1">
-            <a:schemeClr val="accent1"/>
-          </a:lnRef>
-          <a:fillRef idx="3">
-            <a:schemeClr val="accent1"/>
-          </a:fillRef>
-          <a:effectRef idx="2">
-            <a:schemeClr val="accent1"/>
-          </a:effectRef>
-          <a:fontRef idx="minor">
-            <a:schemeClr val="lt1"/>
-          </a:fontRef>
-        </p:style>
-        <p:txBody>
-          <a:bodyPr rtlCol="0" anchor="ctr"/>
-          <a:lstStyle/>
-          <a:p>
-            <a:pPr algn="ctr"/>
-          </a:p>
-        </p:txBody>
-      </p:sp>
-      <p:sp>
-        <p:nvSpPr>
-          <p:cNvPr id="9" name="TextBox 8"/>
-          <p:cNvSpPr txBox="1"/>
-          <p:nvPr/>
-        </p:nvSpPr>
-        <p:spPr>
-          <a:xfrm>
-            <a:off x="2606040" y="4892040"/>
-            <a:ext cx="6949440" cy="365760"/>
-          </a:xfrm>
-          <a:prstGeom prst="rect">
-            <a:avLst/>
-          </a:prstGeom>
-          <a:noFill/>
-        </p:spPr>
-        <p:txBody>
-          <a:bodyPr wrap="square" lIns="45720" rIns="45720" tIns="18288" bIns="18288" anchor="t">
-            <a:spAutoFit/>
-          </a:bodyPr>
-          <a:lstStyle/>
-          <a:p>
-            <a:pPr algn="ctr"/>
-            <a:r>
-              <a:rPr sz="1700" b="0" i="1">
-                <a:solidFill>
-                  <a:srgbClr val="6B6B6B"/>
-                </a:solidFill>
-                <a:latin typeface="Century Schoolbook"/>
-              </a:rPr>
-              <a:t>Last unit you learned to write numbers in scientific notation.</a:t>
-            </a:r>
-          </a:p>
-        </p:txBody>
-      </p:sp>
-      <p:sp>
-        <p:nvSpPr>
-          <p:cNvPr id="10" name="TextBox 9"/>
-          <p:cNvSpPr txBox="1"/>
-          <p:nvPr/>
-        </p:nvSpPr>
-        <p:spPr>
-          <a:xfrm>
-            <a:off x="2606040" y="5276088"/>
-            <a:ext cx="6949440" cy="365760"/>
-          </a:xfrm>
-          <a:prstGeom prst="rect">
-            <a:avLst/>
-          </a:prstGeom>
-          <a:noFill/>
-        </p:spPr>
-        <p:txBody>
-          <a:bodyPr wrap="square" lIns="45720" rIns="45720" tIns="18288" bIns="18288" anchor="t">
-            <a:spAutoFit/>
-          </a:bodyPr>
-          <a:lstStyle/>
-          <a:p>
-            <a:pPr algn="ctr"/>
-            <a:r>
-              <a:rPr sz="1700" b="1" i="0">
-                <a:solidFill>
-                  <a:srgbClr val="1A1A1A"/>
-                </a:solidFill>
-                <a:latin typeface="Century Schoolbook"/>
-              </a:rPr>
-              <a:t>Today you add and subtract them — the powers must match.</a:t>
             </a:r>
           </a:p>
         </p:txBody>
       </p:sp>
       <p:cxnSp>
         <p:nvCxnSpPr>
-          <p:cNvPr id="11" name="Connector 10"/>
+          <p:cNvPr id="8" name="Connector 7"/>
           <p:cNvCxnSpPr/>
           <p:nvPr/>
         </p:nvCxnSpPr>
@@ -3484,7 +3368,7 @@
       </p:cxnSp>
       <p:sp>
         <p:nvSpPr>
-          <p:cNvPr id="12" name="TextBox 11"/>
+          <p:cNvPr id="9" name="TextBox 8"/>
           <p:cNvSpPr txBox="1"/>
           <p:nvPr/>
         </p:nvSpPr>
@@ -3519,7 +3403,7 @@
       </p:sp>
       <p:sp>
         <p:nvSpPr>
-          <p:cNvPr id="13" name="TextBox 12"/>
+          <p:cNvPr id="10" name="TextBox 9"/>
           <p:cNvSpPr txBox="1"/>
           <p:nvPr/>
         </p:nvSpPr>
@@ -3675,44 +3559,9 @@
           </a:fontRef>
         </p:style>
       </p:cxnSp>
-      <p:sp>
-        <p:nvSpPr>
-          <p:cNvPr id="5" name="TextBox 4"/>
-          <p:cNvSpPr txBox="1"/>
-          <p:nvPr/>
-        </p:nvSpPr>
-        <p:spPr>
-          <a:xfrm>
-            <a:off x="777240" y="1261872"/>
-            <a:ext cx="10607040" cy="310896"/>
-          </a:xfrm>
-          <a:prstGeom prst="rect">
-            <a:avLst/>
-          </a:prstGeom>
-          <a:noFill/>
-        </p:spPr>
-        <p:txBody>
-          <a:bodyPr wrap="square" lIns="45720" rIns="45720" tIns="18288" bIns="18288" anchor="t">
-            <a:spAutoFit/>
-          </a:bodyPr>
-          <a:lstStyle/>
-          <a:p>
-            <a:pPr algn="l"/>
-            <a:r>
-              <a:rPr sz="1700" b="0" i="1">
-                <a:solidFill>
-                  <a:srgbClr val="6B6B6B"/>
-                </a:solidFill>
-                <a:latin typeface="Century Schoolbook"/>
-              </a:rPr>
-              <a:t>Answer.</a:t>
-            </a:r>
-          </a:p>
-        </p:txBody>
-      </p:sp>
       <p:cxnSp>
         <p:nvCxnSpPr>
-          <p:cNvPr id="6" name="Connector 5"/>
+          <p:cNvPr id="5" name="Connector 4"/>
           <p:cNvCxnSpPr/>
           <p:nvPr/>
         </p:nvCxnSpPr>
@@ -3747,7 +3596,7 @@
       </p:cxnSp>
       <p:sp>
         <p:nvSpPr>
-          <p:cNvPr id="7" name="TextBox 6"/>
+          <p:cNvPr id="6" name="TextBox 5"/>
           <p:cNvSpPr txBox="1"/>
           <p:nvPr/>
         </p:nvSpPr>
@@ -3782,7 +3631,7 @@
       </p:sp>
       <p:sp>
         <p:nvSpPr>
-          <p:cNvPr id="8" name="TextBox 7"/>
+          <p:cNvPr id="7" name="TextBox 6"/>
           <p:cNvSpPr txBox="1"/>
           <p:nvPr/>
         </p:nvSpPr>
@@ -3817,7 +3666,7 @@
       </p:sp>
       <p:pic>
         <p:nvPicPr>
-          <p:cNvPr id="9" name="Picture 8" descr="dab37c3d4cb37ab4.png"/>
+          <p:cNvPr id="8" name="Picture 7" descr="dab37c3d4cb37ab4.png"/>
           <p:cNvPicPr>
             <a:picLocks noChangeAspect="1"/>
           </p:cNvPicPr>
@@ -3841,60 +3690,42 @@
       </p:pic>
       <p:sp>
         <p:nvSpPr>
+          <p:cNvPr id="9" name="TextBox 8"/>
+          <p:cNvSpPr txBox="1"/>
+          <p:nvPr/>
+        </p:nvSpPr>
+        <p:spPr>
+          <a:xfrm>
+            <a:off x="777240" y="3212592"/>
+            <a:ext cx="10607040" cy="429370"/>
+          </a:xfrm>
+          <a:prstGeom prst="rect">
+            <a:avLst/>
+          </a:prstGeom>
+          <a:noFill/>
+        </p:spPr>
+        <p:txBody>
+          <a:bodyPr wrap="square" lIns="45720" rIns="45720" tIns="18288" bIns="18288" anchor="t">
+            <a:spAutoFit/>
+          </a:bodyPr>
+          <a:lstStyle/>
+          <a:p>
+            <a:pPr algn="ctr"/>
+            <a:r>
+              <a:rPr sz="2400" b="1" i="0">
+                <a:solidFill>
+                  <a:srgbClr val="1A1A1A"/>
+                </a:solidFill>
+                <a:latin typeface="Century Schoolbook"/>
+              </a:rPr>
+              <a:t>Add. Write the answer in scientific notation.</a:t>
+            </a:r>
+          </a:p>
+        </p:txBody>
+      </p:sp>
+      <p:sp>
+        <p:nvSpPr>
           <p:cNvPr id="10" name="TextBox 9"/>
-          <p:cNvSpPr txBox="1"/>
-          <p:nvPr/>
-        </p:nvSpPr>
-        <p:spPr>
-          <a:xfrm>
-            <a:off x="777240" y="3029712"/>
-            <a:ext cx="10607040" cy="429370"/>
-          </a:xfrm>
-          <a:prstGeom prst="rect">
-            <a:avLst/>
-          </a:prstGeom>
-          <a:noFill/>
-        </p:spPr>
-        <p:txBody>
-          <a:bodyPr wrap="square" lIns="45720" rIns="45720" tIns="18288" bIns="18288" anchor="t">
-            <a:spAutoFit/>
-          </a:bodyPr>
-          <a:lstStyle/>
-          <a:p>
-            <a:pPr algn="ctr"/>
-            <a:r>
-              <a:rPr sz="2400" b="0" i="0">
-                <a:solidFill>
-                  <a:srgbClr val="6B6B6B"/>
-                </a:solidFill>
-                <a:latin typeface="Century Schoolbook"/>
-              </a:rPr>
-              <a:t>12.3 × 10</a:t>
-            </a:r>
-            <a:r>
-              <a:rPr sz="2400" b="0" i="0" baseline="30000">
-                <a:solidFill>
-                  <a:srgbClr val="6B6B6B"/>
-                </a:solidFill>
-                <a:latin typeface="Century Schoolbook"/>
-              </a:rPr>
-              <a:t>-3</a:t>
-            </a:r>
-            <a:r>
-              <a:rPr sz="2400" b="0" i="0">
-                <a:solidFill>
-                  <a:srgbClr val="6B6B6B"/>
-                </a:solidFill>
-                <a:latin typeface="Century Schoolbook"/>
-              </a:rPr>
-              <a:t>, then repair</a:t>
-            </a:r>
-          </a:p>
-        </p:txBody>
-      </p:sp>
-      <p:sp>
-        <p:nvSpPr>
-          <p:cNvPr id="11" name="TextBox 10"/>
           <p:cNvSpPr txBox="1"/>
           <p:nvPr/>
         </p:nvSpPr>
@@ -4059,44 +3890,9 @@
           </a:fontRef>
         </p:style>
       </p:cxnSp>
-      <p:sp>
-        <p:nvSpPr>
-          <p:cNvPr id="5" name="TextBox 4"/>
-          <p:cNvSpPr txBox="1"/>
-          <p:nvPr/>
-        </p:nvSpPr>
-        <p:spPr>
-          <a:xfrm>
-            <a:off x="777240" y="1261872"/>
-            <a:ext cx="10607040" cy="310896"/>
-          </a:xfrm>
-          <a:prstGeom prst="rect">
-            <a:avLst/>
-          </a:prstGeom>
-          <a:noFill/>
-        </p:spPr>
-        <p:txBody>
-          <a:bodyPr wrap="square" lIns="45720" rIns="45720" tIns="18288" bIns="18288" anchor="t">
-            <a:spAutoFit/>
-          </a:bodyPr>
-          <a:lstStyle/>
-          <a:p>
-            <a:pPr algn="l"/>
-            <a:r>
-              <a:rPr sz="1700" b="0" i="1">
-                <a:solidFill>
-                  <a:srgbClr val="6B6B6B"/>
-                </a:solidFill>
-                <a:latin typeface="Century Schoolbook"/>
-              </a:rPr>
-              <a:t>Different powers, and a subtraction.</a:t>
-            </a:r>
-          </a:p>
-        </p:txBody>
-      </p:sp>
       <p:cxnSp>
         <p:nvCxnSpPr>
-          <p:cNvPr id="6" name="Connector 5"/>
+          <p:cNvPr id="5" name="Connector 4"/>
           <p:cNvCxnSpPr/>
           <p:nvPr/>
         </p:nvCxnSpPr>
@@ -4131,7 +3927,7 @@
       </p:cxnSp>
       <p:sp>
         <p:nvSpPr>
-          <p:cNvPr id="7" name="TextBox 6"/>
+          <p:cNvPr id="6" name="TextBox 5"/>
           <p:cNvSpPr txBox="1"/>
           <p:nvPr/>
         </p:nvSpPr>
@@ -4166,7 +3962,7 @@
       </p:sp>
       <p:sp>
         <p:nvSpPr>
-          <p:cNvPr id="8" name="TextBox 7"/>
+          <p:cNvPr id="7" name="TextBox 6"/>
           <p:cNvSpPr txBox="1"/>
           <p:nvPr/>
         </p:nvSpPr>
@@ -4201,7 +3997,7 @@
       </p:sp>
       <p:pic>
         <p:nvPicPr>
-          <p:cNvPr id="9" name="Picture 8" descr="4549981a84cc89c2.png"/>
+          <p:cNvPr id="8" name="Picture 7" descr="4549981a84cc89c2.png"/>
           <p:cNvPicPr>
             <a:picLocks noChangeAspect="1"/>
           </p:cNvPicPr>
@@ -4225,7 +4021,7 @@
       </p:pic>
       <p:sp>
         <p:nvSpPr>
-          <p:cNvPr id="10" name="TextBox 9"/>
+          <p:cNvPr id="9" name="TextBox 8"/>
           <p:cNvSpPr txBox="1"/>
           <p:nvPr/>
         </p:nvSpPr>
@@ -4381,44 +4177,9 @@
           </a:fontRef>
         </p:style>
       </p:cxnSp>
-      <p:sp>
-        <p:nvSpPr>
-          <p:cNvPr id="5" name="TextBox 4"/>
-          <p:cNvSpPr txBox="1"/>
-          <p:nvPr/>
-        </p:nvSpPr>
-        <p:spPr>
-          <a:xfrm>
-            <a:off x="777240" y="1261872"/>
-            <a:ext cx="10607040" cy="310896"/>
-          </a:xfrm>
-          <a:prstGeom prst="rect">
-            <a:avLst/>
-          </a:prstGeom>
-          <a:noFill/>
-        </p:spPr>
-        <p:txBody>
-          <a:bodyPr wrap="square" lIns="45720" rIns="45720" tIns="18288" bIns="18288" anchor="t">
-            <a:spAutoFit/>
-          </a:bodyPr>
-          <a:lstStyle/>
-          <a:p>
-            <a:pPr algn="l"/>
-            <a:r>
-              <a:rPr sz="1700" b="0" i="1">
-                <a:solidFill>
-                  <a:srgbClr val="6B6B6B"/>
-                </a:solidFill>
-                <a:latin typeface="Century Schoolbook"/>
-              </a:rPr>
-              <a:t>Worked.</a:t>
-            </a:r>
-          </a:p>
-        </p:txBody>
-      </p:sp>
       <p:cxnSp>
         <p:nvCxnSpPr>
-          <p:cNvPr id="6" name="Connector 5"/>
+          <p:cNvPr id="5" name="Connector 4"/>
           <p:cNvCxnSpPr/>
           <p:nvPr/>
         </p:nvCxnSpPr>
@@ -4453,7 +4214,7 @@
       </p:cxnSp>
       <p:sp>
         <p:nvSpPr>
-          <p:cNvPr id="7" name="TextBox 6"/>
+          <p:cNvPr id="6" name="TextBox 5"/>
           <p:cNvSpPr txBox="1"/>
           <p:nvPr/>
         </p:nvSpPr>
@@ -4488,7 +4249,7 @@
       </p:sp>
       <p:sp>
         <p:nvSpPr>
-          <p:cNvPr id="8" name="TextBox 7"/>
+          <p:cNvPr id="7" name="TextBox 6"/>
           <p:cNvSpPr txBox="1"/>
           <p:nvPr/>
         </p:nvSpPr>
@@ -4523,7 +4284,7 @@
       </p:sp>
       <p:pic>
         <p:nvPicPr>
-          <p:cNvPr id="9" name="Picture 8" descr="0ba903ac78fff37b.png"/>
+          <p:cNvPr id="8" name="Picture 7" descr="0ba903ac78fff37b.png"/>
           <p:cNvPicPr>
             <a:picLocks noChangeAspect="1"/>
           </p:cNvPicPr>
@@ -4545,53 +4306,9 @@
           </a:prstGeom>
         </p:spPr>
       </p:pic>
-      <p:sp>
-        <p:nvSpPr>
-          <p:cNvPr id="10" name="TextBox 9"/>
-          <p:cNvSpPr txBox="1"/>
-          <p:nvPr/>
-        </p:nvSpPr>
-        <p:spPr>
-          <a:xfrm>
-            <a:off x="5769864" y="1868424"/>
-            <a:ext cx="5614415" cy="502920"/>
-          </a:xfrm>
-          <a:prstGeom prst="rect">
-            <a:avLst/>
-          </a:prstGeom>
-          <a:noFill/>
-        </p:spPr>
-        <p:txBody>
-          <a:bodyPr wrap="square" lIns="45720" rIns="45720" tIns="18288" bIns="18288" anchor="ctr">
-            <a:spAutoFit/>
-          </a:bodyPr>
-          <a:lstStyle/>
-          <a:p>
-            <a:pPr algn="l"/>
-            <a:r>
-              <a:rPr sz="2100" b="0" i="1">
-                <a:solidFill>
-                  <a:srgbClr val="6B6B6B"/>
-                </a:solidFill>
-                <a:latin typeface="Century Schoolbook"/>
-              </a:rPr>
-              <a:t>rewrite over 10</a:t>
-            </a:r>
-            <a:r>
-              <a:rPr sz="2100" b="0" i="1" baseline="30000">
-                <a:solidFill>
-                  <a:srgbClr val="6B6B6B"/>
-                </a:solidFill>
-                <a:latin typeface="Century Schoolbook"/>
-              </a:rPr>
-              <a:t>6</a:t>
-            </a:r>
-          </a:p>
-        </p:txBody>
-      </p:sp>
       <p:pic>
         <p:nvPicPr>
-          <p:cNvPr id="11" name="Picture 10" descr="aed5738787927d4f.png"/>
+          <p:cNvPr id="9" name="Picture 8" descr="aed5738787927d4f.png"/>
           <p:cNvPicPr>
             <a:picLocks noChangeAspect="1"/>
           </p:cNvPicPr>
@@ -4613,44 +4330,9 @@
           </a:prstGeom>
         </p:spPr>
       </p:pic>
-      <p:sp>
-        <p:nvSpPr>
-          <p:cNvPr id="12" name="TextBox 11"/>
-          <p:cNvSpPr txBox="1"/>
-          <p:nvPr/>
-        </p:nvSpPr>
-        <p:spPr>
-          <a:xfrm>
-            <a:off x="8357616" y="2525268"/>
-            <a:ext cx="3026663" cy="502920"/>
-          </a:xfrm>
-          <a:prstGeom prst="rect">
-            <a:avLst/>
-          </a:prstGeom>
-          <a:noFill/>
-        </p:spPr>
-        <p:txBody>
-          <a:bodyPr wrap="square" lIns="45720" rIns="45720" tIns="18288" bIns="18288" anchor="ctr">
-            <a:spAutoFit/>
-          </a:bodyPr>
-          <a:lstStyle/>
-          <a:p>
-            <a:pPr algn="l"/>
-            <a:r>
-              <a:rPr sz="2100" b="0" i="1">
-                <a:solidFill>
-                  <a:srgbClr val="6B6B6B"/>
-                </a:solidFill>
-                <a:latin typeface="Century Schoolbook"/>
-              </a:rPr>
-              <a:t>same power: subtract the coefficients</a:t>
-            </a:r>
-          </a:p>
-        </p:txBody>
-      </p:sp>
       <p:pic>
         <p:nvPicPr>
-          <p:cNvPr id="13" name="Picture 12" descr="7c3a73d2cb750c41.png"/>
+          <p:cNvPr id="10" name="Picture 9" descr="7c3a73d2cb750c41.png"/>
           <p:cNvPicPr>
             <a:picLocks noChangeAspect="1"/>
           </p:cNvPicPr>
@@ -4674,42 +4356,7 @@
       </p:pic>
       <p:sp>
         <p:nvSpPr>
-          <p:cNvPr id="14" name="TextBox 13"/>
-          <p:cNvSpPr txBox="1"/>
-          <p:nvPr/>
-        </p:nvSpPr>
-        <p:spPr>
-          <a:xfrm>
-            <a:off x="7635240" y="3174492"/>
-            <a:ext cx="3749039" cy="502920"/>
-          </a:xfrm>
-          <a:prstGeom prst="rect">
-            <a:avLst/>
-          </a:prstGeom>
-          <a:noFill/>
-        </p:spPr>
-        <p:txBody>
-          <a:bodyPr wrap="square" lIns="45720" rIns="45720" tIns="18288" bIns="18288" anchor="ctr">
-            <a:spAutoFit/>
-          </a:bodyPr>
-          <a:lstStyle/>
-          <a:p>
-            <a:pPr algn="l"/>
-            <a:r>
-              <a:rPr sz="2100" b="0" i="1">
-                <a:solidFill>
-                  <a:srgbClr val="6B6B6B"/>
-                </a:solidFill>
-                <a:latin typeface="Century Schoolbook"/>
-              </a:rPr>
-              <a:t>check in standard form</a:t>
-            </a:r>
-          </a:p>
-        </p:txBody>
-      </p:sp>
-      <p:sp>
-        <p:nvSpPr>
-          <p:cNvPr id="15" name="TextBox 14"/>
+          <p:cNvPr id="11" name="TextBox 10"/>
           <p:cNvSpPr txBox="1"/>
           <p:nvPr/>
         </p:nvSpPr>
@@ -4874,44 +4521,9 @@
           </a:fontRef>
         </p:style>
       </p:cxnSp>
-      <p:sp>
-        <p:nvSpPr>
-          <p:cNvPr id="5" name="TextBox 4"/>
-          <p:cNvSpPr txBox="1"/>
-          <p:nvPr/>
-        </p:nvSpPr>
-        <p:spPr>
-          <a:xfrm>
-            <a:off x="777240" y="1261872"/>
-            <a:ext cx="10607040" cy="310896"/>
-          </a:xfrm>
-          <a:prstGeom prst="rect">
-            <a:avLst/>
-          </a:prstGeom>
-          <a:noFill/>
-        </p:spPr>
-        <p:txBody>
-          <a:bodyPr wrap="square" lIns="45720" rIns="45720" tIns="18288" bIns="18288" anchor="t">
-            <a:spAutoFit/>
-          </a:bodyPr>
-          <a:lstStyle/>
-          <a:p>
-            <a:pPr algn="l"/>
-            <a:r>
-              <a:rPr sz="1700" b="0" i="1">
-                <a:solidFill>
-                  <a:srgbClr val="6B6B6B"/>
-                </a:solidFill>
-                <a:latin typeface="Century Schoolbook"/>
-              </a:rPr>
-              <a:t>Same steps, your numbers. Boards up when done.</a:t>
-            </a:r>
-          </a:p>
-        </p:txBody>
-      </p:sp>
       <p:cxnSp>
         <p:nvCxnSpPr>
-          <p:cNvPr id="6" name="Connector 5"/>
+          <p:cNvPr id="5" name="Connector 4"/>
           <p:cNvCxnSpPr/>
           <p:nvPr/>
         </p:nvCxnSpPr>
@@ -4946,7 +4558,7 @@
       </p:cxnSp>
       <p:sp>
         <p:nvSpPr>
-          <p:cNvPr id="7" name="TextBox 6"/>
+          <p:cNvPr id="6" name="TextBox 5"/>
           <p:cNvSpPr txBox="1"/>
           <p:nvPr/>
         </p:nvSpPr>
@@ -4981,7 +4593,7 @@
       </p:sp>
       <p:sp>
         <p:nvSpPr>
-          <p:cNvPr id="8" name="TextBox 7"/>
+          <p:cNvPr id="7" name="TextBox 6"/>
           <p:cNvSpPr txBox="1"/>
           <p:nvPr/>
         </p:nvSpPr>
@@ -5016,7 +4628,7 @@
       </p:sp>
       <p:pic>
         <p:nvPicPr>
-          <p:cNvPr id="9" name="Picture 8" descr="e4f0a8415ed56967.png"/>
+          <p:cNvPr id="8" name="Picture 7" descr="e4f0a8415ed56967.png"/>
           <p:cNvPicPr>
             <a:picLocks noChangeAspect="1"/>
           </p:cNvPicPr>
@@ -5038,6 +4650,41 @@
           </a:prstGeom>
         </p:spPr>
       </p:pic>
+      <p:sp>
+        <p:nvSpPr>
+          <p:cNvPr id="9" name="TextBox 8"/>
+          <p:cNvSpPr txBox="1"/>
+          <p:nvPr/>
+        </p:nvSpPr>
+        <p:spPr>
+          <a:xfrm>
+            <a:off x="777240" y="3215640"/>
+            <a:ext cx="10607040" cy="429370"/>
+          </a:xfrm>
+          <a:prstGeom prst="rect">
+            <a:avLst/>
+          </a:prstGeom>
+          <a:noFill/>
+        </p:spPr>
+        <p:txBody>
+          <a:bodyPr wrap="square" lIns="45720" rIns="45720" tIns="18288" bIns="18288" anchor="t">
+            <a:spAutoFit/>
+          </a:bodyPr>
+          <a:lstStyle/>
+          <a:p>
+            <a:pPr algn="ctr"/>
+            <a:r>
+              <a:rPr sz="2400" b="1" i="0">
+                <a:solidFill>
+                  <a:srgbClr val="1A1A1A"/>
+                </a:solidFill>
+                <a:latin typeface="Century Schoolbook"/>
+              </a:rPr>
+              <a:t>Subtract. Write the answer in scientific notation.</a:t>
+            </a:r>
+          </a:p>
+        </p:txBody>
+      </p:sp>
     </p:spTree>
   </p:cSld>
   <p:clrMapOvr>
@@ -5161,44 +4808,9 @@
           </a:fontRef>
         </p:style>
       </p:cxnSp>
-      <p:sp>
-        <p:nvSpPr>
-          <p:cNvPr id="5" name="TextBox 4"/>
-          <p:cNvSpPr txBox="1"/>
-          <p:nvPr/>
-        </p:nvSpPr>
-        <p:spPr>
-          <a:xfrm>
-            <a:off x="777240" y="1261872"/>
-            <a:ext cx="10607040" cy="310896"/>
-          </a:xfrm>
-          <a:prstGeom prst="rect">
-            <a:avLst/>
-          </a:prstGeom>
-          <a:noFill/>
-        </p:spPr>
-        <p:txBody>
-          <a:bodyPr wrap="square" lIns="45720" rIns="45720" tIns="18288" bIns="18288" anchor="t">
-            <a:spAutoFit/>
-          </a:bodyPr>
-          <a:lstStyle/>
-          <a:p>
-            <a:pPr algn="l"/>
-            <a:r>
-              <a:rPr sz="1700" b="0" i="1">
-                <a:solidFill>
-                  <a:srgbClr val="6B6B6B"/>
-                </a:solidFill>
-                <a:latin typeface="Century Schoolbook"/>
-              </a:rPr>
-              <a:t>Answer.</a:t>
-            </a:r>
-          </a:p>
-        </p:txBody>
-      </p:sp>
       <p:cxnSp>
         <p:nvCxnSpPr>
-          <p:cNvPr id="6" name="Connector 5"/>
+          <p:cNvPr id="5" name="Connector 4"/>
           <p:cNvCxnSpPr/>
           <p:nvPr/>
         </p:nvCxnSpPr>
@@ -5233,7 +4845,7 @@
       </p:cxnSp>
       <p:sp>
         <p:nvSpPr>
-          <p:cNvPr id="7" name="TextBox 6"/>
+          <p:cNvPr id="6" name="TextBox 5"/>
           <p:cNvSpPr txBox="1"/>
           <p:nvPr/>
         </p:nvSpPr>
@@ -5268,7 +4880,7 @@
       </p:sp>
       <p:sp>
         <p:nvSpPr>
-          <p:cNvPr id="8" name="TextBox 7"/>
+          <p:cNvPr id="7" name="TextBox 6"/>
           <p:cNvSpPr txBox="1"/>
           <p:nvPr/>
         </p:nvSpPr>
@@ -5303,7 +4915,7 @@
       </p:sp>
       <p:pic>
         <p:nvPicPr>
-          <p:cNvPr id="9" name="Picture 8" descr="6ee0cf26c6675aa8.png"/>
+          <p:cNvPr id="8" name="Picture 7" descr="6ee0cf26c6675aa8.png"/>
           <p:cNvPicPr>
             <a:picLocks noChangeAspect="1"/>
           </p:cNvPicPr>
@@ -5327,69 +4939,42 @@
       </p:pic>
       <p:sp>
         <p:nvSpPr>
+          <p:cNvPr id="9" name="TextBox 8"/>
+          <p:cNvSpPr txBox="1"/>
+          <p:nvPr/>
+        </p:nvSpPr>
+        <p:spPr>
+          <a:xfrm>
+            <a:off x="777240" y="3218688"/>
+            <a:ext cx="10607040" cy="429370"/>
+          </a:xfrm>
+          <a:prstGeom prst="rect">
+            <a:avLst/>
+          </a:prstGeom>
+          <a:noFill/>
+        </p:spPr>
+        <p:txBody>
+          <a:bodyPr wrap="square" lIns="45720" rIns="45720" tIns="18288" bIns="18288" anchor="t">
+            <a:spAutoFit/>
+          </a:bodyPr>
+          <a:lstStyle/>
+          <a:p>
+            <a:pPr algn="ctr"/>
+            <a:r>
+              <a:rPr sz="2400" b="1" i="0">
+                <a:solidFill>
+                  <a:srgbClr val="1A1A1A"/>
+                </a:solidFill>
+                <a:latin typeface="Century Schoolbook"/>
+              </a:rPr>
+              <a:t>Subtract. Write the answer in scientific notation.</a:t>
+            </a:r>
+          </a:p>
+        </p:txBody>
+      </p:sp>
+      <p:sp>
+        <p:nvSpPr>
           <p:cNvPr id="10" name="TextBox 9"/>
-          <p:cNvSpPr txBox="1"/>
-          <p:nvPr/>
-        </p:nvSpPr>
-        <p:spPr>
-          <a:xfrm>
-            <a:off x="777240" y="3035808"/>
-            <a:ext cx="10607040" cy="429370"/>
-          </a:xfrm>
-          <a:prstGeom prst="rect">
-            <a:avLst/>
-          </a:prstGeom>
-          <a:noFill/>
-        </p:spPr>
-        <p:txBody>
-          <a:bodyPr wrap="square" lIns="45720" rIns="45720" tIns="18288" bIns="18288" anchor="t">
-            <a:spAutoFit/>
-          </a:bodyPr>
-          <a:lstStyle/>
-          <a:p>
-            <a:pPr algn="ctr"/>
-            <a:r>
-              <a:rPr sz="2400" b="0" i="0">
-                <a:solidFill>
-                  <a:srgbClr val="6B6B6B"/>
-                </a:solidFill>
-                <a:latin typeface="Century Schoolbook"/>
-              </a:rPr>
-              <a:t>0.09 × 10</a:t>
-            </a:r>
-            <a:r>
-              <a:rPr sz="2400" b="0" i="0" baseline="30000">
-                <a:solidFill>
-                  <a:srgbClr val="6B6B6B"/>
-                </a:solidFill>
-                <a:latin typeface="Century Schoolbook"/>
-              </a:rPr>
-              <a:t>-4</a:t>
-            </a:r>
-            <a:r>
-              <a:rPr sz="2400" b="0" i="0">
-                <a:solidFill>
-                  <a:srgbClr val="6B6B6B"/>
-                </a:solidFill>
-                <a:latin typeface="Century Schoolbook"/>
-              </a:rPr>
-              <a:t> comes off 5.6 × 10</a:t>
-            </a:r>
-            <a:r>
-              <a:rPr sz="2400" b="0" i="0" baseline="30000">
-                <a:solidFill>
-                  <a:srgbClr val="6B6B6B"/>
-                </a:solidFill>
-                <a:latin typeface="Century Schoolbook"/>
-              </a:rPr>
-              <a:t>-4</a:t>
-            </a:r>
-          </a:p>
-        </p:txBody>
-      </p:sp>
-      <p:sp>
-        <p:nvSpPr>
-          <p:cNvPr id="11" name="TextBox 10"/>
           <p:cNvSpPr txBox="1"/>
           <p:nvPr/>
         </p:nvSpPr>
@@ -5554,44 +5139,9 @@
           </a:fontRef>
         </p:style>
       </p:cxnSp>
-      <p:sp>
-        <p:nvSpPr>
-          <p:cNvPr id="5" name="TextBox 4"/>
-          <p:cNvSpPr txBox="1"/>
-          <p:nvPr/>
-        </p:nvSpPr>
-        <p:spPr>
-          <a:xfrm>
-            <a:off x="777240" y="1261872"/>
-            <a:ext cx="10607040" cy="310896"/>
-          </a:xfrm>
-          <a:prstGeom prst="rect">
-            <a:avLst/>
-          </a:prstGeom>
-          <a:noFill/>
-        </p:spPr>
-        <p:txBody>
-          <a:bodyPr wrap="square" lIns="45720" rIns="45720" tIns="18288" bIns="18288" anchor="t">
-            <a:spAutoFit/>
-          </a:bodyPr>
-          <a:lstStyle/>
-          <a:p>
-            <a:pPr algn="l"/>
-            <a:r>
-              <a:rPr sz="1700" b="0" i="1">
-                <a:solidFill>
-                  <a:srgbClr val="6B6B6B"/>
-                </a:solidFill>
-                <a:latin typeface="Century Schoolbook"/>
-              </a:rPr>
-              <a:t>Boards up on three.</a:t>
-            </a:r>
-          </a:p>
-        </p:txBody>
-      </p:sp>
       <p:cxnSp>
         <p:nvCxnSpPr>
-          <p:cNvPr id="6" name="Connector 5"/>
+          <p:cNvPr id="5" name="Connector 4"/>
           <p:cNvCxnSpPr/>
           <p:nvPr/>
         </p:nvCxnSpPr>
@@ -5626,7 +5176,7 @@
       </p:cxnSp>
       <p:sp>
         <p:nvSpPr>
-          <p:cNvPr id="7" name="TextBox 6"/>
+          <p:cNvPr id="6" name="TextBox 5"/>
           <p:cNvSpPr txBox="1"/>
           <p:nvPr/>
         </p:nvSpPr>
@@ -5661,7 +5211,7 @@
       </p:sp>
       <p:sp>
         <p:nvSpPr>
-          <p:cNvPr id="8" name="TextBox 7"/>
+          <p:cNvPr id="7" name="TextBox 6"/>
           <p:cNvSpPr txBox="1"/>
           <p:nvPr/>
         </p:nvSpPr>
@@ -5696,7 +5246,7 @@
       </p:sp>
       <p:pic>
         <p:nvPicPr>
-          <p:cNvPr id="9" name="Picture 8" descr="3cd7ad48ef74b5a3.png"/>
+          <p:cNvPr id="8" name="Picture 7" descr="3cd7ad48ef74b5a3.png"/>
           <p:cNvPicPr>
             <a:picLocks noChangeAspect="1"/>
           </p:cNvPicPr>
@@ -5720,7 +5270,7 @@
       </p:pic>
       <p:sp>
         <p:nvSpPr>
-          <p:cNvPr id="10" name="TextBox 9"/>
+          <p:cNvPr id="9" name="TextBox 8"/>
           <p:cNvSpPr txBox="1"/>
           <p:nvPr/>
         </p:nvSpPr>
@@ -5749,41 +5299,6 @@
                 <a:latin typeface="Century Schoolbook"/>
               </a:rPr>
               <a:t>Answer it.</a:t>
-            </a:r>
-          </a:p>
-        </p:txBody>
-      </p:sp>
-      <p:sp>
-        <p:nvSpPr>
-          <p:cNvPr id="11" name="TextBox 10"/>
-          <p:cNvSpPr txBox="1"/>
-          <p:nvPr/>
-        </p:nvSpPr>
-        <p:spPr>
-          <a:xfrm>
-            <a:off x="777240" y="4828032"/>
-            <a:ext cx="10607040" cy="365760"/>
-          </a:xfrm>
-          <a:prstGeom prst="rect">
-            <a:avLst/>
-          </a:prstGeom>
-          <a:noFill/>
-        </p:spPr>
-        <p:txBody>
-          <a:bodyPr wrap="square" lIns="45720" rIns="45720" tIns="18288" bIns="18288" anchor="t">
-            <a:spAutoFit/>
-          </a:bodyPr>
-          <a:lstStyle/>
-          <a:p>
-            <a:pPr algn="ctr"/>
-            <a:r>
-              <a:rPr sz="1900" b="0" i="1">
-                <a:solidFill>
-                  <a:srgbClr val="6B6B6B"/>
-                </a:solidFill>
-                <a:latin typeface="Century Schoolbook"/>
-              </a:rPr>
-              <a:t>Same power.</a:t>
             </a:r>
           </a:p>
         </p:txBody>
@@ -5911,44 +5426,9 @@
           </a:fontRef>
         </p:style>
       </p:cxnSp>
-      <p:sp>
-        <p:nvSpPr>
-          <p:cNvPr id="5" name="TextBox 4"/>
-          <p:cNvSpPr txBox="1"/>
-          <p:nvPr/>
-        </p:nvSpPr>
-        <p:spPr>
-          <a:xfrm>
-            <a:off x="777240" y="1261872"/>
-            <a:ext cx="10607040" cy="310896"/>
-          </a:xfrm>
-          <a:prstGeom prst="rect">
-            <a:avLst/>
-          </a:prstGeom>
-          <a:noFill/>
-        </p:spPr>
-        <p:txBody>
-          <a:bodyPr wrap="square" lIns="45720" rIns="45720" tIns="18288" bIns="18288" anchor="t">
-            <a:spAutoFit/>
-          </a:bodyPr>
-          <a:lstStyle/>
-          <a:p>
-            <a:pPr algn="l"/>
-            <a:r>
-              <a:rPr sz="1700" b="0" i="1">
-                <a:solidFill>
-                  <a:srgbClr val="6B6B6B"/>
-                </a:solidFill>
-                <a:latin typeface="Century Schoolbook"/>
-              </a:rPr>
-              <a:t>Answer.</a:t>
-            </a:r>
-          </a:p>
-        </p:txBody>
-      </p:sp>
       <p:cxnSp>
         <p:nvCxnSpPr>
-          <p:cNvPr id="6" name="Connector 5"/>
+          <p:cNvPr id="5" name="Connector 4"/>
           <p:cNvCxnSpPr/>
           <p:nvPr/>
         </p:nvCxnSpPr>
@@ -5983,7 +5463,7 @@
       </p:cxnSp>
       <p:sp>
         <p:nvSpPr>
-          <p:cNvPr id="7" name="TextBox 6"/>
+          <p:cNvPr id="6" name="TextBox 5"/>
           <p:cNvSpPr txBox="1"/>
           <p:nvPr/>
         </p:nvSpPr>
@@ -6018,7 +5498,7 @@
       </p:sp>
       <p:sp>
         <p:nvSpPr>
-          <p:cNvPr id="8" name="TextBox 7"/>
+          <p:cNvPr id="7" name="TextBox 6"/>
           <p:cNvSpPr txBox="1"/>
           <p:nvPr/>
         </p:nvSpPr>
@@ -6053,7 +5533,7 @@
       </p:sp>
       <p:pic>
         <p:nvPicPr>
-          <p:cNvPr id="9" name="Picture 8" descr="2e4a44f0bcfa9379.png"/>
+          <p:cNvPr id="8" name="Picture 7" descr="2e4a44f0bcfa9379.png"/>
           <p:cNvPicPr>
             <a:picLocks noChangeAspect="1"/>
           </p:cNvPicPr>
@@ -6077,42 +5557,7 @@
       </p:pic>
       <p:sp>
         <p:nvSpPr>
-          <p:cNvPr id="10" name="TextBox 9"/>
-          <p:cNvSpPr txBox="1"/>
-          <p:nvPr/>
-        </p:nvSpPr>
-        <p:spPr>
-          <a:xfrm>
-            <a:off x="1828800" y="2834639"/>
-            <a:ext cx="8503920" cy="548640"/>
-          </a:xfrm>
-          <a:prstGeom prst="rect">
-            <a:avLst/>
-          </a:prstGeom>
-          <a:noFill/>
-        </p:spPr>
-        <p:txBody>
-          <a:bodyPr wrap="square" lIns="45720" rIns="45720" tIns="18288" bIns="18288" anchor="t">
-            <a:spAutoFit/>
-          </a:bodyPr>
-          <a:lstStyle/>
-          <a:p>
-            <a:pPr algn="ctr"/>
-            <a:r>
-              <a:rPr sz="2400" b="0" i="0">
-                <a:solidFill>
-                  <a:srgbClr val="6B6B6B"/>
-                </a:solidFill>
-                <a:latin typeface="Century Schoolbook"/>
-              </a:rPr>
-              <a:t>add the coefficients</a:t>
-            </a:r>
-          </a:p>
-        </p:txBody>
-      </p:sp>
-      <p:sp>
-        <p:nvSpPr>
-          <p:cNvPr id="11" name="TextBox 10"/>
+          <p:cNvPr id="9" name="TextBox 8"/>
           <p:cNvSpPr txBox="1"/>
           <p:nvPr/>
         </p:nvSpPr>
@@ -6277,44 +5722,9 @@
           </a:fontRef>
         </p:style>
       </p:cxnSp>
-      <p:sp>
-        <p:nvSpPr>
-          <p:cNvPr id="5" name="TextBox 4"/>
-          <p:cNvSpPr txBox="1"/>
-          <p:nvPr/>
-        </p:nvSpPr>
-        <p:spPr>
-          <a:xfrm>
-            <a:off x="777240" y="1261872"/>
-            <a:ext cx="10607040" cy="310896"/>
-          </a:xfrm>
-          <a:prstGeom prst="rect">
-            <a:avLst/>
-          </a:prstGeom>
-          <a:noFill/>
-        </p:spPr>
-        <p:txBody>
-          <a:bodyPr wrap="square" lIns="45720" rIns="45720" tIns="18288" bIns="18288" anchor="t">
-            <a:spAutoFit/>
-          </a:bodyPr>
-          <a:lstStyle/>
-          <a:p>
-            <a:pPr algn="l"/>
-            <a:r>
-              <a:rPr sz="1700" b="0" i="1">
-                <a:solidFill>
-                  <a:srgbClr val="6B6B6B"/>
-                </a:solidFill>
-                <a:latin typeface="Century Schoolbook"/>
-              </a:rPr>
-              <a:t>Boards up on three.</a:t>
-            </a:r>
-          </a:p>
-        </p:txBody>
-      </p:sp>
       <p:cxnSp>
         <p:nvCxnSpPr>
-          <p:cNvPr id="6" name="Connector 5"/>
+          <p:cNvPr id="5" name="Connector 4"/>
           <p:cNvCxnSpPr/>
           <p:nvPr/>
         </p:nvCxnSpPr>
@@ -6349,7 +5759,7 @@
       </p:cxnSp>
       <p:sp>
         <p:nvSpPr>
-          <p:cNvPr id="7" name="TextBox 6"/>
+          <p:cNvPr id="6" name="TextBox 5"/>
           <p:cNvSpPr txBox="1"/>
           <p:nvPr/>
         </p:nvSpPr>
@@ -6384,7 +5794,7 @@
       </p:sp>
       <p:sp>
         <p:nvSpPr>
-          <p:cNvPr id="8" name="TextBox 7"/>
+          <p:cNvPr id="7" name="TextBox 6"/>
           <p:cNvSpPr txBox="1"/>
           <p:nvPr/>
         </p:nvSpPr>
@@ -6419,7 +5829,7 @@
       </p:sp>
       <p:sp>
         <p:nvSpPr>
-          <p:cNvPr id="9" name="TextBox 8"/>
+          <p:cNvPr id="8" name="TextBox 7"/>
           <p:cNvSpPr txBox="1"/>
           <p:nvPr/>
         </p:nvSpPr>
@@ -6454,7 +5864,7 @@
       </p:sp>
       <p:pic>
         <p:nvPicPr>
-          <p:cNvPr id="10" name="Picture 9" descr="3a4ce939f4597d0f.png"/>
+          <p:cNvPr id="9" name="Picture 8" descr="3a4ce939f4597d0f.png"/>
           <p:cNvPicPr>
             <a:picLocks noChangeAspect="1"/>
           </p:cNvPicPr>
@@ -6478,7 +5888,7 @@
       </p:pic>
       <p:sp>
         <p:nvSpPr>
-          <p:cNvPr id="11" name="TextBox 10"/>
+          <p:cNvPr id="10" name="TextBox 9"/>
           <p:cNvSpPr txBox="1"/>
           <p:nvPr/>
         </p:nvSpPr>
@@ -6513,7 +5923,7 @@
       </p:sp>
       <p:sp>
         <p:nvSpPr>
-          <p:cNvPr id="12" name="TextBox 11"/>
+          <p:cNvPr id="11" name="TextBox 10"/>
           <p:cNvSpPr txBox="1"/>
           <p:nvPr/>
         </p:nvSpPr>
@@ -6548,7 +5958,7 @@
       </p:sp>
       <p:pic>
         <p:nvPicPr>
-          <p:cNvPr id="13" name="Picture 12" descr="cf4775b41686db4b.png"/>
+          <p:cNvPr id="12" name="Picture 11" descr="cf4775b41686db4b.png"/>
           <p:cNvPicPr>
             <a:picLocks noChangeAspect="1"/>
           </p:cNvPicPr>
@@ -6572,7 +5982,7 @@
       </p:pic>
       <p:sp>
         <p:nvSpPr>
-          <p:cNvPr id="14" name="TextBox 13"/>
+          <p:cNvPr id="13" name="TextBox 12"/>
           <p:cNvSpPr txBox="1"/>
           <p:nvPr/>
         </p:nvSpPr>
@@ -6607,7 +6017,7 @@
       </p:sp>
       <p:sp>
         <p:nvSpPr>
-          <p:cNvPr id="15" name="TextBox 14"/>
+          <p:cNvPr id="14" name="TextBox 13"/>
           <p:cNvSpPr txBox="1"/>
           <p:nvPr/>
         </p:nvSpPr>
@@ -6642,7 +6052,7 @@
       </p:sp>
       <p:sp>
         <p:nvSpPr>
-          <p:cNvPr id="16" name="TextBox 15"/>
+          <p:cNvPr id="15" name="TextBox 14"/>
           <p:cNvSpPr txBox="1"/>
           <p:nvPr/>
         </p:nvSpPr>
@@ -6798,44 +6208,9 @@
           </a:fontRef>
         </p:style>
       </p:cxnSp>
-      <p:sp>
-        <p:nvSpPr>
-          <p:cNvPr id="5" name="TextBox 4"/>
-          <p:cNvSpPr txBox="1"/>
-          <p:nvPr/>
-        </p:nvSpPr>
-        <p:spPr>
-          <a:xfrm>
-            <a:off x="777240" y="1261872"/>
-            <a:ext cx="10607040" cy="310896"/>
-          </a:xfrm>
-          <a:prstGeom prst="rect">
-            <a:avLst/>
-          </a:prstGeom>
-          <a:noFill/>
-        </p:spPr>
-        <p:txBody>
-          <a:bodyPr wrap="square" lIns="45720" rIns="45720" tIns="18288" bIns="18288" anchor="t">
-            <a:spAutoFit/>
-          </a:bodyPr>
-          <a:lstStyle/>
-          <a:p>
-            <a:pPr algn="l"/>
-            <a:r>
-              <a:rPr sz="1700" b="0" i="1">
-                <a:solidFill>
-                  <a:srgbClr val="6B6B6B"/>
-                </a:solidFill>
-                <a:latin typeface="Century Schoolbook"/>
-              </a:rPr>
-              <a:t>Answer.</a:t>
-            </a:r>
-          </a:p>
-        </p:txBody>
-      </p:sp>
       <p:cxnSp>
         <p:nvCxnSpPr>
-          <p:cNvPr id="6" name="Connector 5"/>
+          <p:cNvPr id="5" name="Connector 4"/>
           <p:cNvCxnSpPr/>
           <p:nvPr/>
         </p:nvCxnSpPr>
@@ -6870,7 +6245,7 @@
       </p:cxnSp>
       <p:sp>
         <p:nvSpPr>
-          <p:cNvPr id="7" name="TextBox 6"/>
+          <p:cNvPr id="6" name="TextBox 5"/>
           <p:cNvSpPr txBox="1"/>
           <p:nvPr/>
         </p:nvSpPr>
@@ -6905,7 +6280,7 @@
       </p:sp>
       <p:sp>
         <p:nvSpPr>
-          <p:cNvPr id="8" name="TextBox 7"/>
+          <p:cNvPr id="7" name="TextBox 6"/>
           <p:cNvSpPr txBox="1"/>
           <p:nvPr/>
         </p:nvSpPr>
@@ -6940,7 +6315,7 @@
       </p:sp>
       <p:sp>
         <p:nvSpPr>
-          <p:cNvPr id="9" name="TextBox 8"/>
+          <p:cNvPr id="8" name="TextBox 7"/>
           <p:cNvSpPr txBox="1"/>
           <p:nvPr/>
         </p:nvSpPr>
@@ -6975,7 +6350,7 @@
       </p:sp>
       <p:pic>
         <p:nvPicPr>
-          <p:cNvPr id="10" name="Picture 9" descr="6c4bcb516da5e5c0.png"/>
+          <p:cNvPr id="9" name="Picture 8" descr="6c4bcb516da5e5c0.png"/>
           <p:cNvPicPr>
             <a:picLocks noChangeAspect="1"/>
           </p:cNvPicPr>
@@ -6999,7 +6374,7 @@
       </p:pic>
       <p:sp>
         <p:nvSpPr>
-          <p:cNvPr id="11" name="TextBox 10"/>
+          <p:cNvPr id="10" name="TextBox 9"/>
           <p:cNvSpPr txBox="1"/>
           <p:nvPr/>
         </p:nvSpPr>
@@ -7034,7 +6409,7 @@
       </p:sp>
       <p:sp>
         <p:nvSpPr>
-          <p:cNvPr id="12" name="TextBox 11"/>
+          <p:cNvPr id="11" name="TextBox 10"/>
           <p:cNvSpPr txBox="1"/>
           <p:nvPr/>
         </p:nvSpPr>
@@ -7069,7 +6444,7 @@
       </p:sp>
       <p:pic>
         <p:nvPicPr>
-          <p:cNvPr id="13" name="Picture 12" descr="959b0ab7310b422a.png"/>
+          <p:cNvPr id="12" name="Picture 11" descr="959b0ab7310b422a.png"/>
           <p:cNvPicPr>
             <a:picLocks noChangeAspect="1"/>
           </p:cNvPicPr>
@@ -7093,7 +6468,7 @@
       </p:pic>
       <p:sp>
         <p:nvSpPr>
-          <p:cNvPr id="14" name="TextBox 13"/>
+          <p:cNvPr id="13" name="TextBox 12"/>
           <p:cNvSpPr txBox="1"/>
           <p:nvPr/>
         </p:nvSpPr>
@@ -7128,7 +6503,7 @@
       </p:sp>
       <p:sp>
         <p:nvSpPr>
-          <p:cNvPr id="15" name="TextBox 14"/>
+          <p:cNvPr id="14" name="TextBox 13"/>
           <p:cNvSpPr txBox="1"/>
           <p:nvPr/>
         </p:nvSpPr>
@@ -7163,42 +6538,7 @@
       </p:sp>
       <p:sp>
         <p:nvSpPr>
-          <p:cNvPr id="16" name="TextBox 15"/>
-          <p:cNvSpPr txBox="1"/>
-          <p:nvPr/>
-        </p:nvSpPr>
-        <p:spPr>
-          <a:xfrm>
-            <a:off x="1828800" y="3730354"/>
-            <a:ext cx="8503920" cy="548640"/>
-          </a:xfrm>
-          <a:prstGeom prst="rect">
-            <a:avLst/>
-          </a:prstGeom>
-          <a:noFill/>
-        </p:spPr>
-        <p:txBody>
-          <a:bodyPr wrap="square" lIns="45720" rIns="45720" tIns="18288" bIns="18288" anchor="t">
-            <a:spAutoFit/>
-          </a:bodyPr>
-          <a:lstStyle/>
-          <a:p>
-            <a:pPr algn="ctr"/>
-            <a:r>
-              <a:rPr sz="2400" b="0" i="0">
-                <a:solidFill>
-                  <a:srgbClr val="6B6B6B"/>
-                </a:solidFill>
-                <a:latin typeface="Century Schoolbook"/>
-              </a:rPr>
-              <a:t>4.2 + 3.5</a:t>
-            </a:r>
-          </a:p>
-        </p:txBody>
-      </p:sp>
-      <p:sp>
-        <p:nvSpPr>
-          <p:cNvPr id="17" name="TextBox 16"/>
+          <p:cNvPr id="15" name="TextBox 14"/>
           <p:cNvSpPr txBox="1"/>
           <p:nvPr/>
         </p:nvSpPr>
@@ -7363,44 +6703,9 @@
           </a:fontRef>
         </p:style>
       </p:cxnSp>
-      <p:sp>
-        <p:nvSpPr>
-          <p:cNvPr id="5" name="TextBox 4"/>
-          <p:cNvSpPr txBox="1"/>
-          <p:nvPr/>
-        </p:nvSpPr>
-        <p:spPr>
-          <a:xfrm>
-            <a:off x="777240" y="1261872"/>
-            <a:ext cx="10607040" cy="310896"/>
-          </a:xfrm>
-          <a:prstGeom prst="rect">
-            <a:avLst/>
-          </a:prstGeom>
-          <a:noFill/>
-        </p:spPr>
-        <p:txBody>
-          <a:bodyPr wrap="square" lIns="45720" rIns="45720" tIns="18288" bIns="18288" anchor="t">
-            <a:spAutoFit/>
-          </a:bodyPr>
-          <a:lstStyle/>
-          <a:p>
-            <a:pPr algn="l"/>
-            <a:r>
-              <a:rPr sz="1700" b="0" i="1">
-                <a:solidFill>
-                  <a:srgbClr val="6B6B6B"/>
-                </a:solidFill>
-                <a:latin typeface="Century Schoolbook"/>
-              </a:rPr>
-              <a:t>Boards up on three.</a:t>
-            </a:r>
-          </a:p>
-        </p:txBody>
-      </p:sp>
       <p:cxnSp>
         <p:nvCxnSpPr>
-          <p:cNvPr id="6" name="Connector 5"/>
+          <p:cNvPr id="5" name="Connector 4"/>
           <p:cNvCxnSpPr/>
           <p:nvPr/>
         </p:nvCxnSpPr>
@@ -7435,7 +6740,7 @@
       </p:cxnSp>
       <p:sp>
         <p:nvSpPr>
-          <p:cNvPr id="7" name="TextBox 6"/>
+          <p:cNvPr id="6" name="TextBox 5"/>
           <p:cNvSpPr txBox="1"/>
           <p:nvPr/>
         </p:nvSpPr>
@@ -7470,7 +6775,7 @@
       </p:sp>
       <p:sp>
         <p:nvSpPr>
-          <p:cNvPr id="8" name="TextBox 7"/>
+          <p:cNvPr id="7" name="TextBox 6"/>
           <p:cNvSpPr txBox="1"/>
           <p:nvPr/>
         </p:nvSpPr>
@@ -7505,7 +6810,7 @@
       </p:sp>
       <p:pic>
         <p:nvPicPr>
-          <p:cNvPr id="9" name="Picture 8" descr="01e04974dac9eb6e.png"/>
+          <p:cNvPr id="8" name="Picture 7" descr="01e04974dac9eb6e.png"/>
           <p:cNvPicPr>
             <a:picLocks noChangeAspect="1"/>
           </p:cNvPicPr>
@@ -7529,7 +6834,7 @@
       </p:pic>
       <p:sp>
         <p:nvSpPr>
-          <p:cNvPr id="10" name="TextBox 9"/>
+          <p:cNvPr id="9" name="TextBox 8"/>
           <p:cNvSpPr txBox="1"/>
           <p:nvPr/>
         </p:nvSpPr>
@@ -7558,41 +6863,6 @@
                 <a:latin typeface="Century Schoolbook"/>
               </a:rPr>
               <a:t>Answer it.</a:t>
-            </a:r>
-          </a:p>
-        </p:txBody>
-      </p:sp>
-      <p:sp>
-        <p:nvSpPr>
-          <p:cNvPr id="11" name="TextBox 10"/>
-          <p:cNvSpPr txBox="1"/>
-          <p:nvPr/>
-        </p:nvSpPr>
-        <p:spPr>
-          <a:xfrm>
-            <a:off x="777240" y="4828032"/>
-            <a:ext cx="10607040" cy="365760"/>
-          </a:xfrm>
-          <a:prstGeom prst="rect">
-            <a:avLst/>
-          </a:prstGeom>
-          <a:noFill/>
-        </p:spPr>
-        <p:txBody>
-          <a:bodyPr wrap="square" lIns="45720" rIns="45720" tIns="18288" bIns="18288" anchor="t">
-            <a:spAutoFit/>
-          </a:bodyPr>
-          <a:lstStyle/>
-          <a:p>
-            <a:pPr algn="ctr"/>
-            <a:r>
-              <a:rPr sz="1900" b="0" i="1">
-                <a:solidFill>
-                  <a:srgbClr val="6B6B6B"/>
-                </a:solidFill>
-                <a:latin typeface="Century Schoolbook"/>
-              </a:rPr>
-              <a:t>Finish the answer.</a:t>
             </a:r>
           </a:p>
         </p:txBody>
@@ -7720,44 +6990,9 @@
           </a:fontRef>
         </p:style>
       </p:cxnSp>
-      <p:sp>
-        <p:nvSpPr>
-          <p:cNvPr id="5" name="TextBox 4"/>
-          <p:cNvSpPr txBox="1"/>
-          <p:nvPr/>
-        </p:nvSpPr>
-        <p:spPr>
-          <a:xfrm>
-            <a:off x="777240" y="1261872"/>
-            <a:ext cx="10607040" cy="310896"/>
-          </a:xfrm>
-          <a:prstGeom prst="rect">
-            <a:avLst/>
-          </a:prstGeom>
-          <a:noFill/>
-        </p:spPr>
-        <p:txBody>
-          <a:bodyPr wrap="square" lIns="45720" rIns="45720" tIns="18288" bIns="18288" anchor="t">
-            <a:spAutoFit/>
-          </a:bodyPr>
-          <a:lstStyle/>
-          <a:p>
-            <a:pPr algn="l"/>
-            <a:r>
-              <a:rPr sz="1700" b="0" i="1">
-                <a:solidFill>
-                  <a:srgbClr val="6B6B6B"/>
-                </a:solidFill>
-                <a:latin typeface="Century Schoolbook"/>
-              </a:rPr>
-              <a:t>On your own. Four minutes. No notes.</a:t>
-            </a:r>
-          </a:p>
-        </p:txBody>
-      </p:sp>
       <p:cxnSp>
         <p:nvCxnSpPr>
-          <p:cNvPr id="6" name="Connector 5"/>
+          <p:cNvPr id="5" name="Connector 4"/>
           <p:cNvCxnSpPr/>
           <p:nvPr/>
         </p:nvCxnSpPr>
@@ -7792,7 +7027,7 @@
       </p:cxnSp>
       <p:sp>
         <p:nvSpPr>
-          <p:cNvPr id="7" name="TextBox 6"/>
+          <p:cNvPr id="6" name="TextBox 5"/>
           <p:cNvSpPr txBox="1"/>
           <p:nvPr/>
         </p:nvSpPr>
@@ -7827,7 +7062,7 @@
       </p:sp>
       <p:sp>
         <p:nvSpPr>
-          <p:cNvPr id="8" name="TextBox 7"/>
+          <p:cNvPr id="7" name="TextBox 6"/>
           <p:cNvSpPr txBox="1"/>
           <p:nvPr/>
         </p:nvSpPr>
@@ -7862,13 +7097,13 @@
       </p:sp>
       <p:sp>
         <p:nvSpPr>
-          <p:cNvPr id="9" name="TextBox 8"/>
-          <p:cNvSpPr txBox="1"/>
-          <p:nvPr/>
-        </p:nvSpPr>
-        <p:spPr>
-          <a:xfrm>
-            <a:off x="1874519" y="1760220"/>
+          <p:cNvPr id="8" name="TextBox 7"/>
+          <p:cNvSpPr txBox="1"/>
+          <p:nvPr/>
+        </p:nvSpPr>
+        <p:spPr>
+          <a:xfrm>
+            <a:off x="1874519" y="1440180"/>
             <a:ext cx="5991504" cy="457200"/>
           </a:xfrm>
           <a:prstGeom prst="rect">
@@ -7897,13 +7132,13 @@
       </p:sp>
       <p:sp>
         <p:nvSpPr>
-          <p:cNvPr id="10" name="TextBox 9"/>
-          <p:cNvSpPr txBox="1"/>
-          <p:nvPr/>
-        </p:nvSpPr>
-        <p:spPr>
-          <a:xfrm>
-            <a:off x="1874519" y="2372868"/>
+          <p:cNvPr id="9" name="TextBox 8"/>
+          <p:cNvSpPr txBox="1"/>
+          <p:nvPr/>
+        </p:nvSpPr>
+        <p:spPr>
+          <a:xfrm>
+            <a:off x="1874519" y="2052828"/>
             <a:ext cx="4573104" cy="457200"/>
           </a:xfrm>
           <a:prstGeom prst="rect">
@@ -7932,7 +7167,7 @@
       </p:sp>
       <p:pic>
         <p:nvPicPr>
-          <p:cNvPr id="11" name="Picture 10" descr="6e4449454b7e3ea6.png"/>
+          <p:cNvPr id="10" name="Picture 9" descr="6e4449454b7e3ea6.png"/>
           <p:cNvPicPr>
             <a:picLocks noChangeAspect="1"/>
           </p:cNvPicPr>
@@ -7946,7 +7181,7 @@
         </p:blipFill>
         <p:spPr>
           <a:xfrm>
-            <a:off x="6310464" y="2461260"/>
+            <a:off x="6310464" y="2141220"/>
             <a:ext cx="890016" cy="280416"/>
           </a:xfrm>
           <a:prstGeom prst="rect">
@@ -7956,13 +7191,13 @@
       </p:pic>
       <p:sp>
         <p:nvSpPr>
-          <p:cNvPr id="12" name="TextBox 11"/>
-          <p:cNvSpPr txBox="1"/>
-          <p:nvPr/>
-        </p:nvSpPr>
-        <p:spPr>
-          <a:xfrm>
-            <a:off x="7200480" y="2372868"/>
+          <p:cNvPr id="11" name="TextBox 10"/>
+          <p:cNvSpPr txBox="1"/>
+          <p:nvPr/>
+        </p:nvSpPr>
+        <p:spPr>
+          <a:xfrm>
+            <a:off x="7200480" y="2052828"/>
             <a:ext cx="1224116" cy="457200"/>
           </a:xfrm>
           <a:prstGeom prst="rect">
@@ -7991,7 +7226,7 @@
       </p:sp>
       <p:pic>
         <p:nvPicPr>
-          <p:cNvPr id="13" name="Picture 12" descr="7da0da260d230a62.png"/>
+          <p:cNvPr id="12" name="Picture 11" descr="7da0da260d230a62.png"/>
           <p:cNvPicPr>
             <a:picLocks noChangeAspect="1"/>
           </p:cNvPicPr>
@@ -8005,7 +7240,7 @@
         </p:blipFill>
         <p:spPr>
           <a:xfrm>
-            <a:off x="8287436" y="2458212"/>
+            <a:off x="8287436" y="2138172"/>
             <a:ext cx="905256" cy="286512"/>
           </a:xfrm>
           <a:prstGeom prst="rect">
@@ -8015,13 +7250,13 @@
       </p:pic>
       <p:sp>
         <p:nvSpPr>
-          <p:cNvPr id="14" name="TextBox 13"/>
-          <p:cNvSpPr txBox="1"/>
-          <p:nvPr/>
-        </p:nvSpPr>
-        <p:spPr>
-          <a:xfrm>
-            <a:off x="9192692" y="2372868"/>
+          <p:cNvPr id="13" name="TextBox 12"/>
+          <p:cNvSpPr txBox="1"/>
+          <p:nvPr/>
+        </p:nvSpPr>
+        <p:spPr>
+          <a:xfrm>
+            <a:off x="9192692" y="2052828"/>
             <a:ext cx="433854" cy="457200"/>
           </a:xfrm>
           <a:prstGeom prst="rect">
@@ -8050,13 +7285,13 @@
       </p:sp>
       <p:sp>
         <p:nvSpPr>
-          <p:cNvPr id="15" name="TextBox 14"/>
-          <p:cNvSpPr txBox="1"/>
-          <p:nvPr/>
-        </p:nvSpPr>
-        <p:spPr>
-          <a:xfrm>
-            <a:off x="1874519" y="2985516"/>
+          <p:cNvPr id="14" name="TextBox 13"/>
+          <p:cNvSpPr txBox="1"/>
+          <p:nvPr/>
+        </p:nvSpPr>
+        <p:spPr>
+          <a:xfrm>
+            <a:off x="1874519" y="2665476"/>
             <a:ext cx="3064939" cy="457200"/>
           </a:xfrm>
           <a:prstGeom prst="rect">
@@ -8085,7 +7320,7 @@
       </p:sp>
       <p:pic>
         <p:nvPicPr>
-          <p:cNvPr id="16" name="Picture 15" descr="c100c4232230d0dc.png"/>
+          <p:cNvPr id="15" name="Picture 14" descr="c100c4232230d0dc.png"/>
           <p:cNvPicPr>
             <a:picLocks noChangeAspect="1"/>
           </p:cNvPicPr>
@@ -8099,7 +7334,7 @@
         </p:blipFill>
         <p:spPr>
           <a:xfrm>
-            <a:off x="4802299" y="3009900"/>
+            <a:off x="4802299" y="2689860"/>
             <a:ext cx="853440" cy="408432"/>
           </a:xfrm>
           <a:prstGeom prst="rect">
@@ -8109,13 +7344,13 @@
       </p:pic>
       <p:sp>
         <p:nvSpPr>
-          <p:cNvPr id="17" name="TextBox 16"/>
-          <p:cNvSpPr txBox="1"/>
-          <p:nvPr/>
-        </p:nvSpPr>
-        <p:spPr>
-          <a:xfrm>
-            <a:off x="1874519" y="3598164"/>
+          <p:cNvPr id="16" name="TextBox 15"/>
+          <p:cNvSpPr txBox="1"/>
+          <p:nvPr/>
+        </p:nvSpPr>
+        <p:spPr>
+          <a:xfrm>
+            <a:off x="1874519" y="3278124"/>
             <a:ext cx="2898925" cy="457200"/>
           </a:xfrm>
           <a:prstGeom prst="rect">
@@ -8144,7 +7379,7 @@
       </p:sp>
       <p:pic>
         <p:nvPicPr>
-          <p:cNvPr id="18" name="Picture 17" descr="bdc1cddc07790a72.png"/>
+          <p:cNvPr id="17" name="Picture 16" descr="bdc1cddc07790a72.png"/>
           <p:cNvPicPr>
             <a:picLocks noChangeAspect="1"/>
           </p:cNvPicPr>
@@ -8158,7 +7393,7 @@
         </p:blipFill>
         <p:spPr>
           <a:xfrm>
-            <a:off x="4636285" y="3706368"/>
+            <a:off x="4636285" y="3386328"/>
             <a:ext cx="1298448" cy="240791"/>
           </a:xfrm>
           <a:prstGeom prst="rect">
@@ -8289,44 +7524,9 @@
           </a:fontRef>
         </p:style>
       </p:cxnSp>
-      <p:sp>
-        <p:nvSpPr>
-          <p:cNvPr id="5" name="TextBox 4"/>
-          <p:cNvSpPr txBox="1"/>
-          <p:nvPr/>
-        </p:nvSpPr>
-        <p:spPr>
-          <a:xfrm>
-            <a:off x="777240" y="1261872"/>
-            <a:ext cx="10607040" cy="310896"/>
-          </a:xfrm>
-          <a:prstGeom prst="rect">
-            <a:avLst/>
-          </a:prstGeom>
-          <a:noFill/>
-        </p:spPr>
-        <p:txBody>
-          <a:bodyPr wrap="square" lIns="45720" rIns="45720" tIns="18288" bIns="18288" anchor="t">
-            <a:spAutoFit/>
-          </a:bodyPr>
-          <a:lstStyle/>
-          <a:p>
-            <a:pPr algn="l"/>
-            <a:r>
-              <a:rPr sz="1700" b="0" i="1">
-                <a:solidFill>
-                  <a:srgbClr val="6B6B6B"/>
-                </a:solidFill>
-                <a:latin typeface="Century Schoolbook"/>
-              </a:rPr>
-              <a:t>Answer.</a:t>
-            </a:r>
-          </a:p>
-        </p:txBody>
-      </p:sp>
       <p:cxnSp>
         <p:nvCxnSpPr>
-          <p:cNvPr id="6" name="Connector 5"/>
+          <p:cNvPr id="5" name="Connector 4"/>
           <p:cNvCxnSpPr/>
           <p:nvPr/>
         </p:nvCxnSpPr>
@@ -8361,7 +7561,7 @@
       </p:cxnSp>
       <p:sp>
         <p:nvSpPr>
-          <p:cNvPr id="7" name="TextBox 6"/>
+          <p:cNvPr id="6" name="TextBox 5"/>
           <p:cNvSpPr txBox="1"/>
           <p:nvPr/>
         </p:nvSpPr>
@@ -8396,7 +7596,7 @@
       </p:sp>
       <p:sp>
         <p:nvSpPr>
-          <p:cNvPr id="8" name="TextBox 7"/>
+          <p:cNvPr id="7" name="TextBox 6"/>
           <p:cNvSpPr txBox="1"/>
           <p:nvPr/>
         </p:nvSpPr>
@@ -8431,7 +7631,7 @@
       </p:sp>
       <p:pic>
         <p:nvPicPr>
-          <p:cNvPr id="9" name="Picture 8" descr="d662bd9034d4b28e.png"/>
+          <p:cNvPr id="8" name="Picture 7" descr="d662bd9034d4b28e.png"/>
           <p:cNvPicPr>
             <a:picLocks noChangeAspect="1"/>
           </p:cNvPicPr>
@@ -8455,60 +7655,7 @@
       </p:pic>
       <p:sp>
         <p:nvSpPr>
-          <p:cNvPr id="10" name="TextBox 9"/>
-          <p:cNvSpPr txBox="1"/>
-          <p:nvPr/>
-        </p:nvSpPr>
-        <p:spPr>
-          <a:xfrm>
-            <a:off x="1828800" y="2834639"/>
-            <a:ext cx="8503920" cy="548640"/>
-          </a:xfrm>
-          <a:prstGeom prst="rect">
-            <a:avLst/>
-          </a:prstGeom>
-          <a:noFill/>
-        </p:spPr>
-        <p:txBody>
-          <a:bodyPr wrap="square" lIns="45720" rIns="45720" tIns="18288" bIns="18288" anchor="t">
-            <a:spAutoFit/>
-          </a:bodyPr>
-          <a:lstStyle/>
-          <a:p>
-            <a:pPr algn="ctr"/>
-            <a:r>
-              <a:rPr sz="2400" b="0" i="0">
-                <a:solidFill>
-                  <a:srgbClr val="6B6B6B"/>
-                </a:solidFill>
-                <a:latin typeface="Century Schoolbook"/>
-              </a:rPr>
-              <a:t>13 × 10</a:t>
-            </a:r>
-            <a:r>
-              <a:rPr sz="2400" b="0" i="0" baseline="30000">
-                <a:solidFill>
-                  <a:srgbClr val="6B6B6B"/>
-                </a:solidFill>
-                <a:latin typeface="Century Schoolbook"/>
-              </a:rPr>
-              <a:t>-5</a:t>
-            </a:r>
-            <a:r>
-              <a:rPr sz="2400" b="0" i="0">
-                <a:solidFill>
-                  <a:srgbClr val="6B6B6B"/>
-                </a:solidFill>
-                <a:latin typeface="Century Schoolbook"/>
-              </a:rPr>
-              <a:t> is not finished</a:t>
-            </a:r>
-          </a:p>
-        </p:txBody>
-      </p:sp>
-      <p:sp>
-        <p:nvSpPr>
-          <p:cNvPr id="11" name="TextBox 10"/>
+          <p:cNvPr id="9" name="TextBox 8"/>
           <p:cNvSpPr txBox="1"/>
           <p:nvPr/>
         </p:nvSpPr>
@@ -8673,44 +7820,9 @@
           </a:fontRef>
         </p:style>
       </p:cxnSp>
-      <p:sp>
-        <p:nvSpPr>
-          <p:cNvPr id="5" name="TextBox 4"/>
-          <p:cNvSpPr txBox="1"/>
-          <p:nvPr/>
-        </p:nvSpPr>
-        <p:spPr>
-          <a:xfrm>
-            <a:off x="777240" y="1261872"/>
-            <a:ext cx="10607040" cy="310896"/>
-          </a:xfrm>
-          <a:prstGeom prst="rect">
-            <a:avLst/>
-          </a:prstGeom>
-          <a:noFill/>
-        </p:spPr>
-        <p:txBody>
-          <a:bodyPr wrap="square" lIns="45720" rIns="45720" tIns="18288" bIns="18288" anchor="t">
-            <a:spAutoFit/>
-          </a:bodyPr>
-          <a:lstStyle/>
-          <a:p>
-            <a:pPr algn="l"/>
-            <a:r>
-              <a:rPr sz="1700" b="0" i="1">
-                <a:solidFill>
-                  <a:srgbClr val="6B6B6B"/>
-                </a:solidFill>
-                <a:latin typeface="Century Schoolbook"/>
-              </a:rPr>
-              <a:t>Boards up on three.</a:t>
-            </a:r>
-          </a:p>
-        </p:txBody>
-      </p:sp>
       <p:cxnSp>
         <p:nvCxnSpPr>
-          <p:cNvPr id="6" name="Connector 5"/>
+          <p:cNvPr id="5" name="Connector 4"/>
           <p:cNvCxnSpPr/>
           <p:nvPr/>
         </p:nvCxnSpPr>
@@ -8745,7 +7857,7 @@
       </p:cxnSp>
       <p:sp>
         <p:nvSpPr>
-          <p:cNvPr id="7" name="TextBox 6"/>
+          <p:cNvPr id="6" name="TextBox 5"/>
           <p:cNvSpPr txBox="1"/>
           <p:nvPr/>
         </p:nvSpPr>
@@ -8780,7 +7892,7 @@
       </p:sp>
       <p:sp>
         <p:nvSpPr>
-          <p:cNvPr id="8" name="TextBox 7"/>
+          <p:cNvPr id="7" name="TextBox 6"/>
           <p:cNvSpPr txBox="1"/>
           <p:nvPr/>
         </p:nvSpPr>
@@ -8815,7 +7927,7 @@
       </p:sp>
       <p:pic>
         <p:nvPicPr>
-          <p:cNvPr id="9" name="Picture 8" descr="340f3053f5991007.png"/>
+          <p:cNvPr id="8" name="Picture 7" descr="340f3053f5991007.png"/>
           <p:cNvPicPr>
             <a:picLocks noChangeAspect="1"/>
           </p:cNvPicPr>
@@ -8839,7 +7951,7 @@
       </p:pic>
       <p:sp>
         <p:nvSpPr>
-          <p:cNvPr id="10" name="TextBox 9"/>
+          <p:cNvPr id="9" name="TextBox 8"/>
           <p:cNvSpPr txBox="1"/>
           <p:nvPr/>
         </p:nvSpPr>
@@ -8868,41 +7980,6 @@
                 <a:latin typeface="Century Schoolbook"/>
               </a:rPr>
               <a:t>Answer it.</a:t>
-            </a:r>
-          </a:p>
-        </p:txBody>
-      </p:sp>
-      <p:sp>
-        <p:nvSpPr>
-          <p:cNvPr id="11" name="TextBox 10"/>
-          <p:cNvSpPr txBox="1"/>
-          <p:nvPr/>
-        </p:nvSpPr>
-        <p:spPr>
-          <a:xfrm>
-            <a:off x="777240" y="4828032"/>
-            <a:ext cx="10607040" cy="365760"/>
-          </a:xfrm>
-          <a:prstGeom prst="rect">
-            <a:avLst/>
-          </a:prstGeom>
-          <a:noFill/>
-        </p:spPr>
-        <p:txBody>
-          <a:bodyPr wrap="square" lIns="45720" rIns="45720" tIns="18288" bIns="18288" anchor="t">
-            <a:spAutoFit/>
-          </a:bodyPr>
-          <a:lstStyle/>
-          <a:p>
-            <a:pPr algn="ctr"/>
-            <a:r>
-              <a:rPr sz="1900" b="0" i="1">
-                <a:solidFill>
-                  <a:srgbClr val="6B6B6B"/>
-                </a:solidFill>
-                <a:latin typeface="Century Schoolbook"/>
-              </a:rPr>
-              <a:t>Finish the answer.</a:t>
             </a:r>
           </a:p>
         </p:txBody>
@@ -9030,44 +8107,9 @@
           </a:fontRef>
         </p:style>
       </p:cxnSp>
-      <p:sp>
-        <p:nvSpPr>
-          <p:cNvPr id="5" name="TextBox 4"/>
-          <p:cNvSpPr txBox="1"/>
-          <p:nvPr/>
-        </p:nvSpPr>
-        <p:spPr>
-          <a:xfrm>
-            <a:off x="777240" y="1261872"/>
-            <a:ext cx="10607040" cy="310896"/>
-          </a:xfrm>
-          <a:prstGeom prst="rect">
-            <a:avLst/>
-          </a:prstGeom>
-          <a:noFill/>
-        </p:spPr>
-        <p:txBody>
-          <a:bodyPr wrap="square" lIns="45720" rIns="45720" tIns="18288" bIns="18288" anchor="t">
-            <a:spAutoFit/>
-          </a:bodyPr>
-          <a:lstStyle/>
-          <a:p>
-            <a:pPr algn="l"/>
-            <a:r>
-              <a:rPr sz="1700" b="0" i="1">
-                <a:solidFill>
-                  <a:srgbClr val="6B6B6B"/>
-                </a:solidFill>
-                <a:latin typeface="Century Schoolbook"/>
-              </a:rPr>
-              <a:t>Answer.</a:t>
-            </a:r>
-          </a:p>
-        </p:txBody>
-      </p:sp>
       <p:cxnSp>
         <p:nvCxnSpPr>
-          <p:cNvPr id="6" name="Connector 5"/>
+          <p:cNvPr id="5" name="Connector 4"/>
           <p:cNvCxnSpPr/>
           <p:nvPr/>
         </p:nvCxnSpPr>
@@ -9102,7 +8144,7 @@
       </p:cxnSp>
       <p:sp>
         <p:nvSpPr>
-          <p:cNvPr id="7" name="TextBox 6"/>
+          <p:cNvPr id="6" name="TextBox 5"/>
           <p:cNvSpPr txBox="1"/>
           <p:nvPr/>
         </p:nvSpPr>
@@ -9137,7 +8179,7 @@
       </p:sp>
       <p:sp>
         <p:nvSpPr>
-          <p:cNvPr id="8" name="TextBox 7"/>
+          <p:cNvPr id="7" name="TextBox 6"/>
           <p:cNvSpPr txBox="1"/>
           <p:nvPr/>
         </p:nvSpPr>
@@ -9172,7 +8214,7 @@
       </p:sp>
       <p:pic>
         <p:nvPicPr>
-          <p:cNvPr id="9" name="Picture 8" descr="2450f0cef92f510f.png"/>
+          <p:cNvPr id="8" name="Picture 7" descr="2450f0cef92f510f.png"/>
           <p:cNvPicPr>
             <a:picLocks noChangeAspect="1"/>
           </p:cNvPicPr>
@@ -9196,60 +8238,7 @@
       </p:pic>
       <p:sp>
         <p:nvSpPr>
-          <p:cNvPr id="10" name="TextBox 9"/>
-          <p:cNvSpPr txBox="1"/>
-          <p:nvPr/>
-        </p:nvSpPr>
-        <p:spPr>
-          <a:xfrm>
-            <a:off x="1828800" y="2834639"/>
-            <a:ext cx="8503920" cy="548640"/>
-          </a:xfrm>
-          <a:prstGeom prst="rect">
-            <a:avLst/>
-          </a:prstGeom>
-          <a:noFill/>
-        </p:spPr>
-        <p:txBody>
-          <a:bodyPr wrap="square" lIns="45720" rIns="45720" tIns="18288" bIns="18288" anchor="t">
-            <a:spAutoFit/>
-          </a:bodyPr>
-          <a:lstStyle/>
-          <a:p>
-            <a:pPr algn="ctr"/>
-            <a:r>
-              <a:rPr sz="2400" b="0" i="0">
-                <a:solidFill>
-                  <a:srgbClr val="6B6B6B"/>
-                </a:solidFill>
-                <a:latin typeface="Century Schoolbook"/>
-              </a:rPr>
-              <a:t>0.7 × 10</a:t>
-            </a:r>
-            <a:r>
-              <a:rPr sz="2400" b="0" i="0" baseline="30000">
-                <a:solidFill>
-                  <a:srgbClr val="6B6B6B"/>
-                </a:solidFill>
-                <a:latin typeface="Century Schoolbook"/>
-              </a:rPr>
-              <a:t>8</a:t>
-            </a:r>
-            <a:r>
-              <a:rPr sz="2400" b="0" i="0">
-                <a:solidFill>
-                  <a:srgbClr val="6B6B6B"/>
-                </a:solidFill>
-                <a:latin typeface="Century Schoolbook"/>
-              </a:rPr>
-              <a:t> is not finished either</a:t>
-            </a:r>
-          </a:p>
-        </p:txBody>
-      </p:sp>
-      <p:sp>
-        <p:nvSpPr>
-          <p:cNvPr id="11" name="TextBox 10"/>
+          <p:cNvPr id="9" name="TextBox 8"/>
           <p:cNvSpPr txBox="1"/>
           <p:nvPr/>
         </p:nvSpPr>
@@ -9414,44 +8403,9 @@
           </a:fontRef>
         </p:style>
       </p:cxnSp>
-      <p:sp>
-        <p:nvSpPr>
-          <p:cNvPr id="5" name="TextBox 4"/>
-          <p:cNvSpPr txBox="1"/>
-          <p:nvPr/>
-        </p:nvSpPr>
-        <p:spPr>
-          <a:xfrm>
-            <a:off x="777240" y="1261872"/>
-            <a:ext cx="10607040" cy="310896"/>
-          </a:xfrm>
-          <a:prstGeom prst="rect">
-            <a:avLst/>
-          </a:prstGeom>
-          <a:noFill/>
-        </p:spPr>
-        <p:txBody>
-          <a:bodyPr wrap="square" lIns="45720" rIns="45720" tIns="18288" bIns="18288" anchor="t">
-            <a:spAutoFit/>
-          </a:bodyPr>
-          <a:lstStyle/>
-          <a:p>
-            <a:pPr algn="l"/>
-            <a:r>
-              <a:rPr sz="1700" b="0" i="1">
-                <a:solidFill>
-                  <a:srgbClr val="6B6B6B"/>
-                </a:solidFill>
-                <a:latin typeface="Century Schoolbook"/>
-              </a:rPr>
-              <a:t>Boards up on three.</a:t>
-            </a:r>
-          </a:p>
-        </p:txBody>
-      </p:sp>
       <p:cxnSp>
         <p:nvCxnSpPr>
-          <p:cNvPr id="6" name="Connector 5"/>
+          <p:cNvPr id="5" name="Connector 4"/>
           <p:cNvCxnSpPr/>
           <p:nvPr/>
         </p:nvCxnSpPr>
@@ -9486,7 +8440,7 @@
       </p:cxnSp>
       <p:sp>
         <p:nvSpPr>
-          <p:cNvPr id="7" name="TextBox 6"/>
+          <p:cNvPr id="6" name="TextBox 5"/>
           <p:cNvSpPr txBox="1"/>
           <p:nvPr/>
         </p:nvSpPr>
@@ -9521,7 +8475,7 @@
       </p:sp>
       <p:sp>
         <p:nvSpPr>
-          <p:cNvPr id="8" name="TextBox 7"/>
+          <p:cNvPr id="7" name="TextBox 6"/>
           <p:cNvSpPr txBox="1"/>
           <p:nvPr/>
         </p:nvSpPr>
@@ -9556,7 +8510,7 @@
       </p:sp>
       <p:pic>
         <p:nvPicPr>
-          <p:cNvPr id="9" name="Picture 8" descr="d60eac1f99916ea9.png"/>
+          <p:cNvPr id="8" name="Picture 7" descr="d60eac1f99916ea9.png"/>
           <p:cNvPicPr>
             <a:picLocks noChangeAspect="1"/>
           </p:cNvPicPr>
@@ -9580,7 +8534,7 @@
       </p:pic>
       <p:sp>
         <p:nvSpPr>
-          <p:cNvPr id="10" name="TextBox 9"/>
+          <p:cNvPr id="9" name="TextBox 8"/>
           <p:cNvSpPr txBox="1"/>
           <p:nvPr/>
         </p:nvSpPr>
@@ -9615,7 +8569,7 @@
       </p:sp>
       <p:sp>
         <p:nvSpPr>
-          <p:cNvPr id="11" name="TextBox 10"/>
+          <p:cNvPr id="10" name="TextBox 9"/>
           <p:cNvSpPr txBox="1"/>
           <p:nvPr/>
         </p:nvSpPr>
@@ -9668,7 +8622,7 @@
       </p:sp>
       <p:sp>
         <p:nvSpPr>
-          <p:cNvPr id="12" name="TextBox 11"/>
+          <p:cNvPr id="11" name="TextBox 10"/>
           <p:cNvSpPr txBox="1"/>
           <p:nvPr/>
         </p:nvSpPr>
@@ -9721,7 +8675,7 @@
       </p:sp>
       <p:sp>
         <p:nvSpPr>
-          <p:cNvPr id="13" name="TextBox 12"/>
+          <p:cNvPr id="12" name="TextBox 11"/>
           <p:cNvSpPr txBox="1"/>
           <p:nvPr/>
         </p:nvSpPr>
@@ -9774,7 +8728,7 @@
       </p:sp>
       <p:sp>
         <p:nvSpPr>
-          <p:cNvPr id="14" name="TextBox 13"/>
+          <p:cNvPr id="13" name="TextBox 12"/>
           <p:cNvSpPr txBox="1"/>
           <p:nvPr/>
         </p:nvSpPr>
@@ -9827,7 +8781,7 @@
       </p:sp>
       <p:sp>
         <p:nvSpPr>
-          <p:cNvPr id="15" name="TextBox 14"/>
+          <p:cNvPr id="14" name="TextBox 13"/>
           <p:cNvSpPr txBox="1"/>
           <p:nvPr/>
         </p:nvSpPr>
@@ -9983,44 +8937,9 @@
           </a:fontRef>
         </p:style>
       </p:cxnSp>
-      <p:sp>
-        <p:nvSpPr>
-          <p:cNvPr id="5" name="TextBox 4"/>
-          <p:cNvSpPr txBox="1"/>
-          <p:nvPr/>
-        </p:nvSpPr>
-        <p:spPr>
-          <a:xfrm>
-            <a:off x="777240" y="1261872"/>
-            <a:ext cx="10607040" cy="310896"/>
-          </a:xfrm>
-          <a:prstGeom prst="rect">
-            <a:avLst/>
-          </a:prstGeom>
-          <a:noFill/>
-        </p:spPr>
-        <p:txBody>
-          <a:bodyPr wrap="square" lIns="45720" rIns="45720" tIns="18288" bIns="18288" anchor="t">
-            <a:spAutoFit/>
-          </a:bodyPr>
-          <a:lstStyle/>
-          <a:p>
-            <a:pPr algn="l"/>
-            <a:r>
-              <a:rPr sz="1700" b="0" i="1">
-                <a:solidFill>
-                  <a:srgbClr val="6B6B6B"/>
-                </a:solidFill>
-                <a:latin typeface="Century Schoolbook"/>
-              </a:rPr>
-              <a:t>Answer.</a:t>
-            </a:r>
-          </a:p>
-        </p:txBody>
-      </p:sp>
       <p:cxnSp>
         <p:nvCxnSpPr>
-          <p:cNvPr id="6" name="Connector 5"/>
+          <p:cNvPr id="5" name="Connector 4"/>
           <p:cNvCxnSpPr/>
           <p:nvPr/>
         </p:nvCxnSpPr>
@@ -10055,7 +8974,7 @@
       </p:cxnSp>
       <p:sp>
         <p:nvSpPr>
-          <p:cNvPr id="7" name="TextBox 6"/>
+          <p:cNvPr id="6" name="TextBox 5"/>
           <p:cNvSpPr txBox="1"/>
           <p:nvPr/>
         </p:nvSpPr>
@@ -10090,7 +9009,7 @@
       </p:sp>
       <p:sp>
         <p:nvSpPr>
-          <p:cNvPr id="8" name="TextBox 7"/>
+          <p:cNvPr id="7" name="TextBox 6"/>
           <p:cNvSpPr txBox="1"/>
           <p:nvPr/>
         </p:nvSpPr>
@@ -10125,7 +9044,7 @@
       </p:sp>
       <p:pic>
         <p:nvPicPr>
-          <p:cNvPr id="9" name="Picture 8" descr="f420607bc24c708f.png"/>
+          <p:cNvPr id="8" name="Picture 7" descr="f420607bc24c708f.png"/>
           <p:cNvPicPr>
             <a:picLocks noChangeAspect="1"/>
           </p:cNvPicPr>
@@ -10149,7 +9068,7 @@
       </p:pic>
       <p:sp>
         <p:nvSpPr>
-          <p:cNvPr id="10" name="TextBox 9"/>
+          <p:cNvPr id="9" name="TextBox 8"/>
           <p:cNvSpPr txBox="1"/>
           <p:nvPr/>
         </p:nvSpPr>
@@ -10184,7 +9103,7 @@
       </p:sp>
       <p:sp>
         <p:nvSpPr>
-          <p:cNvPr id="11" name="TextBox 10"/>
+          <p:cNvPr id="10" name="TextBox 9"/>
           <p:cNvSpPr txBox="1"/>
           <p:nvPr/>
         </p:nvSpPr>
@@ -10237,7 +9156,7 @@
       </p:sp>
       <p:sp>
         <p:nvSpPr>
-          <p:cNvPr id="12" name="TextBox 11"/>
+          <p:cNvPr id="11" name="TextBox 10"/>
           <p:cNvSpPr txBox="1"/>
           <p:nvPr/>
         </p:nvSpPr>
@@ -10290,7 +9209,7 @@
       </p:sp>
       <p:sp>
         <p:nvSpPr>
-          <p:cNvPr id="13" name="TextBox 12"/>
+          <p:cNvPr id="12" name="TextBox 11"/>
           <p:cNvSpPr txBox="1"/>
           <p:nvPr/>
         </p:nvSpPr>
@@ -10343,7 +9262,7 @@
       </p:sp>
       <p:sp>
         <p:nvSpPr>
-          <p:cNvPr id="14" name="TextBox 13"/>
+          <p:cNvPr id="13" name="TextBox 12"/>
           <p:cNvSpPr txBox="1"/>
           <p:nvPr/>
         </p:nvSpPr>
@@ -10396,7 +9315,7 @@
       </p:sp>
       <p:sp>
         <p:nvSpPr>
-          <p:cNvPr id="15" name="TextBox 14"/>
+          <p:cNvPr id="14" name="TextBox 13"/>
           <p:cNvSpPr txBox="1"/>
           <p:nvPr/>
         </p:nvSpPr>
@@ -10561,44 +9480,9 @@
           </a:fontRef>
         </p:style>
       </p:cxnSp>
-      <p:sp>
-        <p:nvSpPr>
-          <p:cNvPr id="5" name="TextBox 4"/>
-          <p:cNvSpPr txBox="1"/>
-          <p:nvPr/>
-        </p:nvSpPr>
-        <p:spPr>
-          <a:xfrm>
-            <a:off x="777240" y="1261872"/>
-            <a:ext cx="10607040" cy="310896"/>
-          </a:xfrm>
-          <a:prstGeom prst="rect">
-            <a:avLst/>
-          </a:prstGeom>
-          <a:noFill/>
-        </p:spPr>
-        <p:txBody>
-          <a:bodyPr wrap="square" lIns="45720" rIns="45720" tIns="18288" bIns="18288" anchor="t">
-            <a:spAutoFit/>
-          </a:bodyPr>
-          <a:lstStyle/>
-          <a:p>
-            <a:pPr algn="l"/>
-            <a:r>
-              <a:rPr sz="1700" b="0" i="1">
-                <a:solidFill>
-                  <a:srgbClr val="6B6B6B"/>
-                </a:solidFill>
-                <a:latin typeface="Century Schoolbook"/>
-              </a:rPr>
-              <a:t>Boards up on three.</a:t>
-            </a:r>
-          </a:p>
-        </p:txBody>
-      </p:sp>
       <p:cxnSp>
         <p:nvCxnSpPr>
-          <p:cNvPr id="6" name="Connector 5"/>
+          <p:cNvPr id="5" name="Connector 4"/>
           <p:cNvCxnSpPr/>
           <p:nvPr/>
         </p:nvCxnSpPr>
@@ -10633,7 +9517,7 @@
       </p:cxnSp>
       <p:sp>
         <p:nvSpPr>
-          <p:cNvPr id="7" name="TextBox 6"/>
+          <p:cNvPr id="6" name="TextBox 5"/>
           <p:cNvSpPr txBox="1"/>
           <p:nvPr/>
         </p:nvSpPr>
@@ -10668,7 +9552,7 @@
       </p:sp>
       <p:sp>
         <p:nvSpPr>
-          <p:cNvPr id="8" name="TextBox 7"/>
+          <p:cNvPr id="7" name="TextBox 6"/>
           <p:cNvSpPr txBox="1"/>
           <p:nvPr/>
         </p:nvSpPr>
@@ -10703,7 +9587,7 @@
       </p:sp>
       <p:pic>
         <p:nvPicPr>
-          <p:cNvPr id="9" name="Picture 8" descr="f600c7d1ad07bbc4.png"/>
+          <p:cNvPr id="8" name="Picture 7" descr="f600c7d1ad07bbc4.png"/>
           <p:cNvPicPr>
             <a:picLocks noChangeAspect="1"/>
           </p:cNvPicPr>
@@ -10727,7 +9611,7 @@
       </p:pic>
       <p:sp>
         <p:nvSpPr>
-          <p:cNvPr id="10" name="TextBox 9"/>
+          <p:cNvPr id="9" name="TextBox 8"/>
           <p:cNvSpPr txBox="1"/>
           <p:nvPr/>
         </p:nvSpPr>
@@ -10762,7 +9646,7 @@
       </p:sp>
       <p:sp>
         <p:nvSpPr>
-          <p:cNvPr id="11" name="TextBox 10"/>
+          <p:cNvPr id="10" name="TextBox 9"/>
           <p:cNvSpPr txBox="1"/>
           <p:nvPr/>
         </p:nvSpPr>
@@ -10815,7 +9699,7 @@
       </p:sp>
       <p:sp>
         <p:nvSpPr>
-          <p:cNvPr id="12" name="TextBox 11"/>
+          <p:cNvPr id="11" name="TextBox 10"/>
           <p:cNvSpPr txBox="1"/>
           <p:nvPr/>
         </p:nvSpPr>
@@ -10868,7 +9752,7 @@
       </p:sp>
       <p:sp>
         <p:nvSpPr>
-          <p:cNvPr id="13" name="TextBox 12"/>
+          <p:cNvPr id="12" name="TextBox 11"/>
           <p:cNvSpPr txBox="1"/>
           <p:nvPr/>
         </p:nvSpPr>
@@ -10921,7 +9805,7 @@
       </p:sp>
       <p:sp>
         <p:nvSpPr>
-          <p:cNvPr id="14" name="TextBox 13"/>
+          <p:cNvPr id="13" name="TextBox 12"/>
           <p:cNvSpPr txBox="1"/>
           <p:nvPr/>
         </p:nvSpPr>
@@ -10974,7 +9858,7 @@
       </p:sp>
       <p:sp>
         <p:nvSpPr>
-          <p:cNvPr id="15" name="TextBox 14"/>
+          <p:cNvPr id="14" name="TextBox 13"/>
           <p:cNvSpPr txBox="1"/>
           <p:nvPr/>
         </p:nvSpPr>
@@ -11130,44 +10014,9 @@
           </a:fontRef>
         </p:style>
       </p:cxnSp>
-      <p:sp>
-        <p:nvSpPr>
-          <p:cNvPr id="5" name="TextBox 4"/>
-          <p:cNvSpPr txBox="1"/>
-          <p:nvPr/>
-        </p:nvSpPr>
-        <p:spPr>
-          <a:xfrm>
-            <a:off x="777240" y="1261872"/>
-            <a:ext cx="10607040" cy="310896"/>
-          </a:xfrm>
-          <a:prstGeom prst="rect">
-            <a:avLst/>
-          </a:prstGeom>
-          <a:noFill/>
-        </p:spPr>
-        <p:txBody>
-          <a:bodyPr wrap="square" lIns="45720" rIns="45720" tIns="18288" bIns="18288" anchor="t">
-            <a:spAutoFit/>
-          </a:bodyPr>
-          <a:lstStyle/>
-          <a:p>
-            <a:pPr algn="l"/>
-            <a:r>
-              <a:rPr sz="1700" b="0" i="1">
-                <a:solidFill>
-                  <a:srgbClr val="6B6B6B"/>
-                </a:solidFill>
-                <a:latin typeface="Century Schoolbook"/>
-              </a:rPr>
-              <a:t>Answer.</a:t>
-            </a:r>
-          </a:p>
-        </p:txBody>
-      </p:sp>
       <p:cxnSp>
         <p:nvCxnSpPr>
-          <p:cNvPr id="6" name="Connector 5"/>
+          <p:cNvPr id="5" name="Connector 4"/>
           <p:cNvCxnSpPr/>
           <p:nvPr/>
         </p:nvCxnSpPr>
@@ -11202,7 +10051,7 @@
       </p:cxnSp>
       <p:sp>
         <p:nvSpPr>
-          <p:cNvPr id="7" name="TextBox 6"/>
+          <p:cNvPr id="6" name="TextBox 5"/>
           <p:cNvSpPr txBox="1"/>
           <p:nvPr/>
         </p:nvSpPr>
@@ -11237,7 +10086,7 @@
       </p:sp>
       <p:sp>
         <p:nvSpPr>
-          <p:cNvPr id="8" name="TextBox 7"/>
+          <p:cNvPr id="7" name="TextBox 6"/>
           <p:cNvSpPr txBox="1"/>
           <p:nvPr/>
         </p:nvSpPr>
@@ -11272,7 +10121,7 @@
       </p:sp>
       <p:pic>
         <p:nvPicPr>
-          <p:cNvPr id="9" name="Picture 8" descr="11c6b03d538cb705.png"/>
+          <p:cNvPr id="8" name="Picture 7" descr="11c6b03d538cb705.png"/>
           <p:cNvPicPr>
             <a:picLocks noChangeAspect="1"/>
           </p:cNvPicPr>
@@ -11296,7 +10145,7 @@
       </p:pic>
       <p:sp>
         <p:nvSpPr>
-          <p:cNvPr id="10" name="TextBox 9"/>
+          <p:cNvPr id="9" name="TextBox 8"/>
           <p:cNvSpPr txBox="1"/>
           <p:nvPr/>
         </p:nvSpPr>
@@ -11331,7 +10180,7 @@
       </p:sp>
       <p:sp>
         <p:nvSpPr>
-          <p:cNvPr id="11" name="TextBox 10"/>
+          <p:cNvPr id="10" name="TextBox 9"/>
           <p:cNvSpPr txBox="1"/>
           <p:nvPr/>
         </p:nvSpPr>
@@ -11384,7 +10233,7 @@
       </p:sp>
       <p:sp>
         <p:nvSpPr>
-          <p:cNvPr id="12" name="TextBox 11"/>
+          <p:cNvPr id="11" name="TextBox 10"/>
           <p:cNvSpPr txBox="1"/>
           <p:nvPr/>
         </p:nvSpPr>
@@ -11437,7 +10286,7 @@
       </p:sp>
       <p:sp>
         <p:nvSpPr>
-          <p:cNvPr id="13" name="TextBox 12"/>
+          <p:cNvPr id="12" name="TextBox 11"/>
           <p:cNvSpPr txBox="1"/>
           <p:nvPr/>
         </p:nvSpPr>
@@ -11490,7 +10339,7 @@
       </p:sp>
       <p:sp>
         <p:nvSpPr>
-          <p:cNvPr id="14" name="TextBox 13"/>
+          <p:cNvPr id="13" name="TextBox 12"/>
           <p:cNvSpPr txBox="1"/>
           <p:nvPr/>
         </p:nvSpPr>
@@ -11543,7 +10392,7 @@
       </p:sp>
       <p:sp>
         <p:nvSpPr>
-          <p:cNvPr id="15" name="TextBox 14"/>
+          <p:cNvPr id="14" name="TextBox 13"/>
           <p:cNvSpPr txBox="1"/>
           <p:nvPr/>
         </p:nvSpPr>
@@ -11708,44 +10557,9 @@
           </a:fontRef>
         </p:style>
       </p:cxnSp>
-      <p:sp>
-        <p:nvSpPr>
-          <p:cNvPr id="5" name="TextBox 4"/>
-          <p:cNvSpPr txBox="1"/>
-          <p:nvPr/>
-        </p:nvSpPr>
-        <p:spPr>
-          <a:xfrm>
-            <a:off x="777240" y="1261872"/>
-            <a:ext cx="10607040" cy="310896"/>
-          </a:xfrm>
-          <a:prstGeom prst="rect">
-            <a:avLst/>
-          </a:prstGeom>
-          <a:noFill/>
-        </p:spPr>
-        <p:txBody>
-          <a:bodyPr wrap="square" lIns="45720" rIns="45720" tIns="18288" bIns="18288" anchor="t">
-            <a:spAutoFit/>
-          </a:bodyPr>
-          <a:lstStyle/>
-          <a:p>
-            <a:pPr algn="l"/>
-            <a:r>
-              <a:rPr sz="1700" b="0" i="1">
-                <a:solidFill>
-                  <a:srgbClr val="6B6B6B"/>
-                </a:solidFill>
-                <a:latin typeface="Century Schoolbook"/>
-              </a:rPr>
-              <a:t>Boards up on three.</a:t>
-            </a:r>
-          </a:p>
-        </p:txBody>
-      </p:sp>
       <p:cxnSp>
         <p:nvCxnSpPr>
-          <p:cNvPr id="6" name="Connector 5"/>
+          <p:cNvPr id="5" name="Connector 4"/>
           <p:cNvCxnSpPr/>
           <p:nvPr/>
         </p:nvCxnSpPr>
@@ -11780,7 +10594,7 @@
       </p:cxnSp>
       <p:sp>
         <p:nvSpPr>
-          <p:cNvPr id="7" name="TextBox 6"/>
+          <p:cNvPr id="6" name="TextBox 5"/>
           <p:cNvSpPr txBox="1"/>
           <p:nvPr/>
         </p:nvSpPr>
@@ -11815,7 +10629,7 @@
       </p:sp>
       <p:sp>
         <p:nvSpPr>
-          <p:cNvPr id="8" name="TextBox 7"/>
+          <p:cNvPr id="7" name="TextBox 6"/>
           <p:cNvSpPr txBox="1"/>
           <p:nvPr/>
         </p:nvSpPr>
@@ -11850,7 +10664,7 @@
       </p:sp>
       <p:pic>
         <p:nvPicPr>
-          <p:cNvPr id="9" name="Picture 8" descr="7996c8675edf5172.png"/>
+          <p:cNvPr id="8" name="Picture 7" descr="7996c8675edf5172.png"/>
           <p:cNvPicPr>
             <a:picLocks noChangeAspect="1"/>
           </p:cNvPicPr>
@@ -11874,7 +10688,7 @@
       </p:pic>
       <p:sp>
         <p:nvSpPr>
-          <p:cNvPr id="10" name="TextBox 9"/>
+          <p:cNvPr id="9" name="TextBox 8"/>
           <p:cNvSpPr txBox="1"/>
           <p:nvPr/>
         </p:nvSpPr>
@@ -11903,41 +10717,6 @@
                 <a:latin typeface="Century Schoolbook"/>
               </a:rPr>
               <a:t>Answer it.</a:t>
-            </a:r>
-          </a:p>
-        </p:txBody>
-      </p:sp>
-      <p:sp>
-        <p:nvSpPr>
-          <p:cNvPr id="11" name="TextBox 10"/>
-          <p:cNvSpPr txBox="1"/>
-          <p:nvPr/>
-        </p:nvSpPr>
-        <p:spPr>
-          <a:xfrm>
-            <a:off x="777240" y="4828032"/>
-            <a:ext cx="10607040" cy="365760"/>
-          </a:xfrm>
-          <a:prstGeom prst="rect">
-            <a:avLst/>
-          </a:prstGeom>
-          <a:noFill/>
-        </p:spPr>
-        <p:txBody>
-          <a:bodyPr wrap="square" lIns="45720" rIns="45720" tIns="18288" bIns="18288" anchor="t">
-            <a:spAutoFit/>
-          </a:bodyPr>
-          <a:lstStyle/>
-          <a:p>
-            <a:pPr algn="ctr"/>
-            <a:r>
-              <a:rPr sz="1900" b="0" i="1">
-                <a:solidFill>
-                  <a:srgbClr val="6B6B6B"/>
-                </a:solidFill>
-                <a:latin typeface="Century Schoolbook"/>
-              </a:rPr>
-              <a:t>Rewrite one of them first.</a:t>
             </a:r>
           </a:p>
         </p:txBody>
@@ -12065,44 +10844,9 @@
           </a:fontRef>
         </p:style>
       </p:cxnSp>
-      <p:sp>
-        <p:nvSpPr>
-          <p:cNvPr id="5" name="TextBox 4"/>
-          <p:cNvSpPr txBox="1"/>
-          <p:nvPr/>
-        </p:nvSpPr>
-        <p:spPr>
-          <a:xfrm>
-            <a:off x="777240" y="1261872"/>
-            <a:ext cx="10607040" cy="310896"/>
-          </a:xfrm>
-          <a:prstGeom prst="rect">
-            <a:avLst/>
-          </a:prstGeom>
-          <a:noFill/>
-        </p:spPr>
-        <p:txBody>
-          <a:bodyPr wrap="square" lIns="45720" rIns="45720" tIns="18288" bIns="18288" anchor="t">
-            <a:spAutoFit/>
-          </a:bodyPr>
-          <a:lstStyle/>
-          <a:p>
-            <a:pPr algn="l"/>
-            <a:r>
-              <a:rPr sz="1700" b="0" i="1">
-                <a:solidFill>
-                  <a:srgbClr val="6B6B6B"/>
-                </a:solidFill>
-                <a:latin typeface="Century Schoolbook"/>
-              </a:rPr>
-              <a:t>Answer.</a:t>
-            </a:r>
-          </a:p>
-        </p:txBody>
-      </p:sp>
       <p:cxnSp>
         <p:nvCxnSpPr>
-          <p:cNvPr id="6" name="Connector 5"/>
+          <p:cNvPr id="5" name="Connector 4"/>
           <p:cNvCxnSpPr/>
           <p:nvPr/>
         </p:nvCxnSpPr>
@@ -12137,7 +10881,7 @@
       </p:cxnSp>
       <p:sp>
         <p:nvSpPr>
-          <p:cNvPr id="7" name="TextBox 6"/>
+          <p:cNvPr id="6" name="TextBox 5"/>
           <p:cNvSpPr txBox="1"/>
           <p:nvPr/>
         </p:nvSpPr>
@@ -12172,7 +10916,7 @@
       </p:sp>
       <p:sp>
         <p:nvSpPr>
-          <p:cNvPr id="8" name="TextBox 7"/>
+          <p:cNvPr id="7" name="TextBox 6"/>
           <p:cNvSpPr txBox="1"/>
           <p:nvPr/>
         </p:nvSpPr>
@@ -12207,7 +10951,7 @@
       </p:sp>
       <p:pic>
         <p:nvPicPr>
-          <p:cNvPr id="9" name="Picture 8" descr="0150b4a7c88f61cf.png"/>
+          <p:cNvPr id="8" name="Picture 7" descr="0150b4a7c88f61cf.png"/>
           <p:cNvPicPr>
             <a:picLocks noChangeAspect="1"/>
           </p:cNvPicPr>
@@ -12231,69 +10975,7 @@
       </p:pic>
       <p:sp>
         <p:nvSpPr>
-          <p:cNvPr id="10" name="TextBox 9"/>
-          <p:cNvSpPr txBox="1"/>
-          <p:nvPr/>
-        </p:nvSpPr>
-        <p:spPr>
-          <a:xfrm>
-            <a:off x="1828800" y="2834639"/>
-            <a:ext cx="8503920" cy="548640"/>
-          </a:xfrm>
-          <a:prstGeom prst="rect">
-            <a:avLst/>
-          </a:prstGeom>
-          <a:noFill/>
-        </p:spPr>
-        <p:txBody>
-          <a:bodyPr wrap="square" lIns="45720" rIns="45720" tIns="18288" bIns="18288" anchor="t">
-            <a:spAutoFit/>
-          </a:bodyPr>
-          <a:lstStyle/>
-          <a:p>
-            <a:pPr algn="ctr"/>
-            <a:r>
-              <a:rPr sz="2400" b="0" i="0">
-                <a:solidFill>
-                  <a:srgbClr val="6B6B6B"/>
-                </a:solidFill>
-                <a:latin typeface="Century Schoolbook"/>
-              </a:rPr>
-              <a:t>6.4 × 10</a:t>
-            </a:r>
-            <a:r>
-              <a:rPr sz="2400" b="0" i="0" baseline="30000">
-                <a:solidFill>
-                  <a:srgbClr val="6B6B6B"/>
-                </a:solidFill>
-                <a:latin typeface="Century Schoolbook"/>
-              </a:rPr>
-              <a:t>-3</a:t>
-            </a:r>
-            <a:r>
-              <a:rPr sz="2400" b="0" i="0">
-                <a:solidFill>
-                  <a:srgbClr val="6B6B6B"/>
-                </a:solidFill>
-                <a:latin typeface="Century Schoolbook"/>
-              </a:rPr>
-              <a:t> = 0.64 × 10</a:t>
-            </a:r>
-            <a:r>
-              <a:rPr sz="2400" b="0" i="0" baseline="30000">
-                <a:solidFill>
-                  <a:srgbClr val="6B6B6B"/>
-                </a:solidFill>
-                <a:latin typeface="Century Schoolbook"/>
-              </a:rPr>
-              <a:t>-2</a:t>
-            </a:r>
-          </a:p>
-        </p:txBody>
-      </p:sp>
-      <p:sp>
-        <p:nvSpPr>
-          <p:cNvPr id="11" name="TextBox 10"/>
+          <p:cNvPr id="9" name="TextBox 8"/>
           <p:cNvSpPr txBox="1"/>
           <p:nvPr/>
         </p:nvSpPr>
@@ -12458,44 +11140,9 @@
           </a:fontRef>
         </p:style>
       </p:cxnSp>
-      <p:sp>
-        <p:nvSpPr>
-          <p:cNvPr id="5" name="TextBox 4"/>
-          <p:cNvSpPr txBox="1"/>
-          <p:nvPr/>
-        </p:nvSpPr>
-        <p:spPr>
-          <a:xfrm>
-            <a:off x="777240" y="1261872"/>
-            <a:ext cx="10607040" cy="310896"/>
-          </a:xfrm>
-          <a:prstGeom prst="rect">
-            <a:avLst/>
-          </a:prstGeom>
-          <a:noFill/>
-        </p:spPr>
-        <p:txBody>
-          <a:bodyPr wrap="square" lIns="45720" rIns="45720" tIns="18288" bIns="18288" anchor="t">
-            <a:spAutoFit/>
-          </a:bodyPr>
-          <a:lstStyle/>
-          <a:p>
-            <a:pPr algn="l"/>
-            <a:r>
-              <a:rPr sz="1700" b="0" i="1">
-                <a:solidFill>
-                  <a:srgbClr val="6B6B6B"/>
-                </a:solidFill>
-                <a:latin typeface="Century Schoolbook"/>
-              </a:rPr>
-              <a:t>Boards up on three.</a:t>
-            </a:r>
-          </a:p>
-        </p:txBody>
-      </p:sp>
       <p:cxnSp>
         <p:nvCxnSpPr>
-          <p:cNvPr id="6" name="Connector 5"/>
+          <p:cNvPr id="5" name="Connector 4"/>
           <p:cNvCxnSpPr/>
           <p:nvPr/>
         </p:nvCxnSpPr>
@@ -12530,7 +11177,7 @@
       </p:cxnSp>
       <p:sp>
         <p:nvSpPr>
-          <p:cNvPr id="7" name="TextBox 6"/>
+          <p:cNvPr id="6" name="TextBox 5"/>
           <p:cNvSpPr txBox="1"/>
           <p:nvPr/>
         </p:nvSpPr>
@@ -12565,7 +11212,7 @@
       </p:sp>
       <p:sp>
         <p:nvSpPr>
-          <p:cNvPr id="8" name="TextBox 7"/>
+          <p:cNvPr id="7" name="TextBox 6"/>
           <p:cNvSpPr txBox="1"/>
           <p:nvPr/>
         </p:nvSpPr>
@@ -12600,7 +11247,7 @@
       </p:sp>
       <p:pic>
         <p:nvPicPr>
-          <p:cNvPr id="9" name="Picture 8" descr="cbd13eb8faf9a4ef.png"/>
+          <p:cNvPr id="8" name="Picture 7" descr="cbd13eb8faf9a4ef.png"/>
           <p:cNvPicPr>
             <a:picLocks noChangeAspect="1"/>
           </p:cNvPicPr>
@@ -12624,7 +11271,7 @@
       </p:pic>
       <p:sp>
         <p:nvSpPr>
-          <p:cNvPr id="10" name="TextBox 9"/>
+          <p:cNvPr id="9" name="TextBox 8"/>
           <p:cNvSpPr txBox="1"/>
           <p:nvPr/>
         </p:nvSpPr>
@@ -12659,7 +11306,7 @@
       </p:sp>
       <p:pic>
         <p:nvPicPr>
-          <p:cNvPr id="11" name="Picture 10" descr="ce9b607ea85ce740.png"/>
+          <p:cNvPr id="10" name="Picture 9" descr="ce9b607ea85ce740.png"/>
           <p:cNvPicPr>
             <a:picLocks noChangeAspect="1"/>
           </p:cNvPicPr>
@@ -12683,7 +11330,7 @@
       </p:pic>
       <p:sp>
         <p:nvSpPr>
-          <p:cNvPr id="12" name="TextBox 11"/>
+          <p:cNvPr id="11" name="TextBox 10"/>
           <p:cNvSpPr txBox="1"/>
           <p:nvPr/>
         </p:nvSpPr>
@@ -12718,7 +11365,7 @@
       </p:sp>
       <p:sp>
         <p:nvSpPr>
-          <p:cNvPr id="13" name="TextBox 12"/>
+          <p:cNvPr id="12" name="TextBox 11"/>
           <p:cNvSpPr txBox="1"/>
           <p:nvPr/>
         </p:nvSpPr>
@@ -12747,59 +11394,6 @@
                 <a:latin typeface="Century Schoolbook"/>
               </a:rPr>
               <a:t>Answer it.</a:t>
-            </a:r>
-          </a:p>
-        </p:txBody>
-      </p:sp>
-      <p:sp>
-        <p:nvSpPr>
-          <p:cNvPr id="14" name="TextBox 13"/>
-          <p:cNvSpPr txBox="1"/>
-          <p:nvPr/>
-        </p:nvSpPr>
-        <p:spPr>
-          <a:xfrm>
-            <a:off x="777240" y="4828032"/>
-            <a:ext cx="10607040" cy="365760"/>
-          </a:xfrm>
-          <a:prstGeom prst="rect">
-            <a:avLst/>
-          </a:prstGeom>
-          <a:noFill/>
-        </p:spPr>
-        <p:txBody>
-          <a:bodyPr wrap="square" lIns="45720" rIns="45720" tIns="18288" bIns="18288" anchor="t">
-            <a:spAutoFit/>
-          </a:bodyPr>
-          <a:lstStyle/>
-          <a:p>
-            <a:pPr algn="ctr"/>
-            <a:r>
-              <a:rPr sz="1900" b="0" i="1">
-                <a:solidFill>
-                  <a:srgbClr val="6B6B6B"/>
-                </a:solidFill>
-                <a:latin typeface="Century Schoolbook"/>
-              </a:rPr>
-              <a:t>Rewrite the answer over 10</a:t>
-            </a:r>
-            <a:r>
-              <a:rPr sz="1900" b="0" i="1" baseline="30000">
-                <a:solidFill>
-                  <a:srgbClr val="6B6B6B"/>
-                </a:solidFill>
-                <a:latin typeface="Century Schoolbook"/>
-              </a:rPr>
-              <a:t>6</a:t>
-            </a:r>
-            <a:r>
-              <a:rPr sz="1900" b="0" i="1">
-                <a:solidFill>
-                  <a:srgbClr val="6B6B6B"/>
-                </a:solidFill>
-                <a:latin typeface="Century Schoolbook"/>
-              </a:rPr>
-              <a:t> first.</a:t>
             </a:r>
           </a:p>
         </p:txBody>
@@ -12927,44 +11521,9 @@
           </a:fontRef>
         </p:style>
       </p:cxnSp>
-      <p:sp>
-        <p:nvSpPr>
-          <p:cNvPr id="5" name="TextBox 4"/>
-          <p:cNvSpPr txBox="1"/>
-          <p:nvPr/>
-        </p:nvSpPr>
-        <p:spPr>
-          <a:xfrm>
-            <a:off x="777240" y="1261872"/>
-            <a:ext cx="10607040" cy="310896"/>
-          </a:xfrm>
-          <a:prstGeom prst="rect">
-            <a:avLst/>
-          </a:prstGeom>
-          <a:noFill/>
-        </p:spPr>
-        <p:txBody>
-          <a:bodyPr wrap="square" lIns="45720" rIns="45720" tIns="18288" bIns="18288" anchor="t">
-            <a:spAutoFit/>
-          </a:bodyPr>
-          <a:lstStyle/>
-          <a:p>
-            <a:pPr algn="l"/>
-            <a:r>
-              <a:rPr sz="1700" b="0" i="1">
-                <a:solidFill>
-                  <a:srgbClr val="6B6B6B"/>
-                </a:solidFill>
-                <a:latin typeface="Century Schoolbook"/>
-              </a:rPr>
-              <a:t>Answers.</a:t>
-            </a:r>
-          </a:p>
-        </p:txBody>
-      </p:sp>
       <p:cxnSp>
         <p:nvCxnSpPr>
-          <p:cNvPr id="6" name="Connector 5"/>
+          <p:cNvPr id="5" name="Connector 4"/>
           <p:cNvCxnSpPr/>
           <p:nvPr/>
         </p:nvCxnSpPr>
@@ -12999,7 +11558,7 @@
       </p:cxnSp>
       <p:sp>
         <p:nvSpPr>
-          <p:cNvPr id="7" name="TextBox 6"/>
+          <p:cNvPr id="6" name="TextBox 5"/>
           <p:cNvSpPr txBox="1"/>
           <p:nvPr/>
         </p:nvSpPr>
@@ -13034,7 +11593,7 @@
       </p:sp>
       <p:sp>
         <p:nvSpPr>
-          <p:cNvPr id="8" name="TextBox 7"/>
+          <p:cNvPr id="7" name="TextBox 6"/>
           <p:cNvSpPr txBox="1"/>
           <p:nvPr/>
         </p:nvSpPr>
@@ -13069,13 +11628,13 @@
       </p:sp>
       <p:sp>
         <p:nvSpPr>
-          <p:cNvPr id="9" name="TextBox 8"/>
-          <p:cNvSpPr txBox="1"/>
-          <p:nvPr/>
-        </p:nvSpPr>
-        <p:spPr>
-          <a:xfrm>
-            <a:off x="1874519" y="1760220"/>
+          <p:cNvPr id="8" name="TextBox 7"/>
+          <p:cNvSpPr txBox="1"/>
+          <p:nvPr/>
+        </p:nvSpPr>
+        <p:spPr>
+          <a:xfrm>
+            <a:off x="1874519" y="1440180"/>
             <a:ext cx="5991504" cy="457200"/>
           </a:xfrm>
           <a:prstGeom prst="rect">
@@ -13104,13 +11663,13 @@
       </p:sp>
       <p:sp>
         <p:nvSpPr>
-          <p:cNvPr id="10" name="TextBox 9"/>
-          <p:cNvSpPr txBox="1"/>
-          <p:nvPr/>
-        </p:nvSpPr>
-        <p:spPr>
-          <a:xfrm>
-            <a:off x="8277504" y="1760220"/>
+          <p:cNvPr id="9" name="TextBox 8"/>
+          <p:cNvSpPr txBox="1"/>
+          <p:nvPr/>
+        </p:nvSpPr>
+        <p:spPr>
+          <a:xfrm>
+            <a:off x="8277504" y="1440180"/>
             <a:ext cx="1546152" cy="457200"/>
           </a:xfrm>
           <a:prstGeom prst="rect">
@@ -13148,13 +11707,13 @@
       </p:sp>
       <p:sp>
         <p:nvSpPr>
-          <p:cNvPr id="11" name="TextBox 10"/>
-          <p:cNvSpPr txBox="1"/>
-          <p:nvPr/>
-        </p:nvSpPr>
-        <p:spPr>
-          <a:xfrm>
-            <a:off x="1874519" y="2372868"/>
+          <p:cNvPr id="10" name="TextBox 9"/>
+          <p:cNvSpPr txBox="1"/>
+          <p:nvPr/>
+        </p:nvSpPr>
+        <p:spPr>
+          <a:xfrm>
+            <a:off x="1874519" y="2052828"/>
             <a:ext cx="4573104" cy="457200"/>
           </a:xfrm>
           <a:prstGeom prst="rect">
@@ -13183,7 +11742,7 @@
       </p:sp>
       <p:pic>
         <p:nvPicPr>
-          <p:cNvPr id="12" name="Picture 11" descr="6e4449454b7e3ea6.png"/>
+          <p:cNvPr id="11" name="Picture 10" descr="6e4449454b7e3ea6.png"/>
           <p:cNvPicPr>
             <a:picLocks noChangeAspect="1"/>
           </p:cNvPicPr>
@@ -13197,7 +11756,7 @@
         </p:blipFill>
         <p:spPr>
           <a:xfrm>
-            <a:off x="6310464" y="2461260"/>
+            <a:off x="6310464" y="2141220"/>
             <a:ext cx="890016" cy="280416"/>
           </a:xfrm>
           <a:prstGeom prst="rect">
@@ -13207,13 +11766,13 @@
       </p:pic>
       <p:sp>
         <p:nvSpPr>
-          <p:cNvPr id="13" name="TextBox 12"/>
-          <p:cNvSpPr txBox="1"/>
-          <p:nvPr/>
-        </p:nvSpPr>
-        <p:spPr>
-          <a:xfrm>
-            <a:off x="7200480" y="2372868"/>
+          <p:cNvPr id="12" name="TextBox 11"/>
+          <p:cNvSpPr txBox="1"/>
+          <p:nvPr/>
+        </p:nvSpPr>
+        <p:spPr>
+          <a:xfrm>
+            <a:off x="7200480" y="2052828"/>
             <a:ext cx="1224116" cy="457200"/>
           </a:xfrm>
           <a:prstGeom prst="rect">
@@ -13242,7 +11801,7 @@
       </p:sp>
       <p:pic>
         <p:nvPicPr>
-          <p:cNvPr id="14" name="Picture 13" descr="7da0da260d230a62.png"/>
+          <p:cNvPr id="13" name="Picture 12" descr="7da0da260d230a62.png"/>
           <p:cNvPicPr>
             <a:picLocks noChangeAspect="1"/>
           </p:cNvPicPr>
@@ -13256,7 +11815,7 @@
         </p:blipFill>
         <p:spPr>
           <a:xfrm>
-            <a:off x="8287436" y="2458212"/>
+            <a:off x="8287436" y="2138172"/>
             <a:ext cx="905256" cy="286512"/>
           </a:xfrm>
           <a:prstGeom prst="rect">
@@ -13266,13 +11825,13 @@
       </p:pic>
       <p:sp>
         <p:nvSpPr>
-          <p:cNvPr id="15" name="TextBox 14"/>
-          <p:cNvSpPr txBox="1"/>
-          <p:nvPr/>
-        </p:nvSpPr>
-        <p:spPr>
-          <a:xfrm>
-            <a:off x="9192692" y="2372868"/>
+          <p:cNvPr id="14" name="TextBox 13"/>
+          <p:cNvSpPr txBox="1"/>
+          <p:nvPr/>
+        </p:nvSpPr>
+        <p:spPr>
+          <a:xfrm>
+            <a:off x="9192692" y="2052828"/>
             <a:ext cx="433854" cy="457200"/>
           </a:xfrm>
           <a:prstGeom prst="rect">
@@ -13301,13 +11860,13 @@
       </p:sp>
       <p:sp>
         <p:nvSpPr>
-          <p:cNvPr id="16" name="TextBox 15"/>
-          <p:cNvSpPr txBox="1"/>
-          <p:nvPr/>
-        </p:nvSpPr>
-        <p:spPr>
-          <a:xfrm>
-            <a:off x="10038027" y="2372868"/>
+          <p:cNvPr id="15" name="TextBox 14"/>
+          <p:cNvSpPr txBox="1"/>
+          <p:nvPr/>
+        </p:nvSpPr>
+        <p:spPr>
+          <a:xfrm>
+            <a:off x="10038027" y="2052828"/>
             <a:ext cx="1007357" cy="457200"/>
           </a:xfrm>
           <a:prstGeom prst="rect">
@@ -13336,13 +11895,13 @@
       </p:sp>
       <p:sp>
         <p:nvSpPr>
-          <p:cNvPr id="17" name="TextBox 16"/>
-          <p:cNvSpPr txBox="1"/>
-          <p:nvPr/>
-        </p:nvSpPr>
-        <p:spPr>
-          <a:xfrm>
-            <a:off x="1874519" y="2985516"/>
+          <p:cNvPr id="16" name="TextBox 15"/>
+          <p:cNvSpPr txBox="1"/>
+          <p:nvPr/>
+        </p:nvSpPr>
+        <p:spPr>
+          <a:xfrm>
+            <a:off x="1874519" y="2665476"/>
             <a:ext cx="3064939" cy="457200"/>
           </a:xfrm>
           <a:prstGeom prst="rect">
@@ -13371,7 +11930,7 @@
       </p:sp>
       <p:pic>
         <p:nvPicPr>
-          <p:cNvPr id="18" name="Picture 17" descr="c100c4232230d0dc.png"/>
+          <p:cNvPr id="17" name="Picture 16" descr="c100c4232230d0dc.png"/>
           <p:cNvPicPr>
             <a:picLocks noChangeAspect="1"/>
           </p:cNvPicPr>
@@ -13385,7 +11944,7 @@
         </p:blipFill>
         <p:spPr>
           <a:xfrm>
-            <a:off x="4802299" y="3009900"/>
+            <a:off x="4802299" y="2689860"/>
             <a:ext cx="853440" cy="408432"/>
           </a:xfrm>
           <a:prstGeom prst="rect">
@@ -13395,13 +11954,13 @@
       </p:pic>
       <p:sp>
         <p:nvSpPr>
-          <p:cNvPr id="19" name="TextBox 18"/>
-          <p:cNvSpPr txBox="1"/>
-          <p:nvPr/>
-        </p:nvSpPr>
-        <p:spPr>
-          <a:xfrm>
-            <a:off x="6204379" y="2985516"/>
+          <p:cNvPr id="18" name="TextBox 17"/>
+          <p:cNvSpPr txBox="1"/>
+          <p:nvPr/>
+        </p:nvSpPr>
+        <p:spPr>
+          <a:xfrm>
+            <a:off x="6204379" y="2665476"/>
             <a:ext cx="565792" cy="457200"/>
           </a:xfrm>
           <a:prstGeom prst="rect">
@@ -13430,13 +11989,13 @@
       </p:sp>
       <p:sp>
         <p:nvSpPr>
-          <p:cNvPr id="20" name="TextBox 19"/>
-          <p:cNvSpPr txBox="1"/>
-          <p:nvPr/>
-        </p:nvSpPr>
-        <p:spPr>
-          <a:xfrm>
-            <a:off x="1874519" y="3598164"/>
+          <p:cNvPr id="19" name="TextBox 18"/>
+          <p:cNvSpPr txBox="1"/>
+          <p:nvPr/>
+        </p:nvSpPr>
+        <p:spPr>
+          <a:xfrm>
+            <a:off x="1874519" y="3278124"/>
             <a:ext cx="2898925" cy="457200"/>
           </a:xfrm>
           <a:prstGeom prst="rect">
@@ -13465,7 +12024,7 @@
       </p:sp>
       <p:pic>
         <p:nvPicPr>
-          <p:cNvPr id="21" name="Picture 20" descr="bdc1cddc07790a72.png"/>
+          <p:cNvPr id="20" name="Picture 19" descr="bdc1cddc07790a72.png"/>
           <p:cNvPicPr>
             <a:picLocks noChangeAspect="1"/>
           </p:cNvPicPr>
@@ -13479,7 +12038,7 @@
         </p:blipFill>
         <p:spPr>
           <a:xfrm>
-            <a:off x="4636285" y="3706368"/>
+            <a:off x="4636285" y="3386328"/>
             <a:ext cx="1298448" cy="240791"/>
           </a:xfrm>
           <a:prstGeom prst="rect">
@@ -13489,13 +12048,13 @@
       </p:pic>
       <p:sp>
         <p:nvSpPr>
-          <p:cNvPr id="22" name="TextBox 21"/>
-          <p:cNvSpPr txBox="1"/>
-          <p:nvPr/>
-        </p:nvSpPr>
-        <p:spPr>
-          <a:xfrm>
-            <a:off x="6483373" y="3598164"/>
+          <p:cNvPr id="21" name="TextBox 20"/>
+          <p:cNvSpPr txBox="1"/>
+          <p:nvPr/>
+        </p:nvSpPr>
+        <p:spPr>
+          <a:xfrm>
+            <a:off x="6483373" y="3278124"/>
             <a:ext cx="821886" cy="457200"/>
           </a:xfrm>
           <a:prstGeom prst="rect">
@@ -13645,44 +12204,9 @@
           </a:fontRef>
         </p:style>
       </p:cxnSp>
-      <p:sp>
-        <p:nvSpPr>
-          <p:cNvPr id="5" name="TextBox 4"/>
-          <p:cNvSpPr txBox="1"/>
-          <p:nvPr/>
-        </p:nvSpPr>
-        <p:spPr>
-          <a:xfrm>
-            <a:off x="777240" y="1261872"/>
-            <a:ext cx="10607040" cy="310896"/>
-          </a:xfrm>
-          <a:prstGeom prst="rect">
-            <a:avLst/>
-          </a:prstGeom>
-          <a:noFill/>
-        </p:spPr>
-        <p:txBody>
-          <a:bodyPr wrap="square" lIns="45720" rIns="45720" tIns="18288" bIns="18288" anchor="t">
-            <a:spAutoFit/>
-          </a:bodyPr>
-          <a:lstStyle/>
-          <a:p>
-            <a:pPr algn="l"/>
-            <a:r>
-              <a:rPr sz="1700" b="0" i="1">
-                <a:solidFill>
-                  <a:srgbClr val="6B6B6B"/>
-                </a:solidFill>
-                <a:latin typeface="Century Schoolbook"/>
-              </a:rPr>
-              <a:t>Answer.</a:t>
-            </a:r>
-          </a:p>
-        </p:txBody>
-      </p:sp>
       <p:cxnSp>
         <p:nvCxnSpPr>
-          <p:cNvPr id="6" name="Connector 5"/>
+          <p:cNvPr id="5" name="Connector 4"/>
           <p:cNvCxnSpPr/>
           <p:nvPr/>
         </p:nvCxnSpPr>
@@ -13717,7 +12241,7 @@
       </p:cxnSp>
       <p:sp>
         <p:nvSpPr>
-          <p:cNvPr id="7" name="TextBox 6"/>
+          <p:cNvPr id="6" name="TextBox 5"/>
           <p:cNvSpPr txBox="1"/>
           <p:nvPr/>
         </p:nvSpPr>
@@ -13752,7 +12276,7 @@
       </p:sp>
       <p:sp>
         <p:nvSpPr>
-          <p:cNvPr id="8" name="TextBox 7"/>
+          <p:cNvPr id="7" name="TextBox 6"/>
           <p:cNvSpPr txBox="1"/>
           <p:nvPr/>
         </p:nvSpPr>
@@ -13787,7 +12311,7 @@
       </p:sp>
       <p:pic>
         <p:nvPicPr>
-          <p:cNvPr id="9" name="Picture 8" descr="98fdf47dd4ead5bf.png"/>
+          <p:cNvPr id="8" name="Picture 7" descr="98fdf47dd4ead5bf.png"/>
           <p:cNvPicPr>
             <a:picLocks noChangeAspect="1"/>
           </p:cNvPicPr>
@@ -13811,7 +12335,7 @@
       </p:pic>
       <p:sp>
         <p:nvSpPr>
-          <p:cNvPr id="10" name="TextBox 9"/>
+          <p:cNvPr id="9" name="TextBox 8"/>
           <p:cNvSpPr txBox="1"/>
           <p:nvPr/>
         </p:nvSpPr>
@@ -13846,7 +12370,7 @@
       </p:sp>
       <p:pic>
         <p:nvPicPr>
-          <p:cNvPr id="11" name="Picture 10" descr="ce9b607ea85ce740.png"/>
+          <p:cNvPr id="10" name="Picture 9" descr="ce9b607ea85ce740.png"/>
           <p:cNvPicPr>
             <a:picLocks noChangeAspect="1"/>
           </p:cNvPicPr>
@@ -13870,7 +12394,7 @@
       </p:pic>
       <p:sp>
         <p:nvSpPr>
-          <p:cNvPr id="12" name="TextBox 11"/>
+          <p:cNvPr id="11" name="TextBox 10"/>
           <p:cNvSpPr txBox="1"/>
           <p:nvPr/>
         </p:nvSpPr>
@@ -13905,69 +12429,7 @@
       </p:sp>
       <p:sp>
         <p:nvSpPr>
-          <p:cNvPr id="13" name="TextBox 12"/>
-          <p:cNvSpPr txBox="1"/>
-          <p:nvPr/>
-        </p:nvSpPr>
-        <p:spPr>
-          <a:xfrm>
-            <a:off x="1828800" y="3520439"/>
-            <a:ext cx="8503920" cy="548640"/>
-          </a:xfrm>
-          <a:prstGeom prst="rect">
-            <a:avLst/>
-          </a:prstGeom>
-          <a:noFill/>
-        </p:spPr>
-        <p:txBody>
-          <a:bodyPr wrap="square" lIns="45720" rIns="45720" tIns="18288" bIns="18288" anchor="t">
-            <a:spAutoFit/>
-          </a:bodyPr>
-          <a:lstStyle/>
-          <a:p>
-            <a:pPr algn="ctr"/>
-            <a:r>
-              <a:rPr sz="2400" b="0" i="0">
-                <a:solidFill>
-                  <a:srgbClr val="6B6B6B"/>
-                </a:solidFill>
-                <a:latin typeface="Century Schoolbook"/>
-              </a:rPr>
-              <a:t>1.02 × 10</a:t>
-            </a:r>
-            <a:r>
-              <a:rPr sz="2400" b="0" i="0" baseline="30000">
-                <a:solidFill>
-                  <a:srgbClr val="6B6B6B"/>
-                </a:solidFill>
-                <a:latin typeface="Century Schoolbook"/>
-              </a:rPr>
-              <a:t>7</a:t>
-            </a:r>
-            <a:r>
-              <a:rPr sz="2400" b="0" i="0">
-                <a:solidFill>
-                  <a:srgbClr val="6B6B6B"/>
-                </a:solidFill>
-                <a:latin typeface="Century Schoolbook"/>
-              </a:rPr>
-              <a:t> = 10.2 × 10</a:t>
-            </a:r>
-            <a:r>
-              <a:rPr sz="2400" b="0" i="0" baseline="30000">
-                <a:solidFill>
-                  <a:srgbClr val="6B6B6B"/>
-                </a:solidFill>
-                <a:latin typeface="Century Schoolbook"/>
-              </a:rPr>
-              <a:t>6</a:t>
-            </a:r>
-          </a:p>
-        </p:txBody>
-      </p:sp>
-      <p:sp>
-        <p:nvSpPr>
-          <p:cNvPr id="14" name="TextBox 13"/>
+          <p:cNvPr id="12" name="TextBox 11"/>
           <p:cNvSpPr txBox="1"/>
           <p:nvPr/>
         </p:nvSpPr>
@@ -14123,44 +12585,9 @@
           </a:fontRef>
         </p:style>
       </p:cxnSp>
-      <p:sp>
-        <p:nvSpPr>
-          <p:cNvPr id="5" name="TextBox 4"/>
-          <p:cNvSpPr txBox="1"/>
-          <p:nvPr/>
-        </p:nvSpPr>
-        <p:spPr>
-          <a:xfrm>
-            <a:off x="777240" y="1261872"/>
-            <a:ext cx="10607040" cy="310896"/>
-          </a:xfrm>
-          <a:prstGeom prst="rect">
-            <a:avLst/>
-          </a:prstGeom>
-          <a:noFill/>
-        </p:spPr>
-        <p:txBody>
-          <a:bodyPr wrap="square" lIns="45720" rIns="45720" tIns="18288" bIns="18288" anchor="t">
-            <a:spAutoFit/>
-          </a:bodyPr>
-          <a:lstStyle/>
-          <a:p>
-            <a:pPr algn="l"/>
-            <a:r>
-              <a:rPr sz="1700" b="0" i="1">
-                <a:solidFill>
-                  <a:srgbClr val="6B6B6B"/>
-                </a:solidFill>
-                <a:latin typeface="Century Schoolbook"/>
-              </a:rPr>
-              <a:t>Take your time. Boards up when you have written it.</a:t>
-            </a:r>
-          </a:p>
-        </p:txBody>
-      </p:sp>
       <p:cxnSp>
         <p:nvCxnSpPr>
-          <p:cNvPr id="6" name="Connector 5"/>
+          <p:cNvPr id="5" name="Connector 4"/>
           <p:cNvCxnSpPr/>
           <p:nvPr/>
         </p:nvCxnSpPr>
@@ -14195,7 +12622,7 @@
       </p:cxnSp>
       <p:sp>
         <p:nvSpPr>
-          <p:cNvPr id="7" name="TextBox 6"/>
+          <p:cNvPr id="6" name="TextBox 5"/>
           <p:cNvSpPr txBox="1"/>
           <p:nvPr/>
         </p:nvSpPr>
@@ -14230,7 +12657,7 @@
       </p:sp>
       <p:sp>
         <p:nvSpPr>
-          <p:cNvPr id="8" name="TextBox 7"/>
+          <p:cNvPr id="7" name="TextBox 6"/>
           <p:cNvSpPr txBox="1"/>
           <p:nvPr/>
         </p:nvSpPr>
@@ -14265,7 +12692,7 @@
       </p:sp>
       <p:sp>
         <p:nvSpPr>
-          <p:cNvPr id="9" name="TextBox 8"/>
+          <p:cNvPr id="8" name="TextBox 7"/>
           <p:cNvSpPr txBox="1"/>
           <p:nvPr/>
         </p:nvSpPr>
@@ -14300,7 +12727,7 @@
       </p:sp>
       <p:pic>
         <p:nvPicPr>
-          <p:cNvPr id="10" name="Picture 9" descr="82e722a216f1ae2f.png"/>
+          <p:cNvPr id="9" name="Picture 8" descr="82e722a216f1ae2f.png"/>
           <p:cNvPicPr>
             <a:picLocks noChangeAspect="1"/>
           </p:cNvPicPr>
@@ -14324,7 +12751,7 @@
       </p:pic>
       <p:sp>
         <p:nvSpPr>
-          <p:cNvPr id="11" name="TextBox 10"/>
+          <p:cNvPr id="10" name="TextBox 9"/>
           <p:cNvSpPr txBox="1"/>
           <p:nvPr/>
         </p:nvSpPr>
@@ -14359,7 +12786,7 @@
       </p:sp>
       <p:sp>
         <p:nvSpPr>
-          <p:cNvPr id="12" name="TextBox 11"/>
+          <p:cNvPr id="11" name="TextBox 10"/>
           <p:cNvSpPr txBox="1"/>
           <p:nvPr/>
         </p:nvSpPr>
@@ -14394,7 +12821,7 @@
       </p:sp>
       <p:sp>
         <p:nvSpPr>
-          <p:cNvPr id="13" name="TextBox 12"/>
+          <p:cNvPr id="12" name="TextBox 11"/>
           <p:cNvSpPr txBox="1"/>
           <p:nvPr/>
         </p:nvSpPr>
@@ -14423,41 +12850,6 @@
                 <a:latin typeface="Century Schoolbook"/>
               </a:rPr>
               <a:t>Write your answer in sentences.</a:t>
-            </a:r>
-          </a:p>
-        </p:txBody>
-      </p:sp>
-      <p:sp>
-        <p:nvSpPr>
-          <p:cNvPr id="14" name="TextBox 13"/>
-          <p:cNvSpPr txBox="1"/>
-          <p:nvPr/>
-        </p:nvSpPr>
-        <p:spPr>
-          <a:xfrm>
-            <a:off x="777240" y="4828032"/>
-            <a:ext cx="10607040" cy="365760"/>
-          </a:xfrm>
-          <a:prstGeom prst="rect">
-            <a:avLst/>
-          </a:prstGeom>
-          <a:noFill/>
-        </p:spPr>
-        <p:txBody>
-          <a:bodyPr wrap="square" lIns="45720" rIns="45720" tIns="18288" bIns="18288" anchor="t">
-            <a:spAutoFit/>
-          </a:bodyPr>
-          <a:lstStyle/>
-          <a:p>
-            <a:pPr algn="ctr"/>
-            <a:r>
-              <a:rPr sz="1900" b="0" i="1">
-                <a:solidFill>
-                  <a:srgbClr val="6B6B6B"/>
-                </a:solidFill>
-                <a:latin typeface="Century Schoolbook"/>
-              </a:rPr>
-              <a:t>Two mistakes, then the sum.</a:t>
             </a:r>
           </a:p>
         </p:txBody>
@@ -14585,44 +12977,9 @@
           </a:fontRef>
         </p:style>
       </p:cxnSp>
-      <p:sp>
-        <p:nvSpPr>
-          <p:cNvPr id="5" name="TextBox 4"/>
-          <p:cNvSpPr txBox="1"/>
-          <p:nvPr/>
-        </p:nvSpPr>
-        <p:spPr>
-          <a:xfrm>
-            <a:off x="777240" y="1261872"/>
-            <a:ext cx="10607040" cy="310896"/>
-          </a:xfrm>
-          <a:prstGeom prst="rect">
-            <a:avLst/>
-          </a:prstGeom>
-          <a:noFill/>
-        </p:spPr>
-        <p:txBody>
-          <a:bodyPr wrap="square" lIns="45720" rIns="45720" tIns="18288" bIns="18288" anchor="t">
-            <a:spAutoFit/>
-          </a:bodyPr>
-          <a:lstStyle/>
-          <a:p>
-            <a:pPr algn="l"/>
-            <a:r>
-              <a:rPr sz="1700" b="0" i="1">
-                <a:solidFill>
-                  <a:srgbClr val="6B6B6B"/>
-                </a:solidFill>
-                <a:latin typeface="Century Schoolbook"/>
-              </a:rPr>
-              <a:t>Answer.</a:t>
-            </a:r>
-          </a:p>
-        </p:txBody>
-      </p:sp>
       <p:cxnSp>
         <p:nvCxnSpPr>
-          <p:cNvPr id="6" name="Connector 5"/>
+          <p:cNvPr id="5" name="Connector 4"/>
           <p:cNvCxnSpPr/>
           <p:nvPr/>
         </p:nvCxnSpPr>
@@ -14657,7 +13014,7 @@
       </p:cxnSp>
       <p:sp>
         <p:nvSpPr>
-          <p:cNvPr id="7" name="TextBox 6"/>
+          <p:cNvPr id="6" name="TextBox 5"/>
           <p:cNvSpPr txBox="1"/>
           <p:nvPr/>
         </p:nvSpPr>
@@ -14692,7 +13049,7 @@
       </p:sp>
       <p:sp>
         <p:nvSpPr>
-          <p:cNvPr id="8" name="TextBox 7"/>
+          <p:cNvPr id="7" name="TextBox 6"/>
           <p:cNvSpPr txBox="1"/>
           <p:nvPr/>
         </p:nvSpPr>
@@ -14727,7 +13084,7 @@
       </p:sp>
       <p:sp>
         <p:nvSpPr>
-          <p:cNvPr id="9" name="TextBox 8"/>
+          <p:cNvPr id="8" name="TextBox 7"/>
           <p:cNvSpPr txBox="1"/>
           <p:nvPr/>
         </p:nvSpPr>
@@ -14762,7 +13119,7 @@
       </p:sp>
       <p:pic>
         <p:nvPicPr>
-          <p:cNvPr id="10" name="Picture 9" descr="6a5bd63b1555e627.png"/>
+          <p:cNvPr id="9" name="Picture 8" descr="6a5bd63b1555e627.png"/>
           <p:cNvPicPr>
             <a:picLocks noChangeAspect="1"/>
           </p:cNvPicPr>
@@ -14786,7 +13143,7 @@
       </p:pic>
       <p:sp>
         <p:nvSpPr>
-          <p:cNvPr id="11" name="TextBox 10"/>
+          <p:cNvPr id="10" name="TextBox 9"/>
           <p:cNvSpPr txBox="1"/>
           <p:nvPr/>
         </p:nvSpPr>
@@ -14821,7 +13178,7 @@
       </p:sp>
       <p:sp>
         <p:nvSpPr>
-          <p:cNvPr id="12" name="TextBox 11"/>
+          <p:cNvPr id="11" name="TextBox 10"/>
           <p:cNvSpPr txBox="1"/>
           <p:nvPr/>
         </p:nvSpPr>
@@ -14856,42 +13213,7 @@
       </p:sp>
       <p:sp>
         <p:nvSpPr>
-          <p:cNvPr id="13" name="TextBox 12"/>
-          <p:cNvSpPr txBox="1"/>
-          <p:nvPr/>
-        </p:nvSpPr>
-        <p:spPr>
-          <a:xfrm>
-            <a:off x="1828800" y="3409519"/>
-            <a:ext cx="8503920" cy="548640"/>
-          </a:xfrm>
-          <a:prstGeom prst="rect">
-            <a:avLst/>
-          </a:prstGeom>
-          <a:noFill/>
-        </p:spPr>
-        <p:txBody>
-          <a:bodyPr wrap="square" lIns="45720" rIns="45720" tIns="18288" bIns="18288" anchor="t">
-            <a:spAutoFit/>
-          </a:bodyPr>
-          <a:lstStyle/>
-          <a:p>
-            <a:pPr algn="ctr"/>
-            <a:r>
-              <a:rPr sz="2400" b="0" i="0">
-                <a:solidFill>
-                  <a:srgbClr val="6B6B6B"/>
-                </a:solidFill>
-                <a:latin typeface="Century Schoolbook"/>
-              </a:rPr>
-              <a:t>one mistake in the coefficients, one in the exponents</a:t>
-            </a:r>
-          </a:p>
-        </p:txBody>
-      </p:sp>
-      <p:sp>
-        <p:nvSpPr>
-          <p:cNvPr id="14" name="TextBox 13"/>
+          <p:cNvPr id="12" name="TextBox 11"/>
           <p:cNvSpPr txBox="1"/>
           <p:nvPr/>
         </p:nvSpPr>
@@ -15056,44 +13378,9 @@
           </a:fontRef>
         </p:style>
       </p:cxnSp>
-      <p:sp>
-        <p:nvSpPr>
-          <p:cNvPr id="5" name="TextBox 4"/>
-          <p:cNvSpPr txBox="1"/>
-          <p:nvPr/>
-        </p:nvSpPr>
-        <p:spPr>
-          <a:xfrm>
-            <a:off x="777240" y="1261872"/>
-            <a:ext cx="10607040" cy="310896"/>
-          </a:xfrm>
-          <a:prstGeom prst="rect">
-            <a:avLst/>
-          </a:prstGeom>
-          <a:noFill/>
-        </p:spPr>
-        <p:txBody>
-          <a:bodyPr wrap="square" lIns="45720" rIns="45720" tIns="18288" bIns="18288" anchor="t">
-            <a:spAutoFit/>
-          </a:bodyPr>
-          <a:lstStyle/>
-          <a:p>
-            <a:pPr algn="l"/>
-            <a:r>
-              <a:rPr sz="1700" b="0" i="1">
-                <a:solidFill>
-                  <a:srgbClr val="6B6B6B"/>
-                </a:solidFill>
-                <a:latin typeface="Century Schoolbook"/>
-              </a:rPr>
-              <a:t>Six questions. On your own, in silence.</a:t>
-            </a:r>
-          </a:p>
-        </p:txBody>
-      </p:sp>
       <p:cxnSp>
         <p:nvCxnSpPr>
-          <p:cNvPr id="6" name="Connector 5"/>
+          <p:cNvPr id="5" name="Connector 4"/>
           <p:cNvCxnSpPr/>
           <p:nvPr/>
         </p:nvCxnSpPr>
@@ -15128,7 +13415,7 @@
       </p:cxnSp>
       <p:sp>
         <p:nvSpPr>
-          <p:cNvPr id="7" name="TextBox 6"/>
+          <p:cNvPr id="6" name="TextBox 5"/>
           <p:cNvSpPr txBox="1"/>
           <p:nvPr/>
         </p:nvSpPr>
@@ -15163,7 +13450,7 @@
       </p:sp>
       <p:sp>
         <p:nvSpPr>
-          <p:cNvPr id="8" name="TextBox 7"/>
+          <p:cNvPr id="7" name="TextBox 6"/>
           <p:cNvSpPr txBox="1"/>
           <p:nvPr/>
         </p:nvSpPr>
@@ -15198,7 +13485,7 @@
       </p:sp>
       <p:sp>
         <p:nvSpPr>
-          <p:cNvPr id="9" name="TextBox 8"/>
+          <p:cNvPr id="8" name="TextBox 7"/>
           <p:cNvSpPr txBox="1"/>
           <p:nvPr/>
         </p:nvSpPr>
@@ -15233,7 +13520,7 @@
       </p:sp>
       <p:sp>
         <p:nvSpPr>
-          <p:cNvPr id="10" name="TextBox 9"/>
+          <p:cNvPr id="9" name="TextBox 8"/>
           <p:cNvSpPr txBox="1"/>
           <p:nvPr/>
         </p:nvSpPr>
@@ -15268,7 +13555,7 @@
       </p:sp>
       <p:sp>
         <p:nvSpPr>
-          <p:cNvPr id="11" name="TextBox 10"/>
+          <p:cNvPr id="10" name="TextBox 9"/>
           <p:cNvSpPr txBox="1"/>
           <p:nvPr/>
         </p:nvSpPr>
@@ -15303,7 +13590,7 @@
       </p:sp>
       <p:sp>
         <p:nvSpPr>
-          <p:cNvPr id="12" name="TextBox 11"/>
+          <p:cNvPr id="11" name="TextBox 10"/>
           <p:cNvSpPr txBox="1"/>
           <p:nvPr/>
         </p:nvSpPr>
@@ -15338,7 +13625,7 @@
       </p:sp>
       <p:sp>
         <p:nvSpPr>
-          <p:cNvPr id="13" name="TextBox 12"/>
+          <p:cNvPr id="12" name="TextBox 11"/>
           <p:cNvSpPr txBox="1"/>
           <p:nvPr/>
         </p:nvSpPr>
@@ -15373,7 +13660,7 @@
       </p:sp>
       <p:sp>
         <p:nvSpPr>
-          <p:cNvPr id="14" name="TextBox 13"/>
+          <p:cNvPr id="13" name="TextBox 12"/>
           <p:cNvSpPr txBox="1"/>
           <p:nvPr/>
         </p:nvSpPr>
@@ -15529,44 +13816,9 @@
           </a:fontRef>
         </p:style>
       </p:cxnSp>
-      <p:sp>
-        <p:nvSpPr>
-          <p:cNvPr id="5" name="TextBox 4"/>
-          <p:cNvSpPr txBox="1"/>
-          <p:nvPr/>
-        </p:nvSpPr>
-        <p:spPr>
-          <a:xfrm>
-            <a:off x="777240" y="1261872"/>
-            <a:ext cx="10607040" cy="310896"/>
-          </a:xfrm>
-          <a:prstGeom prst="rect">
-            <a:avLst/>
-          </a:prstGeom>
-          <a:noFill/>
-        </p:spPr>
-        <p:txBody>
-          <a:bodyPr wrap="square" lIns="45720" rIns="45720" tIns="18288" bIns="18288" anchor="t">
-            <a:spAutoFit/>
-          </a:bodyPr>
-          <a:lstStyle/>
-          <a:p>
-            <a:pPr algn="l"/>
-            <a:r>
-              <a:rPr sz="1700" b="0" i="1">
-                <a:solidFill>
-                  <a:srgbClr val="6B6B6B"/>
-                </a:solidFill>
-                <a:latin typeface="Century Schoolbook"/>
-              </a:rPr>
-              <a:t>Last five minutes.</a:t>
-            </a:r>
-          </a:p>
-        </p:txBody>
-      </p:sp>
       <p:cxnSp>
         <p:nvCxnSpPr>
-          <p:cNvPr id="6" name="Connector 5"/>
+          <p:cNvPr id="5" name="Connector 4"/>
           <p:cNvCxnSpPr/>
           <p:nvPr/>
         </p:nvCxnSpPr>
@@ -15601,7 +13853,7 @@
       </p:cxnSp>
       <p:sp>
         <p:nvSpPr>
-          <p:cNvPr id="7" name="TextBox 6"/>
+          <p:cNvPr id="6" name="TextBox 5"/>
           <p:cNvSpPr txBox="1"/>
           <p:nvPr/>
         </p:nvSpPr>
@@ -15636,7 +13888,7 @@
       </p:sp>
       <p:sp>
         <p:nvSpPr>
-          <p:cNvPr id="8" name="TextBox 7"/>
+          <p:cNvPr id="7" name="TextBox 6"/>
           <p:cNvSpPr txBox="1"/>
           <p:nvPr/>
         </p:nvSpPr>
@@ -15671,7 +13923,7 @@
       </p:sp>
       <p:sp>
         <p:nvSpPr>
-          <p:cNvPr id="9" name="TextBox 8"/>
+          <p:cNvPr id="8" name="TextBox 7"/>
           <p:cNvSpPr txBox="1"/>
           <p:nvPr/>
         </p:nvSpPr>
@@ -15706,7 +13958,7 @@
       </p:sp>
       <p:sp>
         <p:nvSpPr>
-          <p:cNvPr id="10" name="TextBox 9"/>
+          <p:cNvPr id="9" name="TextBox 8"/>
           <p:cNvSpPr txBox="1"/>
           <p:nvPr/>
         </p:nvSpPr>
@@ -15741,7 +13993,7 @@
       </p:sp>
       <p:sp>
         <p:nvSpPr>
-          <p:cNvPr id="11" name="TextBox 10"/>
+          <p:cNvPr id="10" name="TextBox 9"/>
           <p:cNvSpPr txBox="1"/>
           <p:nvPr/>
         </p:nvSpPr>
@@ -15776,7 +14028,7 @@
       </p:sp>
       <p:sp>
         <p:nvSpPr>
-          <p:cNvPr id="12" name="TextBox 11"/>
+          <p:cNvPr id="11" name="TextBox 10"/>
           <p:cNvSpPr txBox="1"/>
           <p:nvPr/>
         </p:nvSpPr>
@@ -15811,7 +14063,7 @@
       </p:sp>
       <p:sp>
         <p:nvSpPr>
-          <p:cNvPr id="13" name="TextBox 12"/>
+          <p:cNvPr id="12" name="TextBox 11"/>
           <p:cNvSpPr txBox="1"/>
           <p:nvPr/>
         </p:nvSpPr>
@@ -15846,7 +14098,7 @@
       </p:sp>
       <p:sp>
         <p:nvSpPr>
-          <p:cNvPr id="14" name="TextBox 13"/>
+          <p:cNvPr id="13" name="TextBox 12"/>
           <p:cNvSpPr txBox="1"/>
           <p:nvPr/>
         </p:nvSpPr>
@@ -15881,7 +14133,7 @@
       </p:sp>
       <p:sp>
         <p:nvSpPr>
-          <p:cNvPr id="15" name="TextBox 14"/>
+          <p:cNvPr id="14" name="TextBox 13"/>
           <p:cNvSpPr txBox="1"/>
           <p:nvPr/>
         </p:nvSpPr>
@@ -15916,7 +14168,7 @@
       </p:sp>
       <p:sp>
         <p:nvSpPr>
-          <p:cNvPr id="16" name="TextBox 15"/>
+          <p:cNvPr id="15" name="TextBox 14"/>
           <p:cNvSpPr txBox="1"/>
           <p:nvPr/>
         </p:nvSpPr>
@@ -16072,44 +14324,9 @@
           </a:fontRef>
         </p:style>
       </p:cxnSp>
-      <p:sp>
-        <p:nvSpPr>
-          <p:cNvPr id="5" name="TextBox 4"/>
-          <p:cNvSpPr txBox="1"/>
-          <p:nvPr/>
-        </p:nvSpPr>
-        <p:spPr>
-          <a:xfrm>
-            <a:off x="777240" y="1261872"/>
-            <a:ext cx="10607040" cy="310896"/>
-          </a:xfrm>
-          <a:prstGeom prst="rect">
-            <a:avLst/>
-          </a:prstGeom>
-          <a:noFill/>
-        </p:spPr>
-        <p:txBody>
-          <a:bodyPr wrap="square" lIns="45720" rIns="45720" tIns="18288" bIns="18288" anchor="t">
-            <a:spAutoFit/>
-          </a:bodyPr>
-          <a:lstStyle/>
-          <a:p>
-            <a:pPr algn="l"/>
-            <a:r>
-              <a:rPr sz="1700" b="0" i="1">
-                <a:solidFill>
-                  <a:srgbClr val="6B6B6B"/>
-                </a:solidFill>
-                <a:latin typeface="Century Schoolbook"/>
-              </a:rPr>
-              <a:t>Copy the table.</a:t>
-            </a:r>
-          </a:p>
-        </p:txBody>
-      </p:sp>
       <p:cxnSp>
         <p:nvCxnSpPr>
-          <p:cNvPr id="6" name="Connector 5"/>
+          <p:cNvPr id="5" name="Connector 4"/>
           <p:cNvCxnSpPr/>
           <p:nvPr/>
         </p:nvCxnSpPr>
@@ -16144,7 +14361,7 @@
       </p:cxnSp>
       <p:sp>
         <p:nvSpPr>
-          <p:cNvPr id="7" name="TextBox 6"/>
+          <p:cNvPr id="6" name="TextBox 5"/>
           <p:cNvSpPr txBox="1"/>
           <p:nvPr/>
         </p:nvSpPr>
@@ -16179,7 +14396,7 @@
       </p:sp>
       <p:sp>
         <p:nvSpPr>
-          <p:cNvPr id="8" name="TextBox 7"/>
+          <p:cNvPr id="7" name="TextBox 6"/>
           <p:cNvSpPr txBox="1"/>
           <p:nvPr/>
         </p:nvSpPr>
@@ -16214,13 +14431,13 @@
       </p:sp>
       <p:sp>
         <p:nvSpPr>
-          <p:cNvPr id="9" name="TextBox 8"/>
-          <p:cNvSpPr txBox="1"/>
-          <p:nvPr/>
-        </p:nvSpPr>
-        <p:spPr>
-          <a:xfrm>
-            <a:off x="777240" y="1737360"/>
+          <p:cNvPr id="8" name="TextBox 7"/>
+          <p:cNvSpPr txBox="1"/>
+          <p:nvPr/>
+        </p:nvSpPr>
+        <p:spPr>
+          <a:xfrm>
+            <a:off x="777240" y="1389888"/>
             <a:ext cx="10607040" cy="402336"/>
           </a:xfrm>
           <a:prstGeom prst="rect">
@@ -16249,13 +14466,13 @@
       </p:sp>
       <p:cxnSp>
         <p:nvCxnSpPr>
-          <p:cNvPr id="10" name="Connector 9"/>
+          <p:cNvPr id="9" name="Connector 8"/>
           <p:cNvCxnSpPr/>
           <p:nvPr/>
         </p:nvCxnSpPr>
         <p:spPr>
           <a:xfrm>
-            <a:off x="777240" y="2176272"/>
+            <a:off x="777240" y="1828800"/>
             <a:ext cx="10607040" cy="0"/>
           </a:xfrm>
           <a:prstGeom prst="line">
@@ -16284,14 +14501,14 @@
       </p:cxnSp>
       <p:graphicFrame>
         <p:nvGraphicFramePr>
-          <p:cNvPr id="11" name="Table 10"/>
+          <p:cNvPr id="10" name="Table 9"/>
           <p:cNvGraphicFramePr>
             <a:graphicFrameLocks noGrp="1"/>
           </p:cNvGraphicFramePr>
           <p:nvPr/>
         </p:nvGraphicFramePr>
         <p:xfrm>
-          <a:off x="1874520" y="2340864"/>
+          <a:off x="1874520" y="1993392"/>
           <a:ext cx="8412480" cy="768096"/>
         </p:xfrm>
         <a:graphic>
@@ -16728,7 +14945,7 @@
       </p:graphicFrame>
       <p:pic>
         <p:nvPicPr>
-          <p:cNvPr id="12" name="Picture 11" descr="f39e13154060a858.png"/>
+          <p:cNvPr id="11" name="Picture 10" descr="f39e13154060a858.png"/>
           <p:cNvPicPr>
             <a:picLocks noChangeAspect="1"/>
           </p:cNvPicPr>
@@ -16742,7 +14959,7 @@
         </p:blipFill>
         <p:spPr>
           <a:xfrm>
-            <a:off x="3811523" y="3375660"/>
+            <a:off x="3811523" y="3028188"/>
             <a:ext cx="4538472" cy="335280"/>
           </a:xfrm>
           <a:prstGeom prst="rect">
@@ -16752,7 +14969,7 @@
       </p:pic>
       <p:pic>
         <p:nvPicPr>
-          <p:cNvPr id="13" name="Picture 12" descr="09bdd4fb91237775.png"/>
+          <p:cNvPr id="12" name="Picture 11" descr="09bdd4fb91237775.png"/>
           <p:cNvPicPr>
             <a:picLocks noChangeAspect="1"/>
           </p:cNvPicPr>
@@ -16766,7 +14983,7 @@
         </p:blipFill>
         <p:spPr>
           <a:xfrm>
-            <a:off x="1979675" y="4050791"/>
+            <a:off x="1979675" y="3703320"/>
             <a:ext cx="8202168" cy="356616"/>
           </a:xfrm>
           <a:prstGeom prst="rect">
@@ -16776,13 +14993,13 @@
       </p:pic>
       <p:sp>
         <p:nvSpPr>
-          <p:cNvPr id="14" name="TextBox 13"/>
-          <p:cNvSpPr txBox="1"/>
-          <p:nvPr/>
-        </p:nvSpPr>
-        <p:spPr>
-          <a:xfrm>
-            <a:off x="987552" y="4773168"/>
+          <p:cNvPr id="13" name="TextBox 12"/>
+          <p:cNvSpPr txBox="1"/>
+          <p:nvPr/>
+        </p:nvSpPr>
+        <p:spPr>
+          <a:xfrm>
+            <a:off x="987552" y="4425696"/>
             <a:ext cx="10131551" cy="475488"/>
           </a:xfrm>
           <a:prstGeom prst="rect">
@@ -17045,7 +15262,7 @@
         </p:nvSpPr>
         <p:spPr>
           <a:xfrm>
-            <a:off x="777240" y="1737360"/>
+            <a:off x="777240" y="1389888"/>
             <a:ext cx="10607040" cy="402336"/>
           </a:xfrm>
           <a:prstGeom prst="rect">
@@ -17080,7 +15297,7 @@
         </p:nvCxnSpPr>
         <p:spPr>
           <a:xfrm>
-            <a:off x="777240" y="2176272"/>
+            <a:off x="777240" y="1828800"/>
             <a:ext cx="10607040" cy="0"/>
           </a:xfrm>
           <a:prstGeom prst="line">
@@ -17123,7 +15340,7 @@
         </p:blipFill>
         <p:spPr>
           <a:xfrm>
-            <a:off x="3247644" y="2340864"/>
+            <a:off x="3247644" y="1993392"/>
             <a:ext cx="5666232" cy="411480"/>
           </a:xfrm>
           <a:prstGeom prst="rect">
@@ -17147,7 +15364,7 @@
         </p:blipFill>
         <p:spPr>
           <a:xfrm>
-            <a:off x="2289048" y="3028188"/>
+            <a:off x="2289048" y="2680716"/>
             <a:ext cx="7583424" cy="408432"/>
           </a:xfrm>
           <a:prstGeom prst="rect">
@@ -17163,7 +15380,7 @@
         </p:nvSpPr>
         <p:spPr>
           <a:xfrm>
-            <a:off x="987552" y="3776472"/>
+            <a:off x="987552" y="3429000"/>
             <a:ext cx="10131551" cy="475488"/>
           </a:xfrm>
           <a:prstGeom prst="rect">
@@ -17198,7 +15415,7 @@
         </p:nvSpPr>
         <p:spPr>
           <a:xfrm>
-            <a:off x="987552" y="4507992"/>
+            <a:off x="987552" y="4160520"/>
             <a:ext cx="10131551" cy="950976"/>
           </a:xfrm>
           <a:prstGeom prst="rect">
@@ -17461,7 +15678,7 @@
         </p:nvSpPr>
         <p:spPr>
           <a:xfrm>
-            <a:off x="777240" y="1737360"/>
+            <a:off x="777240" y="1389888"/>
             <a:ext cx="10607040" cy="402336"/>
           </a:xfrm>
           <a:prstGeom prst="rect">
@@ -17496,7 +15713,7 @@
         </p:nvCxnSpPr>
         <p:spPr>
           <a:xfrm>
-            <a:off x="777240" y="2176272"/>
+            <a:off x="777240" y="1828800"/>
             <a:ext cx="10607040" cy="0"/>
           </a:xfrm>
           <a:prstGeom prst="line">
@@ -17539,7 +15756,7 @@
         </p:blipFill>
         <p:spPr>
           <a:xfrm>
-            <a:off x="4171188" y="2340864"/>
+            <a:off x="4171188" y="1993392"/>
             <a:ext cx="3819144" cy="411480"/>
           </a:xfrm>
           <a:prstGeom prst="rect">
@@ -17563,7 +15780,7 @@
         </p:blipFill>
         <p:spPr>
           <a:xfrm>
-            <a:off x="2677668" y="3026664"/>
+            <a:off x="2677668" y="2679192"/>
             <a:ext cx="6806184" cy="411480"/>
           </a:xfrm>
           <a:prstGeom prst="rect">
@@ -17587,7 +15804,7 @@
         </p:blipFill>
         <p:spPr>
           <a:xfrm>
-            <a:off x="1466359" y="3712464"/>
+            <a:off x="1466359" y="3364992"/>
             <a:ext cx="6065520" cy="411480"/>
           </a:xfrm>
           <a:prstGeom prst="rect">
@@ -17603,7 +15820,7 @@
         </p:nvSpPr>
         <p:spPr>
           <a:xfrm>
-            <a:off x="7531879" y="3689604"/>
+            <a:off x="7531879" y="3342132"/>
             <a:ext cx="1880073" cy="457200"/>
           </a:xfrm>
           <a:prstGeom prst="rect">
@@ -17646,7 +15863,7 @@
         </p:blipFill>
         <p:spPr>
           <a:xfrm>
-            <a:off x="9274792" y="3742944"/>
+            <a:off x="9274792" y="3395472"/>
             <a:ext cx="1420368" cy="350520"/>
           </a:xfrm>
           <a:prstGeom prst="rect">
@@ -17662,7 +15879,7 @@
         </p:nvSpPr>
         <p:spPr>
           <a:xfrm>
-            <a:off x="987552" y="4462272"/>
+            <a:off x="987552" y="4114800"/>
             <a:ext cx="10131551" cy="950976"/>
           </a:xfrm>
           <a:prstGeom prst="rect">
@@ -17697,7 +15914,7 @@
         </p:nvSpPr>
         <p:spPr>
           <a:xfrm>
-            <a:off x="987552" y="5669280"/>
+            <a:off x="987552" y="5321808"/>
             <a:ext cx="10131551" cy="475488"/>
           </a:xfrm>
           <a:prstGeom prst="rect">
@@ -17847,44 +16064,9 @@
           </a:fontRef>
         </p:style>
       </p:cxnSp>
-      <p:sp>
-        <p:nvSpPr>
-          <p:cNvPr id="5" name="TextBox 4"/>
-          <p:cNvSpPr txBox="1"/>
-          <p:nvPr/>
-        </p:nvSpPr>
-        <p:spPr>
-          <a:xfrm>
-            <a:off x="777240" y="1261872"/>
-            <a:ext cx="10607040" cy="310896"/>
-          </a:xfrm>
-          <a:prstGeom prst="rect">
-            <a:avLst/>
-          </a:prstGeom>
-          <a:noFill/>
-        </p:spPr>
-        <p:txBody>
-          <a:bodyPr wrap="square" lIns="45720" rIns="45720" tIns="18288" bIns="18288" anchor="t">
-            <a:spAutoFit/>
-          </a:bodyPr>
-          <a:lstStyle/>
-          <a:p>
-            <a:pPr algn="l"/>
-            <a:r>
-              <a:rPr sz="1700" b="0" i="1">
-                <a:solidFill>
-                  <a:srgbClr val="6B6B6B"/>
-                </a:solidFill>
-                <a:latin typeface="Century Schoolbook"/>
-              </a:rPr>
-              <a:t>Same power, and the answer is not finished.</a:t>
-            </a:r>
-          </a:p>
-        </p:txBody>
-      </p:sp>
       <p:cxnSp>
         <p:nvCxnSpPr>
-          <p:cNvPr id="6" name="Connector 5"/>
+          <p:cNvPr id="5" name="Connector 4"/>
           <p:cNvCxnSpPr/>
           <p:nvPr/>
         </p:nvCxnSpPr>
@@ -17919,7 +16101,7 @@
       </p:cxnSp>
       <p:sp>
         <p:nvSpPr>
-          <p:cNvPr id="7" name="TextBox 6"/>
+          <p:cNvPr id="6" name="TextBox 5"/>
           <p:cNvSpPr txBox="1"/>
           <p:nvPr/>
         </p:nvSpPr>
@@ -17954,7 +16136,7 @@
       </p:sp>
       <p:sp>
         <p:nvSpPr>
-          <p:cNvPr id="8" name="TextBox 7"/>
+          <p:cNvPr id="7" name="TextBox 6"/>
           <p:cNvSpPr txBox="1"/>
           <p:nvPr/>
         </p:nvSpPr>
@@ -17989,7 +16171,7 @@
       </p:sp>
       <p:pic>
         <p:nvPicPr>
-          <p:cNvPr id="9" name="Picture 8" descr="b322f8f789aa083c.png"/>
+          <p:cNvPr id="8" name="Picture 7" descr="b322f8f789aa083c.png"/>
           <p:cNvPicPr>
             <a:picLocks noChangeAspect="1"/>
           </p:cNvPicPr>
@@ -18013,7 +16195,7 @@
       </p:pic>
       <p:sp>
         <p:nvSpPr>
-          <p:cNvPr id="10" name="TextBox 9"/>
+          <p:cNvPr id="9" name="TextBox 8"/>
           <p:cNvSpPr txBox="1"/>
           <p:nvPr/>
         </p:nvSpPr>
@@ -18169,44 +16351,9 @@
           </a:fontRef>
         </p:style>
       </p:cxnSp>
-      <p:sp>
-        <p:nvSpPr>
-          <p:cNvPr id="5" name="TextBox 4"/>
-          <p:cNvSpPr txBox="1"/>
-          <p:nvPr/>
-        </p:nvSpPr>
-        <p:spPr>
-          <a:xfrm>
-            <a:off x="777240" y="1261872"/>
-            <a:ext cx="10607040" cy="310896"/>
-          </a:xfrm>
-          <a:prstGeom prst="rect">
-            <a:avLst/>
-          </a:prstGeom>
-          <a:noFill/>
-        </p:spPr>
-        <p:txBody>
-          <a:bodyPr wrap="square" lIns="45720" rIns="45720" tIns="18288" bIns="18288" anchor="t">
-            <a:spAutoFit/>
-          </a:bodyPr>
-          <a:lstStyle/>
-          <a:p>
-            <a:pPr algn="l"/>
-            <a:r>
-              <a:rPr sz="1700" b="0" i="1">
-                <a:solidFill>
-                  <a:srgbClr val="6B6B6B"/>
-                </a:solidFill>
-                <a:latin typeface="Century Schoolbook"/>
-              </a:rPr>
-              <a:t>Worked.</a:t>
-            </a:r>
-          </a:p>
-        </p:txBody>
-      </p:sp>
       <p:cxnSp>
         <p:nvCxnSpPr>
-          <p:cNvPr id="6" name="Connector 5"/>
+          <p:cNvPr id="5" name="Connector 4"/>
           <p:cNvCxnSpPr/>
           <p:nvPr/>
         </p:nvCxnSpPr>
@@ -18241,7 +16388,7 @@
       </p:cxnSp>
       <p:sp>
         <p:nvSpPr>
-          <p:cNvPr id="7" name="TextBox 6"/>
+          <p:cNvPr id="6" name="TextBox 5"/>
           <p:cNvSpPr txBox="1"/>
           <p:nvPr/>
         </p:nvSpPr>
@@ -18276,7 +16423,7 @@
       </p:sp>
       <p:sp>
         <p:nvSpPr>
-          <p:cNvPr id="8" name="TextBox 7"/>
+          <p:cNvPr id="7" name="TextBox 6"/>
           <p:cNvSpPr txBox="1"/>
           <p:nvPr/>
         </p:nvSpPr>
@@ -18311,7 +16458,7 @@
       </p:sp>
       <p:pic>
         <p:nvPicPr>
-          <p:cNvPr id="9" name="Picture 8" descr="78e26f3a087b33fd.png"/>
+          <p:cNvPr id="8" name="Picture 7" descr="78e26f3a087b33fd.png"/>
           <p:cNvPicPr>
             <a:picLocks noChangeAspect="1"/>
           </p:cNvPicPr>
@@ -18333,44 +16480,9 @@
           </a:prstGeom>
         </p:spPr>
       </p:pic>
-      <p:sp>
-        <p:nvSpPr>
-          <p:cNvPr id="10" name="TextBox 9"/>
-          <p:cNvSpPr txBox="1"/>
-          <p:nvPr/>
-        </p:nvSpPr>
-        <p:spPr>
-          <a:xfrm>
-            <a:off x="8150352" y="1892808"/>
-            <a:ext cx="3233927" cy="502920"/>
-          </a:xfrm>
-          <a:prstGeom prst="rect">
-            <a:avLst/>
-          </a:prstGeom>
-          <a:noFill/>
-        </p:spPr>
-        <p:txBody>
-          <a:bodyPr wrap="square" lIns="45720" rIns="45720" tIns="18288" bIns="18288" anchor="ctr">
-            <a:spAutoFit/>
-          </a:bodyPr>
-          <a:lstStyle/>
-          <a:p>
-            <a:pPr algn="l"/>
-            <a:r>
-              <a:rPr sz="2100" b="0" i="1">
-                <a:solidFill>
-                  <a:srgbClr val="6B6B6B"/>
-                </a:solidFill>
-                <a:latin typeface="Century Schoolbook"/>
-              </a:rPr>
-              <a:t>same power: add the coefficients</a:t>
-            </a:r>
-          </a:p>
-        </p:txBody>
-      </p:sp>
       <p:pic>
         <p:nvPicPr>
-          <p:cNvPr id="11" name="Picture 10" descr="1cb28e2e28999fa1.png"/>
+          <p:cNvPr id="9" name="Picture 8" descr="1cb28e2e28999fa1.png"/>
           <p:cNvPicPr>
             <a:picLocks noChangeAspect="1"/>
           </p:cNvPicPr>
@@ -18392,44 +16504,9 @@
           </a:prstGeom>
         </p:spPr>
       </p:pic>
-      <p:sp>
-        <p:nvSpPr>
-          <p:cNvPr id="12" name="TextBox 11"/>
-          <p:cNvSpPr txBox="1"/>
-          <p:nvPr/>
-        </p:nvSpPr>
-        <p:spPr>
-          <a:xfrm>
-            <a:off x="5928360" y="2543556"/>
-            <a:ext cx="5455919" cy="502920"/>
-          </a:xfrm>
-          <a:prstGeom prst="rect">
-            <a:avLst/>
-          </a:prstGeom>
-          <a:noFill/>
-        </p:spPr>
-        <p:txBody>
-          <a:bodyPr wrap="square" lIns="45720" rIns="45720" tIns="18288" bIns="18288" anchor="ctr">
-            <a:spAutoFit/>
-          </a:bodyPr>
-          <a:lstStyle/>
-          <a:p>
-            <a:pPr algn="l"/>
-            <a:r>
-              <a:rPr sz="2100" b="0" i="1">
-                <a:solidFill>
-                  <a:srgbClr val="6B6B6B"/>
-                </a:solidFill>
-                <a:latin typeface="Century Schoolbook"/>
-              </a:rPr>
-              <a:t>14.5 is not less than 10: point one place left, exponent up one</a:t>
-            </a:r>
-          </a:p>
-        </p:txBody>
-      </p:sp>
       <p:pic>
         <p:nvPicPr>
-          <p:cNvPr id="13" name="Picture 12" descr="ce53c7f1db8afdc0.png"/>
+          <p:cNvPr id="10" name="Picture 9" descr="ce53c7f1db8afdc0.png"/>
           <p:cNvPicPr>
             <a:picLocks noChangeAspect="1"/>
           </p:cNvPicPr>
@@ -18453,42 +16530,7 @@
       </p:pic>
       <p:sp>
         <p:nvSpPr>
-          <p:cNvPr id="14" name="TextBox 13"/>
-          <p:cNvSpPr txBox="1"/>
-          <p:nvPr/>
-        </p:nvSpPr>
-        <p:spPr>
-          <a:xfrm>
-            <a:off x="4264152" y="3160775"/>
-            <a:ext cx="6400800" cy="502920"/>
-          </a:xfrm>
-          <a:prstGeom prst="rect">
-            <a:avLst/>
-          </a:prstGeom>
-          <a:noFill/>
-        </p:spPr>
-        <p:txBody>
-          <a:bodyPr wrap="square" lIns="45720" rIns="45720" tIns="18288" bIns="18288" anchor="ctr">
-            <a:spAutoFit/>
-          </a:bodyPr>
-          <a:lstStyle/>
-          <a:p>
-            <a:pPr algn="l"/>
-            <a:r>
-              <a:rPr sz="2100" b="0" i="1">
-                <a:solidFill>
-                  <a:srgbClr val="6B6B6B"/>
-                </a:solidFill>
-                <a:latin typeface="Century Schoolbook"/>
-              </a:rPr>
-              <a:t>check in standard form</a:t>
-            </a:r>
-          </a:p>
-        </p:txBody>
-      </p:sp>
-      <p:sp>
-        <p:nvSpPr>
-          <p:cNvPr id="15" name="TextBox 14"/>
+          <p:cNvPr id="11" name="TextBox 10"/>
           <p:cNvSpPr txBox="1"/>
           <p:nvPr/>
         </p:nvSpPr>
@@ -18653,44 +16695,9 @@
           </a:fontRef>
         </p:style>
       </p:cxnSp>
-      <p:sp>
-        <p:nvSpPr>
-          <p:cNvPr id="5" name="TextBox 4"/>
-          <p:cNvSpPr txBox="1"/>
-          <p:nvPr/>
-        </p:nvSpPr>
-        <p:spPr>
-          <a:xfrm>
-            <a:off x="777240" y="1261872"/>
-            <a:ext cx="10607040" cy="310896"/>
-          </a:xfrm>
-          <a:prstGeom prst="rect">
-            <a:avLst/>
-          </a:prstGeom>
-          <a:noFill/>
-        </p:spPr>
-        <p:txBody>
-          <a:bodyPr wrap="square" lIns="45720" rIns="45720" tIns="18288" bIns="18288" anchor="t">
-            <a:spAutoFit/>
-          </a:bodyPr>
-          <a:lstStyle/>
-          <a:p>
-            <a:pPr algn="l"/>
-            <a:r>
-              <a:rPr sz="1700" b="0" i="1">
-                <a:solidFill>
-                  <a:srgbClr val="6B6B6B"/>
-                </a:solidFill>
-                <a:latin typeface="Century Schoolbook"/>
-              </a:rPr>
-              <a:t>Same steps, your numbers. Boards up when done.</a:t>
-            </a:r>
-          </a:p>
-        </p:txBody>
-      </p:sp>
       <p:cxnSp>
         <p:nvCxnSpPr>
-          <p:cNvPr id="6" name="Connector 5"/>
+          <p:cNvPr id="5" name="Connector 4"/>
           <p:cNvCxnSpPr/>
           <p:nvPr/>
         </p:nvCxnSpPr>
@@ -18725,7 +16732,7 @@
       </p:cxnSp>
       <p:sp>
         <p:nvSpPr>
-          <p:cNvPr id="7" name="TextBox 6"/>
+          <p:cNvPr id="6" name="TextBox 5"/>
           <p:cNvSpPr txBox="1"/>
           <p:nvPr/>
         </p:nvSpPr>
@@ -18760,7 +16767,7 @@
       </p:sp>
       <p:sp>
         <p:nvSpPr>
-          <p:cNvPr id="8" name="TextBox 7"/>
+          <p:cNvPr id="7" name="TextBox 6"/>
           <p:cNvSpPr txBox="1"/>
           <p:nvPr/>
         </p:nvSpPr>
@@ -18795,7 +16802,7 @@
       </p:sp>
       <p:pic>
         <p:nvPicPr>
-          <p:cNvPr id="9" name="Picture 8" descr="2ae36fee79b20f87.png"/>
+          <p:cNvPr id="8" name="Picture 7" descr="2ae36fee79b20f87.png"/>
           <p:cNvPicPr>
             <a:picLocks noChangeAspect="1"/>
           </p:cNvPicPr>
@@ -18817,6 +16824,41 @@
           </a:prstGeom>
         </p:spPr>
       </p:pic>
+      <p:sp>
+        <p:nvSpPr>
+          <p:cNvPr id="9" name="TextBox 8"/>
+          <p:cNvSpPr txBox="1"/>
+          <p:nvPr/>
+        </p:nvSpPr>
+        <p:spPr>
+          <a:xfrm>
+            <a:off x="777240" y="3209544"/>
+            <a:ext cx="10607040" cy="429370"/>
+          </a:xfrm>
+          <a:prstGeom prst="rect">
+            <a:avLst/>
+          </a:prstGeom>
+          <a:noFill/>
+        </p:spPr>
+        <p:txBody>
+          <a:bodyPr wrap="square" lIns="45720" rIns="45720" tIns="18288" bIns="18288" anchor="t">
+            <a:spAutoFit/>
+          </a:bodyPr>
+          <a:lstStyle/>
+          <a:p>
+            <a:pPr algn="ctr"/>
+            <a:r>
+              <a:rPr sz="2400" b="1" i="0">
+                <a:solidFill>
+                  <a:srgbClr val="1A1A1A"/>
+                </a:solidFill>
+                <a:latin typeface="Century Schoolbook"/>
+              </a:rPr>
+              <a:t>Add. Write the answer in scientific notation.</a:t>
+            </a:r>
+          </a:p>
+        </p:txBody>
+      </p:sp>
     </p:spTree>
   </p:cSld>
   <p:clrMapOvr>

--- a/a7/packages/A7 Unit 4 - Solving Problems with Rational Numbers/Lessons/4.01/A7 4.01 Adding and Subtracting in Scientific Notation - Slides.pptx
+++ b/a7/packages/A7 Unit 4 - Solving Problems with Rational Numbers/Lessons/4.01/A7 4.01 Adding and Subtracting in Scientific Notation - Slides.pptx
@@ -13491,23 +13491,23 @@
         </p:nvSpPr>
         <p:spPr>
           <a:xfrm>
-            <a:off x="960120" y="2011680"/>
-            <a:ext cx="548640" cy="356616"/>
-          </a:xfrm>
-          <a:prstGeom prst="rect">
-            <a:avLst/>
-          </a:prstGeom>
-          <a:noFill/>
-        </p:spPr>
-        <p:txBody>
-          <a:bodyPr wrap="square" lIns="45720" rIns="45720" tIns="18288" bIns="18288" anchor="t">
+            <a:off x="960120" y="1495043"/>
+            <a:ext cx="548640" cy="457200"/>
+          </a:xfrm>
+          <a:prstGeom prst="rect">
+            <a:avLst/>
+          </a:prstGeom>
+          <a:noFill/>
+        </p:spPr>
+        <p:txBody>
+          <a:bodyPr wrap="square" lIns="45720" rIns="45720" tIns="18288" bIns="18288" anchor="ctr">
             <a:spAutoFit/>
           </a:bodyPr>
           <a:lstStyle/>
           <a:p>
             <a:pPr algn="l"/>
             <a:r>
-              <a:rPr sz="2100" b="1" i="0">
+              <a:rPr sz="2300" b="1" i="0">
                 <a:solidFill>
                   <a:srgbClr val="0B5394"/>
                 </a:solidFill>
@@ -13518,181 +13518,419 @@
           </a:p>
         </p:txBody>
       </p:sp>
-      <p:sp>
-        <p:nvSpPr>
-          <p:cNvPr id="9" name="TextBox 8"/>
-          <p:cNvSpPr txBox="1"/>
-          <p:nvPr/>
-        </p:nvSpPr>
-        <p:spPr>
-          <a:xfrm>
-            <a:off x="1554480" y="2011680"/>
-            <a:ext cx="9829800" cy="411480"/>
-          </a:xfrm>
-          <a:prstGeom prst="rect">
-            <a:avLst/>
-          </a:prstGeom>
-          <a:noFill/>
-        </p:spPr>
-        <p:txBody>
-          <a:bodyPr wrap="square" lIns="45720" rIns="45720" tIns="18288" bIns="18288" anchor="t">
+      <p:pic>
+        <p:nvPicPr>
+          <p:cNvPr id="9" name="Picture 8" descr="e81dee220f24ebf8.png"/>
+          <p:cNvPicPr>
+            <a:picLocks noChangeAspect="1"/>
+          </p:cNvPicPr>
+          <p:nvPr/>
+        </p:nvPicPr>
+        <p:blipFill>
+          <a:blip r:embed="rId2"/>
+          <a:stretch>
+            <a:fillRect/>
+          </a:stretch>
+        </p:blipFill>
+        <p:spPr>
+          <a:xfrm>
+            <a:off x="1627632" y="1556004"/>
+            <a:ext cx="3099816" cy="335280"/>
+          </a:xfrm>
+          <a:prstGeom prst="rect">
+            <a:avLst/>
+          </a:prstGeom>
+        </p:spPr>
+      </p:pic>
+      <p:sp>
+        <p:nvSpPr>
+          <p:cNvPr id="10" name="TextBox 9"/>
+          <p:cNvSpPr txBox="1"/>
+          <p:nvPr/>
+        </p:nvSpPr>
+        <p:spPr>
+          <a:xfrm>
+            <a:off x="960120" y="2089403"/>
+            <a:ext cx="548640" cy="457200"/>
+          </a:xfrm>
+          <a:prstGeom prst="rect">
+            <a:avLst/>
+          </a:prstGeom>
+          <a:noFill/>
+        </p:spPr>
+        <p:txBody>
+          <a:bodyPr wrap="square" lIns="45720" rIns="45720" tIns="18288" bIns="18288" anchor="ctr">
             <a:spAutoFit/>
           </a:bodyPr>
           <a:lstStyle/>
           <a:p>
             <a:pPr algn="l"/>
             <a:r>
-              <a:rPr sz="2100" b="0" i="0">
+              <a:rPr sz="2300" b="1" i="0">
+                <a:solidFill>
+                  <a:srgbClr val="0B5394"/>
+                </a:solidFill>
+                <a:latin typeface="Century Schoolbook"/>
+              </a:rPr>
+              <a:t>2.</a:t>
+            </a:r>
+          </a:p>
+        </p:txBody>
+      </p:sp>
+      <p:pic>
+        <p:nvPicPr>
+          <p:cNvPr id="11" name="Picture 10" descr="fa1915b6839e7f5c.png"/>
+          <p:cNvPicPr>
+            <a:picLocks noChangeAspect="1"/>
+          </p:cNvPicPr>
+          <p:nvPr/>
+        </p:nvPicPr>
+        <p:blipFill>
+          <a:blip r:embed="rId3"/>
+          <a:stretch>
+            <a:fillRect/>
+          </a:stretch>
+        </p:blipFill>
+        <p:spPr>
+          <a:xfrm>
+            <a:off x="1627632" y="2150363"/>
+            <a:ext cx="3416808" cy="335280"/>
+          </a:xfrm>
+          <a:prstGeom prst="rect">
+            <a:avLst/>
+          </a:prstGeom>
+        </p:spPr>
+      </p:pic>
+      <p:sp>
+        <p:nvSpPr>
+          <p:cNvPr id="12" name="TextBox 11"/>
+          <p:cNvSpPr txBox="1"/>
+          <p:nvPr/>
+        </p:nvSpPr>
+        <p:spPr>
+          <a:xfrm>
+            <a:off x="960120" y="2683763"/>
+            <a:ext cx="548640" cy="457200"/>
+          </a:xfrm>
+          <a:prstGeom prst="rect">
+            <a:avLst/>
+          </a:prstGeom>
+          <a:noFill/>
+        </p:spPr>
+        <p:txBody>
+          <a:bodyPr wrap="square" lIns="45720" rIns="45720" tIns="18288" bIns="18288" anchor="ctr">
+            <a:spAutoFit/>
+          </a:bodyPr>
+          <a:lstStyle/>
+          <a:p>
+            <a:pPr algn="l"/>
+            <a:r>
+              <a:rPr sz="2300" b="1" i="0">
+                <a:solidFill>
+                  <a:srgbClr val="0B5394"/>
+                </a:solidFill>
+                <a:latin typeface="Century Schoolbook"/>
+              </a:rPr>
+              <a:t>3.</a:t>
+            </a:r>
+          </a:p>
+        </p:txBody>
+      </p:sp>
+      <p:pic>
+        <p:nvPicPr>
+          <p:cNvPr id="13" name="Picture 12" descr="2f46d52c85ca19a4.png"/>
+          <p:cNvPicPr>
+            <a:picLocks noChangeAspect="1"/>
+          </p:cNvPicPr>
+          <p:nvPr/>
+        </p:nvPicPr>
+        <p:blipFill>
+          <a:blip r:embed="rId4"/>
+          <a:stretch>
+            <a:fillRect/>
+          </a:stretch>
+        </p:blipFill>
+        <p:spPr>
+          <a:xfrm>
+            <a:off x="1627632" y="2744723"/>
+            <a:ext cx="3099816" cy="335280"/>
+          </a:xfrm>
+          <a:prstGeom prst="rect">
+            <a:avLst/>
+          </a:prstGeom>
+        </p:spPr>
+      </p:pic>
+      <p:sp>
+        <p:nvSpPr>
+          <p:cNvPr id="14" name="TextBox 13"/>
+          <p:cNvSpPr txBox="1"/>
+          <p:nvPr/>
+        </p:nvSpPr>
+        <p:spPr>
+          <a:xfrm>
+            <a:off x="960120" y="3278123"/>
+            <a:ext cx="548640" cy="457200"/>
+          </a:xfrm>
+          <a:prstGeom prst="rect">
+            <a:avLst/>
+          </a:prstGeom>
+          <a:noFill/>
+        </p:spPr>
+        <p:txBody>
+          <a:bodyPr wrap="square" lIns="45720" rIns="45720" tIns="18288" bIns="18288" anchor="ctr">
+            <a:spAutoFit/>
+          </a:bodyPr>
+          <a:lstStyle/>
+          <a:p>
+            <a:pPr algn="l"/>
+            <a:r>
+              <a:rPr sz="2300" b="1" i="0">
+                <a:solidFill>
+                  <a:srgbClr val="0B5394"/>
+                </a:solidFill>
+                <a:latin typeface="Century Schoolbook"/>
+              </a:rPr>
+              <a:t>4.</a:t>
+            </a:r>
+          </a:p>
+        </p:txBody>
+      </p:sp>
+      <p:pic>
+        <p:nvPicPr>
+          <p:cNvPr id="15" name="Picture 14" descr="5dc73e64bd036969.png"/>
+          <p:cNvPicPr>
+            <a:picLocks noChangeAspect="1"/>
+          </p:cNvPicPr>
+          <p:nvPr/>
+        </p:nvPicPr>
+        <p:blipFill>
+          <a:blip r:embed="rId5"/>
+          <a:stretch>
+            <a:fillRect/>
+          </a:stretch>
+        </p:blipFill>
+        <p:spPr>
+          <a:xfrm>
+            <a:off x="1627632" y="3339083"/>
+            <a:ext cx="3099816" cy="335280"/>
+          </a:xfrm>
+          <a:prstGeom prst="rect">
+            <a:avLst/>
+          </a:prstGeom>
+        </p:spPr>
+      </p:pic>
+      <p:sp>
+        <p:nvSpPr>
+          <p:cNvPr id="16" name="TextBox 15"/>
+          <p:cNvSpPr txBox="1"/>
+          <p:nvPr/>
+        </p:nvSpPr>
+        <p:spPr>
+          <a:xfrm>
+            <a:off x="960120" y="3872483"/>
+            <a:ext cx="548640" cy="457200"/>
+          </a:xfrm>
+          <a:prstGeom prst="rect">
+            <a:avLst/>
+          </a:prstGeom>
+          <a:noFill/>
+        </p:spPr>
+        <p:txBody>
+          <a:bodyPr wrap="square" lIns="45720" rIns="45720" tIns="18288" bIns="18288" anchor="ctr">
+            <a:spAutoFit/>
+          </a:bodyPr>
+          <a:lstStyle/>
+          <a:p>
+            <a:pPr algn="l"/>
+            <a:r>
+              <a:rPr sz="2300" b="1" i="0">
+                <a:solidFill>
+                  <a:srgbClr val="0B5394"/>
+                </a:solidFill>
+                <a:latin typeface="Century Schoolbook"/>
+              </a:rPr>
+              <a:t>5.</a:t>
+            </a:r>
+          </a:p>
+        </p:txBody>
+      </p:sp>
+      <p:pic>
+        <p:nvPicPr>
+          <p:cNvPr id="17" name="Picture 16" descr="3a711642b46c3c51.png"/>
+          <p:cNvPicPr>
+            <a:picLocks noChangeAspect="1"/>
+          </p:cNvPicPr>
+          <p:nvPr/>
+        </p:nvPicPr>
+        <p:blipFill>
+          <a:blip r:embed="rId6"/>
+          <a:stretch>
+            <a:fillRect/>
+          </a:stretch>
+        </p:blipFill>
+        <p:spPr>
+          <a:xfrm>
+            <a:off x="1627632" y="3933444"/>
+            <a:ext cx="3416808" cy="335280"/>
+          </a:xfrm>
+          <a:prstGeom prst="rect">
+            <a:avLst/>
+          </a:prstGeom>
+        </p:spPr>
+      </p:pic>
+      <p:sp>
+        <p:nvSpPr>
+          <p:cNvPr id="18" name="TextBox 17"/>
+          <p:cNvSpPr txBox="1"/>
+          <p:nvPr/>
+        </p:nvSpPr>
+        <p:spPr>
+          <a:xfrm>
+            <a:off x="960120" y="4466844"/>
+            <a:ext cx="548640" cy="457200"/>
+          </a:xfrm>
+          <a:prstGeom prst="rect">
+            <a:avLst/>
+          </a:prstGeom>
+          <a:noFill/>
+        </p:spPr>
+        <p:txBody>
+          <a:bodyPr wrap="square" lIns="45720" rIns="45720" tIns="18288" bIns="18288" anchor="ctr">
+            <a:spAutoFit/>
+          </a:bodyPr>
+          <a:lstStyle/>
+          <a:p>
+            <a:pPr algn="l"/>
+            <a:r>
+              <a:rPr sz="2300" b="1" i="0">
+                <a:solidFill>
+                  <a:srgbClr val="0B5394"/>
+                </a:solidFill>
+                <a:latin typeface="Century Schoolbook"/>
+              </a:rPr>
+              <a:t>6.</a:t>
+            </a:r>
+          </a:p>
+        </p:txBody>
+      </p:sp>
+      <p:sp>
+        <p:nvSpPr>
+          <p:cNvPr id="19" name="TextBox 18"/>
+          <p:cNvSpPr txBox="1"/>
+          <p:nvPr/>
+        </p:nvSpPr>
+        <p:spPr>
+          <a:xfrm>
+            <a:off x="1554480" y="4466844"/>
+            <a:ext cx="967391" cy="457200"/>
+          </a:xfrm>
+          <a:prstGeom prst="rect">
+            <a:avLst/>
+          </a:prstGeom>
+          <a:noFill/>
+        </p:spPr>
+        <p:txBody>
+          <a:bodyPr wrap="none" lIns="45720" rIns="45720" tIns="18288" bIns="18288" anchor="ctr">
+            <a:noAutofit/>
+          </a:bodyPr>
+          <a:lstStyle/>
+          <a:p>
+            <a:pPr algn="l"/>
+            <a:r>
+              <a:rPr sz="2300" b="0" i="0">
                 <a:solidFill>
                   <a:srgbClr val="1A1A1A"/>
                 </a:solidFill>
                 <a:latin typeface="Century Schoolbook"/>
               </a:rPr>
-              <a:t>Six questions. Work down the page.</a:t>
-            </a:r>
-          </a:p>
-        </p:txBody>
-      </p:sp>
-      <p:sp>
-        <p:nvSpPr>
-          <p:cNvPr id="10" name="TextBox 9"/>
-          <p:cNvSpPr txBox="1"/>
-          <p:nvPr/>
-        </p:nvSpPr>
-        <p:spPr>
-          <a:xfrm>
-            <a:off x="960120" y="2551176"/>
-            <a:ext cx="548640" cy="356616"/>
-          </a:xfrm>
-          <a:prstGeom prst="rect">
-            <a:avLst/>
-          </a:prstGeom>
-          <a:noFill/>
-        </p:spPr>
-        <p:txBody>
-          <a:bodyPr wrap="square" lIns="45720" rIns="45720" tIns="18288" bIns="18288" anchor="t">
-            <a:spAutoFit/>
+              <a:t>Find </a:t>
+            </a:r>
+          </a:p>
+        </p:txBody>
+      </p:sp>
+      <p:pic>
+        <p:nvPicPr>
+          <p:cNvPr id="20" name="Picture 19" descr="0afe177f69dd5e06.png"/>
+          <p:cNvPicPr>
+            <a:picLocks noChangeAspect="1"/>
+          </p:cNvPicPr>
+          <p:nvPr/>
+        </p:nvPicPr>
+        <p:blipFill>
+          <a:blip r:embed="rId7"/>
+          <a:stretch>
+            <a:fillRect/>
+          </a:stretch>
+        </p:blipFill>
+        <p:spPr>
+          <a:xfrm>
+            <a:off x="2384711" y="4620768"/>
+            <a:ext cx="155448" cy="149352"/>
+          </a:xfrm>
+          <a:prstGeom prst="rect">
+            <a:avLst/>
+          </a:prstGeom>
+        </p:spPr>
+      </p:pic>
+      <p:sp>
+        <p:nvSpPr>
+          <p:cNvPr id="21" name="TextBox 20"/>
+          <p:cNvSpPr txBox="1"/>
+          <p:nvPr/>
+        </p:nvSpPr>
+        <p:spPr>
+          <a:xfrm>
+            <a:off x="2540159" y="4466844"/>
+            <a:ext cx="468561" cy="457200"/>
+          </a:xfrm>
+          <a:prstGeom prst="rect">
+            <a:avLst/>
+          </a:prstGeom>
+          <a:noFill/>
+        </p:spPr>
+        <p:txBody>
+          <a:bodyPr wrap="none" lIns="45720" rIns="45720" tIns="18288" bIns="18288" anchor="ctr">
+            <a:noAutofit/>
           </a:bodyPr>
           <a:lstStyle/>
           <a:p>
             <a:pPr algn="l"/>
             <a:r>
-              <a:rPr sz="2100" b="1" i="0">
-                <a:solidFill>
-                  <a:srgbClr val="0B5394"/>
-                </a:solidFill>
-                <a:latin typeface="Century Schoolbook"/>
-              </a:rPr>
-              <a:t>2.</a:t>
-            </a:r>
-          </a:p>
-        </p:txBody>
-      </p:sp>
-      <p:sp>
-        <p:nvSpPr>
-          <p:cNvPr id="11" name="TextBox 10"/>
-          <p:cNvSpPr txBox="1"/>
-          <p:nvPr/>
-        </p:nvSpPr>
-        <p:spPr>
-          <a:xfrm>
-            <a:off x="1554480" y="2551176"/>
-            <a:ext cx="9829800" cy="411480"/>
-          </a:xfrm>
-          <a:prstGeom prst="rect">
-            <a:avLst/>
-          </a:prstGeom>
-          <a:noFill/>
-        </p:spPr>
-        <p:txBody>
-          <a:bodyPr wrap="square" lIns="45720" rIns="45720" tIns="18288" bIns="18288" anchor="t">
-            <a:spAutoFit/>
-          </a:bodyPr>
-          <a:lstStyle/>
-          <a:p>
-            <a:pPr algn="l"/>
-            <a:r>
-              <a:rPr sz="2100" b="0" i="0">
+              <a:rPr sz="2300" b="0" i="0">
                 <a:solidFill>
                   <a:srgbClr val="1A1A1A"/>
                 </a:solidFill>
                 <a:latin typeface="Century Schoolbook"/>
               </a:rPr>
-              <a:t>Show the step that does the work, not just the answer.</a:t>
-            </a:r>
-          </a:p>
-        </p:txBody>
-      </p:sp>
-      <p:sp>
-        <p:nvSpPr>
-          <p:cNvPr id="12" name="TextBox 11"/>
-          <p:cNvSpPr txBox="1"/>
-          <p:nvPr/>
-        </p:nvSpPr>
-        <p:spPr>
-          <a:xfrm>
-            <a:off x="960120" y="3090672"/>
-            <a:ext cx="548640" cy="356616"/>
-          </a:xfrm>
-          <a:prstGeom prst="rect">
-            <a:avLst/>
-          </a:prstGeom>
-          <a:noFill/>
-        </p:spPr>
-        <p:txBody>
-          <a:bodyPr wrap="square" lIns="45720" rIns="45720" tIns="18288" bIns="18288" anchor="t">
-            <a:spAutoFit/>
-          </a:bodyPr>
-          <a:lstStyle/>
-          <a:p>
-            <a:pPr algn="l"/>
-            <a:r>
-              <a:rPr sz="2100" b="1" i="0">
-                <a:solidFill>
-                  <a:srgbClr val="0B5394"/>
-                </a:solidFill>
-                <a:latin typeface="Century Schoolbook"/>
-              </a:rPr>
-              <a:t>3.</a:t>
-            </a:r>
-          </a:p>
-        </p:txBody>
-      </p:sp>
-      <p:sp>
-        <p:nvSpPr>
-          <p:cNvPr id="13" name="TextBox 12"/>
-          <p:cNvSpPr txBox="1"/>
-          <p:nvPr/>
-        </p:nvSpPr>
-        <p:spPr>
-          <a:xfrm>
-            <a:off x="1554480" y="3090672"/>
-            <a:ext cx="9829800" cy="411480"/>
-          </a:xfrm>
-          <a:prstGeom prst="rect">
-            <a:avLst/>
-          </a:prstGeom>
-          <a:noFill/>
-        </p:spPr>
-        <p:txBody>
-          <a:bodyPr wrap="square" lIns="45720" rIns="45720" tIns="18288" bIns="18288" anchor="t">
-            <a:spAutoFit/>
-          </a:bodyPr>
-          <a:lstStyle/>
-          <a:p>
-            <a:pPr algn="l"/>
-            <a:r>
-              <a:rPr sz="2100" b="0" i="0">
-                <a:solidFill>
-                  <a:srgbClr val="1A1A1A"/>
-                </a:solidFill>
-                <a:latin typeface="Century Schoolbook"/>
-              </a:rPr>
-              <a:t>Silence until the six minutes are up.</a:t>
-            </a:r>
-          </a:p>
-        </p:txBody>
-      </p:sp>
+              <a:t>.  </a:t>
+            </a:r>
+          </a:p>
+        </p:txBody>
+      </p:sp>
+      <p:pic>
+        <p:nvPicPr>
+          <p:cNvPr id="22" name="Picture 21" descr="ab2d69d2d2abe419.png"/>
+          <p:cNvPicPr>
+            <a:picLocks noChangeAspect="1"/>
+          </p:cNvPicPr>
+          <p:nvPr/>
+        </p:nvPicPr>
+        <p:blipFill>
+          <a:blip r:embed="rId8"/>
+          <a:stretch>
+            <a:fillRect/>
+          </a:stretch>
+        </p:blipFill>
+        <p:spPr>
+          <a:xfrm>
+            <a:off x="2871561" y="4527804"/>
+            <a:ext cx="4639056" cy="335280"/>
+          </a:xfrm>
+          <a:prstGeom prst="rect">
+            <a:avLst/>
+          </a:prstGeom>
+        </p:spPr>
+      </p:pic>
     </p:spTree>
   </p:cSld>
   <p:clrMapOvr>

--- a/a7/packages/A7 Unit 4 - Solving Problems with Rational Numbers/Lessons/4.01/A7 4.01 Adding and Subtracting in Scientific Notation - Slides.pptx
+++ b/a7/packages/A7 Unit 4 - Solving Problems with Rational Numbers/Lessons/4.01/A7 4.01 Adding and Subtracting in Scientific Notation - Slides.pptx
@@ -3145,11 +3145,11 @@
           <a:p>
             <a:pPr algn="ctr"/>
             <a:r>
-              <a:rPr sz="1500" b="0" i="0">
+              <a:rPr sz="1420" b="0" i="0">
                 <a:solidFill>
                   <a:srgbClr val="6B6B6B"/>
                 </a:solidFill>
-                <a:latin typeface="Century Schoolbook"/>
+                <a:latin typeface="Lexend"/>
               </a:rPr>
               <a:t>GRADE 7 ACCELERATED  ·  UNIT 4  ·  LESSON 1</a:t>
             </a:r>
@@ -3180,11 +3180,11 @@
           <a:p>
             <a:pPr algn="ctr"/>
             <a:r>
-              <a:rPr sz="3400" b="1" i="0">
+              <a:rPr sz="3229" b="1" i="0">
                 <a:solidFill>
                   <a:srgbClr val="1A1A1A"/>
                 </a:solidFill>
-                <a:latin typeface="Century Schoolbook"/>
+                <a:latin typeface="Lexend"/>
               </a:rPr>
               <a:t>Adding and Subtracting in Scientific Notation</a:t>
             </a:r>
@@ -3285,11 +3285,11 @@
           <a:p>
             <a:pPr algn="ctr"/>
             <a:r>
-              <a:rPr sz="1600" b="1" i="0">
+              <a:rPr sz="1520" b="1" i="0">
                 <a:solidFill>
                   <a:srgbClr val="1A1A1A"/>
                 </a:solidFill>
-                <a:latin typeface="Century Schoolbook"/>
+                <a:latin typeface="Lexend"/>
               </a:rPr>
               <a:t>MA.8.NSO.1.5</a:t>
             </a:r>
@@ -3320,11 +3320,11 @@
           <a:p>
             <a:pPr algn="ctr"/>
             <a:r>
-              <a:rPr sz="1900" b="0" i="1">
+              <a:rPr sz="1810" b="0" i="0">
                 <a:solidFill>
                   <a:srgbClr val="1A1A1A"/>
                 </a:solidFill>
-                <a:latin typeface="Century Schoolbook"/>
+                <a:latin typeface="Lexend"/>
               </a:rPr>
               <a:t>I can add and subtract two numbers written in scientific notation, and write the answer in scientific notation.</a:t>
             </a:r>
@@ -3390,11 +3390,11 @@
           <a:p>
             <a:pPr algn="l"/>
             <a:r>
-              <a:rPr sz="1100" b="0" i="1">
+              <a:rPr sz="1040" b="0" i="0">
                 <a:solidFill>
                   <a:srgbClr val="6B6B6B"/>
                 </a:solidFill>
-                <a:latin typeface="Century Schoolbook"/>
+                <a:latin typeface="Lexend"/>
               </a:rPr>
               <a:t>Grade 7 Accelerated · Unit 4 · Lesson 1 — Adding and Subtracting in Scientific Notation</a:t>
             </a:r>
@@ -3425,11 +3425,11 @@
           <a:p>
             <a:pPr algn="r"/>
             <a:r>
-              <a:rPr sz="1100" b="0" i="0">
+              <a:rPr sz="1040" b="0" i="0">
                 <a:solidFill>
                   <a:srgbClr val="6B6B6B"/>
                 </a:solidFill>
-                <a:latin typeface="Century Schoolbook"/>
+                <a:latin typeface="Lexend"/>
               </a:rPr>
               <a:t>1</a:t>
             </a:r>
@@ -3478,11 +3478,11 @@
           <a:p>
             <a:pPr algn="l"/>
             <a:r>
-              <a:rPr sz="3600" b="1" i="0">
+              <a:rPr sz="3420" b="1" i="0">
                 <a:solidFill>
                   <a:srgbClr val="1A1A1A"/>
                 </a:solidFill>
-                <a:latin typeface="Century Schoolbook"/>
+                <a:latin typeface="Lexend"/>
               </a:rPr>
               <a:t>Your Turn</a:t>
             </a:r>
@@ -3618,11 +3618,11 @@
           <a:p>
             <a:pPr algn="l"/>
             <a:r>
-              <a:rPr sz="1100" b="0" i="1">
+              <a:rPr sz="1040" b="0" i="0">
                 <a:solidFill>
                   <a:srgbClr val="6B6B6B"/>
                 </a:solidFill>
-                <a:latin typeface="Century Schoolbook"/>
+                <a:latin typeface="Lexend"/>
               </a:rPr>
               <a:t>Grade 7 Accelerated · Unit 4 · Lesson 1 — Adding and Subtracting in Scientific Notation</a:t>
             </a:r>
@@ -3653,11 +3653,11 @@
           <a:p>
             <a:pPr algn="r"/>
             <a:r>
-              <a:rPr sz="1100" b="0" i="0">
+              <a:rPr sz="1040" b="0" i="0">
                 <a:solidFill>
                   <a:srgbClr val="6B6B6B"/>
                 </a:solidFill>
-                <a:latin typeface="Century Schoolbook"/>
+                <a:latin typeface="Lexend"/>
               </a:rPr>
               <a:t>10</a:t>
             </a:r>
@@ -3666,7 +3666,7 @@
       </p:sp>
       <p:pic>
         <p:nvPicPr>
-          <p:cNvPr id="8" name="Picture 7" descr="dab37c3d4cb37ab4.png"/>
+          <p:cNvPr id="8" name="Picture 7" descr="6341fce2cb0bbc83.png"/>
           <p:cNvPicPr>
             <a:picLocks noChangeAspect="1"/>
           </p:cNvPicPr>
@@ -3680,8 +3680,8 @@
         </p:blipFill>
         <p:spPr>
           <a:xfrm>
-            <a:off x="3451860" y="2194560"/>
-            <a:ext cx="5257800" cy="515112"/>
+            <a:off x="3508248" y="1600200"/>
+            <a:ext cx="5145024" cy="509016"/>
           </a:xfrm>
           <a:prstGeom prst="rect">
             <a:avLst/>
@@ -3696,7 +3696,7 @@
         </p:nvSpPr>
         <p:spPr>
           <a:xfrm>
-            <a:off x="777240" y="3212592"/>
+            <a:off x="777240" y="2612136"/>
             <a:ext cx="10607040" cy="429370"/>
           </a:xfrm>
           <a:prstGeom prst="rect">
@@ -3712,11 +3712,11 @@
           <a:p>
             <a:pPr algn="ctr"/>
             <a:r>
-              <a:rPr sz="2400" b="1" i="0">
+              <a:rPr sz="2280" b="1" i="0">
                 <a:solidFill>
                   <a:srgbClr val="1A1A1A"/>
                 </a:solidFill>
-                <a:latin typeface="Century Schoolbook"/>
+                <a:latin typeface="Lexend"/>
               </a:rPr>
               <a:t>Add. Write the answer in scientific notation.</a:t>
             </a:r>
@@ -3726,6 +3726,89 @@
       <p:sp>
         <p:nvSpPr>
           <p:cNvPr id="10" name="TextBox 9"/>
+          <p:cNvSpPr txBox="1"/>
+          <p:nvPr/>
+        </p:nvSpPr>
+        <p:spPr>
+          <a:xfrm>
+            <a:off x="2035576" y="3201526"/>
+            <a:ext cx="5987247" cy="457200"/>
+          </a:xfrm>
+          <a:prstGeom prst="rect">
+            <a:avLst/>
+          </a:prstGeom>
+          <a:noFill/>
+        </p:spPr>
+        <p:txBody>
+          <a:bodyPr wrap="none" lIns="45720" rIns="45720" tIns="18288" bIns="18288" anchor="ctr">
+            <a:noAutofit/>
+          </a:bodyPr>
+          <a:lstStyle/>
+          <a:p>
+            <a:pPr algn="l"/>
+            <a:r>
+              <a:rPr sz="2750" b="0" i="0">
+                <a:solidFill>
+                  <a:srgbClr val="1A1A1A"/>
+                </a:solidFill>
+                <a:latin typeface="Lexend"/>
+              </a:rPr>
+              <a:t>Same power, so add the fronts:  </a:t>
+            </a:r>
+          </a:p>
+        </p:txBody>
+      </p:sp>
+      <p:pic>
+        <p:nvPicPr>
+          <p:cNvPr id="11" name="Picture 10" descr="bcb34fa03e0895f9.png"/>
+          <p:cNvPicPr>
+            <a:picLocks noChangeAspect="1"/>
+          </p:cNvPicPr>
+          <p:nvPr/>
+        </p:nvPicPr>
+        <p:blipFill>
+          <a:blip r:embed="rId3"/>
+          <a:stretch>
+            <a:fillRect/>
+          </a:stretch>
+        </p:blipFill>
+        <p:spPr>
+          <a:xfrm>
+            <a:off x="7885663" y="3303634"/>
+            <a:ext cx="2240280" cy="252984"/>
+          </a:xfrm>
+          <a:prstGeom prst="rect">
+            <a:avLst/>
+          </a:prstGeom>
+        </p:spPr>
+      </p:pic>
+      <p:pic>
+        <p:nvPicPr>
+          <p:cNvPr id="12" name="Picture 11" descr="30762fde1252fce0.png"/>
+          <p:cNvPicPr>
+            <a:picLocks noChangeAspect="1"/>
+          </p:cNvPicPr>
+          <p:nvPr/>
+        </p:nvPicPr>
+        <p:blipFill>
+          <a:blip r:embed="rId4"/>
+          <a:stretch>
+            <a:fillRect/>
+          </a:stretch>
+        </p:blipFill>
+        <p:spPr>
+          <a:xfrm>
+            <a:off x="2090440" y="3817222"/>
+            <a:ext cx="3486912" cy="304800"/>
+          </a:xfrm>
+          <a:prstGeom prst="rect">
+            <a:avLst/>
+          </a:prstGeom>
+        </p:spPr>
+      </p:pic>
+      <p:sp>
+        <p:nvSpPr>
+          <p:cNvPr id="13" name="TextBox 12"/>
           <p:cNvSpPr txBox="1"/>
           <p:nvPr/>
         </p:nvSpPr>
@@ -3747,20 +3830,20 @@
           <a:p>
             <a:pPr algn="ctr"/>
             <a:r>
-              <a:rPr sz="3200" b="1" i="0">
+              <a:rPr sz="3040" b="1" i="0">
                 <a:solidFill>
                   <a:srgbClr val="9E1B32"/>
                 </a:solidFill>
-                <a:latin typeface="Century Schoolbook"/>
+                <a:latin typeface="Lexend"/>
               </a:rPr>
               <a:t>Answer:   1.23 × 10</a:t>
             </a:r>
             <a:r>
-              <a:rPr sz="3200" b="1" i="0" baseline="30000">
+              <a:rPr sz="3040" b="1" i="0" baseline="30000">
                 <a:solidFill>
                   <a:srgbClr val="9E1B32"/>
                 </a:solidFill>
-                <a:latin typeface="Century Schoolbook"/>
+                <a:latin typeface="Lexend"/>
               </a:rPr>
               <a:t>-2</a:t>
             </a:r>
@@ -3809,11 +3892,11 @@
           <a:p>
             <a:pPr algn="l"/>
             <a:r>
-              <a:rPr sz="3600" b="1" i="0">
+              <a:rPr sz="3420" b="1" i="0">
                 <a:solidFill>
                   <a:srgbClr val="1A1A1A"/>
                 </a:solidFill>
-                <a:latin typeface="Century Schoolbook"/>
+                <a:latin typeface="Lexend"/>
               </a:rPr>
               <a:t>Example 2</a:t>
             </a:r>
@@ -3949,11 +4032,11 @@
           <a:p>
             <a:pPr algn="l"/>
             <a:r>
-              <a:rPr sz="1100" b="0" i="1">
+              <a:rPr sz="1040" b="0" i="0">
                 <a:solidFill>
                   <a:srgbClr val="6B6B6B"/>
                 </a:solidFill>
-                <a:latin typeface="Century Schoolbook"/>
+                <a:latin typeface="Lexend"/>
               </a:rPr>
               <a:t>Grade 7 Accelerated · Unit 4 · Lesson 1 — Adding and Subtracting in Scientific Notation</a:t>
             </a:r>
@@ -3984,11 +4067,11 @@
           <a:p>
             <a:pPr algn="r"/>
             <a:r>
-              <a:rPr sz="1100" b="0" i="0">
+              <a:rPr sz="1040" b="0" i="0">
                 <a:solidFill>
                   <a:srgbClr val="6B6B6B"/>
                 </a:solidFill>
-                <a:latin typeface="Century Schoolbook"/>
+                <a:latin typeface="Lexend"/>
               </a:rPr>
               <a:t>11</a:t>
             </a:r>
@@ -3997,7 +4080,7 @@
       </p:sp>
       <p:pic>
         <p:nvPicPr>
-          <p:cNvPr id="8" name="Picture 7" descr="4549981a84cc89c2.png"/>
+          <p:cNvPr id="8" name="Picture 7" descr="bf4da8d69ae35ff0.png"/>
           <p:cNvPicPr>
             <a:picLocks noChangeAspect="1"/>
           </p:cNvPicPr>
@@ -4011,8 +4094,8 @@
         </p:blipFill>
         <p:spPr>
           <a:xfrm>
-            <a:off x="4172712" y="2103120"/>
-            <a:ext cx="3816095" cy="414528"/>
+            <a:off x="4184903" y="2104643"/>
+            <a:ext cx="3791712" cy="408432"/>
           </a:xfrm>
           <a:prstGeom prst="rect">
             <a:avLst/>
@@ -4027,7 +4110,7 @@
         </p:nvSpPr>
         <p:spPr>
           <a:xfrm>
-            <a:off x="777240" y="3020568"/>
+            <a:off x="777240" y="3017520"/>
             <a:ext cx="10607040" cy="429370"/>
           </a:xfrm>
           <a:prstGeom prst="rect">
@@ -4043,11 +4126,11 @@
           <a:p>
             <a:pPr algn="ctr"/>
             <a:r>
-              <a:rPr sz="2400" b="1" i="0">
+              <a:rPr sz="2280" b="1" i="0">
                 <a:solidFill>
                   <a:srgbClr val="1A1A1A"/>
                 </a:solidFill>
-                <a:latin typeface="Century Schoolbook"/>
+                <a:latin typeface="Lexend"/>
               </a:rPr>
               <a:t>Subtract. Write the answer in scientific notation.</a:t>
             </a:r>
@@ -4096,11 +4179,11 @@
           <a:p>
             <a:pPr algn="l"/>
             <a:r>
-              <a:rPr sz="3600" b="1" i="0">
+              <a:rPr sz="3420" b="1" i="0">
                 <a:solidFill>
                   <a:srgbClr val="1A1A1A"/>
                 </a:solidFill>
-                <a:latin typeface="Century Schoolbook"/>
+                <a:latin typeface="Lexend"/>
               </a:rPr>
               <a:t>Example 2</a:t>
             </a:r>
@@ -4236,11 +4319,11 @@
           <a:p>
             <a:pPr algn="l"/>
             <a:r>
-              <a:rPr sz="1100" b="0" i="1">
+              <a:rPr sz="1040" b="0" i="0">
                 <a:solidFill>
                   <a:srgbClr val="6B6B6B"/>
                 </a:solidFill>
-                <a:latin typeface="Century Schoolbook"/>
+                <a:latin typeface="Lexend"/>
               </a:rPr>
               <a:t>Grade 7 Accelerated · Unit 4 · Lesson 1 — Adding and Subtracting in Scientific Notation</a:t>
             </a:r>
@@ -4271,11 +4354,11 @@
           <a:p>
             <a:pPr algn="r"/>
             <a:r>
-              <a:rPr sz="1100" b="0" i="0">
+              <a:rPr sz="1040" b="0" i="0">
                 <a:solidFill>
                   <a:srgbClr val="6B6B6B"/>
                 </a:solidFill>
-                <a:latin typeface="Century Schoolbook"/>
+                <a:latin typeface="Lexend"/>
               </a:rPr>
               <a:t>12</a:t>
             </a:r>
@@ -4284,7 +4367,7 @@
       </p:sp>
       <p:pic>
         <p:nvPicPr>
-          <p:cNvPr id="8" name="Picture 7" descr="0ba903ac78fff37b.png"/>
+          <p:cNvPr id="8" name="Picture 7" descr="f0014276d232b375.png"/>
           <p:cNvPicPr>
             <a:picLocks noChangeAspect="1"/>
           </p:cNvPicPr>
@@ -4299,7 +4382,7 @@
         <p:spPr>
           <a:xfrm>
             <a:off x="1828800" y="1920240"/>
-            <a:ext cx="3483864" cy="353568"/>
+            <a:ext cx="3505200" cy="341376"/>
           </a:xfrm>
           <a:prstGeom prst="rect">
             <a:avLst/>
@@ -4308,7 +4391,7 @@
       </p:pic>
       <p:pic>
         <p:nvPicPr>
-          <p:cNvPr id="9" name="Picture 8" descr="aed5738787927d4f.png"/>
+          <p:cNvPr id="9" name="Picture 8" descr="934206aface5fa5c.png"/>
           <p:cNvPicPr>
             <a:picLocks noChangeAspect="1"/>
           </p:cNvPicPr>
@@ -4322,8 +4405,8 @@
         </p:blipFill>
         <p:spPr>
           <a:xfrm>
-            <a:off x="1828800" y="2548128"/>
-            <a:ext cx="6071616" cy="411480"/>
+            <a:off x="1828800" y="2535936"/>
+            <a:ext cx="6050280" cy="414528"/>
           </a:xfrm>
           <a:prstGeom prst="rect">
             <a:avLst/>
@@ -4332,7 +4415,7 @@
       </p:pic>
       <p:pic>
         <p:nvPicPr>
-          <p:cNvPr id="10" name="Picture 9" descr="7c3a73d2cb750c41.png"/>
+          <p:cNvPr id="10" name="Picture 9" descr="5c58ea87206358f6.png"/>
           <p:cNvPicPr>
             <a:picLocks noChangeAspect="1"/>
           </p:cNvPicPr>
@@ -4346,8 +4429,8 @@
         </p:blipFill>
         <p:spPr>
           <a:xfrm>
-            <a:off x="1828800" y="3233928"/>
-            <a:ext cx="5349240" cy="338328"/>
+            <a:off x="1828800" y="3224783"/>
+            <a:ext cx="5779008" cy="350520"/>
           </a:xfrm>
           <a:prstGeom prst="rect">
             <a:avLst/>
@@ -4378,20 +4461,20 @@
           <a:p>
             <a:pPr algn="ctr"/>
             <a:r>
-              <a:rPr sz="3200" b="1" i="0">
+              <a:rPr sz="3040" b="1" i="0">
                 <a:solidFill>
                   <a:srgbClr val="9E1B32"/>
                 </a:solidFill>
-                <a:latin typeface="Century Schoolbook"/>
+                <a:latin typeface="Lexend"/>
               </a:rPr>
               <a:t>Answer:   6.85 × 10</a:t>
             </a:r>
             <a:r>
-              <a:rPr sz="3200" b="1" i="0" baseline="30000">
+              <a:rPr sz="3040" b="1" i="0" baseline="30000">
                 <a:solidFill>
                   <a:srgbClr val="9E1B32"/>
                 </a:solidFill>
-                <a:latin typeface="Century Schoolbook"/>
+                <a:latin typeface="Lexend"/>
               </a:rPr>
               <a:t>6</a:t>
             </a:r>
@@ -4440,11 +4523,11 @@
           <a:p>
             <a:pPr algn="l"/>
             <a:r>
-              <a:rPr sz="3600" b="1" i="0">
+              <a:rPr sz="3420" b="1" i="0">
                 <a:solidFill>
                   <a:srgbClr val="1A1A1A"/>
                 </a:solidFill>
-                <a:latin typeface="Century Schoolbook"/>
+                <a:latin typeface="Lexend"/>
               </a:rPr>
               <a:t>Your Turn</a:t>
             </a:r>
@@ -4580,11 +4663,11 @@
           <a:p>
             <a:pPr algn="l"/>
             <a:r>
-              <a:rPr sz="1100" b="0" i="1">
+              <a:rPr sz="1040" b="0" i="0">
                 <a:solidFill>
                   <a:srgbClr val="6B6B6B"/>
                 </a:solidFill>
-                <a:latin typeface="Century Schoolbook"/>
+                <a:latin typeface="Lexend"/>
               </a:rPr>
               <a:t>Grade 7 Accelerated · Unit 4 · Lesson 1 — Adding and Subtracting in Scientific Notation</a:t>
             </a:r>
@@ -4615,11 +4698,11 @@
           <a:p>
             <a:pPr algn="r"/>
             <a:r>
-              <a:rPr sz="1100" b="0" i="0">
+              <a:rPr sz="1040" b="0" i="0">
                 <a:solidFill>
                   <a:srgbClr val="6B6B6B"/>
                 </a:solidFill>
-                <a:latin typeface="Century Schoolbook"/>
+                <a:latin typeface="Lexend"/>
               </a:rPr>
               <a:t>13</a:t>
             </a:r>
@@ -4628,7 +4711,7 @@
       </p:sp>
       <p:pic>
         <p:nvPicPr>
-          <p:cNvPr id="8" name="Picture 7" descr="e4f0a8415ed56967.png"/>
+          <p:cNvPr id="8" name="Picture 7" descr="1b8e06632cef401d.png"/>
           <p:cNvPicPr>
             <a:picLocks noChangeAspect="1"/>
           </p:cNvPicPr>
@@ -4642,8 +4725,8 @@
         </p:blipFill>
         <p:spPr>
           <a:xfrm>
-            <a:off x="3453383" y="2194560"/>
-            <a:ext cx="5254752" cy="518160"/>
+            <a:off x="3499104" y="1600200"/>
+            <a:ext cx="5163312" cy="512064"/>
           </a:xfrm>
           <a:prstGeom prst="rect">
             <a:avLst/>
@@ -4658,7 +4741,7 @@
         </p:nvSpPr>
         <p:spPr>
           <a:xfrm>
-            <a:off x="777240" y="3215640"/>
+            <a:off x="777240" y="2615184"/>
             <a:ext cx="10607040" cy="429370"/>
           </a:xfrm>
           <a:prstGeom prst="rect">
@@ -4674,11 +4757,11 @@
           <a:p>
             <a:pPr algn="ctr"/>
             <a:r>
-              <a:rPr sz="2400" b="1" i="0">
+              <a:rPr sz="2280" b="1" i="0">
                 <a:solidFill>
                   <a:srgbClr val="1A1A1A"/>
                 </a:solidFill>
-                <a:latin typeface="Century Schoolbook"/>
+                <a:latin typeface="Lexend"/>
               </a:rPr>
               <a:t>Subtract. Write the answer in scientific notation.</a:t>
             </a:r>
@@ -4727,11 +4810,11 @@
           <a:p>
             <a:pPr algn="l"/>
             <a:r>
-              <a:rPr sz="3600" b="1" i="0">
+              <a:rPr sz="3420" b="1" i="0">
                 <a:solidFill>
                   <a:srgbClr val="1A1A1A"/>
                 </a:solidFill>
-                <a:latin typeface="Century Schoolbook"/>
+                <a:latin typeface="Lexend"/>
               </a:rPr>
               <a:t>Your Turn</a:t>
             </a:r>
@@ -4867,11 +4950,11 @@
           <a:p>
             <a:pPr algn="l"/>
             <a:r>
-              <a:rPr sz="1100" b="0" i="1">
+              <a:rPr sz="1040" b="0" i="0">
                 <a:solidFill>
                   <a:srgbClr val="6B6B6B"/>
                 </a:solidFill>
-                <a:latin typeface="Century Schoolbook"/>
+                <a:latin typeface="Lexend"/>
               </a:rPr>
               <a:t>Grade 7 Accelerated · Unit 4 · Lesson 1 — Adding and Subtracting in Scientific Notation</a:t>
             </a:r>
@@ -4902,11 +4985,11 @@
           <a:p>
             <a:pPr algn="r"/>
             <a:r>
-              <a:rPr sz="1100" b="0" i="0">
+              <a:rPr sz="1040" b="0" i="0">
                 <a:solidFill>
                   <a:srgbClr val="6B6B6B"/>
                 </a:solidFill>
-                <a:latin typeface="Century Schoolbook"/>
+                <a:latin typeface="Lexend"/>
               </a:rPr>
               <a:t>14</a:t>
             </a:r>
@@ -4915,7 +4998,7 @@
       </p:sp>
       <p:pic>
         <p:nvPicPr>
-          <p:cNvPr id="8" name="Picture 7" descr="6ee0cf26c6675aa8.png"/>
+          <p:cNvPr id="8" name="Picture 7" descr="248bda730bf17b84.png"/>
           <p:cNvPicPr>
             <a:picLocks noChangeAspect="1"/>
           </p:cNvPicPr>
@@ -4929,8 +5012,8 @@
         </p:blipFill>
         <p:spPr>
           <a:xfrm>
-            <a:off x="3451860" y="2194560"/>
-            <a:ext cx="5257800" cy="521207"/>
+            <a:off x="3497579" y="1600200"/>
+            <a:ext cx="5166360" cy="512064"/>
           </a:xfrm>
           <a:prstGeom prst="rect">
             <a:avLst/>
@@ -4945,7 +5028,7 @@
         </p:nvSpPr>
         <p:spPr>
           <a:xfrm>
-            <a:off x="777240" y="3218688"/>
+            <a:off x="777240" y="2615184"/>
             <a:ext cx="10607040" cy="429370"/>
           </a:xfrm>
           <a:prstGeom prst="rect">
@@ -4961,11 +5044,11 @@
           <a:p>
             <a:pPr algn="ctr"/>
             <a:r>
-              <a:rPr sz="2400" b="1" i="0">
+              <a:rPr sz="2280" b="1" i="0">
                 <a:solidFill>
                   <a:srgbClr val="1A1A1A"/>
                 </a:solidFill>
-                <a:latin typeface="Century Schoolbook"/>
+                <a:latin typeface="Lexend"/>
               </a:rPr>
               <a:t>Subtract. Write the answer in scientific notation.</a:t>
             </a:r>
@@ -4980,7 +5063,114 @@
         </p:nvSpPr>
         <p:spPr>
           <a:xfrm>
-            <a:off x="777240" y="4572000"/>
+            <a:off x="3113393" y="3204574"/>
+            <a:ext cx="3154956" cy="457200"/>
+          </a:xfrm>
+          <a:prstGeom prst="rect">
+            <a:avLst/>
+          </a:prstGeom>
+          <a:noFill/>
+        </p:spPr>
+        <p:txBody>
+          <a:bodyPr wrap="none" lIns="45720" rIns="45720" tIns="18288" bIns="18288" anchor="ctr">
+            <a:noAutofit/>
+          </a:bodyPr>
+          <a:lstStyle/>
+          <a:p>
+            <a:pPr algn="l"/>
+            <a:r>
+              <a:rPr sz="2330" b="0" i="0">
+                <a:solidFill>
+                  <a:srgbClr val="1A1A1A"/>
+                </a:solidFill>
+                <a:latin typeface="Lexend"/>
+              </a:rPr>
+              <a:t>Match the powers:  </a:t>
+            </a:r>
+          </a:p>
+        </p:txBody>
+      </p:sp>
+      <p:pic>
+        <p:nvPicPr>
+          <p:cNvPr id="11" name="Picture 10" descr="9ce2865529b18e92.png"/>
+          <p:cNvPicPr>
+            <a:picLocks noChangeAspect="1"/>
+          </p:cNvPicPr>
+          <p:nvPr/>
+        </p:nvPicPr>
+        <p:blipFill>
+          <a:blip r:embed="rId3"/>
+          <a:stretch>
+            <a:fillRect/>
+          </a:stretch>
+        </p:blipFill>
+        <p:spPr>
+          <a:xfrm>
+            <a:off x="6131190" y="3302110"/>
+            <a:ext cx="2913888" cy="262128"/>
+          </a:xfrm>
+          <a:prstGeom prst="rect">
+            <a:avLst/>
+          </a:prstGeom>
+        </p:spPr>
+      </p:pic>
+      <p:pic>
+        <p:nvPicPr>
+          <p:cNvPr id="12" name="Picture 11" descr="bd4649ecf62b8ad3.png"/>
+          <p:cNvPicPr>
+            <a:picLocks noChangeAspect="1"/>
+          </p:cNvPicPr>
+          <p:nvPr/>
+        </p:nvPicPr>
+        <p:blipFill>
+          <a:blip r:embed="rId4"/>
+          <a:stretch>
+            <a:fillRect/>
+          </a:stretch>
+        </p:blipFill>
+        <p:spPr>
+          <a:xfrm>
+            <a:off x="3168257" y="3829414"/>
+            <a:ext cx="2069591" cy="213360"/>
+          </a:xfrm>
+          <a:prstGeom prst="rect">
+            <a:avLst/>
+          </a:prstGeom>
+        </p:spPr>
+      </p:pic>
+      <p:pic>
+        <p:nvPicPr>
+          <p:cNvPr id="13" name="Picture 12" descr="fb181fe42321e2e1.png"/>
+          <p:cNvPicPr>
+            <a:picLocks noChangeAspect="1"/>
+          </p:cNvPicPr>
+          <p:nvPr/>
+        </p:nvPicPr>
+        <p:blipFill>
+          <a:blip r:embed="rId5"/>
+          <a:stretch>
+            <a:fillRect/>
+          </a:stretch>
+        </p:blipFill>
+        <p:spPr>
+          <a:xfrm>
+            <a:off x="3168257" y="4310998"/>
+            <a:ext cx="1362456" cy="256032"/>
+          </a:xfrm>
+          <a:prstGeom prst="rect">
+            <a:avLst/>
+          </a:prstGeom>
+        </p:spPr>
+      </p:pic>
+      <p:sp>
+        <p:nvSpPr>
+          <p:cNvPr id="14" name="TextBox 13"/>
+          <p:cNvSpPr txBox="1"/>
+          <p:nvPr/>
+        </p:nvSpPr>
+        <p:spPr>
+          <a:xfrm>
+            <a:off x="777240" y="4781914"/>
             <a:ext cx="10607040" cy="548640"/>
           </a:xfrm>
           <a:prstGeom prst="rect">
@@ -4996,20 +5186,20 @@
           <a:p>
             <a:pPr algn="ctr"/>
             <a:r>
-              <a:rPr sz="3200" b="1" i="0">
+              <a:rPr sz="3040" b="1" i="0">
                 <a:solidFill>
                   <a:srgbClr val="9E1B32"/>
                 </a:solidFill>
-                <a:latin typeface="Century Schoolbook"/>
+                <a:latin typeface="Lexend"/>
               </a:rPr>
               <a:t>Answer:   5.51 × 10</a:t>
             </a:r>
             <a:r>
-              <a:rPr sz="3200" b="1" i="0" baseline="30000">
+              <a:rPr sz="3040" b="1" i="0" baseline="30000">
                 <a:solidFill>
                   <a:srgbClr val="9E1B32"/>
                 </a:solidFill>
-                <a:latin typeface="Century Schoolbook"/>
+                <a:latin typeface="Lexend"/>
               </a:rPr>
               <a:t>-4</a:t>
             </a:r>
@@ -5058,11 +5248,11 @@
           <a:p>
             <a:pPr algn="l"/>
             <a:r>
-              <a:rPr sz="3400" b="1" i="0">
+              <a:rPr sz="3229" b="1" i="0">
                 <a:solidFill>
                   <a:srgbClr val="1A1A1A"/>
                 </a:solidFill>
-                <a:latin typeface="Century Schoolbook"/>
+                <a:latin typeface="Lexend"/>
               </a:rPr>
               <a:t>Whiteboards   ·   Question 1 of 9</a:t>
             </a:r>
@@ -5198,11 +5388,11 @@
           <a:p>
             <a:pPr algn="l"/>
             <a:r>
-              <a:rPr sz="1100" b="0" i="1">
+              <a:rPr sz="1040" b="0" i="0">
                 <a:solidFill>
                   <a:srgbClr val="6B6B6B"/>
                 </a:solidFill>
-                <a:latin typeface="Century Schoolbook"/>
+                <a:latin typeface="Lexend"/>
               </a:rPr>
               <a:t>Grade 7 Accelerated · Unit 4 · Lesson 1 — Adding and Subtracting in Scientific Notation</a:t>
             </a:r>
@@ -5233,11 +5423,11 @@
           <a:p>
             <a:pPr algn="r"/>
             <a:r>
-              <a:rPr sz="1100" b="0" i="0">
+              <a:rPr sz="1040" b="0" i="0">
                 <a:solidFill>
                   <a:srgbClr val="6B6B6B"/>
                 </a:solidFill>
-                <a:latin typeface="Century Schoolbook"/>
+                <a:latin typeface="Lexend"/>
               </a:rPr>
               <a:t>15</a:t>
             </a:r>
@@ -5246,7 +5436,7 @@
       </p:sp>
       <p:pic>
         <p:nvPicPr>
-          <p:cNvPr id="8" name="Picture 7" descr="3cd7ad48ef74b5a3.png"/>
+          <p:cNvPr id="8" name="Picture 7" descr="09fad54e403494e1.png"/>
           <p:cNvPicPr>
             <a:picLocks noChangeAspect="1"/>
           </p:cNvPicPr>
@@ -5260,8 +5450,8 @@
         </p:blipFill>
         <p:spPr>
           <a:xfrm>
-            <a:off x="4172712" y="2194560"/>
-            <a:ext cx="3816095" cy="414528"/>
+            <a:off x="4192524" y="2197608"/>
+            <a:ext cx="3776472" cy="405384"/>
           </a:xfrm>
           <a:prstGeom prst="rect">
             <a:avLst/>
@@ -5292,11 +5482,11 @@
           <a:p>
             <a:pPr algn="ctr"/>
             <a:r>
-              <a:rPr sz="2600" b="1" i="0">
+              <a:rPr sz="2470" b="1" i="0">
                 <a:solidFill>
                   <a:srgbClr val="1A1A1A"/>
                 </a:solidFill>
-                <a:latin typeface="Century Schoolbook"/>
+                <a:latin typeface="Lexend"/>
               </a:rPr>
               <a:t>Answer it.</a:t>
             </a:r>
@@ -5345,11 +5535,11 @@
           <a:p>
             <a:pPr algn="l"/>
             <a:r>
-              <a:rPr sz="3400" b="1" i="0">
+              <a:rPr sz="3229" b="1" i="0">
                 <a:solidFill>
                   <a:srgbClr val="1A1A1A"/>
                 </a:solidFill>
-                <a:latin typeface="Century Schoolbook"/>
+                <a:latin typeface="Lexend"/>
               </a:rPr>
               <a:t>Whiteboards   ·   Question 1 of 9</a:t>
             </a:r>
@@ -5485,11 +5675,11 @@
           <a:p>
             <a:pPr algn="l"/>
             <a:r>
-              <a:rPr sz="1100" b="0" i="1">
+              <a:rPr sz="1040" b="0" i="0">
                 <a:solidFill>
                   <a:srgbClr val="6B6B6B"/>
                 </a:solidFill>
-                <a:latin typeface="Century Schoolbook"/>
+                <a:latin typeface="Lexend"/>
               </a:rPr>
               <a:t>Grade 7 Accelerated · Unit 4 · Lesson 1 — Adding and Subtracting in Scientific Notation</a:t>
             </a:r>
@@ -5520,11 +5710,11 @@
           <a:p>
             <a:pPr algn="r"/>
             <a:r>
-              <a:rPr sz="1100" b="0" i="0">
+              <a:rPr sz="1040" b="0" i="0">
                 <a:solidFill>
                   <a:srgbClr val="6B6B6B"/>
                 </a:solidFill>
-                <a:latin typeface="Century Schoolbook"/>
+                <a:latin typeface="Lexend"/>
               </a:rPr>
               <a:t>16</a:t>
             </a:r>
@@ -5533,7 +5723,7 @@
       </p:sp>
       <p:pic>
         <p:nvPicPr>
-          <p:cNvPr id="8" name="Picture 7" descr="2e4a44f0bcfa9379.png"/>
+          <p:cNvPr id="8" name="Picture 7" descr="2a3c75618fa7d5a2.png"/>
           <p:cNvPicPr>
             <a:picLocks noChangeAspect="1"/>
           </p:cNvPicPr>
@@ -5547,8 +5737,8 @@
         </p:blipFill>
         <p:spPr>
           <a:xfrm>
-            <a:off x="4171188" y="2103120"/>
-            <a:ext cx="3819144" cy="411480"/>
+            <a:off x="4190999" y="2106168"/>
+            <a:ext cx="3779520" cy="405384"/>
           </a:xfrm>
           <a:prstGeom prst="rect">
             <a:avLst/>
@@ -5558,6 +5748,89 @@
       <p:sp>
         <p:nvSpPr>
           <p:cNvPr id="9" name="TextBox 8"/>
+          <p:cNvSpPr txBox="1"/>
+          <p:nvPr/>
+        </p:nvSpPr>
+        <p:spPr>
+          <a:xfrm>
+            <a:off x="2142256" y="2839212"/>
+            <a:ext cx="5987247" cy="457200"/>
+          </a:xfrm>
+          <a:prstGeom prst="rect">
+            <a:avLst/>
+          </a:prstGeom>
+          <a:noFill/>
+        </p:spPr>
+        <p:txBody>
+          <a:bodyPr wrap="none" lIns="45720" rIns="45720" tIns="18288" bIns="18288" anchor="ctr">
+            <a:noAutofit/>
+          </a:bodyPr>
+          <a:lstStyle/>
+          <a:p>
+            <a:pPr algn="l"/>
+            <a:r>
+              <a:rPr sz="2750" b="0" i="0">
+                <a:solidFill>
+                  <a:srgbClr val="1A1A1A"/>
+                </a:solidFill>
+                <a:latin typeface="Lexend"/>
+              </a:rPr>
+              <a:t>Same power, so add the fronts:  </a:t>
+            </a:r>
+          </a:p>
+        </p:txBody>
+      </p:sp>
+      <p:pic>
+        <p:nvPicPr>
+          <p:cNvPr id="10" name="Picture 9" descr="691fe688d72e9def.png"/>
+          <p:cNvPicPr>
+            <a:picLocks noChangeAspect="1"/>
+          </p:cNvPicPr>
+          <p:nvPr/>
+        </p:nvPicPr>
+        <p:blipFill>
+          <a:blip r:embed="rId3"/>
+          <a:stretch>
+            <a:fillRect/>
+          </a:stretch>
+        </p:blipFill>
+        <p:spPr>
+          <a:xfrm>
+            <a:off x="7992343" y="2941320"/>
+            <a:ext cx="2026920" cy="252984"/>
+          </a:xfrm>
+          <a:prstGeom prst="rect">
+            <a:avLst/>
+          </a:prstGeom>
+        </p:spPr>
+      </p:pic>
+      <p:pic>
+        <p:nvPicPr>
+          <p:cNvPr id="11" name="Picture 10" descr="b4ec2c46247ef025.png"/>
+          <p:cNvPicPr>
+            <a:picLocks noChangeAspect="1"/>
+          </p:cNvPicPr>
+          <p:nvPr/>
+        </p:nvPicPr>
+        <p:blipFill>
+          <a:blip r:embed="rId4"/>
+          <a:stretch>
+            <a:fillRect/>
+          </a:stretch>
+        </p:blipFill>
+        <p:spPr>
+          <a:xfrm>
+            <a:off x="2197120" y="3454908"/>
+            <a:ext cx="1246632" cy="304800"/>
+          </a:xfrm>
+          <a:prstGeom prst="rect">
+            <a:avLst/>
+          </a:prstGeom>
+        </p:spPr>
+      </p:pic>
+      <p:sp>
+        <p:nvSpPr>
+          <p:cNvPr id="12" name="TextBox 11"/>
           <p:cNvSpPr txBox="1"/>
           <p:nvPr/>
         </p:nvSpPr>
@@ -5579,20 +5852,20 @@
           <a:p>
             <a:pPr algn="ctr"/>
             <a:r>
-              <a:rPr sz="3200" b="1" i="0">
+              <a:rPr sz="3040" b="1" i="0">
                 <a:solidFill>
                   <a:srgbClr val="9E1B32"/>
                 </a:solidFill>
-                <a:latin typeface="Century Schoolbook"/>
+                <a:latin typeface="Lexend"/>
               </a:rPr>
               <a:t>Answer:   7.3 × 10</a:t>
             </a:r>
             <a:r>
-              <a:rPr sz="3200" b="1" i="0" baseline="30000">
+              <a:rPr sz="3040" b="1" i="0" baseline="30000">
                 <a:solidFill>
                   <a:srgbClr val="9E1B32"/>
                 </a:solidFill>
-                <a:latin typeface="Century Schoolbook"/>
+                <a:latin typeface="Lexend"/>
               </a:rPr>
               <a:t>5</a:t>
             </a:r>
@@ -5641,11 +5914,11 @@
           <a:p>
             <a:pPr algn="l"/>
             <a:r>
-              <a:rPr sz="3400" b="1" i="0">
+              <a:rPr sz="3229" b="1" i="0">
                 <a:solidFill>
                   <a:srgbClr val="1A1A1A"/>
                 </a:solidFill>
-                <a:latin typeface="Century Schoolbook"/>
+                <a:latin typeface="Lexend"/>
               </a:rPr>
               <a:t>Whiteboards   ·   Question 2 of 9</a:t>
             </a:r>
@@ -5781,11 +6054,11 @@
           <a:p>
             <a:pPr algn="l"/>
             <a:r>
-              <a:rPr sz="1100" b="0" i="1">
+              <a:rPr sz="1040" b="0" i="0">
                 <a:solidFill>
                   <a:srgbClr val="6B6B6B"/>
                 </a:solidFill>
-                <a:latin typeface="Century Schoolbook"/>
+                <a:latin typeface="Lexend"/>
               </a:rPr>
               <a:t>Grade 7 Accelerated · Unit 4 · Lesson 1 — Adding and Subtracting in Scientific Notation</a:t>
             </a:r>
@@ -5816,11 +6089,11 @@
           <a:p>
             <a:pPr algn="r"/>
             <a:r>
-              <a:rPr sz="1100" b="0" i="0">
+              <a:rPr sz="1040" b="0" i="0">
                 <a:solidFill>
                   <a:srgbClr val="6B6B6B"/>
                 </a:solidFill>
-                <a:latin typeface="Century Schoolbook"/>
+                <a:latin typeface="Lexend"/>
               </a:rPr>
               <a:t>17</a:t>
             </a:r>
@@ -5836,7 +6109,7 @@
         <p:spPr>
           <a:xfrm>
             <a:off x="1234440" y="1851660"/>
-            <a:ext cx="2626425" cy="457200"/>
+            <a:ext cx="2579155" cy="457200"/>
           </a:xfrm>
           <a:prstGeom prst="rect">
             <a:avLst/>
@@ -5851,11 +6124,11 @@
           <a:p>
             <a:pPr algn="l"/>
             <a:r>
-              <a:rPr sz="2400" b="0" i="0">
+              <a:rPr sz="2280" b="0" i="0">
                 <a:solidFill>
                   <a:srgbClr val="1A1A1A"/>
                 </a:solidFill>
-                <a:latin typeface="Century Schoolbook"/>
+                <a:latin typeface="Lexend"/>
               </a:rPr>
               <a:t>A stadium sold  </a:t>
             </a:r>
@@ -5864,7 +6137,7 @@
       </p:sp>
       <p:pic>
         <p:nvPicPr>
-          <p:cNvPr id="9" name="Picture 8" descr="3a4ce939f4597d0f.png"/>
+          <p:cNvPr id="9" name="Picture 8" descr="5243cc360be291af.png"/>
           <p:cNvPicPr>
             <a:picLocks noChangeAspect="1"/>
           </p:cNvPicPr>
@@ -5878,8 +6151,8 @@
         </p:blipFill>
         <p:spPr>
           <a:xfrm>
-            <a:off x="3723705" y="1937003"/>
-            <a:ext cx="1161288" cy="286512"/>
+            <a:off x="3676435" y="1944623"/>
+            <a:ext cx="1173480" cy="271272"/>
           </a:xfrm>
           <a:prstGeom prst="rect">
             <a:avLst/>
@@ -5894,8 +6167,8 @@
         </p:nvSpPr>
         <p:spPr>
           <a:xfrm>
-            <a:off x="4884993" y="1851660"/>
-            <a:ext cx="2897979" cy="457200"/>
+            <a:off x="4849915" y="1851660"/>
+            <a:ext cx="2865857" cy="457200"/>
           </a:xfrm>
           <a:prstGeom prst="rect">
             <a:avLst/>
@@ -5910,11 +6183,11 @@
           <a:p>
             <a:pPr algn="l"/>
             <a:r>
-              <a:rPr sz="2400" b="0" i="0">
+              <a:rPr sz="2280" b="0" i="0">
                 <a:solidFill>
                   <a:srgbClr val="1A1A1A"/>
                 </a:solidFill>
-                <a:latin typeface="Century Schoolbook"/>
+                <a:latin typeface="Lexend"/>
               </a:rPr>
               <a:t>  tickets on Friday</a:t>
             </a:r>
@@ -5930,7 +6203,7 @@
         <p:spPr>
           <a:xfrm>
             <a:off x="1234440" y="2464308"/>
-            <a:ext cx="952457" cy="457200"/>
+            <a:ext cx="953666" cy="457200"/>
           </a:xfrm>
           <a:prstGeom prst="rect">
             <a:avLst/>
@@ -5945,11 +6218,11 @@
           <a:p>
             <a:pPr algn="l"/>
             <a:r>
-              <a:rPr sz="2400" b="0" i="0">
+              <a:rPr sz="2280" b="0" i="0">
                 <a:solidFill>
                   <a:srgbClr val="1A1A1A"/>
                 </a:solidFill>
-                <a:latin typeface="Century Schoolbook"/>
+                <a:latin typeface="Lexend"/>
               </a:rPr>
               <a:t>and  </a:t>
             </a:r>
@@ -5958,7 +6231,7 @@
       </p:sp>
       <p:pic>
         <p:nvPicPr>
-          <p:cNvPr id="12" name="Picture 11" descr="cf4775b41686db4b.png"/>
+          <p:cNvPr id="12" name="Picture 11" descr="5ce3a6a6b398a32a.png"/>
           <p:cNvPicPr>
             <a:picLocks noChangeAspect="1"/>
           </p:cNvPicPr>
@@ -5972,8 +6245,8 @@
         </p:blipFill>
         <p:spPr>
           <a:xfrm>
-            <a:off x="2049737" y="2549652"/>
-            <a:ext cx="1152144" cy="286512"/>
+            <a:off x="2050946" y="2557272"/>
+            <a:ext cx="1152144" cy="271272"/>
           </a:xfrm>
           <a:prstGeom prst="rect">
             <a:avLst/>
@@ -5988,8 +6261,8 @@
         </p:nvSpPr>
         <p:spPr>
           <a:xfrm>
-            <a:off x="3201881" y="2464308"/>
-            <a:ext cx="6354084" cy="457200"/>
+            <a:off x="3203090" y="2464308"/>
+            <a:ext cx="6284639" cy="457200"/>
           </a:xfrm>
           <a:prstGeom prst="rect">
             <a:avLst/>
@@ -6004,11 +6277,11 @@
           <a:p>
             <a:pPr algn="l"/>
             <a:r>
-              <a:rPr sz="2400" b="0" i="0">
+              <a:rPr sz="2280" b="0" i="0">
                 <a:solidFill>
                   <a:srgbClr val="1A1A1A"/>
                 </a:solidFill>
-                <a:latin typeface="Century Schoolbook"/>
+                <a:latin typeface="Lexend"/>
               </a:rPr>
               <a:t>  on Saturday. Each ticket cost 38 dollars.</a:t>
             </a:r>
@@ -6039,11 +6312,11 @@
           <a:p>
             <a:pPr algn="l"/>
             <a:r>
-              <a:rPr sz="2400" b="1" i="0">
+              <a:rPr sz="2280" b="1" i="0">
                 <a:solidFill>
                   <a:srgbClr val="1A1A1A"/>
                 </a:solidFill>
-                <a:latin typeface="Century Schoolbook"/>
+                <a:latin typeface="Lexend"/>
               </a:rPr>
               <a:t>How many tickets were sold on the two days?</a:t>
             </a:r>
@@ -6074,11 +6347,11 @@
           <a:p>
             <a:pPr algn="ctr"/>
             <a:r>
-              <a:rPr sz="2600" b="1" i="0">
+              <a:rPr sz="2470" b="1" i="0">
                 <a:solidFill>
                   <a:srgbClr val="1A1A1A"/>
                 </a:solidFill>
-                <a:latin typeface="Century Schoolbook"/>
+                <a:latin typeface="Lexend"/>
               </a:rPr>
               <a:t>Answer it.</a:t>
             </a:r>
@@ -6127,11 +6400,11 @@
           <a:p>
             <a:pPr algn="l"/>
             <a:r>
-              <a:rPr sz="3400" b="1" i="0">
+              <a:rPr sz="3229" b="1" i="0">
                 <a:solidFill>
                   <a:srgbClr val="1A1A1A"/>
                 </a:solidFill>
-                <a:latin typeface="Century Schoolbook"/>
+                <a:latin typeface="Lexend"/>
               </a:rPr>
               <a:t>Whiteboards   ·   Question 2 of 9</a:t>
             </a:r>
@@ -6267,11 +6540,11 @@
           <a:p>
             <a:pPr algn="l"/>
             <a:r>
-              <a:rPr sz="1100" b="0" i="1">
+              <a:rPr sz="1040" b="0" i="0">
                 <a:solidFill>
                   <a:srgbClr val="6B6B6B"/>
                 </a:solidFill>
-                <a:latin typeface="Century Schoolbook"/>
+                <a:latin typeface="Lexend"/>
               </a:rPr>
               <a:t>Grade 7 Accelerated · Unit 4 · Lesson 1 — Adding and Subtracting in Scientific Notation</a:t>
             </a:r>
@@ -6302,11 +6575,11 @@
           <a:p>
             <a:pPr algn="r"/>
             <a:r>
-              <a:rPr sz="1100" b="0" i="0">
+              <a:rPr sz="1040" b="0" i="0">
                 <a:solidFill>
                   <a:srgbClr val="6B6B6B"/>
                 </a:solidFill>
-                <a:latin typeface="Century Schoolbook"/>
+                <a:latin typeface="Lexend"/>
               </a:rPr>
               <a:t>18</a:t>
             </a:r>
@@ -6322,7 +6595,7 @@
         <p:spPr>
           <a:xfrm>
             <a:off x="1234440" y="1851660"/>
-            <a:ext cx="2626425" cy="457200"/>
+            <a:ext cx="2579155" cy="457200"/>
           </a:xfrm>
           <a:prstGeom prst="rect">
             <a:avLst/>
@@ -6337,11 +6610,11 @@
           <a:p>
             <a:pPr algn="l"/>
             <a:r>
-              <a:rPr sz="2400" b="0" i="0">
+              <a:rPr sz="2280" b="0" i="0">
                 <a:solidFill>
                   <a:srgbClr val="1A1A1A"/>
                 </a:solidFill>
-                <a:latin typeface="Century Schoolbook"/>
+                <a:latin typeface="Lexend"/>
               </a:rPr>
               <a:t>A stadium sold  </a:t>
             </a:r>
@@ -6350,7 +6623,7 @@
       </p:sp>
       <p:pic>
         <p:nvPicPr>
-          <p:cNvPr id="9" name="Picture 8" descr="6c4bcb516da5e5c0.png"/>
+          <p:cNvPr id="9" name="Picture 8" descr="a8bb2f17f73fb1a5.png"/>
           <p:cNvPicPr>
             <a:picLocks noChangeAspect="1"/>
           </p:cNvPicPr>
@@ -6364,8 +6637,8 @@
         </p:blipFill>
         <p:spPr>
           <a:xfrm>
-            <a:off x="3723705" y="1938527"/>
-            <a:ext cx="1164336" cy="283464"/>
+            <a:off x="3676435" y="1943100"/>
+            <a:ext cx="1173480" cy="274320"/>
           </a:xfrm>
           <a:prstGeom prst="rect">
             <a:avLst/>
@@ -6380,8 +6653,8 @@
         </p:nvSpPr>
         <p:spPr>
           <a:xfrm>
-            <a:off x="4888041" y="1851660"/>
-            <a:ext cx="2897979" cy="457200"/>
+            <a:off x="4849915" y="1851660"/>
+            <a:ext cx="2865857" cy="457200"/>
           </a:xfrm>
           <a:prstGeom prst="rect">
             <a:avLst/>
@@ -6396,11 +6669,11 @@
           <a:p>
             <a:pPr algn="l"/>
             <a:r>
-              <a:rPr sz="2400" b="0" i="0">
+              <a:rPr sz="2280" b="0" i="0">
                 <a:solidFill>
                   <a:srgbClr val="1A1A1A"/>
                 </a:solidFill>
-                <a:latin typeface="Century Schoolbook"/>
+                <a:latin typeface="Lexend"/>
               </a:rPr>
               <a:t>  tickets on Friday</a:t>
             </a:r>
@@ -6416,7 +6689,7 @@
         <p:spPr>
           <a:xfrm>
             <a:off x="1234440" y="2464308"/>
-            <a:ext cx="952457" cy="457200"/>
+            <a:ext cx="953666" cy="457200"/>
           </a:xfrm>
           <a:prstGeom prst="rect">
             <a:avLst/>
@@ -6431,11 +6704,11 @@
           <a:p>
             <a:pPr algn="l"/>
             <a:r>
-              <a:rPr sz="2400" b="0" i="0">
+              <a:rPr sz="2280" b="0" i="0">
                 <a:solidFill>
                   <a:srgbClr val="1A1A1A"/>
                 </a:solidFill>
-                <a:latin typeface="Century Schoolbook"/>
+                <a:latin typeface="Lexend"/>
               </a:rPr>
               <a:t>and  </a:t>
             </a:r>
@@ -6444,7 +6717,7 @@
       </p:sp>
       <p:pic>
         <p:nvPicPr>
-          <p:cNvPr id="12" name="Picture 11" descr="959b0ab7310b422a.png"/>
+          <p:cNvPr id="12" name="Picture 11" descr="ca70dd33a6d37a9b.png"/>
           <p:cNvPicPr>
             <a:picLocks noChangeAspect="1"/>
           </p:cNvPicPr>
@@ -6458,8 +6731,8 @@
         </p:blipFill>
         <p:spPr>
           <a:xfrm>
-            <a:off x="2049737" y="2551176"/>
-            <a:ext cx="1155192" cy="283464"/>
+            <a:off x="2050946" y="2555748"/>
+            <a:ext cx="1155192" cy="274320"/>
           </a:xfrm>
           <a:prstGeom prst="rect">
             <a:avLst/>
@@ -6474,8 +6747,8 @@
         </p:nvSpPr>
         <p:spPr>
           <a:xfrm>
-            <a:off x="3204929" y="2464308"/>
-            <a:ext cx="6354084" cy="457200"/>
+            <a:off x="3206138" y="2464308"/>
+            <a:ext cx="6284639" cy="457200"/>
           </a:xfrm>
           <a:prstGeom prst="rect">
             <a:avLst/>
@@ -6490,11 +6763,11 @@
           <a:p>
             <a:pPr algn="l"/>
             <a:r>
-              <a:rPr sz="2400" b="0" i="0">
+              <a:rPr sz="2280" b="0" i="0">
                 <a:solidFill>
                   <a:srgbClr val="1A1A1A"/>
                 </a:solidFill>
-                <a:latin typeface="Century Schoolbook"/>
+                <a:latin typeface="Lexend"/>
               </a:rPr>
               <a:t>  on Saturday. Each ticket cost 38 dollars.</a:t>
             </a:r>
@@ -6525,11 +6798,11 @@
           <a:p>
             <a:pPr algn="l"/>
             <a:r>
-              <a:rPr sz="2400" b="1" i="0">
+              <a:rPr sz="2280" b="1" i="0">
                 <a:solidFill>
                   <a:srgbClr val="1A1A1A"/>
                 </a:solidFill>
-                <a:latin typeface="Century Schoolbook"/>
+                <a:latin typeface="Lexend"/>
               </a:rPr>
               <a:t>How many tickets were sold on the two days?</a:t>
             </a:r>
@@ -6544,7 +6817,90 @@
         </p:nvSpPr>
         <p:spPr>
           <a:xfrm>
-            <a:off x="777240" y="4663440"/>
+            <a:off x="2130064" y="3734926"/>
+            <a:ext cx="5987247" cy="457200"/>
+          </a:xfrm>
+          <a:prstGeom prst="rect">
+            <a:avLst/>
+          </a:prstGeom>
+          <a:noFill/>
+        </p:spPr>
+        <p:txBody>
+          <a:bodyPr wrap="none" lIns="45720" rIns="45720" tIns="18288" bIns="18288" anchor="ctr">
+            <a:noAutofit/>
+          </a:bodyPr>
+          <a:lstStyle/>
+          <a:p>
+            <a:pPr algn="l"/>
+            <a:r>
+              <a:rPr sz="2750" b="0" i="0">
+                <a:solidFill>
+                  <a:srgbClr val="1A1A1A"/>
+                </a:solidFill>
+                <a:latin typeface="Lexend"/>
+              </a:rPr>
+              <a:t>Same power, so add the fronts:  </a:t>
+            </a:r>
+          </a:p>
+        </p:txBody>
+      </p:sp>
+      <p:pic>
+        <p:nvPicPr>
+          <p:cNvPr id="16" name="Picture 15" descr="884fc76005d8767d.png"/>
+          <p:cNvPicPr>
+            <a:picLocks noChangeAspect="1"/>
+          </p:cNvPicPr>
+          <p:nvPr/>
+        </p:nvPicPr>
+        <p:blipFill>
+          <a:blip r:embed="rId4"/>
+          <a:stretch>
+            <a:fillRect/>
+          </a:stretch>
+        </p:blipFill>
+        <p:spPr>
+          <a:xfrm>
+            <a:off x="7980151" y="3837034"/>
+            <a:ext cx="2057400" cy="252984"/>
+          </a:xfrm>
+          <a:prstGeom prst="rect">
+            <a:avLst/>
+          </a:prstGeom>
+        </p:spPr>
+      </p:pic>
+      <p:pic>
+        <p:nvPicPr>
+          <p:cNvPr id="17" name="Picture 16" descr="3665917b6f2092c9.png"/>
+          <p:cNvPicPr>
+            <a:picLocks noChangeAspect="1"/>
+          </p:cNvPicPr>
+          <p:nvPr/>
+        </p:nvPicPr>
+        <p:blipFill>
+          <a:blip r:embed="rId5"/>
+          <a:stretch>
+            <a:fillRect/>
+          </a:stretch>
+        </p:blipFill>
+        <p:spPr>
+          <a:xfrm>
+            <a:off x="2184928" y="4350622"/>
+            <a:ext cx="1271016" cy="304800"/>
+          </a:xfrm>
+          <a:prstGeom prst="rect">
+            <a:avLst/>
+          </a:prstGeom>
+        </p:spPr>
+      </p:pic>
+      <p:sp>
+        <p:nvSpPr>
+          <p:cNvPr id="18" name="TextBox 17"/>
+          <p:cNvSpPr txBox="1"/>
+          <p:nvPr/>
+        </p:nvSpPr>
+        <p:spPr>
+          <a:xfrm>
+            <a:off x="777240" y="4845922"/>
             <a:ext cx="10607040" cy="548640"/>
           </a:xfrm>
           <a:prstGeom prst="rect">
@@ -6560,20 +6916,20 @@
           <a:p>
             <a:pPr algn="ctr"/>
             <a:r>
-              <a:rPr sz="3200" b="1" i="0">
+              <a:rPr sz="3040" b="1" i="0">
                 <a:solidFill>
                   <a:srgbClr val="9E1B32"/>
                 </a:solidFill>
-                <a:latin typeface="Century Schoolbook"/>
+                <a:latin typeface="Lexend"/>
               </a:rPr>
               <a:t>Answer:   7.7 × 10</a:t>
             </a:r>
             <a:r>
-              <a:rPr sz="3200" b="1" i="0" baseline="30000">
+              <a:rPr sz="3040" b="1" i="0" baseline="30000">
                 <a:solidFill>
                   <a:srgbClr val="9E1B32"/>
                 </a:solidFill>
-                <a:latin typeface="Century Schoolbook"/>
+                <a:latin typeface="Lexend"/>
               </a:rPr>
               <a:t>4</a:t>
             </a:r>
@@ -6622,11 +6978,11 @@
           <a:p>
             <a:pPr algn="l"/>
             <a:r>
-              <a:rPr sz="3400" b="1" i="0">
+              <a:rPr sz="3229" b="1" i="0">
                 <a:solidFill>
                   <a:srgbClr val="1A1A1A"/>
                 </a:solidFill>
-                <a:latin typeface="Century Schoolbook"/>
+                <a:latin typeface="Lexend"/>
               </a:rPr>
               <a:t>Whiteboards   ·   Question 3 of 9</a:t>
             </a:r>
@@ -6762,11 +7118,11 @@
           <a:p>
             <a:pPr algn="l"/>
             <a:r>
-              <a:rPr sz="1100" b="0" i="1">
+              <a:rPr sz="1040" b="0" i="0">
                 <a:solidFill>
                   <a:srgbClr val="6B6B6B"/>
                 </a:solidFill>
-                <a:latin typeface="Century Schoolbook"/>
+                <a:latin typeface="Lexend"/>
               </a:rPr>
               <a:t>Grade 7 Accelerated · Unit 4 · Lesson 1 — Adding and Subtracting in Scientific Notation</a:t>
             </a:r>
@@ -6797,11 +7153,11 @@
           <a:p>
             <a:pPr algn="r"/>
             <a:r>
-              <a:rPr sz="1100" b="0" i="0">
+              <a:rPr sz="1040" b="0" i="0">
                 <a:solidFill>
                   <a:srgbClr val="6B6B6B"/>
                 </a:solidFill>
-                <a:latin typeface="Century Schoolbook"/>
+                <a:latin typeface="Lexend"/>
               </a:rPr>
               <a:t>19</a:t>
             </a:r>
@@ -6810,7 +7166,7 @@
       </p:sp>
       <p:pic>
         <p:nvPicPr>
-          <p:cNvPr id="8" name="Picture 7" descr="01e04974dac9eb6e.png"/>
+          <p:cNvPr id="8" name="Picture 7" descr="8c04d76b961c1c9d.png"/>
           <p:cNvPicPr>
             <a:picLocks noChangeAspect="1"/>
           </p:cNvPicPr>
@@ -6824,8 +7180,8 @@
         </p:blipFill>
         <p:spPr>
           <a:xfrm>
-            <a:off x="4282439" y="2194560"/>
-            <a:ext cx="3596640" cy="414528"/>
+            <a:off x="4335780" y="2197608"/>
+            <a:ext cx="3489960" cy="405384"/>
           </a:xfrm>
           <a:prstGeom prst="rect">
             <a:avLst/>
@@ -6856,11 +7212,11 @@
           <a:p>
             <a:pPr algn="ctr"/>
             <a:r>
-              <a:rPr sz="2600" b="1" i="0">
+              <a:rPr sz="2470" b="1" i="0">
                 <a:solidFill>
                   <a:srgbClr val="1A1A1A"/>
                 </a:solidFill>
-                <a:latin typeface="Century Schoolbook"/>
+                <a:latin typeface="Lexend"/>
               </a:rPr>
               <a:t>Answer it.</a:t>
             </a:r>
@@ -6909,11 +7265,11 @@
           <a:p>
             <a:pPr algn="l"/>
             <a:r>
-              <a:rPr sz="3600" b="1" i="0">
+              <a:rPr sz="3420" b="1" i="0">
                 <a:solidFill>
                   <a:srgbClr val="1A1A1A"/>
                 </a:solidFill>
-                <a:latin typeface="Century Schoolbook"/>
+                <a:latin typeface="Lexend"/>
               </a:rPr>
               <a:t>Warm-Up</a:t>
             </a:r>
@@ -7049,11 +7405,11 @@
           <a:p>
             <a:pPr algn="l"/>
             <a:r>
-              <a:rPr sz="1100" b="0" i="1">
+              <a:rPr sz="1040" b="0" i="0">
                 <a:solidFill>
                   <a:srgbClr val="6B6B6B"/>
                 </a:solidFill>
-                <a:latin typeface="Century Schoolbook"/>
+                <a:latin typeface="Lexend"/>
               </a:rPr>
               <a:t>Grade 7 Accelerated · Unit 4 · Lesson 1 — Adding and Subtracting in Scientific Notation</a:t>
             </a:r>
@@ -7084,11 +7440,11 @@
           <a:p>
             <a:pPr algn="r"/>
             <a:r>
-              <a:rPr sz="1100" b="0" i="0">
+              <a:rPr sz="1040" b="0" i="0">
                 <a:solidFill>
                   <a:srgbClr val="6B6B6B"/>
                 </a:solidFill>
-                <a:latin typeface="Century Schoolbook"/>
+                <a:latin typeface="Lexend"/>
               </a:rPr>
               <a:t>2</a:t>
             </a:r>
@@ -7104,7 +7460,7 @@
         <p:spPr>
           <a:xfrm>
             <a:off x="1874519" y="1440180"/>
-            <a:ext cx="5991504" cy="457200"/>
+            <a:ext cx="5853214" cy="457200"/>
           </a:xfrm>
           <a:prstGeom prst="rect">
             <a:avLst/>
@@ -7119,11 +7475,11 @@
           <a:p>
             <a:pPr algn="l"/>
             <a:r>
-              <a:rPr sz="2300" b="0" i="0">
+              <a:rPr sz="2180" b="0" i="0">
                 <a:solidFill>
                   <a:srgbClr val="1A1A1A"/>
                 </a:solidFill>
-                <a:latin typeface="Century Schoolbook"/>
+                <a:latin typeface="Lexend"/>
               </a:rPr>
               <a:t>1.   Write  0.00062  in scientific notation.</a:t>
             </a:r>
@@ -7139,7 +7495,7 @@
         <p:spPr>
           <a:xfrm>
             <a:off x="1874519" y="2052828"/>
-            <a:ext cx="4573104" cy="457200"/>
+            <a:ext cx="4470214" cy="457200"/>
           </a:xfrm>
           <a:prstGeom prst="rect">
             <a:avLst/>
@@ -7154,11 +7510,11 @@
           <a:p>
             <a:pPr algn="l"/>
             <a:r>
-              <a:rPr sz="2300" b="0" i="0">
+              <a:rPr sz="2180" b="0" i="0">
                 <a:solidFill>
                   <a:srgbClr val="1A1A1A"/>
                 </a:solidFill>
-                <a:latin typeface="Century Schoolbook"/>
+                <a:latin typeface="Lexend"/>
               </a:rPr>
               <a:t>2.   How many times larger is  </a:t>
             </a:r>
@@ -7167,7 +7523,7 @@
       </p:sp>
       <p:pic>
         <p:nvPicPr>
-          <p:cNvPr id="10" name="Picture 9" descr="6e4449454b7e3ea6.png"/>
+          <p:cNvPr id="10" name="Picture 9" descr="322d90d803ad0d3a.png"/>
           <p:cNvPicPr>
             <a:picLocks noChangeAspect="1"/>
           </p:cNvPicPr>
@@ -7181,8 +7537,8 @@
         </p:blipFill>
         <p:spPr>
           <a:xfrm>
-            <a:off x="6310464" y="2141220"/>
-            <a:ext cx="890016" cy="280416"/>
+            <a:off x="6207574" y="2145792"/>
+            <a:ext cx="896112" cy="271272"/>
           </a:xfrm>
           <a:prstGeom prst="rect">
             <a:avLst/>
@@ -7197,8 +7553,8 @@
         </p:nvSpPr>
         <p:spPr>
           <a:xfrm>
-            <a:off x="7200480" y="2052828"/>
-            <a:ext cx="1224116" cy="457200"/>
+            <a:off x="7103686" y="2052828"/>
+            <a:ext cx="1188962" cy="457200"/>
           </a:xfrm>
           <a:prstGeom prst="rect">
             <a:avLst/>
@@ -7213,11 +7569,11 @@
           <a:p>
             <a:pPr algn="l"/>
             <a:r>
-              <a:rPr sz="2300" b="0" i="0">
+              <a:rPr sz="2180" b="0" i="0">
                 <a:solidFill>
                   <a:srgbClr val="1A1A1A"/>
                 </a:solidFill>
-                <a:latin typeface="Century Schoolbook"/>
+                <a:latin typeface="Lexend"/>
               </a:rPr>
               <a:t>  than  </a:t>
             </a:r>
@@ -7226,7 +7582,7 @@
       </p:sp>
       <p:pic>
         <p:nvPicPr>
-          <p:cNvPr id="12" name="Picture 11" descr="7da0da260d230a62.png"/>
+          <p:cNvPr id="12" name="Picture 11" descr="91469e0de639e792.png"/>
           <p:cNvPicPr>
             <a:picLocks noChangeAspect="1"/>
           </p:cNvPicPr>
@@ -7240,8 +7596,8 @@
         </p:blipFill>
         <p:spPr>
           <a:xfrm>
-            <a:off x="8287436" y="2138172"/>
-            <a:ext cx="905256" cy="286512"/>
+            <a:off x="8155489" y="2145792"/>
+            <a:ext cx="899160" cy="271272"/>
           </a:xfrm>
           <a:prstGeom prst="rect">
             <a:avLst/>
@@ -7256,8 +7612,8 @@
         </p:nvSpPr>
         <p:spPr>
           <a:xfrm>
-            <a:off x="9192692" y="2052828"/>
-            <a:ext cx="433854" cy="457200"/>
+            <a:off x="9054649" y="2052828"/>
+            <a:ext cx="443010" cy="457200"/>
           </a:xfrm>
           <a:prstGeom prst="rect">
             <a:avLst/>
@@ -7272,11 +7628,11 @@
           <a:p>
             <a:pPr algn="l"/>
             <a:r>
-              <a:rPr sz="2300" b="0" i="0">
+              <a:rPr sz="2180" b="0" i="0">
                 <a:solidFill>
                   <a:srgbClr val="1A1A1A"/>
                 </a:solidFill>
-                <a:latin typeface="Century Schoolbook"/>
+                <a:latin typeface="Lexend"/>
               </a:rPr>
               <a:t> ?</a:t>
             </a:r>
@@ -7292,7 +7648,7 @@
         <p:spPr>
           <a:xfrm>
             <a:off x="1874519" y="2665476"/>
-            <a:ext cx="3064939" cy="457200"/>
+            <a:ext cx="2930351" cy="457200"/>
           </a:xfrm>
           <a:prstGeom prst="rect">
             <a:avLst/>
@@ -7307,11 +7663,11 @@
           <a:p>
             <a:pPr algn="l"/>
             <a:r>
-              <a:rPr sz="2300" b="0" i="0">
+              <a:rPr sz="2180" b="0" i="0">
                 <a:solidFill>
                   <a:srgbClr val="1A1A1A"/>
                 </a:solidFill>
-                <a:latin typeface="Century Schoolbook"/>
+                <a:latin typeface="Lexend"/>
               </a:rPr>
               <a:t>3.   Find the value:  </a:t>
             </a:r>
@@ -7320,7 +7676,7 @@
       </p:sp>
       <p:pic>
         <p:nvPicPr>
-          <p:cNvPr id="15" name="Picture 14" descr="c100c4232230d0dc.png"/>
+          <p:cNvPr id="15" name="Picture 14" descr="f53f316f2160c0ab.png"/>
           <p:cNvPicPr>
             <a:picLocks noChangeAspect="1"/>
           </p:cNvPicPr>
@@ -7334,8 +7690,8 @@
         </p:blipFill>
         <p:spPr>
           <a:xfrm>
-            <a:off x="4802299" y="2689860"/>
-            <a:ext cx="853440" cy="408432"/>
+            <a:off x="4667711" y="2699004"/>
+            <a:ext cx="886968" cy="390144"/>
           </a:xfrm>
           <a:prstGeom prst="rect">
             <a:avLst/>
@@ -7351,7 +7707,7 @@
         <p:spPr>
           <a:xfrm>
             <a:off x="1874519" y="3278124"/>
-            <a:ext cx="2898925" cy="457200"/>
+            <a:ext cx="2773837" cy="457200"/>
           </a:xfrm>
           <a:prstGeom prst="rect">
             <a:avLst/>
@@ -7366,11 +7722,11 @@
           <a:p>
             <a:pPr algn="l"/>
             <a:r>
-              <a:rPr sz="2300" b="0" i="0">
+              <a:rPr sz="2180" b="0" i="0">
                 <a:solidFill>
                   <a:srgbClr val="1A1A1A"/>
                 </a:solidFill>
-                <a:latin typeface="Century Schoolbook"/>
+                <a:latin typeface="Lexend"/>
               </a:rPr>
               <a:t>4.   Find the sum:  </a:t>
             </a:r>
@@ -7379,7 +7735,7 @@
       </p:sp>
       <p:pic>
         <p:nvPicPr>
-          <p:cNvPr id="17" name="Picture 16" descr="bdc1cddc07790a72.png"/>
+          <p:cNvPr id="17" name="Picture 16" descr="bd88d4ecf7738e5d.png"/>
           <p:cNvPicPr>
             <a:picLocks noChangeAspect="1"/>
           </p:cNvPicPr>
@@ -7393,8 +7749,8 @@
         </p:blipFill>
         <p:spPr>
           <a:xfrm>
-            <a:off x="4636285" y="3386328"/>
-            <a:ext cx="1298448" cy="240791"/>
+            <a:off x="4511197" y="3393948"/>
+            <a:ext cx="1307592" cy="225552"/>
           </a:xfrm>
           <a:prstGeom prst="rect">
             <a:avLst/>
@@ -7443,11 +7799,11 @@
           <a:p>
             <a:pPr algn="l"/>
             <a:r>
-              <a:rPr sz="3400" b="1" i="0">
+              <a:rPr sz="3229" b="1" i="0">
                 <a:solidFill>
                   <a:srgbClr val="1A1A1A"/>
                 </a:solidFill>
-                <a:latin typeface="Century Schoolbook"/>
+                <a:latin typeface="Lexend"/>
               </a:rPr>
               <a:t>Whiteboards   ·   Question 3 of 9</a:t>
             </a:r>
@@ -7583,11 +7939,11 @@
           <a:p>
             <a:pPr algn="l"/>
             <a:r>
-              <a:rPr sz="1100" b="0" i="1">
+              <a:rPr sz="1040" b="0" i="0">
                 <a:solidFill>
                   <a:srgbClr val="6B6B6B"/>
                 </a:solidFill>
-                <a:latin typeface="Century Schoolbook"/>
+                <a:latin typeface="Lexend"/>
               </a:rPr>
               <a:t>Grade 7 Accelerated · Unit 4 · Lesson 1 — Adding and Subtracting in Scientific Notation</a:t>
             </a:r>
@@ -7618,11 +7974,11 @@
           <a:p>
             <a:pPr algn="r"/>
             <a:r>
-              <a:rPr sz="1100" b="0" i="0">
+              <a:rPr sz="1040" b="0" i="0">
                 <a:solidFill>
                   <a:srgbClr val="6B6B6B"/>
                 </a:solidFill>
-                <a:latin typeface="Century Schoolbook"/>
+                <a:latin typeface="Lexend"/>
               </a:rPr>
               <a:t>20</a:t>
             </a:r>
@@ -7631,7 +7987,7 @@
       </p:sp>
       <p:pic>
         <p:nvPicPr>
-          <p:cNvPr id="8" name="Picture 7" descr="d662bd9034d4b28e.png"/>
+          <p:cNvPr id="8" name="Picture 7" descr="d250897723b649d6.png"/>
           <p:cNvPicPr>
             <a:picLocks noChangeAspect="1"/>
           </p:cNvPicPr>
@@ -7645,17 +8001,65 @@
         </p:blipFill>
         <p:spPr>
           <a:xfrm>
-            <a:off x="4280916" y="2103120"/>
-            <a:ext cx="3599688" cy="411480"/>
+            <a:off x="4334255" y="2106168"/>
+            <a:ext cx="3493008" cy="405384"/>
           </a:xfrm>
           <a:prstGeom prst="rect">
             <a:avLst/>
           </a:prstGeom>
         </p:spPr>
       </p:pic>
-      <p:sp>
-        <p:nvSpPr>
-          <p:cNvPr id="9" name="TextBox 8"/>
+      <p:pic>
+        <p:nvPicPr>
+          <p:cNvPr id="9" name="Picture 8" descr="c38ae5169a7919b0.png"/>
+          <p:cNvPicPr>
+            <a:picLocks noChangeAspect="1"/>
+          </p:cNvPicPr>
+          <p:nvPr/>
+        </p:nvPicPr>
+        <p:blipFill>
+          <a:blip r:embed="rId3"/>
+          <a:stretch>
+            <a:fillRect/>
+          </a:stretch>
+        </p:blipFill>
+        <p:spPr>
+          <a:xfrm>
+            <a:off x="4610099" y="2939796"/>
+            <a:ext cx="1380744" cy="256032"/>
+          </a:xfrm>
+          <a:prstGeom prst="rect">
+            <a:avLst/>
+          </a:prstGeom>
+        </p:spPr>
+      </p:pic>
+      <p:pic>
+        <p:nvPicPr>
+          <p:cNvPr id="10" name="Picture 9" descr="5cb78aa020bc0847.png"/>
+          <p:cNvPicPr>
+            <a:picLocks noChangeAspect="1"/>
+          </p:cNvPicPr>
+          <p:nvPr/>
+        </p:nvPicPr>
+        <p:blipFill>
+          <a:blip r:embed="rId4"/>
+          <a:stretch>
+            <a:fillRect/>
+          </a:stretch>
+        </p:blipFill>
+        <p:spPr>
+          <a:xfrm>
+            <a:off x="4610099" y="3454908"/>
+            <a:ext cx="3051048" cy="304800"/>
+          </a:xfrm>
+          <a:prstGeom prst="rect">
+            <a:avLst/>
+          </a:prstGeom>
+        </p:spPr>
+      </p:pic>
+      <p:sp>
+        <p:nvSpPr>
+          <p:cNvPr id="11" name="TextBox 10"/>
           <p:cNvSpPr txBox="1"/>
           <p:nvPr/>
         </p:nvSpPr>
@@ -7677,20 +8081,20 @@
           <a:p>
             <a:pPr algn="ctr"/>
             <a:r>
-              <a:rPr sz="3200" b="1" i="0">
+              <a:rPr sz="3040" b="1" i="0">
                 <a:solidFill>
                   <a:srgbClr val="9E1B32"/>
                 </a:solidFill>
-                <a:latin typeface="Century Schoolbook"/>
+                <a:latin typeface="Lexend"/>
               </a:rPr>
               <a:t>Answer:   1.3 × 10</a:t>
             </a:r>
             <a:r>
-              <a:rPr sz="3200" b="1" i="0" baseline="30000">
+              <a:rPr sz="3040" b="1" i="0" baseline="30000">
                 <a:solidFill>
                   <a:srgbClr val="9E1B32"/>
                 </a:solidFill>
-                <a:latin typeface="Century Schoolbook"/>
+                <a:latin typeface="Lexend"/>
               </a:rPr>
               <a:t>-4</a:t>
             </a:r>
@@ -7739,11 +8143,11 @@
           <a:p>
             <a:pPr algn="l"/>
             <a:r>
-              <a:rPr sz="3400" b="1" i="0">
+              <a:rPr sz="3229" b="1" i="0">
                 <a:solidFill>
                   <a:srgbClr val="1A1A1A"/>
                 </a:solidFill>
-                <a:latin typeface="Century Schoolbook"/>
+                <a:latin typeface="Lexend"/>
               </a:rPr>
               <a:t>Whiteboards   ·   Question 4 of 9</a:t>
             </a:r>
@@ -7879,11 +8283,11 @@
           <a:p>
             <a:pPr algn="l"/>
             <a:r>
-              <a:rPr sz="1100" b="0" i="1">
+              <a:rPr sz="1040" b="0" i="0">
                 <a:solidFill>
                   <a:srgbClr val="6B6B6B"/>
                 </a:solidFill>
-                <a:latin typeface="Century Schoolbook"/>
+                <a:latin typeface="Lexend"/>
               </a:rPr>
               <a:t>Grade 7 Accelerated · Unit 4 · Lesson 1 — Adding and Subtracting in Scientific Notation</a:t>
             </a:r>
@@ -7914,11 +8318,11 @@
           <a:p>
             <a:pPr algn="r"/>
             <a:r>
-              <a:rPr sz="1100" b="0" i="0">
+              <a:rPr sz="1040" b="0" i="0">
                 <a:solidFill>
                   <a:srgbClr val="6B6B6B"/>
                 </a:solidFill>
-                <a:latin typeface="Century Schoolbook"/>
+                <a:latin typeface="Lexend"/>
               </a:rPr>
               <a:t>21</a:t>
             </a:r>
@@ -7927,7 +8331,7 @@
       </p:sp>
       <p:pic>
         <p:nvPicPr>
-          <p:cNvPr id="8" name="Picture 7" descr="340f3053f5991007.png"/>
+          <p:cNvPr id="8" name="Picture 7" descr="1e4655248ebd17e4.png"/>
           <p:cNvPicPr>
             <a:picLocks noChangeAspect="1"/>
           </p:cNvPicPr>
@@ -7941,8 +8345,8 @@
         </p:blipFill>
         <p:spPr>
           <a:xfrm>
-            <a:off x="4172712" y="2194560"/>
-            <a:ext cx="3816095" cy="411480"/>
+            <a:off x="4172712" y="2196083"/>
+            <a:ext cx="3816095" cy="408432"/>
           </a:xfrm>
           <a:prstGeom prst="rect">
             <a:avLst/>
@@ -7973,11 +8377,11 @@
           <a:p>
             <a:pPr algn="ctr"/>
             <a:r>
-              <a:rPr sz="2600" b="1" i="0">
+              <a:rPr sz="2470" b="1" i="0">
                 <a:solidFill>
                   <a:srgbClr val="1A1A1A"/>
                 </a:solidFill>
-                <a:latin typeface="Century Schoolbook"/>
+                <a:latin typeface="Lexend"/>
               </a:rPr>
               <a:t>Answer it.</a:t>
             </a:r>
@@ -8026,11 +8430,11 @@
           <a:p>
             <a:pPr algn="l"/>
             <a:r>
-              <a:rPr sz="3400" b="1" i="0">
+              <a:rPr sz="3229" b="1" i="0">
                 <a:solidFill>
                   <a:srgbClr val="1A1A1A"/>
                 </a:solidFill>
-                <a:latin typeface="Century Schoolbook"/>
+                <a:latin typeface="Lexend"/>
               </a:rPr>
               <a:t>Whiteboards   ·   Question 4 of 9</a:t>
             </a:r>
@@ -8166,11 +8570,11 @@
           <a:p>
             <a:pPr algn="l"/>
             <a:r>
-              <a:rPr sz="1100" b="0" i="1">
+              <a:rPr sz="1040" b="0" i="0">
                 <a:solidFill>
                   <a:srgbClr val="6B6B6B"/>
                 </a:solidFill>
-                <a:latin typeface="Century Schoolbook"/>
+                <a:latin typeface="Lexend"/>
               </a:rPr>
               <a:t>Grade 7 Accelerated · Unit 4 · Lesson 1 — Adding and Subtracting in Scientific Notation</a:t>
             </a:r>
@@ -8201,11 +8605,11 @@
           <a:p>
             <a:pPr algn="r"/>
             <a:r>
-              <a:rPr sz="1100" b="0" i="0">
+              <a:rPr sz="1040" b="0" i="0">
                 <a:solidFill>
                   <a:srgbClr val="6B6B6B"/>
                 </a:solidFill>
-                <a:latin typeface="Century Schoolbook"/>
+                <a:latin typeface="Lexend"/>
               </a:rPr>
               <a:t>22</a:t>
             </a:r>
@@ -8214,7 +8618,7 @@
       </p:sp>
       <p:pic>
         <p:nvPicPr>
-          <p:cNvPr id="8" name="Picture 7" descr="2450f0cef92f510f.png"/>
+          <p:cNvPr id="8" name="Picture 7" descr="6c08936514ac2e5b.png"/>
           <p:cNvPicPr>
             <a:picLocks noChangeAspect="1"/>
           </p:cNvPicPr>
@@ -8236,9 +8640,57 @@
           </a:prstGeom>
         </p:spPr>
       </p:pic>
-      <p:sp>
-        <p:nvSpPr>
-          <p:cNvPr id="9" name="TextBox 8"/>
+      <p:pic>
+        <p:nvPicPr>
+          <p:cNvPr id="9" name="Picture 8" descr="428101046aa75a5f.png"/>
+          <p:cNvPicPr>
+            <a:picLocks noChangeAspect="1"/>
+          </p:cNvPicPr>
+          <p:nvPr/>
+        </p:nvPicPr>
+        <p:blipFill>
+          <a:blip r:embed="rId3"/>
+          <a:stretch>
+            <a:fillRect/>
+          </a:stretch>
+        </p:blipFill>
+        <p:spPr>
+          <a:xfrm>
+            <a:off x="4818887" y="2939796"/>
+            <a:ext cx="2084831" cy="256032"/>
+          </a:xfrm>
+          <a:prstGeom prst="rect">
+            <a:avLst/>
+          </a:prstGeom>
+        </p:spPr>
+      </p:pic>
+      <p:pic>
+        <p:nvPicPr>
+          <p:cNvPr id="10" name="Picture 9" descr="e9dcbdc19c34f041.png"/>
+          <p:cNvPicPr>
+            <a:picLocks noChangeAspect="1"/>
+          </p:cNvPicPr>
+          <p:nvPr/>
+        </p:nvPicPr>
+        <p:blipFill>
+          <a:blip r:embed="rId4"/>
+          <a:stretch>
+            <a:fillRect/>
+          </a:stretch>
+        </p:blipFill>
+        <p:spPr>
+          <a:xfrm>
+            <a:off x="4818887" y="3454908"/>
+            <a:ext cx="2639568" cy="304800"/>
+          </a:xfrm>
+          <a:prstGeom prst="rect">
+            <a:avLst/>
+          </a:prstGeom>
+        </p:spPr>
+      </p:pic>
+      <p:sp>
+        <p:nvSpPr>
+          <p:cNvPr id="11" name="TextBox 10"/>
           <p:cNvSpPr txBox="1"/>
           <p:nvPr/>
         </p:nvSpPr>
@@ -8260,20 +8712,20 @@
           <a:p>
             <a:pPr algn="ctr"/>
             <a:r>
-              <a:rPr sz="3200" b="1" i="0">
+              <a:rPr sz="3040" b="1" i="0">
                 <a:solidFill>
                   <a:srgbClr val="9E1B32"/>
                 </a:solidFill>
-                <a:latin typeface="Century Schoolbook"/>
+                <a:latin typeface="Lexend"/>
               </a:rPr>
               <a:t>Answer:   7 × 10</a:t>
             </a:r>
             <a:r>
-              <a:rPr sz="3200" b="1" i="0" baseline="30000">
+              <a:rPr sz="3040" b="1" i="0" baseline="30000">
                 <a:solidFill>
                   <a:srgbClr val="9E1B32"/>
                 </a:solidFill>
-                <a:latin typeface="Century Schoolbook"/>
+                <a:latin typeface="Lexend"/>
               </a:rPr>
               <a:t>7</a:t>
             </a:r>
@@ -8322,11 +8774,11 @@
           <a:p>
             <a:pPr algn="l"/>
             <a:r>
-              <a:rPr sz="3400" b="1" i="0">
+              <a:rPr sz="3229" b="1" i="0">
                 <a:solidFill>
                   <a:srgbClr val="1A1A1A"/>
                 </a:solidFill>
-                <a:latin typeface="Century Schoolbook"/>
+                <a:latin typeface="Lexend"/>
               </a:rPr>
               <a:t>Whiteboards   ·   Question 5 of 9</a:t>
             </a:r>
@@ -8462,11 +8914,11 @@
           <a:p>
             <a:pPr algn="l"/>
             <a:r>
-              <a:rPr sz="1100" b="0" i="1">
+              <a:rPr sz="1040" b="0" i="0">
                 <a:solidFill>
                   <a:srgbClr val="6B6B6B"/>
                 </a:solidFill>
-                <a:latin typeface="Century Schoolbook"/>
+                <a:latin typeface="Lexend"/>
               </a:rPr>
               <a:t>Grade 7 Accelerated · Unit 4 · Lesson 1 — Adding and Subtracting in Scientific Notation</a:t>
             </a:r>
@@ -8497,11 +8949,11 @@
           <a:p>
             <a:pPr algn="r"/>
             <a:r>
-              <a:rPr sz="1100" b="0" i="0">
+              <a:rPr sz="1040" b="0" i="0">
                 <a:solidFill>
                   <a:srgbClr val="6B6B6B"/>
                 </a:solidFill>
-                <a:latin typeface="Century Schoolbook"/>
+                <a:latin typeface="Lexend"/>
               </a:rPr>
               <a:t>23</a:t>
             </a:r>
@@ -8510,7 +8962,7 @@
       </p:sp>
       <p:pic>
         <p:nvPicPr>
-          <p:cNvPr id="8" name="Picture 7" descr="d60eac1f99916ea9.png"/>
+          <p:cNvPr id="8" name="Picture 7" descr="00675f3b4cff738f.png"/>
           <p:cNvPicPr>
             <a:picLocks noChangeAspect="1"/>
           </p:cNvPicPr>
@@ -8524,8 +8976,8 @@
         </p:blipFill>
         <p:spPr>
           <a:xfrm>
-            <a:off x="4172712" y="2194560"/>
-            <a:ext cx="3816095" cy="414528"/>
+            <a:off x="4201668" y="2196083"/>
+            <a:ext cx="3758184" cy="408432"/>
           </a:xfrm>
           <a:prstGeom prst="rect">
             <a:avLst/>
@@ -8540,7 +8992,7 @@
         </p:nvSpPr>
         <p:spPr>
           <a:xfrm>
-            <a:off x="777240" y="2883407"/>
+            <a:off x="777240" y="2880360"/>
             <a:ext cx="10607040" cy="465151"/>
           </a:xfrm>
           <a:prstGeom prst="rect">
@@ -8556,11 +9008,11 @@
           <a:p>
             <a:pPr algn="ctr"/>
             <a:r>
-              <a:rPr sz="2600" b="0" i="0">
+              <a:rPr sz="2470" b="0" i="0">
                 <a:solidFill>
                   <a:srgbClr val="1A1A1A"/>
                 </a:solidFill>
-                <a:latin typeface="Century Schoolbook"/>
+                <a:latin typeface="Lexend"/>
               </a:rPr>
               <a:t>Which is the sum?</a:t>
             </a:r>
@@ -8575,7 +9027,7 @@
         </p:nvSpPr>
         <p:spPr>
           <a:xfrm>
-            <a:off x="1874519" y="3549727"/>
+            <a:off x="1874519" y="3546679"/>
             <a:ext cx="4572000" cy="548640"/>
           </a:xfrm>
           <a:prstGeom prst="rect">
@@ -8591,29 +9043,29 @@
           <a:p>
             <a:pPr algn="l"/>
             <a:r>
-              <a:rPr sz="2400" b="1" i="0">
+              <a:rPr sz="2280" b="1" i="0">
                 <a:solidFill>
                   <a:srgbClr val="1A1A1A"/>
                 </a:solidFill>
-                <a:latin typeface="Century Schoolbook"/>
+                <a:latin typeface="Lexend"/>
               </a:rPr>
               <a:t>A.   </a:t>
             </a:r>
             <a:r>
-              <a:rPr sz="2400" b="0" i="0">
+              <a:rPr sz="2280" b="0" i="0">
                 <a:solidFill>
                   <a:srgbClr val="1A1A1A"/>
                 </a:solidFill>
-                <a:latin typeface="Century Schoolbook"/>
+                <a:latin typeface="Lexend"/>
               </a:rPr>
               <a:t>4.7 × 10</a:t>
             </a:r>
             <a:r>
-              <a:rPr sz="2400" b="0" i="0" baseline="30000">
+              <a:rPr sz="2280" b="0" i="0" baseline="30000">
                 <a:solidFill>
                   <a:srgbClr val="1A1A1A"/>
                 </a:solidFill>
-                <a:latin typeface="Century Schoolbook"/>
+                <a:latin typeface="Lexend"/>
               </a:rPr>
               <a:t>5</a:t>
             </a:r>
@@ -8628,7 +9080,7 @@
         </p:nvSpPr>
         <p:spPr>
           <a:xfrm>
-            <a:off x="6629400" y="3549727"/>
+            <a:off x="6629400" y="3546679"/>
             <a:ext cx="4572000" cy="548640"/>
           </a:xfrm>
           <a:prstGeom prst="rect">
@@ -8644,29 +9096,29 @@
           <a:p>
             <a:pPr algn="l"/>
             <a:r>
-              <a:rPr sz="2400" b="1" i="0">
+              <a:rPr sz="2280" b="1" i="0">
                 <a:solidFill>
                   <a:srgbClr val="1A1A1A"/>
                 </a:solidFill>
-                <a:latin typeface="Century Schoolbook"/>
+                <a:latin typeface="Lexend"/>
               </a:rPr>
               <a:t>B.   </a:t>
             </a:r>
             <a:r>
-              <a:rPr sz="2400" b="0" i="0">
+              <a:rPr sz="2280" b="0" i="0">
                 <a:solidFill>
                   <a:srgbClr val="1A1A1A"/>
                 </a:solidFill>
-                <a:latin typeface="Century Schoolbook"/>
+                <a:latin typeface="Lexend"/>
               </a:rPr>
               <a:t>4.7 × 10</a:t>
             </a:r>
             <a:r>
-              <a:rPr sz="2400" b="0" i="0" baseline="30000">
+              <a:rPr sz="2280" b="0" i="0" baseline="30000">
                 <a:solidFill>
                   <a:srgbClr val="1A1A1A"/>
                 </a:solidFill>
-                <a:latin typeface="Century Schoolbook"/>
+                <a:latin typeface="Lexend"/>
               </a:rPr>
               <a:t>8</a:t>
             </a:r>
@@ -8681,7 +9133,7 @@
         </p:nvSpPr>
         <p:spPr>
           <a:xfrm>
-            <a:off x="1874519" y="4235527"/>
+            <a:off x="1874519" y="4232479"/>
             <a:ext cx="4572000" cy="548640"/>
           </a:xfrm>
           <a:prstGeom prst="rect">
@@ -8697,29 +9149,29 @@
           <a:p>
             <a:pPr algn="l"/>
             <a:r>
-              <a:rPr sz="2400" b="1" i="0">
+              <a:rPr sz="2280" b="1" i="0">
                 <a:solidFill>
                   <a:srgbClr val="1A1A1A"/>
                 </a:solidFill>
-                <a:latin typeface="Century Schoolbook"/>
+                <a:latin typeface="Lexend"/>
               </a:rPr>
               <a:t>C.   </a:t>
             </a:r>
             <a:r>
-              <a:rPr sz="2400" b="0" i="0">
+              <a:rPr sz="2280" b="0" i="0">
                 <a:solidFill>
                   <a:srgbClr val="1A1A1A"/>
                 </a:solidFill>
-                <a:latin typeface="Century Schoolbook"/>
+                <a:latin typeface="Lexend"/>
               </a:rPr>
               <a:t>3.413 × 10</a:t>
             </a:r>
             <a:r>
-              <a:rPr sz="2400" b="0" i="0" baseline="30000">
+              <a:rPr sz="2280" b="0" i="0" baseline="30000">
                 <a:solidFill>
                   <a:srgbClr val="1A1A1A"/>
                 </a:solidFill>
-                <a:latin typeface="Century Schoolbook"/>
+                <a:latin typeface="Lexend"/>
               </a:rPr>
               <a:t>5</a:t>
             </a:r>
@@ -8734,7 +9186,7 @@
         </p:nvSpPr>
         <p:spPr>
           <a:xfrm>
-            <a:off x="6629400" y="4235527"/>
+            <a:off x="6629400" y="4232479"/>
             <a:ext cx="4572000" cy="548640"/>
           </a:xfrm>
           <a:prstGeom prst="rect">
@@ -8750,29 +9202,29 @@
           <a:p>
             <a:pPr algn="l"/>
             <a:r>
-              <a:rPr sz="2400" b="1" i="0">
+              <a:rPr sz="2280" b="1" i="0">
                 <a:solidFill>
                   <a:srgbClr val="1A1A1A"/>
                 </a:solidFill>
-                <a:latin typeface="Century Schoolbook"/>
+                <a:latin typeface="Lexend"/>
               </a:rPr>
               <a:t>D.   </a:t>
             </a:r>
             <a:r>
-              <a:rPr sz="2400" b="0" i="0">
+              <a:rPr sz="2280" b="0" i="0">
                 <a:solidFill>
                   <a:srgbClr val="1A1A1A"/>
                 </a:solidFill>
-                <a:latin typeface="Century Schoolbook"/>
+                <a:latin typeface="Lexend"/>
               </a:rPr>
               <a:t>3.53 × 10</a:t>
             </a:r>
             <a:r>
-              <a:rPr sz="2400" b="0" i="0" baseline="30000">
+              <a:rPr sz="2280" b="0" i="0" baseline="30000">
                 <a:solidFill>
                   <a:srgbClr val="1A1A1A"/>
                 </a:solidFill>
-                <a:latin typeface="Century Schoolbook"/>
+                <a:latin typeface="Lexend"/>
               </a:rPr>
               <a:t>5</a:t>
             </a:r>
@@ -8787,7 +9239,7 @@
         </p:nvSpPr>
         <p:spPr>
           <a:xfrm>
-            <a:off x="777240" y="5241367"/>
+            <a:off x="777240" y="5238319"/>
             <a:ext cx="10607040" cy="457200"/>
           </a:xfrm>
           <a:prstGeom prst="rect">
@@ -8803,11 +9255,11 @@
           <a:p>
             <a:pPr algn="ctr"/>
             <a:r>
-              <a:rPr sz="2600" b="1" i="0">
+              <a:rPr sz="2470" b="1" i="0">
                 <a:solidFill>
                   <a:srgbClr val="1A1A1A"/>
                 </a:solidFill>
-                <a:latin typeface="Century Schoolbook"/>
+                <a:latin typeface="Lexend"/>
               </a:rPr>
               <a:t>Answer it.</a:t>
             </a:r>
@@ -8856,11 +9308,11 @@
           <a:p>
             <a:pPr algn="l"/>
             <a:r>
-              <a:rPr sz="3400" b="1" i="0">
+              <a:rPr sz="3229" b="1" i="0">
                 <a:solidFill>
                   <a:srgbClr val="1A1A1A"/>
                 </a:solidFill>
-                <a:latin typeface="Century Schoolbook"/>
+                <a:latin typeface="Lexend"/>
               </a:rPr>
               <a:t>Whiteboards   ·   Question 5 of 9</a:t>
             </a:r>
@@ -8996,11 +9448,11 @@
           <a:p>
             <a:pPr algn="l"/>
             <a:r>
-              <a:rPr sz="1100" b="0" i="1">
+              <a:rPr sz="1040" b="0" i="0">
                 <a:solidFill>
                   <a:srgbClr val="6B6B6B"/>
                 </a:solidFill>
-                <a:latin typeface="Century Schoolbook"/>
+                <a:latin typeface="Lexend"/>
               </a:rPr>
               <a:t>Grade 7 Accelerated · Unit 4 · Lesson 1 — Adding and Subtracting in Scientific Notation</a:t>
             </a:r>
@@ -9031,11 +9483,11 @@
           <a:p>
             <a:pPr algn="r"/>
             <a:r>
-              <a:rPr sz="1100" b="0" i="0">
+              <a:rPr sz="1040" b="0" i="0">
                 <a:solidFill>
                   <a:srgbClr val="6B6B6B"/>
                 </a:solidFill>
-                <a:latin typeface="Century Schoolbook"/>
+                <a:latin typeface="Lexend"/>
               </a:rPr>
               <a:t>24</a:t>
             </a:r>
@@ -9044,7 +9496,7 @@
       </p:sp>
       <p:pic>
         <p:nvPicPr>
-          <p:cNvPr id="8" name="Picture 7" descr="f420607bc24c708f.png"/>
+          <p:cNvPr id="8" name="Picture 7" descr="be676fcb052be681.png"/>
           <p:cNvPicPr>
             <a:picLocks noChangeAspect="1"/>
           </p:cNvPicPr>
@@ -9058,8 +9510,8 @@
         </p:blipFill>
         <p:spPr>
           <a:xfrm>
-            <a:off x="4171188" y="2103120"/>
-            <a:ext cx="3819144" cy="411480"/>
+            <a:off x="4200144" y="2104643"/>
+            <a:ext cx="3761232" cy="408432"/>
           </a:xfrm>
           <a:prstGeom prst="rect">
             <a:avLst/>
@@ -9090,11 +9542,11 @@
           <a:p>
             <a:pPr algn="ctr"/>
             <a:r>
-              <a:rPr sz="2600" b="0" i="0">
+              <a:rPr sz="2470" b="0" i="0">
                 <a:solidFill>
                   <a:srgbClr val="1A1A1A"/>
                 </a:solidFill>
-                <a:latin typeface="Century Schoolbook"/>
+                <a:latin typeface="Lexend"/>
               </a:rPr>
               <a:t>Which is the sum?</a:t>
             </a:r>
@@ -9109,8 +9561,115 @@
         </p:nvSpPr>
         <p:spPr>
           <a:xfrm>
-            <a:off x="1874519" y="3455239"/>
-            <a:ext cx="4572000" cy="548640"/>
+            <a:off x="3201785" y="3414091"/>
+            <a:ext cx="3154956" cy="457200"/>
+          </a:xfrm>
+          <a:prstGeom prst="rect">
+            <a:avLst/>
+          </a:prstGeom>
+          <a:noFill/>
+        </p:spPr>
+        <p:txBody>
+          <a:bodyPr wrap="none" lIns="45720" rIns="45720" tIns="18288" bIns="18288" anchor="ctr">
+            <a:noAutofit/>
+          </a:bodyPr>
+          <a:lstStyle/>
+          <a:p>
+            <a:pPr algn="l"/>
+            <a:r>
+              <a:rPr sz="2330" b="0" i="0">
+                <a:solidFill>
+                  <a:srgbClr val="1A1A1A"/>
+                </a:solidFill>
+                <a:latin typeface="Lexend"/>
+              </a:rPr>
+              <a:t>Match the powers:  </a:t>
+            </a:r>
+          </a:p>
+        </p:txBody>
+      </p:sp>
+      <p:pic>
+        <p:nvPicPr>
+          <p:cNvPr id="11" name="Picture 10" descr="c61c1bacc44cde4f.png"/>
+          <p:cNvPicPr>
+            <a:picLocks noChangeAspect="1"/>
+          </p:cNvPicPr>
+          <p:nvPr/>
+        </p:nvPicPr>
+        <p:blipFill>
+          <a:blip r:embed="rId3"/>
+          <a:stretch>
+            <a:fillRect/>
+          </a:stretch>
+        </p:blipFill>
+        <p:spPr>
+          <a:xfrm>
+            <a:off x="6219582" y="3514675"/>
+            <a:ext cx="2743200" cy="256032"/>
+          </a:xfrm>
+          <a:prstGeom prst="rect">
+            <a:avLst/>
+          </a:prstGeom>
+        </p:spPr>
+      </p:pic>
+      <p:pic>
+        <p:nvPicPr>
+          <p:cNvPr id="12" name="Picture 11" descr="a4dc9a96cb3f319c.png"/>
+          <p:cNvPicPr>
+            <a:picLocks noChangeAspect="1"/>
+          </p:cNvPicPr>
+          <p:nvPr/>
+        </p:nvPicPr>
+        <p:blipFill>
+          <a:blip r:embed="rId4"/>
+          <a:stretch>
+            <a:fillRect/>
+          </a:stretch>
+        </p:blipFill>
+        <p:spPr>
+          <a:xfrm>
+            <a:off x="3256649" y="4038931"/>
+            <a:ext cx="2389632" cy="213360"/>
+          </a:xfrm>
+          <a:prstGeom prst="rect">
+            <a:avLst/>
+          </a:prstGeom>
+        </p:spPr>
+      </p:pic>
+      <p:pic>
+        <p:nvPicPr>
+          <p:cNvPr id="13" name="Picture 12" descr="c561023f683a97ad.png"/>
+          <p:cNvPicPr>
+            <a:picLocks noChangeAspect="1"/>
+          </p:cNvPicPr>
+          <p:nvPr/>
+        </p:nvPicPr>
+        <p:blipFill>
+          <a:blip r:embed="rId5"/>
+          <a:stretch>
+            <a:fillRect/>
+          </a:stretch>
+        </p:blipFill>
+        <p:spPr>
+          <a:xfrm>
+            <a:off x="3256649" y="4520515"/>
+            <a:ext cx="1392936" cy="256032"/>
+          </a:xfrm>
+          <a:prstGeom prst="rect">
+            <a:avLst/>
+          </a:prstGeom>
+        </p:spPr>
+      </p:pic>
+      <p:sp>
+        <p:nvSpPr>
+          <p:cNvPr id="14" name="TextBox 13"/>
+          <p:cNvSpPr txBox="1"/>
+          <p:nvPr/>
+        </p:nvSpPr>
+        <p:spPr>
+          <a:xfrm>
+            <a:off x="777240" y="4991431"/>
+            <a:ext cx="10607040" cy="548640"/>
           </a:xfrm>
           <a:prstGeom prst="rect">
             <a:avLst/>
@@ -9123,234 +9682,22 @@
           </a:bodyPr>
           <a:lstStyle/>
           <a:p>
-            <a:pPr algn="l"/>
-            <a:r>
-              <a:rPr sz="2400" b="1" i="0">
-                <a:solidFill>
-                  <a:srgbClr val="1A1A1A"/>
-                </a:solidFill>
-                <a:latin typeface="Century Schoolbook"/>
-              </a:rPr>
-              <a:t>A.   </a:t>
-            </a:r>
-            <a:r>
-              <a:rPr sz="2400" b="0" i="0">
-                <a:solidFill>
-                  <a:srgbClr val="1A1A1A"/>
-                </a:solidFill>
-                <a:latin typeface="Century Schoolbook"/>
-              </a:rPr>
-              <a:t>4.7 × 10</a:t>
-            </a:r>
-            <a:r>
-              <a:rPr sz="2400" b="0" i="0" baseline="30000">
-                <a:solidFill>
-                  <a:srgbClr val="1A1A1A"/>
-                </a:solidFill>
-                <a:latin typeface="Century Schoolbook"/>
-              </a:rPr>
-              <a:t>5</a:t>
-            </a:r>
-          </a:p>
-        </p:txBody>
-      </p:sp>
-      <p:sp>
-        <p:nvSpPr>
-          <p:cNvPr id="11" name="TextBox 10"/>
-          <p:cNvSpPr txBox="1"/>
-          <p:nvPr/>
-        </p:nvSpPr>
-        <p:spPr>
-          <a:xfrm>
-            <a:off x="6629400" y="3455239"/>
-            <a:ext cx="4572000" cy="548640"/>
-          </a:xfrm>
-          <a:prstGeom prst="rect">
-            <a:avLst/>
-          </a:prstGeom>
-          <a:noFill/>
-        </p:spPr>
-        <p:txBody>
-          <a:bodyPr wrap="square" lIns="45720" rIns="45720" tIns="18288" bIns="18288" anchor="t">
-            <a:spAutoFit/>
-          </a:bodyPr>
-          <a:lstStyle/>
-          <a:p>
-            <a:pPr algn="l"/>
-            <a:r>
-              <a:rPr sz="2400" b="1" i="0">
-                <a:solidFill>
-                  <a:srgbClr val="1A1A1A"/>
-                </a:solidFill>
-                <a:latin typeface="Century Schoolbook"/>
-              </a:rPr>
-              <a:t>B.   </a:t>
-            </a:r>
-            <a:r>
-              <a:rPr sz="2400" b="0" i="0">
-                <a:solidFill>
-                  <a:srgbClr val="1A1A1A"/>
-                </a:solidFill>
-                <a:latin typeface="Century Schoolbook"/>
-              </a:rPr>
-              <a:t>4.7 × 10</a:t>
-            </a:r>
-            <a:r>
-              <a:rPr sz="2400" b="0" i="0" baseline="30000">
-                <a:solidFill>
-                  <a:srgbClr val="1A1A1A"/>
-                </a:solidFill>
-                <a:latin typeface="Century Schoolbook"/>
-              </a:rPr>
-              <a:t>8</a:t>
-            </a:r>
-          </a:p>
-        </p:txBody>
-      </p:sp>
-      <p:sp>
-        <p:nvSpPr>
-          <p:cNvPr id="12" name="TextBox 11"/>
-          <p:cNvSpPr txBox="1"/>
-          <p:nvPr/>
-        </p:nvSpPr>
-        <p:spPr>
-          <a:xfrm>
-            <a:off x="1874519" y="4141039"/>
-            <a:ext cx="4572000" cy="548640"/>
-          </a:xfrm>
-          <a:prstGeom prst="rect">
-            <a:avLst/>
-          </a:prstGeom>
-          <a:noFill/>
-        </p:spPr>
-        <p:txBody>
-          <a:bodyPr wrap="square" lIns="45720" rIns="45720" tIns="18288" bIns="18288" anchor="t">
-            <a:spAutoFit/>
-          </a:bodyPr>
-          <a:lstStyle/>
-          <a:p>
-            <a:pPr algn="l"/>
-            <a:r>
-              <a:rPr sz="2400" b="1" i="0">
+            <a:pPr algn="ctr"/>
+            <a:r>
+              <a:rPr sz="3040" b="1" i="0">
                 <a:solidFill>
                   <a:srgbClr val="9E1B32"/>
                 </a:solidFill>
-                <a:latin typeface="Century Schoolbook"/>
-              </a:rPr>
-              <a:t>C.   </a:t>
-            </a:r>
-            <a:r>
-              <a:rPr sz="2400" b="1" i="0">
+                <a:latin typeface="Lexend"/>
+              </a:rPr>
+              <a:t>Answer:   C — 3.413 × 10</a:t>
+            </a:r>
+            <a:r>
+              <a:rPr sz="3040" b="1" i="0" baseline="30000">
                 <a:solidFill>
                   <a:srgbClr val="9E1B32"/>
                 </a:solidFill>
-                <a:latin typeface="Century Schoolbook"/>
-              </a:rPr>
-              <a:t>3.413 × 10</a:t>
-            </a:r>
-            <a:r>
-              <a:rPr sz="2400" b="1" i="0" baseline="30000">
-                <a:solidFill>
-                  <a:srgbClr val="9E1B32"/>
-                </a:solidFill>
-                <a:latin typeface="Century Schoolbook"/>
-              </a:rPr>
-              <a:t>5</a:t>
-            </a:r>
-          </a:p>
-        </p:txBody>
-      </p:sp>
-      <p:sp>
-        <p:nvSpPr>
-          <p:cNvPr id="13" name="TextBox 12"/>
-          <p:cNvSpPr txBox="1"/>
-          <p:nvPr/>
-        </p:nvSpPr>
-        <p:spPr>
-          <a:xfrm>
-            <a:off x="6629400" y="4141039"/>
-            <a:ext cx="4572000" cy="548640"/>
-          </a:xfrm>
-          <a:prstGeom prst="rect">
-            <a:avLst/>
-          </a:prstGeom>
-          <a:noFill/>
-        </p:spPr>
-        <p:txBody>
-          <a:bodyPr wrap="square" lIns="45720" rIns="45720" tIns="18288" bIns="18288" anchor="t">
-            <a:spAutoFit/>
-          </a:bodyPr>
-          <a:lstStyle/>
-          <a:p>
-            <a:pPr algn="l"/>
-            <a:r>
-              <a:rPr sz="2400" b="1" i="0">
-                <a:solidFill>
-                  <a:srgbClr val="1A1A1A"/>
-                </a:solidFill>
-                <a:latin typeface="Century Schoolbook"/>
-              </a:rPr>
-              <a:t>D.   </a:t>
-            </a:r>
-            <a:r>
-              <a:rPr sz="2400" b="0" i="0">
-                <a:solidFill>
-                  <a:srgbClr val="1A1A1A"/>
-                </a:solidFill>
-                <a:latin typeface="Century Schoolbook"/>
-              </a:rPr>
-              <a:t>3.53 × 10</a:t>
-            </a:r>
-            <a:r>
-              <a:rPr sz="2400" b="0" i="0" baseline="30000">
-                <a:solidFill>
-                  <a:srgbClr val="1A1A1A"/>
-                </a:solidFill>
-                <a:latin typeface="Century Schoolbook"/>
-              </a:rPr>
-              <a:t>5</a:t>
-            </a:r>
-          </a:p>
-        </p:txBody>
-      </p:sp>
-      <p:sp>
-        <p:nvSpPr>
-          <p:cNvPr id="14" name="TextBox 13"/>
-          <p:cNvSpPr txBox="1"/>
-          <p:nvPr/>
-        </p:nvSpPr>
-        <p:spPr>
-          <a:xfrm>
-            <a:off x="777240" y="5146879"/>
-            <a:ext cx="10607040" cy="548640"/>
-          </a:xfrm>
-          <a:prstGeom prst="rect">
-            <a:avLst/>
-          </a:prstGeom>
-          <a:noFill/>
-        </p:spPr>
-        <p:txBody>
-          <a:bodyPr wrap="square" lIns="45720" rIns="45720" tIns="18288" bIns="18288" anchor="t">
-            <a:spAutoFit/>
-          </a:bodyPr>
-          <a:lstStyle/>
-          <a:p>
-            <a:pPr algn="ctr"/>
-            <a:r>
-              <a:rPr sz="3200" b="1" i="0">
-                <a:solidFill>
-                  <a:srgbClr val="9E1B32"/>
-                </a:solidFill>
-                <a:latin typeface="Century Schoolbook"/>
-              </a:rPr>
-              <a:t>Answer:   C — 3.413 × 10</a:t>
-            </a:r>
-            <a:r>
-              <a:rPr sz="3200" b="1" i="0" baseline="30000">
-                <a:solidFill>
-                  <a:srgbClr val="9E1B32"/>
-                </a:solidFill>
-                <a:latin typeface="Century Schoolbook"/>
+                <a:latin typeface="Lexend"/>
               </a:rPr>
               <a:t>5</a:t>
             </a:r>
@@ -9399,11 +9746,11 @@
           <a:p>
             <a:pPr algn="l"/>
             <a:r>
-              <a:rPr sz="3400" b="1" i="0">
+              <a:rPr sz="3229" b="1" i="0">
                 <a:solidFill>
                   <a:srgbClr val="1A1A1A"/>
                 </a:solidFill>
-                <a:latin typeface="Century Schoolbook"/>
+                <a:latin typeface="Lexend"/>
               </a:rPr>
               <a:t>Whiteboards   ·   Question 6 of 9</a:t>
             </a:r>
@@ -9539,11 +9886,11 @@
           <a:p>
             <a:pPr algn="l"/>
             <a:r>
-              <a:rPr sz="1100" b="0" i="1">
+              <a:rPr sz="1040" b="0" i="0">
                 <a:solidFill>
                   <a:srgbClr val="6B6B6B"/>
                 </a:solidFill>
-                <a:latin typeface="Century Schoolbook"/>
+                <a:latin typeface="Lexend"/>
               </a:rPr>
               <a:t>Grade 7 Accelerated · Unit 4 · Lesson 1 — Adding and Subtracting in Scientific Notation</a:t>
             </a:r>
@@ -9574,11 +9921,11 @@
           <a:p>
             <a:pPr algn="r"/>
             <a:r>
-              <a:rPr sz="1100" b="0" i="0">
+              <a:rPr sz="1040" b="0" i="0">
                 <a:solidFill>
                   <a:srgbClr val="6B6B6B"/>
                 </a:solidFill>
-                <a:latin typeface="Century Schoolbook"/>
+                <a:latin typeface="Lexend"/>
               </a:rPr>
               <a:t>25</a:t>
             </a:r>
@@ -9587,7 +9934,7 @@
       </p:sp>
       <p:pic>
         <p:nvPicPr>
-          <p:cNvPr id="8" name="Picture 7" descr="f600c7d1ad07bbc4.png"/>
+          <p:cNvPr id="8" name="Picture 7" descr="c56988b1bd434277.png"/>
           <p:cNvPicPr>
             <a:picLocks noChangeAspect="1"/>
           </p:cNvPicPr>
@@ -9601,8 +9948,8 @@
         </p:blipFill>
         <p:spPr>
           <a:xfrm>
-            <a:off x="4172712" y="2194560"/>
-            <a:ext cx="3816095" cy="414528"/>
+            <a:off x="4186428" y="2196083"/>
+            <a:ext cx="3788664" cy="408432"/>
           </a:xfrm>
           <a:prstGeom prst="rect">
             <a:avLst/>
@@ -9617,7 +9964,7 @@
         </p:nvSpPr>
         <p:spPr>
           <a:xfrm>
-            <a:off x="777240" y="2883407"/>
+            <a:off x="777240" y="2880360"/>
             <a:ext cx="10607040" cy="465151"/>
           </a:xfrm>
           <a:prstGeom prst="rect">
@@ -9633,11 +9980,11 @@
           <a:p>
             <a:pPr algn="ctr"/>
             <a:r>
-              <a:rPr sz="2600" b="0" i="0">
+              <a:rPr sz="2470" b="0" i="0">
                 <a:solidFill>
                   <a:srgbClr val="1A1A1A"/>
                 </a:solidFill>
-                <a:latin typeface="Century Schoolbook"/>
+                <a:latin typeface="Lexend"/>
               </a:rPr>
               <a:t>Which is the sum, written in scientific notation?</a:t>
             </a:r>
@@ -9652,7 +9999,7 @@
         </p:nvSpPr>
         <p:spPr>
           <a:xfrm>
-            <a:off x="1874519" y="3549727"/>
+            <a:off x="1874519" y="3546679"/>
             <a:ext cx="4572000" cy="548640"/>
           </a:xfrm>
           <a:prstGeom prst="rect">
@@ -9668,29 +10015,29 @@
           <a:p>
             <a:pPr algn="l"/>
             <a:r>
-              <a:rPr sz="2400" b="1" i="0">
+              <a:rPr sz="2280" b="1" i="0">
                 <a:solidFill>
                   <a:srgbClr val="1A1A1A"/>
                 </a:solidFill>
-                <a:latin typeface="Century Schoolbook"/>
+                <a:latin typeface="Lexend"/>
               </a:rPr>
               <a:t>A.   </a:t>
             </a:r>
             <a:r>
-              <a:rPr sz="2400" b="0" i="0">
+              <a:rPr sz="2280" b="0" i="0">
                 <a:solidFill>
                   <a:srgbClr val="1A1A1A"/>
                 </a:solidFill>
-                <a:latin typeface="Century Schoolbook"/>
+                <a:latin typeface="Lexend"/>
               </a:rPr>
               <a:t>12.3 × 10</a:t>
             </a:r>
             <a:r>
-              <a:rPr sz="2400" b="0" i="0" baseline="30000">
+              <a:rPr sz="2280" b="0" i="0" baseline="30000">
                 <a:solidFill>
                   <a:srgbClr val="1A1A1A"/>
                 </a:solidFill>
-                <a:latin typeface="Century Schoolbook"/>
+                <a:latin typeface="Lexend"/>
               </a:rPr>
               <a:t>6</a:t>
             </a:r>
@@ -9705,7 +10052,7 @@
         </p:nvSpPr>
         <p:spPr>
           <a:xfrm>
-            <a:off x="6629400" y="3549727"/>
+            <a:off x="6629400" y="3546679"/>
             <a:ext cx="4572000" cy="548640"/>
           </a:xfrm>
           <a:prstGeom prst="rect">
@@ -9721,29 +10068,29 @@
           <a:p>
             <a:pPr algn="l"/>
             <a:r>
-              <a:rPr sz="2400" b="1" i="0">
+              <a:rPr sz="2280" b="1" i="0">
                 <a:solidFill>
                   <a:srgbClr val="1A1A1A"/>
                 </a:solidFill>
-                <a:latin typeface="Century Schoolbook"/>
+                <a:latin typeface="Lexend"/>
               </a:rPr>
               <a:t>B.   </a:t>
             </a:r>
             <a:r>
-              <a:rPr sz="2400" b="0" i="0">
+              <a:rPr sz="2280" b="0" i="0">
                 <a:solidFill>
                   <a:srgbClr val="1A1A1A"/>
                 </a:solidFill>
-                <a:latin typeface="Century Schoolbook"/>
+                <a:latin typeface="Lexend"/>
               </a:rPr>
               <a:t>12.3 × 10</a:t>
             </a:r>
             <a:r>
-              <a:rPr sz="2400" b="0" i="0" baseline="30000">
+              <a:rPr sz="2280" b="0" i="0" baseline="30000">
                 <a:solidFill>
                   <a:srgbClr val="1A1A1A"/>
                 </a:solidFill>
-                <a:latin typeface="Century Schoolbook"/>
+                <a:latin typeface="Lexend"/>
               </a:rPr>
               <a:t>12</a:t>
             </a:r>
@@ -9758,7 +10105,7 @@
         </p:nvSpPr>
         <p:spPr>
           <a:xfrm>
-            <a:off x="1874519" y="4235527"/>
+            <a:off x="1874519" y="4232479"/>
             <a:ext cx="4572000" cy="548640"/>
           </a:xfrm>
           <a:prstGeom prst="rect">
@@ -9774,29 +10121,29 @@
           <a:p>
             <a:pPr algn="l"/>
             <a:r>
-              <a:rPr sz="2400" b="1" i="0">
+              <a:rPr sz="2280" b="1" i="0">
                 <a:solidFill>
                   <a:srgbClr val="1A1A1A"/>
                 </a:solidFill>
-                <a:latin typeface="Century Schoolbook"/>
+                <a:latin typeface="Lexend"/>
               </a:rPr>
               <a:t>C.   </a:t>
             </a:r>
             <a:r>
-              <a:rPr sz="2400" b="0" i="0">
+              <a:rPr sz="2280" b="0" i="0">
                 <a:solidFill>
                   <a:srgbClr val="1A1A1A"/>
                 </a:solidFill>
-                <a:latin typeface="Century Schoolbook"/>
+                <a:latin typeface="Lexend"/>
               </a:rPr>
               <a:t>1.23 × 10</a:t>
             </a:r>
             <a:r>
-              <a:rPr sz="2400" b="0" i="0" baseline="30000">
+              <a:rPr sz="2280" b="0" i="0" baseline="30000">
                 <a:solidFill>
                   <a:srgbClr val="1A1A1A"/>
                 </a:solidFill>
-                <a:latin typeface="Century Schoolbook"/>
+                <a:latin typeface="Lexend"/>
               </a:rPr>
               <a:t>6</a:t>
             </a:r>
@@ -9811,7 +10158,7 @@
         </p:nvSpPr>
         <p:spPr>
           <a:xfrm>
-            <a:off x="6629400" y="4235527"/>
+            <a:off x="6629400" y="4232479"/>
             <a:ext cx="4572000" cy="548640"/>
           </a:xfrm>
           <a:prstGeom prst="rect">
@@ -9827,29 +10174,29 @@
           <a:p>
             <a:pPr algn="l"/>
             <a:r>
-              <a:rPr sz="2400" b="1" i="0">
+              <a:rPr sz="2280" b="1" i="0">
                 <a:solidFill>
                   <a:srgbClr val="1A1A1A"/>
                 </a:solidFill>
-                <a:latin typeface="Century Schoolbook"/>
+                <a:latin typeface="Lexend"/>
               </a:rPr>
               <a:t>D.   </a:t>
             </a:r>
             <a:r>
-              <a:rPr sz="2400" b="0" i="0">
+              <a:rPr sz="2280" b="0" i="0">
                 <a:solidFill>
                   <a:srgbClr val="1A1A1A"/>
                 </a:solidFill>
-                <a:latin typeface="Century Schoolbook"/>
+                <a:latin typeface="Lexend"/>
               </a:rPr>
               <a:t>1.23 × 10</a:t>
             </a:r>
             <a:r>
-              <a:rPr sz="2400" b="0" i="0" baseline="30000">
+              <a:rPr sz="2280" b="0" i="0" baseline="30000">
                 <a:solidFill>
                   <a:srgbClr val="1A1A1A"/>
                 </a:solidFill>
-                <a:latin typeface="Century Schoolbook"/>
+                <a:latin typeface="Lexend"/>
               </a:rPr>
               <a:t>7</a:t>
             </a:r>
@@ -9864,7 +10211,7 @@
         </p:nvSpPr>
         <p:spPr>
           <a:xfrm>
-            <a:off x="777240" y="5241367"/>
+            <a:off x="777240" y="5238319"/>
             <a:ext cx="10607040" cy="457200"/>
           </a:xfrm>
           <a:prstGeom prst="rect">
@@ -9880,11 +10227,11 @@
           <a:p>
             <a:pPr algn="ctr"/>
             <a:r>
-              <a:rPr sz="2600" b="1" i="0">
+              <a:rPr sz="2470" b="1" i="0">
                 <a:solidFill>
                   <a:srgbClr val="1A1A1A"/>
                 </a:solidFill>
-                <a:latin typeface="Century Schoolbook"/>
+                <a:latin typeface="Lexend"/>
               </a:rPr>
               <a:t>Answer it.</a:t>
             </a:r>
@@ -9933,11 +10280,11 @@
           <a:p>
             <a:pPr algn="l"/>
             <a:r>
-              <a:rPr sz="3400" b="1" i="0">
+              <a:rPr sz="3229" b="1" i="0">
                 <a:solidFill>
                   <a:srgbClr val="1A1A1A"/>
                 </a:solidFill>
-                <a:latin typeface="Century Schoolbook"/>
+                <a:latin typeface="Lexend"/>
               </a:rPr>
               <a:t>Whiteboards   ·   Question 6 of 9</a:t>
             </a:r>
@@ -10073,11 +10420,11 @@
           <a:p>
             <a:pPr algn="l"/>
             <a:r>
-              <a:rPr sz="1100" b="0" i="1">
+              <a:rPr sz="1040" b="0" i="0">
                 <a:solidFill>
                   <a:srgbClr val="6B6B6B"/>
                 </a:solidFill>
-                <a:latin typeface="Century Schoolbook"/>
+                <a:latin typeface="Lexend"/>
               </a:rPr>
               <a:t>Grade 7 Accelerated · Unit 4 · Lesson 1 — Adding and Subtracting in Scientific Notation</a:t>
             </a:r>
@@ -10108,11 +10455,11 @@
           <a:p>
             <a:pPr algn="r"/>
             <a:r>
-              <a:rPr sz="1100" b="0" i="0">
+              <a:rPr sz="1040" b="0" i="0">
                 <a:solidFill>
                   <a:srgbClr val="6B6B6B"/>
                 </a:solidFill>
-                <a:latin typeface="Century Schoolbook"/>
+                <a:latin typeface="Lexend"/>
               </a:rPr>
               <a:t>26</a:t>
             </a:r>
@@ -10121,7 +10468,7 @@
       </p:sp>
       <p:pic>
         <p:nvPicPr>
-          <p:cNvPr id="8" name="Picture 7" descr="11c6b03d538cb705.png"/>
+          <p:cNvPr id="8" name="Picture 7" descr="9def6d28be26225f.png"/>
           <p:cNvPicPr>
             <a:picLocks noChangeAspect="1"/>
           </p:cNvPicPr>
@@ -10135,8 +10482,8 @@
         </p:blipFill>
         <p:spPr>
           <a:xfrm>
-            <a:off x="4171188" y="2103120"/>
-            <a:ext cx="3819144" cy="411480"/>
+            <a:off x="4184903" y="2103120"/>
+            <a:ext cx="3791712" cy="414528"/>
           </a:xfrm>
           <a:prstGeom prst="rect">
             <a:avLst/>
@@ -10151,7 +10498,7 @@
         </p:nvSpPr>
         <p:spPr>
           <a:xfrm>
-            <a:off x="777240" y="2788920"/>
+            <a:off x="777240" y="2791967"/>
             <a:ext cx="10607040" cy="465151"/>
           </a:xfrm>
           <a:prstGeom prst="rect">
@@ -10167,27 +10514,75 @@
           <a:p>
             <a:pPr algn="ctr"/>
             <a:r>
-              <a:rPr sz="2600" b="0" i="0">
+              <a:rPr sz="2470" b="0" i="0">
                 <a:solidFill>
                   <a:srgbClr val="1A1A1A"/>
                 </a:solidFill>
-                <a:latin typeface="Century Schoolbook"/>
+                <a:latin typeface="Lexend"/>
               </a:rPr>
               <a:t>Which is the sum, written in scientific notation?</a:t>
             </a:r>
           </a:p>
         </p:txBody>
       </p:sp>
-      <p:sp>
-        <p:nvSpPr>
-          <p:cNvPr id="10" name="TextBox 9"/>
-          <p:cNvSpPr txBox="1"/>
-          <p:nvPr/>
-        </p:nvSpPr>
-        <p:spPr>
-          <a:xfrm>
-            <a:off x="1874519" y="3455239"/>
-            <a:ext cx="4572000" cy="548640"/>
+      <p:pic>
+        <p:nvPicPr>
+          <p:cNvPr id="10" name="Picture 9" descr="7a92f566b3dc9a9c.png"/>
+          <p:cNvPicPr>
+            <a:picLocks noChangeAspect="1"/>
+          </p:cNvPicPr>
+          <p:nvPr/>
+        </p:nvPicPr>
+        <p:blipFill>
+          <a:blip r:embed="rId3"/>
+          <a:stretch>
+            <a:fillRect/>
+          </a:stretch>
+        </p:blipFill>
+        <p:spPr>
+          <a:xfrm>
+            <a:off x="4530851" y="3519247"/>
+            <a:ext cx="2209800" cy="252984"/>
+          </a:xfrm>
+          <a:prstGeom prst="rect">
+            <a:avLst/>
+          </a:prstGeom>
+        </p:spPr>
+      </p:pic>
+      <p:pic>
+        <p:nvPicPr>
+          <p:cNvPr id="11" name="Picture 10" descr="4253edb8e6cb150c.png"/>
+          <p:cNvPicPr>
+            <a:picLocks noChangeAspect="1"/>
+          </p:cNvPicPr>
+          <p:nvPr/>
+        </p:nvPicPr>
+        <p:blipFill>
+          <a:blip r:embed="rId4"/>
+          <a:stretch>
+            <a:fillRect/>
+          </a:stretch>
+        </p:blipFill>
+        <p:spPr>
+          <a:xfrm>
+            <a:off x="4530851" y="4031311"/>
+            <a:ext cx="3209544" cy="307848"/>
+          </a:xfrm>
+          <a:prstGeom prst="rect">
+            <a:avLst/>
+          </a:prstGeom>
+        </p:spPr>
+      </p:pic>
+      <p:sp>
+        <p:nvSpPr>
+          <p:cNvPr id="12" name="TextBox 11"/>
+          <p:cNvSpPr txBox="1"/>
+          <p:nvPr/>
+        </p:nvSpPr>
+        <p:spPr>
+          <a:xfrm>
+            <a:off x="777240" y="4663440"/>
+            <a:ext cx="10607040" cy="548640"/>
           </a:xfrm>
           <a:prstGeom prst="rect">
             <a:avLst/>
@@ -10200,234 +10595,22 @@
           </a:bodyPr>
           <a:lstStyle/>
           <a:p>
-            <a:pPr algn="l"/>
-            <a:r>
-              <a:rPr sz="2400" b="1" i="0">
-                <a:solidFill>
-                  <a:srgbClr val="1A1A1A"/>
-                </a:solidFill>
-                <a:latin typeface="Century Schoolbook"/>
-              </a:rPr>
-              <a:t>A.   </a:t>
-            </a:r>
-            <a:r>
-              <a:rPr sz="2400" b="0" i="0">
-                <a:solidFill>
-                  <a:srgbClr val="1A1A1A"/>
-                </a:solidFill>
-                <a:latin typeface="Century Schoolbook"/>
-              </a:rPr>
-              <a:t>12.3 × 10</a:t>
-            </a:r>
-            <a:r>
-              <a:rPr sz="2400" b="0" i="0" baseline="30000">
-                <a:solidFill>
-                  <a:srgbClr val="1A1A1A"/>
-                </a:solidFill>
-                <a:latin typeface="Century Schoolbook"/>
-              </a:rPr>
-              <a:t>6</a:t>
-            </a:r>
-          </a:p>
-        </p:txBody>
-      </p:sp>
-      <p:sp>
-        <p:nvSpPr>
-          <p:cNvPr id="11" name="TextBox 10"/>
-          <p:cNvSpPr txBox="1"/>
-          <p:nvPr/>
-        </p:nvSpPr>
-        <p:spPr>
-          <a:xfrm>
-            <a:off x="6629400" y="3455239"/>
-            <a:ext cx="4572000" cy="548640"/>
-          </a:xfrm>
-          <a:prstGeom prst="rect">
-            <a:avLst/>
-          </a:prstGeom>
-          <a:noFill/>
-        </p:spPr>
-        <p:txBody>
-          <a:bodyPr wrap="square" lIns="45720" rIns="45720" tIns="18288" bIns="18288" anchor="t">
-            <a:spAutoFit/>
-          </a:bodyPr>
-          <a:lstStyle/>
-          <a:p>
-            <a:pPr algn="l"/>
-            <a:r>
-              <a:rPr sz="2400" b="1" i="0">
-                <a:solidFill>
-                  <a:srgbClr val="1A1A1A"/>
-                </a:solidFill>
-                <a:latin typeface="Century Schoolbook"/>
-              </a:rPr>
-              <a:t>B.   </a:t>
-            </a:r>
-            <a:r>
-              <a:rPr sz="2400" b="0" i="0">
-                <a:solidFill>
-                  <a:srgbClr val="1A1A1A"/>
-                </a:solidFill>
-                <a:latin typeface="Century Schoolbook"/>
-              </a:rPr>
-              <a:t>12.3 × 10</a:t>
-            </a:r>
-            <a:r>
-              <a:rPr sz="2400" b="0" i="0" baseline="30000">
-                <a:solidFill>
-                  <a:srgbClr val="1A1A1A"/>
-                </a:solidFill>
-                <a:latin typeface="Century Schoolbook"/>
-              </a:rPr>
-              <a:t>12</a:t>
-            </a:r>
-          </a:p>
-        </p:txBody>
-      </p:sp>
-      <p:sp>
-        <p:nvSpPr>
-          <p:cNvPr id="12" name="TextBox 11"/>
-          <p:cNvSpPr txBox="1"/>
-          <p:nvPr/>
-        </p:nvSpPr>
-        <p:spPr>
-          <a:xfrm>
-            <a:off x="1874519" y="4141039"/>
-            <a:ext cx="4572000" cy="548640"/>
-          </a:xfrm>
-          <a:prstGeom prst="rect">
-            <a:avLst/>
-          </a:prstGeom>
-          <a:noFill/>
-        </p:spPr>
-        <p:txBody>
-          <a:bodyPr wrap="square" lIns="45720" rIns="45720" tIns="18288" bIns="18288" anchor="t">
-            <a:spAutoFit/>
-          </a:bodyPr>
-          <a:lstStyle/>
-          <a:p>
-            <a:pPr algn="l"/>
-            <a:r>
-              <a:rPr sz="2400" b="1" i="0">
-                <a:solidFill>
-                  <a:srgbClr val="1A1A1A"/>
-                </a:solidFill>
-                <a:latin typeface="Century Schoolbook"/>
-              </a:rPr>
-              <a:t>C.   </a:t>
-            </a:r>
-            <a:r>
-              <a:rPr sz="2400" b="0" i="0">
-                <a:solidFill>
-                  <a:srgbClr val="1A1A1A"/>
-                </a:solidFill>
-                <a:latin typeface="Century Schoolbook"/>
-              </a:rPr>
-              <a:t>1.23 × 10</a:t>
-            </a:r>
-            <a:r>
-              <a:rPr sz="2400" b="0" i="0" baseline="30000">
-                <a:solidFill>
-                  <a:srgbClr val="1A1A1A"/>
-                </a:solidFill>
-                <a:latin typeface="Century Schoolbook"/>
-              </a:rPr>
-              <a:t>6</a:t>
-            </a:r>
-          </a:p>
-        </p:txBody>
-      </p:sp>
-      <p:sp>
-        <p:nvSpPr>
-          <p:cNvPr id="13" name="TextBox 12"/>
-          <p:cNvSpPr txBox="1"/>
-          <p:nvPr/>
-        </p:nvSpPr>
-        <p:spPr>
-          <a:xfrm>
-            <a:off x="6629400" y="4141039"/>
-            <a:ext cx="4572000" cy="548640"/>
-          </a:xfrm>
-          <a:prstGeom prst="rect">
-            <a:avLst/>
-          </a:prstGeom>
-          <a:noFill/>
-        </p:spPr>
-        <p:txBody>
-          <a:bodyPr wrap="square" lIns="45720" rIns="45720" tIns="18288" bIns="18288" anchor="t">
-            <a:spAutoFit/>
-          </a:bodyPr>
-          <a:lstStyle/>
-          <a:p>
-            <a:pPr algn="l"/>
-            <a:r>
-              <a:rPr sz="2400" b="1" i="0">
+            <a:pPr algn="ctr"/>
+            <a:r>
+              <a:rPr sz="3040" b="1" i="0">
                 <a:solidFill>
                   <a:srgbClr val="9E1B32"/>
                 </a:solidFill>
-                <a:latin typeface="Century Schoolbook"/>
-              </a:rPr>
-              <a:t>D.   </a:t>
-            </a:r>
-            <a:r>
-              <a:rPr sz="2400" b="1" i="0">
+                <a:latin typeface="Lexend"/>
+              </a:rPr>
+              <a:t>Answer:   D — 1.23 × 10</a:t>
+            </a:r>
+            <a:r>
+              <a:rPr sz="3040" b="1" i="0" baseline="30000">
                 <a:solidFill>
                   <a:srgbClr val="9E1B32"/>
                 </a:solidFill>
-                <a:latin typeface="Century Schoolbook"/>
-              </a:rPr>
-              <a:t>1.23 × 10</a:t>
-            </a:r>
-            <a:r>
-              <a:rPr sz="2400" b="1" i="0" baseline="30000">
-                <a:solidFill>
-                  <a:srgbClr val="9E1B32"/>
-                </a:solidFill>
-                <a:latin typeface="Century Schoolbook"/>
-              </a:rPr>
-              <a:t>7</a:t>
-            </a:r>
-          </a:p>
-        </p:txBody>
-      </p:sp>
-      <p:sp>
-        <p:nvSpPr>
-          <p:cNvPr id="14" name="TextBox 13"/>
-          <p:cNvSpPr txBox="1"/>
-          <p:nvPr/>
-        </p:nvSpPr>
-        <p:spPr>
-          <a:xfrm>
-            <a:off x="777240" y="5146879"/>
-            <a:ext cx="10607040" cy="548640"/>
-          </a:xfrm>
-          <a:prstGeom prst="rect">
-            <a:avLst/>
-          </a:prstGeom>
-          <a:noFill/>
-        </p:spPr>
-        <p:txBody>
-          <a:bodyPr wrap="square" lIns="45720" rIns="45720" tIns="18288" bIns="18288" anchor="t">
-            <a:spAutoFit/>
-          </a:bodyPr>
-          <a:lstStyle/>
-          <a:p>
-            <a:pPr algn="ctr"/>
-            <a:r>
-              <a:rPr sz="3200" b="1" i="0">
-                <a:solidFill>
-                  <a:srgbClr val="9E1B32"/>
-                </a:solidFill>
-                <a:latin typeface="Century Schoolbook"/>
-              </a:rPr>
-              <a:t>Answer:   D — 1.23 × 10</a:t>
-            </a:r>
-            <a:r>
-              <a:rPr sz="3200" b="1" i="0" baseline="30000">
-                <a:solidFill>
-                  <a:srgbClr val="9E1B32"/>
-                </a:solidFill>
-                <a:latin typeface="Century Schoolbook"/>
+                <a:latin typeface="Lexend"/>
               </a:rPr>
               <a:t>7</a:t>
             </a:r>
@@ -10476,11 +10659,11 @@
           <a:p>
             <a:pPr algn="l"/>
             <a:r>
-              <a:rPr sz="3400" b="1" i="0">
+              <a:rPr sz="3229" b="1" i="0">
                 <a:solidFill>
                   <a:srgbClr val="1A1A1A"/>
                 </a:solidFill>
-                <a:latin typeface="Century Schoolbook"/>
+                <a:latin typeface="Lexend"/>
               </a:rPr>
               <a:t>Whiteboards   ·   Question 7 of 9</a:t>
             </a:r>
@@ -10616,11 +10799,11 @@
           <a:p>
             <a:pPr algn="l"/>
             <a:r>
-              <a:rPr sz="1100" b="0" i="1">
+              <a:rPr sz="1040" b="0" i="0">
                 <a:solidFill>
                   <a:srgbClr val="6B6B6B"/>
                 </a:solidFill>
-                <a:latin typeface="Century Schoolbook"/>
+                <a:latin typeface="Lexend"/>
               </a:rPr>
               <a:t>Grade 7 Accelerated · Unit 4 · Lesson 1 — Adding and Subtracting in Scientific Notation</a:t>
             </a:r>
@@ -10651,11 +10834,11 @@
           <a:p>
             <a:pPr algn="r"/>
             <a:r>
-              <a:rPr sz="1100" b="0" i="0">
+              <a:rPr sz="1040" b="0" i="0">
                 <a:solidFill>
                   <a:srgbClr val="6B6B6B"/>
                 </a:solidFill>
-                <a:latin typeface="Century Schoolbook"/>
+                <a:latin typeface="Lexend"/>
               </a:rPr>
               <a:t>27</a:t>
             </a:r>
@@ -10664,7 +10847,7 @@
       </p:sp>
       <p:pic>
         <p:nvPicPr>
-          <p:cNvPr id="8" name="Picture 7" descr="7996c8675edf5172.png"/>
+          <p:cNvPr id="8" name="Picture 7" descr="8364ffedb5ab9d47.png"/>
           <p:cNvPicPr>
             <a:picLocks noChangeAspect="1"/>
           </p:cNvPicPr>
@@ -10678,8 +10861,8 @@
         </p:blipFill>
         <p:spPr>
           <a:xfrm>
-            <a:off x="3977639" y="2194560"/>
-            <a:ext cx="4206240" cy="411480"/>
+            <a:off x="4026408" y="2194560"/>
+            <a:ext cx="4108704" cy="411480"/>
           </a:xfrm>
           <a:prstGeom prst="rect">
             <a:avLst/>
@@ -10710,11 +10893,11 @@
           <a:p>
             <a:pPr algn="ctr"/>
             <a:r>
-              <a:rPr sz="2600" b="1" i="0">
+              <a:rPr sz="2470" b="1" i="0">
                 <a:solidFill>
                   <a:srgbClr val="1A1A1A"/>
                 </a:solidFill>
-                <a:latin typeface="Century Schoolbook"/>
+                <a:latin typeface="Lexend"/>
               </a:rPr>
               <a:t>Answer it.</a:t>
             </a:r>
@@ -10763,11 +10946,11 @@
           <a:p>
             <a:pPr algn="l"/>
             <a:r>
-              <a:rPr sz="3400" b="1" i="0">
+              <a:rPr sz="3229" b="1" i="0">
                 <a:solidFill>
                   <a:srgbClr val="1A1A1A"/>
                 </a:solidFill>
-                <a:latin typeface="Century Schoolbook"/>
+                <a:latin typeface="Lexend"/>
               </a:rPr>
               <a:t>Whiteboards   ·   Question 7 of 9</a:t>
             </a:r>
@@ -10903,11 +11086,11 @@
           <a:p>
             <a:pPr algn="l"/>
             <a:r>
-              <a:rPr sz="1100" b="0" i="1">
+              <a:rPr sz="1040" b="0" i="0">
                 <a:solidFill>
                   <a:srgbClr val="6B6B6B"/>
                 </a:solidFill>
-                <a:latin typeface="Century Schoolbook"/>
+                <a:latin typeface="Lexend"/>
               </a:rPr>
               <a:t>Grade 7 Accelerated · Unit 4 · Lesson 1 — Adding and Subtracting in Scientific Notation</a:t>
             </a:r>
@@ -10938,11 +11121,11 @@
           <a:p>
             <a:pPr algn="r"/>
             <a:r>
-              <a:rPr sz="1100" b="0" i="0">
+              <a:rPr sz="1040" b="0" i="0">
                 <a:solidFill>
                   <a:srgbClr val="6B6B6B"/>
                 </a:solidFill>
-                <a:latin typeface="Century Schoolbook"/>
+                <a:latin typeface="Lexend"/>
               </a:rPr>
               <a:t>28</a:t>
             </a:r>
@@ -10951,7 +11134,7 @@
       </p:sp>
       <p:pic>
         <p:nvPicPr>
-          <p:cNvPr id="8" name="Picture 7" descr="0150b4a7c88f61cf.png"/>
+          <p:cNvPr id="8" name="Picture 7" descr="95877dd6e3ac64af.png"/>
           <p:cNvPicPr>
             <a:picLocks noChangeAspect="1"/>
           </p:cNvPicPr>
@@ -10965,8 +11148,8 @@
         </p:blipFill>
         <p:spPr>
           <a:xfrm>
-            <a:off x="3976115" y="2104643"/>
-            <a:ext cx="4209288" cy="408432"/>
+            <a:off x="4024883" y="2103120"/>
+            <a:ext cx="4111752" cy="411480"/>
           </a:xfrm>
           <a:prstGeom prst="rect">
             <a:avLst/>
@@ -10976,6 +11159,113 @@
       <p:sp>
         <p:nvSpPr>
           <p:cNvPr id="9" name="TextBox 8"/>
+          <p:cNvSpPr txBox="1"/>
+          <p:nvPr/>
+        </p:nvSpPr>
+        <p:spPr>
+          <a:xfrm>
+            <a:off x="3119489" y="2839212"/>
+            <a:ext cx="3154956" cy="457200"/>
+          </a:xfrm>
+          <a:prstGeom prst="rect">
+            <a:avLst/>
+          </a:prstGeom>
+          <a:noFill/>
+        </p:spPr>
+        <p:txBody>
+          <a:bodyPr wrap="none" lIns="45720" rIns="45720" tIns="18288" bIns="18288" anchor="ctr">
+            <a:noAutofit/>
+          </a:bodyPr>
+          <a:lstStyle/>
+          <a:p>
+            <a:pPr algn="l"/>
+            <a:r>
+              <a:rPr sz="2330" b="0" i="0">
+                <a:solidFill>
+                  <a:srgbClr val="1A1A1A"/>
+                </a:solidFill>
+                <a:latin typeface="Lexend"/>
+              </a:rPr>
+              <a:t>Match the powers:  </a:t>
+            </a:r>
+          </a:p>
+        </p:txBody>
+      </p:sp>
+      <p:pic>
+        <p:nvPicPr>
+          <p:cNvPr id="10" name="Picture 9" descr="2c3b2befdb898d6e.png"/>
+          <p:cNvPicPr>
+            <a:picLocks noChangeAspect="1"/>
+          </p:cNvPicPr>
+          <p:nvPr/>
+        </p:nvPicPr>
+        <p:blipFill>
+          <a:blip r:embed="rId3"/>
+          <a:stretch>
+            <a:fillRect/>
+          </a:stretch>
+        </p:blipFill>
+        <p:spPr>
+          <a:xfrm>
+            <a:off x="6137286" y="2936748"/>
+            <a:ext cx="2904744" cy="262128"/>
+          </a:xfrm>
+          <a:prstGeom prst="rect">
+            <a:avLst/>
+          </a:prstGeom>
+        </p:spPr>
+      </p:pic>
+      <p:pic>
+        <p:nvPicPr>
+          <p:cNvPr id="11" name="Picture 10" descr="40578aa67f396b1b.png"/>
+          <p:cNvPicPr>
+            <a:picLocks noChangeAspect="1"/>
+          </p:cNvPicPr>
+          <p:nvPr/>
+        </p:nvPicPr>
+        <p:blipFill>
+          <a:blip r:embed="rId4"/>
+          <a:stretch>
+            <a:fillRect/>
+          </a:stretch>
+        </p:blipFill>
+        <p:spPr>
+          <a:xfrm>
+            <a:off x="3174353" y="3464052"/>
+            <a:ext cx="2066543" cy="213360"/>
+          </a:xfrm>
+          <a:prstGeom prst="rect">
+            <a:avLst/>
+          </a:prstGeom>
+        </p:spPr>
+      </p:pic>
+      <p:pic>
+        <p:nvPicPr>
+          <p:cNvPr id="12" name="Picture 11" descr="859794e45c118a30.png"/>
+          <p:cNvPicPr>
+            <a:picLocks noChangeAspect="1"/>
+          </p:cNvPicPr>
+          <p:nvPr/>
+        </p:nvPicPr>
+        <p:blipFill>
+          <a:blip r:embed="rId5"/>
+          <a:stretch>
+            <a:fillRect/>
+          </a:stretch>
+        </p:blipFill>
+        <p:spPr>
+          <a:xfrm>
+            <a:off x="3174353" y="3942588"/>
+            <a:ext cx="1331976" cy="262128"/>
+          </a:xfrm>
+          <a:prstGeom prst="rect">
+            <a:avLst/>
+          </a:prstGeom>
+        </p:spPr>
+      </p:pic>
+      <p:sp>
+        <p:nvSpPr>
+          <p:cNvPr id="13" name="TextBox 12"/>
           <p:cNvSpPr txBox="1"/>
           <p:nvPr/>
         </p:nvSpPr>
@@ -10997,20 +11287,20 @@
           <a:p>
             <a:pPr algn="ctr"/>
             <a:r>
-              <a:rPr sz="3200" b="1" i="0">
+              <a:rPr sz="3040" b="1" i="0">
                 <a:solidFill>
                   <a:srgbClr val="9E1B32"/>
                 </a:solidFill>
-                <a:latin typeface="Century Schoolbook"/>
+                <a:latin typeface="Lexend"/>
               </a:rPr>
               <a:t>Answer:   7.16 × 10</a:t>
             </a:r>
             <a:r>
-              <a:rPr sz="3200" b="1" i="0" baseline="30000">
+              <a:rPr sz="3040" b="1" i="0" baseline="30000">
                 <a:solidFill>
                   <a:srgbClr val="9E1B32"/>
                 </a:solidFill>
-                <a:latin typeface="Century Schoolbook"/>
+                <a:latin typeface="Lexend"/>
               </a:rPr>
               <a:t>-2</a:t>
             </a:r>
@@ -11059,11 +11349,11 @@
           <a:p>
             <a:pPr algn="l"/>
             <a:r>
-              <a:rPr sz="3400" b="1" i="0">
+              <a:rPr sz="3229" b="1" i="0">
                 <a:solidFill>
                   <a:srgbClr val="1A1A1A"/>
                 </a:solidFill>
-                <a:latin typeface="Century Schoolbook"/>
+                <a:latin typeface="Lexend"/>
               </a:rPr>
               <a:t>Whiteboards   ·   Question 8 of 9</a:t>
             </a:r>
@@ -11199,11 +11489,11 @@
           <a:p>
             <a:pPr algn="l"/>
             <a:r>
-              <a:rPr sz="1100" b="0" i="1">
+              <a:rPr sz="1040" b="0" i="0">
                 <a:solidFill>
                   <a:srgbClr val="6B6B6B"/>
                 </a:solidFill>
-                <a:latin typeface="Century Schoolbook"/>
+                <a:latin typeface="Lexend"/>
               </a:rPr>
               <a:t>Grade 7 Accelerated · Unit 4 · Lesson 1 — Adding and Subtracting in Scientific Notation</a:t>
             </a:r>
@@ -11234,11 +11524,11 @@
           <a:p>
             <a:pPr algn="r"/>
             <a:r>
-              <a:rPr sz="1100" b="0" i="0">
+              <a:rPr sz="1040" b="0" i="0">
                 <a:solidFill>
                   <a:srgbClr val="6B6B6B"/>
                 </a:solidFill>
-                <a:latin typeface="Century Schoolbook"/>
+                <a:latin typeface="Lexend"/>
               </a:rPr>
               <a:t>29</a:t>
             </a:r>
@@ -11247,7 +11537,7 @@
       </p:sp>
       <p:pic>
         <p:nvPicPr>
-          <p:cNvPr id="8" name="Picture 7" descr="cbd13eb8faf9a4ef.png"/>
+          <p:cNvPr id="8" name="Picture 7" descr="5f6d6560049ba77b.png"/>
           <p:cNvPicPr>
             <a:picLocks noChangeAspect="1"/>
           </p:cNvPicPr>
@@ -11261,8 +11551,8 @@
         </p:blipFill>
         <p:spPr>
           <a:xfrm>
-            <a:off x="3302507" y="2194560"/>
-            <a:ext cx="5556504" cy="414528"/>
+            <a:off x="3320795" y="2196083"/>
+            <a:ext cx="5519928" cy="408432"/>
           </a:xfrm>
           <a:prstGeom prst="rect">
             <a:avLst/>
@@ -11277,8 +11567,8 @@
         </p:nvSpPr>
         <p:spPr>
           <a:xfrm>
-            <a:off x="4117100" y="2860547"/>
-            <a:ext cx="3546626" cy="457200"/>
+            <a:off x="4134140" y="2857500"/>
+            <a:ext cx="3517441" cy="457200"/>
           </a:xfrm>
           <a:prstGeom prst="rect">
             <a:avLst/>
@@ -11293,11 +11583,11 @@
           <a:p>
             <a:pPr algn="l"/>
             <a:r>
-              <a:rPr sz="2600" b="0" i="0">
+              <a:rPr sz="2470" b="0" i="0">
                 <a:solidFill>
                   <a:srgbClr val="1A1A1A"/>
                 </a:solidFill>
-                <a:latin typeface="Century Schoolbook"/>
+                <a:latin typeface="Lexend"/>
               </a:rPr>
               <a:t>What is the value of </a:t>
             </a:r>
@@ -11306,7 +11596,7 @@
       </p:sp>
       <p:pic>
         <p:nvPicPr>
-          <p:cNvPr id="10" name="Picture 9" descr="ce9b607ea85ce740.png"/>
+          <p:cNvPr id="10" name="Picture 9" descr="f14fce7cf077cd07.png"/>
           <p:cNvPicPr>
             <a:picLocks noChangeAspect="1"/>
           </p:cNvPicPr>
@@ -11320,8 +11610,8 @@
         </p:blipFill>
         <p:spPr>
           <a:xfrm>
-            <a:off x="7526567" y="2997707"/>
-            <a:ext cx="192024" cy="182880"/>
+            <a:off x="7514421" y="2982468"/>
+            <a:ext cx="176784" cy="207264"/>
           </a:xfrm>
           <a:prstGeom prst="rect">
             <a:avLst/>
@@ -11336,8 +11626,8 @@
         </p:nvSpPr>
         <p:spPr>
           <a:xfrm>
-            <a:off x="7718591" y="2860547"/>
-            <a:ext cx="462987" cy="457200"/>
+            <a:off x="7691205" y="2857500"/>
+            <a:ext cx="473333" cy="457200"/>
           </a:xfrm>
           <a:prstGeom prst="rect">
             <a:avLst/>
@@ -11352,11 +11642,11 @@
           <a:p>
             <a:pPr algn="l"/>
             <a:r>
-              <a:rPr sz="2600" b="0" i="0">
+              <a:rPr sz="2470" b="0" i="0">
                 <a:solidFill>
                   <a:srgbClr val="1A1A1A"/>
                 </a:solidFill>
-                <a:latin typeface="Century Schoolbook"/>
+                <a:latin typeface="Lexend"/>
               </a:rPr>
               <a:t> ?</a:t>
             </a:r>
@@ -11387,11 +11677,11 @@
           <a:p>
             <a:pPr algn="ctr"/>
             <a:r>
-              <a:rPr sz="2600" b="1" i="0">
+              <a:rPr sz="2470" b="1" i="0">
                 <a:solidFill>
                   <a:srgbClr val="1A1A1A"/>
                 </a:solidFill>
-                <a:latin typeface="Century Schoolbook"/>
+                <a:latin typeface="Lexend"/>
               </a:rPr>
               <a:t>Answer it.</a:t>
             </a:r>
@@ -11440,11 +11730,11 @@
           <a:p>
             <a:pPr algn="l"/>
             <a:r>
-              <a:rPr sz="3600" b="1" i="0">
+              <a:rPr sz="3420" b="1" i="0">
                 <a:solidFill>
                   <a:srgbClr val="1A1A1A"/>
                 </a:solidFill>
-                <a:latin typeface="Century Schoolbook"/>
+                <a:latin typeface="Lexend"/>
               </a:rPr>
               <a:t>Warm-Up</a:t>
             </a:r>
@@ -11580,11 +11870,11 @@
           <a:p>
             <a:pPr algn="l"/>
             <a:r>
-              <a:rPr sz="1100" b="0" i="1">
+              <a:rPr sz="1040" b="0" i="0">
                 <a:solidFill>
                   <a:srgbClr val="6B6B6B"/>
                 </a:solidFill>
-                <a:latin typeface="Century Schoolbook"/>
+                <a:latin typeface="Lexend"/>
               </a:rPr>
               <a:t>Grade 7 Accelerated · Unit 4 · Lesson 1 — Adding and Subtracting in Scientific Notation</a:t>
             </a:r>
@@ -11615,11 +11905,11 @@
           <a:p>
             <a:pPr algn="r"/>
             <a:r>
-              <a:rPr sz="1100" b="0" i="0">
+              <a:rPr sz="1040" b="0" i="0">
                 <a:solidFill>
                   <a:srgbClr val="6B6B6B"/>
                 </a:solidFill>
-                <a:latin typeface="Century Schoolbook"/>
+                <a:latin typeface="Lexend"/>
               </a:rPr>
               <a:t>3</a:t>
             </a:r>
@@ -11635,7 +11925,7 @@
         <p:spPr>
           <a:xfrm>
             <a:off x="1874519" y="1440180"/>
-            <a:ext cx="5991504" cy="457200"/>
+            <a:ext cx="5853214" cy="457200"/>
           </a:xfrm>
           <a:prstGeom prst="rect">
             <a:avLst/>
@@ -11650,11 +11940,11 @@
           <a:p>
             <a:pPr algn="l"/>
             <a:r>
-              <a:rPr sz="2300" b="0" i="0">
+              <a:rPr sz="2180" b="0" i="0">
                 <a:solidFill>
                   <a:srgbClr val="1A1A1A"/>
                 </a:solidFill>
-                <a:latin typeface="Century Schoolbook"/>
+                <a:latin typeface="Lexend"/>
               </a:rPr>
               <a:t>1.   Write  0.00062  in scientific notation.</a:t>
             </a:r>
@@ -11669,8 +11959,8 @@
         </p:nvSpPr>
         <p:spPr>
           <a:xfrm>
-            <a:off x="8277504" y="1440180"/>
-            <a:ext cx="1546152" cy="457200"/>
+            <a:off x="8139214" y="1440180"/>
+            <a:ext cx="1617440" cy="457200"/>
           </a:xfrm>
           <a:prstGeom prst="rect">
             <a:avLst/>
@@ -11685,20 +11975,20 @@
           <a:p>
             <a:pPr algn="l"/>
             <a:r>
-              <a:rPr sz="2300" b="1" i="0">
+              <a:rPr sz="2180" b="1" i="0">
                 <a:solidFill>
                   <a:srgbClr val="9E1B32"/>
                 </a:solidFill>
-                <a:latin typeface="Century Schoolbook"/>
+                <a:latin typeface="Lexend"/>
               </a:rPr>
               <a:t>6.2 × 10</a:t>
             </a:r>
             <a:r>
-              <a:rPr sz="2300" b="1" i="0" baseline="30000">
+              <a:rPr sz="2180" b="1" i="0" baseline="30000">
                 <a:solidFill>
                   <a:srgbClr val="9E1B32"/>
                 </a:solidFill>
-                <a:latin typeface="Century Schoolbook"/>
+                <a:latin typeface="Lexend"/>
               </a:rPr>
               <a:t>-4</a:t>
             </a:r>
@@ -11714,7 +12004,7 @@
         <p:spPr>
           <a:xfrm>
             <a:off x="1874519" y="2052828"/>
-            <a:ext cx="4573104" cy="457200"/>
+            <a:ext cx="4470214" cy="457200"/>
           </a:xfrm>
           <a:prstGeom prst="rect">
             <a:avLst/>
@@ -11729,11 +12019,11 @@
           <a:p>
             <a:pPr algn="l"/>
             <a:r>
-              <a:rPr sz="2300" b="0" i="0">
+              <a:rPr sz="2180" b="0" i="0">
                 <a:solidFill>
                   <a:srgbClr val="1A1A1A"/>
                 </a:solidFill>
-                <a:latin typeface="Century Schoolbook"/>
+                <a:latin typeface="Lexend"/>
               </a:rPr>
               <a:t>2.   How many times larger is  </a:t>
             </a:r>
@@ -11742,7 +12032,7 @@
       </p:sp>
       <p:pic>
         <p:nvPicPr>
-          <p:cNvPr id="11" name="Picture 10" descr="6e4449454b7e3ea6.png"/>
+          <p:cNvPr id="11" name="Picture 10" descr="322d90d803ad0d3a.png"/>
           <p:cNvPicPr>
             <a:picLocks noChangeAspect="1"/>
           </p:cNvPicPr>
@@ -11756,8 +12046,8 @@
         </p:blipFill>
         <p:spPr>
           <a:xfrm>
-            <a:off x="6310464" y="2141220"/>
-            <a:ext cx="890016" cy="280416"/>
+            <a:off x="6207574" y="2145792"/>
+            <a:ext cx="896112" cy="271272"/>
           </a:xfrm>
           <a:prstGeom prst="rect">
             <a:avLst/>
@@ -11772,8 +12062,8 @@
         </p:nvSpPr>
         <p:spPr>
           <a:xfrm>
-            <a:off x="7200480" y="2052828"/>
-            <a:ext cx="1224116" cy="457200"/>
+            <a:off x="7103686" y="2052828"/>
+            <a:ext cx="1188962" cy="457200"/>
           </a:xfrm>
           <a:prstGeom prst="rect">
             <a:avLst/>
@@ -11788,11 +12078,11 @@
           <a:p>
             <a:pPr algn="l"/>
             <a:r>
-              <a:rPr sz="2300" b="0" i="0">
+              <a:rPr sz="2180" b="0" i="0">
                 <a:solidFill>
                   <a:srgbClr val="1A1A1A"/>
                 </a:solidFill>
-                <a:latin typeface="Century Schoolbook"/>
+                <a:latin typeface="Lexend"/>
               </a:rPr>
               <a:t>  than  </a:t>
             </a:r>
@@ -11801,7 +12091,7 @@
       </p:sp>
       <p:pic>
         <p:nvPicPr>
-          <p:cNvPr id="13" name="Picture 12" descr="7da0da260d230a62.png"/>
+          <p:cNvPr id="13" name="Picture 12" descr="91469e0de639e792.png"/>
           <p:cNvPicPr>
             <a:picLocks noChangeAspect="1"/>
           </p:cNvPicPr>
@@ -11815,8 +12105,8 @@
         </p:blipFill>
         <p:spPr>
           <a:xfrm>
-            <a:off x="8287436" y="2138172"/>
-            <a:ext cx="905256" cy="286512"/>
+            <a:off x="8155489" y="2145792"/>
+            <a:ext cx="899160" cy="271272"/>
           </a:xfrm>
           <a:prstGeom prst="rect">
             <a:avLst/>
@@ -11831,8 +12121,8 @@
         </p:nvSpPr>
         <p:spPr>
           <a:xfrm>
-            <a:off x="9192692" y="2052828"/>
-            <a:ext cx="433854" cy="457200"/>
+            <a:off x="9054649" y="2052828"/>
+            <a:ext cx="443010" cy="457200"/>
           </a:xfrm>
           <a:prstGeom prst="rect">
             <a:avLst/>
@@ -11847,11 +12137,11 @@
           <a:p>
             <a:pPr algn="l"/>
             <a:r>
-              <a:rPr sz="2300" b="0" i="0">
+              <a:rPr sz="2180" b="0" i="0">
                 <a:solidFill>
                   <a:srgbClr val="1A1A1A"/>
                 </a:solidFill>
-                <a:latin typeface="Century Schoolbook"/>
+                <a:latin typeface="Lexend"/>
               </a:rPr>
               <a:t> ?</a:t>
             </a:r>
@@ -11866,8 +12156,8 @@
         </p:nvSpPr>
         <p:spPr>
           <a:xfrm>
-            <a:off x="10038027" y="2052828"/>
-            <a:ext cx="1007357" cy="457200"/>
+            <a:off x="9909139" y="2052828"/>
+            <a:ext cx="1085052" cy="457200"/>
           </a:xfrm>
           <a:prstGeom prst="rect">
             <a:avLst/>
@@ -11882,11 +12172,11 @@
           <a:p>
             <a:pPr algn="l"/>
             <a:r>
-              <a:rPr sz="2300" b="1" i="0">
+              <a:rPr sz="2180" b="1" i="0">
                 <a:solidFill>
                   <a:srgbClr val="9E1B32"/>
                 </a:solidFill>
-                <a:latin typeface="Century Schoolbook"/>
+                <a:latin typeface="Lexend"/>
               </a:rPr>
               <a:t>4,000</a:t>
             </a:r>
@@ -11902,7 +12192,7 @@
         <p:spPr>
           <a:xfrm>
             <a:off x="1874519" y="2665476"/>
-            <a:ext cx="3064939" cy="457200"/>
+            <a:ext cx="2930351" cy="457200"/>
           </a:xfrm>
           <a:prstGeom prst="rect">
             <a:avLst/>
@@ -11917,11 +12207,11 @@
           <a:p>
             <a:pPr algn="l"/>
             <a:r>
-              <a:rPr sz="2300" b="0" i="0">
+              <a:rPr sz="2180" b="0" i="0">
                 <a:solidFill>
                   <a:srgbClr val="1A1A1A"/>
                 </a:solidFill>
-                <a:latin typeface="Century Schoolbook"/>
+                <a:latin typeface="Lexend"/>
               </a:rPr>
               <a:t>3.   Find the value:  </a:t>
             </a:r>
@@ -11930,7 +12220,7 @@
       </p:sp>
       <p:pic>
         <p:nvPicPr>
-          <p:cNvPr id="17" name="Picture 16" descr="c100c4232230d0dc.png"/>
+          <p:cNvPr id="17" name="Picture 16" descr="f53f316f2160c0ab.png"/>
           <p:cNvPicPr>
             <a:picLocks noChangeAspect="1"/>
           </p:cNvPicPr>
@@ -11944,8 +12234,8 @@
         </p:blipFill>
         <p:spPr>
           <a:xfrm>
-            <a:off x="4802299" y="2689860"/>
-            <a:ext cx="853440" cy="408432"/>
+            <a:off x="4667711" y="2699004"/>
+            <a:ext cx="886968" cy="390144"/>
           </a:xfrm>
           <a:prstGeom prst="rect">
             <a:avLst/>
@@ -11960,8 +12250,8 @@
         </p:nvSpPr>
         <p:spPr>
           <a:xfrm>
-            <a:off x="6204379" y="2665476"/>
-            <a:ext cx="565792" cy="457200"/>
+            <a:off x="6103319" y="2665476"/>
+            <a:ext cx="536528" cy="457200"/>
           </a:xfrm>
           <a:prstGeom prst="rect">
             <a:avLst/>
@@ -11976,11 +12266,11 @@
           <a:p>
             <a:pPr algn="l"/>
             <a:r>
-              <a:rPr sz="2300" b="1" i="0">
+              <a:rPr sz="2180" b="1" i="0">
                 <a:solidFill>
                   <a:srgbClr val="9E1B32"/>
                 </a:solidFill>
-                <a:latin typeface="Century Schoolbook"/>
+                <a:latin typeface="Lexend"/>
               </a:rPr>
               <a:t>12</a:t>
             </a:r>
@@ -11996,7 +12286,7 @@
         <p:spPr>
           <a:xfrm>
             <a:off x="1874519" y="3278124"/>
-            <a:ext cx="2898925" cy="457200"/>
+            <a:ext cx="2773837" cy="457200"/>
           </a:xfrm>
           <a:prstGeom prst="rect">
             <a:avLst/>
@@ -12011,11 +12301,11 @@
           <a:p>
             <a:pPr algn="l"/>
             <a:r>
-              <a:rPr sz="2300" b="0" i="0">
+              <a:rPr sz="2180" b="0" i="0">
                 <a:solidFill>
                   <a:srgbClr val="1A1A1A"/>
                 </a:solidFill>
-                <a:latin typeface="Century Schoolbook"/>
+                <a:latin typeface="Lexend"/>
               </a:rPr>
               <a:t>4.   Find the sum:  </a:t>
             </a:r>
@@ -12024,7 +12314,7 @@
       </p:sp>
       <p:pic>
         <p:nvPicPr>
-          <p:cNvPr id="20" name="Picture 19" descr="bdc1cddc07790a72.png"/>
+          <p:cNvPr id="20" name="Picture 19" descr="bd88d4ecf7738e5d.png"/>
           <p:cNvPicPr>
             <a:picLocks noChangeAspect="1"/>
           </p:cNvPicPr>
@@ -12038,8 +12328,8 @@
         </p:blipFill>
         <p:spPr>
           <a:xfrm>
-            <a:off x="4636285" y="3386328"/>
-            <a:ext cx="1298448" cy="240791"/>
+            <a:off x="4511197" y="3393948"/>
+            <a:ext cx="1307592" cy="225552"/>
           </a:xfrm>
           <a:prstGeom prst="rect">
             <a:avLst/>
@@ -12054,8 +12344,8 @@
         </p:nvSpPr>
         <p:spPr>
           <a:xfrm>
-            <a:off x="6483373" y="3278124"/>
-            <a:ext cx="821886" cy="457200"/>
+            <a:off x="6367429" y="3278124"/>
+            <a:ext cx="790908" cy="457200"/>
           </a:xfrm>
           <a:prstGeom prst="rect">
             <a:avLst/>
@@ -12070,11 +12360,11 @@
           <a:p>
             <a:pPr algn="l"/>
             <a:r>
-              <a:rPr sz="2300" b="1" i="0">
+              <a:rPr sz="2180" b="1" i="0">
                 <a:solidFill>
                   <a:srgbClr val="9E1B32"/>
                 </a:solidFill>
-                <a:latin typeface="Century Schoolbook"/>
+                <a:latin typeface="Lexend"/>
               </a:rPr>
               <a:t>1.69</a:t>
             </a:r>
@@ -12123,11 +12413,11 @@
           <a:p>
             <a:pPr algn="l"/>
             <a:r>
-              <a:rPr sz="3400" b="1" i="0">
+              <a:rPr sz="3229" b="1" i="0">
                 <a:solidFill>
                   <a:srgbClr val="1A1A1A"/>
                 </a:solidFill>
-                <a:latin typeface="Century Schoolbook"/>
+                <a:latin typeface="Lexend"/>
               </a:rPr>
               <a:t>Whiteboards   ·   Question 8 of 9</a:t>
             </a:r>
@@ -12263,11 +12553,11 @@
           <a:p>
             <a:pPr algn="l"/>
             <a:r>
-              <a:rPr sz="1100" b="0" i="1">
+              <a:rPr sz="1040" b="0" i="0">
                 <a:solidFill>
                   <a:srgbClr val="6B6B6B"/>
                 </a:solidFill>
-                <a:latin typeface="Century Schoolbook"/>
+                <a:latin typeface="Lexend"/>
               </a:rPr>
               <a:t>Grade 7 Accelerated · Unit 4 · Lesson 1 — Adding and Subtracting in Scientific Notation</a:t>
             </a:r>
@@ -12298,11 +12588,11 @@
           <a:p>
             <a:pPr algn="r"/>
             <a:r>
-              <a:rPr sz="1100" b="0" i="0">
+              <a:rPr sz="1040" b="0" i="0">
                 <a:solidFill>
                   <a:srgbClr val="6B6B6B"/>
                 </a:solidFill>
-                <a:latin typeface="Century Schoolbook"/>
+                <a:latin typeface="Lexend"/>
               </a:rPr>
               <a:t>30</a:t>
             </a:r>
@@ -12311,7 +12601,7 @@
       </p:sp>
       <p:pic>
         <p:nvPicPr>
-          <p:cNvPr id="8" name="Picture 7" descr="98fdf47dd4ead5bf.png"/>
+          <p:cNvPr id="8" name="Picture 7" descr="a7b6204384889c5e.png"/>
           <p:cNvPicPr>
             <a:picLocks noChangeAspect="1"/>
           </p:cNvPicPr>
@@ -12325,8 +12615,8 @@
         </p:blipFill>
         <p:spPr>
           <a:xfrm>
-            <a:off x="3300984" y="2103120"/>
-            <a:ext cx="5559552" cy="411480"/>
+            <a:off x="3319272" y="2103120"/>
+            <a:ext cx="5522976" cy="414528"/>
           </a:xfrm>
           <a:prstGeom prst="rect">
             <a:avLst/>
@@ -12341,8 +12631,8 @@
         </p:nvSpPr>
         <p:spPr>
           <a:xfrm>
-            <a:off x="4117100" y="2766060"/>
-            <a:ext cx="3546626" cy="457200"/>
+            <a:off x="4134140" y="2769107"/>
+            <a:ext cx="3517441" cy="457200"/>
           </a:xfrm>
           <a:prstGeom prst="rect">
             <a:avLst/>
@@ -12357,11 +12647,11 @@
           <a:p>
             <a:pPr algn="l"/>
             <a:r>
-              <a:rPr sz="2600" b="0" i="0">
+              <a:rPr sz="2470" b="0" i="0">
                 <a:solidFill>
                   <a:srgbClr val="1A1A1A"/>
                 </a:solidFill>
-                <a:latin typeface="Century Schoolbook"/>
+                <a:latin typeface="Lexend"/>
               </a:rPr>
               <a:t>What is the value of </a:t>
             </a:r>
@@ -12370,7 +12660,7 @@
       </p:sp>
       <p:pic>
         <p:nvPicPr>
-          <p:cNvPr id="10" name="Picture 9" descr="ce9b607ea85ce740.png"/>
+          <p:cNvPr id="10" name="Picture 9" descr="f14fce7cf077cd07.png"/>
           <p:cNvPicPr>
             <a:picLocks noChangeAspect="1"/>
           </p:cNvPicPr>
@@ -12384,8 +12674,8 @@
         </p:blipFill>
         <p:spPr>
           <a:xfrm>
-            <a:off x="7526567" y="2903220"/>
-            <a:ext cx="192024" cy="182880"/>
+            <a:off x="7514421" y="2894075"/>
+            <a:ext cx="176784" cy="207264"/>
           </a:xfrm>
           <a:prstGeom prst="rect">
             <a:avLst/>
@@ -12400,8 +12690,8 @@
         </p:nvSpPr>
         <p:spPr>
           <a:xfrm>
-            <a:off x="7718591" y="2766060"/>
-            <a:ext cx="462987" cy="457200"/>
+            <a:off x="7691205" y="2769107"/>
+            <a:ext cx="473333" cy="457200"/>
           </a:xfrm>
           <a:prstGeom prst="rect">
             <a:avLst/>
@@ -12416,26 +12706,98 @@
           <a:p>
             <a:pPr algn="l"/>
             <a:r>
-              <a:rPr sz="2600" b="0" i="0">
+              <a:rPr sz="2470" b="0" i="0">
                 <a:solidFill>
                   <a:srgbClr val="1A1A1A"/>
                 </a:solidFill>
-                <a:latin typeface="Century Schoolbook"/>
+                <a:latin typeface="Lexend"/>
               </a:rPr>
               <a:t> ?</a:t>
             </a:r>
           </a:p>
         </p:txBody>
       </p:sp>
-      <p:sp>
-        <p:nvSpPr>
-          <p:cNvPr id="12" name="TextBox 11"/>
-          <p:cNvSpPr txBox="1"/>
-          <p:nvPr/>
-        </p:nvSpPr>
-        <p:spPr>
-          <a:xfrm>
-            <a:off x="777240" y="4663440"/>
+      <p:pic>
+        <p:nvPicPr>
+          <p:cNvPr id="12" name="Picture 11" descr="af0a0edef72ddd4a.png"/>
+          <p:cNvPicPr>
+            <a:picLocks noChangeAspect="1"/>
+          </p:cNvPicPr>
+          <p:nvPr/>
+        </p:nvPicPr>
+        <p:blipFill>
+          <a:blip r:embed="rId4"/>
+          <a:stretch>
+            <a:fillRect/>
+          </a:stretch>
+        </p:blipFill>
+        <p:spPr>
+          <a:xfrm>
+            <a:off x="4756403" y="3625595"/>
+            <a:ext cx="2761488" cy="262128"/>
+          </a:xfrm>
+          <a:prstGeom prst="rect">
+            <a:avLst/>
+          </a:prstGeom>
+        </p:spPr>
+      </p:pic>
+      <p:pic>
+        <p:nvPicPr>
+          <p:cNvPr id="13" name="Picture 12" descr="e0b2ab7a4c26bc04.png"/>
+          <p:cNvPicPr>
+            <a:picLocks noChangeAspect="1"/>
+          </p:cNvPicPr>
+          <p:nvPr/>
+        </p:nvPicPr>
+        <p:blipFill>
+          <a:blip r:embed="rId5"/>
+          <a:stretch>
+            <a:fillRect/>
+          </a:stretch>
+        </p:blipFill>
+        <p:spPr>
+          <a:xfrm>
+            <a:off x="4756403" y="4152899"/>
+            <a:ext cx="1694688" cy="213360"/>
+          </a:xfrm>
+          <a:prstGeom prst="rect">
+            <a:avLst/>
+          </a:prstGeom>
+        </p:spPr>
+      </p:pic>
+      <p:pic>
+        <p:nvPicPr>
+          <p:cNvPr id="14" name="Picture 13" descr="1dcdac54ad1451b5.png"/>
+          <p:cNvPicPr>
+            <a:picLocks noChangeAspect="1"/>
+          </p:cNvPicPr>
+          <p:nvPr/>
+        </p:nvPicPr>
+        <p:blipFill>
+          <a:blip r:embed="rId6"/>
+          <a:stretch>
+            <a:fillRect/>
+          </a:stretch>
+        </p:blipFill>
+        <p:spPr>
+          <a:xfrm>
+            <a:off x="4756403" y="4655819"/>
+            <a:ext cx="2353056" cy="213360"/>
+          </a:xfrm>
+          <a:prstGeom prst="rect">
+            <a:avLst/>
+          </a:prstGeom>
+        </p:spPr>
+      </p:pic>
+      <p:sp>
+        <p:nvSpPr>
+          <p:cNvPr id="15" name="TextBox 14"/>
+          <p:cNvSpPr txBox="1"/>
+          <p:nvPr/>
+        </p:nvSpPr>
+        <p:spPr>
+          <a:xfrm>
+            <a:off x="777240" y="5105400"/>
             <a:ext cx="10607040" cy="548640"/>
           </a:xfrm>
           <a:prstGeom prst="rect">
@@ -12451,11 +12813,11 @@
           <a:p>
             <a:pPr algn="ctr"/>
             <a:r>
-              <a:rPr sz="3200" b="1" i="0">
+              <a:rPr sz="3040" b="1" i="0">
                 <a:solidFill>
                   <a:srgbClr val="9E1B32"/>
                 </a:solidFill>
-                <a:latin typeface="Century Schoolbook"/>
+                <a:latin typeface="Lexend"/>
               </a:rPr>
               <a:t>Answer:   n = 5.7</a:t>
             </a:r>
@@ -12504,11 +12866,11 @@
           <a:p>
             <a:pPr algn="l"/>
             <a:r>
-              <a:rPr sz="3400" b="1" i="0">
+              <a:rPr sz="3229" b="1" i="0">
                 <a:solidFill>
                   <a:srgbClr val="1A1A1A"/>
                 </a:solidFill>
-                <a:latin typeface="Century Schoolbook"/>
+                <a:latin typeface="Lexend"/>
               </a:rPr>
               <a:t>Whiteboards   ·   Question 9 of 9</a:t>
             </a:r>
@@ -12644,11 +13006,11 @@
           <a:p>
             <a:pPr algn="l"/>
             <a:r>
-              <a:rPr sz="1100" b="0" i="1">
+              <a:rPr sz="1040" b="0" i="0">
                 <a:solidFill>
                   <a:srgbClr val="6B6B6B"/>
                 </a:solidFill>
-                <a:latin typeface="Century Schoolbook"/>
+                <a:latin typeface="Lexend"/>
               </a:rPr>
               <a:t>Grade 7 Accelerated · Unit 4 · Lesson 1 — Adding and Subtracting in Scientific Notation</a:t>
             </a:r>
@@ -12679,11 +13041,11 @@
           <a:p>
             <a:pPr algn="r"/>
             <a:r>
-              <a:rPr sz="1100" b="0" i="0">
+              <a:rPr sz="1040" b="0" i="0">
                 <a:solidFill>
                   <a:srgbClr val="6B6B6B"/>
                 </a:solidFill>
-                <a:latin typeface="Century Schoolbook"/>
+                <a:latin typeface="Lexend"/>
               </a:rPr>
               <a:t>31</a:t>
             </a:r>
@@ -12698,8 +13060,8 @@
         </p:nvSpPr>
         <p:spPr>
           <a:xfrm>
-            <a:off x="1973846" y="2173224"/>
-            <a:ext cx="2523462" cy="457200"/>
+            <a:off x="2043833" y="2171700"/>
+            <a:ext cx="2490283" cy="457200"/>
           </a:xfrm>
           <a:prstGeom prst="rect">
             <a:avLst/>
@@ -12714,11 +13076,11 @@
           <a:p>
             <a:pPr algn="l"/>
             <a:r>
-              <a:rPr sz="2600" b="0" i="0">
+              <a:rPr sz="2470" b="0" i="0">
                 <a:solidFill>
                   <a:srgbClr val="1A1A1A"/>
                 </a:solidFill>
-                <a:latin typeface="Century Schoolbook"/>
+                <a:latin typeface="Lexend"/>
               </a:rPr>
               <a:t>Devon writes  </a:t>
             </a:r>
@@ -12727,7 +13089,7 @@
       </p:sp>
       <p:pic>
         <p:nvPicPr>
-          <p:cNvPr id="9" name="Picture 8" descr="82e722a216f1ae2f.png"/>
+          <p:cNvPr id="9" name="Picture 8" descr="0ba8039e00841737.png"/>
           <p:cNvPicPr>
             <a:picLocks noChangeAspect="1"/>
           </p:cNvPicPr>
@@ -12741,8 +13103,8 @@
         </p:blipFill>
         <p:spPr>
           <a:xfrm>
-            <a:off x="4360149" y="2194560"/>
-            <a:ext cx="5657088" cy="414528"/>
+            <a:off x="4396956" y="2196083"/>
+            <a:ext cx="5571744" cy="408432"/>
           </a:xfrm>
           <a:prstGeom prst="rect">
             <a:avLst/>
@@ -12757,8 +13119,8 @@
         </p:nvSpPr>
         <p:spPr>
           <a:xfrm>
-            <a:off x="10017237" y="2173224"/>
-            <a:ext cx="307595" cy="457200"/>
+            <a:off x="9968700" y="2171700"/>
+            <a:ext cx="286146" cy="457200"/>
           </a:xfrm>
           <a:prstGeom prst="rect">
             <a:avLst/>
@@ -12773,11 +13135,11 @@
           <a:p>
             <a:pPr algn="l"/>
             <a:r>
-              <a:rPr sz="2600" b="0" i="0">
+              <a:rPr sz="2470" b="0" i="0">
                 <a:solidFill>
                   <a:srgbClr val="1A1A1A"/>
                 </a:solidFill>
-                <a:latin typeface="Century Schoolbook"/>
+                <a:latin typeface="Lexend"/>
               </a:rPr>
               <a:t>.</a:t>
             </a:r>
@@ -12792,7 +13154,7 @@
         </p:nvSpPr>
         <p:spPr>
           <a:xfrm>
-            <a:off x="777240" y="2883407"/>
+            <a:off x="777240" y="2880360"/>
             <a:ext cx="10607040" cy="465151"/>
           </a:xfrm>
           <a:prstGeom prst="rect">
@@ -12808,11 +13170,11 @@
           <a:p>
             <a:pPr algn="ctr"/>
             <a:r>
-              <a:rPr sz="2600" b="0" i="0">
+              <a:rPr sz="2470" b="0" i="0">
                 <a:solidFill>
                   <a:srgbClr val="1A1A1A"/>
                 </a:solidFill>
-                <a:latin typeface="Century Schoolbook"/>
+                <a:latin typeface="Lexend"/>
               </a:rPr>
               <a:t>Name the two mistakes he made, and give the correct sum.</a:t>
             </a:r>
@@ -12843,11 +13205,11 @@
           <a:p>
             <a:pPr algn="ctr"/>
             <a:r>
-              <a:rPr sz="2600" b="1" i="0">
+              <a:rPr sz="2470" b="1" i="0">
                 <a:solidFill>
                   <a:srgbClr val="1A1A1A"/>
                 </a:solidFill>
-                <a:latin typeface="Century Schoolbook"/>
+                <a:latin typeface="Lexend"/>
               </a:rPr>
               <a:t>Write your answer in sentences.</a:t>
             </a:r>
@@ -12896,11 +13258,11 @@
           <a:p>
             <a:pPr algn="l"/>
             <a:r>
-              <a:rPr sz="3400" b="1" i="0">
+              <a:rPr sz="3229" b="1" i="0">
                 <a:solidFill>
                   <a:srgbClr val="1A1A1A"/>
                 </a:solidFill>
-                <a:latin typeface="Century Schoolbook"/>
+                <a:latin typeface="Lexend"/>
               </a:rPr>
               <a:t>Whiteboards   ·   Question 9 of 9</a:t>
             </a:r>
@@ -13036,11 +13398,11 @@
           <a:p>
             <a:pPr algn="l"/>
             <a:r>
-              <a:rPr sz="1100" b="0" i="1">
+              <a:rPr sz="1040" b="0" i="0">
                 <a:solidFill>
                   <a:srgbClr val="6B6B6B"/>
                 </a:solidFill>
-                <a:latin typeface="Century Schoolbook"/>
+                <a:latin typeface="Lexend"/>
               </a:rPr>
               <a:t>Grade 7 Accelerated · Unit 4 · Lesson 1 — Adding and Subtracting in Scientific Notation</a:t>
             </a:r>
@@ -13071,11 +13433,11 @@
           <a:p>
             <a:pPr algn="r"/>
             <a:r>
-              <a:rPr sz="1100" b="0" i="0">
+              <a:rPr sz="1040" b="0" i="0">
                 <a:solidFill>
                   <a:srgbClr val="6B6B6B"/>
                 </a:solidFill>
-                <a:latin typeface="Century Schoolbook"/>
+                <a:latin typeface="Lexend"/>
               </a:rPr>
               <a:t>32</a:t>
             </a:r>
@@ -13090,8 +13452,8 @@
         </p:nvSpPr>
         <p:spPr>
           <a:xfrm>
-            <a:off x="1972322" y="2080260"/>
-            <a:ext cx="2523462" cy="457200"/>
+            <a:off x="2042309" y="2080260"/>
+            <a:ext cx="2490283" cy="457200"/>
           </a:xfrm>
           <a:prstGeom prst="rect">
             <a:avLst/>
@@ -13106,11 +13468,11 @@
           <a:p>
             <a:pPr algn="l"/>
             <a:r>
-              <a:rPr sz="2600" b="0" i="0">
+              <a:rPr sz="2470" b="0" i="0">
                 <a:solidFill>
                   <a:srgbClr val="1A1A1A"/>
                 </a:solidFill>
-                <a:latin typeface="Century Schoolbook"/>
+                <a:latin typeface="Lexend"/>
               </a:rPr>
               <a:t>Devon writes  </a:t>
             </a:r>
@@ -13119,7 +13481,7 @@
       </p:sp>
       <p:pic>
         <p:nvPicPr>
-          <p:cNvPr id="9" name="Picture 8" descr="6a5bd63b1555e627.png"/>
+          <p:cNvPr id="9" name="Picture 8" descr="f9b73d3410d61fed.png"/>
           <p:cNvPicPr>
             <a:picLocks noChangeAspect="1"/>
           </p:cNvPicPr>
@@ -13133,8 +13495,8 @@
         </p:blipFill>
         <p:spPr>
           <a:xfrm>
-            <a:off x="4358625" y="2103120"/>
-            <a:ext cx="5660136" cy="411480"/>
+            <a:off x="4395432" y="2104643"/>
+            <a:ext cx="5574792" cy="408432"/>
           </a:xfrm>
           <a:prstGeom prst="rect">
             <a:avLst/>
@@ -13149,8 +13511,8 @@
         </p:nvSpPr>
         <p:spPr>
           <a:xfrm>
-            <a:off x="10018761" y="2080260"/>
-            <a:ext cx="307595" cy="457200"/>
+            <a:off x="9970224" y="2080260"/>
+            <a:ext cx="286146" cy="457200"/>
           </a:xfrm>
           <a:prstGeom prst="rect">
             <a:avLst/>
@@ -13165,11 +13527,11 @@
           <a:p>
             <a:pPr algn="l"/>
             <a:r>
-              <a:rPr sz="2600" b="0" i="0">
+              <a:rPr sz="2470" b="0" i="0">
                 <a:solidFill>
                   <a:srgbClr val="1A1A1A"/>
                 </a:solidFill>
-                <a:latin typeface="Century Schoolbook"/>
+                <a:latin typeface="Lexend"/>
               </a:rPr>
               <a:t>.</a:t>
             </a:r>
@@ -13200,11 +13562,11 @@
           <a:p>
             <a:pPr algn="ctr"/>
             <a:r>
-              <a:rPr sz="2600" b="0" i="0">
+              <a:rPr sz="2470" b="0" i="0">
                 <a:solidFill>
                   <a:srgbClr val="1A1A1A"/>
                 </a:solidFill>
-                <a:latin typeface="Century Schoolbook"/>
+                <a:latin typeface="Lexend"/>
               </a:rPr>
               <a:t>Name the two mistakes he made, and give the correct sum.</a:t>
             </a:r>
@@ -13219,7 +13581,149 @@
         </p:nvSpPr>
         <p:spPr>
           <a:xfrm>
-            <a:off x="777240" y="4663440"/>
+            <a:off x="1754232" y="3414091"/>
+            <a:ext cx="8790215" cy="457200"/>
+          </a:xfrm>
+          <a:prstGeom prst="rect">
+            <a:avLst/>
+          </a:prstGeom>
+          <a:noFill/>
+        </p:spPr>
+        <p:txBody>
+          <a:bodyPr wrap="none" lIns="45720" rIns="45720" tIns="18288" bIns="18288" anchor="ctr">
+            <a:noAutofit/>
+          </a:bodyPr>
+          <a:lstStyle/>
+          <a:p>
+            <a:pPr algn="l"/>
+            <a:r>
+              <a:rPr sz="2330" b="0" i="0">
+                <a:solidFill>
+                  <a:srgbClr val="1A1A1A"/>
+                </a:solidFill>
+                <a:latin typeface="Lexend"/>
+              </a:rPr>
+              <a:t>The powers do not match, and exponents are not added.</a:t>
+            </a:r>
+          </a:p>
+        </p:txBody>
+      </p:sp>
+      <p:pic>
+        <p:nvPicPr>
+          <p:cNvPr id="13" name="Picture 12" descr="c61c1bacc44cde4f.png"/>
+          <p:cNvPicPr>
+            <a:picLocks noChangeAspect="1"/>
+          </p:cNvPicPr>
+          <p:nvPr/>
+        </p:nvPicPr>
+        <p:blipFill>
+          <a:blip r:embed="rId3"/>
+          <a:stretch>
+            <a:fillRect/>
+          </a:stretch>
+        </p:blipFill>
+        <p:spPr>
+          <a:xfrm>
+            <a:off x="1809096" y="4017595"/>
+            <a:ext cx="2743200" cy="256032"/>
+          </a:xfrm>
+          <a:prstGeom prst="rect">
+            <a:avLst/>
+          </a:prstGeom>
+        </p:spPr>
+      </p:pic>
+      <p:pic>
+        <p:nvPicPr>
+          <p:cNvPr id="14" name="Picture 13" descr="a4dc9a96cb3f319c.png"/>
+          <p:cNvPicPr>
+            <a:picLocks noChangeAspect="1"/>
+          </p:cNvPicPr>
+          <p:nvPr/>
+        </p:nvPicPr>
+        <p:blipFill>
+          <a:blip r:embed="rId4"/>
+          <a:stretch>
+            <a:fillRect/>
+          </a:stretch>
+        </p:blipFill>
+        <p:spPr>
+          <a:xfrm>
+            <a:off x="1809096" y="4541851"/>
+            <a:ext cx="2389632" cy="213360"/>
+          </a:xfrm>
+          <a:prstGeom prst="rect">
+            <a:avLst/>
+          </a:prstGeom>
+        </p:spPr>
+      </p:pic>
+      <p:sp>
+        <p:nvSpPr>
+          <p:cNvPr id="15" name="TextBox 14"/>
+          <p:cNvSpPr txBox="1"/>
+          <p:nvPr/>
+        </p:nvSpPr>
+        <p:spPr>
+          <a:xfrm>
+            <a:off x="4198728" y="4419931"/>
+            <a:ext cx="1163085" cy="457200"/>
+          </a:xfrm>
+          <a:prstGeom prst="rect">
+            <a:avLst/>
+          </a:prstGeom>
+          <a:noFill/>
+        </p:spPr>
+        <p:txBody>
+          <a:bodyPr wrap="none" lIns="45720" rIns="45720" tIns="18288" bIns="18288" anchor="ctr">
+            <a:noAutofit/>
+          </a:bodyPr>
+          <a:lstStyle/>
+          <a:p>
+            <a:pPr algn="l"/>
+            <a:r>
+              <a:rPr sz="2330" b="0" i="0">
+                <a:solidFill>
+                  <a:srgbClr val="1A1A1A"/>
+                </a:solidFill>
+                <a:latin typeface="Lexend"/>
+              </a:rPr>
+              <a:t>,   so   </a:t>
+            </a:r>
+          </a:p>
+        </p:txBody>
+      </p:sp>
+      <p:pic>
+        <p:nvPicPr>
+          <p:cNvPr id="16" name="Picture 15" descr="c561023f683a97ad.png"/>
+          <p:cNvPicPr>
+            <a:picLocks noChangeAspect="1"/>
+          </p:cNvPicPr>
+          <p:nvPr/>
+        </p:nvPicPr>
+        <p:blipFill>
+          <a:blip r:embed="rId5"/>
+          <a:stretch>
+            <a:fillRect/>
+          </a:stretch>
+        </p:blipFill>
+        <p:spPr>
+          <a:xfrm>
+            <a:off x="5224653" y="4520515"/>
+            <a:ext cx="1392936" cy="256032"/>
+          </a:xfrm>
+          <a:prstGeom prst="rect">
+            <a:avLst/>
+          </a:prstGeom>
+        </p:spPr>
+      </p:pic>
+      <p:sp>
+        <p:nvSpPr>
+          <p:cNvPr id="17" name="TextBox 16"/>
+          <p:cNvSpPr txBox="1"/>
+          <p:nvPr/>
+        </p:nvSpPr>
+        <p:spPr>
+          <a:xfrm>
+            <a:off x="777240" y="4991431"/>
             <a:ext cx="10607040" cy="548640"/>
           </a:xfrm>
           <a:prstGeom prst="rect">
@@ -13235,20 +13739,20 @@
           <a:p>
             <a:pPr algn="ctr"/>
             <a:r>
-              <a:rPr sz="3200" b="1" i="0">
+              <a:rPr sz="3040" b="1" i="0">
                 <a:solidFill>
                   <a:srgbClr val="9E1B32"/>
                 </a:solidFill>
-                <a:latin typeface="Century Schoolbook"/>
+                <a:latin typeface="Lexend"/>
               </a:rPr>
               <a:t>Answer:   3.413 × 10</a:t>
             </a:r>
             <a:r>
-              <a:rPr sz="3200" b="1" i="0" baseline="30000">
+              <a:rPr sz="3040" b="1" i="0" baseline="30000">
                 <a:solidFill>
                   <a:srgbClr val="9E1B32"/>
                 </a:solidFill>
-                <a:latin typeface="Century Schoolbook"/>
+                <a:latin typeface="Lexend"/>
               </a:rPr>
               <a:t>5</a:t>
             </a:r>
@@ -13297,11 +13801,11 @@
           <a:p>
             <a:pPr algn="l"/>
             <a:r>
-              <a:rPr sz="3600" b="1" i="0">
+              <a:rPr sz="3420" b="1" i="0">
                 <a:solidFill>
                   <a:srgbClr val="1A1A1A"/>
                 </a:solidFill>
-                <a:latin typeface="Century Schoolbook"/>
+                <a:latin typeface="Lexend"/>
               </a:rPr>
               <a:t>Independent Set</a:t>
             </a:r>
@@ -13437,11 +13941,11 @@
           <a:p>
             <a:pPr algn="l"/>
             <a:r>
-              <a:rPr sz="1100" b="0" i="1">
+              <a:rPr sz="1040" b="0" i="0">
                 <a:solidFill>
                   <a:srgbClr val="6B6B6B"/>
                 </a:solidFill>
-                <a:latin typeface="Century Schoolbook"/>
+                <a:latin typeface="Lexend"/>
               </a:rPr>
               <a:t>Grade 7 Accelerated · Unit 4 · Lesson 1 — Adding and Subtracting in Scientific Notation</a:t>
             </a:r>
@@ -13472,11 +13976,11 @@
           <a:p>
             <a:pPr algn="r"/>
             <a:r>
-              <a:rPr sz="1100" b="0" i="0">
+              <a:rPr sz="1040" b="0" i="0">
                 <a:solidFill>
                   <a:srgbClr val="6B6B6B"/>
                 </a:solidFill>
-                <a:latin typeface="Century Schoolbook"/>
+                <a:latin typeface="Lexend"/>
               </a:rPr>
               <a:t>33</a:t>
             </a:r>
@@ -13507,11 +14011,11 @@
           <a:p>
             <a:pPr algn="l"/>
             <a:r>
-              <a:rPr sz="2300" b="1" i="0">
+              <a:rPr sz="2180" b="1" i="0">
                 <a:solidFill>
                   <a:srgbClr val="0B5394"/>
                 </a:solidFill>
-                <a:latin typeface="Century Schoolbook"/>
+                <a:latin typeface="Lexend"/>
               </a:rPr>
               <a:t>1.</a:t>
             </a:r>
@@ -13520,7 +14024,7 @@
       </p:sp>
       <p:pic>
         <p:nvPicPr>
-          <p:cNvPr id="9" name="Picture 8" descr="e81dee220f24ebf8.png"/>
+          <p:cNvPr id="9" name="Picture 8" descr="8bb51b7cdaedcae0.png"/>
           <p:cNvPicPr>
             <a:picLocks noChangeAspect="1"/>
           </p:cNvPicPr>
@@ -13534,8 +14038,8 @@
         </p:blipFill>
         <p:spPr>
           <a:xfrm>
-            <a:off x="1627632" y="1556004"/>
-            <a:ext cx="3099816" cy="335280"/>
+            <a:off x="1627632" y="1557527"/>
+            <a:ext cx="3066288" cy="332232"/>
           </a:xfrm>
           <a:prstGeom prst="rect">
             <a:avLst/>
@@ -13566,11 +14070,11 @@
           <a:p>
             <a:pPr algn="l"/>
             <a:r>
-              <a:rPr sz="2300" b="1" i="0">
+              <a:rPr sz="2180" b="1" i="0">
                 <a:solidFill>
                   <a:srgbClr val="0B5394"/>
                 </a:solidFill>
-                <a:latin typeface="Century Schoolbook"/>
+                <a:latin typeface="Lexend"/>
               </a:rPr>
               <a:t>2.</a:t>
             </a:r>
@@ -13579,7 +14083,7 @@
       </p:sp>
       <p:pic>
         <p:nvPicPr>
-          <p:cNvPr id="11" name="Picture 10" descr="fa1915b6839e7f5c.png"/>
+          <p:cNvPr id="11" name="Picture 10" descr="6da4b5382fbcdf2b.png"/>
           <p:cNvPicPr>
             <a:picLocks noChangeAspect="1"/>
           </p:cNvPicPr>
@@ -13593,8 +14097,8 @@
         </p:blipFill>
         <p:spPr>
           <a:xfrm>
-            <a:off x="1627632" y="2150363"/>
-            <a:ext cx="3416808" cy="335280"/>
+            <a:off x="1627632" y="2153411"/>
+            <a:ext cx="3304032" cy="329184"/>
           </a:xfrm>
           <a:prstGeom prst="rect">
             <a:avLst/>
@@ -13625,11 +14129,11 @@
           <a:p>
             <a:pPr algn="l"/>
             <a:r>
-              <a:rPr sz="2300" b="1" i="0">
+              <a:rPr sz="2180" b="1" i="0">
                 <a:solidFill>
                   <a:srgbClr val="0B5394"/>
                 </a:solidFill>
-                <a:latin typeface="Century Schoolbook"/>
+                <a:latin typeface="Lexend"/>
               </a:rPr>
               <a:t>3.</a:t>
             </a:r>
@@ -13638,7 +14142,7 @@
       </p:sp>
       <p:pic>
         <p:nvPicPr>
-          <p:cNvPr id="13" name="Picture 12" descr="2f46d52c85ca19a4.png"/>
+          <p:cNvPr id="13" name="Picture 12" descr="95d8ded1b0db296e.png"/>
           <p:cNvPicPr>
             <a:picLocks noChangeAspect="1"/>
           </p:cNvPicPr>
@@ -13652,8 +14156,8 @@
         </p:blipFill>
         <p:spPr>
           <a:xfrm>
-            <a:off x="1627632" y="2744723"/>
-            <a:ext cx="3099816" cy="335280"/>
+            <a:off x="1627632" y="2747771"/>
+            <a:ext cx="3063240" cy="329184"/>
           </a:xfrm>
           <a:prstGeom prst="rect">
             <a:avLst/>
@@ -13684,11 +14188,11 @@
           <a:p>
             <a:pPr algn="l"/>
             <a:r>
-              <a:rPr sz="2300" b="1" i="0">
+              <a:rPr sz="2180" b="1" i="0">
                 <a:solidFill>
                   <a:srgbClr val="0B5394"/>
                 </a:solidFill>
-                <a:latin typeface="Century Schoolbook"/>
+                <a:latin typeface="Lexend"/>
               </a:rPr>
               <a:t>4.</a:t>
             </a:r>
@@ -13697,7 +14201,7 @@
       </p:sp>
       <p:pic>
         <p:nvPicPr>
-          <p:cNvPr id="15" name="Picture 14" descr="5dc73e64bd036969.png"/>
+          <p:cNvPr id="15" name="Picture 14" descr="0bd66daf20240d1b.png"/>
           <p:cNvPicPr>
             <a:picLocks noChangeAspect="1"/>
           </p:cNvPicPr>
@@ -13711,8 +14215,8 @@
         </p:blipFill>
         <p:spPr>
           <a:xfrm>
-            <a:off x="1627632" y="3339083"/>
-            <a:ext cx="3099816" cy="335280"/>
+            <a:off x="1627632" y="3340607"/>
+            <a:ext cx="3060192" cy="332232"/>
           </a:xfrm>
           <a:prstGeom prst="rect">
             <a:avLst/>
@@ -13743,11 +14247,11 @@
           <a:p>
             <a:pPr algn="l"/>
             <a:r>
-              <a:rPr sz="2300" b="1" i="0">
+              <a:rPr sz="2180" b="1" i="0">
                 <a:solidFill>
                   <a:srgbClr val="0B5394"/>
                 </a:solidFill>
-                <a:latin typeface="Century Schoolbook"/>
+                <a:latin typeface="Lexend"/>
               </a:rPr>
               <a:t>5.</a:t>
             </a:r>
@@ -13756,7 +14260,7 @@
       </p:sp>
       <p:pic>
         <p:nvPicPr>
-          <p:cNvPr id="17" name="Picture 16" descr="3a711642b46c3c51.png"/>
+          <p:cNvPr id="17" name="Picture 16" descr="ca328e3244585756.png"/>
           <p:cNvPicPr>
             <a:picLocks noChangeAspect="1"/>
           </p:cNvPicPr>
@@ -13771,7 +14275,7 @@
         <p:spPr>
           <a:xfrm>
             <a:off x="1627632" y="3933444"/>
-            <a:ext cx="3416808" cy="335280"/>
+            <a:ext cx="3374136" cy="335280"/>
           </a:xfrm>
           <a:prstGeom prst="rect">
             <a:avLst/>
@@ -13802,11 +14306,11 @@
           <a:p>
             <a:pPr algn="l"/>
             <a:r>
-              <a:rPr sz="2300" b="1" i="0">
+              <a:rPr sz="2180" b="1" i="0">
                 <a:solidFill>
                   <a:srgbClr val="0B5394"/>
                 </a:solidFill>
-                <a:latin typeface="Century Schoolbook"/>
+                <a:latin typeface="Lexend"/>
               </a:rPr>
               <a:t>6.</a:t>
             </a:r>
@@ -13822,7 +14326,7 @@
         <p:spPr>
           <a:xfrm>
             <a:off x="1554480" y="4466844"/>
-            <a:ext cx="967391" cy="457200"/>
+            <a:ext cx="913052" cy="457200"/>
           </a:xfrm>
           <a:prstGeom prst="rect">
             <a:avLst/>
@@ -13837,11 +14341,11 @@
           <a:p>
             <a:pPr algn="l"/>
             <a:r>
-              <a:rPr sz="2300" b="0" i="0">
+              <a:rPr sz="2180" b="0" i="0">
                 <a:solidFill>
                   <a:srgbClr val="1A1A1A"/>
                 </a:solidFill>
-                <a:latin typeface="Century Schoolbook"/>
+                <a:latin typeface="Lexend"/>
               </a:rPr>
               <a:t>Find </a:t>
             </a:r>
@@ -13850,7 +14354,7 @@
       </p:sp>
       <p:pic>
         <p:nvPicPr>
-          <p:cNvPr id="20" name="Picture 19" descr="0afe177f69dd5e06.png"/>
+          <p:cNvPr id="20" name="Picture 19" descr="6d78c2be12150bf5.png"/>
           <p:cNvPicPr>
             <a:picLocks noChangeAspect="1"/>
           </p:cNvPicPr>
@@ -13864,8 +14368,8 @@
         </p:blipFill>
         <p:spPr>
           <a:xfrm>
-            <a:off x="2384711" y="4620768"/>
-            <a:ext cx="155448" cy="149352"/>
+            <a:off x="2330372" y="4611624"/>
+            <a:ext cx="146304" cy="167640"/>
           </a:xfrm>
           <a:prstGeom prst="rect">
             <a:avLst/>
@@ -13880,8 +14384,8 @@
         </p:nvSpPr>
         <p:spPr>
           <a:xfrm>
-            <a:off x="2540159" y="4466844"/>
-            <a:ext cx="468561" cy="457200"/>
+            <a:off x="2476676" y="4466844"/>
+            <a:ext cx="442110" cy="457200"/>
           </a:xfrm>
           <a:prstGeom prst="rect">
             <a:avLst/>
@@ -13896,11 +14400,11 @@
           <a:p>
             <a:pPr algn="l"/>
             <a:r>
-              <a:rPr sz="2300" b="0" i="0">
+              <a:rPr sz="2180" b="0" i="0">
                 <a:solidFill>
                   <a:srgbClr val="1A1A1A"/>
                 </a:solidFill>
-                <a:latin typeface="Century Schoolbook"/>
+                <a:latin typeface="Lexend"/>
               </a:rPr>
               <a:t>.  </a:t>
             </a:r>
@@ -13909,7 +14413,7 @@
       </p:sp>
       <p:pic>
         <p:nvPicPr>
-          <p:cNvPr id="22" name="Picture 21" descr="ab2d69d2d2abe419.png"/>
+          <p:cNvPr id="22" name="Picture 21" descr="d4634cfd84477cb3.png"/>
           <p:cNvPicPr>
             <a:picLocks noChangeAspect="1"/>
           </p:cNvPicPr>
@@ -13923,8 +14427,8 @@
         </p:blipFill>
         <p:spPr>
           <a:xfrm>
-            <a:off x="2871561" y="4527804"/>
-            <a:ext cx="4639056" cy="335280"/>
+            <a:off x="2781626" y="4527804"/>
+            <a:ext cx="4541520" cy="335280"/>
           </a:xfrm>
           <a:prstGeom prst="rect">
             <a:avLst/>
@@ -13973,11 +14477,11 @@
           <a:p>
             <a:pPr algn="l"/>
             <a:r>
-              <a:rPr sz="3600" b="1" i="0">
+              <a:rPr sz="3420" b="1" i="0">
                 <a:solidFill>
                   <a:srgbClr val="1A1A1A"/>
                 </a:solidFill>
-                <a:latin typeface="Century Schoolbook"/>
+                <a:latin typeface="Lexend"/>
               </a:rPr>
               <a:t>IXL</a:t>
             </a:r>
@@ -14113,11 +14617,11 @@
           <a:p>
             <a:pPr algn="l"/>
             <a:r>
-              <a:rPr sz="1100" b="0" i="1">
+              <a:rPr sz="1040" b="0" i="0">
                 <a:solidFill>
                   <a:srgbClr val="6B6B6B"/>
                 </a:solidFill>
-                <a:latin typeface="Century Schoolbook"/>
+                <a:latin typeface="Lexend"/>
               </a:rPr>
               <a:t>Grade 7 Accelerated · Unit 4 · Lesson 1 — Adding and Subtracting in Scientific Notation</a:t>
             </a:r>
@@ -14148,11 +14652,11 @@
           <a:p>
             <a:pPr algn="r"/>
             <a:r>
-              <a:rPr sz="1100" b="0" i="0">
+              <a:rPr sz="1040" b="0" i="0">
                 <a:solidFill>
                   <a:srgbClr val="6B6B6B"/>
                 </a:solidFill>
-                <a:latin typeface="Century Schoolbook"/>
+                <a:latin typeface="Lexend"/>
               </a:rPr>
               <a:t>34</a:t>
             </a:r>
@@ -14183,11 +14687,11 @@
           <a:p>
             <a:pPr algn="l"/>
             <a:r>
-              <a:rPr sz="2100" b="1" i="0">
+              <a:rPr sz="1989" b="1" i="0">
                 <a:solidFill>
                   <a:srgbClr val="0B5394"/>
                 </a:solidFill>
-                <a:latin typeface="Century Schoolbook"/>
+                <a:latin typeface="Lexend"/>
               </a:rPr>
               <a:t>1.</a:t>
             </a:r>
@@ -14218,11 +14722,11 @@
           <a:p>
             <a:pPr algn="l"/>
             <a:r>
-              <a:rPr sz="2100" b="0" i="0">
+              <a:rPr sz="1989" b="0" i="0">
                 <a:solidFill>
                   <a:srgbClr val="1A1A1A"/>
                 </a:solidFill>
-                <a:latin typeface="Century Schoolbook"/>
+                <a:latin typeface="Lexend"/>
               </a:rPr>
               <a:t>Open IXL and start today's skills.</a:t>
             </a:r>
@@ -14253,11 +14757,11 @@
           <a:p>
             <a:pPr algn="l"/>
             <a:r>
-              <a:rPr sz="2100" b="1" i="0">
+              <a:rPr sz="1989" b="1" i="0">
                 <a:solidFill>
                   <a:srgbClr val="0B5394"/>
                 </a:solidFill>
-                <a:latin typeface="Century Schoolbook"/>
+                <a:latin typeface="Lexend"/>
               </a:rPr>
               <a:t>2.</a:t>
             </a:r>
@@ -14288,11 +14792,11 @@
           <a:p>
             <a:pPr algn="l"/>
             <a:r>
-              <a:rPr sz="2100" b="0" i="0">
+              <a:rPr sz="1989" b="0" i="0">
                 <a:solidFill>
                   <a:srgbClr val="1A1A1A"/>
                 </a:solidFill>
-                <a:latin typeface="Century Schoolbook"/>
+                <a:latin typeface="Lexend"/>
               </a:rPr>
               <a:t>Work on paper where the question needs work. The answer box does not show it.</a:t>
             </a:r>
@@ -14323,11 +14827,11 @@
           <a:p>
             <a:pPr algn="l"/>
             <a:r>
-              <a:rPr sz="2100" b="1" i="0">
+              <a:rPr sz="1989" b="1" i="0">
                 <a:solidFill>
                   <a:srgbClr val="0B5394"/>
                 </a:solidFill>
-                <a:latin typeface="Century Schoolbook"/>
+                <a:latin typeface="Lexend"/>
               </a:rPr>
               <a:t>3.</a:t>
             </a:r>
@@ -14358,11 +14862,11 @@
           <a:p>
             <a:pPr algn="l"/>
             <a:r>
-              <a:rPr sz="2100" b="0" i="0">
+              <a:rPr sz="1989" b="0" i="0">
                 <a:solidFill>
                   <a:srgbClr val="1A1A1A"/>
                 </a:solidFill>
-                <a:latin typeface="Century Schoolbook"/>
+                <a:latin typeface="Lexend"/>
               </a:rPr>
               <a:t>Every skill listed is required, to a SmartScore of 67. Due at the start of the next class.</a:t>
             </a:r>
@@ -14393,11 +14897,11 @@
           <a:p>
             <a:pPr algn="l"/>
             <a:r>
-              <a:rPr sz="2100" b="1" i="0">
+              <a:rPr sz="1989" b="1" i="0">
                 <a:solidFill>
                   <a:srgbClr val="1A1A1A"/>
                 </a:solidFill>
-                <a:latin typeface="Century Schoolbook"/>
+                <a:latin typeface="Lexend"/>
               </a:rPr>
               <a:t>Today's skills — all required</a:t>
             </a:r>
@@ -14428,11 +14932,11 @@
           <a:p>
             <a:pPr algn="l"/>
             <a:r>
-              <a:rPr sz="1900" b="0" i="0">
+              <a:rPr sz="1810" b="0" i="0">
                 <a:solidFill>
                   <a:srgbClr val="1A1A1A"/>
                 </a:solidFill>
-                <a:latin typeface="Century Schoolbook"/>
+                <a:latin typeface="Lexend"/>
               </a:rPr>
               <a:t>Add and subtract numbers written in scientific notation — HUR</a:t>
             </a:r>
@@ -14481,11 +14985,11 @@
           <a:p>
             <a:pPr algn="l"/>
             <a:r>
-              <a:rPr sz="3600" b="1" i="0">
+              <a:rPr sz="3420" b="1" i="0">
                 <a:solidFill>
                   <a:srgbClr val="1A1A1A"/>
                 </a:solidFill>
-                <a:latin typeface="Century Schoolbook"/>
+                <a:latin typeface="Lexend"/>
               </a:rPr>
               <a:t>Notes</a:t>
             </a:r>
@@ -14621,11 +15125,11 @@
           <a:p>
             <a:pPr algn="l"/>
             <a:r>
-              <a:rPr sz="1100" b="0" i="1">
+              <a:rPr sz="1040" b="0" i="0">
                 <a:solidFill>
                   <a:srgbClr val="6B6B6B"/>
                 </a:solidFill>
-                <a:latin typeface="Century Schoolbook"/>
+                <a:latin typeface="Lexend"/>
               </a:rPr>
               <a:t>Grade 7 Accelerated · Unit 4 · Lesson 1 — Adding and Subtracting in Scientific Notation</a:t>
             </a:r>
@@ -14656,11 +15160,11 @@
           <a:p>
             <a:pPr algn="r"/>
             <a:r>
-              <a:rPr sz="1100" b="0" i="0">
+              <a:rPr sz="1040" b="0" i="0">
                 <a:solidFill>
                   <a:srgbClr val="6B6B6B"/>
                 </a:solidFill>
-                <a:latin typeface="Century Schoolbook"/>
+                <a:latin typeface="Lexend"/>
               </a:rPr>
               <a:t>4</a:t>
             </a:r>
@@ -14691,11 +15195,11 @@
           <a:p>
             <a:pPr algn="l"/>
             <a:r>
-              <a:rPr sz="2500" b="1" i="0">
+              <a:rPr sz="2380" b="1" i="0">
                 <a:solidFill>
                   <a:srgbClr val="1A1A1A"/>
                 </a:solidFill>
-                <a:latin typeface="Century Schoolbook"/>
+                <a:latin typeface="Lexend"/>
               </a:rPr>
               <a:t>I.  A power of ten is a place value</a:t>
             </a:r>
@@ -14769,20 +15273,20 @@
                     <a:p>
                       <a:pPr algn="ctr"/>
                       <a:r>
-                        <a:rPr sz="1600" b="1">
+                        <a:rPr sz="1520" b="1">
                           <a:solidFill>
                             <a:srgbClr val="1A1A1A"/>
                           </a:solidFill>
-                          <a:latin typeface="Century Schoolbook"/>
+                          <a:latin typeface="Lexend"/>
                         </a:rPr>
                         <a:t>10</a:t>
                       </a:r>
                       <a:r>
-                        <a:rPr sz="1600" b="1" baseline="30000">
+                        <a:rPr sz="1520" b="1" baseline="30000">
                           <a:solidFill>
                             <a:srgbClr val="1A1A1A"/>
                           </a:solidFill>
-                          <a:latin typeface="Century Schoolbook"/>
+                          <a:latin typeface="Lexend"/>
                         </a:rPr>
                         <a:t>3</a:t>
                       </a:r>
@@ -14825,20 +15329,20 @@
                     <a:p>
                       <a:pPr algn="ctr"/>
                       <a:r>
-                        <a:rPr sz="1600" b="1">
+                        <a:rPr sz="1520" b="1">
                           <a:solidFill>
                             <a:srgbClr val="1A1A1A"/>
                           </a:solidFill>
-                          <a:latin typeface="Century Schoolbook"/>
+                          <a:latin typeface="Lexend"/>
                         </a:rPr>
                         <a:t>10</a:t>
                       </a:r>
                       <a:r>
-                        <a:rPr sz="1600" b="1" baseline="30000">
+                        <a:rPr sz="1520" b="1" baseline="30000">
                           <a:solidFill>
                             <a:srgbClr val="1A1A1A"/>
                           </a:solidFill>
-                          <a:latin typeface="Century Schoolbook"/>
+                          <a:latin typeface="Lexend"/>
                         </a:rPr>
                         <a:t>4</a:t>
                       </a:r>
@@ -14881,20 +15385,20 @@
                     <a:p>
                       <a:pPr algn="ctr"/>
                       <a:r>
-                        <a:rPr sz="1600" b="1">
+                        <a:rPr sz="1520" b="1">
                           <a:solidFill>
                             <a:srgbClr val="1A1A1A"/>
                           </a:solidFill>
-                          <a:latin typeface="Century Schoolbook"/>
+                          <a:latin typeface="Lexend"/>
                         </a:rPr>
                         <a:t>10</a:t>
                       </a:r>
                       <a:r>
-                        <a:rPr sz="1600" b="1" baseline="30000">
+                        <a:rPr sz="1520" b="1" baseline="30000">
                           <a:solidFill>
                             <a:srgbClr val="1A1A1A"/>
                           </a:solidFill>
-                          <a:latin typeface="Century Schoolbook"/>
+                          <a:latin typeface="Lexend"/>
                         </a:rPr>
                         <a:t>5</a:t>
                       </a:r>
@@ -14937,20 +15441,20 @@
                     <a:p>
                       <a:pPr algn="ctr"/>
                       <a:r>
-                        <a:rPr sz="1600" b="1">
+                        <a:rPr sz="1520" b="1">
                           <a:solidFill>
                             <a:srgbClr val="1A1A1A"/>
                           </a:solidFill>
-                          <a:latin typeface="Century Schoolbook"/>
+                          <a:latin typeface="Lexend"/>
                         </a:rPr>
                         <a:t>10</a:t>
                       </a:r>
                       <a:r>
-                        <a:rPr sz="1600" b="1" baseline="30000">
+                        <a:rPr sz="1520" b="1" baseline="30000">
                           <a:solidFill>
                             <a:srgbClr val="1A1A1A"/>
                           </a:solidFill>
-                          <a:latin typeface="Century Schoolbook"/>
+                          <a:latin typeface="Lexend"/>
                         </a:rPr>
                         <a:t>6</a:t>
                       </a:r>
@@ -14995,11 +15499,11 @@
                     <a:p>
                       <a:pPr algn="ctr"/>
                       <a:r>
-                        <a:rPr sz="1600" b="0">
+                        <a:rPr sz="1520" b="0">
                           <a:solidFill>
                             <a:srgbClr val="1A1A1A"/>
                           </a:solidFill>
-                          <a:latin typeface="Century Schoolbook"/>
+                          <a:latin typeface="Lexend"/>
                         </a:rPr>
                         <a:t>thousands</a:t>
                       </a:r>
@@ -15042,11 +15546,11 @@
                     <a:p>
                       <a:pPr algn="ctr"/>
                       <a:r>
-                        <a:rPr sz="1600" b="0">
+                        <a:rPr sz="1520" b="0">
                           <a:solidFill>
                             <a:srgbClr val="1A1A1A"/>
                           </a:solidFill>
-                          <a:latin typeface="Century Schoolbook"/>
+                          <a:latin typeface="Lexend"/>
                         </a:rPr>
                         <a:t>ten thousands</a:t>
                       </a:r>
@@ -15089,11 +15593,11 @@
                     <a:p>
                       <a:pPr algn="ctr"/>
                       <a:r>
-                        <a:rPr sz="1600" b="0">
+                        <a:rPr sz="1520" b="0">
                           <a:solidFill>
                             <a:srgbClr val="1A1A1A"/>
                           </a:solidFill>
-                          <a:latin typeface="Century Schoolbook"/>
+                          <a:latin typeface="Lexend"/>
                         </a:rPr>
                         <a:t>hundred thousands</a:t>
                       </a:r>
@@ -15136,11 +15640,11 @@
                     <a:p>
                       <a:pPr algn="ctr"/>
                       <a:r>
-                        <a:rPr sz="1600" b="0">
+                        <a:rPr sz="1520" b="0">
                           <a:solidFill>
                             <a:srgbClr val="1A1A1A"/>
                           </a:solidFill>
-                          <a:latin typeface="Century Schoolbook"/>
+                          <a:latin typeface="Lexend"/>
                         </a:rPr>
                         <a:t>millions</a:t>
                       </a:r>
@@ -15183,7 +15687,7 @@
       </p:graphicFrame>
       <p:pic>
         <p:nvPicPr>
-          <p:cNvPr id="11" name="Picture 10" descr="f39e13154060a858.png"/>
+          <p:cNvPr id="11" name="Picture 10" descr="864bf61ed56dcde1.png"/>
           <p:cNvPicPr>
             <a:picLocks noChangeAspect="1"/>
           </p:cNvPicPr>
@@ -15197,8 +15701,8 @@
         </p:blipFill>
         <p:spPr>
           <a:xfrm>
-            <a:off x="3811523" y="3028188"/>
-            <a:ext cx="4538472" cy="335280"/>
+            <a:off x="3691127" y="3020568"/>
+            <a:ext cx="4779264" cy="350520"/>
           </a:xfrm>
           <a:prstGeom prst="rect">
             <a:avLst/>
@@ -15207,7 +15711,7 @@
       </p:pic>
       <p:pic>
         <p:nvPicPr>
-          <p:cNvPr id="12" name="Picture 11" descr="09bdd4fb91237775.png"/>
+          <p:cNvPr id="12" name="Picture 11" descr="2417d66e2dd59206.png"/>
           <p:cNvPicPr>
             <a:picLocks noChangeAspect="1"/>
           </p:cNvPicPr>
@@ -15221,8 +15725,8 @@
         </p:blipFill>
         <p:spPr>
           <a:xfrm>
-            <a:off x="1979675" y="3703320"/>
-            <a:ext cx="8202168" cy="356616"/>
+            <a:off x="2019300" y="3712464"/>
+            <a:ext cx="8122920" cy="338328"/>
           </a:xfrm>
           <a:prstGeom prst="rect">
             <a:avLst/>
@@ -15253,11 +15757,11 @@
           <a:p>
             <a:pPr algn="l"/>
             <a:r>
-              <a:rPr sz="2300" b="1" i="0">
+              <a:rPr sz="2180" b="1" i="0">
                 <a:solidFill>
                   <a:srgbClr val="1A1A1A"/>
                 </a:solidFill>
-                <a:latin typeface="Century Schoolbook"/>
+                <a:latin typeface="Lexend"/>
               </a:rPr>
               <a:t>Two numbers can be added only when they carry the same power of ten.</a:t>
             </a:r>
@@ -15306,11 +15810,11 @@
           <a:p>
             <a:pPr algn="l"/>
             <a:r>
-              <a:rPr sz="3600" b="1" i="0">
+              <a:rPr sz="3420" b="1" i="0">
                 <a:solidFill>
                   <a:srgbClr val="1A1A1A"/>
                 </a:solidFill>
-                <a:latin typeface="Century Schoolbook"/>
+                <a:latin typeface="Lexend"/>
               </a:rPr>
               <a:t>Notes</a:t>
             </a:r>
@@ -15446,11 +15950,11 @@
           <a:p>
             <a:pPr algn="l"/>
             <a:r>
-              <a:rPr sz="1100" b="0" i="1">
+              <a:rPr sz="1040" b="0" i="0">
                 <a:solidFill>
                   <a:srgbClr val="6B6B6B"/>
                 </a:solidFill>
-                <a:latin typeface="Century Schoolbook"/>
+                <a:latin typeface="Lexend"/>
               </a:rPr>
               <a:t>Grade 7 Accelerated · Unit 4 · Lesson 1 — Adding and Subtracting in Scientific Notation</a:t>
             </a:r>
@@ -15481,11 +15985,11 @@
           <a:p>
             <a:pPr algn="r"/>
             <a:r>
-              <a:rPr sz="1100" b="0" i="0">
+              <a:rPr sz="1040" b="0" i="0">
                 <a:solidFill>
                   <a:srgbClr val="6B6B6B"/>
                 </a:solidFill>
-                <a:latin typeface="Century Schoolbook"/>
+                <a:latin typeface="Lexend"/>
               </a:rPr>
               <a:t>5</a:t>
             </a:r>
@@ -15516,11 +16020,11 @@
           <a:p>
             <a:pPr algn="l"/>
             <a:r>
-              <a:rPr sz="2500" b="1" i="0">
+              <a:rPr sz="2380" b="1" i="0">
                 <a:solidFill>
                   <a:srgbClr val="1A1A1A"/>
                 </a:solidFill>
-                <a:latin typeface="Century Schoolbook"/>
+                <a:latin typeface="Lexend"/>
               </a:rPr>
               <a:t>II.  Same power: add or subtract the coefficients</a:t>
             </a:r>
@@ -15564,7 +16068,7 @@
       </p:cxnSp>
       <p:pic>
         <p:nvPicPr>
-          <p:cNvPr id="10" name="Picture 9" descr="6f1eddec5041a22d.png"/>
+          <p:cNvPr id="10" name="Picture 9" descr="1cc98597e79ddbaa.png"/>
           <p:cNvPicPr>
             <a:picLocks noChangeAspect="1"/>
           </p:cNvPicPr>
@@ -15578,8 +16082,8 @@
         </p:blipFill>
         <p:spPr>
           <a:xfrm>
-            <a:off x="3247644" y="1993392"/>
-            <a:ext cx="5666232" cy="411480"/>
+            <a:off x="3308604" y="1993392"/>
+            <a:ext cx="5544312" cy="414528"/>
           </a:xfrm>
           <a:prstGeom prst="rect">
             <a:avLst/>
@@ -15588,7 +16092,7 @@
       </p:pic>
       <p:pic>
         <p:nvPicPr>
-          <p:cNvPr id="11" name="Picture 10" descr="84f16e9d72a5cae0.png"/>
+          <p:cNvPr id="11" name="Picture 10" descr="a46e16cf656fad9f.png"/>
           <p:cNvPicPr>
             <a:picLocks noChangeAspect="1"/>
           </p:cNvPicPr>
@@ -15602,8 +16106,8 @@
         </p:blipFill>
         <p:spPr>
           <a:xfrm>
-            <a:off x="2289048" y="2680716"/>
-            <a:ext cx="7583424" cy="408432"/>
+            <a:off x="2455164" y="2683763"/>
+            <a:ext cx="7251192" cy="408432"/>
           </a:xfrm>
           <a:prstGeom prst="rect">
             <a:avLst/>
@@ -15618,7 +16122,7 @@
         </p:nvSpPr>
         <p:spPr>
           <a:xfrm>
-            <a:off x="987552" y="3429000"/>
+            <a:off x="987552" y="3432047"/>
             <a:ext cx="10131551" cy="475488"/>
           </a:xfrm>
           <a:prstGeom prst="rect">
@@ -15634,11 +16138,11 @@
           <a:p>
             <a:pPr algn="l"/>
             <a:r>
-              <a:rPr sz="2300" b="1" i="0">
+              <a:rPr sz="2180" b="1" i="0">
                 <a:solidFill>
                   <a:srgbClr val="1A1A1A"/>
                 </a:solidFill>
-                <a:latin typeface="Century Schoolbook"/>
+                <a:latin typeface="Lexend"/>
               </a:rPr>
               <a:t>Add or subtract the coefficients. The power of ten does not change.</a:t>
             </a:r>
@@ -15653,7 +16157,7 @@
         </p:nvSpPr>
         <p:spPr>
           <a:xfrm>
-            <a:off x="987552" y="4160520"/>
+            <a:off x="987552" y="4163568"/>
             <a:ext cx="10131551" cy="950976"/>
           </a:xfrm>
           <a:prstGeom prst="rect">
@@ -15669,11 +16173,11 @@
           <a:p>
             <a:pPr algn="l"/>
             <a:r>
-              <a:rPr sz="2300" b="0" i="0">
+              <a:rPr sz="2180" b="0" i="0">
                 <a:solidFill>
                   <a:srgbClr val="1A1A1A"/>
                 </a:solidFill>
-                <a:latin typeface="Century Schoolbook"/>
+                <a:latin typeface="Lexend"/>
               </a:rPr>
               <a:t>Then check the coefficient: if it is not between 1 and 10, the answer is not finished.</a:t>
             </a:r>
@@ -15722,11 +16226,11 @@
           <a:p>
             <a:pPr algn="l"/>
             <a:r>
-              <a:rPr sz="3600" b="1" i="0">
+              <a:rPr sz="3420" b="1" i="0">
                 <a:solidFill>
                   <a:srgbClr val="1A1A1A"/>
                 </a:solidFill>
-                <a:latin typeface="Century Schoolbook"/>
+                <a:latin typeface="Lexend"/>
               </a:rPr>
               <a:t>Notes</a:t>
             </a:r>
@@ -15862,11 +16366,11 @@
           <a:p>
             <a:pPr algn="l"/>
             <a:r>
-              <a:rPr sz="1100" b="0" i="1">
+              <a:rPr sz="1040" b="0" i="0">
                 <a:solidFill>
                   <a:srgbClr val="6B6B6B"/>
                 </a:solidFill>
-                <a:latin typeface="Century Schoolbook"/>
+                <a:latin typeface="Lexend"/>
               </a:rPr>
               <a:t>Grade 7 Accelerated · Unit 4 · Lesson 1 — Adding and Subtracting in Scientific Notation</a:t>
             </a:r>
@@ -15897,11 +16401,11 @@
           <a:p>
             <a:pPr algn="r"/>
             <a:r>
-              <a:rPr sz="1100" b="0" i="0">
+              <a:rPr sz="1040" b="0" i="0">
                 <a:solidFill>
                   <a:srgbClr val="6B6B6B"/>
                 </a:solidFill>
-                <a:latin typeface="Century Schoolbook"/>
+                <a:latin typeface="Lexend"/>
               </a:rPr>
               <a:t>6</a:t>
             </a:r>
@@ -15932,11 +16436,11 @@
           <a:p>
             <a:pPr algn="l"/>
             <a:r>
-              <a:rPr sz="2500" b="1" i="0">
+              <a:rPr sz="2380" b="1" i="0">
                 <a:solidFill>
                   <a:srgbClr val="1A1A1A"/>
                 </a:solidFill>
-                <a:latin typeface="Century Schoolbook"/>
+                <a:latin typeface="Lexend"/>
               </a:rPr>
               <a:t>III.  Different powers: rewrite one of them first</a:t>
             </a:r>
@@ -15980,7 +16484,7 @@
       </p:cxnSp>
       <p:pic>
         <p:nvPicPr>
-          <p:cNvPr id="10" name="Picture 9" descr="efa01ffb8792c249.png"/>
+          <p:cNvPr id="10" name="Picture 9" descr="6f0baaf26a407dfb.png"/>
           <p:cNvPicPr>
             <a:picLocks noChangeAspect="1"/>
           </p:cNvPicPr>
@@ -15994,8 +16498,8 @@
         </p:blipFill>
         <p:spPr>
           <a:xfrm>
-            <a:off x="4171188" y="1993392"/>
-            <a:ext cx="3819144" cy="411480"/>
+            <a:off x="4178807" y="1994916"/>
+            <a:ext cx="3803904" cy="408432"/>
           </a:xfrm>
           <a:prstGeom prst="rect">
             <a:avLst/>
@@ -16004,7 +16508,7 @@
       </p:pic>
       <p:pic>
         <p:nvPicPr>
-          <p:cNvPr id="11" name="Picture 10" descr="cfbb3562680e8519.png"/>
+          <p:cNvPr id="11" name="Picture 10" descr="4fc26d98a263c89e.png"/>
           <p:cNvPicPr>
             <a:picLocks noChangeAspect="1"/>
           </p:cNvPicPr>
@@ -16018,8 +16522,8 @@
         </p:blipFill>
         <p:spPr>
           <a:xfrm>
-            <a:off x="2677668" y="2679192"/>
-            <a:ext cx="6806184" cy="411480"/>
+            <a:off x="2702052" y="2682240"/>
+            <a:ext cx="6757416" cy="405384"/>
           </a:xfrm>
           <a:prstGeom prst="rect">
             <a:avLst/>
@@ -16028,7 +16532,7 @@
       </p:pic>
       <p:pic>
         <p:nvPicPr>
-          <p:cNvPr id="12" name="Picture 11" descr="783fbc1bfea8bc09.png"/>
+          <p:cNvPr id="12" name="Picture 11" descr="ae1a5a7207b8178f.png"/>
           <p:cNvPicPr>
             <a:picLocks noChangeAspect="1"/>
           </p:cNvPicPr>
@@ -16042,8 +16546,8 @@
         </p:blipFill>
         <p:spPr>
           <a:xfrm>
-            <a:off x="1466359" y="3364992"/>
-            <a:ext cx="6065520" cy="411480"/>
+            <a:off x="1526347" y="3366516"/>
+            <a:ext cx="5961888" cy="408432"/>
           </a:xfrm>
           <a:prstGeom prst="rect">
             <a:avLst/>
@@ -16058,8 +16562,8 @@
         </p:nvSpPr>
         <p:spPr>
           <a:xfrm>
-            <a:off x="7531879" y="3342132"/>
-            <a:ext cx="1880073" cy="457200"/>
+            <a:off x="7488235" y="3342132"/>
+            <a:ext cx="1854584" cy="457200"/>
           </a:xfrm>
           <a:prstGeom prst="rect">
             <a:avLst/>
@@ -16074,11 +16578,11 @@
           <a:p>
             <a:pPr algn="l"/>
             <a:r>
-              <a:rPr sz="2600" b="0" i="0">
+              <a:rPr sz="2470" b="0" i="0">
                 <a:solidFill>
                   <a:srgbClr val="1A1A1A"/>
                 </a:solidFill>
-                <a:latin typeface="Century Schoolbook"/>
+                <a:latin typeface="Lexend"/>
               </a:rPr>
               <a:t>,    never   </a:t>
             </a:r>
@@ -16087,7 +16591,7 @@
       </p:sp>
       <p:pic>
         <p:nvPicPr>
-          <p:cNvPr id="14" name="Picture 13" descr="23b08f458fe34abb.png"/>
+          <p:cNvPr id="14" name="Picture 13" descr="83c5d338eb6c267c.png"/>
           <p:cNvPicPr>
             <a:picLocks noChangeAspect="1"/>
           </p:cNvPicPr>
@@ -16101,8 +16605,8 @@
         </p:blipFill>
         <p:spPr>
           <a:xfrm>
-            <a:off x="9274792" y="3395472"/>
-            <a:ext cx="1420368" cy="350520"/>
+            <a:off x="9205660" y="3401568"/>
+            <a:ext cx="1429512" cy="338328"/>
           </a:xfrm>
           <a:prstGeom prst="rect">
             <a:avLst/>
@@ -16133,11 +16637,11 @@
           <a:p>
             <a:pPr algn="l"/>
             <a:r>
-              <a:rPr sz="2300" b="1" i="0">
+              <a:rPr sz="2180" b="1" i="0">
                 <a:solidFill>
                   <a:srgbClr val="1A1A1A"/>
                 </a:solidFill>
-                <a:latin typeface="Century Schoolbook"/>
+                <a:latin typeface="Lexend"/>
               </a:rPr>
               <a:t>Rewrite one number so both carry the same power of ten, then add or subtract the coefficients.</a:t>
             </a:r>
@@ -16168,11 +16672,11 @@
           <a:p>
             <a:pPr algn="l"/>
             <a:r>
-              <a:rPr sz="2300" b="0" i="0">
+              <a:rPr sz="2180" b="0" i="0">
                 <a:solidFill>
                   <a:srgbClr val="1A1A1A"/>
                 </a:solidFill>
-                <a:latin typeface="Century Schoolbook"/>
+                <a:latin typeface="Lexend"/>
               </a:rPr>
               <a:t>Exponent up one, decimal point one place left. The value does not move.</a:t>
             </a:r>
@@ -16221,11 +16725,11 @@
           <a:p>
             <a:pPr algn="l"/>
             <a:r>
-              <a:rPr sz="3600" b="1" i="0">
+              <a:rPr sz="3420" b="1" i="0">
                 <a:solidFill>
                   <a:srgbClr val="1A1A1A"/>
                 </a:solidFill>
-                <a:latin typeface="Century Schoolbook"/>
+                <a:latin typeface="Lexend"/>
               </a:rPr>
               <a:t>Example 1</a:t>
             </a:r>
@@ -16361,11 +16865,11 @@
           <a:p>
             <a:pPr algn="l"/>
             <a:r>
-              <a:rPr sz="1100" b="0" i="1">
+              <a:rPr sz="1040" b="0" i="0">
                 <a:solidFill>
                   <a:srgbClr val="6B6B6B"/>
                 </a:solidFill>
-                <a:latin typeface="Century Schoolbook"/>
+                <a:latin typeface="Lexend"/>
               </a:rPr>
               <a:t>Grade 7 Accelerated · Unit 4 · Lesson 1 — Adding and Subtracting in Scientific Notation</a:t>
             </a:r>
@@ -16396,11 +16900,11 @@
           <a:p>
             <a:pPr algn="r"/>
             <a:r>
-              <a:rPr sz="1100" b="0" i="0">
+              <a:rPr sz="1040" b="0" i="0">
                 <a:solidFill>
                   <a:srgbClr val="6B6B6B"/>
                 </a:solidFill>
-                <a:latin typeface="Century Schoolbook"/>
+                <a:latin typeface="Lexend"/>
               </a:rPr>
               <a:t>7</a:t>
             </a:r>
@@ -16409,7 +16913,7 @@
       </p:sp>
       <p:pic>
         <p:nvPicPr>
-          <p:cNvPr id="8" name="Picture 7" descr="b322f8f789aa083c.png"/>
+          <p:cNvPr id="8" name="Picture 7" descr="b073017cb6305095.png"/>
           <p:cNvPicPr>
             <a:picLocks noChangeAspect="1"/>
           </p:cNvPicPr>
@@ -16423,8 +16927,8 @@
         </p:blipFill>
         <p:spPr>
           <a:xfrm>
-            <a:off x="4172712" y="2106168"/>
-            <a:ext cx="3816095" cy="405384"/>
+            <a:off x="4187952" y="2104643"/>
+            <a:ext cx="3785615" cy="408432"/>
           </a:xfrm>
           <a:prstGeom prst="rect">
             <a:avLst/>
@@ -16455,11 +16959,11 @@
           <a:p>
             <a:pPr algn="ctr"/>
             <a:r>
-              <a:rPr sz="2400" b="1" i="0">
+              <a:rPr sz="2280" b="1" i="0">
                 <a:solidFill>
                   <a:srgbClr val="1A1A1A"/>
                 </a:solidFill>
-                <a:latin typeface="Century Schoolbook"/>
+                <a:latin typeface="Lexend"/>
               </a:rPr>
               <a:t>Add. Write the answer in scientific notation.</a:t>
             </a:r>
@@ -16508,11 +17012,11 @@
           <a:p>
             <a:pPr algn="l"/>
             <a:r>
-              <a:rPr sz="3600" b="1" i="0">
+              <a:rPr sz="3420" b="1" i="0">
                 <a:solidFill>
                   <a:srgbClr val="1A1A1A"/>
                 </a:solidFill>
-                <a:latin typeface="Century Schoolbook"/>
+                <a:latin typeface="Lexend"/>
               </a:rPr>
               <a:t>Example 1</a:t>
             </a:r>
@@ -16648,11 +17152,11 @@
           <a:p>
             <a:pPr algn="l"/>
             <a:r>
-              <a:rPr sz="1100" b="0" i="1">
+              <a:rPr sz="1040" b="0" i="0">
                 <a:solidFill>
                   <a:srgbClr val="6B6B6B"/>
                 </a:solidFill>
-                <a:latin typeface="Century Schoolbook"/>
+                <a:latin typeface="Lexend"/>
               </a:rPr>
               <a:t>Grade 7 Accelerated · Unit 4 · Lesson 1 — Adding and Subtracting in Scientific Notation</a:t>
             </a:r>
@@ -16683,11 +17187,11 @@
           <a:p>
             <a:pPr algn="r"/>
             <a:r>
-              <a:rPr sz="1100" b="0" i="0">
+              <a:rPr sz="1040" b="0" i="0">
                 <a:solidFill>
                   <a:srgbClr val="6B6B6B"/>
                 </a:solidFill>
-                <a:latin typeface="Century Schoolbook"/>
+                <a:latin typeface="Lexend"/>
               </a:rPr>
               <a:t>8</a:t>
             </a:r>
@@ -16696,7 +17200,7 @@
       </p:sp>
       <p:pic>
         <p:nvPicPr>
-          <p:cNvPr id="8" name="Picture 7" descr="78e26f3a087b33fd.png"/>
+          <p:cNvPr id="8" name="Picture 7" descr="29f41e57a08380ac.png"/>
           <p:cNvPicPr>
             <a:picLocks noChangeAspect="1"/>
           </p:cNvPicPr>
@@ -16711,7 +17215,7 @@
         <p:spPr>
           <a:xfrm>
             <a:off x="1828800" y="1920240"/>
-            <a:ext cx="5864352" cy="402336"/>
+            <a:ext cx="5797296" cy="405384"/>
           </a:xfrm>
           <a:prstGeom prst="rect">
             <a:avLst/>
@@ -16720,7 +17224,7 @@
       </p:pic>
       <p:pic>
         <p:nvPicPr>
-          <p:cNvPr id="9" name="Picture 8" descr="1cb28e2e28999fa1.png"/>
+          <p:cNvPr id="9" name="Picture 8" descr="9886ab42ab881df4.png"/>
           <p:cNvPicPr>
             <a:picLocks noChangeAspect="1"/>
           </p:cNvPicPr>
@@ -16734,8 +17238,8 @@
         </p:blipFill>
         <p:spPr>
           <a:xfrm>
-            <a:off x="1828800" y="2596896"/>
-            <a:ext cx="3642360" cy="350520"/>
+            <a:off x="1828800" y="2599944"/>
+            <a:ext cx="3624072" cy="338328"/>
           </a:xfrm>
           <a:prstGeom prst="rect">
             <a:avLst/>
@@ -16744,7 +17248,7 @@
       </p:pic>
       <p:pic>
         <p:nvPicPr>
-          <p:cNvPr id="10" name="Picture 9" descr="ce53c7f1db8afdc0.png"/>
+          <p:cNvPr id="10" name="Picture 9" descr="a3c2876c6f516a7e.png"/>
           <p:cNvPicPr>
             <a:picLocks noChangeAspect="1"/>
           </p:cNvPicPr>
@@ -16758,8 +17262,8 @@
         </p:blipFill>
         <p:spPr>
           <a:xfrm>
-            <a:off x="1828800" y="3221735"/>
-            <a:ext cx="1978152" cy="335280"/>
+            <a:off x="1828800" y="3212592"/>
+            <a:ext cx="2215896" cy="347472"/>
           </a:xfrm>
           <a:prstGeom prst="rect">
             <a:avLst/>
@@ -16790,20 +17294,20 @@
           <a:p>
             <a:pPr algn="ctr"/>
             <a:r>
-              <a:rPr sz="3200" b="1" i="0">
+              <a:rPr sz="3040" b="1" i="0">
                 <a:solidFill>
                   <a:srgbClr val="9E1B32"/>
                 </a:solidFill>
-                <a:latin typeface="Century Schoolbook"/>
+                <a:latin typeface="Lexend"/>
               </a:rPr>
               <a:t>Answer:   1.45 × 10</a:t>
             </a:r>
             <a:r>
-              <a:rPr sz="3200" b="1" i="0" baseline="30000">
+              <a:rPr sz="3040" b="1" i="0" baseline="30000">
                 <a:solidFill>
                   <a:srgbClr val="9E1B32"/>
                 </a:solidFill>
-                <a:latin typeface="Century Schoolbook"/>
+                <a:latin typeface="Lexend"/>
               </a:rPr>
               <a:t>8</a:t>
             </a:r>
@@ -16852,11 +17356,11 @@
           <a:p>
             <a:pPr algn="l"/>
             <a:r>
-              <a:rPr sz="3600" b="1" i="0">
+              <a:rPr sz="3420" b="1" i="0">
                 <a:solidFill>
                   <a:srgbClr val="1A1A1A"/>
                 </a:solidFill>
-                <a:latin typeface="Century Schoolbook"/>
+                <a:latin typeface="Lexend"/>
               </a:rPr>
               <a:t>Your Turn</a:t>
             </a:r>
@@ -16992,11 +17496,11 @@
           <a:p>
             <a:pPr algn="l"/>
             <a:r>
-              <a:rPr sz="1100" b="0" i="1">
+              <a:rPr sz="1040" b="0" i="0">
                 <a:solidFill>
                   <a:srgbClr val="6B6B6B"/>
                 </a:solidFill>
-                <a:latin typeface="Century Schoolbook"/>
+                <a:latin typeface="Lexend"/>
               </a:rPr>
               <a:t>Grade 7 Accelerated · Unit 4 · Lesson 1 — Adding and Subtracting in Scientific Notation</a:t>
             </a:r>
@@ -17027,11 +17531,11 @@
           <a:p>
             <a:pPr algn="r"/>
             <a:r>
-              <a:rPr sz="1100" b="0" i="0">
+              <a:rPr sz="1040" b="0" i="0">
                 <a:solidFill>
                   <a:srgbClr val="6B6B6B"/>
                 </a:solidFill>
-                <a:latin typeface="Century Schoolbook"/>
+                <a:latin typeface="Lexend"/>
               </a:rPr>
               <a:t>9</a:t>
             </a:r>
@@ -17040,7 +17544,7 @@
       </p:sp>
       <p:pic>
         <p:nvPicPr>
-          <p:cNvPr id="8" name="Picture 7" descr="2ae36fee79b20f87.png"/>
+          <p:cNvPr id="8" name="Picture 7" descr="b4cde0a73e646210.png"/>
           <p:cNvPicPr>
             <a:picLocks noChangeAspect="1"/>
           </p:cNvPicPr>
@@ -17054,8 +17558,8 @@
         </p:blipFill>
         <p:spPr>
           <a:xfrm>
-            <a:off x="3453383" y="2194560"/>
-            <a:ext cx="5254752" cy="512064"/>
+            <a:off x="3509772" y="1600200"/>
+            <a:ext cx="5141976" cy="505968"/>
           </a:xfrm>
           <a:prstGeom prst="rect">
             <a:avLst/>
@@ -17070,7 +17574,7 @@
         </p:nvSpPr>
         <p:spPr>
           <a:xfrm>
-            <a:off x="777240" y="3209544"/>
+            <a:off x="777240" y="2609088"/>
             <a:ext cx="10607040" cy="429370"/>
           </a:xfrm>
           <a:prstGeom prst="rect">
@@ -17086,11 +17590,11 @@
           <a:p>
             <a:pPr algn="ctr"/>
             <a:r>
-              <a:rPr sz="2400" b="1" i="0">
+              <a:rPr sz="2280" b="1" i="0">
                 <a:solidFill>
                   <a:srgbClr val="1A1A1A"/>
                 </a:solidFill>
-                <a:latin typeface="Century Schoolbook"/>
+                <a:latin typeface="Lexend"/>
               </a:rPr>
               <a:t>Add. Write the answer in scientific notation.</a:t>
             </a:r>

--- a/a7/packages/A7 Unit 4 - Solving Problems with Rational Numbers/Lessons/4.01/A7 4.01 Adding and Subtracting in Scientific Notation - Slides.pptx
+++ b/a7/packages/A7 Unit 4 - Solving Problems with Rational Numbers/Lessons/4.01/A7 4.01 Adding and Subtracting in Scientific Notation - Slides.pptx
@@ -7166,7 +7166,7 @@
       </p:sp>
       <p:pic>
         <p:nvPicPr>
-          <p:cNvPr id="8" name="Picture 7" descr="8c04d76b961c1c9d.png"/>
+          <p:cNvPr id="8" name="Picture 7" descr="9a1c5b83d56645e5.png"/>
           <p:cNvPicPr>
             <a:picLocks noChangeAspect="1"/>
           </p:cNvPicPr>
@@ -7180,8 +7180,8 @@
         </p:blipFill>
         <p:spPr>
           <a:xfrm>
-            <a:off x="4335780" y="2197608"/>
-            <a:ext cx="3489960" cy="405384"/>
+            <a:off x="4337304" y="2196083"/>
+            <a:ext cx="3486912" cy="408432"/>
           </a:xfrm>
           <a:prstGeom prst="rect">
             <a:avLst/>
@@ -7987,7 +7987,7 @@
       </p:sp>
       <p:pic>
         <p:nvPicPr>
-          <p:cNvPr id="8" name="Picture 7" descr="d250897723b649d6.png"/>
+          <p:cNvPr id="8" name="Picture 7" descr="b4e4dff994d3b294.png"/>
           <p:cNvPicPr>
             <a:picLocks noChangeAspect="1"/>
           </p:cNvPicPr>
@@ -8001,8 +8001,8 @@
         </p:blipFill>
         <p:spPr>
           <a:xfrm>
-            <a:off x="4334255" y="2106168"/>
-            <a:ext cx="3493008" cy="405384"/>
+            <a:off x="4335780" y="2103120"/>
+            <a:ext cx="3489960" cy="414528"/>
           </a:xfrm>
           <a:prstGeom prst="rect">
             <a:avLst/>
@@ -8011,7 +8011,7 @@
       </p:pic>
       <p:pic>
         <p:nvPicPr>
-          <p:cNvPr id="9" name="Picture 8" descr="c38ae5169a7919b0.png"/>
+          <p:cNvPr id="9" name="Picture 8" descr="74a99bec27e47cab.png"/>
           <p:cNvPicPr>
             <a:picLocks noChangeAspect="1"/>
           </p:cNvPicPr>
@@ -8025,8 +8025,8 @@
         </p:blipFill>
         <p:spPr>
           <a:xfrm>
-            <a:off x="4610099" y="2939796"/>
-            <a:ext cx="1380744" cy="256032"/>
+            <a:off x="4631435" y="2944368"/>
+            <a:ext cx="1365504" cy="252984"/>
           </a:xfrm>
           <a:prstGeom prst="rect">
             <a:avLst/>
@@ -8035,7 +8035,7 @@
       </p:pic>
       <p:pic>
         <p:nvPicPr>
-          <p:cNvPr id="10" name="Picture 9" descr="5cb78aa020bc0847.png"/>
+          <p:cNvPr id="10" name="Picture 9" descr="3dc41426a2cb4725.png"/>
           <p:cNvPicPr>
             <a:picLocks noChangeAspect="1"/>
           </p:cNvPicPr>
@@ -8049,8 +8049,8 @@
         </p:blipFill>
         <p:spPr>
           <a:xfrm>
-            <a:off x="4610099" y="3454908"/>
-            <a:ext cx="3051048" cy="304800"/>
+            <a:off x="4631435" y="3456431"/>
+            <a:ext cx="3008376" cy="307848"/>
           </a:xfrm>
           <a:prstGeom prst="rect">
             <a:avLst/>
@@ -8087,7 +8087,7 @@
                 </a:solidFill>
                 <a:latin typeface="Lexend"/>
               </a:rPr>
-              <a:t>Answer:   1.3 × 10</a:t>
+              <a:t>Answer:   1.1 × 10</a:t>
             </a:r>
             <a:r>
               <a:rPr sz="3040" b="1" i="0" baseline="30000">
@@ -8096,7 +8096,7 @@
                 </a:solidFill>
                 <a:latin typeface="Lexend"/>
               </a:rPr>
-              <a:t>-4</a:t>
+              <a:t>-5</a:t>
             </a:r>
           </a:p>
         </p:txBody>
@@ -8962,7 +8962,7 @@
       </p:sp>
       <p:pic>
         <p:nvPicPr>
-          <p:cNvPr id="8" name="Picture 7" descr="00675f3b4cff738f.png"/>
+          <p:cNvPr id="8" name="Picture 7" descr="458ce47e03352da5.png"/>
           <p:cNvPicPr>
             <a:picLocks noChangeAspect="1"/>
           </p:cNvPicPr>
@@ -8976,8 +8976,8 @@
         </p:blipFill>
         <p:spPr>
           <a:xfrm>
-            <a:off x="4201668" y="2196083"/>
-            <a:ext cx="3758184" cy="408432"/>
+            <a:off x="4198620" y="2196083"/>
+            <a:ext cx="3764279" cy="408432"/>
           </a:xfrm>
           <a:prstGeom prst="rect">
             <a:avLst/>
@@ -9058,7 +9058,7 @@
                 </a:solidFill>
                 <a:latin typeface="Lexend"/>
               </a:rPr>
-              <a:t>4.7 × 10</a:t>
+              <a:t>3.9 × 10</a:t>
             </a:r>
             <a:r>
               <a:rPr sz="2280" b="0" i="0" baseline="30000">
@@ -9067,7 +9067,7 @@
                 </a:solidFill>
                 <a:latin typeface="Lexend"/>
               </a:rPr>
-              <a:t>5</a:t>
+              <a:t>6</a:t>
             </a:r>
           </a:p>
         </p:txBody>
@@ -9111,7 +9111,7 @@
                 </a:solidFill>
                 <a:latin typeface="Lexend"/>
               </a:rPr>
-              <a:t>4.7 × 10</a:t>
+              <a:t>3.9 × 10</a:t>
             </a:r>
             <a:r>
               <a:rPr sz="2280" b="0" i="0" baseline="30000">
@@ -9120,7 +9120,7 @@
                 </a:solidFill>
                 <a:latin typeface="Lexend"/>
               </a:rPr>
-              <a:t>8</a:t>
+              <a:t>10</a:t>
             </a:r>
           </a:p>
         </p:txBody>
@@ -9164,7 +9164,7 @@
                 </a:solidFill>
                 <a:latin typeface="Lexend"/>
               </a:rPr>
-              <a:t>3.413 × 10</a:t>
+              <a:t>2.316 × 10</a:t>
             </a:r>
             <a:r>
               <a:rPr sz="2280" b="0" i="0" baseline="30000">
@@ -9173,7 +9173,7 @@
                 </a:solidFill>
                 <a:latin typeface="Lexend"/>
               </a:rPr>
-              <a:t>5</a:t>
+              <a:t>6</a:t>
             </a:r>
           </a:p>
         </p:txBody>
@@ -9217,7 +9217,7 @@
                 </a:solidFill>
                 <a:latin typeface="Lexend"/>
               </a:rPr>
-              <a:t>3.53 × 10</a:t>
+              <a:t>2.46 × 10</a:t>
             </a:r>
             <a:r>
               <a:rPr sz="2280" b="0" i="0" baseline="30000">
@@ -9226,7 +9226,7 @@
                 </a:solidFill>
                 <a:latin typeface="Lexend"/>
               </a:rPr>
-              <a:t>5</a:t>
+              <a:t>6</a:t>
             </a:r>
           </a:p>
         </p:txBody>
@@ -9496,7 +9496,7 @@
       </p:sp>
       <p:pic>
         <p:nvPicPr>
-          <p:cNvPr id="8" name="Picture 7" descr="be676fcb052be681.png"/>
+          <p:cNvPr id="8" name="Picture 7" descr="0a5ae3f69ac2c6a4.png"/>
           <p:cNvPicPr>
             <a:picLocks noChangeAspect="1"/>
           </p:cNvPicPr>
@@ -9510,8 +9510,8 @@
         </p:blipFill>
         <p:spPr>
           <a:xfrm>
-            <a:off x="4200144" y="2104643"/>
-            <a:ext cx="3761232" cy="408432"/>
+            <a:off x="4197096" y="2103120"/>
+            <a:ext cx="3767328" cy="414528"/>
           </a:xfrm>
           <a:prstGeom prst="rect">
             <a:avLst/>
@@ -9526,7 +9526,7 @@
         </p:nvSpPr>
         <p:spPr>
           <a:xfrm>
-            <a:off x="777240" y="2788920"/>
+            <a:off x="777240" y="2791967"/>
             <a:ext cx="10607040" cy="465151"/>
           </a:xfrm>
           <a:prstGeom prst="rect">
@@ -9561,7 +9561,7 @@
         </p:nvSpPr>
         <p:spPr>
           <a:xfrm>
-            <a:off x="3201785" y="3414091"/>
+            <a:off x="3181973" y="3417139"/>
             <a:ext cx="3154956" cy="457200"/>
           </a:xfrm>
           <a:prstGeom prst="rect">
@@ -9590,7 +9590,7 @@
       </p:sp>
       <p:pic>
         <p:nvPicPr>
-          <p:cNvPr id="11" name="Picture 10" descr="c61c1bacc44cde4f.png"/>
+          <p:cNvPr id="11" name="Picture 10" descr="27f7e9522e6b3218.png"/>
           <p:cNvPicPr>
             <a:picLocks noChangeAspect="1"/>
           </p:cNvPicPr>
@@ -9604,8 +9604,8 @@
         </p:blipFill>
         <p:spPr>
           <a:xfrm>
-            <a:off x="6219582" y="3514675"/>
-            <a:ext cx="2743200" cy="256032"/>
+            <a:off x="6199770" y="3514675"/>
+            <a:ext cx="2782824" cy="262128"/>
           </a:xfrm>
           <a:prstGeom prst="rect">
             <a:avLst/>
@@ -9614,7 +9614,7 @@
       </p:pic>
       <p:pic>
         <p:nvPicPr>
-          <p:cNvPr id="12" name="Picture 11" descr="a4dc9a96cb3f319c.png"/>
+          <p:cNvPr id="12" name="Picture 11" descr="121dee4f34127b18.png"/>
           <p:cNvPicPr>
             <a:picLocks noChangeAspect="1"/>
           </p:cNvPicPr>
@@ -9628,8 +9628,8 @@
         </p:blipFill>
         <p:spPr>
           <a:xfrm>
-            <a:off x="3256649" y="4038931"/>
-            <a:ext cx="2389632" cy="213360"/>
+            <a:off x="3236837" y="4041979"/>
+            <a:ext cx="2365248" cy="213360"/>
           </a:xfrm>
           <a:prstGeom prst="rect">
             <a:avLst/>
@@ -9638,7 +9638,7 @@
       </p:pic>
       <p:pic>
         <p:nvPicPr>
-          <p:cNvPr id="13" name="Picture 12" descr="c561023f683a97ad.png"/>
+          <p:cNvPr id="13" name="Picture 12" descr="d9fd5fe20052fef2.png"/>
           <p:cNvPicPr>
             <a:picLocks noChangeAspect="1"/>
           </p:cNvPicPr>
@@ -9652,8 +9652,8 @@
         </p:blipFill>
         <p:spPr>
           <a:xfrm>
-            <a:off x="3256649" y="4520515"/>
-            <a:ext cx="1392936" cy="256032"/>
+            <a:off x="3236837" y="4520515"/>
+            <a:ext cx="1377696" cy="262128"/>
           </a:xfrm>
           <a:prstGeom prst="rect">
             <a:avLst/>
@@ -9668,7 +9668,7 @@
         </p:nvSpPr>
         <p:spPr>
           <a:xfrm>
-            <a:off x="777240" y="4991431"/>
+            <a:off x="777240" y="4994479"/>
             <a:ext cx="10607040" cy="548640"/>
           </a:xfrm>
           <a:prstGeom prst="rect">
@@ -9690,7 +9690,7 @@
                 </a:solidFill>
                 <a:latin typeface="Lexend"/>
               </a:rPr>
-              <a:t>Answer:   C — 3.413 × 10</a:t>
+              <a:t>Answer:   C — 2.316 × 10</a:t>
             </a:r>
             <a:r>
               <a:rPr sz="3040" b="1" i="0" baseline="30000">
@@ -9699,7 +9699,7 @@
                 </a:solidFill>
                 <a:latin typeface="Lexend"/>
               </a:rPr>
-              <a:t>5</a:t>
+              <a:t>6</a:t>
             </a:r>
           </a:p>
         </p:txBody>
@@ -13060,7 +13060,7 @@
         </p:nvSpPr>
         <p:spPr>
           <a:xfrm>
-            <a:off x="2043833" y="2171700"/>
+            <a:off x="2039261" y="2171700"/>
             <a:ext cx="2490283" cy="457200"/>
           </a:xfrm>
           <a:prstGeom prst="rect">
@@ -13089,7 +13089,7 @@
       </p:sp>
       <p:pic>
         <p:nvPicPr>
-          <p:cNvPr id="9" name="Picture 8" descr="0ba8039e00841737.png"/>
+          <p:cNvPr id="9" name="Picture 8" descr="0a7a4307a87a1af9.png"/>
           <p:cNvPicPr>
             <a:picLocks noChangeAspect="1"/>
           </p:cNvPicPr>
@@ -13103,8 +13103,8 @@
         </p:blipFill>
         <p:spPr>
           <a:xfrm>
-            <a:off x="4396956" y="2196083"/>
-            <a:ext cx="5571744" cy="408432"/>
+            <a:off x="4392384" y="2196083"/>
+            <a:ext cx="5580888" cy="408432"/>
           </a:xfrm>
           <a:prstGeom prst="rect">
             <a:avLst/>
@@ -13119,7 +13119,7 @@
         </p:nvSpPr>
         <p:spPr>
           <a:xfrm>
-            <a:off x="9968700" y="2171700"/>
+            <a:off x="9973272" y="2171700"/>
             <a:ext cx="286146" cy="457200"/>
           </a:xfrm>
           <a:prstGeom prst="rect">
@@ -13452,7 +13452,7 @@
         </p:nvSpPr>
         <p:spPr>
           <a:xfrm>
-            <a:off x="2042309" y="2080260"/>
+            <a:off x="2037737" y="2081783"/>
             <a:ext cx="2490283" cy="457200"/>
           </a:xfrm>
           <a:prstGeom prst="rect">
@@ -13481,7 +13481,7 @@
       </p:sp>
       <p:pic>
         <p:nvPicPr>
-          <p:cNvPr id="9" name="Picture 8" descr="f9b73d3410d61fed.png"/>
+          <p:cNvPr id="9" name="Picture 8" descr="595d18b76e1d008d.png"/>
           <p:cNvPicPr>
             <a:picLocks noChangeAspect="1"/>
           </p:cNvPicPr>
@@ -13495,8 +13495,8 @@
         </p:blipFill>
         <p:spPr>
           <a:xfrm>
-            <a:off x="4395432" y="2104643"/>
-            <a:ext cx="5574792" cy="408432"/>
+            <a:off x="4390860" y="2103120"/>
+            <a:ext cx="5583936" cy="414528"/>
           </a:xfrm>
           <a:prstGeom prst="rect">
             <a:avLst/>
@@ -13511,7 +13511,7 @@
         </p:nvSpPr>
         <p:spPr>
           <a:xfrm>
-            <a:off x="9970224" y="2080260"/>
+            <a:off x="9974796" y="2081783"/>
             <a:ext cx="286146" cy="457200"/>
           </a:xfrm>
           <a:prstGeom prst="rect">
@@ -13546,7 +13546,7 @@
         </p:nvSpPr>
         <p:spPr>
           <a:xfrm>
-            <a:off x="777240" y="2788920"/>
+            <a:off x="777240" y="2791967"/>
             <a:ext cx="10607040" cy="465151"/>
           </a:xfrm>
           <a:prstGeom prst="rect">
@@ -13581,7 +13581,7 @@
         </p:nvSpPr>
         <p:spPr>
           <a:xfrm>
-            <a:off x="1754232" y="3414091"/>
+            <a:off x="1754232" y="3417139"/>
             <a:ext cx="8790215" cy="457200"/>
           </a:xfrm>
           <a:prstGeom prst="rect">
@@ -13610,7 +13610,7 @@
       </p:sp>
       <p:pic>
         <p:nvPicPr>
-          <p:cNvPr id="13" name="Picture 12" descr="c61c1bacc44cde4f.png"/>
+          <p:cNvPr id="13" name="Picture 12" descr="afb9dc22174bd350.png"/>
           <p:cNvPicPr>
             <a:picLocks noChangeAspect="1"/>
           </p:cNvPicPr>
@@ -13625,7 +13625,7 @@
         <p:spPr>
           <a:xfrm>
             <a:off x="1809096" y="4017595"/>
-            <a:ext cx="2743200" cy="256032"/>
+            <a:ext cx="2773680" cy="262128"/>
           </a:xfrm>
           <a:prstGeom prst="rect">
             <a:avLst/>
@@ -13634,7 +13634,7 @@
       </p:pic>
       <p:pic>
         <p:nvPicPr>
-          <p:cNvPr id="14" name="Picture 13" descr="a4dc9a96cb3f319c.png"/>
+          <p:cNvPr id="14" name="Picture 13" descr="0920ee9ba6d56afd.png"/>
           <p:cNvPicPr>
             <a:picLocks noChangeAspect="1"/>
           </p:cNvPicPr>
@@ -13648,8 +13648,8 @@
         </p:blipFill>
         <p:spPr>
           <a:xfrm>
-            <a:off x="1809096" y="4541851"/>
-            <a:ext cx="2389632" cy="213360"/>
+            <a:off x="1809096" y="4544899"/>
+            <a:ext cx="2380488" cy="213360"/>
           </a:xfrm>
           <a:prstGeom prst="rect">
             <a:avLst/>
@@ -13664,7 +13664,7 @@
         </p:nvSpPr>
         <p:spPr>
           <a:xfrm>
-            <a:off x="4198728" y="4419931"/>
+            <a:off x="4189584" y="4422979"/>
             <a:ext cx="1163085" cy="457200"/>
           </a:xfrm>
           <a:prstGeom prst="rect">
@@ -13693,7 +13693,7 @@
       </p:sp>
       <p:pic>
         <p:nvPicPr>
-          <p:cNvPr id="16" name="Picture 15" descr="c561023f683a97ad.png"/>
+          <p:cNvPr id="16" name="Picture 15" descr="5bab4917e6b979c2.png"/>
           <p:cNvPicPr>
             <a:picLocks noChangeAspect="1"/>
           </p:cNvPicPr>
@@ -13707,8 +13707,8 @@
         </p:blipFill>
         <p:spPr>
           <a:xfrm>
-            <a:off x="5224653" y="4520515"/>
-            <a:ext cx="1392936" cy="256032"/>
+            <a:off x="5215509" y="4523563"/>
+            <a:ext cx="1399032" cy="256032"/>
           </a:xfrm>
           <a:prstGeom prst="rect">
             <a:avLst/>
@@ -13723,7 +13723,7 @@
         </p:nvSpPr>
         <p:spPr>
           <a:xfrm>
-            <a:off x="777240" y="4991431"/>
+            <a:off x="777240" y="4994479"/>
             <a:ext cx="10607040" cy="548640"/>
           </a:xfrm>
           <a:prstGeom prst="rect">
@@ -13745,7 +13745,7 @@
                 </a:solidFill>
                 <a:latin typeface="Lexend"/>
               </a:rPr>
-              <a:t>Answer:   3.413 × 10</a:t>
+              <a:t>Answer:   6.619 × 10</a:t>
             </a:r>
             <a:r>
               <a:rPr sz="3040" b="1" i="0" baseline="30000">
@@ -13754,7 +13754,7 @@
                 </a:solidFill>
                 <a:latin typeface="Lexend"/>
               </a:rPr>
-              <a:t>5</a:t>
+              <a:t>4</a:t>
             </a:r>
           </a:p>
         </p:txBody>

--- a/a7/packages/A7 Unit 4 - Solving Problems with Rational Numbers/Lessons/4.01/A7 4.01 Adding and Subtracting in Scientific Notation - Slides.pptx
+++ b/a7/packages/A7 Unit 4 - Solving Problems with Rational Numbers/Lessons/4.01/A7 4.01 Adding and Subtracting in Scientific Notation - Slides.pptx
@@ -39,6 +39,7 @@
     <p:sldId id="287" r:id="rId38"/>
     <p:sldId id="288" r:id="rId39"/>
     <p:sldId id="289" r:id="rId40"/>
+    <p:sldId id="290" r:id="rId41"/>
   </p:sldIdLst>
   <p:sldSz cx="12191969" cy="6858000" type="screen4x3"/>
   <p:notesSz cx="6858000" cy="9144000"/>
@@ -3666,7 +3667,7 @@
       </p:sp>
       <p:pic>
         <p:nvPicPr>
-          <p:cNvPr id="8" name="Picture 7" descr="6341fce2cb0bbc83.png"/>
+          <p:cNvPr id="8" name="Picture 7" descr="b4cde0a73e646210.png"/>
           <p:cNvPicPr>
             <a:picLocks noChangeAspect="1"/>
           </p:cNvPicPr>
@@ -3680,8 +3681,8 @@
         </p:blipFill>
         <p:spPr>
           <a:xfrm>
-            <a:off x="3508248" y="1600200"/>
-            <a:ext cx="5145024" cy="509016"/>
+            <a:off x="3509772" y="1600200"/>
+            <a:ext cx="5141976" cy="505968"/>
           </a:xfrm>
           <a:prstGeom prst="rect">
             <a:avLst/>
@@ -3696,7 +3697,7 @@
         </p:nvSpPr>
         <p:spPr>
           <a:xfrm>
-            <a:off x="777240" y="2612136"/>
+            <a:off x="777240" y="2609088"/>
             <a:ext cx="10607040" cy="429370"/>
           </a:xfrm>
           <a:prstGeom prst="rect">
@@ -3719,133 +3720,6 @@
                 <a:latin typeface="Lexend"/>
               </a:rPr>
               <a:t>Add. Write the answer in scientific notation.</a:t>
-            </a:r>
-          </a:p>
-        </p:txBody>
-      </p:sp>
-      <p:sp>
-        <p:nvSpPr>
-          <p:cNvPr id="10" name="TextBox 9"/>
-          <p:cNvSpPr txBox="1"/>
-          <p:nvPr/>
-        </p:nvSpPr>
-        <p:spPr>
-          <a:xfrm>
-            <a:off x="2035576" y="3201526"/>
-            <a:ext cx="5987247" cy="457200"/>
-          </a:xfrm>
-          <a:prstGeom prst="rect">
-            <a:avLst/>
-          </a:prstGeom>
-          <a:noFill/>
-        </p:spPr>
-        <p:txBody>
-          <a:bodyPr wrap="none" lIns="45720" rIns="45720" tIns="18288" bIns="18288" anchor="ctr">
-            <a:noAutofit/>
-          </a:bodyPr>
-          <a:lstStyle/>
-          <a:p>
-            <a:pPr algn="l"/>
-            <a:r>
-              <a:rPr sz="2750" b="0" i="0">
-                <a:solidFill>
-                  <a:srgbClr val="1A1A1A"/>
-                </a:solidFill>
-                <a:latin typeface="Lexend"/>
-              </a:rPr>
-              <a:t>Same power, so add the fronts:  </a:t>
-            </a:r>
-          </a:p>
-        </p:txBody>
-      </p:sp>
-      <p:pic>
-        <p:nvPicPr>
-          <p:cNvPr id="11" name="Picture 10" descr="bcb34fa03e0895f9.png"/>
-          <p:cNvPicPr>
-            <a:picLocks noChangeAspect="1"/>
-          </p:cNvPicPr>
-          <p:nvPr/>
-        </p:nvPicPr>
-        <p:blipFill>
-          <a:blip r:embed="rId3"/>
-          <a:stretch>
-            <a:fillRect/>
-          </a:stretch>
-        </p:blipFill>
-        <p:spPr>
-          <a:xfrm>
-            <a:off x="7885663" y="3303634"/>
-            <a:ext cx="2240280" cy="252984"/>
-          </a:xfrm>
-          <a:prstGeom prst="rect">
-            <a:avLst/>
-          </a:prstGeom>
-        </p:spPr>
-      </p:pic>
-      <p:pic>
-        <p:nvPicPr>
-          <p:cNvPr id="12" name="Picture 11" descr="30762fde1252fce0.png"/>
-          <p:cNvPicPr>
-            <a:picLocks noChangeAspect="1"/>
-          </p:cNvPicPr>
-          <p:nvPr/>
-        </p:nvPicPr>
-        <p:blipFill>
-          <a:blip r:embed="rId4"/>
-          <a:stretch>
-            <a:fillRect/>
-          </a:stretch>
-        </p:blipFill>
-        <p:spPr>
-          <a:xfrm>
-            <a:off x="2090440" y="3817222"/>
-            <a:ext cx="3486912" cy="304800"/>
-          </a:xfrm>
-          <a:prstGeom prst="rect">
-            <a:avLst/>
-          </a:prstGeom>
-        </p:spPr>
-      </p:pic>
-      <p:sp>
-        <p:nvSpPr>
-          <p:cNvPr id="13" name="TextBox 12"/>
-          <p:cNvSpPr txBox="1"/>
-          <p:nvPr/>
-        </p:nvSpPr>
-        <p:spPr>
-          <a:xfrm>
-            <a:off x="777240" y="4572000"/>
-            <a:ext cx="10607040" cy="548640"/>
-          </a:xfrm>
-          <a:prstGeom prst="rect">
-            <a:avLst/>
-          </a:prstGeom>
-          <a:noFill/>
-        </p:spPr>
-        <p:txBody>
-          <a:bodyPr wrap="square" lIns="45720" rIns="45720" tIns="18288" bIns="18288" anchor="t">
-            <a:spAutoFit/>
-          </a:bodyPr>
-          <a:lstStyle/>
-          <a:p>
-            <a:pPr algn="ctr"/>
-            <a:r>
-              <a:rPr sz="3040" b="1" i="0">
-                <a:solidFill>
-                  <a:srgbClr val="9E1B32"/>
-                </a:solidFill>
-                <a:latin typeface="Lexend"/>
-              </a:rPr>
-              <a:t>Answer:   1.23 × 10</a:t>
-            </a:r>
-            <a:r>
-              <a:rPr sz="3040" b="1" i="0" baseline="30000">
-                <a:solidFill>
-                  <a:srgbClr val="9E1B32"/>
-                </a:solidFill>
-                <a:latin typeface="Lexend"/>
-              </a:rPr>
-              <a:t>-2</a:t>
             </a:r>
           </a:p>
         </p:txBody>
@@ -3898,7 +3772,7 @@
                 </a:solidFill>
                 <a:latin typeface="Lexend"/>
               </a:rPr>
-              <a:t>Example 2</a:t>
+              <a:t>Your Turn</a:t>
             </a:r>
           </a:p>
         </p:txBody>
@@ -4080,7 +3954,7 @@
       </p:sp>
       <p:pic>
         <p:nvPicPr>
-          <p:cNvPr id="8" name="Picture 7" descr="bf4da8d69ae35ff0.png"/>
+          <p:cNvPr id="8" name="Picture 7" descr="6341fce2cb0bbc83.png"/>
           <p:cNvPicPr>
             <a:picLocks noChangeAspect="1"/>
           </p:cNvPicPr>
@@ -4094,8 +3968,8 @@
         </p:blipFill>
         <p:spPr>
           <a:xfrm>
-            <a:off x="4184903" y="2104643"/>
-            <a:ext cx="3791712" cy="408432"/>
+            <a:off x="3508248" y="1600200"/>
+            <a:ext cx="5145024" cy="509016"/>
           </a:xfrm>
           <a:prstGeom prst="rect">
             <a:avLst/>
@@ -4110,7 +3984,7 @@
         </p:nvSpPr>
         <p:spPr>
           <a:xfrm>
-            <a:off x="777240" y="3017520"/>
+            <a:off x="777240" y="2612136"/>
             <a:ext cx="10607040" cy="429370"/>
           </a:xfrm>
           <a:prstGeom prst="rect">
@@ -4132,7 +4006,134 @@
                 </a:solidFill>
                 <a:latin typeface="Lexend"/>
               </a:rPr>
-              <a:t>Subtract. Write the answer in scientific notation.</a:t>
+              <a:t>Add. Write the answer in scientific notation.</a:t>
+            </a:r>
+          </a:p>
+        </p:txBody>
+      </p:sp>
+      <p:sp>
+        <p:nvSpPr>
+          <p:cNvPr id="10" name="TextBox 9"/>
+          <p:cNvSpPr txBox="1"/>
+          <p:nvPr/>
+        </p:nvSpPr>
+        <p:spPr>
+          <a:xfrm>
+            <a:off x="2035576" y="3201526"/>
+            <a:ext cx="5987247" cy="457200"/>
+          </a:xfrm>
+          <a:prstGeom prst="rect">
+            <a:avLst/>
+          </a:prstGeom>
+          <a:noFill/>
+        </p:spPr>
+        <p:txBody>
+          <a:bodyPr wrap="none" lIns="45720" rIns="45720" tIns="18288" bIns="18288" anchor="ctr">
+            <a:noAutofit/>
+          </a:bodyPr>
+          <a:lstStyle/>
+          <a:p>
+            <a:pPr algn="l"/>
+            <a:r>
+              <a:rPr sz="2750" b="0" i="0">
+                <a:solidFill>
+                  <a:srgbClr val="1A1A1A"/>
+                </a:solidFill>
+                <a:latin typeface="Lexend"/>
+              </a:rPr>
+              <a:t>Same power, so add the fronts:  </a:t>
+            </a:r>
+          </a:p>
+        </p:txBody>
+      </p:sp>
+      <p:pic>
+        <p:nvPicPr>
+          <p:cNvPr id="11" name="Picture 10" descr="bcb34fa03e0895f9.png"/>
+          <p:cNvPicPr>
+            <a:picLocks noChangeAspect="1"/>
+          </p:cNvPicPr>
+          <p:nvPr/>
+        </p:nvPicPr>
+        <p:blipFill>
+          <a:blip r:embed="rId3"/>
+          <a:stretch>
+            <a:fillRect/>
+          </a:stretch>
+        </p:blipFill>
+        <p:spPr>
+          <a:xfrm>
+            <a:off x="7885663" y="3303634"/>
+            <a:ext cx="2240280" cy="252984"/>
+          </a:xfrm>
+          <a:prstGeom prst="rect">
+            <a:avLst/>
+          </a:prstGeom>
+        </p:spPr>
+      </p:pic>
+      <p:pic>
+        <p:nvPicPr>
+          <p:cNvPr id="12" name="Picture 11" descr="30762fde1252fce0.png"/>
+          <p:cNvPicPr>
+            <a:picLocks noChangeAspect="1"/>
+          </p:cNvPicPr>
+          <p:nvPr/>
+        </p:nvPicPr>
+        <p:blipFill>
+          <a:blip r:embed="rId4"/>
+          <a:stretch>
+            <a:fillRect/>
+          </a:stretch>
+        </p:blipFill>
+        <p:spPr>
+          <a:xfrm>
+            <a:off x="2090440" y="3817222"/>
+            <a:ext cx="3486912" cy="304800"/>
+          </a:xfrm>
+          <a:prstGeom prst="rect">
+            <a:avLst/>
+          </a:prstGeom>
+        </p:spPr>
+      </p:pic>
+      <p:sp>
+        <p:nvSpPr>
+          <p:cNvPr id="13" name="TextBox 12"/>
+          <p:cNvSpPr txBox="1"/>
+          <p:nvPr/>
+        </p:nvSpPr>
+        <p:spPr>
+          <a:xfrm>
+            <a:off x="777240" y="4572000"/>
+            <a:ext cx="10607040" cy="548640"/>
+          </a:xfrm>
+          <a:prstGeom prst="rect">
+            <a:avLst/>
+          </a:prstGeom>
+          <a:noFill/>
+        </p:spPr>
+        <p:txBody>
+          <a:bodyPr wrap="square" lIns="45720" rIns="45720" tIns="18288" bIns="18288" anchor="t">
+            <a:spAutoFit/>
+          </a:bodyPr>
+          <a:lstStyle/>
+          <a:p>
+            <a:pPr algn="ctr"/>
+            <a:r>
+              <a:rPr sz="3040" b="1" i="0">
+                <a:solidFill>
+                  <a:srgbClr val="9E1B32"/>
+                </a:solidFill>
+                <a:latin typeface="Lexend"/>
+              </a:rPr>
+              <a:t>Answer:   1.23 × 10</a:t>
+            </a:r>
+            <a:r>
+              <a:rPr sz="3040" b="1" i="0" baseline="30000">
+                <a:solidFill>
+                  <a:srgbClr val="9E1B32"/>
+                </a:solidFill>
+                <a:latin typeface="Lexend"/>
+              </a:rPr>
+              <a:t>-2</a:t>
             </a:r>
           </a:p>
         </p:txBody>
@@ -4367,7 +4368,7 @@
       </p:sp>
       <p:pic>
         <p:nvPicPr>
-          <p:cNvPr id="8" name="Picture 7" descr="f0014276d232b375.png"/>
+          <p:cNvPr id="8" name="Picture 7" descr="bf4da8d69ae35ff0.png"/>
           <p:cNvPicPr>
             <a:picLocks noChangeAspect="1"/>
           </p:cNvPicPr>
@@ -4381,72 +4382,24 @@
         </p:blipFill>
         <p:spPr>
           <a:xfrm>
-            <a:off x="1828800" y="1920240"/>
-            <a:ext cx="3505200" cy="341376"/>
+            <a:off x="4184903" y="2104643"/>
+            <a:ext cx="3791712" cy="408432"/>
           </a:xfrm>
           <a:prstGeom prst="rect">
             <a:avLst/>
           </a:prstGeom>
         </p:spPr>
       </p:pic>
-      <p:pic>
-        <p:nvPicPr>
-          <p:cNvPr id="9" name="Picture 8" descr="934206aface5fa5c.png"/>
-          <p:cNvPicPr>
-            <a:picLocks noChangeAspect="1"/>
-          </p:cNvPicPr>
-          <p:nvPr/>
-        </p:nvPicPr>
-        <p:blipFill>
-          <a:blip r:embed="rId3"/>
-          <a:stretch>
-            <a:fillRect/>
-          </a:stretch>
-        </p:blipFill>
-        <p:spPr>
-          <a:xfrm>
-            <a:off x="1828800" y="2535936"/>
-            <a:ext cx="6050280" cy="414528"/>
-          </a:xfrm>
-          <a:prstGeom prst="rect">
-            <a:avLst/>
-          </a:prstGeom>
-        </p:spPr>
-      </p:pic>
-      <p:pic>
-        <p:nvPicPr>
-          <p:cNvPr id="10" name="Picture 9" descr="5c58ea87206358f6.png"/>
-          <p:cNvPicPr>
-            <a:picLocks noChangeAspect="1"/>
-          </p:cNvPicPr>
-          <p:nvPr/>
-        </p:nvPicPr>
-        <p:blipFill>
-          <a:blip r:embed="rId4"/>
-          <a:stretch>
-            <a:fillRect/>
-          </a:stretch>
-        </p:blipFill>
-        <p:spPr>
-          <a:xfrm>
-            <a:off x="1828800" y="3224783"/>
-            <a:ext cx="5779008" cy="350520"/>
-          </a:xfrm>
-          <a:prstGeom prst="rect">
-            <a:avLst/>
-          </a:prstGeom>
-        </p:spPr>
-      </p:pic>
-      <p:sp>
-        <p:nvSpPr>
-          <p:cNvPr id="11" name="TextBox 10"/>
-          <p:cNvSpPr txBox="1"/>
-          <p:nvPr/>
-        </p:nvSpPr>
-        <p:spPr>
-          <a:xfrm>
-            <a:off x="777240" y="4572000"/>
-            <a:ext cx="10607040" cy="548640"/>
+      <p:sp>
+        <p:nvSpPr>
+          <p:cNvPr id="9" name="TextBox 8"/>
+          <p:cNvSpPr txBox="1"/>
+          <p:nvPr/>
+        </p:nvSpPr>
+        <p:spPr>
+          <a:xfrm>
+            <a:off x="777240" y="3017520"/>
+            <a:ext cx="10607040" cy="429370"/>
           </a:xfrm>
           <a:prstGeom prst="rect">
             <a:avLst/>
@@ -4461,22 +4414,13 @@
           <a:p>
             <a:pPr algn="ctr"/>
             <a:r>
-              <a:rPr sz="3040" b="1" i="0">
-                <a:solidFill>
-                  <a:srgbClr val="9E1B32"/>
-                </a:solidFill>
-                <a:latin typeface="Lexend"/>
-              </a:rPr>
-              <a:t>Answer:   6.85 × 10</a:t>
-            </a:r>
-            <a:r>
-              <a:rPr sz="3040" b="1" i="0" baseline="30000">
-                <a:solidFill>
-                  <a:srgbClr val="9E1B32"/>
-                </a:solidFill>
-                <a:latin typeface="Lexend"/>
-              </a:rPr>
-              <a:t>6</a:t>
+              <a:rPr sz="2280" b="1" i="0">
+                <a:solidFill>
+                  <a:srgbClr val="1A1A1A"/>
+                </a:solidFill>
+                <a:latin typeface="Lexend"/>
+              </a:rPr>
+              <a:t>Subtract. Write the answer in scientific notation.</a:t>
             </a:r>
           </a:p>
         </p:txBody>
@@ -4529,7 +4473,7 @@
                 </a:solidFill>
                 <a:latin typeface="Lexend"/>
               </a:rPr>
-              <a:t>Your Turn</a:t>
+              <a:t>Example 2</a:t>
             </a:r>
           </a:p>
         </p:txBody>
@@ -4711,7 +4655,7 @@
       </p:sp>
       <p:pic>
         <p:nvPicPr>
-          <p:cNvPr id="8" name="Picture 7" descr="1b8e06632cef401d.png"/>
+          <p:cNvPr id="8" name="Picture 7" descr="f0014276d232b375.png"/>
           <p:cNvPicPr>
             <a:picLocks noChangeAspect="1"/>
           </p:cNvPicPr>
@@ -4725,24 +4669,72 @@
         </p:blipFill>
         <p:spPr>
           <a:xfrm>
-            <a:off x="3499104" y="1600200"/>
-            <a:ext cx="5163312" cy="512064"/>
+            <a:off x="1828800" y="1920240"/>
+            <a:ext cx="3505200" cy="341376"/>
           </a:xfrm>
           <a:prstGeom prst="rect">
             <a:avLst/>
           </a:prstGeom>
         </p:spPr>
       </p:pic>
-      <p:sp>
-        <p:nvSpPr>
-          <p:cNvPr id="9" name="TextBox 8"/>
-          <p:cNvSpPr txBox="1"/>
-          <p:nvPr/>
-        </p:nvSpPr>
-        <p:spPr>
-          <a:xfrm>
-            <a:off x="777240" y="2615184"/>
-            <a:ext cx="10607040" cy="429370"/>
+      <p:pic>
+        <p:nvPicPr>
+          <p:cNvPr id="9" name="Picture 8" descr="934206aface5fa5c.png"/>
+          <p:cNvPicPr>
+            <a:picLocks noChangeAspect="1"/>
+          </p:cNvPicPr>
+          <p:nvPr/>
+        </p:nvPicPr>
+        <p:blipFill>
+          <a:blip r:embed="rId3"/>
+          <a:stretch>
+            <a:fillRect/>
+          </a:stretch>
+        </p:blipFill>
+        <p:spPr>
+          <a:xfrm>
+            <a:off x="1828800" y="2535936"/>
+            <a:ext cx="6050280" cy="414528"/>
+          </a:xfrm>
+          <a:prstGeom prst="rect">
+            <a:avLst/>
+          </a:prstGeom>
+        </p:spPr>
+      </p:pic>
+      <p:pic>
+        <p:nvPicPr>
+          <p:cNvPr id="10" name="Picture 9" descr="5c58ea87206358f6.png"/>
+          <p:cNvPicPr>
+            <a:picLocks noChangeAspect="1"/>
+          </p:cNvPicPr>
+          <p:nvPr/>
+        </p:nvPicPr>
+        <p:blipFill>
+          <a:blip r:embed="rId4"/>
+          <a:stretch>
+            <a:fillRect/>
+          </a:stretch>
+        </p:blipFill>
+        <p:spPr>
+          <a:xfrm>
+            <a:off x="1828800" y="3224783"/>
+            <a:ext cx="5779008" cy="350520"/>
+          </a:xfrm>
+          <a:prstGeom prst="rect">
+            <a:avLst/>
+          </a:prstGeom>
+        </p:spPr>
+      </p:pic>
+      <p:sp>
+        <p:nvSpPr>
+          <p:cNvPr id="11" name="TextBox 10"/>
+          <p:cNvSpPr txBox="1"/>
+          <p:nvPr/>
+        </p:nvSpPr>
+        <p:spPr>
+          <a:xfrm>
+            <a:off x="777240" y="4572000"/>
+            <a:ext cx="10607040" cy="548640"/>
           </a:xfrm>
           <a:prstGeom prst="rect">
             <a:avLst/>
@@ -4757,13 +4749,22 @@
           <a:p>
             <a:pPr algn="ctr"/>
             <a:r>
-              <a:rPr sz="2280" b="1" i="0">
-                <a:solidFill>
-                  <a:srgbClr val="1A1A1A"/>
-                </a:solidFill>
-                <a:latin typeface="Lexend"/>
-              </a:rPr>
-              <a:t>Subtract. Write the answer in scientific notation.</a:t>
+              <a:rPr sz="3040" b="1" i="0">
+                <a:solidFill>
+                  <a:srgbClr val="9E1B32"/>
+                </a:solidFill>
+                <a:latin typeface="Lexend"/>
+              </a:rPr>
+              <a:t>Answer:   6.85 × 10</a:t>
+            </a:r>
+            <a:r>
+              <a:rPr sz="3040" b="1" i="0" baseline="30000">
+                <a:solidFill>
+                  <a:srgbClr val="9E1B32"/>
+                </a:solidFill>
+                <a:latin typeface="Lexend"/>
+              </a:rPr>
+              <a:t>6</a:t>
             </a:r>
           </a:p>
         </p:txBody>
@@ -4998,7 +4999,7 @@
       </p:sp>
       <p:pic>
         <p:nvPicPr>
-          <p:cNvPr id="8" name="Picture 7" descr="248bda730bf17b84.png"/>
+          <p:cNvPr id="8" name="Picture 7" descr="1b8e06632cef401d.png"/>
           <p:cNvPicPr>
             <a:picLocks noChangeAspect="1"/>
           </p:cNvPicPr>
@@ -5012,8 +5013,8 @@
         </p:blipFill>
         <p:spPr>
           <a:xfrm>
-            <a:off x="3497579" y="1600200"/>
-            <a:ext cx="5166360" cy="512064"/>
+            <a:off x="3499104" y="1600200"/>
+            <a:ext cx="5163312" cy="512064"/>
           </a:xfrm>
           <a:prstGeom prst="rect">
             <a:avLst/>
@@ -5051,157 +5052,6 @@
                 <a:latin typeface="Lexend"/>
               </a:rPr>
               <a:t>Subtract. Write the answer in scientific notation.</a:t>
-            </a:r>
-          </a:p>
-        </p:txBody>
-      </p:sp>
-      <p:sp>
-        <p:nvSpPr>
-          <p:cNvPr id="10" name="TextBox 9"/>
-          <p:cNvSpPr txBox="1"/>
-          <p:nvPr/>
-        </p:nvSpPr>
-        <p:spPr>
-          <a:xfrm>
-            <a:off x="3113393" y="3204574"/>
-            <a:ext cx="3154956" cy="457200"/>
-          </a:xfrm>
-          <a:prstGeom prst="rect">
-            <a:avLst/>
-          </a:prstGeom>
-          <a:noFill/>
-        </p:spPr>
-        <p:txBody>
-          <a:bodyPr wrap="none" lIns="45720" rIns="45720" tIns="18288" bIns="18288" anchor="ctr">
-            <a:noAutofit/>
-          </a:bodyPr>
-          <a:lstStyle/>
-          <a:p>
-            <a:pPr algn="l"/>
-            <a:r>
-              <a:rPr sz="2330" b="0" i="0">
-                <a:solidFill>
-                  <a:srgbClr val="1A1A1A"/>
-                </a:solidFill>
-                <a:latin typeface="Lexend"/>
-              </a:rPr>
-              <a:t>Match the powers:  </a:t>
-            </a:r>
-          </a:p>
-        </p:txBody>
-      </p:sp>
-      <p:pic>
-        <p:nvPicPr>
-          <p:cNvPr id="11" name="Picture 10" descr="9ce2865529b18e92.png"/>
-          <p:cNvPicPr>
-            <a:picLocks noChangeAspect="1"/>
-          </p:cNvPicPr>
-          <p:nvPr/>
-        </p:nvPicPr>
-        <p:blipFill>
-          <a:blip r:embed="rId3"/>
-          <a:stretch>
-            <a:fillRect/>
-          </a:stretch>
-        </p:blipFill>
-        <p:spPr>
-          <a:xfrm>
-            <a:off x="6131190" y="3302110"/>
-            <a:ext cx="2913888" cy="262128"/>
-          </a:xfrm>
-          <a:prstGeom prst="rect">
-            <a:avLst/>
-          </a:prstGeom>
-        </p:spPr>
-      </p:pic>
-      <p:pic>
-        <p:nvPicPr>
-          <p:cNvPr id="12" name="Picture 11" descr="bd4649ecf62b8ad3.png"/>
-          <p:cNvPicPr>
-            <a:picLocks noChangeAspect="1"/>
-          </p:cNvPicPr>
-          <p:nvPr/>
-        </p:nvPicPr>
-        <p:blipFill>
-          <a:blip r:embed="rId4"/>
-          <a:stretch>
-            <a:fillRect/>
-          </a:stretch>
-        </p:blipFill>
-        <p:spPr>
-          <a:xfrm>
-            <a:off x="3168257" y="3829414"/>
-            <a:ext cx="2069591" cy="213360"/>
-          </a:xfrm>
-          <a:prstGeom prst="rect">
-            <a:avLst/>
-          </a:prstGeom>
-        </p:spPr>
-      </p:pic>
-      <p:pic>
-        <p:nvPicPr>
-          <p:cNvPr id="13" name="Picture 12" descr="fb181fe42321e2e1.png"/>
-          <p:cNvPicPr>
-            <a:picLocks noChangeAspect="1"/>
-          </p:cNvPicPr>
-          <p:nvPr/>
-        </p:nvPicPr>
-        <p:blipFill>
-          <a:blip r:embed="rId5"/>
-          <a:stretch>
-            <a:fillRect/>
-          </a:stretch>
-        </p:blipFill>
-        <p:spPr>
-          <a:xfrm>
-            <a:off x="3168257" y="4310998"/>
-            <a:ext cx="1362456" cy="256032"/>
-          </a:xfrm>
-          <a:prstGeom prst="rect">
-            <a:avLst/>
-          </a:prstGeom>
-        </p:spPr>
-      </p:pic>
-      <p:sp>
-        <p:nvSpPr>
-          <p:cNvPr id="14" name="TextBox 13"/>
-          <p:cNvSpPr txBox="1"/>
-          <p:nvPr/>
-        </p:nvSpPr>
-        <p:spPr>
-          <a:xfrm>
-            <a:off x="777240" y="4781914"/>
-            <a:ext cx="10607040" cy="548640"/>
-          </a:xfrm>
-          <a:prstGeom prst="rect">
-            <a:avLst/>
-          </a:prstGeom>
-          <a:noFill/>
-        </p:spPr>
-        <p:txBody>
-          <a:bodyPr wrap="square" lIns="45720" rIns="45720" tIns="18288" bIns="18288" anchor="t">
-            <a:spAutoFit/>
-          </a:bodyPr>
-          <a:lstStyle/>
-          <a:p>
-            <a:pPr algn="ctr"/>
-            <a:r>
-              <a:rPr sz="3040" b="1" i="0">
-                <a:solidFill>
-                  <a:srgbClr val="9E1B32"/>
-                </a:solidFill>
-                <a:latin typeface="Lexend"/>
-              </a:rPr>
-              <a:t>Answer:   5.51 × 10</a:t>
-            </a:r>
-            <a:r>
-              <a:rPr sz="3040" b="1" i="0" baseline="30000">
-                <a:solidFill>
-                  <a:srgbClr val="9E1B32"/>
-                </a:solidFill>
-                <a:latin typeface="Lexend"/>
-              </a:rPr>
-              <a:t>-4</a:t>
             </a:r>
           </a:p>
         </p:txBody>
@@ -5248,13 +5098,13 @@
           <a:p>
             <a:pPr algn="l"/>
             <a:r>
-              <a:rPr sz="3229" b="1" i="0">
+              <a:rPr sz="3420" b="1" i="0">
                 <a:solidFill>
                   <a:srgbClr val="1A1A1A"/>
                 </a:solidFill>
                 <a:latin typeface="Lexend"/>
               </a:rPr>
-              <a:t>Whiteboards   ·   Question 1 of 9</a:t>
+              <a:t>Your Turn</a:t>
             </a:r>
           </a:p>
         </p:txBody>
@@ -5436,7 +5286,7 @@
       </p:sp>
       <p:pic>
         <p:nvPicPr>
-          <p:cNvPr id="8" name="Picture 7" descr="09fad54e403494e1.png"/>
+          <p:cNvPr id="8" name="Picture 7" descr="248bda730bf17b84.png"/>
           <p:cNvPicPr>
             <a:picLocks noChangeAspect="1"/>
           </p:cNvPicPr>
@@ -5450,8 +5300,8 @@
         </p:blipFill>
         <p:spPr>
           <a:xfrm>
-            <a:off x="4192524" y="2197608"/>
-            <a:ext cx="3776472" cy="405384"/>
+            <a:off x="3497579" y="1600200"/>
+            <a:ext cx="5166360" cy="512064"/>
           </a:xfrm>
           <a:prstGeom prst="rect">
             <a:avLst/>
@@ -5466,8 +5316,8 @@
         </p:nvSpPr>
         <p:spPr>
           <a:xfrm>
-            <a:off x="777240" y="4343400"/>
-            <a:ext cx="10607040" cy="457200"/>
+            <a:off x="777240" y="2615184"/>
+            <a:ext cx="10607040" cy="429370"/>
           </a:xfrm>
           <a:prstGeom prst="rect">
             <a:avLst/>
@@ -5482,13 +5332,164 @@
           <a:p>
             <a:pPr algn="ctr"/>
             <a:r>
-              <a:rPr sz="2470" b="1" i="0">
+              <a:rPr sz="2280" b="1" i="0">
                 <a:solidFill>
                   <a:srgbClr val="1A1A1A"/>
                 </a:solidFill>
                 <a:latin typeface="Lexend"/>
               </a:rPr>
-              <a:t>Answer it.</a:t>
+              <a:t>Subtract. Write the answer in scientific notation.</a:t>
+            </a:r>
+          </a:p>
+        </p:txBody>
+      </p:sp>
+      <p:sp>
+        <p:nvSpPr>
+          <p:cNvPr id="10" name="TextBox 9"/>
+          <p:cNvSpPr txBox="1"/>
+          <p:nvPr/>
+        </p:nvSpPr>
+        <p:spPr>
+          <a:xfrm>
+            <a:off x="3113393" y="3204574"/>
+            <a:ext cx="3154956" cy="457200"/>
+          </a:xfrm>
+          <a:prstGeom prst="rect">
+            <a:avLst/>
+          </a:prstGeom>
+          <a:noFill/>
+        </p:spPr>
+        <p:txBody>
+          <a:bodyPr wrap="none" lIns="45720" rIns="45720" tIns="18288" bIns="18288" anchor="ctr">
+            <a:noAutofit/>
+          </a:bodyPr>
+          <a:lstStyle/>
+          <a:p>
+            <a:pPr algn="l"/>
+            <a:r>
+              <a:rPr sz="2330" b="0" i="0">
+                <a:solidFill>
+                  <a:srgbClr val="1A1A1A"/>
+                </a:solidFill>
+                <a:latin typeface="Lexend"/>
+              </a:rPr>
+              <a:t>Match the powers:  </a:t>
+            </a:r>
+          </a:p>
+        </p:txBody>
+      </p:sp>
+      <p:pic>
+        <p:nvPicPr>
+          <p:cNvPr id="11" name="Picture 10" descr="9ce2865529b18e92.png"/>
+          <p:cNvPicPr>
+            <a:picLocks noChangeAspect="1"/>
+          </p:cNvPicPr>
+          <p:nvPr/>
+        </p:nvPicPr>
+        <p:blipFill>
+          <a:blip r:embed="rId3"/>
+          <a:stretch>
+            <a:fillRect/>
+          </a:stretch>
+        </p:blipFill>
+        <p:spPr>
+          <a:xfrm>
+            <a:off x="6131190" y="3302110"/>
+            <a:ext cx="2913888" cy="262128"/>
+          </a:xfrm>
+          <a:prstGeom prst="rect">
+            <a:avLst/>
+          </a:prstGeom>
+        </p:spPr>
+      </p:pic>
+      <p:pic>
+        <p:nvPicPr>
+          <p:cNvPr id="12" name="Picture 11" descr="bd4649ecf62b8ad3.png"/>
+          <p:cNvPicPr>
+            <a:picLocks noChangeAspect="1"/>
+          </p:cNvPicPr>
+          <p:nvPr/>
+        </p:nvPicPr>
+        <p:blipFill>
+          <a:blip r:embed="rId4"/>
+          <a:stretch>
+            <a:fillRect/>
+          </a:stretch>
+        </p:blipFill>
+        <p:spPr>
+          <a:xfrm>
+            <a:off x="3168257" y="3829414"/>
+            <a:ext cx="2069591" cy="213360"/>
+          </a:xfrm>
+          <a:prstGeom prst="rect">
+            <a:avLst/>
+          </a:prstGeom>
+        </p:spPr>
+      </p:pic>
+      <p:pic>
+        <p:nvPicPr>
+          <p:cNvPr id="13" name="Picture 12" descr="fb181fe42321e2e1.png"/>
+          <p:cNvPicPr>
+            <a:picLocks noChangeAspect="1"/>
+          </p:cNvPicPr>
+          <p:nvPr/>
+        </p:nvPicPr>
+        <p:blipFill>
+          <a:blip r:embed="rId5"/>
+          <a:stretch>
+            <a:fillRect/>
+          </a:stretch>
+        </p:blipFill>
+        <p:spPr>
+          <a:xfrm>
+            <a:off x="3168257" y="4310998"/>
+            <a:ext cx="1362456" cy="256032"/>
+          </a:xfrm>
+          <a:prstGeom prst="rect">
+            <a:avLst/>
+          </a:prstGeom>
+        </p:spPr>
+      </p:pic>
+      <p:sp>
+        <p:nvSpPr>
+          <p:cNvPr id="14" name="TextBox 13"/>
+          <p:cNvSpPr txBox="1"/>
+          <p:nvPr/>
+        </p:nvSpPr>
+        <p:spPr>
+          <a:xfrm>
+            <a:off x="777240" y="4781914"/>
+            <a:ext cx="10607040" cy="548640"/>
+          </a:xfrm>
+          <a:prstGeom prst="rect">
+            <a:avLst/>
+          </a:prstGeom>
+          <a:noFill/>
+        </p:spPr>
+        <p:txBody>
+          <a:bodyPr wrap="square" lIns="45720" rIns="45720" tIns="18288" bIns="18288" anchor="t">
+            <a:spAutoFit/>
+          </a:bodyPr>
+          <a:lstStyle/>
+          <a:p>
+            <a:pPr algn="ctr"/>
+            <a:r>
+              <a:rPr sz="3040" b="1" i="0">
+                <a:solidFill>
+                  <a:srgbClr val="9E1B32"/>
+                </a:solidFill>
+                <a:latin typeface="Lexend"/>
+              </a:rPr>
+              <a:t>Answer:   5.51 × 10</a:t>
+            </a:r>
+            <a:r>
+              <a:rPr sz="3040" b="1" i="0" baseline="30000">
+                <a:solidFill>
+                  <a:srgbClr val="9E1B32"/>
+                </a:solidFill>
+                <a:latin typeface="Lexend"/>
+              </a:rPr>
+              <a:t>-4</a:t>
             </a:r>
           </a:p>
         </p:txBody>
@@ -5723,7 +5724,7 @@
       </p:sp>
       <p:pic>
         <p:nvPicPr>
-          <p:cNvPr id="8" name="Picture 7" descr="2a3c75618fa7d5a2.png"/>
+          <p:cNvPr id="8" name="Picture 7" descr="09fad54e403494e1.png"/>
           <p:cNvPicPr>
             <a:picLocks noChangeAspect="1"/>
           </p:cNvPicPr>
@@ -5737,8 +5738,8 @@
         </p:blipFill>
         <p:spPr>
           <a:xfrm>
-            <a:off x="4190999" y="2106168"/>
-            <a:ext cx="3779520" cy="405384"/>
+            <a:off x="4192524" y="2197608"/>
+            <a:ext cx="3776472" cy="405384"/>
           </a:xfrm>
           <a:prstGeom prst="rect">
             <a:avLst/>
@@ -5753,91 +5754,8 @@
         </p:nvSpPr>
         <p:spPr>
           <a:xfrm>
-            <a:off x="2142256" y="2839212"/>
-            <a:ext cx="5987247" cy="457200"/>
-          </a:xfrm>
-          <a:prstGeom prst="rect">
-            <a:avLst/>
-          </a:prstGeom>
-          <a:noFill/>
-        </p:spPr>
-        <p:txBody>
-          <a:bodyPr wrap="none" lIns="45720" rIns="45720" tIns="18288" bIns="18288" anchor="ctr">
-            <a:noAutofit/>
-          </a:bodyPr>
-          <a:lstStyle/>
-          <a:p>
-            <a:pPr algn="l"/>
-            <a:r>
-              <a:rPr sz="2750" b="0" i="0">
-                <a:solidFill>
-                  <a:srgbClr val="1A1A1A"/>
-                </a:solidFill>
-                <a:latin typeface="Lexend"/>
-              </a:rPr>
-              <a:t>Same power, so add the fronts:  </a:t>
-            </a:r>
-          </a:p>
-        </p:txBody>
-      </p:sp>
-      <p:pic>
-        <p:nvPicPr>
-          <p:cNvPr id="10" name="Picture 9" descr="691fe688d72e9def.png"/>
-          <p:cNvPicPr>
-            <a:picLocks noChangeAspect="1"/>
-          </p:cNvPicPr>
-          <p:nvPr/>
-        </p:nvPicPr>
-        <p:blipFill>
-          <a:blip r:embed="rId3"/>
-          <a:stretch>
-            <a:fillRect/>
-          </a:stretch>
-        </p:blipFill>
-        <p:spPr>
-          <a:xfrm>
-            <a:off x="7992343" y="2941320"/>
-            <a:ext cx="2026920" cy="252984"/>
-          </a:xfrm>
-          <a:prstGeom prst="rect">
-            <a:avLst/>
-          </a:prstGeom>
-        </p:spPr>
-      </p:pic>
-      <p:pic>
-        <p:nvPicPr>
-          <p:cNvPr id="11" name="Picture 10" descr="b4ec2c46247ef025.png"/>
-          <p:cNvPicPr>
-            <a:picLocks noChangeAspect="1"/>
-          </p:cNvPicPr>
-          <p:nvPr/>
-        </p:nvPicPr>
-        <p:blipFill>
-          <a:blip r:embed="rId4"/>
-          <a:stretch>
-            <a:fillRect/>
-          </a:stretch>
-        </p:blipFill>
-        <p:spPr>
-          <a:xfrm>
-            <a:off x="2197120" y="3454908"/>
-            <a:ext cx="1246632" cy="304800"/>
-          </a:xfrm>
-          <a:prstGeom prst="rect">
-            <a:avLst/>
-          </a:prstGeom>
-        </p:spPr>
-      </p:pic>
-      <p:sp>
-        <p:nvSpPr>
-          <p:cNvPr id="12" name="TextBox 11"/>
-          <p:cNvSpPr txBox="1"/>
-          <p:nvPr/>
-        </p:nvSpPr>
-        <p:spPr>
-          <a:xfrm>
-            <a:off x="777240" y="4663440"/>
-            <a:ext cx="10607040" cy="548640"/>
+            <a:off x="777240" y="4343400"/>
+            <a:ext cx="10607040" cy="457200"/>
           </a:xfrm>
           <a:prstGeom prst="rect">
             <a:avLst/>
@@ -5852,22 +5770,13 @@
           <a:p>
             <a:pPr algn="ctr"/>
             <a:r>
-              <a:rPr sz="3040" b="1" i="0">
-                <a:solidFill>
-                  <a:srgbClr val="9E1B32"/>
-                </a:solidFill>
-                <a:latin typeface="Lexend"/>
-              </a:rPr>
-              <a:t>Answer:   7.3 × 10</a:t>
-            </a:r>
-            <a:r>
-              <a:rPr sz="3040" b="1" i="0" baseline="30000">
-                <a:solidFill>
-                  <a:srgbClr val="9E1B32"/>
-                </a:solidFill>
-                <a:latin typeface="Lexend"/>
-              </a:rPr>
-              <a:t>5</a:t>
+              <a:rPr sz="2470" b="1" i="0">
+                <a:solidFill>
+                  <a:srgbClr val="1A1A1A"/>
+                </a:solidFill>
+                <a:latin typeface="Lexend"/>
+              </a:rPr>
+              <a:t>Answer it.</a:t>
             </a:r>
           </a:p>
         </p:txBody>
@@ -5920,7 +5829,7 @@
                 </a:solidFill>
                 <a:latin typeface="Lexend"/>
               </a:rPr>
-              <a:t>Whiteboards   ·   Question 2 of 9</a:t>
+              <a:t>Whiteboards   ·   Question 1 of 9</a:t>
             </a:r>
           </a:p>
         </p:txBody>
@@ -6100,44 +6009,9 @@
           </a:p>
         </p:txBody>
       </p:sp>
-      <p:sp>
-        <p:nvSpPr>
-          <p:cNvPr id="8" name="TextBox 7"/>
-          <p:cNvSpPr txBox="1"/>
-          <p:nvPr/>
-        </p:nvSpPr>
-        <p:spPr>
-          <a:xfrm>
-            <a:off x="1234440" y="1851660"/>
-            <a:ext cx="2579155" cy="457200"/>
-          </a:xfrm>
-          <a:prstGeom prst="rect">
-            <a:avLst/>
-          </a:prstGeom>
-          <a:noFill/>
-        </p:spPr>
-        <p:txBody>
-          <a:bodyPr wrap="none" lIns="45720" rIns="45720" tIns="18288" bIns="18288" anchor="ctr">
-            <a:noAutofit/>
-          </a:bodyPr>
-          <a:lstStyle/>
-          <a:p>
-            <a:pPr algn="l"/>
-            <a:r>
-              <a:rPr sz="2280" b="0" i="0">
-                <a:solidFill>
-                  <a:srgbClr val="1A1A1A"/>
-                </a:solidFill>
-                <a:latin typeface="Lexend"/>
-              </a:rPr>
-              <a:t>A stadium sold  </a:t>
-            </a:r>
-          </a:p>
-        </p:txBody>
-      </p:sp>
       <p:pic>
         <p:nvPicPr>
-          <p:cNvPr id="9" name="Picture 8" descr="5243cc360be291af.png"/>
+          <p:cNvPr id="8" name="Picture 7" descr="2a3c75618fa7d5a2.png"/>
           <p:cNvPicPr>
             <a:picLocks noChangeAspect="1"/>
           </p:cNvPicPr>
@@ -6151,8 +6025,8 @@
         </p:blipFill>
         <p:spPr>
           <a:xfrm>
-            <a:off x="3676435" y="1944623"/>
-            <a:ext cx="1173480" cy="271272"/>
+            <a:off x="4190999" y="2106168"/>
+            <a:ext cx="3779520" cy="405384"/>
           </a:xfrm>
           <a:prstGeom prst="rect">
             <a:avLst/>
@@ -6161,14 +6035,14 @@
       </p:pic>
       <p:sp>
         <p:nvSpPr>
-          <p:cNvPr id="10" name="TextBox 9"/>
-          <p:cNvSpPr txBox="1"/>
-          <p:nvPr/>
-        </p:nvSpPr>
-        <p:spPr>
-          <a:xfrm>
-            <a:off x="4849915" y="1851660"/>
-            <a:ext cx="2865857" cy="457200"/>
+          <p:cNvPr id="9" name="TextBox 8"/>
+          <p:cNvSpPr txBox="1"/>
+          <p:nvPr/>
+        </p:nvSpPr>
+        <p:spPr>
+          <a:xfrm>
+            <a:off x="2142256" y="2839212"/>
+            <a:ext cx="5987247" cy="457200"/>
           </a:xfrm>
           <a:prstGeom prst="rect">
             <a:avLst/>
@@ -6183,55 +6057,20 @@
           <a:p>
             <a:pPr algn="l"/>
             <a:r>
-              <a:rPr sz="2280" b="0" i="0">
+              <a:rPr sz="2750" b="0" i="0">
                 <a:solidFill>
                   <a:srgbClr val="1A1A1A"/>
                 </a:solidFill>
                 <a:latin typeface="Lexend"/>
               </a:rPr>
-              <a:t>  tickets on Friday</a:t>
-            </a:r>
-          </a:p>
-        </p:txBody>
-      </p:sp>
-      <p:sp>
-        <p:nvSpPr>
-          <p:cNvPr id="11" name="TextBox 10"/>
-          <p:cNvSpPr txBox="1"/>
-          <p:nvPr/>
-        </p:nvSpPr>
-        <p:spPr>
-          <a:xfrm>
-            <a:off x="1234440" y="2464308"/>
-            <a:ext cx="953666" cy="457200"/>
-          </a:xfrm>
-          <a:prstGeom prst="rect">
-            <a:avLst/>
-          </a:prstGeom>
-          <a:noFill/>
-        </p:spPr>
-        <p:txBody>
-          <a:bodyPr wrap="none" lIns="45720" rIns="45720" tIns="18288" bIns="18288" anchor="ctr">
-            <a:noAutofit/>
-          </a:bodyPr>
-          <a:lstStyle/>
-          <a:p>
-            <a:pPr algn="l"/>
-            <a:r>
-              <a:rPr sz="2280" b="0" i="0">
-                <a:solidFill>
-                  <a:srgbClr val="1A1A1A"/>
-                </a:solidFill>
-                <a:latin typeface="Lexend"/>
-              </a:rPr>
-              <a:t>and  </a:t>
+              <a:t>Same power, so add the fronts:  </a:t>
             </a:r>
           </a:p>
         </p:txBody>
       </p:sp>
       <p:pic>
         <p:nvPicPr>
-          <p:cNvPr id="12" name="Picture 11" descr="5ce3a6a6b398a32a.png"/>
+          <p:cNvPr id="10" name="Picture 9" descr="691fe688d72e9def.png"/>
           <p:cNvPicPr>
             <a:picLocks noChangeAspect="1"/>
           </p:cNvPicPr>
@@ -6245,59 +6084,48 @@
         </p:blipFill>
         <p:spPr>
           <a:xfrm>
-            <a:off x="2050946" y="2557272"/>
-            <a:ext cx="1152144" cy="271272"/>
+            <a:off x="7992343" y="2941320"/>
+            <a:ext cx="2026920" cy="252984"/>
           </a:xfrm>
           <a:prstGeom prst="rect">
             <a:avLst/>
           </a:prstGeom>
         </p:spPr>
       </p:pic>
-      <p:sp>
-        <p:nvSpPr>
-          <p:cNvPr id="13" name="TextBox 12"/>
-          <p:cNvSpPr txBox="1"/>
-          <p:nvPr/>
-        </p:nvSpPr>
-        <p:spPr>
-          <a:xfrm>
-            <a:off x="3203090" y="2464308"/>
-            <a:ext cx="6284639" cy="457200"/>
-          </a:xfrm>
-          <a:prstGeom prst="rect">
-            <a:avLst/>
-          </a:prstGeom>
-          <a:noFill/>
-        </p:spPr>
-        <p:txBody>
-          <a:bodyPr wrap="none" lIns="45720" rIns="45720" tIns="18288" bIns="18288" anchor="ctr">
-            <a:noAutofit/>
-          </a:bodyPr>
-          <a:lstStyle/>
-          <a:p>
-            <a:pPr algn="l"/>
-            <a:r>
-              <a:rPr sz="2280" b="0" i="0">
-                <a:solidFill>
-                  <a:srgbClr val="1A1A1A"/>
-                </a:solidFill>
-                <a:latin typeface="Lexend"/>
-              </a:rPr>
-              <a:t>  on Saturday. Each ticket cost 38 dollars.</a:t>
-            </a:r>
-          </a:p>
-        </p:txBody>
-      </p:sp>
-      <p:sp>
-        <p:nvSpPr>
-          <p:cNvPr id="14" name="TextBox 13"/>
-          <p:cNvSpPr txBox="1"/>
-          <p:nvPr/>
-        </p:nvSpPr>
-        <p:spPr>
-          <a:xfrm>
-            <a:off x="1234440" y="3099816"/>
-            <a:ext cx="10058400" cy="429370"/>
+      <p:pic>
+        <p:nvPicPr>
+          <p:cNvPr id="11" name="Picture 10" descr="b4ec2c46247ef025.png"/>
+          <p:cNvPicPr>
+            <a:picLocks noChangeAspect="1"/>
+          </p:cNvPicPr>
+          <p:nvPr/>
+        </p:nvPicPr>
+        <p:blipFill>
+          <a:blip r:embed="rId4"/>
+          <a:stretch>
+            <a:fillRect/>
+          </a:stretch>
+        </p:blipFill>
+        <p:spPr>
+          <a:xfrm>
+            <a:off x="2197120" y="3454908"/>
+            <a:ext cx="1246632" cy="304800"/>
+          </a:xfrm>
+          <a:prstGeom prst="rect">
+            <a:avLst/>
+          </a:prstGeom>
+        </p:spPr>
+      </p:pic>
+      <p:sp>
+        <p:nvSpPr>
+          <p:cNvPr id="12" name="TextBox 11"/>
+          <p:cNvSpPr txBox="1"/>
+          <p:nvPr/>
+        </p:nvSpPr>
+        <p:spPr>
+          <a:xfrm>
+            <a:off x="777240" y="4663440"/>
+            <a:ext cx="10607040" cy="548640"/>
           </a:xfrm>
           <a:prstGeom prst="rect">
             <a:avLst/>
@@ -6310,50 +6138,24 @@
           </a:bodyPr>
           <a:lstStyle/>
           <a:p>
-            <a:pPr algn="l"/>
-            <a:r>
-              <a:rPr sz="2280" b="1" i="0">
-                <a:solidFill>
-                  <a:srgbClr val="1A1A1A"/>
-                </a:solidFill>
-                <a:latin typeface="Lexend"/>
-              </a:rPr>
-              <a:t>How many tickets were sold on the two days?</a:t>
-            </a:r>
-          </a:p>
-        </p:txBody>
-      </p:sp>
-      <p:sp>
-        <p:nvSpPr>
-          <p:cNvPr id="15" name="TextBox 14"/>
-          <p:cNvSpPr txBox="1"/>
-          <p:nvPr/>
-        </p:nvSpPr>
-        <p:spPr>
-          <a:xfrm>
-            <a:off x="777240" y="4343400"/>
-            <a:ext cx="10607040" cy="457200"/>
-          </a:xfrm>
-          <a:prstGeom prst="rect">
-            <a:avLst/>
-          </a:prstGeom>
-          <a:noFill/>
-        </p:spPr>
-        <p:txBody>
-          <a:bodyPr wrap="square" lIns="45720" rIns="45720" tIns="18288" bIns="18288" anchor="t">
-            <a:spAutoFit/>
-          </a:bodyPr>
-          <a:lstStyle/>
-          <a:p>
             <a:pPr algn="ctr"/>
             <a:r>
-              <a:rPr sz="2470" b="1" i="0">
-                <a:solidFill>
-                  <a:srgbClr val="1A1A1A"/>
-                </a:solidFill>
-                <a:latin typeface="Lexend"/>
-              </a:rPr>
-              <a:t>Answer it.</a:t>
+              <a:rPr sz="3040" b="1" i="0">
+                <a:solidFill>
+                  <a:srgbClr val="9E1B32"/>
+                </a:solidFill>
+                <a:latin typeface="Lexend"/>
+              </a:rPr>
+              <a:t>Answer:   7.3 × 10</a:t>
+            </a:r>
+            <a:r>
+              <a:rPr sz="3040" b="1" i="0" baseline="30000">
+                <a:solidFill>
+                  <a:srgbClr val="9E1B32"/>
+                </a:solidFill>
+                <a:latin typeface="Lexend"/>
+              </a:rPr>
+              <a:t>5</a:t>
             </a:r>
           </a:p>
         </p:txBody>
@@ -6623,7 +6425,7 @@
       </p:sp>
       <p:pic>
         <p:nvPicPr>
-          <p:cNvPr id="9" name="Picture 8" descr="a8bb2f17f73fb1a5.png"/>
+          <p:cNvPr id="9" name="Picture 8" descr="5243cc360be291af.png"/>
           <p:cNvPicPr>
             <a:picLocks noChangeAspect="1"/>
           </p:cNvPicPr>
@@ -6637,8 +6439,8 @@
         </p:blipFill>
         <p:spPr>
           <a:xfrm>
-            <a:off x="3676435" y="1943100"/>
-            <a:ext cx="1173480" cy="274320"/>
+            <a:off x="3676435" y="1944623"/>
+            <a:ext cx="1173480" cy="271272"/>
           </a:xfrm>
           <a:prstGeom prst="rect">
             <a:avLst/>
@@ -6717,7 +6519,7 @@
       </p:sp>
       <p:pic>
         <p:nvPicPr>
-          <p:cNvPr id="12" name="Picture 11" descr="ca70dd33a6d37a9b.png"/>
+          <p:cNvPr id="12" name="Picture 11" descr="5ce3a6a6b398a32a.png"/>
           <p:cNvPicPr>
             <a:picLocks noChangeAspect="1"/>
           </p:cNvPicPr>
@@ -6731,8 +6533,8 @@
         </p:blipFill>
         <p:spPr>
           <a:xfrm>
-            <a:off x="2050946" y="2555748"/>
-            <a:ext cx="1155192" cy="274320"/>
+            <a:off x="2050946" y="2557272"/>
+            <a:ext cx="1152144" cy="271272"/>
           </a:xfrm>
           <a:prstGeom prst="rect">
             <a:avLst/>
@@ -6747,7 +6549,7 @@
         </p:nvSpPr>
         <p:spPr>
           <a:xfrm>
-            <a:off x="3206138" y="2464308"/>
+            <a:off x="3203090" y="2464308"/>
             <a:ext cx="6284639" cy="457200"/>
           </a:xfrm>
           <a:prstGeom prst="rect">
@@ -6817,91 +6619,8 @@
         </p:nvSpPr>
         <p:spPr>
           <a:xfrm>
-            <a:off x="2130064" y="3734926"/>
-            <a:ext cx="5987247" cy="457200"/>
-          </a:xfrm>
-          <a:prstGeom prst="rect">
-            <a:avLst/>
-          </a:prstGeom>
-          <a:noFill/>
-        </p:spPr>
-        <p:txBody>
-          <a:bodyPr wrap="none" lIns="45720" rIns="45720" tIns="18288" bIns="18288" anchor="ctr">
-            <a:noAutofit/>
-          </a:bodyPr>
-          <a:lstStyle/>
-          <a:p>
-            <a:pPr algn="l"/>
-            <a:r>
-              <a:rPr sz="2750" b="0" i="0">
-                <a:solidFill>
-                  <a:srgbClr val="1A1A1A"/>
-                </a:solidFill>
-                <a:latin typeface="Lexend"/>
-              </a:rPr>
-              <a:t>Same power, so add the fronts:  </a:t>
-            </a:r>
-          </a:p>
-        </p:txBody>
-      </p:sp>
-      <p:pic>
-        <p:nvPicPr>
-          <p:cNvPr id="16" name="Picture 15" descr="884fc76005d8767d.png"/>
-          <p:cNvPicPr>
-            <a:picLocks noChangeAspect="1"/>
-          </p:cNvPicPr>
-          <p:nvPr/>
-        </p:nvPicPr>
-        <p:blipFill>
-          <a:blip r:embed="rId4"/>
-          <a:stretch>
-            <a:fillRect/>
-          </a:stretch>
-        </p:blipFill>
-        <p:spPr>
-          <a:xfrm>
-            <a:off x="7980151" y="3837034"/>
-            <a:ext cx="2057400" cy="252984"/>
-          </a:xfrm>
-          <a:prstGeom prst="rect">
-            <a:avLst/>
-          </a:prstGeom>
-        </p:spPr>
-      </p:pic>
-      <p:pic>
-        <p:nvPicPr>
-          <p:cNvPr id="17" name="Picture 16" descr="3665917b6f2092c9.png"/>
-          <p:cNvPicPr>
-            <a:picLocks noChangeAspect="1"/>
-          </p:cNvPicPr>
-          <p:nvPr/>
-        </p:nvPicPr>
-        <p:blipFill>
-          <a:blip r:embed="rId5"/>
-          <a:stretch>
-            <a:fillRect/>
-          </a:stretch>
-        </p:blipFill>
-        <p:spPr>
-          <a:xfrm>
-            <a:off x="2184928" y="4350622"/>
-            <a:ext cx="1271016" cy="304800"/>
-          </a:xfrm>
-          <a:prstGeom prst="rect">
-            <a:avLst/>
-          </a:prstGeom>
-        </p:spPr>
-      </p:pic>
-      <p:sp>
-        <p:nvSpPr>
-          <p:cNvPr id="18" name="TextBox 17"/>
-          <p:cNvSpPr txBox="1"/>
-          <p:nvPr/>
-        </p:nvSpPr>
-        <p:spPr>
-          <a:xfrm>
-            <a:off x="777240" y="4845922"/>
-            <a:ext cx="10607040" cy="548640"/>
+            <a:off x="777240" y="4343400"/>
+            <a:ext cx="10607040" cy="457200"/>
           </a:xfrm>
           <a:prstGeom prst="rect">
             <a:avLst/>
@@ -6916,22 +6635,13 @@
           <a:p>
             <a:pPr algn="ctr"/>
             <a:r>
-              <a:rPr sz="3040" b="1" i="0">
-                <a:solidFill>
-                  <a:srgbClr val="9E1B32"/>
-                </a:solidFill>
-                <a:latin typeface="Lexend"/>
-              </a:rPr>
-              <a:t>Answer:   7.7 × 10</a:t>
-            </a:r>
-            <a:r>
-              <a:rPr sz="3040" b="1" i="0" baseline="30000">
-                <a:solidFill>
-                  <a:srgbClr val="9E1B32"/>
-                </a:solidFill>
-                <a:latin typeface="Lexend"/>
-              </a:rPr>
-              <a:t>4</a:t>
+              <a:rPr sz="2470" b="1" i="0">
+                <a:solidFill>
+                  <a:srgbClr val="1A1A1A"/>
+                </a:solidFill>
+                <a:latin typeface="Lexend"/>
+              </a:rPr>
+              <a:t>Answer it.</a:t>
             </a:r>
           </a:p>
         </p:txBody>
@@ -6984,7 +6694,7 @@
                 </a:solidFill>
                 <a:latin typeface="Lexend"/>
               </a:rPr>
-              <a:t>Whiteboards   ·   Question 3 of 9</a:t>
+              <a:t>Whiteboards   ·   Question 2 of 9</a:t>
             </a:r>
           </a:p>
         </p:txBody>
@@ -7164,9 +6874,44 @@
           </a:p>
         </p:txBody>
       </p:sp>
+      <p:sp>
+        <p:nvSpPr>
+          <p:cNvPr id="8" name="TextBox 7"/>
+          <p:cNvSpPr txBox="1"/>
+          <p:nvPr/>
+        </p:nvSpPr>
+        <p:spPr>
+          <a:xfrm>
+            <a:off x="1234440" y="1851660"/>
+            <a:ext cx="2579155" cy="457200"/>
+          </a:xfrm>
+          <a:prstGeom prst="rect">
+            <a:avLst/>
+          </a:prstGeom>
+          <a:noFill/>
+        </p:spPr>
+        <p:txBody>
+          <a:bodyPr wrap="none" lIns="45720" rIns="45720" tIns="18288" bIns="18288" anchor="ctr">
+            <a:noAutofit/>
+          </a:bodyPr>
+          <a:lstStyle/>
+          <a:p>
+            <a:pPr algn="l"/>
+            <a:r>
+              <a:rPr sz="2280" b="0" i="0">
+                <a:solidFill>
+                  <a:srgbClr val="1A1A1A"/>
+                </a:solidFill>
+                <a:latin typeface="Lexend"/>
+              </a:rPr>
+              <a:t>A stadium sold  </a:t>
+            </a:r>
+          </a:p>
+        </p:txBody>
+      </p:sp>
       <p:pic>
         <p:nvPicPr>
-          <p:cNvPr id="8" name="Picture 7" descr="9a1c5b83d56645e5.png"/>
+          <p:cNvPr id="9" name="Picture 8" descr="a8bb2f17f73fb1a5.png"/>
           <p:cNvPicPr>
             <a:picLocks noChangeAspect="1"/>
           </p:cNvPicPr>
@@ -7180,8 +6925,8 @@
         </p:blipFill>
         <p:spPr>
           <a:xfrm>
-            <a:off x="4337304" y="2196083"/>
-            <a:ext cx="3486912" cy="408432"/>
+            <a:off x="3676435" y="1943100"/>
+            <a:ext cx="1173480" cy="274320"/>
           </a:xfrm>
           <a:prstGeom prst="rect">
             <a:avLst/>
@@ -7190,14 +6935,143 @@
       </p:pic>
       <p:sp>
         <p:nvSpPr>
-          <p:cNvPr id="9" name="TextBox 8"/>
-          <p:cNvSpPr txBox="1"/>
-          <p:nvPr/>
-        </p:nvSpPr>
-        <p:spPr>
-          <a:xfrm>
-            <a:off x="777240" y="4343400"/>
-            <a:ext cx="10607040" cy="457200"/>
+          <p:cNvPr id="10" name="TextBox 9"/>
+          <p:cNvSpPr txBox="1"/>
+          <p:nvPr/>
+        </p:nvSpPr>
+        <p:spPr>
+          <a:xfrm>
+            <a:off x="4849915" y="1851660"/>
+            <a:ext cx="2865857" cy="457200"/>
+          </a:xfrm>
+          <a:prstGeom prst="rect">
+            <a:avLst/>
+          </a:prstGeom>
+          <a:noFill/>
+        </p:spPr>
+        <p:txBody>
+          <a:bodyPr wrap="none" lIns="45720" rIns="45720" tIns="18288" bIns="18288" anchor="ctr">
+            <a:noAutofit/>
+          </a:bodyPr>
+          <a:lstStyle/>
+          <a:p>
+            <a:pPr algn="l"/>
+            <a:r>
+              <a:rPr sz="2280" b="0" i="0">
+                <a:solidFill>
+                  <a:srgbClr val="1A1A1A"/>
+                </a:solidFill>
+                <a:latin typeface="Lexend"/>
+              </a:rPr>
+              <a:t>  tickets on Friday</a:t>
+            </a:r>
+          </a:p>
+        </p:txBody>
+      </p:sp>
+      <p:sp>
+        <p:nvSpPr>
+          <p:cNvPr id="11" name="TextBox 10"/>
+          <p:cNvSpPr txBox="1"/>
+          <p:nvPr/>
+        </p:nvSpPr>
+        <p:spPr>
+          <a:xfrm>
+            <a:off x="1234440" y="2464308"/>
+            <a:ext cx="953666" cy="457200"/>
+          </a:xfrm>
+          <a:prstGeom prst="rect">
+            <a:avLst/>
+          </a:prstGeom>
+          <a:noFill/>
+        </p:spPr>
+        <p:txBody>
+          <a:bodyPr wrap="none" lIns="45720" rIns="45720" tIns="18288" bIns="18288" anchor="ctr">
+            <a:noAutofit/>
+          </a:bodyPr>
+          <a:lstStyle/>
+          <a:p>
+            <a:pPr algn="l"/>
+            <a:r>
+              <a:rPr sz="2280" b="0" i="0">
+                <a:solidFill>
+                  <a:srgbClr val="1A1A1A"/>
+                </a:solidFill>
+                <a:latin typeface="Lexend"/>
+              </a:rPr>
+              <a:t>and  </a:t>
+            </a:r>
+          </a:p>
+        </p:txBody>
+      </p:sp>
+      <p:pic>
+        <p:nvPicPr>
+          <p:cNvPr id="12" name="Picture 11" descr="ca70dd33a6d37a9b.png"/>
+          <p:cNvPicPr>
+            <a:picLocks noChangeAspect="1"/>
+          </p:cNvPicPr>
+          <p:nvPr/>
+        </p:nvPicPr>
+        <p:blipFill>
+          <a:blip r:embed="rId3"/>
+          <a:stretch>
+            <a:fillRect/>
+          </a:stretch>
+        </p:blipFill>
+        <p:spPr>
+          <a:xfrm>
+            <a:off x="2050946" y="2555748"/>
+            <a:ext cx="1155192" cy="274320"/>
+          </a:xfrm>
+          <a:prstGeom prst="rect">
+            <a:avLst/>
+          </a:prstGeom>
+        </p:spPr>
+      </p:pic>
+      <p:sp>
+        <p:nvSpPr>
+          <p:cNvPr id="13" name="TextBox 12"/>
+          <p:cNvSpPr txBox="1"/>
+          <p:nvPr/>
+        </p:nvSpPr>
+        <p:spPr>
+          <a:xfrm>
+            <a:off x="3206138" y="2464308"/>
+            <a:ext cx="6284639" cy="457200"/>
+          </a:xfrm>
+          <a:prstGeom prst="rect">
+            <a:avLst/>
+          </a:prstGeom>
+          <a:noFill/>
+        </p:spPr>
+        <p:txBody>
+          <a:bodyPr wrap="none" lIns="45720" rIns="45720" tIns="18288" bIns="18288" anchor="ctr">
+            <a:noAutofit/>
+          </a:bodyPr>
+          <a:lstStyle/>
+          <a:p>
+            <a:pPr algn="l"/>
+            <a:r>
+              <a:rPr sz="2280" b="0" i="0">
+                <a:solidFill>
+                  <a:srgbClr val="1A1A1A"/>
+                </a:solidFill>
+                <a:latin typeface="Lexend"/>
+              </a:rPr>
+              <a:t>  on Saturday. Each ticket cost 38 dollars.</a:t>
+            </a:r>
+          </a:p>
+        </p:txBody>
+      </p:sp>
+      <p:sp>
+        <p:nvSpPr>
+          <p:cNvPr id="14" name="TextBox 13"/>
+          <p:cNvSpPr txBox="1"/>
+          <p:nvPr/>
+        </p:nvSpPr>
+        <p:spPr>
+          <a:xfrm>
+            <a:off x="1234440" y="3099816"/>
+            <a:ext cx="10058400" cy="429370"/>
           </a:xfrm>
           <a:prstGeom prst="rect">
             <a:avLst/>
@@ -7210,15 +7084,142 @@
           </a:bodyPr>
           <a:lstStyle/>
           <a:p>
+            <a:pPr algn="l"/>
+            <a:r>
+              <a:rPr sz="2280" b="1" i="0">
+                <a:solidFill>
+                  <a:srgbClr val="1A1A1A"/>
+                </a:solidFill>
+                <a:latin typeface="Lexend"/>
+              </a:rPr>
+              <a:t>How many tickets were sold on the two days?</a:t>
+            </a:r>
+          </a:p>
+        </p:txBody>
+      </p:sp>
+      <p:sp>
+        <p:nvSpPr>
+          <p:cNvPr id="15" name="TextBox 14"/>
+          <p:cNvSpPr txBox="1"/>
+          <p:nvPr/>
+        </p:nvSpPr>
+        <p:spPr>
+          <a:xfrm>
+            <a:off x="2130064" y="3734926"/>
+            <a:ext cx="5987247" cy="457200"/>
+          </a:xfrm>
+          <a:prstGeom prst="rect">
+            <a:avLst/>
+          </a:prstGeom>
+          <a:noFill/>
+        </p:spPr>
+        <p:txBody>
+          <a:bodyPr wrap="none" lIns="45720" rIns="45720" tIns="18288" bIns="18288" anchor="ctr">
+            <a:noAutofit/>
+          </a:bodyPr>
+          <a:lstStyle/>
+          <a:p>
+            <a:pPr algn="l"/>
+            <a:r>
+              <a:rPr sz="2750" b="0" i="0">
+                <a:solidFill>
+                  <a:srgbClr val="1A1A1A"/>
+                </a:solidFill>
+                <a:latin typeface="Lexend"/>
+              </a:rPr>
+              <a:t>Same power, so add the fronts:  </a:t>
+            </a:r>
+          </a:p>
+        </p:txBody>
+      </p:sp>
+      <p:pic>
+        <p:nvPicPr>
+          <p:cNvPr id="16" name="Picture 15" descr="884fc76005d8767d.png"/>
+          <p:cNvPicPr>
+            <a:picLocks noChangeAspect="1"/>
+          </p:cNvPicPr>
+          <p:nvPr/>
+        </p:nvPicPr>
+        <p:blipFill>
+          <a:blip r:embed="rId4"/>
+          <a:stretch>
+            <a:fillRect/>
+          </a:stretch>
+        </p:blipFill>
+        <p:spPr>
+          <a:xfrm>
+            <a:off x="7980151" y="3837034"/>
+            <a:ext cx="2057400" cy="252984"/>
+          </a:xfrm>
+          <a:prstGeom prst="rect">
+            <a:avLst/>
+          </a:prstGeom>
+        </p:spPr>
+      </p:pic>
+      <p:pic>
+        <p:nvPicPr>
+          <p:cNvPr id="17" name="Picture 16" descr="3665917b6f2092c9.png"/>
+          <p:cNvPicPr>
+            <a:picLocks noChangeAspect="1"/>
+          </p:cNvPicPr>
+          <p:nvPr/>
+        </p:nvPicPr>
+        <p:blipFill>
+          <a:blip r:embed="rId5"/>
+          <a:stretch>
+            <a:fillRect/>
+          </a:stretch>
+        </p:blipFill>
+        <p:spPr>
+          <a:xfrm>
+            <a:off x="2184928" y="4350622"/>
+            <a:ext cx="1271016" cy="304800"/>
+          </a:xfrm>
+          <a:prstGeom prst="rect">
+            <a:avLst/>
+          </a:prstGeom>
+        </p:spPr>
+      </p:pic>
+      <p:sp>
+        <p:nvSpPr>
+          <p:cNvPr id="18" name="TextBox 17"/>
+          <p:cNvSpPr txBox="1"/>
+          <p:nvPr/>
+        </p:nvSpPr>
+        <p:spPr>
+          <a:xfrm>
+            <a:off x="777240" y="4845922"/>
+            <a:ext cx="10607040" cy="548640"/>
+          </a:xfrm>
+          <a:prstGeom prst="rect">
+            <a:avLst/>
+          </a:prstGeom>
+          <a:noFill/>
+        </p:spPr>
+        <p:txBody>
+          <a:bodyPr wrap="square" lIns="45720" rIns="45720" tIns="18288" bIns="18288" anchor="t">
+            <a:spAutoFit/>
+          </a:bodyPr>
+          <a:lstStyle/>
+          <a:p>
             <a:pPr algn="ctr"/>
             <a:r>
-              <a:rPr sz="2470" b="1" i="0">
-                <a:solidFill>
-                  <a:srgbClr val="1A1A1A"/>
-                </a:solidFill>
-                <a:latin typeface="Lexend"/>
-              </a:rPr>
-              <a:t>Answer it.</a:t>
+              <a:rPr sz="3040" b="1" i="0">
+                <a:solidFill>
+                  <a:srgbClr val="9E1B32"/>
+                </a:solidFill>
+                <a:latin typeface="Lexend"/>
+              </a:rPr>
+              <a:t>Answer:   7.7 × 10</a:t>
+            </a:r>
+            <a:r>
+              <a:rPr sz="3040" b="1" i="0" baseline="30000">
+                <a:solidFill>
+                  <a:srgbClr val="9E1B32"/>
+                </a:solidFill>
+                <a:latin typeface="Lexend"/>
+              </a:rPr>
+              <a:t>4</a:t>
             </a:r>
           </a:p>
         </p:txBody>
@@ -7987,7 +7988,7 @@
       </p:sp>
       <p:pic>
         <p:nvPicPr>
-          <p:cNvPr id="8" name="Picture 7" descr="b4e4dff994d3b294.png"/>
+          <p:cNvPr id="8" name="Picture 7" descr="9a1c5b83d56645e5.png"/>
           <p:cNvPicPr>
             <a:picLocks noChangeAspect="1"/>
           </p:cNvPicPr>
@@ -8001,72 +8002,24 @@
         </p:blipFill>
         <p:spPr>
           <a:xfrm>
-            <a:off x="4335780" y="2103120"/>
-            <a:ext cx="3489960" cy="414528"/>
+            <a:off x="4337304" y="2196083"/>
+            <a:ext cx="3486912" cy="408432"/>
           </a:xfrm>
           <a:prstGeom prst="rect">
             <a:avLst/>
           </a:prstGeom>
         </p:spPr>
       </p:pic>
-      <p:pic>
-        <p:nvPicPr>
-          <p:cNvPr id="9" name="Picture 8" descr="74a99bec27e47cab.png"/>
-          <p:cNvPicPr>
-            <a:picLocks noChangeAspect="1"/>
-          </p:cNvPicPr>
-          <p:nvPr/>
-        </p:nvPicPr>
-        <p:blipFill>
-          <a:blip r:embed="rId3"/>
-          <a:stretch>
-            <a:fillRect/>
-          </a:stretch>
-        </p:blipFill>
-        <p:spPr>
-          <a:xfrm>
-            <a:off x="4631435" y="2944368"/>
-            <a:ext cx="1365504" cy="252984"/>
-          </a:xfrm>
-          <a:prstGeom prst="rect">
-            <a:avLst/>
-          </a:prstGeom>
-        </p:spPr>
-      </p:pic>
-      <p:pic>
-        <p:nvPicPr>
-          <p:cNvPr id="10" name="Picture 9" descr="3dc41426a2cb4725.png"/>
-          <p:cNvPicPr>
-            <a:picLocks noChangeAspect="1"/>
-          </p:cNvPicPr>
-          <p:nvPr/>
-        </p:nvPicPr>
-        <p:blipFill>
-          <a:blip r:embed="rId4"/>
-          <a:stretch>
-            <a:fillRect/>
-          </a:stretch>
-        </p:blipFill>
-        <p:spPr>
-          <a:xfrm>
-            <a:off x="4631435" y="3456431"/>
-            <a:ext cx="3008376" cy="307848"/>
-          </a:xfrm>
-          <a:prstGeom prst="rect">
-            <a:avLst/>
-          </a:prstGeom>
-        </p:spPr>
-      </p:pic>
-      <p:sp>
-        <p:nvSpPr>
-          <p:cNvPr id="11" name="TextBox 10"/>
-          <p:cNvSpPr txBox="1"/>
-          <p:nvPr/>
-        </p:nvSpPr>
-        <p:spPr>
-          <a:xfrm>
-            <a:off x="777240" y="4663440"/>
-            <a:ext cx="10607040" cy="548640"/>
+      <p:sp>
+        <p:nvSpPr>
+          <p:cNvPr id="9" name="TextBox 8"/>
+          <p:cNvSpPr txBox="1"/>
+          <p:nvPr/>
+        </p:nvSpPr>
+        <p:spPr>
+          <a:xfrm>
+            <a:off x="777240" y="4343400"/>
+            <a:ext cx="10607040" cy="457200"/>
           </a:xfrm>
           <a:prstGeom prst="rect">
             <a:avLst/>
@@ -8081,22 +8034,13 @@
           <a:p>
             <a:pPr algn="ctr"/>
             <a:r>
-              <a:rPr sz="3040" b="1" i="0">
-                <a:solidFill>
-                  <a:srgbClr val="9E1B32"/>
-                </a:solidFill>
-                <a:latin typeface="Lexend"/>
-              </a:rPr>
-              <a:t>Answer:   1.1 × 10</a:t>
-            </a:r>
-            <a:r>
-              <a:rPr sz="3040" b="1" i="0" baseline="30000">
-                <a:solidFill>
-                  <a:srgbClr val="9E1B32"/>
-                </a:solidFill>
-                <a:latin typeface="Lexend"/>
-              </a:rPr>
-              <a:t>-5</a:t>
+              <a:rPr sz="2470" b="1" i="0">
+                <a:solidFill>
+                  <a:srgbClr val="1A1A1A"/>
+                </a:solidFill>
+                <a:latin typeface="Lexend"/>
+              </a:rPr>
+              <a:t>Answer it.</a:t>
             </a:r>
           </a:p>
         </p:txBody>
@@ -8149,7 +8093,7 @@
                 </a:solidFill>
                 <a:latin typeface="Lexend"/>
               </a:rPr>
-              <a:t>Whiteboards   ·   Question 4 of 9</a:t>
+              <a:t>Whiteboards   ·   Question 3 of 9</a:t>
             </a:r>
           </a:p>
         </p:txBody>
@@ -8331,7 +8275,7 @@
       </p:sp>
       <p:pic>
         <p:nvPicPr>
-          <p:cNvPr id="8" name="Picture 7" descr="1e4655248ebd17e4.png"/>
+          <p:cNvPr id="8" name="Picture 7" descr="b4e4dff994d3b294.png"/>
           <p:cNvPicPr>
             <a:picLocks noChangeAspect="1"/>
           </p:cNvPicPr>
@@ -8345,24 +8289,72 @@
         </p:blipFill>
         <p:spPr>
           <a:xfrm>
-            <a:off x="4172712" y="2196083"/>
-            <a:ext cx="3816095" cy="408432"/>
+            <a:off x="4335780" y="2103120"/>
+            <a:ext cx="3489960" cy="414528"/>
           </a:xfrm>
           <a:prstGeom prst="rect">
             <a:avLst/>
           </a:prstGeom>
         </p:spPr>
       </p:pic>
-      <p:sp>
-        <p:nvSpPr>
-          <p:cNvPr id="9" name="TextBox 8"/>
-          <p:cNvSpPr txBox="1"/>
-          <p:nvPr/>
-        </p:nvSpPr>
-        <p:spPr>
-          <a:xfrm>
-            <a:off x="777240" y="4343400"/>
-            <a:ext cx="10607040" cy="457200"/>
+      <p:pic>
+        <p:nvPicPr>
+          <p:cNvPr id="9" name="Picture 8" descr="74a99bec27e47cab.png"/>
+          <p:cNvPicPr>
+            <a:picLocks noChangeAspect="1"/>
+          </p:cNvPicPr>
+          <p:nvPr/>
+        </p:nvPicPr>
+        <p:blipFill>
+          <a:blip r:embed="rId3"/>
+          <a:stretch>
+            <a:fillRect/>
+          </a:stretch>
+        </p:blipFill>
+        <p:spPr>
+          <a:xfrm>
+            <a:off x="4631435" y="2944368"/>
+            <a:ext cx="1365504" cy="252984"/>
+          </a:xfrm>
+          <a:prstGeom prst="rect">
+            <a:avLst/>
+          </a:prstGeom>
+        </p:spPr>
+      </p:pic>
+      <p:pic>
+        <p:nvPicPr>
+          <p:cNvPr id="10" name="Picture 9" descr="3dc41426a2cb4725.png"/>
+          <p:cNvPicPr>
+            <a:picLocks noChangeAspect="1"/>
+          </p:cNvPicPr>
+          <p:nvPr/>
+        </p:nvPicPr>
+        <p:blipFill>
+          <a:blip r:embed="rId4"/>
+          <a:stretch>
+            <a:fillRect/>
+          </a:stretch>
+        </p:blipFill>
+        <p:spPr>
+          <a:xfrm>
+            <a:off x="4631435" y="3456431"/>
+            <a:ext cx="3008376" cy="307848"/>
+          </a:xfrm>
+          <a:prstGeom prst="rect">
+            <a:avLst/>
+          </a:prstGeom>
+        </p:spPr>
+      </p:pic>
+      <p:sp>
+        <p:nvSpPr>
+          <p:cNvPr id="11" name="TextBox 10"/>
+          <p:cNvSpPr txBox="1"/>
+          <p:nvPr/>
+        </p:nvSpPr>
+        <p:spPr>
+          <a:xfrm>
+            <a:off x="777240" y="4663440"/>
+            <a:ext cx="10607040" cy="548640"/>
           </a:xfrm>
           <a:prstGeom prst="rect">
             <a:avLst/>
@@ -8377,13 +8369,22 @@
           <a:p>
             <a:pPr algn="ctr"/>
             <a:r>
-              <a:rPr sz="2470" b="1" i="0">
-                <a:solidFill>
-                  <a:srgbClr val="1A1A1A"/>
-                </a:solidFill>
-                <a:latin typeface="Lexend"/>
-              </a:rPr>
-              <a:t>Answer it.</a:t>
+              <a:rPr sz="3040" b="1" i="0">
+                <a:solidFill>
+                  <a:srgbClr val="9E1B32"/>
+                </a:solidFill>
+                <a:latin typeface="Lexend"/>
+              </a:rPr>
+              <a:t>Answer:   1.1 × 10</a:t>
+            </a:r>
+            <a:r>
+              <a:rPr sz="3040" b="1" i="0" baseline="30000">
+                <a:solidFill>
+                  <a:srgbClr val="9E1B32"/>
+                </a:solidFill>
+                <a:latin typeface="Lexend"/>
+              </a:rPr>
+              <a:t>-5</a:t>
             </a:r>
           </a:p>
         </p:txBody>
@@ -8618,7 +8619,7 @@
       </p:sp>
       <p:pic>
         <p:nvPicPr>
-          <p:cNvPr id="8" name="Picture 7" descr="6c08936514ac2e5b.png"/>
+          <p:cNvPr id="8" name="Picture 7" descr="1e4655248ebd17e4.png"/>
           <p:cNvPicPr>
             <a:picLocks noChangeAspect="1"/>
           </p:cNvPicPr>
@@ -8632,72 +8633,24 @@
         </p:blipFill>
         <p:spPr>
           <a:xfrm>
-            <a:off x="4171188" y="2104643"/>
-            <a:ext cx="3819144" cy="408432"/>
+            <a:off x="4172712" y="2196083"/>
+            <a:ext cx="3816095" cy="408432"/>
           </a:xfrm>
           <a:prstGeom prst="rect">
             <a:avLst/>
           </a:prstGeom>
         </p:spPr>
       </p:pic>
-      <p:pic>
-        <p:nvPicPr>
-          <p:cNvPr id="9" name="Picture 8" descr="428101046aa75a5f.png"/>
-          <p:cNvPicPr>
-            <a:picLocks noChangeAspect="1"/>
-          </p:cNvPicPr>
-          <p:nvPr/>
-        </p:nvPicPr>
-        <p:blipFill>
-          <a:blip r:embed="rId3"/>
-          <a:stretch>
-            <a:fillRect/>
-          </a:stretch>
-        </p:blipFill>
-        <p:spPr>
-          <a:xfrm>
-            <a:off x="4818887" y="2939796"/>
-            <a:ext cx="2084831" cy="256032"/>
-          </a:xfrm>
-          <a:prstGeom prst="rect">
-            <a:avLst/>
-          </a:prstGeom>
-        </p:spPr>
-      </p:pic>
-      <p:pic>
-        <p:nvPicPr>
-          <p:cNvPr id="10" name="Picture 9" descr="e9dcbdc19c34f041.png"/>
-          <p:cNvPicPr>
-            <a:picLocks noChangeAspect="1"/>
-          </p:cNvPicPr>
-          <p:nvPr/>
-        </p:nvPicPr>
-        <p:blipFill>
-          <a:blip r:embed="rId4"/>
-          <a:stretch>
-            <a:fillRect/>
-          </a:stretch>
-        </p:blipFill>
-        <p:spPr>
-          <a:xfrm>
-            <a:off x="4818887" y="3454908"/>
-            <a:ext cx="2639568" cy="304800"/>
-          </a:xfrm>
-          <a:prstGeom prst="rect">
-            <a:avLst/>
-          </a:prstGeom>
-        </p:spPr>
-      </p:pic>
-      <p:sp>
-        <p:nvSpPr>
-          <p:cNvPr id="11" name="TextBox 10"/>
-          <p:cNvSpPr txBox="1"/>
-          <p:nvPr/>
-        </p:nvSpPr>
-        <p:spPr>
-          <a:xfrm>
-            <a:off x="777240" y="4663440"/>
-            <a:ext cx="10607040" cy="548640"/>
+      <p:sp>
+        <p:nvSpPr>
+          <p:cNvPr id="9" name="TextBox 8"/>
+          <p:cNvSpPr txBox="1"/>
+          <p:nvPr/>
+        </p:nvSpPr>
+        <p:spPr>
+          <a:xfrm>
+            <a:off x="777240" y="4343400"/>
+            <a:ext cx="10607040" cy="457200"/>
           </a:xfrm>
           <a:prstGeom prst="rect">
             <a:avLst/>
@@ -8712,22 +8665,13 @@
           <a:p>
             <a:pPr algn="ctr"/>
             <a:r>
-              <a:rPr sz="3040" b="1" i="0">
-                <a:solidFill>
-                  <a:srgbClr val="9E1B32"/>
-                </a:solidFill>
-                <a:latin typeface="Lexend"/>
-              </a:rPr>
-              <a:t>Answer:   7 × 10</a:t>
-            </a:r>
-            <a:r>
-              <a:rPr sz="3040" b="1" i="0" baseline="30000">
-                <a:solidFill>
-                  <a:srgbClr val="9E1B32"/>
-                </a:solidFill>
-                <a:latin typeface="Lexend"/>
-              </a:rPr>
-              <a:t>7</a:t>
+              <a:rPr sz="2470" b="1" i="0">
+                <a:solidFill>
+                  <a:srgbClr val="1A1A1A"/>
+                </a:solidFill>
+                <a:latin typeface="Lexend"/>
+              </a:rPr>
+              <a:t>Answer it.</a:t>
             </a:r>
           </a:p>
         </p:txBody>
@@ -8780,7 +8724,7 @@
                 </a:solidFill>
                 <a:latin typeface="Lexend"/>
               </a:rPr>
-              <a:t>Whiteboards   ·   Question 5 of 9</a:t>
+              <a:t>Whiteboards   ·   Question 4 of 9</a:t>
             </a:r>
           </a:p>
         </p:txBody>
@@ -8962,7 +8906,7 @@
       </p:sp>
       <p:pic>
         <p:nvPicPr>
-          <p:cNvPr id="8" name="Picture 7" descr="458ce47e03352da5.png"/>
+          <p:cNvPr id="8" name="Picture 7" descr="6c08936514ac2e5b.png"/>
           <p:cNvPicPr>
             <a:picLocks noChangeAspect="1"/>
           </p:cNvPicPr>
@@ -8976,24 +8920,72 @@
         </p:blipFill>
         <p:spPr>
           <a:xfrm>
-            <a:off x="4198620" y="2196083"/>
-            <a:ext cx="3764279" cy="408432"/>
+            <a:off x="4171188" y="2104643"/>
+            <a:ext cx="3819144" cy="408432"/>
           </a:xfrm>
           <a:prstGeom prst="rect">
             <a:avLst/>
           </a:prstGeom>
         </p:spPr>
       </p:pic>
-      <p:sp>
-        <p:nvSpPr>
-          <p:cNvPr id="9" name="TextBox 8"/>
-          <p:cNvSpPr txBox="1"/>
-          <p:nvPr/>
-        </p:nvSpPr>
-        <p:spPr>
-          <a:xfrm>
-            <a:off x="777240" y="2880360"/>
-            <a:ext cx="10607040" cy="465151"/>
+      <p:pic>
+        <p:nvPicPr>
+          <p:cNvPr id="9" name="Picture 8" descr="428101046aa75a5f.png"/>
+          <p:cNvPicPr>
+            <a:picLocks noChangeAspect="1"/>
+          </p:cNvPicPr>
+          <p:nvPr/>
+        </p:nvPicPr>
+        <p:blipFill>
+          <a:blip r:embed="rId3"/>
+          <a:stretch>
+            <a:fillRect/>
+          </a:stretch>
+        </p:blipFill>
+        <p:spPr>
+          <a:xfrm>
+            <a:off x="4818887" y="2939796"/>
+            <a:ext cx="2084831" cy="256032"/>
+          </a:xfrm>
+          <a:prstGeom prst="rect">
+            <a:avLst/>
+          </a:prstGeom>
+        </p:spPr>
+      </p:pic>
+      <p:pic>
+        <p:nvPicPr>
+          <p:cNvPr id="10" name="Picture 9" descr="e9dcbdc19c34f041.png"/>
+          <p:cNvPicPr>
+            <a:picLocks noChangeAspect="1"/>
+          </p:cNvPicPr>
+          <p:nvPr/>
+        </p:nvPicPr>
+        <p:blipFill>
+          <a:blip r:embed="rId4"/>
+          <a:stretch>
+            <a:fillRect/>
+          </a:stretch>
+        </p:blipFill>
+        <p:spPr>
+          <a:xfrm>
+            <a:off x="4818887" y="3454908"/>
+            <a:ext cx="2639568" cy="304800"/>
+          </a:xfrm>
+          <a:prstGeom prst="rect">
+            <a:avLst/>
+          </a:prstGeom>
+        </p:spPr>
+      </p:pic>
+      <p:sp>
+        <p:nvSpPr>
+          <p:cNvPr id="11" name="TextBox 10"/>
+          <p:cNvSpPr txBox="1"/>
+          <p:nvPr/>
+        </p:nvSpPr>
+        <p:spPr>
+          <a:xfrm>
+            <a:off x="777240" y="4663440"/>
+            <a:ext cx="10607040" cy="548640"/>
           </a:xfrm>
           <a:prstGeom prst="rect">
             <a:avLst/>
@@ -9008,260 +9000,22 @@
           <a:p>
             <a:pPr algn="ctr"/>
             <a:r>
-              <a:rPr sz="2470" b="0" i="0">
-                <a:solidFill>
-                  <a:srgbClr val="1A1A1A"/>
-                </a:solidFill>
-                <a:latin typeface="Lexend"/>
-              </a:rPr>
-              <a:t>Which is the sum?</a:t>
-            </a:r>
-          </a:p>
-        </p:txBody>
-      </p:sp>
-      <p:sp>
-        <p:nvSpPr>
-          <p:cNvPr id="10" name="TextBox 9"/>
-          <p:cNvSpPr txBox="1"/>
-          <p:nvPr/>
-        </p:nvSpPr>
-        <p:spPr>
-          <a:xfrm>
-            <a:off x="1874519" y="3546679"/>
-            <a:ext cx="4572000" cy="548640"/>
-          </a:xfrm>
-          <a:prstGeom prst="rect">
-            <a:avLst/>
-          </a:prstGeom>
-          <a:noFill/>
-        </p:spPr>
-        <p:txBody>
-          <a:bodyPr wrap="square" lIns="45720" rIns="45720" tIns="18288" bIns="18288" anchor="t">
-            <a:spAutoFit/>
-          </a:bodyPr>
-          <a:lstStyle/>
-          <a:p>
-            <a:pPr algn="l"/>
-            <a:r>
-              <a:rPr sz="2280" b="1" i="0">
-                <a:solidFill>
-                  <a:srgbClr val="1A1A1A"/>
-                </a:solidFill>
-                <a:latin typeface="Lexend"/>
-              </a:rPr>
-              <a:t>A.   </a:t>
-            </a:r>
-            <a:r>
-              <a:rPr sz="2280" b="0" i="0">
-                <a:solidFill>
-                  <a:srgbClr val="1A1A1A"/>
-                </a:solidFill>
-                <a:latin typeface="Lexend"/>
-              </a:rPr>
-              <a:t>3.9 × 10</a:t>
-            </a:r>
-            <a:r>
-              <a:rPr sz="2280" b="0" i="0" baseline="30000">
-                <a:solidFill>
-                  <a:srgbClr val="1A1A1A"/>
-                </a:solidFill>
-                <a:latin typeface="Lexend"/>
-              </a:rPr>
-              <a:t>6</a:t>
-            </a:r>
-          </a:p>
-        </p:txBody>
-      </p:sp>
-      <p:sp>
-        <p:nvSpPr>
-          <p:cNvPr id="11" name="TextBox 10"/>
-          <p:cNvSpPr txBox="1"/>
-          <p:nvPr/>
-        </p:nvSpPr>
-        <p:spPr>
-          <a:xfrm>
-            <a:off x="6629400" y="3546679"/>
-            <a:ext cx="4572000" cy="548640"/>
-          </a:xfrm>
-          <a:prstGeom prst="rect">
-            <a:avLst/>
-          </a:prstGeom>
-          <a:noFill/>
-        </p:spPr>
-        <p:txBody>
-          <a:bodyPr wrap="square" lIns="45720" rIns="45720" tIns="18288" bIns="18288" anchor="t">
-            <a:spAutoFit/>
-          </a:bodyPr>
-          <a:lstStyle/>
-          <a:p>
-            <a:pPr algn="l"/>
-            <a:r>
-              <a:rPr sz="2280" b="1" i="0">
-                <a:solidFill>
-                  <a:srgbClr val="1A1A1A"/>
-                </a:solidFill>
-                <a:latin typeface="Lexend"/>
-              </a:rPr>
-              <a:t>B.   </a:t>
-            </a:r>
-            <a:r>
-              <a:rPr sz="2280" b="0" i="0">
-                <a:solidFill>
-                  <a:srgbClr val="1A1A1A"/>
-                </a:solidFill>
-                <a:latin typeface="Lexend"/>
-              </a:rPr>
-              <a:t>3.9 × 10</a:t>
-            </a:r>
-            <a:r>
-              <a:rPr sz="2280" b="0" i="0" baseline="30000">
-                <a:solidFill>
-                  <a:srgbClr val="1A1A1A"/>
-                </a:solidFill>
-                <a:latin typeface="Lexend"/>
-              </a:rPr>
-              <a:t>10</a:t>
-            </a:r>
-          </a:p>
-        </p:txBody>
-      </p:sp>
-      <p:sp>
-        <p:nvSpPr>
-          <p:cNvPr id="12" name="TextBox 11"/>
-          <p:cNvSpPr txBox="1"/>
-          <p:nvPr/>
-        </p:nvSpPr>
-        <p:spPr>
-          <a:xfrm>
-            <a:off x="1874519" y="4232479"/>
-            <a:ext cx="4572000" cy="548640"/>
-          </a:xfrm>
-          <a:prstGeom prst="rect">
-            <a:avLst/>
-          </a:prstGeom>
-          <a:noFill/>
-        </p:spPr>
-        <p:txBody>
-          <a:bodyPr wrap="square" lIns="45720" rIns="45720" tIns="18288" bIns="18288" anchor="t">
-            <a:spAutoFit/>
-          </a:bodyPr>
-          <a:lstStyle/>
-          <a:p>
-            <a:pPr algn="l"/>
-            <a:r>
-              <a:rPr sz="2280" b="1" i="0">
-                <a:solidFill>
-                  <a:srgbClr val="1A1A1A"/>
-                </a:solidFill>
-                <a:latin typeface="Lexend"/>
-              </a:rPr>
-              <a:t>C.   </a:t>
-            </a:r>
-            <a:r>
-              <a:rPr sz="2280" b="0" i="0">
-                <a:solidFill>
-                  <a:srgbClr val="1A1A1A"/>
-                </a:solidFill>
-                <a:latin typeface="Lexend"/>
-              </a:rPr>
-              <a:t>2.316 × 10</a:t>
-            </a:r>
-            <a:r>
-              <a:rPr sz="2280" b="0" i="0" baseline="30000">
-                <a:solidFill>
-                  <a:srgbClr val="1A1A1A"/>
-                </a:solidFill>
-                <a:latin typeface="Lexend"/>
-              </a:rPr>
-              <a:t>6</a:t>
-            </a:r>
-          </a:p>
-        </p:txBody>
-      </p:sp>
-      <p:sp>
-        <p:nvSpPr>
-          <p:cNvPr id="13" name="TextBox 12"/>
-          <p:cNvSpPr txBox="1"/>
-          <p:nvPr/>
-        </p:nvSpPr>
-        <p:spPr>
-          <a:xfrm>
-            <a:off x="6629400" y="4232479"/>
-            <a:ext cx="4572000" cy="548640"/>
-          </a:xfrm>
-          <a:prstGeom prst="rect">
-            <a:avLst/>
-          </a:prstGeom>
-          <a:noFill/>
-        </p:spPr>
-        <p:txBody>
-          <a:bodyPr wrap="square" lIns="45720" rIns="45720" tIns="18288" bIns="18288" anchor="t">
-            <a:spAutoFit/>
-          </a:bodyPr>
-          <a:lstStyle/>
-          <a:p>
-            <a:pPr algn="l"/>
-            <a:r>
-              <a:rPr sz="2280" b="1" i="0">
-                <a:solidFill>
-                  <a:srgbClr val="1A1A1A"/>
-                </a:solidFill>
-                <a:latin typeface="Lexend"/>
-              </a:rPr>
-              <a:t>D.   </a:t>
-            </a:r>
-            <a:r>
-              <a:rPr sz="2280" b="0" i="0">
-                <a:solidFill>
-                  <a:srgbClr val="1A1A1A"/>
-                </a:solidFill>
-                <a:latin typeface="Lexend"/>
-              </a:rPr>
-              <a:t>2.46 × 10</a:t>
-            </a:r>
-            <a:r>
-              <a:rPr sz="2280" b="0" i="0" baseline="30000">
-                <a:solidFill>
-                  <a:srgbClr val="1A1A1A"/>
-                </a:solidFill>
-                <a:latin typeface="Lexend"/>
-              </a:rPr>
-              <a:t>6</a:t>
-            </a:r>
-          </a:p>
-        </p:txBody>
-      </p:sp>
-      <p:sp>
-        <p:nvSpPr>
-          <p:cNvPr id="14" name="TextBox 13"/>
-          <p:cNvSpPr txBox="1"/>
-          <p:nvPr/>
-        </p:nvSpPr>
-        <p:spPr>
-          <a:xfrm>
-            <a:off x="777240" y="5238319"/>
-            <a:ext cx="10607040" cy="457200"/>
-          </a:xfrm>
-          <a:prstGeom prst="rect">
-            <a:avLst/>
-          </a:prstGeom>
-          <a:noFill/>
-        </p:spPr>
-        <p:txBody>
-          <a:bodyPr wrap="square" lIns="45720" rIns="45720" tIns="18288" bIns="18288" anchor="t">
-            <a:spAutoFit/>
-          </a:bodyPr>
-          <a:lstStyle/>
-          <a:p>
-            <a:pPr algn="ctr"/>
-            <a:r>
-              <a:rPr sz="2470" b="1" i="0">
-                <a:solidFill>
-                  <a:srgbClr val="1A1A1A"/>
-                </a:solidFill>
-                <a:latin typeface="Lexend"/>
-              </a:rPr>
-              <a:t>Answer it.</a:t>
+              <a:rPr sz="3040" b="1" i="0">
+                <a:solidFill>
+                  <a:srgbClr val="9E1B32"/>
+                </a:solidFill>
+                <a:latin typeface="Lexend"/>
+              </a:rPr>
+              <a:t>Answer:   7 × 10</a:t>
+            </a:r>
+            <a:r>
+              <a:rPr sz="3040" b="1" i="0" baseline="30000">
+                <a:solidFill>
+                  <a:srgbClr val="9E1B32"/>
+                </a:solidFill>
+                <a:latin typeface="Lexend"/>
+              </a:rPr>
+              <a:t>7</a:t>
             </a:r>
           </a:p>
         </p:txBody>
@@ -9496,7 +9250,7 @@
       </p:sp>
       <p:pic>
         <p:nvPicPr>
-          <p:cNvPr id="8" name="Picture 7" descr="0a5ae3f69ac2c6a4.png"/>
+          <p:cNvPr id="8" name="Picture 7" descr="458ce47e03352da5.png"/>
           <p:cNvPicPr>
             <a:picLocks noChangeAspect="1"/>
           </p:cNvPicPr>
@@ -9510,8 +9264,8 @@
         </p:blipFill>
         <p:spPr>
           <a:xfrm>
-            <a:off x="4197096" y="2103120"/>
-            <a:ext cx="3767328" cy="414528"/>
+            <a:off x="4198620" y="2196083"/>
+            <a:ext cx="3764279" cy="408432"/>
           </a:xfrm>
           <a:prstGeom prst="rect">
             <a:avLst/>
@@ -9526,7 +9280,7 @@
         </p:nvSpPr>
         <p:spPr>
           <a:xfrm>
-            <a:off x="777240" y="2791967"/>
+            <a:off x="777240" y="2880360"/>
             <a:ext cx="10607040" cy="465151"/>
           </a:xfrm>
           <a:prstGeom prst="rect">
@@ -9561,115 +9315,8 @@
         </p:nvSpPr>
         <p:spPr>
           <a:xfrm>
-            <a:off x="3181973" y="3417139"/>
-            <a:ext cx="3154956" cy="457200"/>
-          </a:xfrm>
-          <a:prstGeom prst="rect">
-            <a:avLst/>
-          </a:prstGeom>
-          <a:noFill/>
-        </p:spPr>
-        <p:txBody>
-          <a:bodyPr wrap="none" lIns="45720" rIns="45720" tIns="18288" bIns="18288" anchor="ctr">
-            <a:noAutofit/>
-          </a:bodyPr>
-          <a:lstStyle/>
-          <a:p>
-            <a:pPr algn="l"/>
-            <a:r>
-              <a:rPr sz="2330" b="0" i="0">
-                <a:solidFill>
-                  <a:srgbClr val="1A1A1A"/>
-                </a:solidFill>
-                <a:latin typeface="Lexend"/>
-              </a:rPr>
-              <a:t>Match the powers:  </a:t>
-            </a:r>
-          </a:p>
-        </p:txBody>
-      </p:sp>
-      <p:pic>
-        <p:nvPicPr>
-          <p:cNvPr id="11" name="Picture 10" descr="27f7e9522e6b3218.png"/>
-          <p:cNvPicPr>
-            <a:picLocks noChangeAspect="1"/>
-          </p:cNvPicPr>
-          <p:nvPr/>
-        </p:nvPicPr>
-        <p:blipFill>
-          <a:blip r:embed="rId3"/>
-          <a:stretch>
-            <a:fillRect/>
-          </a:stretch>
-        </p:blipFill>
-        <p:spPr>
-          <a:xfrm>
-            <a:off x="6199770" y="3514675"/>
-            <a:ext cx="2782824" cy="262128"/>
-          </a:xfrm>
-          <a:prstGeom prst="rect">
-            <a:avLst/>
-          </a:prstGeom>
-        </p:spPr>
-      </p:pic>
-      <p:pic>
-        <p:nvPicPr>
-          <p:cNvPr id="12" name="Picture 11" descr="121dee4f34127b18.png"/>
-          <p:cNvPicPr>
-            <a:picLocks noChangeAspect="1"/>
-          </p:cNvPicPr>
-          <p:nvPr/>
-        </p:nvPicPr>
-        <p:blipFill>
-          <a:blip r:embed="rId4"/>
-          <a:stretch>
-            <a:fillRect/>
-          </a:stretch>
-        </p:blipFill>
-        <p:spPr>
-          <a:xfrm>
-            <a:off x="3236837" y="4041979"/>
-            <a:ext cx="2365248" cy="213360"/>
-          </a:xfrm>
-          <a:prstGeom prst="rect">
-            <a:avLst/>
-          </a:prstGeom>
-        </p:spPr>
-      </p:pic>
-      <p:pic>
-        <p:nvPicPr>
-          <p:cNvPr id="13" name="Picture 12" descr="d9fd5fe20052fef2.png"/>
-          <p:cNvPicPr>
-            <a:picLocks noChangeAspect="1"/>
-          </p:cNvPicPr>
-          <p:nvPr/>
-        </p:nvPicPr>
-        <p:blipFill>
-          <a:blip r:embed="rId5"/>
-          <a:stretch>
-            <a:fillRect/>
-          </a:stretch>
-        </p:blipFill>
-        <p:spPr>
-          <a:xfrm>
-            <a:off x="3236837" y="4520515"/>
-            <a:ext cx="1377696" cy="262128"/>
-          </a:xfrm>
-          <a:prstGeom prst="rect">
-            <a:avLst/>
-          </a:prstGeom>
-        </p:spPr>
-      </p:pic>
-      <p:sp>
-        <p:nvSpPr>
-          <p:cNvPr id="14" name="TextBox 13"/>
-          <p:cNvSpPr txBox="1"/>
-          <p:nvPr/>
-        </p:nvSpPr>
-        <p:spPr>
-          <a:xfrm>
-            <a:off x="777240" y="4994479"/>
-            <a:ext cx="10607040" cy="548640"/>
+            <a:off x="1874519" y="3546679"/>
+            <a:ext cx="4572000" cy="548640"/>
           </a:xfrm>
           <a:prstGeom prst="rect">
             <a:avLst/>
@@ -9682,24 +9329,227 @@
           </a:bodyPr>
           <a:lstStyle/>
           <a:p>
+            <a:pPr algn="l"/>
+            <a:r>
+              <a:rPr sz="2280" b="1" i="0">
+                <a:solidFill>
+                  <a:srgbClr val="1A1A1A"/>
+                </a:solidFill>
+                <a:latin typeface="Lexend"/>
+              </a:rPr>
+              <a:t>A.   </a:t>
+            </a:r>
+            <a:r>
+              <a:rPr sz="2280" b="0" i="0">
+                <a:solidFill>
+                  <a:srgbClr val="1A1A1A"/>
+                </a:solidFill>
+                <a:latin typeface="Lexend"/>
+              </a:rPr>
+              <a:t>3.9 × 10</a:t>
+            </a:r>
+            <a:r>
+              <a:rPr sz="2280" b="0" i="0" baseline="30000">
+                <a:solidFill>
+                  <a:srgbClr val="1A1A1A"/>
+                </a:solidFill>
+                <a:latin typeface="Lexend"/>
+              </a:rPr>
+              <a:t>6</a:t>
+            </a:r>
+          </a:p>
+        </p:txBody>
+      </p:sp>
+      <p:sp>
+        <p:nvSpPr>
+          <p:cNvPr id="11" name="TextBox 10"/>
+          <p:cNvSpPr txBox="1"/>
+          <p:nvPr/>
+        </p:nvSpPr>
+        <p:spPr>
+          <a:xfrm>
+            <a:off x="6629400" y="3546679"/>
+            <a:ext cx="4572000" cy="548640"/>
+          </a:xfrm>
+          <a:prstGeom prst="rect">
+            <a:avLst/>
+          </a:prstGeom>
+          <a:noFill/>
+        </p:spPr>
+        <p:txBody>
+          <a:bodyPr wrap="square" lIns="45720" rIns="45720" tIns="18288" bIns="18288" anchor="t">
+            <a:spAutoFit/>
+          </a:bodyPr>
+          <a:lstStyle/>
+          <a:p>
+            <a:pPr algn="l"/>
+            <a:r>
+              <a:rPr sz="2280" b="1" i="0">
+                <a:solidFill>
+                  <a:srgbClr val="1A1A1A"/>
+                </a:solidFill>
+                <a:latin typeface="Lexend"/>
+              </a:rPr>
+              <a:t>B.   </a:t>
+            </a:r>
+            <a:r>
+              <a:rPr sz="2280" b="0" i="0">
+                <a:solidFill>
+                  <a:srgbClr val="1A1A1A"/>
+                </a:solidFill>
+                <a:latin typeface="Lexend"/>
+              </a:rPr>
+              <a:t>3.9 × 10</a:t>
+            </a:r>
+            <a:r>
+              <a:rPr sz="2280" b="0" i="0" baseline="30000">
+                <a:solidFill>
+                  <a:srgbClr val="1A1A1A"/>
+                </a:solidFill>
+                <a:latin typeface="Lexend"/>
+              </a:rPr>
+              <a:t>10</a:t>
+            </a:r>
+          </a:p>
+        </p:txBody>
+      </p:sp>
+      <p:sp>
+        <p:nvSpPr>
+          <p:cNvPr id="12" name="TextBox 11"/>
+          <p:cNvSpPr txBox="1"/>
+          <p:nvPr/>
+        </p:nvSpPr>
+        <p:spPr>
+          <a:xfrm>
+            <a:off x="1874519" y="4232479"/>
+            <a:ext cx="4572000" cy="548640"/>
+          </a:xfrm>
+          <a:prstGeom prst="rect">
+            <a:avLst/>
+          </a:prstGeom>
+          <a:noFill/>
+        </p:spPr>
+        <p:txBody>
+          <a:bodyPr wrap="square" lIns="45720" rIns="45720" tIns="18288" bIns="18288" anchor="t">
+            <a:spAutoFit/>
+          </a:bodyPr>
+          <a:lstStyle/>
+          <a:p>
+            <a:pPr algn="l"/>
+            <a:r>
+              <a:rPr sz="2280" b="1" i="0">
+                <a:solidFill>
+                  <a:srgbClr val="1A1A1A"/>
+                </a:solidFill>
+                <a:latin typeface="Lexend"/>
+              </a:rPr>
+              <a:t>C.   </a:t>
+            </a:r>
+            <a:r>
+              <a:rPr sz="2280" b="0" i="0">
+                <a:solidFill>
+                  <a:srgbClr val="1A1A1A"/>
+                </a:solidFill>
+                <a:latin typeface="Lexend"/>
+              </a:rPr>
+              <a:t>2.316 × 10</a:t>
+            </a:r>
+            <a:r>
+              <a:rPr sz="2280" b="0" i="0" baseline="30000">
+                <a:solidFill>
+                  <a:srgbClr val="1A1A1A"/>
+                </a:solidFill>
+                <a:latin typeface="Lexend"/>
+              </a:rPr>
+              <a:t>6</a:t>
+            </a:r>
+          </a:p>
+        </p:txBody>
+      </p:sp>
+      <p:sp>
+        <p:nvSpPr>
+          <p:cNvPr id="13" name="TextBox 12"/>
+          <p:cNvSpPr txBox="1"/>
+          <p:nvPr/>
+        </p:nvSpPr>
+        <p:spPr>
+          <a:xfrm>
+            <a:off x="6629400" y="4232479"/>
+            <a:ext cx="4572000" cy="548640"/>
+          </a:xfrm>
+          <a:prstGeom prst="rect">
+            <a:avLst/>
+          </a:prstGeom>
+          <a:noFill/>
+        </p:spPr>
+        <p:txBody>
+          <a:bodyPr wrap="square" lIns="45720" rIns="45720" tIns="18288" bIns="18288" anchor="t">
+            <a:spAutoFit/>
+          </a:bodyPr>
+          <a:lstStyle/>
+          <a:p>
+            <a:pPr algn="l"/>
+            <a:r>
+              <a:rPr sz="2280" b="1" i="0">
+                <a:solidFill>
+                  <a:srgbClr val="1A1A1A"/>
+                </a:solidFill>
+                <a:latin typeface="Lexend"/>
+              </a:rPr>
+              <a:t>D.   </a:t>
+            </a:r>
+            <a:r>
+              <a:rPr sz="2280" b="0" i="0">
+                <a:solidFill>
+                  <a:srgbClr val="1A1A1A"/>
+                </a:solidFill>
+                <a:latin typeface="Lexend"/>
+              </a:rPr>
+              <a:t>2.46 × 10</a:t>
+            </a:r>
+            <a:r>
+              <a:rPr sz="2280" b="0" i="0" baseline="30000">
+                <a:solidFill>
+                  <a:srgbClr val="1A1A1A"/>
+                </a:solidFill>
+                <a:latin typeface="Lexend"/>
+              </a:rPr>
+              <a:t>6</a:t>
+            </a:r>
+          </a:p>
+        </p:txBody>
+      </p:sp>
+      <p:sp>
+        <p:nvSpPr>
+          <p:cNvPr id="14" name="TextBox 13"/>
+          <p:cNvSpPr txBox="1"/>
+          <p:nvPr/>
+        </p:nvSpPr>
+        <p:spPr>
+          <a:xfrm>
+            <a:off x="777240" y="5238319"/>
+            <a:ext cx="10607040" cy="457200"/>
+          </a:xfrm>
+          <a:prstGeom prst="rect">
+            <a:avLst/>
+          </a:prstGeom>
+          <a:noFill/>
+        </p:spPr>
+        <p:txBody>
+          <a:bodyPr wrap="square" lIns="45720" rIns="45720" tIns="18288" bIns="18288" anchor="t">
+            <a:spAutoFit/>
+          </a:bodyPr>
+          <a:lstStyle/>
+          <a:p>
             <a:pPr algn="ctr"/>
             <a:r>
-              <a:rPr sz="3040" b="1" i="0">
-                <a:solidFill>
-                  <a:srgbClr val="9E1B32"/>
-                </a:solidFill>
-                <a:latin typeface="Lexend"/>
-              </a:rPr>
-              <a:t>Answer:   C — 2.316 × 10</a:t>
-            </a:r>
-            <a:r>
-              <a:rPr sz="3040" b="1" i="0" baseline="30000">
-                <a:solidFill>
-                  <a:srgbClr val="9E1B32"/>
-                </a:solidFill>
-                <a:latin typeface="Lexend"/>
-              </a:rPr>
-              <a:t>6</a:t>
+              <a:rPr sz="2470" b="1" i="0">
+                <a:solidFill>
+                  <a:srgbClr val="1A1A1A"/>
+                </a:solidFill>
+                <a:latin typeface="Lexend"/>
+              </a:rPr>
+              <a:t>Answer it.</a:t>
             </a:r>
           </a:p>
         </p:txBody>
@@ -9752,7 +9602,7 @@
                 </a:solidFill>
                 <a:latin typeface="Lexend"/>
               </a:rPr>
-              <a:t>Whiteboards   ·   Question 6 of 9</a:t>
+              <a:t>Whiteboards   ·   Question 5 of 9</a:t>
             </a:r>
           </a:p>
         </p:txBody>
@@ -9934,7 +9784,7 @@
       </p:sp>
       <p:pic>
         <p:nvPicPr>
-          <p:cNvPr id="8" name="Picture 7" descr="c56988b1bd434277.png"/>
+          <p:cNvPr id="8" name="Picture 7" descr="0a5ae3f69ac2c6a4.png"/>
           <p:cNvPicPr>
             <a:picLocks noChangeAspect="1"/>
           </p:cNvPicPr>
@@ -9948,8 +9798,8 @@
         </p:blipFill>
         <p:spPr>
           <a:xfrm>
-            <a:off x="4186428" y="2196083"/>
-            <a:ext cx="3788664" cy="408432"/>
+            <a:off x="4197096" y="2103120"/>
+            <a:ext cx="3767328" cy="414528"/>
           </a:xfrm>
           <a:prstGeom prst="rect">
             <a:avLst/>
@@ -9964,7 +9814,7 @@
         </p:nvSpPr>
         <p:spPr>
           <a:xfrm>
-            <a:off x="777240" y="2880360"/>
+            <a:off x="777240" y="2791967"/>
             <a:ext cx="10607040" cy="465151"/>
           </a:xfrm>
           <a:prstGeom prst="rect">
@@ -9986,7 +9836,7 @@
                 </a:solidFill>
                 <a:latin typeface="Lexend"/>
               </a:rPr>
-              <a:t>Which is the sum, written in scientific notation?</a:t>
+              <a:t>Which is the sum?</a:t>
             </a:r>
           </a:p>
         </p:txBody>
@@ -9999,8 +9849,115 @@
         </p:nvSpPr>
         <p:spPr>
           <a:xfrm>
-            <a:off x="1874519" y="3546679"/>
-            <a:ext cx="4572000" cy="548640"/>
+            <a:off x="3181973" y="3417139"/>
+            <a:ext cx="3154956" cy="457200"/>
+          </a:xfrm>
+          <a:prstGeom prst="rect">
+            <a:avLst/>
+          </a:prstGeom>
+          <a:noFill/>
+        </p:spPr>
+        <p:txBody>
+          <a:bodyPr wrap="none" lIns="45720" rIns="45720" tIns="18288" bIns="18288" anchor="ctr">
+            <a:noAutofit/>
+          </a:bodyPr>
+          <a:lstStyle/>
+          <a:p>
+            <a:pPr algn="l"/>
+            <a:r>
+              <a:rPr sz="2330" b="0" i="0">
+                <a:solidFill>
+                  <a:srgbClr val="1A1A1A"/>
+                </a:solidFill>
+                <a:latin typeface="Lexend"/>
+              </a:rPr>
+              <a:t>Match the powers:  </a:t>
+            </a:r>
+          </a:p>
+        </p:txBody>
+      </p:sp>
+      <p:pic>
+        <p:nvPicPr>
+          <p:cNvPr id="11" name="Picture 10" descr="27f7e9522e6b3218.png"/>
+          <p:cNvPicPr>
+            <a:picLocks noChangeAspect="1"/>
+          </p:cNvPicPr>
+          <p:nvPr/>
+        </p:nvPicPr>
+        <p:blipFill>
+          <a:blip r:embed="rId3"/>
+          <a:stretch>
+            <a:fillRect/>
+          </a:stretch>
+        </p:blipFill>
+        <p:spPr>
+          <a:xfrm>
+            <a:off x="6199770" y="3514675"/>
+            <a:ext cx="2782824" cy="262128"/>
+          </a:xfrm>
+          <a:prstGeom prst="rect">
+            <a:avLst/>
+          </a:prstGeom>
+        </p:spPr>
+      </p:pic>
+      <p:pic>
+        <p:nvPicPr>
+          <p:cNvPr id="12" name="Picture 11" descr="121dee4f34127b18.png"/>
+          <p:cNvPicPr>
+            <a:picLocks noChangeAspect="1"/>
+          </p:cNvPicPr>
+          <p:nvPr/>
+        </p:nvPicPr>
+        <p:blipFill>
+          <a:blip r:embed="rId4"/>
+          <a:stretch>
+            <a:fillRect/>
+          </a:stretch>
+        </p:blipFill>
+        <p:spPr>
+          <a:xfrm>
+            <a:off x="3236837" y="4041979"/>
+            <a:ext cx="2365248" cy="213360"/>
+          </a:xfrm>
+          <a:prstGeom prst="rect">
+            <a:avLst/>
+          </a:prstGeom>
+        </p:spPr>
+      </p:pic>
+      <p:pic>
+        <p:nvPicPr>
+          <p:cNvPr id="13" name="Picture 12" descr="d9fd5fe20052fef2.png"/>
+          <p:cNvPicPr>
+            <a:picLocks noChangeAspect="1"/>
+          </p:cNvPicPr>
+          <p:nvPr/>
+        </p:nvPicPr>
+        <p:blipFill>
+          <a:blip r:embed="rId5"/>
+          <a:stretch>
+            <a:fillRect/>
+          </a:stretch>
+        </p:blipFill>
+        <p:spPr>
+          <a:xfrm>
+            <a:off x="3236837" y="4520515"/>
+            <a:ext cx="1377696" cy="262128"/>
+          </a:xfrm>
+          <a:prstGeom prst="rect">
+            <a:avLst/>
+          </a:prstGeom>
+        </p:spPr>
+      </p:pic>
+      <p:sp>
+        <p:nvSpPr>
+          <p:cNvPr id="14" name="TextBox 13"/>
+          <p:cNvSpPr txBox="1"/>
+          <p:nvPr/>
+        </p:nvSpPr>
+        <p:spPr>
+          <a:xfrm>
+            <a:off x="777240" y="4994479"/>
+            <a:ext cx="10607040" cy="548640"/>
           </a:xfrm>
           <a:prstGeom prst="rect">
             <a:avLst/>
@@ -10013,227 +9970,24 @@
           </a:bodyPr>
           <a:lstStyle/>
           <a:p>
-            <a:pPr algn="l"/>
-            <a:r>
-              <a:rPr sz="2280" b="1" i="0">
-                <a:solidFill>
-                  <a:srgbClr val="1A1A1A"/>
-                </a:solidFill>
-                <a:latin typeface="Lexend"/>
-              </a:rPr>
-              <a:t>A.   </a:t>
-            </a:r>
-            <a:r>
-              <a:rPr sz="2280" b="0" i="0">
-                <a:solidFill>
-                  <a:srgbClr val="1A1A1A"/>
-                </a:solidFill>
-                <a:latin typeface="Lexend"/>
-              </a:rPr>
-              <a:t>12.3 × 10</a:t>
-            </a:r>
-            <a:r>
-              <a:rPr sz="2280" b="0" i="0" baseline="30000">
-                <a:solidFill>
-                  <a:srgbClr val="1A1A1A"/>
+            <a:pPr algn="ctr"/>
+            <a:r>
+              <a:rPr sz="3040" b="1" i="0">
+                <a:solidFill>
+                  <a:srgbClr val="9E1B32"/>
+                </a:solidFill>
+                <a:latin typeface="Lexend"/>
+              </a:rPr>
+              <a:t>Answer:   C — 2.316 × 10</a:t>
+            </a:r>
+            <a:r>
+              <a:rPr sz="3040" b="1" i="0" baseline="30000">
+                <a:solidFill>
+                  <a:srgbClr val="9E1B32"/>
                 </a:solidFill>
                 <a:latin typeface="Lexend"/>
               </a:rPr>
               <a:t>6</a:t>
-            </a:r>
-          </a:p>
-        </p:txBody>
-      </p:sp>
-      <p:sp>
-        <p:nvSpPr>
-          <p:cNvPr id="11" name="TextBox 10"/>
-          <p:cNvSpPr txBox="1"/>
-          <p:nvPr/>
-        </p:nvSpPr>
-        <p:spPr>
-          <a:xfrm>
-            <a:off x="6629400" y="3546679"/>
-            <a:ext cx="4572000" cy="548640"/>
-          </a:xfrm>
-          <a:prstGeom prst="rect">
-            <a:avLst/>
-          </a:prstGeom>
-          <a:noFill/>
-        </p:spPr>
-        <p:txBody>
-          <a:bodyPr wrap="square" lIns="45720" rIns="45720" tIns="18288" bIns="18288" anchor="t">
-            <a:spAutoFit/>
-          </a:bodyPr>
-          <a:lstStyle/>
-          <a:p>
-            <a:pPr algn="l"/>
-            <a:r>
-              <a:rPr sz="2280" b="1" i="0">
-                <a:solidFill>
-                  <a:srgbClr val="1A1A1A"/>
-                </a:solidFill>
-                <a:latin typeface="Lexend"/>
-              </a:rPr>
-              <a:t>B.   </a:t>
-            </a:r>
-            <a:r>
-              <a:rPr sz="2280" b="0" i="0">
-                <a:solidFill>
-                  <a:srgbClr val="1A1A1A"/>
-                </a:solidFill>
-                <a:latin typeface="Lexend"/>
-              </a:rPr>
-              <a:t>12.3 × 10</a:t>
-            </a:r>
-            <a:r>
-              <a:rPr sz="2280" b="0" i="0" baseline="30000">
-                <a:solidFill>
-                  <a:srgbClr val="1A1A1A"/>
-                </a:solidFill>
-                <a:latin typeface="Lexend"/>
-              </a:rPr>
-              <a:t>12</a:t>
-            </a:r>
-          </a:p>
-        </p:txBody>
-      </p:sp>
-      <p:sp>
-        <p:nvSpPr>
-          <p:cNvPr id="12" name="TextBox 11"/>
-          <p:cNvSpPr txBox="1"/>
-          <p:nvPr/>
-        </p:nvSpPr>
-        <p:spPr>
-          <a:xfrm>
-            <a:off x="1874519" y="4232479"/>
-            <a:ext cx="4572000" cy="548640"/>
-          </a:xfrm>
-          <a:prstGeom prst="rect">
-            <a:avLst/>
-          </a:prstGeom>
-          <a:noFill/>
-        </p:spPr>
-        <p:txBody>
-          <a:bodyPr wrap="square" lIns="45720" rIns="45720" tIns="18288" bIns="18288" anchor="t">
-            <a:spAutoFit/>
-          </a:bodyPr>
-          <a:lstStyle/>
-          <a:p>
-            <a:pPr algn="l"/>
-            <a:r>
-              <a:rPr sz="2280" b="1" i="0">
-                <a:solidFill>
-                  <a:srgbClr val="1A1A1A"/>
-                </a:solidFill>
-                <a:latin typeface="Lexend"/>
-              </a:rPr>
-              <a:t>C.   </a:t>
-            </a:r>
-            <a:r>
-              <a:rPr sz="2280" b="0" i="0">
-                <a:solidFill>
-                  <a:srgbClr val="1A1A1A"/>
-                </a:solidFill>
-                <a:latin typeface="Lexend"/>
-              </a:rPr>
-              <a:t>1.23 × 10</a:t>
-            </a:r>
-            <a:r>
-              <a:rPr sz="2280" b="0" i="0" baseline="30000">
-                <a:solidFill>
-                  <a:srgbClr val="1A1A1A"/>
-                </a:solidFill>
-                <a:latin typeface="Lexend"/>
-              </a:rPr>
-              <a:t>6</a:t>
-            </a:r>
-          </a:p>
-        </p:txBody>
-      </p:sp>
-      <p:sp>
-        <p:nvSpPr>
-          <p:cNvPr id="13" name="TextBox 12"/>
-          <p:cNvSpPr txBox="1"/>
-          <p:nvPr/>
-        </p:nvSpPr>
-        <p:spPr>
-          <a:xfrm>
-            <a:off x="6629400" y="4232479"/>
-            <a:ext cx="4572000" cy="548640"/>
-          </a:xfrm>
-          <a:prstGeom prst="rect">
-            <a:avLst/>
-          </a:prstGeom>
-          <a:noFill/>
-        </p:spPr>
-        <p:txBody>
-          <a:bodyPr wrap="square" lIns="45720" rIns="45720" tIns="18288" bIns="18288" anchor="t">
-            <a:spAutoFit/>
-          </a:bodyPr>
-          <a:lstStyle/>
-          <a:p>
-            <a:pPr algn="l"/>
-            <a:r>
-              <a:rPr sz="2280" b="1" i="0">
-                <a:solidFill>
-                  <a:srgbClr val="1A1A1A"/>
-                </a:solidFill>
-                <a:latin typeface="Lexend"/>
-              </a:rPr>
-              <a:t>D.   </a:t>
-            </a:r>
-            <a:r>
-              <a:rPr sz="2280" b="0" i="0">
-                <a:solidFill>
-                  <a:srgbClr val="1A1A1A"/>
-                </a:solidFill>
-                <a:latin typeface="Lexend"/>
-              </a:rPr>
-              <a:t>1.23 × 10</a:t>
-            </a:r>
-            <a:r>
-              <a:rPr sz="2280" b="0" i="0" baseline="30000">
-                <a:solidFill>
-                  <a:srgbClr val="1A1A1A"/>
-                </a:solidFill>
-                <a:latin typeface="Lexend"/>
-              </a:rPr>
-              <a:t>7</a:t>
-            </a:r>
-          </a:p>
-        </p:txBody>
-      </p:sp>
-      <p:sp>
-        <p:nvSpPr>
-          <p:cNvPr id="14" name="TextBox 13"/>
-          <p:cNvSpPr txBox="1"/>
-          <p:nvPr/>
-        </p:nvSpPr>
-        <p:spPr>
-          <a:xfrm>
-            <a:off x="777240" y="5238319"/>
-            <a:ext cx="10607040" cy="457200"/>
-          </a:xfrm>
-          <a:prstGeom prst="rect">
-            <a:avLst/>
-          </a:prstGeom>
-          <a:noFill/>
-        </p:spPr>
-        <p:txBody>
-          <a:bodyPr wrap="square" lIns="45720" rIns="45720" tIns="18288" bIns="18288" anchor="t">
-            <a:spAutoFit/>
-          </a:bodyPr>
-          <a:lstStyle/>
-          <a:p>
-            <a:pPr algn="ctr"/>
-            <a:r>
-              <a:rPr sz="2470" b="1" i="0">
-                <a:solidFill>
-                  <a:srgbClr val="1A1A1A"/>
-                </a:solidFill>
-                <a:latin typeface="Lexend"/>
-              </a:rPr>
-              <a:t>Answer it.</a:t>
             </a:r>
           </a:p>
         </p:txBody>
@@ -10468,7 +10222,7 @@
       </p:sp>
       <p:pic>
         <p:nvPicPr>
-          <p:cNvPr id="8" name="Picture 7" descr="9def6d28be26225f.png"/>
+          <p:cNvPr id="8" name="Picture 7" descr="c56988b1bd434277.png"/>
           <p:cNvPicPr>
             <a:picLocks noChangeAspect="1"/>
           </p:cNvPicPr>
@@ -10482,8 +10236,8 @@
         </p:blipFill>
         <p:spPr>
           <a:xfrm>
-            <a:off x="4184903" y="2103120"/>
-            <a:ext cx="3791712" cy="414528"/>
+            <a:off x="4186428" y="2196083"/>
+            <a:ext cx="3788664" cy="408432"/>
           </a:xfrm>
           <a:prstGeom prst="rect">
             <a:avLst/>
@@ -10498,7 +10252,7 @@
         </p:nvSpPr>
         <p:spPr>
           <a:xfrm>
-            <a:off x="777240" y="2791967"/>
+            <a:off x="777240" y="2880360"/>
             <a:ext cx="10607040" cy="465151"/>
           </a:xfrm>
           <a:prstGeom prst="rect">
@@ -10525,64 +10279,16 @@
           </a:p>
         </p:txBody>
       </p:sp>
-      <p:pic>
-        <p:nvPicPr>
-          <p:cNvPr id="10" name="Picture 9" descr="7a92f566b3dc9a9c.png"/>
-          <p:cNvPicPr>
-            <a:picLocks noChangeAspect="1"/>
-          </p:cNvPicPr>
-          <p:nvPr/>
-        </p:nvPicPr>
-        <p:blipFill>
-          <a:blip r:embed="rId3"/>
-          <a:stretch>
-            <a:fillRect/>
-          </a:stretch>
-        </p:blipFill>
-        <p:spPr>
-          <a:xfrm>
-            <a:off x="4530851" y="3519247"/>
-            <a:ext cx="2209800" cy="252984"/>
-          </a:xfrm>
-          <a:prstGeom prst="rect">
-            <a:avLst/>
-          </a:prstGeom>
-        </p:spPr>
-      </p:pic>
-      <p:pic>
-        <p:nvPicPr>
-          <p:cNvPr id="11" name="Picture 10" descr="4253edb8e6cb150c.png"/>
-          <p:cNvPicPr>
-            <a:picLocks noChangeAspect="1"/>
-          </p:cNvPicPr>
-          <p:nvPr/>
-        </p:nvPicPr>
-        <p:blipFill>
-          <a:blip r:embed="rId4"/>
-          <a:stretch>
-            <a:fillRect/>
-          </a:stretch>
-        </p:blipFill>
-        <p:spPr>
-          <a:xfrm>
-            <a:off x="4530851" y="4031311"/>
-            <a:ext cx="3209544" cy="307848"/>
-          </a:xfrm>
-          <a:prstGeom prst="rect">
-            <a:avLst/>
-          </a:prstGeom>
-        </p:spPr>
-      </p:pic>
-      <p:sp>
-        <p:nvSpPr>
-          <p:cNvPr id="12" name="TextBox 11"/>
-          <p:cNvSpPr txBox="1"/>
-          <p:nvPr/>
-        </p:nvSpPr>
-        <p:spPr>
-          <a:xfrm>
-            <a:off x="777240" y="4663440"/>
-            <a:ext cx="10607040" cy="548640"/>
+      <p:sp>
+        <p:nvSpPr>
+          <p:cNvPr id="10" name="TextBox 9"/>
+          <p:cNvSpPr txBox="1"/>
+          <p:nvPr/>
+        </p:nvSpPr>
+        <p:spPr>
+          <a:xfrm>
+            <a:off x="1874519" y="3546679"/>
+            <a:ext cx="4572000" cy="548640"/>
           </a:xfrm>
           <a:prstGeom prst="rect">
             <a:avLst/>
@@ -10595,24 +10301,227 @@
           </a:bodyPr>
           <a:lstStyle/>
           <a:p>
+            <a:pPr algn="l"/>
+            <a:r>
+              <a:rPr sz="2280" b="1" i="0">
+                <a:solidFill>
+                  <a:srgbClr val="1A1A1A"/>
+                </a:solidFill>
+                <a:latin typeface="Lexend"/>
+              </a:rPr>
+              <a:t>A.   </a:t>
+            </a:r>
+            <a:r>
+              <a:rPr sz="2280" b="0" i="0">
+                <a:solidFill>
+                  <a:srgbClr val="1A1A1A"/>
+                </a:solidFill>
+                <a:latin typeface="Lexend"/>
+              </a:rPr>
+              <a:t>12.3 × 10</a:t>
+            </a:r>
+            <a:r>
+              <a:rPr sz="2280" b="0" i="0" baseline="30000">
+                <a:solidFill>
+                  <a:srgbClr val="1A1A1A"/>
+                </a:solidFill>
+                <a:latin typeface="Lexend"/>
+              </a:rPr>
+              <a:t>6</a:t>
+            </a:r>
+          </a:p>
+        </p:txBody>
+      </p:sp>
+      <p:sp>
+        <p:nvSpPr>
+          <p:cNvPr id="11" name="TextBox 10"/>
+          <p:cNvSpPr txBox="1"/>
+          <p:nvPr/>
+        </p:nvSpPr>
+        <p:spPr>
+          <a:xfrm>
+            <a:off x="6629400" y="3546679"/>
+            <a:ext cx="4572000" cy="548640"/>
+          </a:xfrm>
+          <a:prstGeom prst="rect">
+            <a:avLst/>
+          </a:prstGeom>
+          <a:noFill/>
+        </p:spPr>
+        <p:txBody>
+          <a:bodyPr wrap="square" lIns="45720" rIns="45720" tIns="18288" bIns="18288" anchor="t">
+            <a:spAutoFit/>
+          </a:bodyPr>
+          <a:lstStyle/>
+          <a:p>
+            <a:pPr algn="l"/>
+            <a:r>
+              <a:rPr sz="2280" b="1" i="0">
+                <a:solidFill>
+                  <a:srgbClr val="1A1A1A"/>
+                </a:solidFill>
+                <a:latin typeface="Lexend"/>
+              </a:rPr>
+              <a:t>B.   </a:t>
+            </a:r>
+            <a:r>
+              <a:rPr sz="2280" b="0" i="0">
+                <a:solidFill>
+                  <a:srgbClr val="1A1A1A"/>
+                </a:solidFill>
+                <a:latin typeface="Lexend"/>
+              </a:rPr>
+              <a:t>12.3 × 10</a:t>
+            </a:r>
+            <a:r>
+              <a:rPr sz="2280" b="0" i="0" baseline="30000">
+                <a:solidFill>
+                  <a:srgbClr val="1A1A1A"/>
+                </a:solidFill>
+                <a:latin typeface="Lexend"/>
+              </a:rPr>
+              <a:t>12</a:t>
+            </a:r>
+          </a:p>
+        </p:txBody>
+      </p:sp>
+      <p:sp>
+        <p:nvSpPr>
+          <p:cNvPr id="12" name="TextBox 11"/>
+          <p:cNvSpPr txBox="1"/>
+          <p:nvPr/>
+        </p:nvSpPr>
+        <p:spPr>
+          <a:xfrm>
+            <a:off x="1874519" y="4232479"/>
+            <a:ext cx="4572000" cy="548640"/>
+          </a:xfrm>
+          <a:prstGeom prst="rect">
+            <a:avLst/>
+          </a:prstGeom>
+          <a:noFill/>
+        </p:spPr>
+        <p:txBody>
+          <a:bodyPr wrap="square" lIns="45720" rIns="45720" tIns="18288" bIns="18288" anchor="t">
+            <a:spAutoFit/>
+          </a:bodyPr>
+          <a:lstStyle/>
+          <a:p>
+            <a:pPr algn="l"/>
+            <a:r>
+              <a:rPr sz="2280" b="1" i="0">
+                <a:solidFill>
+                  <a:srgbClr val="1A1A1A"/>
+                </a:solidFill>
+                <a:latin typeface="Lexend"/>
+              </a:rPr>
+              <a:t>C.   </a:t>
+            </a:r>
+            <a:r>
+              <a:rPr sz="2280" b="0" i="0">
+                <a:solidFill>
+                  <a:srgbClr val="1A1A1A"/>
+                </a:solidFill>
+                <a:latin typeface="Lexend"/>
+              </a:rPr>
+              <a:t>1.23 × 10</a:t>
+            </a:r>
+            <a:r>
+              <a:rPr sz="2280" b="0" i="0" baseline="30000">
+                <a:solidFill>
+                  <a:srgbClr val="1A1A1A"/>
+                </a:solidFill>
+                <a:latin typeface="Lexend"/>
+              </a:rPr>
+              <a:t>6</a:t>
+            </a:r>
+          </a:p>
+        </p:txBody>
+      </p:sp>
+      <p:sp>
+        <p:nvSpPr>
+          <p:cNvPr id="13" name="TextBox 12"/>
+          <p:cNvSpPr txBox="1"/>
+          <p:nvPr/>
+        </p:nvSpPr>
+        <p:spPr>
+          <a:xfrm>
+            <a:off x="6629400" y="4232479"/>
+            <a:ext cx="4572000" cy="548640"/>
+          </a:xfrm>
+          <a:prstGeom prst="rect">
+            <a:avLst/>
+          </a:prstGeom>
+          <a:noFill/>
+        </p:spPr>
+        <p:txBody>
+          <a:bodyPr wrap="square" lIns="45720" rIns="45720" tIns="18288" bIns="18288" anchor="t">
+            <a:spAutoFit/>
+          </a:bodyPr>
+          <a:lstStyle/>
+          <a:p>
+            <a:pPr algn="l"/>
+            <a:r>
+              <a:rPr sz="2280" b="1" i="0">
+                <a:solidFill>
+                  <a:srgbClr val="1A1A1A"/>
+                </a:solidFill>
+                <a:latin typeface="Lexend"/>
+              </a:rPr>
+              <a:t>D.   </a:t>
+            </a:r>
+            <a:r>
+              <a:rPr sz="2280" b="0" i="0">
+                <a:solidFill>
+                  <a:srgbClr val="1A1A1A"/>
+                </a:solidFill>
+                <a:latin typeface="Lexend"/>
+              </a:rPr>
+              <a:t>1.23 × 10</a:t>
+            </a:r>
+            <a:r>
+              <a:rPr sz="2280" b="0" i="0" baseline="30000">
+                <a:solidFill>
+                  <a:srgbClr val="1A1A1A"/>
+                </a:solidFill>
+                <a:latin typeface="Lexend"/>
+              </a:rPr>
+              <a:t>7</a:t>
+            </a:r>
+          </a:p>
+        </p:txBody>
+      </p:sp>
+      <p:sp>
+        <p:nvSpPr>
+          <p:cNvPr id="14" name="TextBox 13"/>
+          <p:cNvSpPr txBox="1"/>
+          <p:nvPr/>
+        </p:nvSpPr>
+        <p:spPr>
+          <a:xfrm>
+            <a:off x="777240" y="5238319"/>
+            <a:ext cx="10607040" cy="457200"/>
+          </a:xfrm>
+          <a:prstGeom prst="rect">
+            <a:avLst/>
+          </a:prstGeom>
+          <a:noFill/>
+        </p:spPr>
+        <p:txBody>
+          <a:bodyPr wrap="square" lIns="45720" rIns="45720" tIns="18288" bIns="18288" anchor="t">
+            <a:spAutoFit/>
+          </a:bodyPr>
+          <a:lstStyle/>
+          <a:p>
             <a:pPr algn="ctr"/>
             <a:r>
-              <a:rPr sz="3040" b="1" i="0">
-                <a:solidFill>
-                  <a:srgbClr val="9E1B32"/>
-                </a:solidFill>
-                <a:latin typeface="Lexend"/>
-              </a:rPr>
-              <a:t>Answer:   D — 1.23 × 10</a:t>
-            </a:r>
-            <a:r>
-              <a:rPr sz="3040" b="1" i="0" baseline="30000">
-                <a:solidFill>
-                  <a:srgbClr val="9E1B32"/>
-                </a:solidFill>
-                <a:latin typeface="Lexend"/>
-              </a:rPr>
-              <a:t>7</a:t>
+              <a:rPr sz="2470" b="1" i="0">
+                <a:solidFill>
+                  <a:srgbClr val="1A1A1A"/>
+                </a:solidFill>
+                <a:latin typeface="Lexend"/>
+              </a:rPr>
+              <a:t>Answer it.</a:t>
             </a:r>
           </a:p>
         </p:txBody>
@@ -10665,7 +10574,7 @@
                 </a:solidFill>
                 <a:latin typeface="Lexend"/>
               </a:rPr>
-              <a:t>Whiteboards   ·   Question 7 of 9</a:t>
+              <a:t>Whiteboards   ·   Question 6 of 9</a:t>
             </a:r>
           </a:p>
         </p:txBody>
@@ -10847,7 +10756,7 @@
       </p:sp>
       <p:pic>
         <p:nvPicPr>
-          <p:cNvPr id="8" name="Picture 7" descr="8364ffedb5ab9d47.png"/>
+          <p:cNvPr id="8" name="Picture 7" descr="9def6d28be26225f.png"/>
           <p:cNvPicPr>
             <a:picLocks noChangeAspect="1"/>
           </p:cNvPicPr>
@@ -10861,8 +10770,8 @@
         </p:blipFill>
         <p:spPr>
           <a:xfrm>
-            <a:off x="4026408" y="2194560"/>
-            <a:ext cx="4108704" cy="411480"/>
+            <a:off x="4184903" y="2103120"/>
+            <a:ext cx="3791712" cy="414528"/>
           </a:xfrm>
           <a:prstGeom prst="rect">
             <a:avLst/>
@@ -10877,8 +10786,8 @@
         </p:nvSpPr>
         <p:spPr>
           <a:xfrm>
-            <a:off x="777240" y="4343400"/>
-            <a:ext cx="10607040" cy="457200"/>
+            <a:off x="777240" y="2791967"/>
+            <a:ext cx="10607040" cy="465151"/>
           </a:xfrm>
           <a:prstGeom prst="rect">
             <a:avLst/>
@@ -10893,13 +10802,105 @@
           <a:p>
             <a:pPr algn="ctr"/>
             <a:r>
-              <a:rPr sz="2470" b="1" i="0">
+              <a:rPr sz="2470" b="0" i="0">
                 <a:solidFill>
                   <a:srgbClr val="1A1A1A"/>
                 </a:solidFill>
                 <a:latin typeface="Lexend"/>
               </a:rPr>
-              <a:t>Answer it.</a:t>
+              <a:t>Which is the sum, written in scientific notation?</a:t>
+            </a:r>
+          </a:p>
+        </p:txBody>
+      </p:sp>
+      <p:pic>
+        <p:nvPicPr>
+          <p:cNvPr id="10" name="Picture 9" descr="7a92f566b3dc9a9c.png"/>
+          <p:cNvPicPr>
+            <a:picLocks noChangeAspect="1"/>
+          </p:cNvPicPr>
+          <p:nvPr/>
+        </p:nvPicPr>
+        <p:blipFill>
+          <a:blip r:embed="rId3"/>
+          <a:stretch>
+            <a:fillRect/>
+          </a:stretch>
+        </p:blipFill>
+        <p:spPr>
+          <a:xfrm>
+            <a:off x="4530851" y="3519247"/>
+            <a:ext cx="2209800" cy="252984"/>
+          </a:xfrm>
+          <a:prstGeom prst="rect">
+            <a:avLst/>
+          </a:prstGeom>
+        </p:spPr>
+      </p:pic>
+      <p:pic>
+        <p:nvPicPr>
+          <p:cNvPr id="11" name="Picture 10" descr="4253edb8e6cb150c.png"/>
+          <p:cNvPicPr>
+            <a:picLocks noChangeAspect="1"/>
+          </p:cNvPicPr>
+          <p:nvPr/>
+        </p:nvPicPr>
+        <p:blipFill>
+          <a:blip r:embed="rId4"/>
+          <a:stretch>
+            <a:fillRect/>
+          </a:stretch>
+        </p:blipFill>
+        <p:spPr>
+          <a:xfrm>
+            <a:off x="4530851" y="4031311"/>
+            <a:ext cx="3209544" cy="307848"/>
+          </a:xfrm>
+          <a:prstGeom prst="rect">
+            <a:avLst/>
+          </a:prstGeom>
+        </p:spPr>
+      </p:pic>
+      <p:sp>
+        <p:nvSpPr>
+          <p:cNvPr id="12" name="TextBox 11"/>
+          <p:cNvSpPr txBox="1"/>
+          <p:nvPr/>
+        </p:nvSpPr>
+        <p:spPr>
+          <a:xfrm>
+            <a:off x="777240" y="4663440"/>
+            <a:ext cx="10607040" cy="548640"/>
+          </a:xfrm>
+          <a:prstGeom prst="rect">
+            <a:avLst/>
+          </a:prstGeom>
+          <a:noFill/>
+        </p:spPr>
+        <p:txBody>
+          <a:bodyPr wrap="square" lIns="45720" rIns="45720" tIns="18288" bIns="18288" anchor="t">
+            <a:spAutoFit/>
+          </a:bodyPr>
+          <a:lstStyle/>
+          <a:p>
+            <a:pPr algn="ctr"/>
+            <a:r>
+              <a:rPr sz="3040" b="1" i="0">
+                <a:solidFill>
+                  <a:srgbClr val="9E1B32"/>
+                </a:solidFill>
+                <a:latin typeface="Lexend"/>
+              </a:rPr>
+              <a:t>Answer:   D — 1.23 × 10</a:t>
+            </a:r>
+            <a:r>
+              <a:rPr sz="3040" b="1" i="0" baseline="30000">
+                <a:solidFill>
+                  <a:srgbClr val="9E1B32"/>
+                </a:solidFill>
+                <a:latin typeface="Lexend"/>
+              </a:rPr>
+              <a:t>7</a:t>
             </a:r>
           </a:p>
         </p:txBody>
@@ -11134,7 +11135,7 @@
       </p:sp>
       <p:pic>
         <p:nvPicPr>
-          <p:cNvPr id="8" name="Picture 7" descr="95877dd6e3ac64af.png"/>
+          <p:cNvPr id="8" name="Picture 7" descr="8364ffedb5ab9d47.png"/>
           <p:cNvPicPr>
             <a:picLocks noChangeAspect="1"/>
           </p:cNvPicPr>
@@ -11148,8 +11149,8 @@
         </p:blipFill>
         <p:spPr>
           <a:xfrm>
-            <a:off x="4024883" y="2103120"/>
-            <a:ext cx="4111752" cy="411480"/>
+            <a:off x="4026408" y="2194560"/>
+            <a:ext cx="4108704" cy="411480"/>
           </a:xfrm>
           <a:prstGeom prst="rect">
             <a:avLst/>
@@ -11164,115 +11165,8 @@
         </p:nvSpPr>
         <p:spPr>
           <a:xfrm>
-            <a:off x="3119489" y="2839212"/>
-            <a:ext cx="3154956" cy="457200"/>
-          </a:xfrm>
-          <a:prstGeom prst="rect">
-            <a:avLst/>
-          </a:prstGeom>
-          <a:noFill/>
-        </p:spPr>
-        <p:txBody>
-          <a:bodyPr wrap="none" lIns="45720" rIns="45720" tIns="18288" bIns="18288" anchor="ctr">
-            <a:noAutofit/>
-          </a:bodyPr>
-          <a:lstStyle/>
-          <a:p>
-            <a:pPr algn="l"/>
-            <a:r>
-              <a:rPr sz="2330" b="0" i="0">
-                <a:solidFill>
-                  <a:srgbClr val="1A1A1A"/>
-                </a:solidFill>
-                <a:latin typeface="Lexend"/>
-              </a:rPr>
-              <a:t>Match the powers:  </a:t>
-            </a:r>
-          </a:p>
-        </p:txBody>
-      </p:sp>
-      <p:pic>
-        <p:nvPicPr>
-          <p:cNvPr id="10" name="Picture 9" descr="2c3b2befdb898d6e.png"/>
-          <p:cNvPicPr>
-            <a:picLocks noChangeAspect="1"/>
-          </p:cNvPicPr>
-          <p:nvPr/>
-        </p:nvPicPr>
-        <p:blipFill>
-          <a:blip r:embed="rId3"/>
-          <a:stretch>
-            <a:fillRect/>
-          </a:stretch>
-        </p:blipFill>
-        <p:spPr>
-          <a:xfrm>
-            <a:off x="6137286" y="2936748"/>
-            <a:ext cx="2904744" cy="262128"/>
-          </a:xfrm>
-          <a:prstGeom prst="rect">
-            <a:avLst/>
-          </a:prstGeom>
-        </p:spPr>
-      </p:pic>
-      <p:pic>
-        <p:nvPicPr>
-          <p:cNvPr id="11" name="Picture 10" descr="40578aa67f396b1b.png"/>
-          <p:cNvPicPr>
-            <a:picLocks noChangeAspect="1"/>
-          </p:cNvPicPr>
-          <p:nvPr/>
-        </p:nvPicPr>
-        <p:blipFill>
-          <a:blip r:embed="rId4"/>
-          <a:stretch>
-            <a:fillRect/>
-          </a:stretch>
-        </p:blipFill>
-        <p:spPr>
-          <a:xfrm>
-            <a:off x="3174353" y="3464052"/>
-            <a:ext cx="2066543" cy="213360"/>
-          </a:xfrm>
-          <a:prstGeom prst="rect">
-            <a:avLst/>
-          </a:prstGeom>
-        </p:spPr>
-      </p:pic>
-      <p:pic>
-        <p:nvPicPr>
-          <p:cNvPr id="12" name="Picture 11" descr="859794e45c118a30.png"/>
-          <p:cNvPicPr>
-            <a:picLocks noChangeAspect="1"/>
-          </p:cNvPicPr>
-          <p:nvPr/>
-        </p:nvPicPr>
-        <p:blipFill>
-          <a:blip r:embed="rId5"/>
-          <a:stretch>
-            <a:fillRect/>
-          </a:stretch>
-        </p:blipFill>
-        <p:spPr>
-          <a:xfrm>
-            <a:off x="3174353" y="3942588"/>
-            <a:ext cx="1331976" cy="262128"/>
-          </a:xfrm>
-          <a:prstGeom prst="rect">
-            <a:avLst/>
-          </a:prstGeom>
-        </p:spPr>
-      </p:pic>
-      <p:sp>
-        <p:nvSpPr>
-          <p:cNvPr id="13" name="TextBox 12"/>
-          <p:cNvSpPr txBox="1"/>
-          <p:nvPr/>
-        </p:nvSpPr>
-        <p:spPr>
-          <a:xfrm>
-            <a:off x="777240" y="4663440"/>
-            <a:ext cx="10607040" cy="548640"/>
+            <a:off x="777240" y="4343400"/>
+            <a:ext cx="10607040" cy="457200"/>
           </a:xfrm>
           <a:prstGeom prst="rect">
             <a:avLst/>
@@ -11287,22 +11181,13 @@
           <a:p>
             <a:pPr algn="ctr"/>
             <a:r>
-              <a:rPr sz="3040" b="1" i="0">
-                <a:solidFill>
-                  <a:srgbClr val="9E1B32"/>
-                </a:solidFill>
-                <a:latin typeface="Lexend"/>
-              </a:rPr>
-              <a:t>Answer:   7.16 × 10</a:t>
-            </a:r>
-            <a:r>
-              <a:rPr sz="3040" b="1" i="0" baseline="30000">
-                <a:solidFill>
-                  <a:srgbClr val="9E1B32"/>
-                </a:solidFill>
-                <a:latin typeface="Lexend"/>
-              </a:rPr>
-              <a:t>-2</a:t>
+              <a:rPr sz="2470" b="1" i="0">
+                <a:solidFill>
+                  <a:srgbClr val="1A1A1A"/>
+                </a:solidFill>
+                <a:latin typeface="Lexend"/>
+              </a:rPr>
+              <a:t>Answer it.</a:t>
             </a:r>
           </a:p>
         </p:txBody>
@@ -11355,7 +11240,7 @@
                 </a:solidFill>
                 <a:latin typeface="Lexend"/>
               </a:rPr>
-              <a:t>Whiteboards   ·   Question 8 of 9</a:t>
+              <a:t>Whiteboards   ·   Question 7 of 9</a:t>
             </a:r>
           </a:p>
         </p:txBody>
@@ -11537,7 +11422,7 @@
       </p:sp>
       <p:pic>
         <p:nvPicPr>
-          <p:cNvPr id="8" name="Picture 7" descr="5f6d6560049ba77b.png"/>
+          <p:cNvPr id="8" name="Picture 7" descr="95877dd6e3ac64af.png"/>
           <p:cNvPicPr>
             <a:picLocks noChangeAspect="1"/>
           </p:cNvPicPr>
@@ -11551,8 +11436,8 @@
         </p:blipFill>
         <p:spPr>
           <a:xfrm>
-            <a:off x="3320795" y="2196083"/>
-            <a:ext cx="5519928" cy="408432"/>
+            <a:off x="4024883" y="2103120"/>
+            <a:ext cx="4111752" cy="411480"/>
           </a:xfrm>
           <a:prstGeom prst="rect">
             <a:avLst/>
@@ -11567,8 +11452,8 @@
         </p:nvSpPr>
         <p:spPr>
           <a:xfrm>
-            <a:off x="4134140" y="2857500"/>
-            <a:ext cx="3517441" cy="457200"/>
+            <a:off x="3119489" y="2839212"/>
+            <a:ext cx="3154956" cy="457200"/>
           </a:xfrm>
           <a:prstGeom prst="rect">
             <a:avLst/>
@@ -11583,20 +11468,20 @@
           <a:p>
             <a:pPr algn="l"/>
             <a:r>
-              <a:rPr sz="2470" b="0" i="0">
+              <a:rPr sz="2330" b="0" i="0">
                 <a:solidFill>
                   <a:srgbClr val="1A1A1A"/>
                 </a:solidFill>
                 <a:latin typeface="Lexend"/>
               </a:rPr>
-              <a:t>What is the value of </a:t>
+              <a:t>Match the powers:  </a:t>
             </a:r>
           </a:p>
         </p:txBody>
       </p:sp>
       <p:pic>
         <p:nvPicPr>
-          <p:cNvPr id="10" name="Picture 9" descr="f14fce7cf077cd07.png"/>
+          <p:cNvPr id="10" name="Picture 9" descr="2c3b2befdb898d6e.png"/>
           <p:cNvPicPr>
             <a:picLocks noChangeAspect="1"/>
           </p:cNvPicPr>
@@ -11610,59 +11495,72 @@
         </p:blipFill>
         <p:spPr>
           <a:xfrm>
-            <a:off x="7514421" y="2982468"/>
-            <a:ext cx="176784" cy="207264"/>
+            <a:off x="6137286" y="2936748"/>
+            <a:ext cx="2904744" cy="262128"/>
           </a:xfrm>
           <a:prstGeom prst="rect">
             <a:avLst/>
           </a:prstGeom>
         </p:spPr>
       </p:pic>
-      <p:sp>
-        <p:nvSpPr>
-          <p:cNvPr id="11" name="TextBox 10"/>
-          <p:cNvSpPr txBox="1"/>
-          <p:nvPr/>
-        </p:nvSpPr>
-        <p:spPr>
-          <a:xfrm>
-            <a:off x="7691205" y="2857500"/>
-            <a:ext cx="473333" cy="457200"/>
-          </a:xfrm>
-          <a:prstGeom prst="rect">
-            <a:avLst/>
-          </a:prstGeom>
-          <a:noFill/>
-        </p:spPr>
-        <p:txBody>
-          <a:bodyPr wrap="none" lIns="45720" rIns="45720" tIns="18288" bIns="18288" anchor="ctr">
-            <a:noAutofit/>
-          </a:bodyPr>
-          <a:lstStyle/>
-          <a:p>
-            <a:pPr algn="l"/>
-            <a:r>
-              <a:rPr sz="2470" b="0" i="0">
-                <a:solidFill>
-                  <a:srgbClr val="1A1A1A"/>
-                </a:solidFill>
-                <a:latin typeface="Lexend"/>
-              </a:rPr>
-              <a:t> ?</a:t>
-            </a:r>
-          </a:p>
-        </p:txBody>
-      </p:sp>
-      <p:sp>
-        <p:nvSpPr>
-          <p:cNvPr id="12" name="TextBox 11"/>
-          <p:cNvSpPr txBox="1"/>
-          <p:nvPr/>
-        </p:nvSpPr>
-        <p:spPr>
-          <a:xfrm>
-            <a:off x="777240" y="4343400"/>
-            <a:ext cx="10607040" cy="457200"/>
+      <p:pic>
+        <p:nvPicPr>
+          <p:cNvPr id="11" name="Picture 10" descr="40578aa67f396b1b.png"/>
+          <p:cNvPicPr>
+            <a:picLocks noChangeAspect="1"/>
+          </p:cNvPicPr>
+          <p:nvPr/>
+        </p:nvPicPr>
+        <p:blipFill>
+          <a:blip r:embed="rId4"/>
+          <a:stretch>
+            <a:fillRect/>
+          </a:stretch>
+        </p:blipFill>
+        <p:spPr>
+          <a:xfrm>
+            <a:off x="3174353" y="3464052"/>
+            <a:ext cx="2066543" cy="213360"/>
+          </a:xfrm>
+          <a:prstGeom prst="rect">
+            <a:avLst/>
+          </a:prstGeom>
+        </p:spPr>
+      </p:pic>
+      <p:pic>
+        <p:nvPicPr>
+          <p:cNvPr id="12" name="Picture 11" descr="859794e45c118a30.png"/>
+          <p:cNvPicPr>
+            <a:picLocks noChangeAspect="1"/>
+          </p:cNvPicPr>
+          <p:nvPr/>
+        </p:nvPicPr>
+        <p:blipFill>
+          <a:blip r:embed="rId5"/>
+          <a:stretch>
+            <a:fillRect/>
+          </a:stretch>
+        </p:blipFill>
+        <p:spPr>
+          <a:xfrm>
+            <a:off x="3174353" y="3942588"/>
+            <a:ext cx="1331976" cy="262128"/>
+          </a:xfrm>
+          <a:prstGeom prst="rect">
+            <a:avLst/>
+          </a:prstGeom>
+        </p:spPr>
+      </p:pic>
+      <p:sp>
+        <p:nvSpPr>
+          <p:cNvPr id="13" name="TextBox 12"/>
+          <p:cNvSpPr txBox="1"/>
+          <p:nvPr/>
+        </p:nvSpPr>
+        <p:spPr>
+          <a:xfrm>
+            <a:off x="777240" y="4663440"/>
+            <a:ext cx="10607040" cy="548640"/>
           </a:xfrm>
           <a:prstGeom prst="rect">
             <a:avLst/>
@@ -11677,13 +11575,22 @@
           <a:p>
             <a:pPr algn="ctr"/>
             <a:r>
-              <a:rPr sz="2470" b="1" i="0">
-                <a:solidFill>
-                  <a:srgbClr val="1A1A1A"/>
-                </a:solidFill>
-                <a:latin typeface="Lexend"/>
-              </a:rPr>
-              <a:t>Answer it.</a:t>
+              <a:rPr sz="3040" b="1" i="0">
+                <a:solidFill>
+                  <a:srgbClr val="9E1B32"/>
+                </a:solidFill>
+                <a:latin typeface="Lexend"/>
+              </a:rPr>
+              <a:t>Answer:   7.16 × 10</a:t>
+            </a:r>
+            <a:r>
+              <a:rPr sz="3040" b="1" i="0" baseline="30000">
+                <a:solidFill>
+                  <a:srgbClr val="9E1B32"/>
+                </a:solidFill>
+                <a:latin typeface="Lexend"/>
+              </a:rPr>
+              <a:t>-2</a:t>
             </a:r>
           </a:p>
         </p:txBody>
@@ -12601,7 +12508,7 @@
       </p:sp>
       <p:pic>
         <p:nvPicPr>
-          <p:cNvPr id="8" name="Picture 7" descr="a7b6204384889c5e.png"/>
+          <p:cNvPr id="8" name="Picture 7" descr="5f6d6560049ba77b.png"/>
           <p:cNvPicPr>
             <a:picLocks noChangeAspect="1"/>
           </p:cNvPicPr>
@@ -12615,8 +12522,8 @@
         </p:blipFill>
         <p:spPr>
           <a:xfrm>
-            <a:off x="3319272" y="2103120"/>
-            <a:ext cx="5522976" cy="414528"/>
+            <a:off x="3320795" y="2196083"/>
+            <a:ext cx="5519928" cy="408432"/>
           </a:xfrm>
           <a:prstGeom prst="rect">
             <a:avLst/>
@@ -12631,7 +12538,7 @@
         </p:nvSpPr>
         <p:spPr>
           <a:xfrm>
-            <a:off x="4134140" y="2769107"/>
+            <a:off x="4134140" y="2857500"/>
             <a:ext cx="3517441" cy="457200"/>
           </a:xfrm>
           <a:prstGeom prst="rect">
@@ -12674,7 +12581,7 @@
         </p:blipFill>
         <p:spPr>
           <a:xfrm>
-            <a:off x="7514421" y="2894075"/>
+            <a:off x="7514421" y="2982468"/>
             <a:ext cx="176784" cy="207264"/>
           </a:xfrm>
           <a:prstGeom prst="rect">
@@ -12690,7 +12597,7 @@
         </p:nvSpPr>
         <p:spPr>
           <a:xfrm>
-            <a:off x="7691205" y="2769107"/>
+            <a:off x="7691205" y="2857500"/>
             <a:ext cx="473333" cy="457200"/>
           </a:xfrm>
           <a:prstGeom prst="rect">
@@ -12717,88 +12624,16 @@
           </a:p>
         </p:txBody>
       </p:sp>
-      <p:pic>
-        <p:nvPicPr>
-          <p:cNvPr id="12" name="Picture 11" descr="af0a0edef72ddd4a.png"/>
-          <p:cNvPicPr>
-            <a:picLocks noChangeAspect="1"/>
-          </p:cNvPicPr>
-          <p:nvPr/>
-        </p:nvPicPr>
-        <p:blipFill>
-          <a:blip r:embed="rId4"/>
-          <a:stretch>
-            <a:fillRect/>
-          </a:stretch>
-        </p:blipFill>
-        <p:spPr>
-          <a:xfrm>
-            <a:off x="4756403" y="3625595"/>
-            <a:ext cx="2761488" cy="262128"/>
-          </a:xfrm>
-          <a:prstGeom prst="rect">
-            <a:avLst/>
-          </a:prstGeom>
-        </p:spPr>
-      </p:pic>
-      <p:pic>
-        <p:nvPicPr>
-          <p:cNvPr id="13" name="Picture 12" descr="e0b2ab7a4c26bc04.png"/>
-          <p:cNvPicPr>
-            <a:picLocks noChangeAspect="1"/>
-          </p:cNvPicPr>
-          <p:nvPr/>
-        </p:nvPicPr>
-        <p:blipFill>
-          <a:blip r:embed="rId5"/>
-          <a:stretch>
-            <a:fillRect/>
-          </a:stretch>
-        </p:blipFill>
-        <p:spPr>
-          <a:xfrm>
-            <a:off x="4756403" y="4152899"/>
-            <a:ext cx="1694688" cy="213360"/>
-          </a:xfrm>
-          <a:prstGeom prst="rect">
-            <a:avLst/>
-          </a:prstGeom>
-        </p:spPr>
-      </p:pic>
-      <p:pic>
-        <p:nvPicPr>
-          <p:cNvPr id="14" name="Picture 13" descr="1dcdac54ad1451b5.png"/>
-          <p:cNvPicPr>
-            <a:picLocks noChangeAspect="1"/>
-          </p:cNvPicPr>
-          <p:nvPr/>
-        </p:nvPicPr>
-        <p:blipFill>
-          <a:blip r:embed="rId6"/>
-          <a:stretch>
-            <a:fillRect/>
-          </a:stretch>
-        </p:blipFill>
-        <p:spPr>
-          <a:xfrm>
-            <a:off x="4756403" y="4655819"/>
-            <a:ext cx="2353056" cy="213360"/>
-          </a:xfrm>
-          <a:prstGeom prst="rect">
-            <a:avLst/>
-          </a:prstGeom>
-        </p:spPr>
-      </p:pic>
-      <p:sp>
-        <p:nvSpPr>
-          <p:cNvPr id="15" name="TextBox 14"/>
-          <p:cNvSpPr txBox="1"/>
-          <p:nvPr/>
-        </p:nvSpPr>
-        <p:spPr>
-          <a:xfrm>
-            <a:off x="777240" y="5105400"/>
-            <a:ext cx="10607040" cy="548640"/>
+      <p:sp>
+        <p:nvSpPr>
+          <p:cNvPr id="12" name="TextBox 11"/>
+          <p:cNvSpPr txBox="1"/>
+          <p:nvPr/>
+        </p:nvSpPr>
+        <p:spPr>
+          <a:xfrm>
+            <a:off x="777240" y="4343400"/>
+            <a:ext cx="10607040" cy="457200"/>
           </a:xfrm>
           <a:prstGeom prst="rect">
             <a:avLst/>
@@ -12813,13 +12648,13 @@
           <a:p>
             <a:pPr algn="ctr"/>
             <a:r>
-              <a:rPr sz="3040" b="1" i="0">
-                <a:solidFill>
-                  <a:srgbClr val="9E1B32"/>
-                </a:solidFill>
-                <a:latin typeface="Lexend"/>
-              </a:rPr>
-              <a:t>Answer:   n = 5.7</a:t>
+              <a:rPr sz="2470" b="1" i="0">
+                <a:solidFill>
+                  <a:srgbClr val="1A1A1A"/>
+                </a:solidFill>
+                <a:latin typeface="Lexend"/>
+              </a:rPr>
+              <a:t>Answer it.</a:t>
             </a:r>
           </a:p>
         </p:txBody>
@@ -12872,7 +12707,7 @@
                 </a:solidFill>
                 <a:latin typeface="Lexend"/>
               </a:rPr>
-              <a:t>Whiteboards   ·   Question 9 of 9</a:t>
+              <a:t>Whiteboards   ·   Question 8 of 9</a:t>
             </a:r>
           </a:p>
         </p:txBody>
@@ -13052,44 +12887,9 @@
           </a:p>
         </p:txBody>
       </p:sp>
-      <p:sp>
-        <p:nvSpPr>
-          <p:cNvPr id="8" name="TextBox 7"/>
-          <p:cNvSpPr txBox="1"/>
-          <p:nvPr/>
-        </p:nvSpPr>
-        <p:spPr>
-          <a:xfrm>
-            <a:off x="2039261" y="2171700"/>
-            <a:ext cx="2490283" cy="457200"/>
-          </a:xfrm>
-          <a:prstGeom prst="rect">
-            <a:avLst/>
-          </a:prstGeom>
-          <a:noFill/>
-        </p:spPr>
-        <p:txBody>
-          <a:bodyPr wrap="none" lIns="45720" rIns="45720" tIns="18288" bIns="18288" anchor="ctr">
-            <a:noAutofit/>
-          </a:bodyPr>
-          <a:lstStyle/>
-          <a:p>
-            <a:pPr algn="l"/>
-            <a:r>
-              <a:rPr sz="2470" b="0" i="0">
-                <a:solidFill>
-                  <a:srgbClr val="1A1A1A"/>
-                </a:solidFill>
-                <a:latin typeface="Lexend"/>
-              </a:rPr>
-              <a:t>Devon writes  </a:t>
-            </a:r>
-          </a:p>
-        </p:txBody>
-      </p:sp>
       <p:pic>
         <p:nvPicPr>
-          <p:cNvPr id="9" name="Picture 8" descr="0a7a4307a87a1af9.png"/>
+          <p:cNvPr id="8" name="Picture 7" descr="a7b6204384889c5e.png"/>
           <p:cNvPicPr>
             <a:picLocks noChangeAspect="1"/>
           </p:cNvPicPr>
@@ -13103,8 +12903,8 @@
         </p:blipFill>
         <p:spPr>
           <a:xfrm>
-            <a:off x="4392384" y="2196083"/>
-            <a:ext cx="5580888" cy="408432"/>
+            <a:off x="3319272" y="2103120"/>
+            <a:ext cx="5522976" cy="414528"/>
           </a:xfrm>
           <a:prstGeom prst="rect">
             <a:avLst/>
@@ -13113,14 +12913,14 @@
       </p:pic>
       <p:sp>
         <p:nvSpPr>
-          <p:cNvPr id="10" name="TextBox 9"/>
-          <p:cNvSpPr txBox="1"/>
-          <p:nvPr/>
-        </p:nvSpPr>
-        <p:spPr>
-          <a:xfrm>
-            <a:off x="9973272" y="2171700"/>
-            <a:ext cx="286146" cy="457200"/>
+          <p:cNvPr id="9" name="TextBox 8"/>
+          <p:cNvSpPr txBox="1"/>
+          <p:nvPr/>
+        </p:nvSpPr>
+        <p:spPr>
+          <a:xfrm>
+            <a:off x="4134140" y="2769107"/>
+            <a:ext cx="3517441" cy="457200"/>
           </a:xfrm>
           <a:prstGeom prst="rect">
             <a:avLst/>
@@ -13141,11 +12941,35 @@
                 </a:solidFill>
                 <a:latin typeface="Lexend"/>
               </a:rPr>
-              <a:t>.</a:t>
-            </a:r>
-          </a:p>
-        </p:txBody>
-      </p:sp>
+              <a:t>What is the value of </a:t>
+            </a:r>
+          </a:p>
+        </p:txBody>
+      </p:sp>
+      <p:pic>
+        <p:nvPicPr>
+          <p:cNvPr id="10" name="Picture 9" descr="f14fce7cf077cd07.png"/>
+          <p:cNvPicPr>
+            <a:picLocks noChangeAspect="1"/>
+          </p:cNvPicPr>
+          <p:nvPr/>
+        </p:nvPicPr>
+        <p:blipFill>
+          <a:blip r:embed="rId3"/>
+          <a:stretch>
+            <a:fillRect/>
+          </a:stretch>
+        </p:blipFill>
+        <p:spPr>
+          <a:xfrm>
+            <a:off x="7514421" y="2894075"/>
+            <a:ext cx="176784" cy="207264"/>
+          </a:xfrm>
+          <a:prstGeom prst="rect">
+            <a:avLst/>
+          </a:prstGeom>
+        </p:spPr>
+      </p:pic>
       <p:sp>
         <p:nvSpPr>
           <p:cNvPr id="11" name="TextBox 10"/>
@@ -13154,8 +12978,115 @@
         </p:nvSpPr>
         <p:spPr>
           <a:xfrm>
-            <a:off x="777240" y="2880360"/>
-            <a:ext cx="10607040" cy="465151"/>
+            <a:off x="7691205" y="2769107"/>
+            <a:ext cx="473333" cy="457200"/>
+          </a:xfrm>
+          <a:prstGeom prst="rect">
+            <a:avLst/>
+          </a:prstGeom>
+          <a:noFill/>
+        </p:spPr>
+        <p:txBody>
+          <a:bodyPr wrap="none" lIns="45720" rIns="45720" tIns="18288" bIns="18288" anchor="ctr">
+            <a:noAutofit/>
+          </a:bodyPr>
+          <a:lstStyle/>
+          <a:p>
+            <a:pPr algn="l"/>
+            <a:r>
+              <a:rPr sz="2470" b="0" i="0">
+                <a:solidFill>
+                  <a:srgbClr val="1A1A1A"/>
+                </a:solidFill>
+                <a:latin typeface="Lexend"/>
+              </a:rPr>
+              <a:t> ?</a:t>
+            </a:r>
+          </a:p>
+        </p:txBody>
+      </p:sp>
+      <p:pic>
+        <p:nvPicPr>
+          <p:cNvPr id="12" name="Picture 11" descr="af0a0edef72ddd4a.png"/>
+          <p:cNvPicPr>
+            <a:picLocks noChangeAspect="1"/>
+          </p:cNvPicPr>
+          <p:nvPr/>
+        </p:nvPicPr>
+        <p:blipFill>
+          <a:blip r:embed="rId4"/>
+          <a:stretch>
+            <a:fillRect/>
+          </a:stretch>
+        </p:blipFill>
+        <p:spPr>
+          <a:xfrm>
+            <a:off x="4756403" y="3625595"/>
+            <a:ext cx="2761488" cy="262128"/>
+          </a:xfrm>
+          <a:prstGeom prst="rect">
+            <a:avLst/>
+          </a:prstGeom>
+        </p:spPr>
+      </p:pic>
+      <p:pic>
+        <p:nvPicPr>
+          <p:cNvPr id="13" name="Picture 12" descr="e0b2ab7a4c26bc04.png"/>
+          <p:cNvPicPr>
+            <a:picLocks noChangeAspect="1"/>
+          </p:cNvPicPr>
+          <p:nvPr/>
+        </p:nvPicPr>
+        <p:blipFill>
+          <a:blip r:embed="rId5"/>
+          <a:stretch>
+            <a:fillRect/>
+          </a:stretch>
+        </p:blipFill>
+        <p:spPr>
+          <a:xfrm>
+            <a:off x="4756403" y="4152899"/>
+            <a:ext cx="1694688" cy="213360"/>
+          </a:xfrm>
+          <a:prstGeom prst="rect">
+            <a:avLst/>
+          </a:prstGeom>
+        </p:spPr>
+      </p:pic>
+      <p:pic>
+        <p:nvPicPr>
+          <p:cNvPr id="14" name="Picture 13" descr="1dcdac54ad1451b5.png"/>
+          <p:cNvPicPr>
+            <a:picLocks noChangeAspect="1"/>
+          </p:cNvPicPr>
+          <p:nvPr/>
+        </p:nvPicPr>
+        <p:blipFill>
+          <a:blip r:embed="rId6"/>
+          <a:stretch>
+            <a:fillRect/>
+          </a:stretch>
+        </p:blipFill>
+        <p:spPr>
+          <a:xfrm>
+            <a:off x="4756403" y="4655819"/>
+            <a:ext cx="2353056" cy="213360"/>
+          </a:xfrm>
+          <a:prstGeom prst="rect">
+            <a:avLst/>
+          </a:prstGeom>
+        </p:spPr>
+      </p:pic>
+      <p:sp>
+        <p:nvSpPr>
+          <p:cNvPr id="15" name="TextBox 14"/>
+          <p:cNvSpPr txBox="1"/>
+          <p:nvPr/>
+        </p:nvSpPr>
+        <p:spPr>
+          <a:xfrm>
+            <a:off x="777240" y="5105400"/>
+            <a:ext cx="10607040" cy="548640"/>
           </a:xfrm>
           <a:prstGeom prst="rect">
             <a:avLst/>
@@ -13170,48 +13101,13 @@
           <a:p>
             <a:pPr algn="ctr"/>
             <a:r>
-              <a:rPr sz="2470" b="0" i="0">
-                <a:solidFill>
-                  <a:srgbClr val="1A1A1A"/>
-                </a:solidFill>
-                <a:latin typeface="Lexend"/>
-              </a:rPr>
-              <a:t>Name the two mistakes he made, and give the correct sum.</a:t>
-            </a:r>
-          </a:p>
-        </p:txBody>
-      </p:sp>
-      <p:sp>
-        <p:nvSpPr>
-          <p:cNvPr id="12" name="TextBox 11"/>
-          <p:cNvSpPr txBox="1"/>
-          <p:nvPr/>
-        </p:nvSpPr>
-        <p:spPr>
-          <a:xfrm>
-            <a:off x="777240" y="4343400"/>
-            <a:ext cx="10607040" cy="457200"/>
-          </a:xfrm>
-          <a:prstGeom prst="rect">
-            <a:avLst/>
-          </a:prstGeom>
-          <a:noFill/>
-        </p:spPr>
-        <p:txBody>
-          <a:bodyPr wrap="square" lIns="45720" rIns="45720" tIns="18288" bIns="18288" anchor="t">
-            <a:spAutoFit/>
-          </a:bodyPr>
-          <a:lstStyle/>
-          <a:p>
-            <a:pPr algn="ctr"/>
-            <a:r>
-              <a:rPr sz="2470" b="1" i="0">
-                <a:solidFill>
-                  <a:srgbClr val="1A1A1A"/>
-                </a:solidFill>
-                <a:latin typeface="Lexend"/>
-              </a:rPr>
-              <a:t>Write your answer in sentences.</a:t>
+              <a:rPr sz="3040" b="1" i="0">
+                <a:solidFill>
+                  <a:srgbClr val="9E1B32"/>
+                </a:solidFill>
+                <a:latin typeface="Lexend"/>
+              </a:rPr>
+              <a:t>Answer:   n = 5.7</a:t>
             </a:r>
           </a:p>
         </p:txBody>
@@ -13452,7 +13348,7 @@
         </p:nvSpPr>
         <p:spPr>
           <a:xfrm>
-            <a:off x="2037737" y="2081783"/>
+            <a:off x="2039261" y="2171700"/>
             <a:ext cx="2490283" cy="457200"/>
           </a:xfrm>
           <a:prstGeom prst="rect">
@@ -13481,7 +13377,7 @@
       </p:sp>
       <p:pic>
         <p:nvPicPr>
-          <p:cNvPr id="9" name="Picture 8" descr="595d18b76e1d008d.png"/>
+          <p:cNvPr id="9" name="Picture 8" descr="0a7a4307a87a1af9.png"/>
           <p:cNvPicPr>
             <a:picLocks noChangeAspect="1"/>
           </p:cNvPicPr>
@@ -13495,8 +13391,8 @@
         </p:blipFill>
         <p:spPr>
           <a:xfrm>
-            <a:off x="4390860" y="2103120"/>
-            <a:ext cx="5583936" cy="414528"/>
+            <a:off x="4392384" y="2196083"/>
+            <a:ext cx="5580888" cy="408432"/>
           </a:xfrm>
           <a:prstGeom prst="rect">
             <a:avLst/>
@@ -13511,7 +13407,7 @@
         </p:nvSpPr>
         <p:spPr>
           <a:xfrm>
-            <a:off x="9974796" y="2081783"/>
+            <a:off x="9973272" y="2171700"/>
             <a:ext cx="286146" cy="457200"/>
           </a:xfrm>
           <a:prstGeom prst="rect">
@@ -13546,7 +13442,7 @@
         </p:nvSpPr>
         <p:spPr>
           <a:xfrm>
-            <a:off x="777240" y="2791967"/>
+            <a:off x="777240" y="2880360"/>
             <a:ext cx="10607040" cy="465151"/>
           </a:xfrm>
           <a:prstGeom prst="rect">
@@ -13581,150 +13477,8 @@
         </p:nvSpPr>
         <p:spPr>
           <a:xfrm>
-            <a:off x="1754232" y="3417139"/>
-            <a:ext cx="8790215" cy="457200"/>
-          </a:xfrm>
-          <a:prstGeom prst="rect">
-            <a:avLst/>
-          </a:prstGeom>
-          <a:noFill/>
-        </p:spPr>
-        <p:txBody>
-          <a:bodyPr wrap="none" lIns="45720" rIns="45720" tIns="18288" bIns="18288" anchor="ctr">
-            <a:noAutofit/>
-          </a:bodyPr>
-          <a:lstStyle/>
-          <a:p>
-            <a:pPr algn="l"/>
-            <a:r>
-              <a:rPr sz="2330" b="0" i="0">
-                <a:solidFill>
-                  <a:srgbClr val="1A1A1A"/>
-                </a:solidFill>
-                <a:latin typeface="Lexend"/>
-              </a:rPr>
-              <a:t>The powers do not match, and exponents are not added.</a:t>
-            </a:r>
-          </a:p>
-        </p:txBody>
-      </p:sp>
-      <p:pic>
-        <p:nvPicPr>
-          <p:cNvPr id="13" name="Picture 12" descr="afb9dc22174bd350.png"/>
-          <p:cNvPicPr>
-            <a:picLocks noChangeAspect="1"/>
-          </p:cNvPicPr>
-          <p:nvPr/>
-        </p:nvPicPr>
-        <p:blipFill>
-          <a:blip r:embed="rId3"/>
-          <a:stretch>
-            <a:fillRect/>
-          </a:stretch>
-        </p:blipFill>
-        <p:spPr>
-          <a:xfrm>
-            <a:off x="1809096" y="4017595"/>
-            <a:ext cx="2773680" cy="262128"/>
-          </a:xfrm>
-          <a:prstGeom prst="rect">
-            <a:avLst/>
-          </a:prstGeom>
-        </p:spPr>
-      </p:pic>
-      <p:pic>
-        <p:nvPicPr>
-          <p:cNvPr id="14" name="Picture 13" descr="0920ee9ba6d56afd.png"/>
-          <p:cNvPicPr>
-            <a:picLocks noChangeAspect="1"/>
-          </p:cNvPicPr>
-          <p:nvPr/>
-        </p:nvPicPr>
-        <p:blipFill>
-          <a:blip r:embed="rId4"/>
-          <a:stretch>
-            <a:fillRect/>
-          </a:stretch>
-        </p:blipFill>
-        <p:spPr>
-          <a:xfrm>
-            <a:off x="1809096" y="4544899"/>
-            <a:ext cx="2380488" cy="213360"/>
-          </a:xfrm>
-          <a:prstGeom prst="rect">
-            <a:avLst/>
-          </a:prstGeom>
-        </p:spPr>
-      </p:pic>
-      <p:sp>
-        <p:nvSpPr>
-          <p:cNvPr id="15" name="TextBox 14"/>
-          <p:cNvSpPr txBox="1"/>
-          <p:nvPr/>
-        </p:nvSpPr>
-        <p:spPr>
-          <a:xfrm>
-            <a:off x="4189584" y="4422979"/>
-            <a:ext cx="1163085" cy="457200"/>
-          </a:xfrm>
-          <a:prstGeom prst="rect">
-            <a:avLst/>
-          </a:prstGeom>
-          <a:noFill/>
-        </p:spPr>
-        <p:txBody>
-          <a:bodyPr wrap="none" lIns="45720" rIns="45720" tIns="18288" bIns="18288" anchor="ctr">
-            <a:noAutofit/>
-          </a:bodyPr>
-          <a:lstStyle/>
-          <a:p>
-            <a:pPr algn="l"/>
-            <a:r>
-              <a:rPr sz="2330" b="0" i="0">
-                <a:solidFill>
-                  <a:srgbClr val="1A1A1A"/>
-                </a:solidFill>
-                <a:latin typeface="Lexend"/>
-              </a:rPr>
-              <a:t>,   so   </a:t>
-            </a:r>
-          </a:p>
-        </p:txBody>
-      </p:sp>
-      <p:pic>
-        <p:nvPicPr>
-          <p:cNvPr id="16" name="Picture 15" descr="5bab4917e6b979c2.png"/>
-          <p:cNvPicPr>
-            <a:picLocks noChangeAspect="1"/>
-          </p:cNvPicPr>
-          <p:nvPr/>
-        </p:nvPicPr>
-        <p:blipFill>
-          <a:blip r:embed="rId5"/>
-          <a:stretch>
-            <a:fillRect/>
-          </a:stretch>
-        </p:blipFill>
-        <p:spPr>
-          <a:xfrm>
-            <a:off x="5215509" y="4523563"/>
-            <a:ext cx="1399032" cy="256032"/>
-          </a:xfrm>
-          <a:prstGeom prst="rect">
-            <a:avLst/>
-          </a:prstGeom>
-        </p:spPr>
-      </p:pic>
-      <p:sp>
-        <p:nvSpPr>
-          <p:cNvPr id="17" name="TextBox 16"/>
-          <p:cNvSpPr txBox="1"/>
-          <p:nvPr/>
-        </p:nvSpPr>
-        <p:spPr>
-          <a:xfrm>
-            <a:off x="777240" y="4994479"/>
-            <a:ext cx="10607040" cy="548640"/>
+            <a:off x="777240" y="4343400"/>
+            <a:ext cx="10607040" cy="457200"/>
           </a:xfrm>
           <a:prstGeom prst="rect">
             <a:avLst/>
@@ -13739,22 +13493,13 @@
           <a:p>
             <a:pPr algn="ctr"/>
             <a:r>
-              <a:rPr sz="3040" b="1" i="0">
-                <a:solidFill>
-                  <a:srgbClr val="9E1B32"/>
-                </a:solidFill>
-                <a:latin typeface="Lexend"/>
-              </a:rPr>
-              <a:t>Answer:   6.619 × 10</a:t>
-            </a:r>
-            <a:r>
-              <a:rPr sz="3040" b="1" i="0" baseline="30000">
-                <a:solidFill>
-                  <a:srgbClr val="9E1B32"/>
-                </a:solidFill>
-                <a:latin typeface="Lexend"/>
-              </a:rPr>
-              <a:t>4</a:t>
+              <a:rPr sz="2470" b="1" i="0">
+                <a:solidFill>
+                  <a:srgbClr val="1A1A1A"/>
+                </a:solidFill>
+                <a:latin typeface="Lexend"/>
+              </a:rPr>
+              <a:t>Write your answer in sentences.</a:t>
             </a:r>
           </a:p>
         </p:txBody>
@@ -13801,13 +13546,13 @@
           <a:p>
             <a:pPr algn="l"/>
             <a:r>
-              <a:rPr sz="3420" b="1" i="0">
+              <a:rPr sz="3229" b="1" i="0">
                 <a:solidFill>
                   <a:srgbClr val="1A1A1A"/>
                 </a:solidFill>
                 <a:latin typeface="Lexend"/>
               </a:rPr>
-              <a:t>Independent Set</a:t>
+              <a:t>Whiteboards   ·   Question 9 of 9</a:t>
             </a:r>
           </a:p>
         </p:txBody>
@@ -13995,36 +13740,36 @@
         </p:nvSpPr>
         <p:spPr>
           <a:xfrm>
-            <a:off x="960120" y="1495043"/>
-            <a:ext cx="548640" cy="457200"/>
-          </a:xfrm>
-          <a:prstGeom prst="rect">
-            <a:avLst/>
-          </a:prstGeom>
-          <a:noFill/>
-        </p:spPr>
-        <p:txBody>
-          <a:bodyPr wrap="square" lIns="45720" rIns="45720" tIns="18288" bIns="18288" anchor="ctr">
-            <a:spAutoFit/>
+            <a:off x="2037737" y="2081783"/>
+            <a:ext cx="2490283" cy="457200"/>
+          </a:xfrm>
+          <a:prstGeom prst="rect">
+            <a:avLst/>
+          </a:prstGeom>
+          <a:noFill/>
+        </p:spPr>
+        <p:txBody>
+          <a:bodyPr wrap="none" lIns="45720" rIns="45720" tIns="18288" bIns="18288" anchor="ctr">
+            <a:noAutofit/>
           </a:bodyPr>
           <a:lstStyle/>
           <a:p>
             <a:pPr algn="l"/>
             <a:r>
-              <a:rPr sz="2180" b="1" i="0">
-                <a:solidFill>
-                  <a:srgbClr val="0B5394"/>
-                </a:solidFill>
-                <a:latin typeface="Lexend"/>
-              </a:rPr>
-              <a:t>1.</a:t>
+              <a:rPr sz="2470" b="0" i="0">
+                <a:solidFill>
+                  <a:srgbClr val="1A1A1A"/>
+                </a:solidFill>
+                <a:latin typeface="Lexend"/>
+              </a:rPr>
+              <a:t>Devon writes  </a:t>
             </a:r>
           </a:p>
         </p:txBody>
       </p:sp>
       <p:pic>
         <p:nvPicPr>
-          <p:cNvPr id="9" name="Picture 8" descr="8bb51b7cdaedcae0.png"/>
+          <p:cNvPr id="9" name="Picture 8" descr="595d18b76e1d008d.png"/>
           <p:cNvPicPr>
             <a:picLocks noChangeAspect="1"/>
           </p:cNvPicPr>
@@ -14038,8 +13783,8 @@
         </p:blipFill>
         <p:spPr>
           <a:xfrm>
-            <a:off x="1627632" y="1557527"/>
-            <a:ext cx="3066288" cy="332232"/>
+            <a:off x="4390860" y="2103120"/>
+            <a:ext cx="5583936" cy="414528"/>
           </a:xfrm>
           <a:prstGeom prst="rect">
             <a:avLst/>
@@ -14054,36 +13799,106 @@
         </p:nvSpPr>
         <p:spPr>
           <a:xfrm>
-            <a:off x="960120" y="2089403"/>
-            <a:ext cx="548640" cy="457200"/>
-          </a:xfrm>
-          <a:prstGeom prst="rect">
-            <a:avLst/>
-          </a:prstGeom>
-          <a:noFill/>
-        </p:spPr>
-        <p:txBody>
-          <a:bodyPr wrap="square" lIns="45720" rIns="45720" tIns="18288" bIns="18288" anchor="ctr">
+            <a:off x="9974796" y="2081783"/>
+            <a:ext cx="286146" cy="457200"/>
+          </a:xfrm>
+          <a:prstGeom prst="rect">
+            <a:avLst/>
+          </a:prstGeom>
+          <a:noFill/>
+        </p:spPr>
+        <p:txBody>
+          <a:bodyPr wrap="none" lIns="45720" rIns="45720" tIns="18288" bIns="18288" anchor="ctr">
+            <a:noAutofit/>
+          </a:bodyPr>
+          <a:lstStyle/>
+          <a:p>
+            <a:pPr algn="l"/>
+            <a:r>
+              <a:rPr sz="2470" b="0" i="0">
+                <a:solidFill>
+                  <a:srgbClr val="1A1A1A"/>
+                </a:solidFill>
+                <a:latin typeface="Lexend"/>
+              </a:rPr>
+              <a:t>.</a:t>
+            </a:r>
+          </a:p>
+        </p:txBody>
+      </p:sp>
+      <p:sp>
+        <p:nvSpPr>
+          <p:cNvPr id="11" name="TextBox 10"/>
+          <p:cNvSpPr txBox="1"/>
+          <p:nvPr/>
+        </p:nvSpPr>
+        <p:spPr>
+          <a:xfrm>
+            <a:off x="777240" y="2791967"/>
+            <a:ext cx="10607040" cy="465151"/>
+          </a:xfrm>
+          <a:prstGeom prst="rect">
+            <a:avLst/>
+          </a:prstGeom>
+          <a:noFill/>
+        </p:spPr>
+        <p:txBody>
+          <a:bodyPr wrap="square" lIns="45720" rIns="45720" tIns="18288" bIns="18288" anchor="t">
             <a:spAutoFit/>
           </a:bodyPr>
           <a:lstStyle/>
           <a:p>
+            <a:pPr algn="ctr"/>
+            <a:r>
+              <a:rPr sz="2470" b="0" i="0">
+                <a:solidFill>
+                  <a:srgbClr val="1A1A1A"/>
+                </a:solidFill>
+                <a:latin typeface="Lexend"/>
+              </a:rPr>
+              <a:t>Name the two mistakes he made, and give the correct sum.</a:t>
+            </a:r>
+          </a:p>
+        </p:txBody>
+      </p:sp>
+      <p:sp>
+        <p:nvSpPr>
+          <p:cNvPr id="12" name="TextBox 11"/>
+          <p:cNvSpPr txBox="1"/>
+          <p:nvPr/>
+        </p:nvSpPr>
+        <p:spPr>
+          <a:xfrm>
+            <a:off x="1754232" y="3417139"/>
+            <a:ext cx="8790215" cy="457200"/>
+          </a:xfrm>
+          <a:prstGeom prst="rect">
+            <a:avLst/>
+          </a:prstGeom>
+          <a:noFill/>
+        </p:spPr>
+        <p:txBody>
+          <a:bodyPr wrap="none" lIns="45720" rIns="45720" tIns="18288" bIns="18288" anchor="ctr">
+            <a:noAutofit/>
+          </a:bodyPr>
+          <a:lstStyle/>
+          <a:p>
             <a:pPr algn="l"/>
             <a:r>
-              <a:rPr sz="2180" b="1" i="0">
-                <a:solidFill>
-                  <a:srgbClr val="0B5394"/>
-                </a:solidFill>
-                <a:latin typeface="Lexend"/>
-              </a:rPr>
-              <a:t>2.</a:t>
+              <a:rPr sz="2330" b="0" i="0">
+                <a:solidFill>
+                  <a:srgbClr val="1A1A1A"/>
+                </a:solidFill>
+                <a:latin typeface="Lexend"/>
+              </a:rPr>
+              <a:t>The powers do not match, and exponents are not added.</a:t>
             </a:r>
           </a:p>
         </p:txBody>
       </p:sp>
       <p:pic>
         <p:nvPicPr>
-          <p:cNvPr id="11" name="Picture 10" descr="6da4b5382fbcdf2b.png"/>
+          <p:cNvPr id="13" name="Picture 12" descr="afb9dc22174bd350.png"/>
           <p:cNvPicPr>
             <a:picLocks noChangeAspect="1"/>
           </p:cNvPicPr>
@@ -14097,52 +13912,17 @@
         </p:blipFill>
         <p:spPr>
           <a:xfrm>
-            <a:off x="1627632" y="2153411"/>
-            <a:ext cx="3304032" cy="329184"/>
+            <a:off x="1809096" y="4017595"/>
+            <a:ext cx="2773680" cy="262128"/>
           </a:xfrm>
           <a:prstGeom prst="rect">
             <a:avLst/>
           </a:prstGeom>
         </p:spPr>
       </p:pic>
-      <p:sp>
-        <p:nvSpPr>
-          <p:cNvPr id="12" name="TextBox 11"/>
-          <p:cNvSpPr txBox="1"/>
-          <p:nvPr/>
-        </p:nvSpPr>
-        <p:spPr>
-          <a:xfrm>
-            <a:off x="960120" y="2683763"/>
-            <a:ext cx="548640" cy="457200"/>
-          </a:xfrm>
-          <a:prstGeom prst="rect">
-            <a:avLst/>
-          </a:prstGeom>
-          <a:noFill/>
-        </p:spPr>
-        <p:txBody>
-          <a:bodyPr wrap="square" lIns="45720" rIns="45720" tIns="18288" bIns="18288" anchor="ctr">
-            <a:spAutoFit/>
-          </a:bodyPr>
-          <a:lstStyle/>
-          <a:p>
-            <a:pPr algn="l"/>
-            <a:r>
-              <a:rPr sz="2180" b="1" i="0">
-                <a:solidFill>
-                  <a:srgbClr val="0B5394"/>
-                </a:solidFill>
-                <a:latin typeface="Lexend"/>
-              </a:rPr>
-              <a:t>3.</a:t>
-            </a:r>
-          </a:p>
-        </p:txBody>
-      </p:sp>
       <p:pic>
         <p:nvPicPr>
-          <p:cNvPr id="13" name="Picture 12" descr="95d8ded1b0db296e.png"/>
+          <p:cNvPr id="14" name="Picture 13" descr="0920ee9ba6d56afd.png"/>
           <p:cNvPicPr>
             <a:picLocks noChangeAspect="1"/>
           </p:cNvPicPr>
@@ -14156,8 +13936,8 @@
         </p:blipFill>
         <p:spPr>
           <a:xfrm>
-            <a:off x="1627632" y="2747771"/>
-            <a:ext cx="3063240" cy="329184"/>
+            <a:off x="1809096" y="4544899"/>
+            <a:ext cx="2380488" cy="213360"/>
           </a:xfrm>
           <a:prstGeom prst="rect">
             <a:avLst/>
@@ -14166,42 +13946,42 @@
       </p:pic>
       <p:sp>
         <p:nvSpPr>
-          <p:cNvPr id="14" name="TextBox 13"/>
-          <p:cNvSpPr txBox="1"/>
-          <p:nvPr/>
-        </p:nvSpPr>
-        <p:spPr>
-          <a:xfrm>
-            <a:off x="960120" y="3278123"/>
-            <a:ext cx="548640" cy="457200"/>
-          </a:xfrm>
-          <a:prstGeom prst="rect">
-            <a:avLst/>
-          </a:prstGeom>
-          <a:noFill/>
-        </p:spPr>
-        <p:txBody>
-          <a:bodyPr wrap="square" lIns="45720" rIns="45720" tIns="18288" bIns="18288" anchor="ctr">
-            <a:spAutoFit/>
+          <p:cNvPr id="15" name="TextBox 14"/>
+          <p:cNvSpPr txBox="1"/>
+          <p:nvPr/>
+        </p:nvSpPr>
+        <p:spPr>
+          <a:xfrm>
+            <a:off x="4189584" y="4422979"/>
+            <a:ext cx="1163085" cy="457200"/>
+          </a:xfrm>
+          <a:prstGeom prst="rect">
+            <a:avLst/>
+          </a:prstGeom>
+          <a:noFill/>
+        </p:spPr>
+        <p:txBody>
+          <a:bodyPr wrap="none" lIns="45720" rIns="45720" tIns="18288" bIns="18288" anchor="ctr">
+            <a:noAutofit/>
           </a:bodyPr>
           <a:lstStyle/>
           <a:p>
             <a:pPr algn="l"/>
             <a:r>
-              <a:rPr sz="2180" b="1" i="0">
-                <a:solidFill>
-                  <a:srgbClr val="0B5394"/>
-                </a:solidFill>
-                <a:latin typeface="Lexend"/>
-              </a:rPr>
-              <a:t>4.</a:t>
+              <a:rPr sz="2330" b="0" i="0">
+                <a:solidFill>
+                  <a:srgbClr val="1A1A1A"/>
+                </a:solidFill>
+                <a:latin typeface="Lexend"/>
+              </a:rPr>
+              <a:t>,   so   </a:t>
             </a:r>
           </a:p>
         </p:txBody>
       </p:sp>
       <p:pic>
         <p:nvPicPr>
-          <p:cNvPr id="15" name="Picture 14" descr="0bd66daf20240d1b.png"/>
+          <p:cNvPr id="16" name="Picture 15" descr="5bab4917e6b979c2.png"/>
           <p:cNvPicPr>
             <a:picLocks noChangeAspect="1"/>
           </p:cNvPicPr>
@@ -14215,8 +13995,8 @@
         </p:blipFill>
         <p:spPr>
           <a:xfrm>
-            <a:off x="1627632" y="3340607"/>
-            <a:ext cx="3060192" cy="332232"/>
+            <a:off x="5215509" y="4523563"/>
+            <a:ext cx="1399032" cy="256032"/>
           </a:xfrm>
           <a:prstGeom prst="rect">
             <a:avLst/>
@@ -14225,216 +14005,48 @@
       </p:pic>
       <p:sp>
         <p:nvSpPr>
-          <p:cNvPr id="16" name="TextBox 15"/>
-          <p:cNvSpPr txBox="1"/>
-          <p:nvPr/>
-        </p:nvSpPr>
-        <p:spPr>
-          <a:xfrm>
-            <a:off x="960120" y="3872483"/>
-            <a:ext cx="548640" cy="457200"/>
-          </a:xfrm>
-          <a:prstGeom prst="rect">
-            <a:avLst/>
-          </a:prstGeom>
-          <a:noFill/>
-        </p:spPr>
-        <p:txBody>
-          <a:bodyPr wrap="square" lIns="45720" rIns="45720" tIns="18288" bIns="18288" anchor="ctr">
+          <p:cNvPr id="17" name="TextBox 16"/>
+          <p:cNvSpPr txBox="1"/>
+          <p:nvPr/>
+        </p:nvSpPr>
+        <p:spPr>
+          <a:xfrm>
+            <a:off x="777240" y="4994479"/>
+            <a:ext cx="10607040" cy="548640"/>
+          </a:xfrm>
+          <a:prstGeom prst="rect">
+            <a:avLst/>
+          </a:prstGeom>
+          <a:noFill/>
+        </p:spPr>
+        <p:txBody>
+          <a:bodyPr wrap="square" lIns="45720" rIns="45720" tIns="18288" bIns="18288" anchor="t">
             <a:spAutoFit/>
           </a:bodyPr>
           <a:lstStyle/>
           <a:p>
-            <a:pPr algn="l"/>
-            <a:r>
-              <a:rPr sz="2180" b="1" i="0">
-                <a:solidFill>
-                  <a:srgbClr val="0B5394"/>
-                </a:solidFill>
-                <a:latin typeface="Lexend"/>
-              </a:rPr>
-              <a:t>5.</a:t>
-            </a:r>
-          </a:p>
-        </p:txBody>
-      </p:sp>
-      <p:pic>
-        <p:nvPicPr>
-          <p:cNvPr id="17" name="Picture 16" descr="ca328e3244585756.png"/>
-          <p:cNvPicPr>
-            <a:picLocks noChangeAspect="1"/>
-          </p:cNvPicPr>
-          <p:nvPr/>
-        </p:nvPicPr>
-        <p:blipFill>
-          <a:blip r:embed="rId6"/>
-          <a:stretch>
-            <a:fillRect/>
-          </a:stretch>
-        </p:blipFill>
-        <p:spPr>
-          <a:xfrm>
-            <a:off x="1627632" y="3933444"/>
-            <a:ext cx="3374136" cy="335280"/>
-          </a:xfrm>
-          <a:prstGeom prst="rect">
-            <a:avLst/>
-          </a:prstGeom>
-        </p:spPr>
-      </p:pic>
-      <p:sp>
-        <p:nvSpPr>
-          <p:cNvPr id="18" name="TextBox 17"/>
-          <p:cNvSpPr txBox="1"/>
-          <p:nvPr/>
-        </p:nvSpPr>
-        <p:spPr>
-          <a:xfrm>
-            <a:off x="960120" y="4466844"/>
-            <a:ext cx="548640" cy="457200"/>
-          </a:xfrm>
-          <a:prstGeom prst="rect">
-            <a:avLst/>
-          </a:prstGeom>
-          <a:noFill/>
-        </p:spPr>
-        <p:txBody>
-          <a:bodyPr wrap="square" lIns="45720" rIns="45720" tIns="18288" bIns="18288" anchor="ctr">
-            <a:spAutoFit/>
-          </a:bodyPr>
-          <a:lstStyle/>
-          <a:p>
-            <a:pPr algn="l"/>
-            <a:r>
-              <a:rPr sz="2180" b="1" i="0">
-                <a:solidFill>
-                  <a:srgbClr val="0B5394"/>
-                </a:solidFill>
-                <a:latin typeface="Lexend"/>
-              </a:rPr>
-              <a:t>6.</a:t>
-            </a:r>
-          </a:p>
-        </p:txBody>
-      </p:sp>
-      <p:sp>
-        <p:nvSpPr>
-          <p:cNvPr id="19" name="TextBox 18"/>
-          <p:cNvSpPr txBox="1"/>
-          <p:nvPr/>
-        </p:nvSpPr>
-        <p:spPr>
-          <a:xfrm>
-            <a:off x="1554480" y="4466844"/>
-            <a:ext cx="913052" cy="457200"/>
-          </a:xfrm>
-          <a:prstGeom prst="rect">
-            <a:avLst/>
-          </a:prstGeom>
-          <a:noFill/>
-        </p:spPr>
-        <p:txBody>
-          <a:bodyPr wrap="none" lIns="45720" rIns="45720" tIns="18288" bIns="18288" anchor="ctr">
-            <a:noAutofit/>
-          </a:bodyPr>
-          <a:lstStyle/>
-          <a:p>
-            <a:pPr algn="l"/>
-            <a:r>
-              <a:rPr sz="2180" b="0" i="0">
-                <a:solidFill>
-                  <a:srgbClr val="1A1A1A"/>
-                </a:solidFill>
-                <a:latin typeface="Lexend"/>
-              </a:rPr>
-              <a:t>Find </a:t>
-            </a:r>
-          </a:p>
-        </p:txBody>
-      </p:sp>
-      <p:pic>
-        <p:nvPicPr>
-          <p:cNvPr id="20" name="Picture 19" descr="6d78c2be12150bf5.png"/>
-          <p:cNvPicPr>
-            <a:picLocks noChangeAspect="1"/>
-          </p:cNvPicPr>
-          <p:nvPr/>
-        </p:nvPicPr>
-        <p:blipFill>
-          <a:blip r:embed="rId7"/>
-          <a:stretch>
-            <a:fillRect/>
-          </a:stretch>
-        </p:blipFill>
-        <p:spPr>
-          <a:xfrm>
-            <a:off x="2330372" y="4611624"/>
-            <a:ext cx="146304" cy="167640"/>
-          </a:xfrm>
-          <a:prstGeom prst="rect">
-            <a:avLst/>
-          </a:prstGeom>
-        </p:spPr>
-      </p:pic>
-      <p:sp>
-        <p:nvSpPr>
-          <p:cNvPr id="21" name="TextBox 20"/>
-          <p:cNvSpPr txBox="1"/>
-          <p:nvPr/>
-        </p:nvSpPr>
-        <p:spPr>
-          <a:xfrm>
-            <a:off x="2476676" y="4466844"/>
-            <a:ext cx="442110" cy="457200"/>
-          </a:xfrm>
-          <a:prstGeom prst="rect">
-            <a:avLst/>
-          </a:prstGeom>
-          <a:noFill/>
-        </p:spPr>
-        <p:txBody>
-          <a:bodyPr wrap="none" lIns="45720" rIns="45720" tIns="18288" bIns="18288" anchor="ctr">
-            <a:noAutofit/>
-          </a:bodyPr>
-          <a:lstStyle/>
-          <a:p>
-            <a:pPr algn="l"/>
-            <a:r>
-              <a:rPr sz="2180" b="0" i="0">
-                <a:solidFill>
-                  <a:srgbClr val="1A1A1A"/>
-                </a:solidFill>
-                <a:latin typeface="Lexend"/>
-              </a:rPr>
-              <a:t>.  </a:t>
-            </a:r>
-          </a:p>
-        </p:txBody>
-      </p:sp>
-      <p:pic>
-        <p:nvPicPr>
-          <p:cNvPr id="22" name="Picture 21" descr="d4634cfd84477cb3.png"/>
-          <p:cNvPicPr>
-            <a:picLocks noChangeAspect="1"/>
-          </p:cNvPicPr>
-          <p:nvPr/>
-        </p:nvPicPr>
-        <p:blipFill>
-          <a:blip r:embed="rId8"/>
-          <a:stretch>
-            <a:fillRect/>
-          </a:stretch>
-        </p:blipFill>
-        <p:spPr>
-          <a:xfrm>
-            <a:off x="2781626" y="4527804"/>
-            <a:ext cx="4541520" cy="335280"/>
-          </a:xfrm>
-          <a:prstGeom prst="rect">
-            <a:avLst/>
-          </a:prstGeom>
-        </p:spPr>
-      </p:pic>
+            <a:pPr algn="ctr"/>
+            <a:r>
+              <a:rPr sz="3040" b="1" i="0">
+                <a:solidFill>
+                  <a:srgbClr val="9E1B32"/>
+                </a:solidFill>
+                <a:latin typeface="Lexend"/>
+              </a:rPr>
+              <a:t>Answer:   6.619 × 10</a:t>
+            </a:r>
+            <a:r>
+              <a:rPr sz="3040" b="1" i="0" baseline="30000">
+                <a:solidFill>
+                  <a:srgbClr val="9E1B32"/>
+                </a:solidFill>
+                <a:latin typeface="Lexend"/>
+              </a:rPr>
+              <a:t>4</a:t>
+            </a:r>
+          </a:p>
+        </p:txBody>
+      </p:sp>
     </p:spTree>
   </p:cSld>
   <p:clrMapOvr>
@@ -14483,7 +14095,7 @@
                 </a:solidFill>
                 <a:latin typeface="Lexend"/>
               </a:rPr>
-              <a:t>IXL</a:t>
+              <a:t>Independent Set</a:t>
             </a:r>
           </a:p>
         </p:txBody>
@@ -14659,6 +14271,682 @@
                 <a:latin typeface="Lexend"/>
               </a:rPr>
               <a:t>34</a:t>
+            </a:r>
+          </a:p>
+        </p:txBody>
+      </p:sp>
+      <p:sp>
+        <p:nvSpPr>
+          <p:cNvPr id="8" name="TextBox 7"/>
+          <p:cNvSpPr txBox="1"/>
+          <p:nvPr/>
+        </p:nvSpPr>
+        <p:spPr>
+          <a:xfrm>
+            <a:off x="960120" y="1495043"/>
+            <a:ext cx="548640" cy="457200"/>
+          </a:xfrm>
+          <a:prstGeom prst="rect">
+            <a:avLst/>
+          </a:prstGeom>
+          <a:noFill/>
+        </p:spPr>
+        <p:txBody>
+          <a:bodyPr wrap="square" lIns="45720" rIns="45720" tIns="18288" bIns="18288" anchor="ctr">
+            <a:spAutoFit/>
+          </a:bodyPr>
+          <a:lstStyle/>
+          <a:p>
+            <a:pPr algn="l"/>
+            <a:r>
+              <a:rPr sz="2180" b="1" i="0">
+                <a:solidFill>
+                  <a:srgbClr val="0B5394"/>
+                </a:solidFill>
+                <a:latin typeface="Lexend"/>
+              </a:rPr>
+              <a:t>1.</a:t>
+            </a:r>
+          </a:p>
+        </p:txBody>
+      </p:sp>
+      <p:pic>
+        <p:nvPicPr>
+          <p:cNvPr id="9" name="Picture 8" descr="8bb51b7cdaedcae0.png"/>
+          <p:cNvPicPr>
+            <a:picLocks noChangeAspect="1"/>
+          </p:cNvPicPr>
+          <p:nvPr/>
+        </p:nvPicPr>
+        <p:blipFill>
+          <a:blip r:embed="rId2"/>
+          <a:stretch>
+            <a:fillRect/>
+          </a:stretch>
+        </p:blipFill>
+        <p:spPr>
+          <a:xfrm>
+            <a:off x="1627632" y="1557527"/>
+            <a:ext cx="3066288" cy="332232"/>
+          </a:xfrm>
+          <a:prstGeom prst="rect">
+            <a:avLst/>
+          </a:prstGeom>
+        </p:spPr>
+      </p:pic>
+      <p:sp>
+        <p:nvSpPr>
+          <p:cNvPr id="10" name="TextBox 9"/>
+          <p:cNvSpPr txBox="1"/>
+          <p:nvPr/>
+        </p:nvSpPr>
+        <p:spPr>
+          <a:xfrm>
+            <a:off x="960120" y="2089403"/>
+            <a:ext cx="548640" cy="457200"/>
+          </a:xfrm>
+          <a:prstGeom prst="rect">
+            <a:avLst/>
+          </a:prstGeom>
+          <a:noFill/>
+        </p:spPr>
+        <p:txBody>
+          <a:bodyPr wrap="square" lIns="45720" rIns="45720" tIns="18288" bIns="18288" anchor="ctr">
+            <a:spAutoFit/>
+          </a:bodyPr>
+          <a:lstStyle/>
+          <a:p>
+            <a:pPr algn="l"/>
+            <a:r>
+              <a:rPr sz="2180" b="1" i="0">
+                <a:solidFill>
+                  <a:srgbClr val="0B5394"/>
+                </a:solidFill>
+                <a:latin typeface="Lexend"/>
+              </a:rPr>
+              <a:t>2.</a:t>
+            </a:r>
+          </a:p>
+        </p:txBody>
+      </p:sp>
+      <p:pic>
+        <p:nvPicPr>
+          <p:cNvPr id="11" name="Picture 10" descr="6da4b5382fbcdf2b.png"/>
+          <p:cNvPicPr>
+            <a:picLocks noChangeAspect="1"/>
+          </p:cNvPicPr>
+          <p:nvPr/>
+        </p:nvPicPr>
+        <p:blipFill>
+          <a:blip r:embed="rId3"/>
+          <a:stretch>
+            <a:fillRect/>
+          </a:stretch>
+        </p:blipFill>
+        <p:spPr>
+          <a:xfrm>
+            <a:off x="1627632" y="2153411"/>
+            <a:ext cx="3304032" cy="329184"/>
+          </a:xfrm>
+          <a:prstGeom prst="rect">
+            <a:avLst/>
+          </a:prstGeom>
+        </p:spPr>
+      </p:pic>
+      <p:sp>
+        <p:nvSpPr>
+          <p:cNvPr id="12" name="TextBox 11"/>
+          <p:cNvSpPr txBox="1"/>
+          <p:nvPr/>
+        </p:nvSpPr>
+        <p:spPr>
+          <a:xfrm>
+            <a:off x="960120" y="2683763"/>
+            <a:ext cx="548640" cy="457200"/>
+          </a:xfrm>
+          <a:prstGeom prst="rect">
+            <a:avLst/>
+          </a:prstGeom>
+          <a:noFill/>
+        </p:spPr>
+        <p:txBody>
+          <a:bodyPr wrap="square" lIns="45720" rIns="45720" tIns="18288" bIns="18288" anchor="ctr">
+            <a:spAutoFit/>
+          </a:bodyPr>
+          <a:lstStyle/>
+          <a:p>
+            <a:pPr algn="l"/>
+            <a:r>
+              <a:rPr sz="2180" b="1" i="0">
+                <a:solidFill>
+                  <a:srgbClr val="0B5394"/>
+                </a:solidFill>
+                <a:latin typeface="Lexend"/>
+              </a:rPr>
+              <a:t>3.</a:t>
+            </a:r>
+          </a:p>
+        </p:txBody>
+      </p:sp>
+      <p:pic>
+        <p:nvPicPr>
+          <p:cNvPr id="13" name="Picture 12" descr="95d8ded1b0db296e.png"/>
+          <p:cNvPicPr>
+            <a:picLocks noChangeAspect="1"/>
+          </p:cNvPicPr>
+          <p:nvPr/>
+        </p:nvPicPr>
+        <p:blipFill>
+          <a:blip r:embed="rId4"/>
+          <a:stretch>
+            <a:fillRect/>
+          </a:stretch>
+        </p:blipFill>
+        <p:spPr>
+          <a:xfrm>
+            <a:off x="1627632" y="2747771"/>
+            <a:ext cx="3063240" cy="329184"/>
+          </a:xfrm>
+          <a:prstGeom prst="rect">
+            <a:avLst/>
+          </a:prstGeom>
+        </p:spPr>
+      </p:pic>
+      <p:sp>
+        <p:nvSpPr>
+          <p:cNvPr id="14" name="TextBox 13"/>
+          <p:cNvSpPr txBox="1"/>
+          <p:nvPr/>
+        </p:nvSpPr>
+        <p:spPr>
+          <a:xfrm>
+            <a:off x="960120" y="3278123"/>
+            <a:ext cx="548640" cy="457200"/>
+          </a:xfrm>
+          <a:prstGeom prst="rect">
+            <a:avLst/>
+          </a:prstGeom>
+          <a:noFill/>
+        </p:spPr>
+        <p:txBody>
+          <a:bodyPr wrap="square" lIns="45720" rIns="45720" tIns="18288" bIns="18288" anchor="ctr">
+            <a:spAutoFit/>
+          </a:bodyPr>
+          <a:lstStyle/>
+          <a:p>
+            <a:pPr algn="l"/>
+            <a:r>
+              <a:rPr sz="2180" b="1" i="0">
+                <a:solidFill>
+                  <a:srgbClr val="0B5394"/>
+                </a:solidFill>
+                <a:latin typeface="Lexend"/>
+              </a:rPr>
+              <a:t>4.</a:t>
+            </a:r>
+          </a:p>
+        </p:txBody>
+      </p:sp>
+      <p:pic>
+        <p:nvPicPr>
+          <p:cNvPr id="15" name="Picture 14" descr="0bd66daf20240d1b.png"/>
+          <p:cNvPicPr>
+            <a:picLocks noChangeAspect="1"/>
+          </p:cNvPicPr>
+          <p:nvPr/>
+        </p:nvPicPr>
+        <p:blipFill>
+          <a:blip r:embed="rId5"/>
+          <a:stretch>
+            <a:fillRect/>
+          </a:stretch>
+        </p:blipFill>
+        <p:spPr>
+          <a:xfrm>
+            <a:off x="1627632" y="3340607"/>
+            <a:ext cx="3060192" cy="332232"/>
+          </a:xfrm>
+          <a:prstGeom prst="rect">
+            <a:avLst/>
+          </a:prstGeom>
+        </p:spPr>
+      </p:pic>
+      <p:sp>
+        <p:nvSpPr>
+          <p:cNvPr id="16" name="TextBox 15"/>
+          <p:cNvSpPr txBox="1"/>
+          <p:nvPr/>
+        </p:nvSpPr>
+        <p:spPr>
+          <a:xfrm>
+            <a:off x="960120" y="3872483"/>
+            <a:ext cx="548640" cy="457200"/>
+          </a:xfrm>
+          <a:prstGeom prst="rect">
+            <a:avLst/>
+          </a:prstGeom>
+          <a:noFill/>
+        </p:spPr>
+        <p:txBody>
+          <a:bodyPr wrap="square" lIns="45720" rIns="45720" tIns="18288" bIns="18288" anchor="ctr">
+            <a:spAutoFit/>
+          </a:bodyPr>
+          <a:lstStyle/>
+          <a:p>
+            <a:pPr algn="l"/>
+            <a:r>
+              <a:rPr sz="2180" b="1" i="0">
+                <a:solidFill>
+                  <a:srgbClr val="0B5394"/>
+                </a:solidFill>
+                <a:latin typeface="Lexend"/>
+              </a:rPr>
+              <a:t>5.</a:t>
+            </a:r>
+          </a:p>
+        </p:txBody>
+      </p:sp>
+      <p:pic>
+        <p:nvPicPr>
+          <p:cNvPr id="17" name="Picture 16" descr="ca328e3244585756.png"/>
+          <p:cNvPicPr>
+            <a:picLocks noChangeAspect="1"/>
+          </p:cNvPicPr>
+          <p:nvPr/>
+        </p:nvPicPr>
+        <p:blipFill>
+          <a:blip r:embed="rId6"/>
+          <a:stretch>
+            <a:fillRect/>
+          </a:stretch>
+        </p:blipFill>
+        <p:spPr>
+          <a:xfrm>
+            <a:off x="1627632" y="3933444"/>
+            <a:ext cx="3374136" cy="335280"/>
+          </a:xfrm>
+          <a:prstGeom prst="rect">
+            <a:avLst/>
+          </a:prstGeom>
+        </p:spPr>
+      </p:pic>
+      <p:sp>
+        <p:nvSpPr>
+          <p:cNvPr id="18" name="TextBox 17"/>
+          <p:cNvSpPr txBox="1"/>
+          <p:nvPr/>
+        </p:nvSpPr>
+        <p:spPr>
+          <a:xfrm>
+            <a:off x="960120" y="4466844"/>
+            <a:ext cx="548640" cy="457200"/>
+          </a:xfrm>
+          <a:prstGeom prst="rect">
+            <a:avLst/>
+          </a:prstGeom>
+          <a:noFill/>
+        </p:spPr>
+        <p:txBody>
+          <a:bodyPr wrap="square" lIns="45720" rIns="45720" tIns="18288" bIns="18288" anchor="ctr">
+            <a:spAutoFit/>
+          </a:bodyPr>
+          <a:lstStyle/>
+          <a:p>
+            <a:pPr algn="l"/>
+            <a:r>
+              <a:rPr sz="2180" b="1" i="0">
+                <a:solidFill>
+                  <a:srgbClr val="0B5394"/>
+                </a:solidFill>
+                <a:latin typeface="Lexend"/>
+              </a:rPr>
+              <a:t>6.</a:t>
+            </a:r>
+          </a:p>
+        </p:txBody>
+      </p:sp>
+      <p:sp>
+        <p:nvSpPr>
+          <p:cNvPr id="19" name="TextBox 18"/>
+          <p:cNvSpPr txBox="1"/>
+          <p:nvPr/>
+        </p:nvSpPr>
+        <p:spPr>
+          <a:xfrm>
+            <a:off x="1554480" y="4466844"/>
+            <a:ext cx="913052" cy="457200"/>
+          </a:xfrm>
+          <a:prstGeom prst="rect">
+            <a:avLst/>
+          </a:prstGeom>
+          <a:noFill/>
+        </p:spPr>
+        <p:txBody>
+          <a:bodyPr wrap="none" lIns="45720" rIns="45720" tIns="18288" bIns="18288" anchor="ctr">
+            <a:noAutofit/>
+          </a:bodyPr>
+          <a:lstStyle/>
+          <a:p>
+            <a:pPr algn="l"/>
+            <a:r>
+              <a:rPr sz="2180" b="0" i="0">
+                <a:solidFill>
+                  <a:srgbClr val="1A1A1A"/>
+                </a:solidFill>
+                <a:latin typeface="Lexend"/>
+              </a:rPr>
+              <a:t>Find </a:t>
+            </a:r>
+          </a:p>
+        </p:txBody>
+      </p:sp>
+      <p:pic>
+        <p:nvPicPr>
+          <p:cNvPr id="20" name="Picture 19" descr="6d78c2be12150bf5.png"/>
+          <p:cNvPicPr>
+            <a:picLocks noChangeAspect="1"/>
+          </p:cNvPicPr>
+          <p:nvPr/>
+        </p:nvPicPr>
+        <p:blipFill>
+          <a:blip r:embed="rId7"/>
+          <a:stretch>
+            <a:fillRect/>
+          </a:stretch>
+        </p:blipFill>
+        <p:spPr>
+          <a:xfrm>
+            <a:off x="2330372" y="4611624"/>
+            <a:ext cx="146304" cy="167640"/>
+          </a:xfrm>
+          <a:prstGeom prst="rect">
+            <a:avLst/>
+          </a:prstGeom>
+        </p:spPr>
+      </p:pic>
+      <p:sp>
+        <p:nvSpPr>
+          <p:cNvPr id="21" name="TextBox 20"/>
+          <p:cNvSpPr txBox="1"/>
+          <p:nvPr/>
+        </p:nvSpPr>
+        <p:spPr>
+          <a:xfrm>
+            <a:off x="2476676" y="4466844"/>
+            <a:ext cx="442110" cy="457200"/>
+          </a:xfrm>
+          <a:prstGeom prst="rect">
+            <a:avLst/>
+          </a:prstGeom>
+          <a:noFill/>
+        </p:spPr>
+        <p:txBody>
+          <a:bodyPr wrap="none" lIns="45720" rIns="45720" tIns="18288" bIns="18288" anchor="ctr">
+            <a:noAutofit/>
+          </a:bodyPr>
+          <a:lstStyle/>
+          <a:p>
+            <a:pPr algn="l"/>
+            <a:r>
+              <a:rPr sz="2180" b="0" i="0">
+                <a:solidFill>
+                  <a:srgbClr val="1A1A1A"/>
+                </a:solidFill>
+                <a:latin typeface="Lexend"/>
+              </a:rPr>
+              <a:t>.  </a:t>
+            </a:r>
+          </a:p>
+        </p:txBody>
+      </p:sp>
+      <p:pic>
+        <p:nvPicPr>
+          <p:cNvPr id="22" name="Picture 21" descr="d4634cfd84477cb3.png"/>
+          <p:cNvPicPr>
+            <a:picLocks noChangeAspect="1"/>
+          </p:cNvPicPr>
+          <p:nvPr/>
+        </p:nvPicPr>
+        <p:blipFill>
+          <a:blip r:embed="rId8"/>
+          <a:stretch>
+            <a:fillRect/>
+          </a:stretch>
+        </p:blipFill>
+        <p:spPr>
+          <a:xfrm>
+            <a:off x="2781626" y="4527804"/>
+            <a:ext cx="4541520" cy="335280"/>
+          </a:xfrm>
+          <a:prstGeom prst="rect">
+            <a:avLst/>
+          </a:prstGeom>
+        </p:spPr>
+      </p:pic>
+    </p:spTree>
+  </p:cSld>
+  <p:clrMapOvr>
+    <a:masterClrMapping/>
+  </p:clrMapOvr>
+</p:sld>
+</file>
+
+<file path=ppt/slides/slide35.xml><?xml version="1.0" encoding="utf-8"?>
+<p:sld xmlns:a="http://schemas.openxmlformats.org/drawingml/2006/main" xmlns:p="http://schemas.openxmlformats.org/presentationml/2006/main" xmlns:r="http://schemas.openxmlformats.org/officeDocument/2006/relationships">
+  <p:cSld>
+    <p:spTree>
+      <p:nvGrpSpPr>
+        <p:cNvPr id="1" name=""/>
+        <p:cNvGrpSpPr/>
+        <p:nvPr/>
+      </p:nvGrpSpPr>
+      <p:grpSpPr/>
+      <p:sp>
+        <p:nvSpPr>
+          <p:cNvPr id="2" name="TextBox 1"/>
+          <p:cNvSpPr txBox="1"/>
+          <p:nvPr/>
+        </p:nvSpPr>
+        <p:spPr>
+          <a:xfrm>
+            <a:off x="777240" y="365760"/>
+            <a:ext cx="10607040" cy="640080"/>
+          </a:xfrm>
+          <a:prstGeom prst="rect">
+            <a:avLst/>
+          </a:prstGeom>
+          <a:noFill/>
+        </p:spPr>
+        <p:txBody>
+          <a:bodyPr wrap="square" lIns="45720" rIns="45720" tIns="18288" bIns="18288" anchor="t">
+            <a:spAutoFit/>
+          </a:bodyPr>
+          <a:lstStyle/>
+          <a:p>
+            <a:pPr algn="l"/>
+            <a:r>
+              <a:rPr sz="3420" b="1" i="0">
+                <a:solidFill>
+                  <a:srgbClr val="1A1A1A"/>
+                </a:solidFill>
+                <a:latin typeface="Lexend"/>
+              </a:rPr>
+              <a:t>IXL</a:t>
+            </a:r>
+          </a:p>
+        </p:txBody>
+      </p:sp>
+      <p:cxnSp>
+        <p:nvCxnSpPr>
+          <p:cNvPr id="3" name="Connector 2"/>
+          <p:cNvCxnSpPr/>
+          <p:nvPr/>
+        </p:nvCxnSpPr>
+        <p:spPr>
+          <a:xfrm>
+            <a:off x="777240" y="1097280"/>
+            <a:ext cx="10607040" cy="0"/>
+          </a:xfrm>
+          <a:prstGeom prst="line">
+            <a:avLst/>
+          </a:prstGeom>
+          <a:ln w="19050">
+            <a:solidFill>
+              <a:srgbClr val="1A1A1A"/>
+            </a:solidFill>
+          </a:ln>
+        </p:spPr>
+        <p:style>
+          <a:lnRef idx="2">
+            <a:schemeClr val="accent1"/>
+          </a:lnRef>
+          <a:fillRef idx="0">
+            <a:schemeClr val="accent1"/>
+          </a:fillRef>
+          <a:effectRef idx="1">
+            <a:schemeClr val="accent1"/>
+          </a:effectRef>
+          <a:fontRef idx="minor">
+            <a:schemeClr val="tx1"/>
+          </a:fontRef>
+        </p:style>
+      </p:cxnSp>
+      <p:cxnSp>
+        <p:nvCxnSpPr>
+          <p:cNvPr id="4" name="Connector 3"/>
+          <p:cNvCxnSpPr/>
+          <p:nvPr/>
+        </p:nvCxnSpPr>
+        <p:spPr>
+          <a:xfrm>
+            <a:off x="777240" y="1179576"/>
+            <a:ext cx="10607040" cy="0"/>
+          </a:xfrm>
+          <a:prstGeom prst="line">
+            <a:avLst/>
+          </a:prstGeom>
+          <a:ln w="9525">
+            <a:solidFill>
+              <a:srgbClr val="1A1A1A"/>
+            </a:solidFill>
+          </a:ln>
+        </p:spPr>
+        <p:style>
+          <a:lnRef idx="2">
+            <a:schemeClr val="accent1"/>
+          </a:lnRef>
+          <a:fillRef idx="0">
+            <a:schemeClr val="accent1"/>
+          </a:fillRef>
+          <a:effectRef idx="1">
+            <a:schemeClr val="accent1"/>
+          </a:effectRef>
+          <a:fontRef idx="minor">
+            <a:schemeClr val="tx1"/>
+          </a:fontRef>
+        </p:style>
+      </p:cxnSp>
+      <p:cxnSp>
+        <p:nvCxnSpPr>
+          <p:cNvPr id="5" name="Connector 4"/>
+          <p:cNvCxnSpPr/>
+          <p:nvPr/>
+        </p:nvCxnSpPr>
+        <p:spPr>
+          <a:xfrm>
+            <a:off x="777240" y="6199632"/>
+            <a:ext cx="10607040" cy="0"/>
+          </a:xfrm>
+          <a:prstGeom prst="line">
+            <a:avLst/>
+          </a:prstGeom>
+          <a:ln w="9525">
+            <a:solidFill>
+              <a:srgbClr val="6B6B6B"/>
+            </a:solidFill>
+          </a:ln>
+        </p:spPr>
+        <p:style>
+          <a:lnRef idx="2">
+            <a:schemeClr val="accent1"/>
+          </a:lnRef>
+          <a:fillRef idx="0">
+            <a:schemeClr val="accent1"/>
+          </a:fillRef>
+          <a:effectRef idx="1">
+            <a:schemeClr val="accent1"/>
+          </a:effectRef>
+          <a:fontRef idx="minor">
+            <a:schemeClr val="tx1"/>
+          </a:fontRef>
+        </p:style>
+      </p:cxnSp>
+      <p:sp>
+        <p:nvSpPr>
+          <p:cNvPr id="6" name="TextBox 5"/>
+          <p:cNvSpPr txBox="1"/>
+          <p:nvPr/>
+        </p:nvSpPr>
+        <p:spPr>
+          <a:xfrm>
+            <a:off x="777240" y="6272784"/>
+            <a:ext cx="9692640" cy="274320"/>
+          </a:xfrm>
+          <a:prstGeom prst="rect">
+            <a:avLst/>
+          </a:prstGeom>
+          <a:noFill/>
+        </p:spPr>
+        <p:txBody>
+          <a:bodyPr wrap="square" lIns="45720" rIns="45720" tIns="18288" bIns="18288" anchor="t">
+            <a:spAutoFit/>
+          </a:bodyPr>
+          <a:lstStyle/>
+          <a:p>
+            <a:pPr algn="l"/>
+            <a:r>
+              <a:rPr sz="1040" b="0" i="0">
+                <a:solidFill>
+                  <a:srgbClr val="6B6B6B"/>
+                </a:solidFill>
+                <a:latin typeface="Lexend"/>
+              </a:rPr>
+              <a:t>Grade 7 Accelerated · Unit 4 · Lesson 1 — Adding and Subtracting in Scientific Notation</a:t>
+            </a:r>
+          </a:p>
+        </p:txBody>
+      </p:sp>
+      <p:sp>
+        <p:nvSpPr>
+          <p:cNvPr id="7" name="TextBox 6"/>
+          <p:cNvSpPr txBox="1"/>
+          <p:nvPr/>
+        </p:nvSpPr>
+        <p:spPr>
+          <a:xfrm>
+            <a:off x="10744200" y="6272784"/>
+            <a:ext cx="640080" cy="274320"/>
+          </a:xfrm>
+          <a:prstGeom prst="rect">
+            <a:avLst/>
+          </a:prstGeom>
+          <a:noFill/>
+        </p:spPr>
+        <p:txBody>
+          <a:bodyPr wrap="square" lIns="45720" rIns="45720" tIns="18288" bIns="18288" anchor="t">
+            <a:spAutoFit/>
+          </a:bodyPr>
+          <a:lstStyle/>
+          <a:p>
+            <a:pPr algn="r"/>
+            <a:r>
+              <a:rPr sz="1040" b="0" i="0">
+                <a:solidFill>
+                  <a:srgbClr val="6B6B6B"/>
+                </a:solidFill>
+                <a:latin typeface="Lexend"/>
+              </a:rPr>
+              <a:t>35</a:t>
             </a:r>
           </a:p>
         </p:txBody>
@@ -14991,7 +15279,7 @@
                 </a:solidFill>
                 <a:latin typeface="Lexend"/>
               </a:rPr>
-              <a:t>Notes</a:t>
+              <a:t>Vocabulary</a:t>
             </a:r>
           </a:p>
         </p:txBody>
@@ -15167,6 +15455,833 @@
                 <a:latin typeface="Lexend"/>
               </a:rPr>
               <a:t>4</a:t>
+            </a:r>
+          </a:p>
+        </p:txBody>
+      </p:sp>
+      <p:sp>
+        <p:nvSpPr>
+          <p:cNvPr id="8" name="TextBox 7"/>
+          <p:cNvSpPr txBox="1"/>
+          <p:nvPr/>
+        </p:nvSpPr>
+        <p:spPr>
+          <a:xfrm>
+            <a:off x="777240" y="1463040"/>
+            <a:ext cx="10607040" cy="429370"/>
+          </a:xfrm>
+          <a:prstGeom prst="rect">
+            <a:avLst/>
+          </a:prstGeom>
+          <a:noFill/>
+        </p:spPr>
+        <p:txBody>
+          <a:bodyPr wrap="square" lIns="45720" rIns="45720" tIns="18288" bIns="18288" anchor="t">
+            <a:spAutoFit/>
+          </a:bodyPr>
+          <a:lstStyle/>
+          <a:p>
+            <a:pPr algn="l"/>
+            <a:r>
+              <a:rPr sz="2280" b="1" i="0">
+                <a:solidFill>
+                  <a:srgbClr val="0B5394"/>
+                </a:solidFill>
+                <a:latin typeface="Lexend"/>
+              </a:rPr>
+              <a:t>scientific notation</a:t>
+            </a:r>
+          </a:p>
+        </p:txBody>
+      </p:sp>
+      <p:sp>
+        <p:nvSpPr>
+          <p:cNvPr id="9" name="TextBox 8"/>
+          <p:cNvSpPr txBox="1"/>
+          <p:nvPr/>
+        </p:nvSpPr>
+        <p:spPr>
+          <a:xfrm>
+            <a:off x="1143000" y="1869550"/>
+            <a:ext cx="3032362" cy="457200"/>
+          </a:xfrm>
+          <a:prstGeom prst="rect">
+            <a:avLst/>
+          </a:prstGeom>
+          <a:noFill/>
+        </p:spPr>
+        <p:txBody>
+          <a:bodyPr wrap="none" lIns="45720" rIns="45720" tIns="18288" bIns="18288" anchor="ctr">
+            <a:noAutofit/>
+          </a:bodyPr>
+          <a:lstStyle/>
+          <a:p>
+            <a:pPr algn="l"/>
+            <a:r>
+              <a:rPr sz="2090" b="0" i="0">
+                <a:solidFill>
+                  <a:srgbClr val="1A1A1A"/>
+                </a:solidFill>
+                <a:latin typeface="Lexend"/>
+              </a:rPr>
+              <a:t>a number written as </a:t>
+            </a:r>
+          </a:p>
+        </p:txBody>
+      </p:sp>
+      <p:pic>
+        <p:nvPicPr>
+          <p:cNvPr id="10" name="Picture 9" descr="5c7736c1398d0b5e.png"/>
+          <p:cNvPicPr>
+            <a:picLocks noChangeAspect="1"/>
+          </p:cNvPicPr>
+          <p:nvPr/>
+        </p:nvPicPr>
+        <p:blipFill>
+          <a:blip r:embed="rId2"/>
+          <a:stretch>
+            <a:fillRect/>
+          </a:stretch>
+        </p:blipFill>
+        <p:spPr>
+          <a:xfrm>
+            <a:off x="4038202" y="1953370"/>
+            <a:ext cx="1133856" cy="289560"/>
+          </a:xfrm>
+          <a:prstGeom prst="rect">
+            <a:avLst/>
+          </a:prstGeom>
+        </p:spPr>
+      </p:pic>
+      <p:sp>
+        <p:nvSpPr>
+          <p:cNvPr id="11" name="TextBox 10"/>
+          <p:cNvSpPr txBox="1"/>
+          <p:nvPr/>
+        </p:nvSpPr>
+        <p:spPr>
+          <a:xfrm>
+            <a:off x="5172058" y="1869550"/>
+            <a:ext cx="285446" cy="457200"/>
+          </a:xfrm>
+          <a:prstGeom prst="rect">
+            <a:avLst/>
+          </a:prstGeom>
+          <a:noFill/>
+        </p:spPr>
+        <p:txBody>
+          <a:bodyPr wrap="none" lIns="45720" rIns="45720" tIns="18288" bIns="18288" anchor="ctr">
+            <a:noAutofit/>
+          </a:bodyPr>
+          <a:lstStyle/>
+          <a:p>
+            <a:pPr algn="l"/>
+            <a:r>
+              <a:rPr sz="2090" b="0" i="0">
+                <a:solidFill>
+                  <a:srgbClr val="1A1A1A"/>
+                </a:solidFill>
+                <a:latin typeface="Lexend"/>
+              </a:rPr>
+              <a:t>,</a:t>
+            </a:r>
+          </a:p>
+        </p:txBody>
+      </p:sp>
+      <p:sp>
+        <p:nvSpPr>
+          <p:cNvPr id="12" name="TextBox 11"/>
+          <p:cNvSpPr txBox="1"/>
+          <p:nvPr/>
+        </p:nvSpPr>
+        <p:spPr>
+          <a:xfrm>
+            <a:off x="1143000" y="2354182"/>
+            <a:ext cx="1118523" cy="457200"/>
+          </a:xfrm>
+          <a:prstGeom prst="rect">
+            <a:avLst/>
+          </a:prstGeom>
+          <a:noFill/>
+        </p:spPr>
+        <p:txBody>
+          <a:bodyPr wrap="none" lIns="45720" rIns="45720" tIns="18288" bIns="18288" anchor="ctr">
+            <a:noAutofit/>
+          </a:bodyPr>
+          <a:lstStyle/>
+          <a:p>
+            <a:pPr algn="l"/>
+            <a:r>
+              <a:rPr sz="2090" b="0" i="0">
+                <a:solidFill>
+                  <a:srgbClr val="1A1A1A"/>
+                </a:solidFill>
+                <a:latin typeface="Lexend"/>
+              </a:rPr>
+              <a:t>where </a:t>
+            </a:r>
+          </a:p>
+        </p:txBody>
+      </p:sp>
+      <p:pic>
+        <p:nvPicPr>
+          <p:cNvPr id="13" name="Picture 12" descr="658262df29b49a94.png"/>
+          <p:cNvPicPr>
+            <a:picLocks noChangeAspect="1"/>
+          </p:cNvPicPr>
+          <p:nvPr/>
+        </p:nvPicPr>
+        <p:blipFill>
+          <a:blip r:embed="rId3"/>
+          <a:stretch>
+            <a:fillRect/>
+          </a:stretch>
+        </p:blipFill>
+        <p:spPr>
+          <a:xfrm>
+            <a:off x="2124363" y="2477626"/>
+            <a:ext cx="204216" cy="210312"/>
+          </a:xfrm>
+          <a:prstGeom prst="rect">
+            <a:avLst/>
+          </a:prstGeom>
+        </p:spPr>
+      </p:pic>
+      <p:sp>
+        <p:nvSpPr>
+          <p:cNvPr id="14" name="TextBox 13"/>
+          <p:cNvSpPr txBox="1"/>
+          <p:nvPr/>
+        </p:nvSpPr>
+        <p:spPr>
+          <a:xfrm>
+            <a:off x="2328579" y="2354182"/>
+            <a:ext cx="4774100" cy="457200"/>
+          </a:xfrm>
+          <a:prstGeom prst="rect">
+            <a:avLst/>
+          </a:prstGeom>
+          <a:noFill/>
+        </p:spPr>
+        <p:txBody>
+          <a:bodyPr wrap="none" lIns="45720" rIns="45720" tIns="18288" bIns="18288" anchor="ctr">
+            <a:noAutofit/>
+          </a:bodyPr>
+          <a:lstStyle/>
+          <a:p>
+            <a:pPr algn="l"/>
+            <a:r>
+              <a:rPr sz="2090" b="0" i="0">
+                <a:solidFill>
+                  <a:srgbClr val="1A1A1A"/>
+                </a:solidFill>
+                <a:latin typeface="Lexend"/>
+              </a:rPr>
+              <a:t> is at least 1 and less than 10 and </a:t>
+            </a:r>
+          </a:p>
+        </p:txBody>
+      </p:sp>
+      <p:pic>
+        <p:nvPicPr>
+          <p:cNvPr id="15" name="Picture 14" descr="f14fce7cf077cd07.png"/>
+          <p:cNvPicPr>
+            <a:picLocks noChangeAspect="1"/>
+          </p:cNvPicPr>
+          <p:nvPr/>
+        </p:nvPicPr>
+        <p:blipFill>
+          <a:blip r:embed="rId4"/>
+          <a:stretch>
+            <a:fillRect/>
+          </a:stretch>
+        </p:blipFill>
+        <p:spPr>
+          <a:xfrm>
+            <a:off x="6965520" y="2479150"/>
+            <a:ext cx="176784" cy="207264"/>
+          </a:xfrm>
+          <a:prstGeom prst="rect">
+            <a:avLst/>
+          </a:prstGeom>
+        </p:spPr>
+      </p:pic>
+      <p:sp>
+        <p:nvSpPr>
+          <p:cNvPr id="16" name="TextBox 15"/>
+          <p:cNvSpPr txBox="1"/>
+          <p:nvPr/>
+        </p:nvSpPr>
+        <p:spPr>
+          <a:xfrm>
+            <a:off x="7142304" y="2354182"/>
+            <a:ext cx="1981774" cy="457200"/>
+          </a:xfrm>
+          <a:prstGeom prst="rect">
+            <a:avLst/>
+          </a:prstGeom>
+          <a:noFill/>
+        </p:spPr>
+        <p:txBody>
+          <a:bodyPr wrap="none" lIns="45720" rIns="45720" tIns="18288" bIns="18288" anchor="ctr">
+            <a:noAutofit/>
+          </a:bodyPr>
+          <a:lstStyle/>
+          <a:p>
+            <a:pPr algn="l"/>
+            <a:r>
+              <a:rPr sz="2090" b="0" i="0">
+                <a:solidFill>
+                  <a:srgbClr val="1A1A1A"/>
+                </a:solidFill>
+                <a:latin typeface="Lexend"/>
+              </a:rPr>
+              <a:t> is an integer</a:t>
+            </a:r>
+          </a:p>
+        </p:txBody>
+      </p:sp>
+      <p:sp>
+        <p:nvSpPr>
+          <p:cNvPr id="17" name="TextBox 16"/>
+          <p:cNvSpPr txBox="1"/>
+          <p:nvPr/>
+        </p:nvSpPr>
+        <p:spPr>
+          <a:xfrm>
+            <a:off x="777240" y="2989690"/>
+            <a:ext cx="10607040" cy="429370"/>
+          </a:xfrm>
+          <a:prstGeom prst="rect">
+            <a:avLst/>
+          </a:prstGeom>
+          <a:noFill/>
+        </p:spPr>
+        <p:txBody>
+          <a:bodyPr wrap="square" lIns="45720" rIns="45720" tIns="18288" bIns="18288" anchor="t">
+            <a:spAutoFit/>
+          </a:bodyPr>
+          <a:lstStyle/>
+          <a:p>
+            <a:pPr algn="l"/>
+            <a:r>
+              <a:rPr sz="2280" b="1" i="0">
+                <a:solidFill>
+                  <a:srgbClr val="0B5394"/>
+                </a:solidFill>
+                <a:latin typeface="Lexend"/>
+              </a:rPr>
+              <a:t>coefficient</a:t>
+            </a:r>
+          </a:p>
+        </p:txBody>
+      </p:sp>
+      <p:sp>
+        <p:nvSpPr>
+          <p:cNvPr id="18" name="TextBox 17"/>
+          <p:cNvSpPr txBox="1"/>
+          <p:nvPr/>
+        </p:nvSpPr>
+        <p:spPr>
+          <a:xfrm>
+            <a:off x="1143000" y="3396200"/>
+            <a:ext cx="1634825" cy="457200"/>
+          </a:xfrm>
+          <a:prstGeom prst="rect">
+            <a:avLst/>
+          </a:prstGeom>
+          <a:noFill/>
+        </p:spPr>
+        <p:txBody>
+          <a:bodyPr wrap="none" lIns="45720" rIns="45720" tIns="18288" bIns="18288" anchor="ctr">
+            <a:noAutofit/>
+          </a:bodyPr>
+          <a:lstStyle/>
+          <a:p>
+            <a:pPr algn="l"/>
+            <a:r>
+              <a:rPr sz="2090" b="0" i="0">
+                <a:solidFill>
+                  <a:srgbClr val="1A1A1A"/>
+                </a:solidFill>
+                <a:latin typeface="Lexend"/>
+              </a:rPr>
+              <a:t>the factor </a:t>
+            </a:r>
+          </a:p>
+        </p:txBody>
+      </p:sp>
+      <p:pic>
+        <p:nvPicPr>
+          <p:cNvPr id="19" name="Picture 18" descr="658262df29b49a94.png"/>
+          <p:cNvPicPr>
+            <a:picLocks noChangeAspect="1"/>
+          </p:cNvPicPr>
+          <p:nvPr/>
+        </p:nvPicPr>
+        <p:blipFill>
+          <a:blip r:embed="rId3"/>
+          <a:stretch>
+            <a:fillRect/>
+          </a:stretch>
+        </p:blipFill>
+        <p:spPr>
+          <a:xfrm>
+            <a:off x="2640665" y="3519644"/>
+            <a:ext cx="204216" cy="210312"/>
+          </a:xfrm>
+          <a:prstGeom prst="rect">
+            <a:avLst/>
+          </a:prstGeom>
+        </p:spPr>
+      </p:pic>
+      <p:sp>
+        <p:nvSpPr>
+          <p:cNvPr id="20" name="TextBox 19"/>
+          <p:cNvSpPr txBox="1"/>
+          <p:nvPr/>
+        </p:nvSpPr>
+        <p:spPr>
+          <a:xfrm>
+            <a:off x="2844881" y="3396200"/>
+            <a:ext cx="613512" cy="457200"/>
+          </a:xfrm>
+          <a:prstGeom prst="rect">
+            <a:avLst/>
+          </a:prstGeom>
+          <a:noFill/>
+        </p:spPr>
+        <p:txBody>
+          <a:bodyPr wrap="none" lIns="45720" rIns="45720" tIns="18288" bIns="18288" anchor="ctr">
+            <a:noAutofit/>
+          </a:bodyPr>
+          <a:lstStyle/>
+          <a:p>
+            <a:pPr algn="l"/>
+            <a:r>
+              <a:rPr sz="2090" b="0" i="0">
+                <a:solidFill>
+                  <a:srgbClr val="1A1A1A"/>
+                </a:solidFill>
+                <a:latin typeface="Lexend"/>
+              </a:rPr>
+              <a:t> in </a:t>
+            </a:r>
+          </a:p>
+        </p:txBody>
+      </p:sp>
+      <p:pic>
+        <p:nvPicPr>
+          <p:cNvPr id="21" name="Picture 20" descr="5c7736c1398d0b5e.png"/>
+          <p:cNvPicPr>
+            <a:picLocks noChangeAspect="1"/>
+          </p:cNvPicPr>
+          <p:nvPr/>
+        </p:nvPicPr>
+        <p:blipFill>
+          <a:blip r:embed="rId2"/>
+          <a:stretch>
+            <a:fillRect/>
+          </a:stretch>
+        </p:blipFill>
+        <p:spPr>
+          <a:xfrm>
+            <a:off x="3321233" y="3480020"/>
+            <a:ext cx="1133856" cy="289560"/>
+          </a:xfrm>
+          <a:prstGeom prst="rect">
+            <a:avLst/>
+          </a:prstGeom>
+        </p:spPr>
+      </p:pic>
+      <p:sp>
+        <p:nvSpPr>
+          <p:cNvPr id="22" name="TextBox 21"/>
+          <p:cNvSpPr txBox="1"/>
+          <p:nvPr/>
+        </p:nvSpPr>
+        <p:spPr>
+          <a:xfrm>
+            <a:off x="4455089" y="3396200"/>
+            <a:ext cx="274456" cy="457200"/>
+          </a:xfrm>
+          <a:prstGeom prst="rect">
+            <a:avLst/>
+          </a:prstGeom>
+          <a:noFill/>
+        </p:spPr>
+        <p:txBody>
+          <a:bodyPr wrap="none" lIns="45720" rIns="45720" tIns="18288" bIns="18288" anchor="ctr">
+            <a:noAutofit/>
+          </a:bodyPr>
+          <a:lstStyle/>
+          <a:p>
+            <a:pPr algn="l"/>
+            <a:r>
+              <a:rPr sz="2090" b="0" i="0">
+                <a:solidFill>
+                  <a:srgbClr val="1A1A1A"/>
+                </a:solidFill>
+                <a:latin typeface="Lexend"/>
+              </a:rPr>
+              <a:t>.</a:t>
+            </a:r>
+          </a:p>
+        </p:txBody>
+      </p:sp>
+      <p:sp>
+        <p:nvSpPr>
+          <p:cNvPr id="23" name="TextBox 22"/>
+          <p:cNvSpPr txBox="1"/>
+          <p:nvPr/>
+        </p:nvSpPr>
+        <p:spPr>
+          <a:xfrm>
+            <a:off x="1143000" y="3880832"/>
+            <a:ext cx="5545331" cy="457200"/>
+          </a:xfrm>
+          <a:prstGeom prst="rect">
+            <a:avLst/>
+          </a:prstGeom>
+          <a:noFill/>
+        </p:spPr>
+        <p:txBody>
+          <a:bodyPr wrap="none" lIns="45720" rIns="45720" tIns="18288" bIns="18288" anchor="ctr">
+            <a:noAutofit/>
+          </a:bodyPr>
+          <a:lstStyle/>
+          <a:p>
+            <a:pPr algn="l"/>
+            <a:r>
+              <a:rPr sz="2090" b="0" i="0">
+                <a:solidFill>
+                  <a:srgbClr val="1A1A1A"/>
+                </a:solidFill>
+                <a:latin typeface="Lexend"/>
+              </a:rPr>
+              <a:t>In a finished answer it always satisfies </a:t>
+            </a:r>
+          </a:p>
+        </p:txBody>
+      </p:sp>
+      <p:pic>
+        <p:nvPicPr>
+          <p:cNvPr id="24" name="Picture 23" descr="bfdcfbaf2cf7af24.png"/>
+          <p:cNvPicPr>
+            <a:picLocks noChangeAspect="1"/>
+          </p:cNvPicPr>
+          <p:nvPr/>
+        </p:nvPicPr>
+        <p:blipFill>
+          <a:blip r:embed="rId5"/>
+          <a:stretch>
+            <a:fillRect/>
+          </a:stretch>
+        </p:blipFill>
+        <p:spPr>
+          <a:xfrm>
+            <a:off x="6551171" y="3970748"/>
+            <a:ext cx="1542288" cy="277368"/>
+          </a:xfrm>
+          <a:prstGeom prst="rect">
+            <a:avLst/>
+          </a:prstGeom>
+        </p:spPr>
+      </p:pic>
+      <p:sp>
+        <p:nvSpPr>
+          <p:cNvPr id="25" name="TextBox 24"/>
+          <p:cNvSpPr txBox="1"/>
+          <p:nvPr/>
+        </p:nvSpPr>
+        <p:spPr>
+          <a:xfrm>
+            <a:off x="777240" y="4516340"/>
+            <a:ext cx="10607040" cy="429370"/>
+          </a:xfrm>
+          <a:prstGeom prst="rect">
+            <a:avLst/>
+          </a:prstGeom>
+          <a:noFill/>
+        </p:spPr>
+        <p:txBody>
+          <a:bodyPr wrap="square" lIns="45720" rIns="45720" tIns="18288" bIns="18288" anchor="t">
+            <a:spAutoFit/>
+          </a:bodyPr>
+          <a:lstStyle/>
+          <a:p>
+            <a:pPr algn="l"/>
+            <a:r>
+              <a:rPr sz="2280" b="1" i="0">
+                <a:solidFill>
+                  <a:srgbClr val="0B5394"/>
+                </a:solidFill>
+                <a:latin typeface="Lexend"/>
+              </a:rPr>
+              <a:t>common power of ten</a:t>
+            </a:r>
+          </a:p>
+        </p:txBody>
+      </p:sp>
+      <p:sp>
+        <p:nvSpPr>
+          <p:cNvPr id="26" name="TextBox 25"/>
+          <p:cNvSpPr txBox="1"/>
+          <p:nvPr/>
+        </p:nvSpPr>
+        <p:spPr>
+          <a:xfrm>
+            <a:off x="1143000" y="4945711"/>
+            <a:ext cx="10241280" cy="787179"/>
+          </a:xfrm>
+          <a:prstGeom prst="rect">
+            <a:avLst/>
+          </a:prstGeom>
+          <a:noFill/>
+        </p:spPr>
+        <p:txBody>
+          <a:bodyPr wrap="square" lIns="45720" rIns="45720" tIns="18288" bIns="18288" anchor="t">
+            <a:spAutoFit/>
+          </a:bodyPr>
+          <a:lstStyle/>
+          <a:p>
+            <a:pPr algn="l"/>
+            <a:r>
+              <a:rPr sz="2090" b="0" i="0">
+                <a:solidFill>
+                  <a:srgbClr val="1A1A1A"/>
+                </a:solidFill>
+                <a:latin typeface="Lexend"/>
+              </a:rPr>
+              <a:t>the matching power that two numbers are written over before they are added or subtracted — the place value they share</a:t>
+            </a:r>
+          </a:p>
+        </p:txBody>
+      </p:sp>
+    </p:spTree>
+  </p:cSld>
+  <p:clrMapOvr>
+    <a:masterClrMapping/>
+  </p:clrMapOvr>
+</p:sld>
+</file>
+
+<file path=ppt/slides/slide5.xml><?xml version="1.0" encoding="utf-8"?>
+<p:sld xmlns:a="http://schemas.openxmlformats.org/drawingml/2006/main" xmlns:p="http://schemas.openxmlformats.org/presentationml/2006/main" xmlns:r="http://schemas.openxmlformats.org/officeDocument/2006/relationships">
+  <p:cSld>
+    <p:spTree>
+      <p:nvGrpSpPr>
+        <p:cNvPr id="1" name=""/>
+        <p:cNvGrpSpPr/>
+        <p:nvPr/>
+      </p:nvGrpSpPr>
+      <p:grpSpPr/>
+      <p:sp>
+        <p:nvSpPr>
+          <p:cNvPr id="2" name="TextBox 1"/>
+          <p:cNvSpPr txBox="1"/>
+          <p:nvPr/>
+        </p:nvSpPr>
+        <p:spPr>
+          <a:xfrm>
+            <a:off x="777240" y="365760"/>
+            <a:ext cx="10607040" cy="640080"/>
+          </a:xfrm>
+          <a:prstGeom prst="rect">
+            <a:avLst/>
+          </a:prstGeom>
+          <a:noFill/>
+        </p:spPr>
+        <p:txBody>
+          <a:bodyPr wrap="square" lIns="45720" rIns="45720" tIns="18288" bIns="18288" anchor="t">
+            <a:spAutoFit/>
+          </a:bodyPr>
+          <a:lstStyle/>
+          <a:p>
+            <a:pPr algn="l"/>
+            <a:r>
+              <a:rPr sz="3420" b="1" i="0">
+                <a:solidFill>
+                  <a:srgbClr val="1A1A1A"/>
+                </a:solidFill>
+                <a:latin typeface="Lexend"/>
+              </a:rPr>
+              <a:t>Notes</a:t>
+            </a:r>
+          </a:p>
+        </p:txBody>
+      </p:sp>
+      <p:cxnSp>
+        <p:nvCxnSpPr>
+          <p:cNvPr id="3" name="Connector 2"/>
+          <p:cNvCxnSpPr/>
+          <p:nvPr/>
+        </p:nvCxnSpPr>
+        <p:spPr>
+          <a:xfrm>
+            <a:off x="777240" y="1097280"/>
+            <a:ext cx="10607040" cy="0"/>
+          </a:xfrm>
+          <a:prstGeom prst="line">
+            <a:avLst/>
+          </a:prstGeom>
+          <a:ln w="19050">
+            <a:solidFill>
+              <a:srgbClr val="1A1A1A"/>
+            </a:solidFill>
+          </a:ln>
+        </p:spPr>
+        <p:style>
+          <a:lnRef idx="2">
+            <a:schemeClr val="accent1"/>
+          </a:lnRef>
+          <a:fillRef idx="0">
+            <a:schemeClr val="accent1"/>
+          </a:fillRef>
+          <a:effectRef idx="1">
+            <a:schemeClr val="accent1"/>
+          </a:effectRef>
+          <a:fontRef idx="minor">
+            <a:schemeClr val="tx1"/>
+          </a:fontRef>
+        </p:style>
+      </p:cxnSp>
+      <p:cxnSp>
+        <p:nvCxnSpPr>
+          <p:cNvPr id="4" name="Connector 3"/>
+          <p:cNvCxnSpPr/>
+          <p:nvPr/>
+        </p:nvCxnSpPr>
+        <p:spPr>
+          <a:xfrm>
+            <a:off x="777240" y="1179576"/>
+            <a:ext cx="10607040" cy="0"/>
+          </a:xfrm>
+          <a:prstGeom prst="line">
+            <a:avLst/>
+          </a:prstGeom>
+          <a:ln w="9525">
+            <a:solidFill>
+              <a:srgbClr val="1A1A1A"/>
+            </a:solidFill>
+          </a:ln>
+        </p:spPr>
+        <p:style>
+          <a:lnRef idx="2">
+            <a:schemeClr val="accent1"/>
+          </a:lnRef>
+          <a:fillRef idx="0">
+            <a:schemeClr val="accent1"/>
+          </a:fillRef>
+          <a:effectRef idx="1">
+            <a:schemeClr val="accent1"/>
+          </a:effectRef>
+          <a:fontRef idx="minor">
+            <a:schemeClr val="tx1"/>
+          </a:fontRef>
+        </p:style>
+      </p:cxnSp>
+      <p:cxnSp>
+        <p:nvCxnSpPr>
+          <p:cNvPr id="5" name="Connector 4"/>
+          <p:cNvCxnSpPr/>
+          <p:nvPr/>
+        </p:nvCxnSpPr>
+        <p:spPr>
+          <a:xfrm>
+            <a:off x="777240" y="6199632"/>
+            <a:ext cx="10607040" cy="0"/>
+          </a:xfrm>
+          <a:prstGeom prst="line">
+            <a:avLst/>
+          </a:prstGeom>
+          <a:ln w="9525">
+            <a:solidFill>
+              <a:srgbClr val="6B6B6B"/>
+            </a:solidFill>
+          </a:ln>
+        </p:spPr>
+        <p:style>
+          <a:lnRef idx="2">
+            <a:schemeClr val="accent1"/>
+          </a:lnRef>
+          <a:fillRef idx="0">
+            <a:schemeClr val="accent1"/>
+          </a:fillRef>
+          <a:effectRef idx="1">
+            <a:schemeClr val="accent1"/>
+          </a:effectRef>
+          <a:fontRef idx="minor">
+            <a:schemeClr val="tx1"/>
+          </a:fontRef>
+        </p:style>
+      </p:cxnSp>
+      <p:sp>
+        <p:nvSpPr>
+          <p:cNvPr id="6" name="TextBox 5"/>
+          <p:cNvSpPr txBox="1"/>
+          <p:nvPr/>
+        </p:nvSpPr>
+        <p:spPr>
+          <a:xfrm>
+            <a:off x="777240" y="6272784"/>
+            <a:ext cx="9692640" cy="274320"/>
+          </a:xfrm>
+          <a:prstGeom prst="rect">
+            <a:avLst/>
+          </a:prstGeom>
+          <a:noFill/>
+        </p:spPr>
+        <p:txBody>
+          <a:bodyPr wrap="square" lIns="45720" rIns="45720" tIns="18288" bIns="18288" anchor="t">
+            <a:spAutoFit/>
+          </a:bodyPr>
+          <a:lstStyle/>
+          <a:p>
+            <a:pPr algn="l"/>
+            <a:r>
+              <a:rPr sz="1040" b="0" i="0">
+                <a:solidFill>
+                  <a:srgbClr val="6B6B6B"/>
+                </a:solidFill>
+                <a:latin typeface="Lexend"/>
+              </a:rPr>
+              <a:t>Grade 7 Accelerated · Unit 4 · Lesson 1 — Adding and Subtracting in Scientific Notation</a:t>
+            </a:r>
+          </a:p>
+        </p:txBody>
+      </p:sp>
+      <p:sp>
+        <p:nvSpPr>
+          <p:cNvPr id="7" name="TextBox 6"/>
+          <p:cNvSpPr txBox="1"/>
+          <p:nvPr/>
+        </p:nvSpPr>
+        <p:spPr>
+          <a:xfrm>
+            <a:off x="10744200" y="6272784"/>
+            <a:ext cx="640080" cy="274320"/>
+          </a:xfrm>
+          <a:prstGeom prst="rect">
+            <a:avLst/>
+          </a:prstGeom>
+          <a:noFill/>
+        </p:spPr>
+        <p:txBody>
+          <a:bodyPr wrap="square" lIns="45720" rIns="45720" tIns="18288" bIns="18288" anchor="t">
+            <a:spAutoFit/>
+          </a:bodyPr>
+          <a:lstStyle/>
+          <a:p>
+            <a:pPr algn="r"/>
+            <a:r>
+              <a:rPr sz="1040" b="0" i="0">
+                <a:solidFill>
+                  <a:srgbClr val="6B6B6B"/>
+                </a:solidFill>
+                <a:latin typeface="Lexend"/>
+              </a:rPr>
+              <a:t>5</a:t>
             </a:r>
           </a:p>
         </p:txBody>
@@ -15776,7 +16891,7 @@
 </p:sld>
 </file>
 
-<file path=ppt/slides/slide5.xml><?xml version="1.0" encoding="utf-8"?>
+<file path=ppt/slides/slide6.xml><?xml version="1.0" encoding="utf-8"?>
 <p:sld xmlns:a="http://schemas.openxmlformats.org/drawingml/2006/main" xmlns:p="http://schemas.openxmlformats.org/presentationml/2006/main" xmlns:r="http://schemas.openxmlformats.org/officeDocument/2006/relationships">
   <p:cSld>
     <p:spTree>
@@ -15991,7 +17106,7 @@
                 </a:solidFill>
                 <a:latin typeface="Lexend"/>
               </a:rPr>
-              <a:t>5</a:t>
+              <a:t>6</a:t>
             </a:r>
           </a:p>
         </p:txBody>
@@ -16180,505 +17295,6 @@
                 <a:latin typeface="Lexend"/>
               </a:rPr>
               <a:t>Then check the coefficient: if it is not between 1 and 10, the answer is not finished.</a:t>
-            </a:r>
-          </a:p>
-        </p:txBody>
-      </p:sp>
-    </p:spTree>
-  </p:cSld>
-  <p:clrMapOvr>
-    <a:masterClrMapping/>
-  </p:clrMapOvr>
-</p:sld>
-</file>
-
-<file path=ppt/slides/slide6.xml><?xml version="1.0" encoding="utf-8"?>
-<p:sld xmlns:a="http://schemas.openxmlformats.org/drawingml/2006/main" xmlns:p="http://schemas.openxmlformats.org/presentationml/2006/main" xmlns:r="http://schemas.openxmlformats.org/officeDocument/2006/relationships">
-  <p:cSld>
-    <p:spTree>
-      <p:nvGrpSpPr>
-        <p:cNvPr id="1" name=""/>
-        <p:cNvGrpSpPr/>
-        <p:nvPr/>
-      </p:nvGrpSpPr>
-      <p:grpSpPr/>
-      <p:sp>
-        <p:nvSpPr>
-          <p:cNvPr id="2" name="TextBox 1"/>
-          <p:cNvSpPr txBox="1"/>
-          <p:nvPr/>
-        </p:nvSpPr>
-        <p:spPr>
-          <a:xfrm>
-            <a:off x="777240" y="365760"/>
-            <a:ext cx="10607040" cy="640080"/>
-          </a:xfrm>
-          <a:prstGeom prst="rect">
-            <a:avLst/>
-          </a:prstGeom>
-          <a:noFill/>
-        </p:spPr>
-        <p:txBody>
-          <a:bodyPr wrap="square" lIns="45720" rIns="45720" tIns="18288" bIns="18288" anchor="t">
-            <a:spAutoFit/>
-          </a:bodyPr>
-          <a:lstStyle/>
-          <a:p>
-            <a:pPr algn="l"/>
-            <a:r>
-              <a:rPr sz="3420" b="1" i="0">
-                <a:solidFill>
-                  <a:srgbClr val="1A1A1A"/>
-                </a:solidFill>
-                <a:latin typeface="Lexend"/>
-              </a:rPr>
-              <a:t>Notes</a:t>
-            </a:r>
-          </a:p>
-        </p:txBody>
-      </p:sp>
-      <p:cxnSp>
-        <p:nvCxnSpPr>
-          <p:cNvPr id="3" name="Connector 2"/>
-          <p:cNvCxnSpPr/>
-          <p:nvPr/>
-        </p:nvCxnSpPr>
-        <p:spPr>
-          <a:xfrm>
-            <a:off x="777240" y="1097280"/>
-            <a:ext cx="10607040" cy="0"/>
-          </a:xfrm>
-          <a:prstGeom prst="line">
-            <a:avLst/>
-          </a:prstGeom>
-          <a:ln w="19050">
-            <a:solidFill>
-              <a:srgbClr val="1A1A1A"/>
-            </a:solidFill>
-          </a:ln>
-        </p:spPr>
-        <p:style>
-          <a:lnRef idx="2">
-            <a:schemeClr val="accent1"/>
-          </a:lnRef>
-          <a:fillRef idx="0">
-            <a:schemeClr val="accent1"/>
-          </a:fillRef>
-          <a:effectRef idx="1">
-            <a:schemeClr val="accent1"/>
-          </a:effectRef>
-          <a:fontRef idx="minor">
-            <a:schemeClr val="tx1"/>
-          </a:fontRef>
-        </p:style>
-      </p:cxnSp>
-      <p:cxnSp>
-        <p:nvCxnSpPr>
-          <p:cNvPr id="4" name="Connector 3"/>
-          <p:cNvCxnSpPr/>
-          <p:nvPr/>
-        </p:nvCxnSpPr>
-        <p:spPr>
-          <a:xfrm>
-            <a:off x="777240" y="1179576"/>
-            <a:ext cx="10607040" cy="0"/>
-          </a:xfrm>
-          <a:prstGeom prst="line">
-            <a:avLst/>
-          </a:prstGeom>
-          <a:ln w="9525">
-            <a:solidFill>
-              <a:srgbClr val="1A1A1A"/>
-            </a:solidFill>
-          </a:ln>
-        </p:spPr>
-        <p:style>
-          <a:lnRef idx="2">
-            <a:schemeClr val="accent1"/>
-          </a:lnRef>
-          <a:fillRef idx="0">
-            <a:schemeClr val="accent1"/>
-          </a:fillRef>
-          <a:effectRef idx="1">
-            <a:schemeClr val="accent1"/>
-          </a:effectRef>
-          <a:fontRef idx="minor">
-            <a:schemeClr val="tx1"/>
-          </a:fontRef>
-        </p:style>
-      </p:cxnSp>
-      <p:cxnSp>
-        <p:nvCxnSpPr>
-          <p:cNvPr id="5" name="Connector 4"/>
-          <p:cNvCxnSpPr/>
-          <p:nvPr/>
-        </p:nvCxnSpPr>
-        <p:spPr>
-          <a:xfrm>
-            <a:off x="777240" y="6199632"/>
-            <a:ext cx="10607040" cy="0"/>
-          </a:xfrm>
-          <a:prstGeom prst="line">
-            <a:avLst/>
-          </a:prstGeom>
-          <a:ln w="9525">
-            <a:solidFill>
-              <a:srgbClr val="6B6B6B"/>
-            </a:solidFill>
-          </a:ln>
-        </p:spPr>
-        <p:style>
-          <a:lnRef idx="2">
-            <a:schemeClr val="accent1"/>
-          </a:lnRef>
-          <a:fillRef idx="0">
-            <a:schemeClr val="accent1"/>
-          </a:fillRef>
-          <a:effectRef idx="1">
-            <a:schemeClr val="accent1"/>
-          </a:effectRef>
-          <a:fontRef idx="minor">
-            <a:schemeClr val="tx1"/>
-          </a:fontRef>
-        </p:style>
-      </p:cxnSp>
-      <p:sp>
-        <p:nvSpPr>
-          <p:cNvPr id="6" name="TextBox 5"/>
-          <p:cNvSpPr txBox="1"/>
-          <p:nvPr/>
-        </p:nvSpPr>
-        <p:spPr>
-          <a:xfrm>
-            <a:off x="777240" y="6272784"/>
-            <a:ext cx="9692640" cy="274320"/>
-          </a:xfrm>
-          <a:prstGeom prst="rect">
-            <a:avLst/>
-          </a:prstGeom>
-          <a:noFill/>
-        </p:spPr>
-        <p:txBody>
-          <a:bodyPr wrap="square" lIns="45720" rIns="45720" tIns="18288" bIns="18288" anchor="t">
-            <a:spAutoFit/>
-          </a:bodyPr>
-          <a:lstStyle/>
-          <a:p>
-            <a:pPr algn="l"/>
-            <a:r>
-              <a:rPr sz="1040" b="0" i="0">
-                <a:solidFill>
-                  <a:srgbClr val="6B6B6B"/>
-                </a:solidFill>
-                <a:latin typeface="Lexend"/>
-              </a:rPr>
-              <a:t>Grade 7 Accelerated · Unit 4 · Lesson 1 — Adding and Subtracting in Scientific Notation</a:t>
-            </a:r>
-          </a:p>
-        </p:txBody>
-      </p:sp>
-      <p:sp>
-        <p:nvSpPr>
-          <p:cNvPr id="7" name="TextBox 6"/>
-          <p:cNvSpPr txBox="1"/>
-          <p:nvPr/>
-        </p:nvSpPr>
-        <p:spPr>
-          <a:xfrm>
-            <a:off x="10744200" y="6272784"/>
-            <a:ext cx="640080" cy="274320"/>
-          </a:xfrm>
-          <a:prstGeom prst="rect">
-            <a:avLst/>
-          </a:prstGeom>
-          <a:noFill/>
-        </p:spPr>
-        <p:txBody>
-          <a:bodyPr wrap="square" lIns="45720" rIns="45720" tIns="18288" bIns="18288" anchor="t">
-            <a:spAutoFit/>
-          </a:bodyPr>
-          <a:lstStyle/>
-          <a:p>
-            <a:pPr algn="r"/>
-            <a:r>
-              <a:rPr sz="1040" b="0" i="0">
-                <a:solidFill>
-                  <a:srgbClr val="6B6B6B"/>
-                </a:solidFill>
-                <a:latin typeface="Lexend"/>
-              </a:rPr>
-              <a:t>6</a:t>
-            </a:r>
-          </a:p>
-        </p:txBody>
-      </p:sp>
-      <p:sp>
-        <p:nvSpPr>
-          <p:cNvPr id="8" name="TextBox 7"/>
-          <p:cNvSpPr txBox="1"/>
-          <p:nvPr/>
-        </p:nvSpPr>
-        <p:spPr>
-          <a:xfrm>
-            <a:off x="777240" y="1389888"/>
-            <a:ext cx="10607040" cy="402336"/>
-          </a:xfrm>
-          <a:prstGeom prst="rect">
-            <a:avLst/>
-          </a:prstGeom>
-          <a:noFill/>
-        </p:spPr>
-        <p:txBody>
-          <a:bodyPr wrap="square" lIns="45720" rIns="45720" tIns="18288" bIns="18288" anchor="t">
-            <a:spAutoFit/>
-          </a:bodyPr>
-          <a:lstStyle/>
-          <a:p>
-            <a:pPr algn="l"/>
-            <a:r>
-              <a:rPr sz="2380" b="1" i="0">
-                <a:solidFill>
-                  <a:srgbClr val="1A1A1A"/>
-                </a:solidFill>
-                <a:latin typeface="Lexend"/>
-              </a:rPr>
-              <a:t>III.  Different powers: rewrite one of them first</a:t>
-            </a:r>
-          </a:p>
-        </p:txBody>
-      </p:sp>
-      <p:cxnSp>
-        <p:nvCxnSpPr>
-          <p:cNvPr id="9" name="Connector 8"/>
-          <p:cNvCxnSpPr/>
-          <p:nvPr/>
-        </p:nvCxnSpPr>
-        <p:spPr>
-          <a:xfrm>
-            <a:off x="777240" y="1828800"/>
-            <a:ext cx="10607040" cy="0"/>
-          </a:xfrm>
-          <a:prstGeom prst="line">
-            <a:avLst/>
-          </a:prstGeom>
-          <a:ln w="9525">
-            <a:solidFill>
-              <a:srgbClr val="1A1A1A"/>
-            </a:solidFill>
-          </a:ln>
-        </p:spPr>
-        <p:style>
-          <a:lnRef idx="2">
-            <a:schemeClr val="accent1"/>
-          </a:lnRef>
-          <a:fillRef idx="0">
-            <a:schemeClr val="accent1"/>
-          </a:fillRef>
-          <a:effectRef idx="1">
-            <a:schemeClr val="accent1"/>
-          </a:effectRef>
-          <a:fontRef idx="minor">
-            <a:schemeClr val="tx1"/>
-          </a:fontRef>
-        </p:style>
-      </p:cxnSp>
-      <p:pic>
-        <p:nvPicPr>
-          <p:cNvPr id="10" name="Picture 9" descr="6f0baaf26a407dfb.png"/>
-          <p:cNvPicPr>
-            <a:picLocks noChangeAspect="1"/>
-          </p:cNvPicPr>
-          <p:nvPr/>
-        </p:nvPicPr>
-        <p:blipFill>
-          <a:blip r:embed="rId2"/>
-          <a:stretch>
-            <a:fillRect/>
-          </a:stretch>
-        </p:blipFill>
-        <p:spPr>
-          <a:xfrm>
-            <a:off x="4178807" y="1994916"/>
-            <a:ext cx="3803904" cy="408432"/>
-          </a:xfrm>
-          <a:prstGeom prst="rect">
-            <a:avLst/>
-          </a:prstGeom>
-        </p:spPr>
-      </p:pic>
-      <p:pic>
-        <p:nvPicPr>
-          <p:cNvPr id="11" name="Picture 10" descr="4fc26d98a263c89e.png"/>
-          <p:cNvPicPr>
-            <a:picLocks noChangeAspect="1"/>
-          </p:cNvPicPr>
-          <p:nvPr/>
-        </p:nvPicPr>
-        <p:blipFill>
-          <a:blip r:embed="rId3"/>
-          <a:stretch>
-            <a:fillRect/>
-          </a:stretch>
-        </p:blipFill>
-        <p:spPr>
-          <a:xfrm>
-            <a:off x="2702052" y="2682240"/>
-            <a:ext cx="6757416" cy="405384"/>
-          </a:xfrm>
-          <a:prstGeom prst="rect">
-            <a:avLst/>
-          </a:prstGeom>
-        </p:spPr>
-      </p:pic>
-      <p:pic>
-        <p:nvPicPr>
-          <p:cNvPr id="12" name="Picture 11" descr="ae1a5a7207b8178f.png"/>
-          <p:cNvPicPr>
-            <a:picLocks noChangeAspect="1"/>
-          </p:cNvPicPr>
-          <p:nvPr/>
-        </p:nvPicPr>
-        <p:blipFill>
-          <a:blip r:embed="rId4"/>
-          <a:stretch>
-            <a:fillRect/>
-          </a:stretch>
-        </p:blipFill>
-        <p:spPr>
-          <a:xfrm>
-            <a:off x="1526347" y="3366516"/>
-            <a:ext cx="5961888" cy="408432"/>
-          </a:xfrm>
-          <a:prstGeom prst="rect">
-            <a:avLst/>
-          </a:prstGeom>
-        </p:spPr>
-      </p:pic>
-      <p:sp>
-        <p:nvSpPr>
-          <p:cNvPr id="13" name="TextBox 12"/>
-          <p:cNvSpPr txBox="1"/>
-          <p:nvPr/>
-        </p:nvSpPr>
-        <p:spPr>
-          <a:xfrm>
-            <a:off x="7488235" y="3342132"/>
-            <a:ext cx="1854584" cy="457200"/>
-          </a:xfrm>
-          <a:prstGeom prst="rect">
-            <a:avLst/>
-          </a:prstGeom>
-          <a:noFill/>
-        </p:spPr>
-        <p:txBody>
-          <a:bodyPr wrap="none" lIns="45720" rIns="45720" tIns="18288" bIns="18288" anchor="ctr">
-            <a:noAutofit/>
-          </a:bodyPr>
-          <a:lstStyle/>
-          <a:p>
-            <a:pPr algn="l"/>
-            <a:r>
-              <a:rPr sz="2470" b="0" i="0">
-                <a:solidFill>
-                  <a:srgbClr val="1A1A1A"/>
-                </a:solidFill>
-                <a:latin typeface="Lexend"/>
-              </a:rPr>
-              <a:t>,    never   </a:t>
-            </a:r>
-          </a:p>
-        </p:txBody>
-      </p:sp>
-      <p:pic>
-        <p:nvPicPr>
-          <p:cNvPr id="14" name="Picture 13" descr="83c5d338eb6c267c.png"/>
-          <p:cNvPicPr>
-            <a:picLocks noChangeAspect="1"/>
-          </p:cNvPicPr>
-          <p:nvPr/>
-        </p:nvPicPr>
-        <p:blipFill>
-          <a:blip r:embed="rId5"/>
-          <a:stretch>
-            <a:fillRect/>
-          </a:stretch>
-        </p:blipFill>
-        <p:spPr>
-          <a:xfrm>
-            <a:off x="9205660" y="3401568"/>
-            <a:ext cx="1429512" cy="338328"/>
-          </a:xfrm>
-          <a:prstGeom prst="rect">
-            <a:avLst/>
-          </a:prstGeom>
-        </p:spPr>
-      </p:pic>
-      <p:sp>
-        <p:nvSpPr>
-          <p:cNvPr id="15" name="TextBox 14"/>
-          <p:cNvSpPr txBox="1"/>
-          <p:nvPr/>
-        </p:nvSpPr>
-        <p:spPr>
-          <a:xfrm>
-            <a:off x="987552" y="4114800"/>
-            <a:ext cx="10131551" cy="950976"/>
-          </a:xfrm>
-          <a:prstGeom prst="rect">
-            <a:avLst/>
-          </a:prstGeom>
-          <a:noFill/>
-        </p:spPr>
-        <p:txBody>
-          <a:bodyPr wrap="square" lIns="45720" rIns="45720" tIns="18288" bIns="18288" anchor="t">
-            <a:spAutoFit/>
-          </a:bodyPr>
-          <a:lstStyle/>
-          <a:p>
-            <a:pPr algn="l"/>
-            <a:r>
-              <a:rPr sz="2180" b="1" i="0">
-                <a:solidFill>
-                  <a:srgbClr val="1A1A1A"/>
-                </a:solidFill>
-                <a:latin typeface="Lexend"/>
-              </a:rPr>
-              <a:t>Rewrite one number so both carry the same power of ten, then add or subtract the coefficients.</a:t>
-            </a:r>
-          </a:p>
-        </p:txBody>
-      </p:sp>
-      <p:sp>
-        <p:nvSpPr>
-          <p:cNvPr id="16" name="TextBox 15"/>
-          <p:cNvSpPr txBox="1"/>
-          <p:nvPr/>
-        </p:nvSpPr>
-        <p:spPr>
-          <a:xfrm>
-            <a:off x="987552" y="5321808"/>
-            <a:ext cx="10131551" cy="475488"/>
-          </a:xfrm>
-          <a:prstGeom prst="rect">
-            <a:avLst/>
-          </a:prstGeom>
-          <a:noFill/>
-        </p:spPr>
-        <p:txBody>
-          <a:bodyPr wrap="square" lIns="45720" rIns="45720" tIns="18288" bIns="18288" anchor="t">
-            <a:spAutoFit/>
-          </a:bodyPr>
-          <a:lstStyle/>
-          <a:p>
-            <a:pPr algn="l"/>
-            <a:r>
-              <a:rPr sz="2180" b="0" i="0">
-                <a:solidFill>
-                  <a:srgbClr val="1A1A1A"/>
-                </a:solidFill>
-                <a:latin typeface="Lexend"/>
-              </a:rPr>
-              <a:t>Exponent up one, decimal point one place left. The value does not move.</a:t>
             </a:r>
           </a:p>
         </p:txBody>
@@ -16731,7 +17347,7 @@
                 </a:solidFill>
                 <a:latin typeface="Lexend"/>
               </a:rPr>
-              <a:t>Example 1</a:t>
+              <a:t>Notes</a:t>
             </a:r>
           </a:p>
         </p:txBody>
@@ -16911,9 +17527,79 @@
           </a:p>
         </p:txBody>
       </p:sp>
+      <p:sp>
+        <p:nvSpPr>
+          <p:cNvPr id="8" name="TextBox 7"/>
+          <p:cNvSpPr txBox="1"/>
+          <p:nvPr/>
+        </p:nvSpPr>
+        <p:spPr>
+          <a:xfrm>
+            <a:off x="777240" y="1389888"/>
+            <a:ext cx="10607040" cy="402336"/>
+          </a:xfrm>
+          <a:prstGeom prst="rect">
+            <a:avLst/>
+          </a:prstGeom>
+          <a:noFill/>
+        </p:spPr>
+        <p:txBody>
+          <a:bodyPr wrap="square" lIns="45720" rIns="45720" tIns="18288" bIns="18288" anchor="t">
+            <a:spAutoFit/>
+          </a:bodyPr>
+          <a:lstStyle/>
+          <a:p>
+            <a:pPr algn="l"/>
+            <a:r>
+              <a:rPr sz="2380" b="1" i="0">
+                <a:solidFill>
+                  <a:srgbClr val="1A1A1A"/>
+                </a:solidFill>
+                <a:latin typeface="Lexend"/>
+              </a:rPr>
+              <a:t>III.  Different powers: rewrite one of them first</a:t>
+            </a:r>
+          </a:p>
+        </p:txBody>
+      </p:sp>
+      <p:cxnSp>
+        <p:nvCxnSpPr>
+          <p:cNvPr id="9" name="Connector 8"/>
+          <p:cNvCxnSpPr/>
+          <p:nvPr/>
+        </p:nvCxnSpPr>
+        <p:spPr>
+          <a:xfrm>
+            <a:off x="777240" y="1828800"/>
+            <a:ext cx="10607040" cy="0"/>
+          </a:xfrm>
+          <a:prstGeom prst="line">
+            <a:avLst/>
+          </a:prstGeom>
+          <a:ln w="9525">
+            <a:solidFill>
+              <a:srgbClr val="1A1A1A"/>
+            </a:solidFill>
+          </a:ln>
+        </p:spPr>
+        <p:style>
+          <a:lnRef idx="2">
+            <a:schemeClr val="accent1"/>
+          </a:lnRef>
+          <a:fillRef idx="0">
+            <a:schemeClr val="accent1"/>
+          </a:fillRef>
+          <a:effectRef idx="1">
+            <a:schemeClr val="accent1"/>
+          </a:effectRef>
+          <a:fontRef idx="minor">
+            <a:schemeClr val="tx1"/>
+          </a:fontRef>
+        </p:style>
+      </p:cxnSp>
       <p:pic>
         <p:nvPicPr>
-          <p:cNvPr id="8" name="Picture 7" descr="b073017cb6305095.png"/>
+          <p:cNvPr id="10" name="Picture 9" descr="6f0baaf26a407dfb.png"/>
           <p:cNvPicPr>
             <a:picLocks noChangeAspect="1"/>
           </p:cNvPicPr>
@@ -16927,24 +17613,131 @@
         </p:blipFill>
         <p:spPr>
           <a:xfrm>
-            <a:off x="4187952" y="2104643"/>
-            <a:ext cx="3785615" cy="408432"/>
+            <a:off x="4178807" y="1994916"/>
+            <a:ext cx="3803904" cy="408432"/>
           </a:xfrm>
           <a:prstGeom prst="rect">
             <a:avLst/>
           </a:prstGeom>
         </p:spPr>
       </p:pic>
-      <p:sp>
-        <p:nvSpPr>
-          <p:cNvPr id="9" name="TextBox 8"/>
-          <p:cNvSpPr txBox="1"/>
-          <p:nvPr/>
-        </p:nvSpPr>
-        <p:spPr>
-          <a:xfrm>
-            <a:off x="777240" y="3017520"/>
-            <a:ext cx="10607040" cy="429370"/>
+      <p:pic>
+        <p:nvPicPr>
+          <p:cNvPr id="11" name="Picture 10" descr="4fc26d98a263c89e.png"/>
+          <p:cNvPicPr>
+            <a:picLocks noChangeAspect="1"/>
+          </p:cNvPicPr>
+          <p:nvPr/>
+        </p:nvPicPr>
+        <p:blipFill>
+          <a:blip r:embed="rId3"/>
+          <a:stretch>
+            <a:fillRect/>
+          </a:stretch>
+        </p:blipFill>
+        <p:spPr>
+          <a:xfrm>
+            <a:off x="2702052" y="2682240"/>
+            <a:ext cx="6757416" cy="405384"/>
+          </a:xfrm>
+          <a:prstGeom prst="rect">
+            <a:avLst/>
+          </a:prstGeom>
+        </p:spPr>
+      </p:pic>
+      <p:pic>
+        <p:nvPicPr>
+          <p:cNvPr id="12" name="Picture 11" descr="ae1a5a7207b8178f.png"/>
+          <p:cNvPicPr>
+            <a:picLocks noChangeAspect="1"/>
+          </p:cNvPicPr>
+          <p:nvPr/>
+        </p:nvPicPr>
+        <p:blipFill>
+          <a:blip r:embed="rId4"/>
+          <a:stretch>
+            <a:fillRect/>
+          </a:stretch>
+        </p:blipFill>
+        <p:spPr>
+          <a:xfrm>
+            <a:off x="1526347" y="3366516"/>
+            <a:ext cx="5961888" cy="408432"/>
+          </a:xfrm>
+          <a:prstGeom prst="rect">
+            <a:avLst/>
+          </a:prstGeom>
+        </p:spPr>
+      </p:pic>
+      <p:sp>
+        <p:nvSpPr>
+          <p:cNvPr id="13" name="TextBox 12"/>
+          <p:cNvSpPr txBox="1"/>
+          <p:nvPr/>
+        </p:nvSpPr>
+        <p:spPr>
+          <a:xfrm>
+            <a:off x="7488235" y="3342132"/>
+            <a:ext cx="1854584" cy="457200"/>
+          </a:xfrm>
+          <a:prstGeom prst="rect">
+            <a:avLst/>
+          </a:prstGeom>
+          <a:noFill/>
+        </p:spPr>
+        <p:txBody>
+          <a:bodyPr wrap="none" lIns="45720" rIns="45720" tIns="18288" bIns="18288" anchor="ctr">
+            <a:noAutofit/>
+          </a:bodyPr>
+          <a:lstStyle/>
+          <a:p>
+            <a:pPr algn="l"/>
+            <a:r>
+              <a:rPr sz="2470" b="0" i="0">
+                <a:solidFill>
+                  <a:srgbClr val="1A1A1A"/>
+                </a:solidFill>
+                <a:latin typeface="Lexend"/>
+              </a:rPr>
+              <a:t>,    never   </a:t>
+            </a:r>
+          </a:p>
+        </p:txBody>
+      </p:sp>
+      <p:pic>
+        <p:nvPicPr>
+          <p:cNvPr id="14" name="Picture 13" descr="83c5d338eb6c267c.png"/>
+          <p:cNvPicPr>
+            <a:picLocks noChangeAspect="1"/>
+          </p:cNvPicPr>
+          <p:nvPr/>
+        </p:nvPicPr>
+        <p:blipFill>
+          <a:blip r:embed="rId5"/>
+          <a:stretch>
+            <a:fillRect/>
+          </a:stretch>
+        </p:blipFill>
+        <p:spPr>
+          <a:xfrm>
+            <a:off x="9205660" y="3401568"/>
+            <a:ext cx="1429512" cy="338328"/>
+          </a:xfrm>
+          <a:prstGeom prst="rect">
+            <a:avLst/>
+          </a:prstGeom>
+        </p:spPr>
+      </p:pic>
+      <p:sp>
+        <p:nvSpPr>
+          <p:cNvPr id="15" name="TextBox 14"/>
+          <p:cNvSpPr txBox="1"/>
+          <p:nvPr/>
+        </p:nvSpPr>
+        <p:spPr>
+          <a:xfrm>
+            <a:off x="987552" y="4114800"/>
+            <a:ext cx="10131551" cy="950976"/>
           </a:xfrm>
           <a:prstGeom prst="rect">
             <a:avLst/>
@@ -16957,15 +17750,50 @@
           </a:bodyPr>
           <a:lstStyle/>
           <a:p>
-            <a:pPr algn="ctr"/>
-            <a:r>
-              <a:rPr sz="2280" b="1" i="0">
+            <a:pPr algn="l"/>
+            <a:r>
+              <a:rPr sz="2180" b="1" i="0">
                 <a:solidFill>
                   <a:srgbClr val="1A1A1A"/>
                 </a:solidFill>
                 <a:latin typeface="Lexend"/>
               </a:rPr>
-              <a:t>Add. Write the answer in scientific notation.</a:t>
+              <a:t>Rewrite one number so both carry the same power of ten, then add or subtract the coefficients.</a:t>
+            </a:r>
+          </a:p>
+        </p:txBody>
+      </p:sp>
+      <p:sp>
+        <p:nvSpPr>
+          <p:cNvPr id="16" name="TextBox 15"/>
+          <p:cNvSpPr txBox="1"/>
+          <p:nvPr/>
+        </p:nvSpPr>
+        <p:spPr>
+          <a:xfrm>
+            <a:off x="987552" y="5321808"/>
+            <a:ext cx="10131551" cy="475488"/>
+          </a:xfrm>
+          <a:prstGeom prst="rect">
+            <a:avLst/>
+          </a:prstGeom>
+          <a:noFill/>
+        </p:spPr>
+        <p:txBody>
+          <a:bodyPr wrap="square" lIns="45720" rIns="45720" tIns="18288" bIns="18288" anchor="t">
+            <a:spAutoFit/>
+          </a:bodyPr>
+          <a:lstStyle/>
+          <a:p>
+            <a:pPr algn="l"/>
+            <a:r>
+              <a:rPr sz="2180" b="0" i="0">
+                <a:solidFill>
+                  <a:srgbClr val="1A1A1A"/>
+                </a:solidFill>
+                <a:latin typeface="Lexend"/>
+              </a:rPr>
+              <a:t>Exponent up one, decimal point one place left. The value does not move.</a:t>
             </a:r>
           </a:p>
         </p:txBody>
@@ -17200,7 +18028,7 @@
       </p:sp>
       <p:pic>
         <p:nvPicPr>
-          <p:cNvPr id="8" name="Picture 7" descr="29f41e57a08380ac.png"/>
+          <p:cNvPr id="8" name="Picture 7" descr="b073017cb6305095.png"/>
           <p:cNvPicPr>
             <a:picLocks noChangeAspect="1"/>
           </p:cNvPicPr>
@@ -17214,72 +18042,24 @@
         </p:blipFill>
         <p:spPr>
           <a:xfrm>
-            <a:off x="1828800" y="1920240"/>
-            <a:ext cx="5797296" cy="405384"/>
+            <a:off x="4187952" y="2104643"/>
+            <a:ext cx="3785615" cy="408432"/>
           </a:xfrm>
           <a:prstGeom prst="rect">
             <a:avLst/>
           </a:prstGeom>
         </p:spPr>
       </p:pic>
-      <p:pic>
-        <p:nvPicPr>
-          <p:cNvPr id="9" name="Picture 8" descr="9886ab42ab881df4.png"/>
-          <p:cNvPicPr>
-            <a:picLocks noChangeAspect="1"/>
-          </p:cNvPicPr>
-          <p:nvPr/>
-        </p:nvPicPr>
-        <p:blipFill>
-          <a:blip r:embed="rId3"/>
-          <a:stretch>
-            <a:fillRect/>
-          </a:stretch>
-        </p:blipFill>
-        <p:spPr>
-          <a:xfrm>
-            <a:off x="1828800" y="2599944"/>
-            <a:ext cx="3624072" cy="338328"/>
-          </a:xfrm>
-          <a:prstGeom prst="rect">
-            <a:avLst/>
-          </a:prstGeom>
-        </p:spPr>
-      </p:pic>
-      <p:pic>
-        <p:nvPicPr>
-          <p:cNvPr id="10" name="Picture 9" descr="a3c2876c6f516a7e.png"/>
-          <p:cNvPicPr>
-            <a:picLocks noChangeAspect="1"/>
-          </p:cNvPicPr>
-          <p:nvPr/>
-        </p:nvPicPr>
-        <p:blipFill>
-          <a:blip r:embed="rId4"/>
-          <a:stretch>
-            <a:fillRect/>
-          </a:stretch>
-        </p:blipFill>
-        <p:spPr>
-          <a:xfrm>
-            <a:off x="1828800" y="3212592"/>
-            <a:ext cx="2215896" cy="347472"/>
-          </a:xfrm>
-          <a:prstGeom prst="rect">
-            <a:avLst/>
-          </a:prstGeom>
-        </p:spPr>
-      </p:pic>
-      <p:sp>
-        <p:nvSpPr>
-          <p:cNvPr id="11" name="TextBox 10"/>
-          <p:cNvSpPr txBox="1"/>
-          <p:nvPr/>
-        </p:nvSpPr>
-        <p:spPr>
-          <a:xfrm>
-            <a:off x="777240" y="4572000"/>
-            <a:ext cx="10607040" cy="548640"/>
+      <p:sp>
+        <p:nvSpPr>
+          <p:cNvPr id="9" name="TextBox 8"/>
+          <p:cNvSpPr txBox="1"/>
+          <p:nvPr/>
+        </p:nvSpPr>
+        <p:spPr>
+          <a:xfrm>
+            <a:off x="777240" y="3017520"/>
+            <a:ext cx="10607040" cy="429370"/>
           </a:xfrm>
           <a:prstGeom prst="rect">
             <a:avLst/>
@@ -17294,22 +18074,13 @@
           <a:p>
             <a:pPr algn="ctr"/>
             <a:r>
-              <a:rPr sz="3040" b="1" i="0">
-                <a:solidFill>
-                  <a:srgbClr val="9E1B32"/>
-                </a:solidFill>
-                <a:latin typeface="Lexend"/>
-              </a:rPr>
-              <a:t>Answer:   1.45 × 10</a:t>
-            </a:r>
-            <a:r>
-              <a:rPr sz="3040" b="1" i="0" baseline="30000">
-                <a:solidFill>
-                  <a:srgbClr val="9E1B32"/>
-                </a:solidFill>
-                <a:latin typeface="Lexend"/>
-              </a:rPr>
-              <a:t>8</a:t>
+              <a:rPr sz="2280" b="1" i="0">
+                <a:solidFill>
+                  <a:srgbClr val="1A1A1A"/>
+                </a:solidFill>
+                <a:latin typeface="Lexend"/>
+              </a:rPr>
+              <a:t>Add. Write the answer in scientific notation.</a:t>
             </a:r>
           </a:p>
         </p:txBody>
@@ -17362,7 +18133,7 @@
                 </a:solidFill>
                 <a:latin typeface="Lexend"/>
               </a:rPr>
-              <a:t>Your Turn</a:t>
+              <a:t>Example 1</a:t>
             </a:r>
           </a:p>
         </p:txBody>
@@ -17544,7 +18315,7 @@
       </p:sp>
       <p:pic>
         <p:nvPicPr>
-          <p:cNvPr id="8" name="Picture 7" descr="b4cde0a73e646210.png"/>
+          <p:cNvPr id="8" name="Picture 7" descr="29f41e57a08380ac.png"/>
           <p:cNvPicPr>
             <a:picLocks noChangeAspect="1"/>
           </p:cNvPicPr>
@@ -17558,24 +18329,72 @@
         </p:blipFill>
         <p:spPr>
           <a:xfrm>
-            <a:off x="3509772" y="1600200"/>
-            <a:ext cx="5141976" cy="505968"/>
+            <a:off x="1828800" y="1920240"/>
+            <a:ext cx="5797296" cy="405384"/>
           </a:xfrm>
           <a:prstGeom prst="rect">
             <a:avLst/>
           </a:prstGeom>
         </p:spPr>
       </p:pic>
-      <p:sp>
-        <p:nvSpPr>
-          <p:cNvPr id="9" name="TextBox 8"/>
-          <p:cNvSpPr txBox="1"/>
-          <p:nvPr/>
-        </p:nvSpPr>
-        <p:spPr>
-          <a:xfrm>
-            <a:off x="777240" y="2609088"/>
-            <a:ext cx="10607040" cy="429370"/>
+      <p:pic>
+        <p:nvPicPr>
+          <p:cNvPr id="9" name="Picture 8" descr="9886ab42ab881df4.png"/>
+          <p:cNvPicPr>
+            <a:picLocks noChangeAspect="1"/>
+          </p:cNvPicPr>
+          <p:nvPr/>
+        </p:nvPicPr>
+        <p:blipFill>
+          <a:blip r:embed="rId3"/>
+          <a:stretch>
+            <a:fillRect/>
+          </a:stretch>
+        </p:blipFill>
+        <p:spPr>
+          <a:xfrm>
+            <a:off x="1828800" y="2599944"/>
+            <a:ext cx="3624072" cy="338328"/>
+          </a:xfrm>
+          <a:prstGeom prst="rect">
+            <a:avLst/>
+          </a:prstGeom>
+        </p:spPr>
+      </p:pic>
+      <p:pic>
+        <p:nvPicPr>
+          <p:cNvPr id="10" name="Picture 9" descr="a3c2876c6f516a7e.png"/>
+          <p:cNvPicPr>
+            <a:picLocks noChangeAspect="1"/>
+          </p:cNvPicPr>
+          <p:nvPr/>
+        </p:nvPicPr>
+        <p:blipFill>
+          <a:blip r:embed="rId4"/>
+          <a:stretch>
+            <a:fillRect/>
+          </a:stretch>
+        </p:blipFill>
+        <p:spPr>
+          <a:xfrm>
+            <a:off x="1828800" y="3212592"/>
+            <a:ext cx="2215896" cy="347472"/>
+          </a:xfrm>
+          <a:prstGeom prst="rect">
+            <a:avLst/>
+          </a:prstGeom>
+        </p:spPr>
+      </p:pic>
+      <p:sp>
+        <p:nvSpPr>
+          <p:cNvPr id="11" name="TextBox 10"/>
+          <p:cNvSpPr txBox="1"/>
+          <p:nvPr/>
+        </p:nvSpPr>
+        <p:spPr>
+          <a:xfrm>
+            <a:off x="777240" y="4572000"/>
+            <a:ext cx="10607040" cy="548640"/>
           </a:xfrm>
           <a:prstGeom prst="rect">
             <a:avLst/>
@@ -17590,13 +18409,22 @@
           <a:p>
             <a:pPr algn="ctr"/>
             <a:r>
-              <a:rPr sz="2280" b="1" i="0">
-                <a:solidFill>
-                  <a:srgbClr val="1A1A1A"/>
-                </a:solidFill>
-                <a:latin typeface="Lexend"/>
-              </a:rPr>
-              <a:t>Add. Write the answer in scientific notation.</a:t>
+              <a:rPr sz="3040" b="1" i="0">
+                <a:solidFill>
+                  <a:srgbClr val="9E1B32"/>
+                </a:solidFill>
+                <a:latin typeface="Lexend"/>
+              </a:rPr>
+              <a:t>Answer:   1.45 × 10</a:t>
+            </a:r>
+            <a:r>
+              <a:rPr sz="3040" b="1" i="0" baseline="30000">
+                <a:solidFill>
+                  <a:srgbClr val="9E1B32"/>
+                </a:solidFill>
+                <a:latin typeface="Lexend"/>
+              </a:rPr>
+              <a:t>8</a:t>
             </a:r>
           </a:p>
         </p:txBody>

--- a/a7/packages/A7 Unit 4 - Solving Problems with Rational Numbers/Lessons/4.01/A7 4.01 Adding and Subtracting in Scientific Notation - Slides.pptx
+++ b/a7/packages/A7 Unit 4 - Solving Problems with Rational Numbers/Lessons/4.01/A7 4.01 Adding and Subtracting in Scientific Notation - Slides.pptx
@@ -4019,7 +4019,7 @@
         </p:nvSpPr>
         <p:spPr>
           <a:xfrm>
-            <a:off x="2035576" y="3201526"/>
+            <a:off x="2035623" y="3201526"/>
             <a:ext cx="5987247" cy="457200"/>
           </a:xfrm>
           <a:prstGeom prst="rect">
@@ -4048,7 +4048,7 @@
       </p:sp>
       <p:pic>
         <p:nvPicPr>
-          <p:cNvPr id="11" name="Picture 10" descr="bcb34fa03e0895f9.png"/>
+          <p:cNvPr id="11" name="Picture 10" descr="5b336a90532d5205.png"/>
           <p:cNvPicPr>
             <a:picLocks noChangeAspect="1"/>
           </p:cNvPicPr>
@@ -4062,8 +4062,8 @@
         </p:blipFill>
         <p:spPr>
           <a:xfrm>
-            <a:off x="7885663" y="3303634"/>
-            <a:ext cx="2240280" cy="252984"/>
+            <a:off x="7885711" y="3322398"/>
+            <a:ext cx="2240184" cy="251364"/>
           </a:xfrm>
           <a:prstGeom prst="rect">
             <a:avLst/>
@@ -4086,7 +4086,7 @@
         </p:blipFill>
         <p:spPr>
           <a:xfrm>
-            <a:off x="2090440" y="3817222"/>
+            <a:off x="2090487" y="3809030"/>
             <a:ext cx="3486912" cy="304800"/>
           </a:xfrm>
           <a:prstGeom prst="rect">
@@ -4382,7 +4382,7 @@
         </p:blipFill>
         <p:spPr>
           <a:xfrm>
-            <a:off x="4184903" y="2104643"/>
+            <a:off x="4184903" y="2103120"/>
             <a:ext cx="3791712" cy="408432"/>
           </a:xfrm>
           <a:prstGeom prst="rect">
@@ -5351,7 +5351,7 @@
         </p:nvSpPr>
         <p:spPr>
           <a:xfrm>
-            <a:off x="3113393" y="3204574"/>
+            <a:off x="3114513" y="3204574"/>
             <a:ext cx="3154956" cy="457200"/>
           </a:xfrm>
           <a:prstGeom prst="rect">
@@ -5380,7 +5380,7 @@
       </p:sp>
       <p:pic>
         <p:nvPicPr>
-          <p:cNvPr id="11" name="Picture 10" descr="9ce2865529b18e92.png"/>
+          <p:cNvPr id="11" name="Picture 10" descr="5bc38d7f5f1bbf56.png"/>
           <p:cNvPicPr>
             <a:picLocks noChangeAspect="1"/>
           </p:cNvPicPr>
@@ -5394,8 +5394,8 @@
         </p:blipFill>
         <p:spPr>
           <a:xfrm>
-            <a:off x="6131190" y="3302110"/>
-            <a:ext cx="2913888" cy="262128"/>
+            <a:off x="6132309" y="3293156"/>
+            <a:ext cx="2914697" cy="261366"/>
           </a:xfrm>
           <a:prstGeom prst="rect">
             <a:avLst/>
@@ -5418,7 +5418,7 @@
         </p:blipFill>
         <p:spPr>
           <a:xfrm>
-            <a:off x="3168257" y="3829414"/>
+            <a:off x="3169377" y="3845511"/>
             <a:ext cx="2069591" cy="213360"/>
           </a:xfrm>
           <a:prstGeom prst="rect">
@@ -5442,7 +5442,7 @@
         </p:blipFill>
         <p:spPr>
           <a:xfrm>
-            <a:off x="3168257" y="4310998"/>
+            <a:off x="3169377" y="4305759"/>
             <a:ext cx="1362456" cy="256032"/>
           </a:xfrm>
           <a:prstGeom prst="rect">
@@ -5738,7 +5738,7 @@
         </p:blipFill>
         <p:spPr>
           <a:xfrm>
-            <a:off x="4192524" y="2197608"/>
+            <a:off x="4192524" y="2194560"/>
             <a:ext cx="3776472" cy="405384"/>
           </a:xfrm>
           <a:prstGeom prst="rect">
@@ -6025,7 +6025,7 @@
         </p:blipFill>
         <p:spPr>
           <a:xfrm>
-            <a:off x="4190999" y="2106168"/>
+            <a:off x="4190999" y="2103120"/>
             <a:ext cx="3779520" cy="405384"/>
           </a:xfrm>
           <a:prstGeom prst="rect">
@@ -6041,7 +6041,7 @@
         </p:nvSpPr>
         <p:spPr>
           <a:xfrm>
-            <a:off x="2142256" y="2839212"/>
+            <a:off x="2141970" y="2839212"/>
             <a:ext cx="5987247" cy="457200"/>
           </a:xfrm>
           <a:prstGeom prst="rect">
@@ -6070,7 +6070,7 @@
       </p:sp>
       <p:pic>
         <p:nvPicPr>
-          <p:cNvPr id="10" name="Picture 9" descr="691fe688d72e9def.png"/>
+          <p:cNvPr id="10" name="Picture 9" descr="375fe00662e45306.png"/>
           <p:cNvPicPr>
             <a:picLocks noChangeAspect="1"/>
           </p:cNvPicPr>
@@ -6084,8 +6084,8 @@
         </p:blipFill>
         <p:spPr>
           <a:xfrm>
-            <a:off x="7992343" y="2941320"/>
-            <a:ext cx="2026920" cy="252984"/>
+            <a:off x="7992058" y="2960084"/>
+            <a:ext cx="2030253" cy="251364"/>
           </a:xfrm>
           <a:prstGeom prst="rect">
             <a:avLst/>
@@ -6108,7 +6108,7 @@
         </p:blipFill>
         <p:spPr>
           <a:xfrm>
-            <a:off x="2197120" y="3454908"/>
+            <a:off x="2196834" y="3446716"/>
             <a:ext cx="1246632" cy="304800"/>
           </a:xfrm>
           <a:prstGeom prst="rect">
@@ -6425,7 +6425,7 @@
       </p:sp>
       <p:pic>
         <p:nvPicPr>
-          <p:cNvPr id="9" name="Picture 8" descr="5243cc360be291af.png"/>
+          <p:cNvPr id="9" name="Picture 8" descr="22d45fd8e2192877.png"/>
           <p:cNvPicPr>
             <a:picLocks noChangeAspect="1"/>
           </p:cNvPicPr>
@@ -6439,8 +6439,8 @@
         </p:blipFill>
         <p:spPr>
           <a:xfrm>
-            <a:off x="3676435" y="1944623"/>
-            <a:ext cx="1173480" cy="271272"/>
+            <a:off x="3676435" y="1927098"/>
+            <a:ext cx="1176337" cy="272415"/>
           </a:xfrm>
           <a:prstGeom prst="rect">
             <a:avLst/>
@@ -6455,7 +6455,7 @@
         </p:nvSpPr>
         <p:spPr>
           <a:xfrm>
-            <a:off x="4849915" y="1851660"/>
+            <a:off x="4852773" y="1851660"/>
             <a:ext cx="2865857" cy="457200"/>
           </a:xfrm>
           <a:prstGeom prst="rect">
@@ -6519,7 +6519,7 @@
       </p:sp>
       <p:pic>
         <p:nvPicPr>
-          <p:cNvPr id="12" name="Picture 11" descr="5ce3a6a6b398a32a.png"/>
+          <p:cNvPr id="12" name="Picture 11" descr="198fb6ef19937457.png"/>
           <p:cNvPicPr>
             <a:picLocks noChangeAspect="1"/>
           </p:cNvPicPr>
@@ -6533,8 +6533,8 @@
         </p:blipFill>
         <p:spPr>
           <a:xfrm>
-            <a:off x="2050946" y="2557272"/>
-            <a:ext cx="1152144" cy="271272"/>
+            <a:off x="2050946" y="2539746"/>
+            <a:ext cx="1156525" cy="272415"/>
           </a:xfrm>
           <a:prstGeom prst="rect">
             <a:avLst/>
@@ -6549,7 +6549,7 @@
         </p:nvSpPr>
         <p:spPr>
           <a:xfrm>
-            <a:off x="3203090" y="2464308"/>
+            <a:off x="3207472" y="2464308"/>
             <a:ext cx="6284639" cy="457200"/>
           </a:xfrm>
           <a:prstGeom prst="rect">
@@ -6911,7 +6911,7 @@
       </p:sp>
       <p:pic>
         <p:nvPicPr>
-          <p:cNvPr id="9" name="Picture 8" descr="a8bb2f17f73fb1a5.png"/>
+          <p:cNvPr id="9" name="Picture 8" descr="e7eb40717fc0f17b.png"/>
           <p:cNvPicPr>
             <a:picLocks noChangeAspect="1"/>
           </p:cNvPicPr>
@@ -6925,8 +6925,8 @@
         </p:blipFill>
         <p:spPr>
           <a:xfrm>
-            <a:off x="3676435" y="1943100"/>
-            <a:ext cx="1173480" cy="274320"/>
+            <a:off x="3676435" y="1924621"/>
+            <a:ext cx="1176337" cy="274891"/>
           </a:xfrm>
           <a:prstGeom prst="rect">
             <a:avLst/>
@@ -6941,7 +6941,7 @@
         </p:nvSpPr>
         <p:spPr>
           <a:xfrm>
-            <a:off x="4849915" y="1851660"/>
+            <a:off x="4852773" y="1851660"/>
             <a:ext cx="2865857" cy="457200"/>
           </a:xfrm>
           <a:prstGeom prst="rect">
@@ -7005,7 +7005,7 @@
       </p:sp>
       <p:pic>
         <p:nvPicPr>
-          <p:cNvPr id="12" name="Picture 11" descr="ca70dd33a6d37a9b.png"/>
+          <p:cNvPr id="12" name="Picture 11" descr="fbd1eec05c786fa8.png"/>
           <p:cNvPicPr>
             <a:picLocks noChangeAspect="1"/>
           </p:cNvPicPr>
@@ -7019,8 +7019,8 @@
         </p:blipFill>
         <p:spPr>
           <a:xfrm>
-            <a:off x="2050946" y="2555748"/>
-            <a:ext cx="1155192" cy="274320"/>
+            <a:off x="2050946" y="2537269"/>
+            <a:ext cx="1159002" cy="274891"/>
           </a:xfrm>
           <a:prstGeom prst="rect">
             <a:avLst/>
@@ -7035,7 +7035,7 @@
         </p:nvSpPr>
         <p:spPr>
           <a:xfrm>
-            <a:off x="3206138" y="2464308"/>
+            <a:off x="3209948" y="2464308"/>
             <a:ext cx="6284639" cy="457200"/>
           </a:xfrm>
           <a:prstGeom prst="rect">
@@ -7105,7 +7105,7 @@
         </p:nvSpPr>
         <p:spPr>
           <a:xfrm>
-            <a:off x="2130064" y="3734926"/>
+            <a:off x="2129540" y="3734926"/>
             <a:ext cx="5987247" cy="457200"/>
           </a:xfrm>
           <a:prstGeom prst="rect">
@@ -7134,7 +7134,7 @@
       </p:sp>
       <p:pic>
         <p:nvPicPr>
-          <p:cNvPr id="16" name="Picture 15" descr="884fc76005d8767d.png"/>
+          <p:cNvPr id="16" name="Picture 15" descr="806e43a7c385a427.png"/>
           <p:cNvPicPr>
             <a:picLocks noChangeAspect="1"/>
           </p:cNvPicPr>
@@ -7148,8 +7148,8 @@
         </p:blipFill>
         <p:spPr>
           <a:xfrm>
-            <a:off x="7980151" y="3837034"/>
-            <a:ext cx="2057400" cy="252984"/>
+            <a:off x="7979628" y="3855798"/>
+            <a:ext cx="2052351" cy="251364"/>
           </a:xfrm>
           <a:prstGeom prst="rect">
             <a:avLst/>
@@ -7172,7 +7172,7 @@
         </p:blipFill>
         <p:spPr>
           <a:xfrm>
-            <a:off x="2184928" y="4350622"/>
+            <a:off x="2184404" y="4342430"/>
             <a:ext cx="1271016" cy="304800"/>
           </a:xfrm>
           <a:prstGeom prst="rect">
@@ -7524,7 +7524,7 @@
       </p:sp>
       <p:pic>
         <p:nvPicPr>
-          <p:cNvPr id="10" name="Picture 9" descr="322d90d803ad0d3a.png"/>
+          <p:cNvPr id="10" name="Picture 9" descr="d51fbdb9eea8fed0.png"/>
           <p:cNvPicPr>
             <a:picLocks noChangeAspect="1"/>
           </p:cNvPicPr>
@@ -7538,8 +7538,8 @@
         </p:blipFill>
         <p:spPr>
           <a:xfrm>
-            <a:off x="6207574" y="2145792"/>
-            <a:ext cx="896112" cy="271272"/>
+            <a:off x="6207574" y="2132274"/>
+            <a:ext cx="856765" cy="263437"/>
           </a:xfrm>
           <a:prstGeom prst="rect">
             <a:avLst/>
@@ -7554,7 +7554,7 @@
         </p:nvSpPr>
         <p:spPr>
           <a:xfrm>
-            <a:off x="7103686" y="2052828"/>
+            <a:off x="7064340" y="2052828"/>
             <a:ext cx="1188962" cy="457200"/>
           </a:xfrm>
           <a:prstGeom prst="rect">
@@ -7583,7 +7583,7 @@
       </p:sp>
       <p:pic>
         <p:nvPicPr>
-          <p:cNvPr id="12" name="Picture 11" descr="91469e0de639e792.png"/>
+          <p:cNvPr id="12" name="Picture 11" descr="a8a2907cf3f34157.png"/>
           <p:cNvPicPr>
             <a:picLocks noChangeAspect="1"/>
           </p:cNvPicPr>
@@ -7597,8 +7597,8 @@
         </p:blipFill>
         <p:spPr>
           <a:xfrm>
-            <a:off x="8155489" y="2145792"/>
-            <a:ext cx="899160" cy="271272"/>
+            <a:off x="8116143" y="2134647"/>
+            <a:ext cx="863885" cy="261064"/>
           </a:xfrm>
           <a:prstGeom prst="rect">
             <a:avLst/>
@@ -7613,7 +7613,7 @@
         </p:nvSpPr>
         <p:spPr>
           <a:xfrm>
-            <a:off x="9054649" y="2052828"/>
+            <a:off x="8980028" y="2052828"/>
             <a:ext cx="443010" cy="457200"/>
           </a:xfrm>
           <a:prstGeom prst="rect">
@@ -7677,7 +7677,7 @@
       </p:sp>
       <p:pic>
         <p:nvPicPr>
-          <p:cNvPr id="15" name="Picture 14" descr="f53f316f2160c0ab.png"/>
+          <p:cNvPr id="15" name="Picture 14" descr="c5ba369a2497f72e.png"/>
           <p:cNvPicPr>
             <a:picLocks noChangeAspect="1"/>
           </p:cNvPicPr>
@@ -7691,8 +7691,8 @@
         </p:blipFill>
         <p:spPr>
           <a:xfrm>
-            <a:off x="4667711" y="2699004"/>
-            <a:ext cx="886968" cy="390144"/>
+            <a:off x="4667711" y="2709322"/>
+            <a:ext cx="847272" cy="372610"/>
           </a:xfrm>
           <a:prstGeom prst="rect">
             <a:avLst/>
@@ -7736,7 +7736,7 @@
       </p:sp>
       <p:pic>
         <p:nvPicPr>
-          <p:cNvPr id="17" name="Picture 16" descr="bd88d4ecf7738e5d.png"/>
+          <p:cNvPr id="17" name="Picture 16" descr="0438a9bb4c3d550d.png"/>
           <p:cNvPicPr>
             <a:picLocks noChangeAspect="1"/>
           </p:cNvPicPr>
@@ -7750,8 +7750,8 @@
         </p:blipFill>
         <p:spPr>
           <a:xfrm>
-            <a:off x="4511197" y="3393948"/>
-            <a:ext cx="1307592" cy="225552"/>
+            <a:off x="4511197" y="3402663"/>
+            <a:ext cx="1253109" cy="218344"/>
           </a:xfrm>
           <a:prstGeom prst="rect">
             <a:avLst/>
@@ -8002,7 +8002,7 @@
         </p:blipFill>
         <p:spPr>
           <a:xfrm>
-            <a:off x="4337304" y="2196083"/>
+            <a:off x="4337304" y="2194560"/>
             <a:ext cx="3486912" cy="408432"/>
           </a:xfrm>
           <a:prstGeom prst="rect">
@@ -8313,7 +8313,7 @@
         </p:blipFill>
         <p:spPr>
           <a:xfrm>
-            <a:off x="4631435" y="2944368"/>
+            <a:off x="4631435" y="2962084"/>
             <a:ext cx="1365504" cy="252984"/>
           </a:xfrm>
           <a:prstGeom prst="rect">
@@ -8337,7 +8337,7 @@
         </p:blipFill>
         <p:spPr>
           <a:xfrm>
-            <a:off x="4631435" y="3456431"/>
+            <a:off x="4631435" y="3446716"/>
             <a:ext cx="3008376" cy="307848"/>
           </a:xfrm>
           <a:prstGeom prst="rect">
@@ -8633,7 +8633,7 @@
         </p:blipFill>
         <p:spPr>
           <a:xfrm>
-            <a:off x="4172712" y="2196083"/>
+            <a:off x="4172712" y="2194560"/>
             <a:ext cx="3816095" cy="408432"/>
           </a:xfrm>
           <a:prstGeom prst="rect">
@@ -8920,7 +8920,7 @@
         </p:blipFill>
         <p:spPr>
           <a:xfrm>
-            <a:off x="4171188" y="2104643"/>
+            <a:off x="4171188" y="2103120"/>
             <a:ext cx="3819144" cy="408432"/>
           </a:xfrm>
           <a:prstGeom prst="rect">
@@ -8944,7 +8944,7 @@
         </p:blipFill>
         <p:spPr>
           <a:xfrm>
-            <a:off x="4818887" y="2939796"/>
+            <a:off x="4818887" y="2955988"/>
             <a:ext cx="2084831" cy="256032"/>
           </a:xfrm>
           <a:prstGeom prst="rect">
@@ -8968,7 +8968,7 @@
         </p:blipFill>
         <p:spPr>
           <a:xfrm>
-            <a:off x="4818887" y="3454908"/>
+            <a:off x="4818887" y="3446716"/>
             <a:ext cx="2639568" cy="304800"/>
           </a:xfrm>
           <a:prstGeom prst="rect">
@@ -9264,7 +9264,7 @@
         </p:blipFill>
         <p:spPr>
           <a:xfrm>
-            <a:off x="4198620" y="2196083"/>
+            <a:off x="4198620" y="2194560"/>
             <a:ext cx="3764279" cy="408432"/>
           </a:xfrm>
           <a:prstGeom prst="rect">
@@ -9849,7 +9849,7 @@
         </p:nvSpPr>
         <p:spPr>
           <a:xfrm>
-            <a:off x="3181973" y="3417139"/>
+            <a:off x="3183355" y="3417139"/>
             <a:ext cx="3154956" cy="457200"/>
           </a:xfrm>
           <a:prstGeom prst="rect">
@@ -9878,7 +9878,7 @@
       </p:sp>
       <p:pic>
         <p:nvPicPr>
-          <p:cNvPr id="11" name="Picture 10" descr="27f7e9522e6b3218.png"/>
+          <p:cNvPr id="11" name="Picture 10" descr="38a98cc775ba9a35.png"/>
           <p:cNvPicPr>
             <a:picLocks noChangeAspect="1"/>
           </p:cNvPicPr>
@@ -9892,8 +9892,8 @@
         </p:blipFill>
         <p:spPr>
           <a:xfrm>
-            <a:off x="6199770" y="3514675"/>
-            <a:ext cx="2782824" cy="262128"/>
+            <a:off x="6201151" y="3505721"/>
+            <a:ext cx="2777013" cy="261366"/>
           </a:xfrm>
           <a:prstGeom prst="rect">
             <a:avLst/>
@@ -9916,7 +9916,7 @@
         </p:blipFill>
         <p:spPr>
           <a:xfrm>
-            <a:off x="3236837" y="4041979"/>
+            <a:off x="3238219" y="4058076"/>
             <a:ext cx="2365248" cy="213360"/>
           </a:xfrm>
           <a:prstGeom prst="rect">
@@ -9940,7 +9940,7 @@
         </p:blipFill>
         <p:spPr>
           <a:xfrm>
-            <a:off x="3236837" y="4520515"/>
+            <a:off x="3238219" y="4512228"/>
             <a:ext cx="1377696" cy="262128"/>
           </a:xfrm>
           <a:prstGeom prst="rect">
@@ -10236,7 +10236,7 @@
         </p:blipFill>
         <p:spPr>
           <a:xfrm>
-            <a:off x="4186428" y="2196083"/>
+            <a:off x="4186428" y="2194560"/>
             <a:ext cx="3788664" cy="408432"/>
           </a:xfrm>
           <a:prstGeom prst="rect">
@@ -10829,7 +10829,7 @@
         </p:blipFill>
         <p:spPr>
           <a:xfrm>
-            <a:off x="4530851" y="3519247"/>
+            <a:off x="4530851" y="3536963"/>
             <a:ext cx="2209800" cy="252984"/>
           </a:xfrm>
           <a:prstGeom prst="rect">
@@ -10853,7 +10853,7 @@
         </p:blipFill>
         <p:spPr>
           <a:xfrm>
-            <a:off x="4530851" y="4031311"/>
+            <a:off x="4530851" y="4021595"/>
             <a:ext cx="3209544" cy="307848"/>
           </a:xfrm>
           <a:prstGeom prst="rect">
@@ -11452,7 +11452,7 @@
         </p:nvSpPr>
         <p:spPr>
           <a:xfrm>
-            <a:off x="3119489" y="2839212"/>
+            <a:off x="3121513" y="2839212"/>
             <a:ext cx="3154956" cy="457200"/>
           </a:xfrm>
           <a:prstGeom prst="rect">
@@ -11481,7 +11481,7 @@
       </p:sp>
       <p:pic>
         <p:nvPicPr>
-          <p:cNvPr id="10" name="Picture 9" descr="2c3b2befdb898d6e.png"/>
+          <p:cNvPr id="10" name="Picture 9" descr="6ede306f727ce12b.png"/>
           <p:cNvPicPr>
             <a:picLocks noChangeAspect="1"/>
           </p:cNvPicPr>
@@ -11495,8 +11495,8 @@
         </p:blipFill>
         <p:spPr>
           <a:xfrm>
-            <a:off x="6137286" y="2936748"/>
-            <a:ext cx="2904744" cy="262128"/>
+            <a:off x="6139310" y="2927794"/>
+            <a:ext cx="2903029" cy="261366"/>
           </a:xfrm>
           <a:prstGeom prst="rect">
             <a:avLst/>
@@ -11519,7 +11519,7 @@
         </p:blipFill>
         <p:spPr>
           <a:xfrm>
-            <a:off x="3174353" y="3464052"/>
+            <a:off x="3176377" y="3480149"/>
             <a:ext cx="2066543" cy="213360"/>
           </a:xfrm>
           <a:prstGeom prst="rect">
@@ -11543,7 +11543,7 @@
         </p:blipFill>
         <p:spPr>
           <a:xfrm>
-            <a:off x="3174353" y="3942588"/>
+            <a:off x="3176377" y="3934301"/>
             <a:ext cx="1331976" cy="262128"/>
           </a:xfrm>
           <a:prstGeom prst="rect">
@@ -11939,7 +11939,7 @@
       </p:sp>
       <p:pic>
         <p:nvPicPr>
-          <p:cNvPr id="11" name="Picture 10" descr="322d90d803ad0d3a.png"/>
+          <p:cNvPr id="11" name="Picture 10" descr="d51fbdb9eea8fed0.png"/>
           <p:cNvPicPr>
             <a:picLocks noChangeAspect="1"/>
           </p:cNvPicPr>
@@ -11953,8 +11953,8 @@
         </p:blipFill>
         <p:spPr>
           <a:xfrm>
-            <a:off x="6207574" y="2145792"/>
-            <a:ext cx="896112" cy="271272"/>
+            <a:off x="6207574" y="2132274"/>
+            <a:ext cx="856765" cy="263437"/>
           </a:xfrm>
           <a:prstGeom prst="rect">
             <a:avLst/>
@@ -11969,7 +11969,7 @@
         </p:nvSpPr>
         <p:spPr>
           <a:xfrm>
-            <a:off x="7103686" y="2052828"/>
+            <a:off x="7064340" y="2052828"/>
             <a:ext cx="1188962" cy="457200"/>
           </a:xfrm>
           <a:prstGeom prst="rect">
@@ -11998,7 +11998,7 @@
       </p:sp>
       <p:pic>
         <p:nvPicPr>
-          <p:cNvPr id="13" name="Picture 12" descr="91469e0de639e792.png"/>
+          <p:cNvPr id="13" name="Picture 12" descr="a8a2907cf3f34157.png"/>
           <p:cNvPicPr>
             <a:picLocks noChangeAspect="1"/>
           </p:cNvPicPr>
@@ -12012,8 +12012,8 @@
         </p:blipFill>
         <p:spPr>
           <a:xfrm>
-            <a:off x="8155489" y="2145792"/>
-            <a:ext cx="899160" cy="271272"/>
+            <a:off x="8116143" y="2134647"/>
+            <a:ext cx="863885" cy="261064"/>
           </a:xfrm>
           <a:prstGeom prst="rect">
             <a:avLst/>
@@ -12028,7 +12028,7 @@
         </p:nvSpPr>
         <p:spPr>
           <a:xfrm>
-            <a:off x="9054649" y="2052828"/>
+            <a:off x="8980028" y="2052828"/>
             <a:ext cx="443010" cy="457200"/>
           </a:xfrm>
           <a:prstGeom prst="rect">
@@ -12063,7 +12063,7 @@
         </p:nvSpPr>
         <p:spPr>
           <a:xfrm>
-            <a:off x="9909139" y="2052828"/>
+            <a:off x="9834518" y="2052828"/>
             <a:ext cx="1085052" cy="457200"/>
           </a:xfrm>
           <a:prstGeom prst="rect">
@@ -12127,7 +12127,7 @@
       </p:sp>
       <p:pic>
         <p:nvPicPr>
-          <p:cNvPr id="17" name="Picture 16" descr="f53f316f2160c0ab.png"/>
+          <p:cNvPr id="17" name="Picture 16" descr="c5ba369a2497f72e.png"/>
           <p:cNvPicPr>
             <a:picLocks noChangeAspect="1"/>
           </p:cNvPicPr>
@@ -12141,8 +12141,8 @@
         </p:blipFill>
         <p:spPr>
           <a:xfrm>
-            <a:off x="4667711" y="2699004"/>
-            <a:ext cx="886968" cy="390144"/>
+            <a:off x="4667711" y="2709322"/>
+            <a:ext cx="847272" cy="372610"/>
           </a:xfrm>
           <a:prstGeom prst="rect">
             <a:avLst/>
@@ -12157,7 +12157,7 @@
         </p:nvSpPr>
         <p:spPr>
           <a:xfrm>
-            <a:off x="6103319" y="2665476"/>
+            <a:off x="6063623" y="2665476"/>
             <a:ext cx="536528" cy="457200"/>
           </a:xfrm>
           <a:prstGeom prst="rect">
@@ -12221,7 +12221,7 @@
       </p:sp>
       <p:pic>
         <p:nvPicPr>
-          <p:cNvPr id="20" name="Picture 19" descr="bd88d4ecf7738e5d.png"/>
+          <p:cNvPr id="20" name="Picture 19" descr="0438a9bb4c3d550d.png"/>
           <p:cNvPicPr>
             <a:picLocks noChangeAspect="1"/>
           </p:cNvPicPr>
@@ -12235,8 +12235,8 @@
         </p:blipFill>
         <p:spPr>
           <a:xfrm>
-            <a:off x="4511197" y="3393948"/>
-            <a:ext cx="1307592" cy="225552"/>
+            <a:off x="4511197" y="3402663"/>
+            <a:ext cx="1253109" cy="218344"/>
           </a:xfrm>
           <a:prstGeom prst="rect">
             <a:avLst/>
@@ -12251,7 +12251,7 @@
         </p:nvSpPr>
         <p:spPr>
           <a:xfrm>
-            <a:off x="6367429" y="3278124"/>
+            <a:off x="6312946" y="3278124"/>
             <a:ext cx="790908" cy="457200"/>
           </a:xfrm>
           <a:prstGeom prst="rect">
@@ -12522,7 +12522,7 @@
         </p:blipFill>
         <p:spPr>
           <a:xfrm>
-            <a:off x="3320795" y="2196083"/>
+            <a:off x="3320795" y="2194560"/>
             <a:ext cx="5519928" cy="408432"/>
           </a:xfrm>
           <a:prstGeom prst="rect">
@@ -12538,8 +12538,8 @@
         </p:nvSpPr>
         <p:spPr>
           <a:xfrm>
-            <a:off x="4134140" y="2857500"/>
-            <a:ext cx="3517441" cy="457200"/>
+            <a:off x="4288069" y="2857500"/>
+            <a:ext cx="3262962" cy="457200"/>
           </a:xfrm>
           <a:prstGeom prst="rect">
             <a:avLst/>
@@ -12554,7 +12554,7 @@
           <a:p>
             <a:pPr algn="l"/>
             <a:r>
-              <a:rPr sz="2470" b="0" i="0">
+              <a:rPr sz="2280" b="0" i="0">
                 <a:solidFill>
                   <a:srgbClr val="1A1A1A"/>
                 </a:solidFill>
@@ -12581,8 +12581,8 @@
         </p:blipFill>
         <p:spPr>
           <a:xfrm>
-            <a:off x="7514421" y="2982468"/>
-            <a:ext cx="176784" cy="207264"/>
+            <a:off x="7413872" y="3031998"/>
+            <a:ext cx="143637" cy="168401"/>
           </a:xfrm>
           <a:prstGeom prst="rect">
             <a:avLst/>
@@ -12597,8 +12597,8 @@
         </p:nvSpPr>
         <p:spPr>
           <a:xfrm>
-            <a:off x="7691205" y="2857500"/>
-            <a:ext cx="473333" cy="457200"/>
+            <a:off x="7557509" y="2857500"/>
+            <a:ext cx="453101" cy="457200"/>
           </a:xfrm>
           <a:prstGeom prst="rect">
             <a:avLst/>
@@ -12613,7 +12613,7 @@
           <a:p>
             <a:pPr algn="l"/>
             <a:r>
-              <a:rPr sz="2470" b="0" i="0">
+              <a:rPr sz="2280" b="0" i="0">
                 <a:solidFill>
                   <a:srgbClr val="1A1A1A"/>
                 </a:solidFill>
@@ -12919,8 +12919,8 @@
         </p:nvSpPr>
         <p:spPr>
           <a:xfrm>
-            <a:off x="4134140" y="2769107"/>
-            <a:ext cx="3517441" cy="457200"/>
+            <a:off x="4288069" y="2769107"/>
+            <a:ext cx="3262962" cy="457200"/>
           </a:xfrm>
           <a:prstGeom prst="rect">
             <a:avLst/>
@@ -12935,7 +12935,7 @@
           <a:p>
             <a:pPr algn="l"/>
             <a:r>
-              <a:rPr sz="2470" b="0" i="0">
+              <a:rPr sz="2280" b="0" i="0">
                 <a:solidFill>
                   <a:srgbClr val="1A1A1A"/>
                 </a:solidFill>
@@ -12962,8 +12962,8 @@
         </p:blipFill>
         <p:spPr>
           <a:xfrm>
-            <a:off x="7514421" y="2894075"/>
-            <a:ext cx="176784" cy="207264"/>
+            <a:off x="7413872" y="2943605"/>
+            <a:ext cx="143637" cy="168401"/>
           </a:xfrm>
           <a:prstGeom prst="rect">
             <a:avLst/>
@@ -12978,8 +12978,8 @@
         </p:nvSpPr>
         <p:spPr>
           <a:xfrm>
-            <a:off x="7691205" y="2769107"/>
-            <a:ext cx="473333" cy="457200"/>
+            <a:off x="7557509" y="2769107"/>
+            <a:ext cx="453101" cy="457200"/>
           </a:xfrm>
           <a:prstGeom prst="rect">
             <a:avLst/>
@@ -12994,7 +12994,7 @@
           <a:p>
             <a:pPr algn="l"/>
             <a:r>
-              <a:rPr sz="2470" b="0" i="0">
+              <a:rPr sz="2280" b="0" i="0">
                 <a:solidFill>
                   <a:srgbClr val="1A1A1A"/>
                 </a:solidFill>
@@ -13021,7 +13021,7 @@
         </p:blipFill>
         <p:spPr>
           <a:xfrm>
-            <a:off x="4756403" y="3625595"/>
+            <a:off x="4756403" y="3617309"/>
             <a:ext cx="2761488" cy="262128"/>
           </a:xfrm>
           <a:prstGeom prst="rect">
@@ -13045,7 +13045,7 @@
         </p:blipFill>
         <p:spPr>
           <a:xfrm>
-            <a:off x="4756403" y="4152899"/>
+            <a:off x="4756403" y="4168997"/>
             <a:ext cx="1694688" cy="213360"/>
           </a:xfrm>
           <a:prstGeom prst="rect">
@@ -13069,7 +13069,7 @@
         </p:blipFill>
         <p:spPr>
           <a:xfrm>
-            <a:off x="4756403" y="4655819"/>
+            <a:off x="4756403" y="4671917"/>
             <a:ext cx="2353056" cy="213360"/>
           </a:xfrm>
           <a:prstGeom prst="rect">
@@ -13348,8 +13348,8 @@
         </p:nvSpPr>
         <p:spPr>
           <a:xfrm>
-            <a:off x="2039261" y="2171700"/>
-            <a:ext cx="2490283" cy="457200"/>
+            <a:off x="2653065" y="2171700"/>
+            <a:ext cx="2314935" cy="457200"/>
           </a:xfrm>
           <a:prstGeom prst="rect">
             <a:avLst/>
@@ -13364,7 +13364,7 @@
           <a:p>
             <a:pPr algn="l"/>
             <a:r>
-              <a:rPr sz="2470" b="0" i="0">
+              <a:rPr sz="2280" b="0" i="0">
                 <a:solidFill>
                   <a:srgbClr val="1A1A1A"/>
                 </a:solidFill>
@@ -13391,8 +13391,8 @@
         </p:blipFill>
         <p:spPr>
           <a:xfrm>
-            <a:off x="4392384" y="2196083"/>
-            <a:ext cx="5580888" cy="408432"/>
+            <a:off x="4830841" y="2242185"/>
+            <a:ext cx="4534471" cy="331851"/>
           </a:xfrm>
           <a:prstGeom prst="rect">
             <a:avLst/>
@@ -13407,8 +13407,8 @@
         </p:nvSpPr>
         <p:spPr>
           <a:xfrm>
-            <a:off x="9973272" y="2171700"/>
-            <a:ext cx="286146" cy="457200"/>
+            <a:off x="9365312" y="2171700"/>
+            <a:ext cx="280301" cy="457200"/>
           </a:xfrm>
           <a:prstGeom prst="rect">
             <a:avLst/>
@@ -13423,7 +13423,7 @@
           <a:p>
             <a:pPr algn="l"/>
             <a:r>
-              <a:rPr sz="2470" b="0" i="0">
+              <a:rPr sz="2280" b="0" i="0">
                 <a:solidFill>
                   <a:srgbClr val="1A1A1A"/>
                 </a:solidFill>
@@ -13740,8 +13740,8 @@
         </p:nvSpPr>
         <p:spPr>
           <a:xfrm>
-            <a:off x="2037737" y="2081783"/>
-            <a:ext cx="2490283" cy="457200"/>
+            <a:off x="2651827" y="2080260"/>
+            <a:ext cx="2314935" cy="457200"/>
           </a:xfrm>
           <a:prstGeom prst="rect">
             <a:avLst/>
@@ -13756,7 +13756,7 @@
           <a:p>
             <a:pPr algn="l"/>
             <a:r>
-              <a:rPr sz="2470" b="0" i="0">
+              <a:rPr sz="2280" b="0" i="0">
                 <a:solidFill>
                   <a:srgbClr val="1A1A1A"/>
                 </a:solidFill>
@@ -13783,8 +13783,8 @@
         </p:blipFill>
         <p:spPr>
           <a:xfrm>
-            <a:off x="4390860" y="2103120"/>
-            <a:ext cx="5583936" cy="414528"/>
+            <a:off x="4829603" y="2145792"/>
+            <a:ext cx="4536948" cy="336803"/>
           </a:xfrm>
           <a:prstGeom prst="rect">
             <a:avLst/>
@@ -13799,8 +13799,8 @@
         </p:nvSpPr>
         <p:spPr>
           <a:xfrm>
-            <a:off x="9974796" y="2081783"/>
-            <a:ext cx="286146" cy="457200"/>
+            <a:off x="9366551" y="2080260"/>
+            <a:ext cx="280301" cy="457200"/>
           </a:xfrm>
           <a:prstGeom prst="rect">
             <a:avLst/>
@@ -13815,7 +13815,7 @@
           <a:p>
             <a:pPr algn="l"/>
             <a:r>
-              <a:rPr sz="2470" b="0" i="0">
+              <a:rPr sz="2280" b="0" i="0">
                 <a:solidFill>
                   <a:srgbClr val="1A1A1A"/>
                 </a:solidFill>
@@ -13834,7 +13834,7 @@
         </p:nvSpPr>
         <p:spPr>
           <a:xfrm>
-            <a:off x="777240" y="2791967"/>
+            <a:off x="777240" y="2788920"/>
             <a:ext cx="10607040" cy="465151"/>
           </a:xfrm>
           <a:prstGeom prst="rect">
@@ -13869,7 +13869,7 @@
         </p:nvSpPr>
         <p:spPr>
           <a:xfrm>
-            <a:off x="1754232" y="3417139"/>
+            <a:off x="1754232" y="3414091"/>
             <a:ext cx="8790215" cy="457200"/>
           </a:xfrm>
           <a:prstGeom prst="rect">
@@ -13912,7 +13912,7 @@
         </p:blipFill>
         <p:spPr>
           <a:xfrm>
-            <a:off x="1809096" y="4017595"/>
+            <a:off x="1809096" y="4006260"/>
             <a:ext cx="2773680" cy="262128"/>
           </a:xfrm>
           <a:prstGeom prst="rect">
@@ -13922,7 +13922,7 @@
       </p:pic>
       <p:pic>
         <p:nvPicPr>
-          <p:cNvPr id="14" name="Picture 13" descr="0920ee9ba6d56afd.png"/>
+          <p:cNvPr id="14" name="Picture 13" descr="e099433ce822c8f4.png"/>
           <p:cNvPicPr>
             <a:picLocks noChangeAspect="1"/>
           </p:cNvPicPr>
@@ -13936,8 +13936,8 @@
         </p:blipFill>
         <p:spPr>
           <a:xfrm>
-            <a:off x="1809096" y="4544899"/>
-            <a:ext cx="2380488" cy="213360"/>
+            <a:off x="1809096" y="4555186"/>
+            <a:ext cx="2377963" cy="214693"/>
           </a:xfrm>
           <a:prstGeom prst="rect">
             <a:avLst/>
@@ -13952,7 +13952,7 @@
         </p:nvSpPr>
         <p:spPr>
           <a:xfrm>
-            <a:off x="4189584" y="4422979"/>
+            <a:off x="4187060" y="4419931"/>
             <a:ext cx="1163085" cy="457200"/>
           </a:xfrm>
           <a:prstGeom prst="rect">
@@ -13981,7 +13981,7 @@
       </p:sp>
       <p:pic>
         <p:nvPicPr>
-          <p:cNvPr id="16" name="Picture 15" descr="5bab4917e6b979c2.png"/>
+          <p:cNvPr id="16" name="Picture 15" descr="447aa636a4e8a62e.png"/>
           <p:cNvPicPr>
             <a:picLocks noChangeAspect="1"/>
           </p:cNvPicPr>
@@ -13995,8 +13995,8 @@
         </p:blipFill>
         <p:spPr>
           <a:xfrm>
-            <a:off x="5215509" y="4523563"/>
-            <a:ext cx="1399032" cy="256032"/>
+            <a:off x="5212985" y="4510847"/>
+            <a:ext cx="1400175" cy="259032"/>
           </a:xfrm>
           <a:prstGeom prst="rect">
             <a:avLst/>
@@ -14011,7 +14011,7 @@
         </p:nvSpPr>
         <p:spPr>
           <a:xfrm>
-            <a:off x="777240" y="4994479"/>
+            <a:off x="777240" y="4991431"/>
             <a:ext cx="10607040" cy="548640"/>
           </a:xfrm>
           <a:prstGeom prst="rect">
@@ -15156,7 +15156,7 @@
                 </a:solidFill>
                 <a:latin typeface="Lexend"/>
               </a:rPr>
-              <a:t>Every skill listed is required, to a SmartScore of 67. Due at the start of the next class.</a:t>
+              <a:t>Every skill listed is required, to a SmartScore of 67. Due by the Unit 4 test.</a:t>
             </a:r>
           </a:p>
         </p:txBody>
@@ -15545,8 +15545,8 @@
         </p:blipFill>
         <p:spPr>
           <a:xfrm>
-            <a:off x="4038202" y="1953370"/>
-            <a:ext cx="1133856" cy="289560"/>
+            <a:off x="4038202" y="1991803"/>
+            <a:ext cx="844486" cy="215661"/>
           </a:xfrm>
           <a:prstGeom prst="rect">
             <a:avLst/>
@@ -15561,7 +15561,7 @@
         </p:nvSpPr>
         <p:spPr>
           <a:xfrm>
-            <a:off x="5172058" y="1869550"/>
+            <a:off x="4882689" y="1869550"/>
             <a:ext cx="285446" cy="457200"/>
           </a:xfrm>
           <a:prstGeom prst="rect">
@@ -15639,8 +15639,8 @@
         </p:blipFill>
         <p:spPr>
           <a:xfrm>
-            <a:off x="2124363" y="2477626"/>
-            <a:ext cx="204216" cy="210312"/>
+            <a:off x="2124363" y="2535459"/>
+            <a:ext cx="152098" cy="156638"/>
           </a:xfrm>
           <a:prstGeom prst="rect">
             <a:avLst/>
@@ -15655,7 +15655,7 @@
         </p:nvSpPr>
         <p:spPr>
           <a:xfrm>
-            <a:off x="2328579" y="2354182"/>
+            <a:off x="2276462" y="2354182"/>
             <a:ext cx="4774100" cy="457200"/>
           </a:xfrm>
           <a:prstGeom prst="rect">
@@ -15698,8 +15698,8 @@
         </p:blipFill>
         <p:spPr>
           <a:xfrm>
-            <a:off x="6965520" y="2479150"/>
-            <a:ext cx="176784" cy="207264"/>
+            <a:off x="6913403" y="2533188"/>
+            <a:ext cx="131667" cy="154368"/>
           </a:xfrm>
           <a:prstGeom prst="rect">
             <a:avLst/>
@@ -15714,7 +15714,7 @@
         </p:nvSpPr>
         <p:spPr>
           <a:xfrm>
-            <a:off x="7142304" y="2354182"/>
+            <a:off x="7045070" y="2354182"/>
             <a:ext cx="1981774" cy="457200"/>
           </a:xfrm>
           <a:prstGeom prst="rect">
@@ -15827,8 +15827,8 @@
         </p:blipFill>
         <p:spPr>
           <a:xfrm>
-            <a:off x="2640665" y="3519644"/>
-            <a:ext cx="204216" cy="210312"/>
+            <a:off x="2640665" y="3577477"/>
+            <a:ext cx="152098" cy="156638"/>
           </a:xfrm>
           <a:prstGeom prst="rect">
             <a:avLst/>
@@ -15843,7 +15843,7 @@
         </p:nvSpPr>
         <p:spPr>
           <a:xfrm>
-            <a:off x="2844881" y="3396200"/>
+            <a:off x="2792763" y="3396200"/>
             <a:ext cx="613512" cy="457200"/>
           </a:xfrm>
           <a:prstGeom prst="rect">
@@ -15886,8 +15886,8 @@
         </p:blipFill>
         <p:spPr>
           <a:xfrm>
-            <a:off x="3321233" y="3480020"/>
-            <a:ext cx="1133856" cy="289560"/>
+            <a:off x="3269116" y="3518454"/>
+            <a:ext cx="844486" cy="215661"/>
           </a:xfrm>
           <a:prstGeom prst="rect">
             <a:avLst/>
@@ -15902,8 +15902,8 @@
         </p:nvSpPr>
         <p:spPr>
           <a:xfrm>
-            <a:off x="4455089" y="3396200"/>
-            <a:ext cx="274456" cy="457200"/>
+            <a:off x="4113602" y="3396200"/>
+            <a:ext cx="5688257" cy="457200"/>
           </a:xfrm>
           <a:prstGeom prst="rect">
             <a:avLst/>
@@ -15924,49 +15924,14 @@
                 </a:solidFill>
                 <a:latin typeface="Lexend"/>
               </a:rPr>
-              <a:t>.</a:t>
-            </a:r>
-          </a:p>
-        </p:txBody>
-      </p:sp>
-      <p:sp>
-        <p:nvSpPr>
-          <p:cNvPr id="23" name="TextBox 22"/>
-          <p:cNvSpPr txBox="1"/>
-          <p:nvPr/>
-        </p:nvSpPr>
-        <p:spPr>
-          <a:xfrm>
-            <a:off x="1143000" y="3880832"/>
-            <a:ext cx="5545331" cy="457200"/>
-          </a:xfrm>
-          <a:prstGeom prst="rect">
-            <a:avLst/>
-          </a:prstGeom>
-          <a:noFill/>
-        </p:spPr>
-        <p:txBody>
-          <a:bodyPr wrap="none" lIns="45720" rIns="45720" tIns="18288" bIns="18288" anchor="ctr">
-            <a:noAutofit/>
-          </a:bodyPr>
-          <a:lstStyle/>
-          <a:p>
-            <a:pPr algn="l"/>
-            <a:r>
-              <a:rPr sz="2090" b="0" i="0">
-                <a:solidFill>
-                  <a:srgbClr val="1A1A1A"/>
-                </a:solidFill>
-                <a:latin typeface="Lexend"/>
-              </a:rPr>
-              <a:t>In a finished answer it always satisfies </a:t>
+              <a:t>. In a finished answer it always satisfies </a:t>
             </a:r>
           </a:p>
         </p:txBody>
       </p:sp>
       <p:pic>
         <p:nvPicPr>
-          <p:cNvPr id="24" name="Picture 23" descr="bfdcfbaf2cf7af24.png"/>
+          <p:cNvPr id="23" name="Picture 22" descr="bfdcfbaf2cf7af24.png"/>
           <p:cNvPicPr>
             <a:picLocks noChangeAspect="1"/>
           </p:cNvPicPr>
@@ -15980,8 +15945,8 @@
         </p:blipFill>
         <p:spPr>
           <a:xfrm>
-            <a:off x="6551171" y="3970748"/>
-            <a:ext cx="1542288" cy="277368"/>
+            <a:off x="9664700" y="3527534"/>
+            <a:ext cx="1148683" cy="206581"/>
           </a:xfrm>
           <a:prstGeom prst="rect">
             <a:avLst/>
@@ -15990,13 +15955,13 @@
       </p:pic>
       <p:sp>
         <p:nvSpPr>
-          <p:cNvPr id="25" name="TextBox 24"/>
-          <p:cNvSpPr txBox="1"/>
-          <p:nvPr/>
-        </p:nvSpPr>
-        <p:spPr>
-          <a:xfrm>
-            <a:off x="777240" y="4516340"/>
+          <p:cNvPr id="24" name="TextBox 23"/>
+          <p:cNvSpPr txBox="1"/>
+          <p:nvPr/>
+        </p:nvSpPr>
+        <p:spPr>
+          <a:xfrm>
+            <a:off x="777240" y="4031708"/>
             <a:ext cx="10607040" cy="429370"/>
           </a:xfrm>
           <a:prstGeom prst="rect">
@@ -16025,13 +15990,13 @@
       </p:sp>
       <p:sp>
         <p:nvSpPr>
-          <p:cNvPr id="26" name="TextBox 25"/>
-          <p:cNvSpPr txBox="1"/>
-          <p:nvPr/>
-        </p:nvSpPr>
-        <p:spPr>
-          <a:xfrm>
-            <a:off x="1143000" y="4945711"/>
+          <p:cNvPr id="25" name="TextBox 24"/>
+          <p:cNvSpPr txBox="1"/>
+          <p:nvPr/>
+        </p:nvSpPr>
+        <p:spPr>
+          <a:xfrm>
+            <a:off x="1143000" y="4461079"/>
             <a:ext cx="10241280" cy="787179"/>
           </a:xfrm>
           <a:prstGeom prst="rect">
@@ -16816,7 +16781,7 @@
         </p:blipFill>
         <p:spPr>
           <a:xfrm>
-            <a:off x="3691127" y="3020568"/>
+            <a:off x="3691127" y="3240405"/>
             <a:ext cx="4779264" cy="350520"/>
           </a:xfrm>
           <a:prstGeom prst="rect">
@@ -16840,7 +16805,7 @@
         </p:blipFill>
         <p:spPr>
           <a:xfrm>
-            <a:off x="2019300" y="3712464"/>
+            <a:off x="2019300" y="3986784"/>
             <a:ext cx="8122920" cy="338328"/>
           </a:xfrm>
           <a:prstGeom prst="rect">
@@ -16856,7 +16821,7 @@
         </p:nvSpPr>
         <p:spPr>
           <a:xfrm>
-            <a:off x="987552" y="4425696"/>
+            <a:off x="987552" y="4937760"/>
             <a:ext cx="10131551" cy="475488"/>
           </a:xfrm>
           <a:prstGeom prst="rect">
@@ -17197,7 +17162,7 @@
         </p:blipFill>
         <p:spPr>
           <a:xfrm>
-            <a:off x="3308604" y="1993392"/>
+            <a:off x="3308604" y="2194560"/>
             <a:ext cx="5544312" cy="414528"/>
           </a:xfrm>
           <a:prstGeom prst="rect">
@@ -17221,7 +17186,7 @@
         </p:blipFill>
         <p:spPr>
           <a:xfrm>
-            <a:off x="2455164" y="2683763"/>
+            <a:off x="2455164" y="2993136"/>
             <a:ext cx="7251192" cy="408432"/>
           </a:xfrm>
           <a:prstGeom prst="rect">
@@ -17237,7 +17202,7 @@
         </p:nvSpPr>
         <p:spPr>
           <a:xfrm>
-            <a:off x="987552" y="3432047"/>
+            <a:off x="987552" y="3944112"/>
             <a:ext cx="10131551" cy="475488"/>
           </a:xfrm>
           <a:prstGeom prst="rect">
@@ -17272,7 +17237,7 @@
         </p:nvSpPr>
         <p:spPr>
           <a:xfrm>
-            <a:off x="987552" y="4163568"/>
+            <a:off x="987552" y="4675632"/>
             <a:ext cx="10131551" cy="950976"/>
           </a:xfrm>
           <a:prstGeom prst="rect">
@@ -17613,7 +17578,7 @@
         </p:blipFill>
         <p:spPr>
           <a:xfrm>
-            <a:off x="4178807" y="1994916"/>
+            <a:off x="4178807" y="1993392"/>
             <a:ext cx="3803904" cy="408432"/>
           </a:xfrm>
           <a:prstGeom prst="rect">
@@ -17637,7 +17602,7 @@
         </p:blipFill>
         <p:spPr>
           <a:xfrm>
-            <a:off x="2702052" y="2682240"/>
+            <a:off x="2702052" y="2679192"/>
             <a:ext cx="6757416" cy="405384"/>
           </a:xfrm>
           <a:prstGeom prst="rect">
@@ -17661,8 +17626,8 @@
         </p:blipFill>
         <p:spPr>
           <a:xfrm>
-            <a:off x="1526347" y="3366516"/>
-            <a:ext cx="5961888" cy="408432"/>
+            <a:off x="1969061" y="3399440"/>
+            <a:ext cx="5247703" cy="359505"/>
           </a:xfrm>
           <a:prstGeom prst="rect">
             <a:avLst/>
@@ -17677,7 +17642,7 @@
         </p:nvSpPr>
         <p:spPr>
           <a:xfrm>
-            <a:off x="7488235" y="3342132"/>
+            <a:off x="7216765" y="3342132"/>
             <a:ext cx="1854584" cy="457200"/>
           </a:xfrm>
           <a:prstGeom prst="rect">
@@ -17720,8 +17685,8 @@
         </p:blipFill>
         <p:spPr>
           <a:xfrm>
-            <a:off x="9205660" y="3401568"/>
-            <a:ext cx="1429512" cy="338328"/>
+            <a:off x="8934189" y="3402123"/>
+            <a:ext cx="1258268" cy="297799"/>
           </a:xfrm>
           <a:prstGeom prst="rect">
             <a:avLst/>
@@ -18042,7 +18007,7 @@
         </p:blipFill>
         <p:spPr>
           <a:xfrm>
-            <a:off x="4187952" y="2104643"/>
+            <a:off x="4187952" y="2103120"/>
             <a:ext cx="3785615" cy="408432"/>
           </a:xfrm>
           <a:prstGeom prst="rect">
